--- a/seminar/slides/세션2_메모리모델과_데이터이동.pptx
+++ b/seminar/slides/세션2_메모리모델과_데이터이동.pptx
@@ -17,9 +17,10 @@
     <p:sldId id="265" r:id="rId11"/>
     <p:sldId id="266" r:id="rId12"/>
     <p:sldId id="267" r:id="rId13"/>
+    <p:sldId id="268" r:id="rId14"/>
   </p:sldIdLst>
   <p:notesMasterIdLst>
-    <p:notesMasterId r:id="rId14"/>
+    <p:notesMasterId r:id="rId15"/>
   </p:notesMasterIdLst>
   <p:sldSz cx="12192000" cy="6858000"/>
   <p:notesSz cx="6858000" cy="12192000"/>
@@ -601,7 +602,7 @@
           <a:p>
             <a:r>
               <a:rPr lang="en-US" dirty="0"/>
-              <a:t>Ex 3(fault injection)이 하이라이트. 실제 불량 칩이 내는 증상을 소프트웨어로 재현한다는 점을 강조. 반드시 원복.</a:t>
+              <a:t>에러 처리와 재시도 루프는 세션 4(에러 핸들링)의 예고편이기도 합니다.</a:t>
             </a:r>
             <a:endParaRPr lang="en-US" dirty="0"/>
           </a:p>
@@ -689,7 +690,7 @@
           <a:p>
             <a:r>
               <a:rPr lang="en-US" dirty="0"/>
-              <a:t>네 가지 목표(슬라이드 2)로 돌아가 자가 점검을 유도하세요.</a:t>
+              <a:t>Ex 3(fault injection)이 하이라이트. 실제 불량 칩이 내는 증상을 소프트웨어로 재현한다는 점을 강조. 반드시 원복.</a:t>
             </a:r>
             <a:endParaRPr lang="en-US" dirty="0"/>
           </a:p>
@@ -777,7 +778,7 @@
           <a:p>
             <a:r>
               <a:rPr lang="en-US" dirty="0"/>
-              <a:t>느린 커널을 충분히 이해했으니, 다음엔 같은 문제를 빠르게 푸는 커널로 성능을 배운다는 흐름.</a:t>
+              <a:t>네 가지 목표(슬라이드 2)로 돌아가 자가 점검을 유도하세요.</a:t>
             </a:r>
             <a:endParaRPr lang="en-US" dirty="0"/>
           </a:p>
@@ -801,6 +802,94 @@
             <a:fld id="{F7021451-1387-4CA6-816F-3879F97B5CBC}" type="slidenum">
               <a:rPr lang="en-US"/>
               <a:t>12</a:t>
+            </a:fld>
+            <a:endParaRPr lang="en-US"/>
+          </a:p>
+        </p:txBody>
+      </p:sp>
+    </p:spTree>
+    <p:extLst>
+      <p:ext uri="{BB962C8B-B14F-4D97-AF65-F5344CB8AC3E}">
+        <p14:creationId xmlns:p14="http://schemas.microsoft.com/office/powerpoint/2010/main" val="1024086991"/>
+      </p:ext>
+    </p:extLst>
+  </p:cSld>
+  <p:clrMapOvr>
+    <a:masterClrMapping/>
+  </p:clrMapOvr>
+</p:notes>
+</file>
+
+<file path=ppt/notesSlides/notesSlide13.xml><?xml version="1.0" encoding="utf-8"?>
+<p:notes xmlns:a="http://schemas.openxmlformats.org/drawingml/2006/main" xmlns:r="http://schemas.openxmlformats.org/officeDocument/2006/relationships" xmlns:p="http://schemas.openxmlformats.org/presentationml/2006/main">
+  <p:cSld>
+    <p:spTree>
+      <p:nvGrpSpPr>
+        <p:cNvPr id="1" name=""/>
+        <p:cNvGrpSpPr/>
+        <p:nvPr/>
+      </p:nvGrpSpPr>
+      <p:grpSpPr>
+        <a:xfrm>
+          <a:off x="0" y="0"/>
+          <a:ext cx="0" cy="0"/>
+          <a:chOff x="0" y="0"/>
+          <a:chExt cx="0" cy="0"/>
+        </a:xfrm>
+      </p:grpSpPr>
+      <p:sp>
+        <p:nvSpPr>
+          <p:cNvPr id="2" name="Slide Image Placeholder 1"/>
+          <p:cNvSpPr>
+            <a:spLocks noGrp="1" noRot="1" noChangeAspect="1"/>
+          </p:cNvSpPr>
+          <p:nvPr>
+            <p:ph type="sldImg"/>
+          </p:nvPr>
+        </p:nvSpPr>
+        <p:spPr/>
+      </p:sp>
+      <p:sp>
+        <p:nvSpPr>
+          <p:cNvPr id="3" name="Notes Placeholder 2"/>
+          <p:cNvSpPr>
+            <a:spLocks noGrp="1"/>
+          </p:cNvSpPr>
+          <p:nvPr>
+            <p:ph type="body" idx="1"/>
+          </p:nvPr>
+        </p:nvSpPr>
+        <p:spPr/>
+        <p:txBody>
+          <a:bodyPr/>
+          <a:lstStyle/>
+          <a:p>
+            <a:r>
+              <a:rPr lang="en-US" dirty="0"/>
+              <a:t>느린 커널을 충분히 이해했으니, 다음엔 같은 문제를 빠르게 푸는 커널로 성능을 배운다는 흐름.</a:t>
+            </a:r>
+            <a:endParaRPr lang="en-US" dirty="0"/>
+          </a:p>
+        </p:txBody>
+      </p:sp>
+      <p:sp>
+        <p:nvSpPr>
+          <p:cNvPr id="4" name="Slide Number Placeholder 3"/>
+          <p:cNvSpPr>
+            <a:spLocks noGrp="1"/>
+          </p:cNvSpPr>
+          <p:nvPr>
+            <p:ph type="sldNum" sz="quarter" idx="10"/>
+          </p:nvPr>
+        </p:nvSpPr>
+        <p:spPr/>
+        <p:txBody>
+          <a:bodyPr/>
+          <a:lstStyle/>
+          <a:p>
+            <a:fld id="{F7021451-1387-4CA6-816F-3879F97B5CBC}" type="slidenum">
+              <a:rPr lang="en-US"/>
+              <a:t>13</a:t>
             </a:fld>
             <a:endParaRPr lang="en-US"/>
           </a:p>
@@ -1041,7 +1130,7 @@
           <a:p>
             <a:r>
               <a:rPr lang="en-US" dirty="0"/>
-              <a:t>cudaMalloc은 (void**)&amp;ptr 이중 포인터가 처음엔 헷갈립니다. '포인터의 주소를 넘겨 GPU 주소를 받아온다'로 설명.</a:t>
+              <a:t>중첩 박스로 '범위'를 시각화. 안쪽=빠르고 작음/좁은 범위, 바깥=느리고 큼/넓은 범위. 전역이 검사 대상.</a:t>
             </a:r>
             <a:endParaRPr lang="en-US" dirty="0"/>
           </a:p>
@@ -1129,7 +1218,7 @@
           <a:p>
             <a:r>
               <a:rPr lang="en-US" dirty="0"/>
-              <a:t>이 슬라이드가 세션 2의 핵심. '커널 종료 = 메모리 반영(flush) 보장'을 각인시키세요.</a:t>
+              <a:t>cudaMalloc은 (void**)&amp;ptr 이중 포인터가 처음엔 헷갈립니다. '포인터의 주소를 넘겨 GPU 주소를 받아온다'로 설명.</a:t>
             </a:r>
             <a:endParaRPr lang="en-US" dirty="0"/>
           </a:p>
@@ -1217,7 +1306,7 @@
           <a:p>
             <a:r>
               <a:rPr lang="en-US" dirty="0"/>
-              <a:t>세 루프가 각각 write/readwrite/read 커널에 대응. Test2는 이 함수를 (p1,p2)와 (p2,p1)로 두 번 부릅니다.</a:t>
+              <a:t>이 슬라이드가 세션 2의 핵심. '커널 종료 = 메모리 반영(flush) 보장'을 각인시키세요.</a:t>
             </a:r>
             <a:endParaRPr lang="en-US" dirty="0"/>
           </a:p>
@@ -1305,7 +1394,7 @@
           <a:p>
             <a:r>
               <a:rPr lang="en-US" dirty="0"/>
-              <a:t>고착(stuck-at) 오류 개념을 비트 그림으로. 왜 한 방향 검사로는 부족한지 강조.</a:t>
+              <a:t>세 루프가 각각 write/readwrite/read 커널에 대응. Test2는 이 함수를 (p1,p2)와 (p2,p1)로 두 번 부릅니다.</a:t>
             </a:r>
             <a:endParaRPr lang="en-US" dirty="0"/>
           </a:p>
@@ -1393,7 +1482,7 @@
           <a:p>
             <a:r>
               <a:rPr lang="en-US" dirty="0"/>
-              <a:t>디바이스 포인터를 호스트에서 역참조하면 안 된다는 점이 입문자 핵심 함정. cudaMemcpy가 다리 역할.</a:t>
+              <a:t>고착(stuck-at) 오류 개념을 비트 그림으로. 왜 한 방향 검사로는 부족한지 강조.</a:t>
             </a:r>
             <a:endParaRPr lang="en-US" dirty="0"/>
           </a:p>
@@ -1481,7 +1570,7 @@
           <a:p>
             <a:r>
               <a:rPr lang="en-US" dirty="0"/>
-              <a:t>에러 처리와 재시도 루프는 세션 4(에러 핸들링)의 예고편이기도 합니다.</a:t>
+              <a:t>디바이스 포인터를 호스트에서 역참조하면 안 된다는 점이 입문자 핵심 함정. cudaMemcpy가 다리 역할.</a:t>
             </a:r>
             <a:endParaRPr lang="en-US" dirty="0"/>
           </a:p>
@@ -2191,7 +2280,7 @@
                 <a:ea typeface="Courier New" pitchFamily="34" charset="-122"/>
                 <a:cs typeface="Courier New" pitchFamily="34" charset="-120"/>
               </a:rPr>
-              <a:t>9</a:t>
+              <a:t>8</a:t>
             </a:r>
             <a:endParaRPr lang="en-US" sz="2200" dirty="0"/>
           </a:p>
@@ -2230,7 +2319,7 @@
                 <a:ea typeface="Malgun Gothic" pitchFamily="34" charset="-122"/>
                 <a:cs typeface="Malgun Gothic" pitchFamily="34" charset="-120"/>
               </a:rPr>
-              <a:t>실습 미리보기 · Lab 2</a:t>
+              <a:t>실전 코드 · 할 수 있는 만큼 할당하기</a:t>
             </a:r>
             <a:endParaRPr lang="en-US" sz="3000" dirty="0"/>
           </a:p>
@@ -2245,17 +2334,22 @@
         <p:spPr>
           <a:xfrm>
             <a:off x="548640" y="1554480"/>
-            <a:ext cx="5303520" cy="1965960"/>
+            <a:ext cx="11064240" cy="2651760"/>
           </a:xfrm>
           <a:prstGeom prst="roundRect">
             <a:avLst>
-              <a:gd name="adj" fmla="val 3721"/>
+              <a:gd name="adj" fmla="val 2069"/>
             </a:avLst>
           </a:prstGeom>
           <a:solidFill>
-            <a:srgbClr val="1E232C"/>
+            <a:srgbClr val="0E1116"/>
           </a:solidFill>
-          <a:ln/>
+          <a:ln w="12700">
+            <a:solidFill>
+              <a:srgbClr val="2C3440"/>
+            </a:solidFill>
+            <a:prstDash val="solid"/>
+          </a:ln>
         </p:spPr>
       </p:sp>
       <p:sp>
@@ -2266,474 +2360,222 @@
         </p:nvSpPr>
         <p:spPr>
           <a:xfrm>
-            <a:off x="804672" y="1755648"/>
-            <a:ext cx="1188720" cy="502920"/>
-          </a:xfrm>
-          <a:prstGeom prst="roundRect">
-            <a:avLst>
-              <a:gd name="adj" fmla="val 14545"/>
-            </a:avLst>
-          </a:prstGeom>
-          <a:solidFill>
-            <a:srgbClr val="8CC63F"/>
-          </a:solidFill>
-          <a:ln/>
-        </p:spPr>
-        <p:txBody>
-          <a:bodyPr wrap="square" rtlCol="0" anchor="ctr"/>
-          <a:lstStyle/>
-          <a:p>
-            <a:pPr algn="ctr" indent="0" marL="0">
-              <a:buNone/>
-            </a:pPr>
-            <a:r>
-              <a:rPr lang="en-US" sz="1700" b="1" dirty="0">
-                <a:solidFill>
-                  <a:srgbClr val="13161C"/>
+            <a:off x="749808" y="1700784"/>
+            <a:ext cx="10661904" cy="2359152"/>
+          </a:xfrm>
+          <a:prstGeom prst="rect">
+            <a:avLst/>
+          </a:prstGeom>
+          <a:noFill/>
+          <a:ln/>
+        </p:spPr>
+        <p:txBody>
+          <a:bodyPr wrap="square" lIns="0" tIns="0" rIns="0" bIns="0" rtlCol="0" anchor="t"/>
+          <a:lstStyle/>
+          <a:p>
+            <a:pPr algn="l" indent="0" marL="0">
+              <a:lnSpc>
+                <a:spcPct val="108000"/>
+              </a:lnSpc>
+              <a:buNone/>
+            </a:pPr>
+            <a:r>
+              <a:rPr lang="en-US" sz="1350" dirty="0">
+                <a:solidFill>
+                  <a:srgbClr val="9AA6B2"/>
                 </a:solidFill>
                 <a:latin typeface="Courier New" pitchFamily="34" charset="0"/>
                 <a:ea typeface="Courier New" pitchFamily="34" charset="-122"/>
                 <a:cs typeface="Courier New" pitchFamily="34" charset="-120"/>
               </a:rPr>
-              <a:t>Ex 1</a:t>
-            </a:r>
-            <a:endParaRPr lang="en-US" sz="1700" dirty="0"/>
-          </a:p>
-        </p:txBody>
-      </p:sp>
-      <p:sp>
-        <p:nvSpPr>
-          <p:cNvPr id="6" name="Text 4"/>
-          <p:cNvSpPr/>
-          <p:nvPr/>
-        </p:nvSpPr>
-        <p:spPr>
-          <a:xfrm>
-            <a:off x="2148840" y="1773936"/>
-            <a:ext cx="3474720" cy="822960"/>
-          </a:xfrm>
-          <a:prstGeom prst="rect">
-            <a:avLst/>
-          </a:prstGeom>
-          <a:noFill/>
-          <a:ln/>
-        </p:spPr>
-        <p:txBody>
-          <a:bodyPr wrap="square" lIns="0" tIns="0" rIns="0" bIns="0" rtlCol="0" anchor="t"/>
-          <a:lstStyle/>
-          <a:p>
-            <a:pPr indent="0" marL="0">
-              <a:buNone/>
-            </a:pPr>
-            <a:r>
-              <a:rPr lang="en-US" sz="1700" b="1" dirty="0">
-                <a:solidFill>
-                  <a:srgbClr val="E8EDF2"/>
-                </a:solidFill>
-                <a:latin typeface="Malgun Gothic" pitchFamily="34" charset="0"/>
-                <a:ea typeface="Malgun Gothic" pitchFamily="34" charset="-122"/>
-                <a:cs typeface="Malgun Gothic" pitchFamily="34" charset="-120"/>
-              </a:rPr>
-              <a:t>세 커널의 협업 보기</a:t>
-            </a:r>
-            <a:endParaRPr lang="en-US" sz="1700" dirty="0"/>
-          </a:p>
-        </p:txBody>
-      </p:sp>
-      <p:sp>
-        <p:nvSpPr>
-          <p:cNvPr id="7" name="Text 5"/>
-          <p:cNvSpPr/>
-          <p:nvPr/>
-        </p:nvSpPr>
-        <p:spPr>
-          <a:xfrm>
-            <a:off x="804672" y="2651760"/>
-            <a:ext cx="4791456" cy="731520"/>
-          </a:xfrm>
-          <a:prstGeom prst="rect">
-            <a:avLst/>
-          </a:prstGeom>
-          <a:noFill/>
-          <a:ln/>
-        </p:spPr>
-        <p:txBody>
-          <a:bodyPr wrap="square" lIns="0" tIns="0" rIns="0" bIns="0" rtlCol="0" anchor="t"/>
-          <a:lstStyle/>
-          <a:p>
-            <a:pPr indent="0" marL="0">
+              <a:t>// cuda_memtest.cpp:157   가용 메모리를 조회하고,</a:t>
+            </a:r>
+            <a:endParaRPr lang="en-US" sz="1350" dirty="0"/>
+          </a:p>
+          <a:p>
+            <a:pPr algn="l" indent="0" marL="0">
               <a:lnSpc>
-                <a:spcPct val="110000"/>
+                <a:spcPct val="108000"/>
               </a:lnSpc>
               <a:buNone/>
             </a:pPr>
             <a:r>
-              <a:rPr lang="en-US" sz="1400" dirty="0">
+              <a:rPr lang="en-US" sz="1350" dirty="0">
                 <a:solidFill>
                   <a:srgbClr val="9AA6B2"/>
-                </a:solidFill>
-                <a:latin typeface="Malgun Gothic" pitchFamily="34" charset="0"/>
-                <a:ea typeface="Malgun Gothic" pitchFamily="34" charset="-122"/>
-                <a:cs typeface="Malgun Gothic" pitchFamily="34" charset="-120"/>
-              </a:rPr>
-              <a:t>--verbose --verbose 로 write→readwrite→read 순서 확인</a:t>
-            </a:r>
-            <a:endParaRPr lang="en-US" sz="1400" dirty="0"/>
-          </a:p>
-        </p:txBody>
-      </p:sp>
-      <p:sp>
-        <p:nvSpPr>
-          <p:cNvPr id="8" name="Shape 6"/>
-          <p:cNvSpPr/>
-          <p:nvPr/>
-        </p:nvSpPr>
-        <p:spPr>
-          <a:xfrm>
-            <a:off x="6309360" y="1554480"/>
-            <a:ext cx="5303520" cy="1965960"/>
-          </a:xfrm>
-          <a:prstGeom prst="roundRect">
-            <a:avLst>
-              <a:gd name="adj" fmla="val 3721"/>
-            </a:avLst>
-          </a:prstGeom>
-          <a:solidFill>
-            <a:srgbClr val="1E232C"/>
-          </a:solidFill>
-          <a:ln/>
-        </p:spPr>
-      </p:sp>
-      <p:sp>
-        <p:nvSpPr>
-          <p:cNvPr id="9" name="Text 7"/>
-          <p:cNvSpPr/>
-          <p:nvPr/>
-        </p:nvSpPr>
-        <p:spPr>
-          <a:xfrm>
-            <a:off x="6565392" y="1755648"/>
-            <a:ext cx="1188720" cy="502920"/>
-          </a:xfrm>
-          <a:prstGeom prst="roundRect">
-            <a:avLst>
-              <a:gd name="adj" fmla="val 14545"/>
-            </a:avLst>
-          </a:prstGeom>
-          <a:solidFill>
-            <a:srgbClr val="4FB0C6"/>
-          </a:solidFill>
-          <a:ln/>
-        </p:spPr>
-        <p:txBody>
-          <a:bodyPr wrap="square" rtlCol="0" anchor="ctr"/>
-          <a:lstStyle/>
-          <a:p>
-            <a:pPr algn="ctr" indent="0" marL="0">
-              <a:buNone/>
-            </a:pPr>
-            <a:r>
-              <a:rPr lang="en-US" sz="1700" b="1" dirty="0">
-                <a:solidFill>
-                  <a:srgbClr val="13161C"/>
                 </a:solidFill>
                 <a:latin typeface="Courier New" pitchFamily="34" charset="0"/>
                 <a:ea typeface="Courier New" pitchFamily="34" charset="-122"/>
                 <a:cs typeface="Courier New" pitchFamily="34" charset="-120"/>
               </a:rPr>
-              <a:t>Ex 2</a:t>
-            </a:r>
-            <a:endParaRPr lang="en-US" sz="1700" dirty="0"/>
-          </a:p>
-        </p:txBody>
-      </p:sp>
-      <p:sp>
-        <p:nvSpPr>
-          <p:cNvPr id="10" name="Text 8"/>
-          <p:cNvSpPr/>
-          <p:nvPr/>
-        </p:nvSpPr>
-        <p:spPr>
-          <a:xfrm>
-            <a:off x="7909560" y="1773936"/>
-            <a:ext cx="3474720" cy="822960"/>
-          </a:xfrm>
-          <a:prstGeom prst="rect">
-            <a:avLst/>
-          </a:prstGeom>
-          <a:noFill/>
-          <a:ln/>
-        </p:spPr>
-        <p:txBody>
-          <a:bodyPr wrap="square" lIns="0" tIns="0" rIns="0" bIns="0" rtlCol="0" anchor="t"/>
-          <a:lstStyle/>
-          <a:p>
-            <a:pPr indent="0" marL="0">
-              <a:buNone/>
-            </a:pPr>
-            <a:r>
-              <a:rPr lang="en-US" sz="1700" b="1" dirty="0">
+              <a:t>// 할당 실패하면 블록을 하나씩 줄여 재시도한다</a:t>
+            </a:r>
+            <a:endParaRPr lang="en-US" sz="1350" dirty="0"/>
+          </a:p>
+          <a:p>
+            <a:pPr algn="l" indent="0" marL="0">
+              <a:lnSpc>
+                <a:spcPct val="108000"/>
+              </a:lnSpc>
+              <a:buNone/>
+            </a:pPr>
+            <a:r>
+              <a:rPr lang="en-US" sz="1350" dirty="0">
                 <a:solidFill>
                   <a:srgbClr val="E8EDF2"/>
-                </a:solidFill>
-                <a:latin typeface="Malgun Gothic" pitchFamily="34" charset="0"/>
-                <a:ea typeface="Malgun Gothic" pitchFamily="34" charset="-122"/>
-                <a:cs typeface="Malgun Gothic" pitchFamily="34" charset="-120"/>
-              </a:rPr>
-              <a:t>오류가 CPU로 돌아오는 길</a:t>
-            </a:r>
-            <a:endParaRPr lang="en-US" sz="1700" dirty="0"/>
-          </a:p>
-        </p:txBody>
-      </p:sp>
-      <p:sp>
-        <p:nvSpPr>
-          <p:cNvPr id="11" name="Text 9"/>
-          <p:cNvSpPr/>
-          <p:nvPr/>
-        </p:nvSpPr>
-        <p:spPr>
-          <a:xfrm>
-            <a:off x="6565392" y="2651760"/>
-            <a:ext cx="4791456" cy="731520"/>
-          </a:xfrm>
-          <a:prstGeom prst="rect">
-            <a:avLst/>
-          </a:prstGeom>
-          <a:noFill/>
-          <a:ln/>
-        </p:spPr>
-        <p:txBody>
-          <a:bodyPr wrap="square" lIns="0" tIns="0" rIns="0" bIns="0" rtlCol="0" anchor="t"/>
-          <a:lstStyle/>
-          <a:p>
-            <a:pPr indent="0" marL="0">
-              <a:lnSpc>
-                <a:spcPct val="110000"/>
-              </a:lnSpc>
-              <a:buNone/>
-            </a:pPr>
-            <a:r>
-              <a:rPr lang="en-US" sz="1400" dirty="0">
-                <a:solidFill>
-                  <a:srgbClr val="9AA6B2"/>
-                </a:solidFill>
-                <a:latin typeface="Malgun Gothic" pitchFamily="34" charset="0"/>
-                <a:ea typeface="Malgun Gothic" pitchFamily="34" charset="-122"/>
-                <a:cs typeface="Malgun Gothic" pitchFamily="34" charset="-120"/>
-              </a:rPr>
-              <a:t>error_checking의 cudaMemcpy 직후 출력 추가</a:t>
-            </a:r>
-            <a:endParaRPr lang="en-US" sz="1400" dirty="0"/>
-          </a:p>
-        </p:txBody>
-      </p:sp>
-      <p:sp>
-        <p:nvSpPr>
-          <p:cNvPr id="12" name="Shape 10"/>
-          <p:cNvSpPr/>
-          <p:nvPr/>
-        </p:nvSpPr>
-        <p:spPr>
-          <a:xfrm>
-            <a:off x="548640" y="3840480"/>
-            <a:ext cx="5303520" cy="1965960"/>
-          </a:xfrm>
-          <a:prstGeom prst="roundRect">
-            <a:avLst>
-              <a:gd name="adj" fmla="val 3721"/>
-            </a:avLst>
-          </a:prstGeom>
-          <a:solidFill>
-            <a:srgbClr val="1E232C"/>
-          </a:solidFill>
-          <a:ln/>
-        </p:spPr>
-      </p:sp>
-      <p:sp>
-        <p:nvSpPr>
-          <p:cNvPr id="13" name="Text 11"/>
-          <p:cNvSpPr/>
-          <p:nvPr/>
-        </p:nvSpPr>
-        <p:spPr>
-          <a:xfrm>
-            <a:off x="804672" y="4041648"/>
-            <a:ext cx="1188720" cy="502920"/>
-          </a:xfrm>
-          <a:prstGeom prst="roundRect">
-            <a:avLst>
-              <a:gd name="adj" fmla="val 14545"/>
-            </a:avLst>
-          </a:prstGeom>
-          <a:solidFill>
-            <a:srgbClr val="E0A458"/>
-          </a:solidFill>
-          <a:ln/>
-        </p:spPr>
-        <p:txBody>
-          <a:bodyPr wrap="square" rtlCol="0" anchor="ctr"/>
-          <a:lstStyle/>
-          <a:p>
-            <a:pPr algn="ctr" indent="0" marL="0">
-              <a:buNone/>
-            </a:pPr>
-            <a:r>
-              <a:rPr lang="en-US" sz="1700" b="1" dirty="0">
-                <a:solidFill>
-                  <a:srgbClr val="13161C"/>
                 </a:solidFill>
                 <a:latin typeface="Courier New" pitchFamily="34" charset="0"/>
                 <a:ea typeface="Courier New" pitchFamily="34" charset="-122"/>
                 <a:cs typeface="Courier New" pitchFamily="34" charset="-120"/>
               </a:rPr>
-              <a:t>Ex 3</a:t>
-            </a:r>
-            <a:endParaRPr lang="en-US" sz="1700" dirty="0"/>
-          </a:p>
-        </p:txBody>
-      </p:sp>
-      <p:sp>
-        <p:nvSpPr>
-          <p:cNvPr id="14" name="Text 12"/>
-          <p:cNvSpPr/>
-          <p:nvPr/>
-        </p:nvSpPr>
-        <p:spPr>
-          <a:xfrm>
-            <a:off x="2148840" y="4059936"/>
-            <a:ext cx="3474720" cy="822960"/>
-          </a:xfrm>
-          <a:prstGeom prst="rect">
-            <a:avLst/>
-          </a:prstGeom>
-          <a:noFill/>
-          <a:ln/>
-        </p:spPr>
-        <p:txBody>
-          <a:bodyPr wrap="square" lIns="0" tIns="0" rIns="0" bIns="0" rtlCol="0" anchor="t"/>
-          <a:lstStyle/>
-          <a:p>
-            <a:pPr indent="0" marL="0">
-              <a:buNone/>
-            </a:pPr>
-            <a:r>
-              <a:rPr lang="en-US" sz="1700" b="1" dirty="0">
+              <a:t>tot_num_blocks = free / BLOCKSIZE;</a:t>
+            </a:r>
+            <a:endParaRPr lang="en-US" sz="1350" dirty="0"/>
+          </a:p>
+          <a:p>
+            <a:pPr algn="l" indent="0" marL="0">
+              <a:lnSpc>
+                <a:spcPct val="108000"/>
+              </a:lnSpc>
+              <a:buNone/>
+            </a:pPr>
+            <a:r>
+              <a:rPr lang="en-US" sz="1350" dirty="0">
                 <a:solidFill>
                   <a:srgbClr val="E8EDF2"/>
-                </a:solidFill>
-                <a:latin typeface="Malgun Gothic" pitchFamily="34" charset="0"/>
-                <a:ea typeface="Malgun Gothic" pitchFamily="34" charset="-122"/>
-                <a:cs typeface="Malgun Gothic" pitchFamily="34" charset="-120"/>
-              </a:rPr>
-              <a:t>메모리를 훼손해 오류 재현</a:t>
-            </a:r>
-            <a:endParaRPr lang="en-US" sz="1700" dirty="0"/>
-          </a:p>
-        </p:txBody>
-      </p:sp>
-      <p:sp>
-        <p:nvSpPr>
-          <p:cNvPr id="15" name="Text 13"/>
-          <p:cNvSpPr/>
-          <p:nvPr/>
-        </p:nvSpPr>
-        <p:spPr>
-          <a:xfrm>
-            <a:off x="804672" y="4937760"/>
-            <a:ext cx="4791456" cy="731520"/>
-          </a:xfrm>
-          <a:prstGeom prst="rect">
-            <a:avLst/>
-          </a:prstGeom>
-          <a:noFill/>
-          <a:ln/>
-        </p:spPr>
-        <p:txBody>
-          <a:bodyPr wrap="square" lIns="0" tIns="0" rIns="0" bIns="0" rtlCol="0" anchor="t"/>
-          <a:lstStyle/>
-          <a:p>
-            <a:pPr indent="0" marL="0">
-              <a:lnSpc>
-                <a:spcPct val="110000"/>
-              </a:lnSpc>
-              <a:buNone/>
-            </a:pPr>
-            <a:r>
-              <a:rPr lang="en-US" sz="1400" dirty="0">
-                <a:solidFill>
-                  <a:srgbClr val="9AA6B2"/>
-                </a:solidFill>
-                <a:latin typeface="Malgun Gothic" pitchFamily="34" charset="0"/>
-                <a:ea typeface="Malgun Gothic" pitchFamily="34" charset="-122"/>
-                <a:cs typeface="Malgun Gothic" pitchFamily="34" charset="-120"/>
-              </a:rPr>
-              <a:t>읽기 커널에서 비트 하나를 뒤집어 검출 확인</a:t>
-            </a:r>
-            <a:endParaRPr lang="en-US" sz="1400" dirty="0"/>
-          </a:p>
-        </p:txBody>
-      </p:sp>
-      <p:sp>
-        <p:nvSpPr>
-          <p:cNvPr id="16" name="Shape 14"/>
-          <p:cNvSpPr/>
-          <p:nvPr/>
-        </p:nvSpPr>
-        <p:spPr>
-          <a:xfrm>
-            <a:off x="6309360" y="3840480"/>
-            <a:ext cx="5303520" cy="1965960"/>
-          </a:xfrm>
-          <a:prstGeom prst="roundRect">
-            <a:avLst>
-              <a:gd name="adj" fmla="val 3721"/>
-            </a:avLst>
-          </a:prstGeom>
-          <a:solidFill>
-            <a:srgbClr val="1E232C"/>
-          </a:solidFill>
-          <a:ln/>
-        </p:spPr>
-      </p:sp>
-      <p:sp>
-        <p:nvSpPr>
-          <p:cNvPr id="17" name="Text 15"/>
-          <p:cNvSpPr/>
-          <p:nvPr/>
-        </p:nvSpPr>
-        <p:spPr>
-          <a:xfrm>
-            <a:off x="6565392" y="4041648"/>
-            <a:ext cx="1188720" cy="502920"/>
-          </a:xfrm>
-          <a:prstGeom prst="roundRect">
-            <a:avLst>
-              <a:gd name="adj" fmla="val 14545"/>
-            </a:avLst>
-          </a:prstGeom>
-          <a:solidFill>
-            <a:srgbClr val="8CC63F"/>
-          </a:solidFill>
-          <a:ln/>
-        </p:spPr>
-        <p:txBody>
-          <a:bodyPr wrap="square" rtlCol="0" anchor="ctr"/>
-          <a:lstStyle/>
-          <a:p>
-            <a:pPr algn="ctr" indent="0" marL="0">
-              <a:buNone/>
-            </a:pPr>
-            <a:r>
-              <a:rPr lang="en-US" sz="1700" b="1" dirty="0">
-                <a:solidFill>
-                  <a:srgbClr val="13161C"/>
                 </a:solidFill>
                 <a:latin typeface="Courier New" pitchFamily="34" charset="0"/>
                 <a:ea typeface="Courier New" pitchFamily="34" charset="-122"/>
                 <a:cs typeface="Courier New" pitchFamily="34" charset="-120"/>
               </a:rPr>
-              <a:t>Ex 4</a:t>
+              <a:t>do {</a:t>
+            </a:r>
+            <a:endParaRPr lang="en-US" sz="1350" dirty="0"/>
+          </a:p>
+          <a:p>
+            <a:pPr algn="l" indent="0" marL="0">
+              <a:lnSpc>
+                <a:spcPct val="108000"/>
+              </a:lnSpc>
+              <a:buNone/>
+            </a:pPr>
+            <a:r>
+              <a:rPr lang="en-US" sz="1350" dirty="0">
+                <a:solidFill>
+                  <a:srgbClr val="8CC63F"/>
+                </a:solidFill>
+                <a:latin typeface="Courier New" pitchFamily="34" charset="0"/>
+                <a:ea typeface="Courier New" pitchFamily="34" charset="-122"/>
+                <a:cs typeface="Courier New" pitchFamily="34" charset="-120"/>
+              </a:rPr>
+              <a:t>    err = cudaMalloc(&amp;ptr, tot_num_blocks * BLOCKSIZE);</a:t>
+            </a:r>
+            <a:endParaRPr lang="en-US" sz="1350" dirty="0"/>
+          </a:p>
+          <a:p>
+            <a:pPr algn="l" indent="0" marL="0">
+              <a:lnSpc>
+                <a:spcPct val="108000"/>
+              </a:lnSpc>
+              <a:buNone/>
+            </a:pPr>
+            <a:r>
+              <a:rPr lang="en-US" sz="1350" dirty="0">
+                <a:solidFill>
+                  <a:srgbClr val="E0A458"/>
+                </a:solidFill>
+                <a:latin typeface="Courier New" pitchFamily="34" charset="0"/>
+                <a:ea typeface="Courier New" pitchFamily="34" charset="-122"/>
+                <a:cs typeface="Courier New" pitchFamily="34" charset="-120"/>
+              </a:rPr>
+              <a:t>    if (err != cudaSuccess) --tot_num_blocks;   // 줄여서 재시도</a:t>
+            </a:r>
+            <a:endParaRPr lang="en-US" sz="1350" dirty="0"/>
+          </a:p>
+          <a:p>
+            <a:pPr algn="l" indent="0" marL="0">
+              <a:lnSpc>
+                <a:spcPct val="108000"/>
+              </a:lnSpc>
+              <a:buNone/>
+            </a:pPr>
+            <a:r>
+              <a:rPr lang="en-US" sz="1350" dirty="0">
+                <a:solidFill>
+                  <a:srgbClr val="E8EDF2"/>
+                </a:solidFill>
+                <a:latin typeface="Courier New" pitchFamily="34" charset="0"/>
+                <a:ea typeface="Courier New" pitchFamily="34" charset="-122"/>
+                <a:cs typeface="Courier New" pitchFamily="34" charset="-120"/>
+              </a:rPr>
+              <a:t>} while (cudaGetLastError() != cudaSuccess);</a:t>
+            </a:r>
+            <a:endParaRPr lang="en-US" sz="1350" dirty="0"/>
+          </a:p>
+        </p:txBody>
+      </p:sp>
+      <p:sp>
+        <p:nvSpPr>
+          <p:cNvPr id="6" name="Text 4"/>
+          <p:cNvSpPr/>
+          <p:nvPr/>
+        </p:nvSpPr>
+        <p:spPr>
+          <a:xfrm>
+            <a:off x="548640" y="4434840"/>
+            <a:ext cx="11064240" cy="914400"/>
+          </a:xfrm>
+          <a:prstGeom prst="rect">
+            <a:avLst/>
+          </a:prstGeom>
+          <a:noFill/>
+          <a:ln/>
+        </p:spPr>
+        <p:txBody>
+          <a:bodyPr wrap="square" lIns="0" tIns="0" rIns="0" bIns="0" rtlCol="0" anchor="t"/>
+          <a:lstStyle/>
+          <a:p>
+            <a:pPr indent="0" marL="0">
+              <a:buNone/>
+            </a:pPr>
+            <a:r>
+              <a:rPr lang="en-US" sz="1700" dirty="0">
+                <a:solidFill>
+                  <a:srgbClr val="E8EDF2"/>
+                </a:solidFill>
+                <a:latin typeface="Malgun Gothic" pitchFamily="34" charset="0"/>
+                <a:ea typeface="Malgun Gothic" pitchFamily="34" charset="-122"/>
+                <a:cs typeface="Malgun Gothic" pitchFamily="34" charset="-120"/>
+              </a:rPr>
+              <a:t>드라이버가 보고한 여유 메모리를 다 할당하지 못할 때가 있습니다. 실전 코드는 </a:t>
+            </a:r>
+            <a:pPr indent="0" marL="0">
+              <a:buNone/>
+            </a:pPr>
+            <a:r>
+              <a:rPr lang="en-US" sz="1700" b="1" dirty="0">
+                <a:solidFill>
+                  <a:srgbClr val="8CC63F"/>
+                </a:solidFill>
+                <a:latin typeface="Malgun Gothic" pitchFamily="34" charset="0"/>
+                <a:ea typeface="Malgun Gothic" pitchFamily="34" charset="-122"/>
+                <a:cs typeface="Malgun Gothic" pitchFamily="34" charset="-120"/>
+              </a:rPr>
+              <a:t>실패를 가정하고 우아하게 물러섭니다</a:t>
+            </a:r>
+            <a:pPr indent="0" marL="0">
+              <a:buNone/>
+            </a:pPr>
+            <a:r>
+              <a:rPr lang="en-US" sz="1700" dirty="0">
+                <a:solidFill>
+                  <a:srgbClr val="E8EDF2"/>
+                </a:solidFill>
+                <a:latin typeface="Malgun Gothic" pitchFamily="34" charset="0"/>
+                <a:ea typeface="Malgun Gothic" pitchFamily="34" charset="-122"/>
+                <a:cs typeface="Malgun Gothic" pitchFamily="34" charset="-120"/>
+              </a:rPr>
+              <a:t>. 장난감 예제와 프로덕션 코드의 차이입니다.</a:t>
             </a:r>
             <a:endParaRPr lang="en-US" sz="1700" dirty="0"/>
           </a:p>
@@ -2741,72 +2583,30 @@
       </p:sp>
       <p:sp>
         <p:nvSpPr>
-          <p:cNvPr id="18" name="Text 16"/>
-          <p:cNvSpPr/>
-          <p:nvPr/>
-        </p:nvSpPr>
-        <p:spPr>
-          <a:xfrm>
-            <a:off x="7909560" y="4059936"/>
-            <a:ext cx="3474720" cy="822960"/>
-          </a:xfrm>
-          <a:prstGeom prst="rect">
-            <a:avLst/>
-          </a:prstGeom>
-          <a:noFill/>
-          <a:ln/>
-        </p:spPr>
-        <p:txBody>
-          <a:bodyPr wrap="square" lIns="0" tIns="0" rIns="0" bIns="0" rtlCol="0" anchor="t"/>
+          <p:cNvPr id="7" name="Text 5"/>
+          <p:cNvSpPr/>
+          <p:nvPr/>
+        </p:nvSpPr>
+        <p:spPr>
+          <a:xfrm>
+            <a:off x="548640" y="5486400"/>
+            <a:ext cx="11064240" cy="457200"/>
+          </a:xfrm>
+          <a:prstGeom prst="rect">
+            <a:avLst/>
+          </a:prstGeom>
+          <a:noFill/>
+          <a:ln/>
+        </p:spPr>
+        <p:txBody>
+          <a:bodyPr wrap="square" lIns="0" tIns="0" rIns="0" bIns="0" rtlCol="0" anchor="ctr"/>
           <a:lstStyle/>
           <a:p>
             <a:pPr indent="0" marL="0">
               <a:buNone/>
             </a:pPr>
             <a:r>
-              <a:rPr lang="en-US" sz="1700" b="1" dirty="0">
-                <a:solidFill>
-                  <a:srgbClr val="E8EDF2"/>
-                </a:solidFill>
-                <a:latin typeface="Malgun Gothic" pitchFamily="34" charset="0"/>
-                <a:ea typeface="Malgun Gothic" pitchFamily="34" charset="-122"/>
-                <a:cs typeface="Malgun Gothic" pitchFamily="34" charset="-120"/>
-              </a:rPr>
-              <a:t>디바이스 버퍼 할당 보기</a:t>
-            </a:r>
-            <a:endParaRPr lang="en-US" sz="1700" dirty="0"/>
-          </a:p>
-        </p:txBody>
-      </p:sp>
-      <p:sp>
-        <p:nvSpPr>
-          <p:cNvPr id="19" name="Text 17"/>
-          <p:cNvSpPr/>
-          <p:nvPr/>
-        </p:nvSpPr>
-        <p:spPr>
-          <a:xfrm>
-            <a:off x="6565392" y="4937760"/>
-            <a:ext cx="4791456" cy="731520"/>
-          </a:xfrm>
-          <a:prstGeom prst="rect">
-            <a:avLst/>
-          </a:prstGeom>
-          <a:noFill/>
-          <a:ln/>
-        </p:spPr>
-        <p:txBody>
-          <a:bodyPr wrap="square" lIns="0" tIns="0" rIns="0" bIns="0" rtlCol="0" anchor="t"/>
-          <a:lstStyle/>
-          <a:p>
-            <a:pPr indent="0" marL="0">
-              <a:lnSpc>
-                <a:spcPct val="110000"/>
-              </a:lnSpc>
-              <a:buNone/>
-            </a:pPr>
-            <a:r>
-              <a:rPr lang="en-US" sz="1400" dirty="0">
+              <a:rPr lang="en-US" sz="1400" i="1" dirty="0">
                 <a:solidFill>
                   <a:srgbClr val="9AA6B2"/>
                 </a:solidFill>
@@ -2814,7 +2614,7 @@
                 <a:ea typeface="Malgun Gothic" pitchFamily="34" charset="-122"/>
                 <a:cs typeface="Malgun Gothic" pitchFamily="34" charset="-120"/>
               </a:rPr>
-              <a:t>allocate_small_mem의 cudaMalloc/Memset 관찰</a:t>
+              <a:t>cudaMemGetInfo로 여유 메모리를 조회 → BLOCKSIZE(1 MB)로 나눠 블록 수 결정.</a:t>
             </a:r>
             <a:endParaRPr lang="en-US" sz="1400" dirty="0"/>
           </a:p>
@@ -2889,7 +2689,7 @@
                 <a:ea typeface="Courier New" pitchFamily="34" charset="-122"/>
                 <a:cs typeface="Courier New" pitchFamily="34" charset="-120"/>
               </a:rPr>
-              <a:t>10</a:t>
+              <a:t>9</a:t>
             </a:r>
             <a:endParaRPr lang="en-US" sz="2200" dirty="0"/>
           </a:p>
@@ -2928,7 +2728,7 @@
                 <a:ea typeface="Malgun Gothic" pitchFamily="34" charset="-122"/>
                 <a:cs typeface="Malgun Gothic" pitchFamily="34" charset="-120"/>
               </a:rPr>
-              <a:t>핵심 정리 &amp; 자주 하는 실수</a:t>
+              <a:t>실습 미리보기 · Lab 2</a:t>
             </a:r>
             <a:endParaRPr lang="en-US" sz="3000" dirty="0"/>
           </a:p>
@@ -2942,12 +2742,12 @@
         </p:nvSpPr>
         <p:spPr>
           <a:xfrm>
-            <a:off x="548640" y="1600200"/>
-            <a:ext cx="5349240" cy="4114800"/>
+            <a:off x="548640" y="1554480"/>
+            <a:ext cx="5303520" cy="1965960"/>
           </a:xfrm>
           <a:prstGeom prst="roundRect">
             <a:avLst>
-              <a:gd name="adj" fmla="val 1778"/>
+              <a:gd name="adj" fmla="val 3721"/>
             </a:avLst>
           </a:prstGeom>
           <a:solidFill>
@@ -2964,154 +2764,136 @@
         </p:nvSpPr>
         <p:spPr>
           <a:xfrm>
-            <a:off x="822960" y="1828800"/>
-            <a:ext cx="4800600" cy="457200"/>
-          </a:xfrm>
-          <a:prstGeom prst="rect">
-            <a:avLst/>
-          </a:prstGeom>
-          <a:noFill/>
-          <a:ln/>
-        </p:spPr>
-        <p:txBody>
-          <a:bodyPr wrap="square" lIns="0" tIns="0" rIns="0" bIns="0" rtlCol="0" anchor="ctr"/>
-          <a:lstStyle/>
-          <a:p>
-            <a:pPr indent="0" marL="0">
-              <a:buNone/>
-            </a:pPr>
-            <a:r>
-              <a:rPr lang="en-US" sz="2000" b="1" dirty="0">
-                <a:solidFill>
-                  <a:srgbClr val="8CC63F"/>
-                </a:solidFill>
-                <a:latin typeface="Malgun Gothic" pitchFamily="34" charset="0"/>
-                <a:ea typeface="Malgun Gothic" pitchFamily="34" charset="-122"/>
-                <a:cs typeface="Malgun Gothic" pitchFamily="34" charset="-120"/>
-              </a:rPr>
-              <a:t>기억할 것</a:t>
-            </a:r>
-            <a:endParaRPr lang="en-US" sz="2000" dirty="0"/>
-          </a:p>
-        </p:txBody>
-      </p:sp>
-      <p:sp>
-        <p:nvSpPr>
-          <p:cNvPr id="6" name="Text 4"/>
-          <p:cNvSpPr/>
-          <p:nvPr/>
-        </p:nvSpPr>
-        <p:spPr>
-          <a:xfrm>
-            <a:off x="822960" y="2423160"/>
-            <a:ext cx="4800600" cy="3108960"/>
-          </a:xfrm>
-          <a:prstGeom prst="rect">
-            <a:avLst/>
-          </a:prstGeom>
-          <a:noFill/>
-          <a:ln/>
-        </p:spPr>
-        <p:txBody>
-          <a:bodyPr wrap="square" lIns="0" tIns="0" rIns="0" bIns="0" rtlCol="0" anchor="t"/>
-          <a:lstStyle/>
-          <a:p>
-            <a:pPr marL="342900" indent="-342900">
-              <a:spcAft>
-                <a:spcPts val="1200"/>
-              </a:spcAft>
-              <a:buSzPct val="100000"/>
-              <a:buChar char="✓"/>
-            </a:pPr>
-            <a:r>
-              <a:rPr lang="en-US" sz="1550" dirty="0">
-                <a:solidFill>
-                  <a:srgbClr val="E8EDF2"/>
-                </a:solidFill>
-                <a:latin typeface="Malgun Gothic" pitchFamily="34" charset="0"/>
-                <a:ea typeface="Malgun Gothic" pitchFamily="34" charset="-122"/>
-                <a:cs typeface="Malgun Gothic" pitchFamily="34" charset="-120"/>
-              </a:rPr>
-              <a:t>Malloc(할당)·Memset(초기화)·Memcpy(복사)</a:t>
-            </a:r>
-            <a:endParaRPr lang="en-US" sz="1550" dirty="0"/>
-          </a:p>
-          <a:p>
-            <a:pPr marL="342900" indent="-342900">
-              <a:spcAft>
-                <a:spcPts val="1200"/>
-              </a:spcAft>
-              <a:buSzPct val="100000"/>
-              <a:buChar char="✓"/>
-            </a:pPr>
-            <a:r>
-              <a:rPr lang="en-US" sz="1550" dirty="0">
-                <a:solidFill>
-                  <a:srgbClr val="E8EDF2"/>
-                </a:solidFill>
-                <a:latin typeface="Malgun Gothic" pitchFamily="34" charset="0"/>
-                <a:ea typeface="Malgun Gothic" pitchFamily="34" charset="-122"/>
-                <a:cs typeface="Malgun Gothic" pitchFamily="34" charset="-120"/>
-              </a:rPr>
-              <a:t>Memcpy 방향: DeviceToHost = GPU→CPU</a:t>
-            </a:r>
-            <a:endParaRPr lang="en-US" sz="1550" dirty="0"/>
-          </a:p>
-          <a:p>
-            <a:pPr marL="342900" indent="-342900">
-              <a:spcAft>
-                <a:spcPts val="1200"/>
-              </a:spcAft>
-              <a:buSzPct val="100000"/>
-              <a:buChar char="✓"/>
-            </a:pPr>
-            <a:r>
-              <a:rPr lang="en-US" sz="1550" dirty="0">
-                <a:solidFill>
-                  <a:srgbClr val="E8EDF2"/>
-                </a:solidFill>
-                <a:latin typeface="Malgun Gothic" pitchFamily="34" charset="0"/>
-                <a:ea typeface="Malgun Gothic" pitchFamily="34" charset="-122"/>
-                <a:cs typeface="Malgun Gothic" pitchFamily="34" charset="-120"/>
-              </a:rPr>
-              <a:t>쓰기 커널 종료 = 메모리 반영 보장</a:t>
-            </a:r>
-            <a:endParaRPr lang="en-US" sz="1550" dirty="0"/>
-          </a:p>
-          <a:p>
-            <a:pPr marL="342900" indent="-342900">
-              <a:buSzPct val="100000"/>
-              <a:buChar char="✓"/>
-            </a:pPr>
-            <a:r>
-              <a:rPr lang="en-US" sz="1550" dirty="0">
-                <a:solidFill>
-                  <a:srgbClr val="E8EDF2"/>
-                </a:solidFill>
-                <a:latin typeface="Malgun Gothic" pitchFamily="34" charset="0"/>
-                <a:ea typeface="Malgun Gothic" pitchFamily="34" charset="-122"/>
-                <a:cs typeface="Malgun Gothic" pitchFamily="34" charset="-120"/>
-              </a:rPr>
-              <a:t>이동 반전: p1 → p2(보수) 양방향 검사</a:t>
-            </a:r>
-            <a:endParaRPr lang="en-US" sz="1550" dirty="0"/>
-          </a:p>
-        </p:txBody>
-      </p:sp>
-      <p:sp>
-        <p:nvSpPr>
-          <p:cNvPr id="7" name="Shape 5"/>
-          <p:cNvSpPr/>
-          <p:nvPr/>
-        </p:nvSpPr>
-        <p:spPr>
-          <a:xfrm>
-            <a:off x="6263640" y="1600200"/>
-            <a:ext cx="5349240" cy="4114800"/>
+            <a:off x="804672" y="1755648"/>
+            <a:ext cx="1188720" cy="502920"/>
           </a:xfrm>
           <a:prstGeom prst="roundRect">
             <a:avLst>
-              <a:gd name="adj" fmla="val 1778"/>
+              <a:gd name="adj" fmla="val 14545"/>
+            </a:avLst>
+          </a:prstGeom>
+          <a:solidFill>
+            <a:srgbClr val="8CC63F"/>
+          </a:solidFill>
+          <a:ln/>
+        </p:spPr>
+        <p:txBody>
+          <a:bodyPr wrap="square" rtlCol="0" anchor="ctr"/>
+          <a:lstStyle/>
+          <a:p>
+            <a:pPr algn="ctr" indent="0" marL="0">
+              <a:buNone/>
+            </a:pPr>
+            <a:r>
+              <a:rPr lang="en-US" sz="1700" b="1" dirty="0">
+                <a:solidFill>
+                  <a:srgbClr val="13161C"/>
+                </a:solidFill>
+                <a:latin typeface="Courier New" pitchFamily="34" charset="0"/>
+                <a:ea typeface="Courier New" pitchFamily="34" charset="-122"/>
+                <a:cs typeface="Courier New" pitchFamily="34" charset="-120"/>
+              </a:rPr>
+              <a:t>Ex 1</a:t>
+            </a:r>
+            <a:endParaRPr lang="en-US" sz="1700" dirty="0"/>
+          </a:p>
+        </p:txBody>
+      </p:sp>
+      <p:sp>
+        <p:nvSpPr>
+          <p:cNvPr id="6" name="Text 4"/>
+          <p:cNvSpPr/>
+          <p:nvPr/>
+        </p:nvSpPr>
+        <p:spPr>
+          <a:xfrm>
+            <a:off x="2148840" y="1773936"/>
+            <a:ext cx="3474720" cy="822960"/>
+          </a:xfrm>
+          <a:prstGeom prst="rect">
+            <a:avLst/>
+          </a:prstGeom>
+          <a:noFill/>
+          <a:ln/>
+        </p:spPr>
+        <p:txBody>
+          <a:bodyPr wrap="square" lIns="0" tIns="0" rIns="0" bIns="0" rtlCol="0" anchor="t"/>
+          <a:lstStyle/>
+          <a:p>
+            <a:pPr indent="0" marL="0">
+              <a:buNone/>
+            </a:pPr>
+            <a:r>
+              <a:rPr lang="en-US" sz="1700" b="1" dirty="0">
+                <a:solidFill>
+                  <a:srgbClr val="E8EDF2"/>
+                </a:solidFill>
+                <a:latin typeface="Malgun Gothic" pitchFamily="34" charset="0"/>
+                <a:ea typeface="Malgun Gothic" pitchFamily="34" charset="-122"/>
+                <a:cs typeface="Malgun Gothic" pitchFamily="34" charset="-120"/>
+              </a:rPr>
+              <a:t>세 커널의 협업 보기</a:t>
+            </a:r>
+            <a:endParaRPr lang="en-US" sz="1700" dirty="0"/>
+          </a:p>
+        </p:txBody>
+      </p:sp>
+      <p:sp>
+        <p:nvSpPr>
+          <p:cNvPr id="7" name="Text 5"/>
+          <p:cNvSpPr/>
+          <p:nvPr/>
+        </p:nvSpPr>
+        <p:spPr>
+          <a:xfrm>
+            <a:off x="804672" y="2651760"/>
+            <a:ext cx="4791456" cy="731520"/>
+          </a:xfrm>
+          <a:prstGeom prst="rect">
+            <a:avLst/>
+          </a:prstGeom>
+          <a:noFill/>
+          <a:ln/>
+        </p:spPr>
+        <p:txBody>
+          <a:bodyPr wrap="square" lIns="0" tIns="0" rIns="0" bIns="0" rtlCol="0" anchor="t"/>
+          <a:lstStyle/>
+          <a:p>
+            <a:pPr indent="0" marL="0">
+              <a:lnSpc>
+                <a:spcPct val="110000"/>
+              </a:lnSpc>
+              <a:buNone/>
+            </a:pPr>
+            <a:r>
+              <a:rPr lang="en-US" sz="1400" dirty="0">
+                <a:solidFill>
+                  <a:srgbClr val="9AA6B2"/>
+                </a:solidFill>
+                <a:latin typeface="Malgun Gothic" pitchFamily="34" charset="0"/>
+                <a:ea typeface="Malgun Gothic" pitchFamily="34" charset="-122"/>
+                <a:cs typeface="Malgun Gothic" pitchFamily="34" charset="-120"/>
+              </a:rPr>
+              <a:t>--verbose --verbose 로 write→readwrite→read 순서 확인</a:t>
+            </a:r>
+            <a:endParaRPr lang="en-US" sz="1400" dirty="0"/>
+          </a:p>
+        </p:txBody>
+      </p:sp>
+      <p:sp>
+        <p:nvSpPr>
+          <p:cNvPr id="8" name="Shape 6"/>
+          <p:cNvSpPr/>
+          <p:nvPr/>
+        </p:nvSpPr>
+        <p:spPr>
+          <a:xfrm>
+            <a:off x="6309360" y="1554480"/>
+            <a:ext cx="5303520" cy="1965960"/>
+          </a:xfrm>
+          <a:prstGeom prst="roundRect">
+            <a:avLst>
+              <a:gd name="adj" fmla="val 3721"/>
             </a:avLst>
           </a:prstGeom>
           <a:solidFill>
@@ -3122,53 +2904,96 @@
       </p:sp>
       <p:sp>
         <p:nvSpPr>
-          <p:cNvPr id="8" name="Text 6"/>
-          <p:cNvSpPr/>
-          <p:nvPr/>
-        </p:nvSpPr>
-        <p:spPr>
-          <a:xfrm>
-            <a:off x="6537960" y="1828800"/>
-            <a:ext cx="4800600" cy="457200"/>
-          </a:xfrm>
-          <a:prstGeom prst="rect">
-            <a:avLst/>
-          </a:prstGeom>
-          <a:noFill/>
-          <a:ln/>
-        </p:spPr>
-        <p:txBody>
-          <a:bodyPr wrap="square" lIns="0" tIns="0" rIns="0" bIns="0" rtlCol="0" anchor="ctr"/>
+          <p:cNvPr id="9" name="Text 7"/>
+          <p:cNvSpPr/>
+          <p:nvPr/>
+        </p:nvSpPr>
+        <p:spPr>
+          <a:xfrm>
+            <a:off x="6565392" y="1755648"/>
+            <a:ext cx="1188720" cy="502920"/>
+          </a:xfrm>
+          <a:prstGeom prst="roundRect">
+            <a:avLst>
+              <a:gd name="adj" fmla="val 14545"/>
+            </a:avLst>
+          </a:prstGeom>
+          <a:solidFill>
+            <a:srgbClr val="4FB0C6"/>
+          </a:solidFill>
+          <a:ln/>
+        </p:spPr>
+        <p:txBody>
+          <a:bodyPr wrap="square" rtlCol="0" anchor="ctr"/>
+          <a:lstStyle/>
+          <a:p>
+            <a:pPr algn="ctr" indent="0" marL="0">
+              <a:buNone/>
+            </a:pPr>
+            <a:r>
+              <a:rPr lang="en-US" sz="1700" b="1" dirty="0">
+                <a:solidFill>
+                  <a:srgbClr val="13161C"/>
+                </a:solidFill>
+                <a:latin typeface="Courier New" pitchFamily="34" charset="0"/>
+                <a:ea typeface="Courier New" pitchFamily="34" charset="-122"/>
+                <a:cs typeface="Courier New" pitchFamily="34" charset="-120"/>
+              </a:rPr>
+              <a:t>Ex 2</a:t>
+            </a:r>
+            <a:endParaRPr lang="en-US" sz="1700" dirty="0"/>
+          </a:p>
+        </p:txBody>
+      </p:sp>
+      <p:sp>
+        <p:nvSpPr>
+          <p:cNvPr id="10" name="Text 8"/>
+          <p:cNvSpPr/>
+          <p:nvPr/>
+        </p:nvSpPr>
+        <p:spPr>
+          <a:xfrm>
+            <a:off x="7909560" y="1773936"/>
+            <a:ext cx="3474720" cy="822960"/>
+          </a:xfrm>
+          <a:prstGeom prst="rect">
+            <a:avLst/>
+          </a:prstGeom>
+          <a:noFill/>
+          <a:ln/>
+        </p:spPr>
+        <p:txBody>
+          <a:bodyPr wrap="square" lIns="0" tIns="0" rIns="0" bIns="0" rtlCol="0" anchor="t"/>
           <a:lstStyle/>
           <a:p>
             <a:pPr indent="0" marL="0">
               <a:buNone/>
             </a:pPr>
             <a:r>
-              <a:rPr lang="en-US" sz="2000" b="1" dirty="0">
-                <a:solidFill>
-                  <a:srgbClr val="E0A458"/>
-                </a:solidFill>
-                <a:latin typeface="Malgun Gothic" pitchFamily="34" charset="0"/>
-                <a:ea typeface="Malgun Gothic" pitchFamily="34" charset="-122"/>
-                <a:cs typeface="Malgun Gothic" pitchFamily="34" charset="-120"/>
-              </a:rPr>
-              <a:t>입문자 함정</a:t>
-            </a:r>
-            <a:endParaRPr lang="en-US" sz="2000" dirty="0"/>
-          </a:p>
-        </p:txBody>
-      </p:sp>
-      <p:sp>
-        <p:nvSpPr>
-          <p:cNvPr id="9" name="Text 7"/>
-          <p:cNvSpPr/>
-          <p:nvPr/>
-        </p:nvSpPr>
-        <p:spPr>
-          <a:xfrm>
-            <a:off x="6537960" y="2423160"/>
-            <a:ext cx="4800600" cy="3108960"/>
+              <a:rPr lang="en-US" sz="1700" b="1" dirty="0">
+                <a:solidFill>
+                  <a:srgbClr val="E8EDF2"/>
+                </a:solidFill>
+                <a:latin typeface="Malgun Gothic" pitchFamily="34" charset="0"/>
+                <a:ea typeface="Malgun Gothic" pitchFamily="34" charset="-122"/>
+                <a:cs typeface="Malgun Gothic" pitchFamily="34" charset="-120"/>
+              </a:rPr>
+              <a:t>오류가 CPU로 돌아오는 길</a:t>
+            </a:r>
+            <a:endParaRPr lang="en-US" sz="1700" dirty="0"/>
+          </a:p>
+        </p:txBody>
+      </p:sp>
+      <p:sp>
+        <p:nvSpPr>
+          <p:cNvPr id="11" name="Text 9"/>
+          <p:cNvSpPr/>
+          <p:nvPr/>
+        </p:nvSpPr>
+        <p:spPr>
+          <a:xfrm>
+            <a:off x="6565392" y="2651760"/>
+            <a:ext cx="4791456" cy="731520"/>
           </a:xfrm>
           <a:prstGeom prst="rect">
             <a:avLst/>
@@ -3180,15 +3005,118 @@
           <a:bodyPr wrap="square" lIns="0" tIns="0" rIns="0" bIns="0" rtlCol="0" anchor="t"/>
           <a:lstStyle/>
           <a:p>
-            <a:pPr marL="342900" indent="-342900">
-              <a:spcAft>
-                <a:spcPts val="1200"/>
-              </a:spcAft>
-              <a:buSzPct val="100000"/>
-              <a:buChar char="✗"/>
-            </a:pPr>
-            <a:r>
-              <a:rPr lang="en-US" sz="1550" dirty="0">
+            <a:pPr indent="0" marL="0">
+              <a:lnSpc>
+                <a:spcPct val="110000"/>
+              </a:lnSpc>
+              <a:buNone/>
+            </a:pPr>
+            <a:r>
+              <a:rPr lang="en-US" sz="1400" dirty="0">
+                <a:solidFill>
+                  <a:srgbClr val="9AA6B2"/>
+                </a:solidFill>
+                <a:latin typeface="Malgun Gothic" pitchFamily="34" charset="0"/>
+                <a:ea typeface="Malgun Gothic" pitchFamily="34" charset="-122"/>
+                <a:cs typeface="Malgun Gothic" pitchFamily="34" charset="-120"/>
+              </a:rPr>
+              <a:t>error_checking의 cudaMemcpy 직후 출력 추가</a:t>
+            </a:r>
+            <a:endParaRPr lang="en-US" sz="1400" dirty="0"/>
+          </a:p>
+        </p:txBody>
+      </p:sp>
+      <p:sp>
+        <p:nvSpPr>
+          <p:cNvPr id="12" name="Shape 10"/>
+          <p:cNvSpPr/>
+          <p:nvPr/>
+        </p:nvSpPr>
+        <p:spPr>
+          <a:xfrm>
+            <a:off x="548640" y="3840480"/>
+            <a:ext cx="5303520" cy="1965960"/>
+          </a:xfrm>
+          <a:prstGeom prst="roundRect">
+            <a:avLst>
+              <a:gd name="adj" fmla="val 3721"/>
+            </a:avLst>
+          </a:prstGeom>
+          <a:solidFill>
+            <a:srgbClr val="1E232C"/>
+          </a:solidFill>
+          <a:ln/>
+        </p:spPr>
+      </p:sp>
+      <p:sp>
+        <p:nvSpPr>
+          <p:cNvPr id="13" name="Text 11"/>
+          <p:cNvSpPr/>
+          <p:nvPr/>
+        </p:nvSpPr>
+        <p:spPr>
+          <a:xfrm>
+            <a:off x="804672" y="4041648"/>
+            <a:ext cx="1188720" cy="502920"/>
+          </a:xfrm>
+          <a:prstGeom prst="roundRect">
+            <a:avLst>
+              <a:gd name="adj" fmla="val 14545"/>
+            </a:avLst>
+          </a:prstGeom>
+          <a:solidFill>
+            <a:srgbClr val="E0A458"/>
+          </a:solidFill>
+          <a:ln/>
+        </p:spPr>
+        <p:txBody>
+          <a:bodyPr wrap="square" rtlCol="0" anchor="ctr"/>
+          <a:lstStyle/>
+          <a:p>
+            <a:pPr algn="ctr" indent="0" marL="0">
+              <a:buNone/>
+            </a:pPr>
+            <a:r>
+              <a:rPr lang="en-US" sz="1700" b="1" dirty="0">
+                <a:solidFill>
+                  <a:srgbClr val="13161C"/>
+                </a:solidFill>
+                <a:latin typeface="Courier New" pitchFamily="34" charset="0"/>
+                <a:ea typeface="Courier New" pitchFamily="34" charset="-122"/>
+                <a:cs typeface="Courier New" pitchFamily="34" charset="-120"/>
+              </a:rPr>
+              <a:t>Ex 3</a:t>
+            </a:r>
+            <a:endParaRPr lang="en-US" sz="1700" dirty="0"/>
+          </a:p>
+        </p:txBody>
+      </p:sp>
+      <p:sp>
+        <p:nvSpPr>
+          <p:cNvPr id="14" name="Text 12"/>
+          <p:cNvSpPr/>
+          <p:nvPr/>
+        </p:nvSpPr>
+        <p:spPr>
+          <a:xfrm>
+            <a:off x="2148840" y="4059936"/>
+            <a:ext cx="3474720" cy="822960"/>
+          </a:xfrm>
+          <a:prstGeom prst="rect">
+            <a:avLst/>
+          </a:prstGeom>
+          <a:noFill/>
+          <a:ln/>
+        </p:spPr>
+        <p:txBody>
+          <a:bodyPr wrap="square" lIns="0" tIns="0" rIns="0" bIns="0" rtlCol="0" anchor="t"/>
+          <a:lstStyle/>
+          <a:p>
+            <a:pPr indent="0" marL="0">
+              <a:buNone/>
+            </a:pPr>
+            <a:r>
+              <a:rPr lang="en-US" sz="1700" b="1" dirty="0">
                 <a:solidFill>
                   <a:srgbClr val="E8EDF2"/>
                 </a:solidFill>
@@ -3196,20 +3124,145 @@
                 <a:ea typeface="Malgun Gothic" pitchFamily="34" charset="-122"/>
                 <a:cs typeface="Malgun Gothic" pitchFamily="34" charset="-120"/>
               </a:rPr>
-              <a:t>디바이스 포인터를 CPU에서 *ptr로 역참조 → 오류</a:t>
-            </a:r>
-            <a:endParaRPr lang="en-US" sz="1550" dirty="0"/>
-          </a:p>
-          <a:p>
-            <a:pPr marL="342900" indent="-342900">
-              <a:spcAft>
-                <a:spcPts val="1200"/>
-              </a:spcAft>
-              <a:buSzPct val="100000"/>
-              <a:buChar char="✗"/>
-            </a:pPr>
-            <a:r>
-              <a:rPr lang="en-US" sz="1550" dirty="0">
+              <a:t>메모리를 훼손해 오류 재현</a:t>
+            </a:r>
+            <a:endParaRPr lang="en-US" sz="1700" dirty="0"/>
+          </a:p>
+        </p:txBody>
+      </p:sp>
+      <p:sp>
+        <p:nvSpPr>
+          <p:cNvPr id="15" name="Text 13"/>
+          <p:cNvSpPr/>
+          <p:nvPr/>
+        </p:nvSpPr>
+        <p:spPr>
+          <a:xfrm>
+            <a:off x="804672" y="4937760"/>
+            <a:ext cx="4791456" cy="731520"/>
+          </a:xfrm>
+          <a:prstGeom prst="rect">
+            <a:avLst/>
+          </a:prstGeom>
+          <a:noFill/>
+          <a:ln/>
+        </p:spPr>
+        <p:txBody>
+          <a:bodyPr wrap="square" lIns="0" tIns="0" rIns="0" bIns="0" rtlCol="0" anchor="t"/>
+          <a:lstStyle/>
+          <a:p>
+            <a:pPr indent="0" marL="0">
+              <a:lnSpc>
+                <a:spcPct val="110000"/>
+              </a:lnSpc>
+              <a:buNone/>
+            </a:pPr>
+            <a:r>
+              <a:rPr lang="en-US" sz="1400" dirty="0">
+                <a:solidFill>
+                  <a:srgbClr val="9AA6B2"/>
+                </a:solidFill>
+                <a:latin typeface="Malgun Gothic" pitchFamily="34" charset="0"/>
+                <a:ea typeface="Malgun Gothic" pitchFamily="34" charset="-122"/>
+                <a:cs typeface="Malgun Gothic" pitchFamily="34" charset="-120"/>
+              </a:rPr>
+              <a:t>읽기 커널에서 비트 하나를 뒤집어 검출 확인</a:t>
+            </a:r>
+            <a:endParaRPr lang="en-US" sz="1400" dirty="0"/>
+          </a:p>
+        </p:txBody>
+      </p:sp>
+      <p:sp>
+        <p:nvSpPr>
+          <p:cNvPr id="16" name="Shape 14"/>
+          <p:cNvSpPr/>
+          <p:nvPr/>
+        </p:nvSpPr>
+        <p:spPr>
+          <a:xfrm>
+            <a:off x="6309360" y="3840480"/>
+            <a:ext cx="5303520" cy="1965960"/>
+          </a:xfrm>
+          <a:prstGeom prst="roundRect">
+            <a:avLst>
+              <a:gd name="adj" fmla="val 3721"/>
+            </a:avLst>
+          </a:prstGeom>
+          <a:solidFill>
+            <a:srgbClr val="1E232C"/>
+          </a:solidFill>
+          <a:ln/>
+        </p:spPr>
+      </p:sp>
+      <p:sp>
+        <p:nvSpPr>
+          <p:cNvPr id="17" name="Text 15"/>
+          <p:cNvSpPr/>
+          <p:nvPr/>
+        </p:nvSpPr>
+        <p:spPr>
+          <a:xfrm>
+            <a:off x="6565392" y="4041648"/>
+            <a:ext cx="1188720" cy="502920"/>
+          </a:xfrm>
+          <a:prstGeom prst="roundRect">
+            <a:avLst>
+              <a:gd name="adj" fmla="val 14545"/>
+            </a:avLst>
+          </a:prstGeom>
+          <a:solidFill>
+            <a:srgbClr val="8CC63F"/>
+          </a:solidFill>
+          <a:ln/>
+        </p:spPr>
+        <p:txBody>
+          <a:bodyPr wrap="square" rtlCol="0" anchor="ctr"/>
+          <a:lstStyle/>
+          <a:p>
+            <a:pPr algn="ctr" indent="0" marL="0">
+              <a:buNone/>
+            </a:pPr>
+            <a:r>
+              <a:rPr lang="en-US" sz="1700" b="1" dirty="0">
+                <a:solidFill>
+                  <a:srgbClr val="13161C"/>
+                </a:solidFill>
+                <a:latin typeface="Courier New" pitchFamily="34" charset="0"/>
+                <a:ea typeface="Courier New" pitchFamily="34" charset="-122"/>
+                <a:cs typeface="Courier New" pitchFamily="34" charset="-120"/>
+              </a:rPr>
+              <a:t>Ex 4</a:t>
+            </a:r>
+            <a:endParaRPr lang="en-US" sz="1700" dirty="0"/>
+          </a:p>
+        </p:txBody>
+      </p:sp>
+      <p:sp>
+        <p:nvSpPr>
+          <p:cNvPr id="18" name="Text 16"/>
+          <p:cNvSpPr/>
+          <p:nvPr/>
+        </p:nvSpPr>
+        <p:spPr>
+          <a:xfrm>
+            <a:off x="7909560" y="4059936"/>
+            <a:ext cx="3474720" cy="822960"/>
+          </a:xfrm>
+          <a:prstGeom prst="rect">
+            <a:avLst/>
+          </a:prstGeom>
+          <a:noFill/>
+          <a:ln/>
+        </p:spPr>
+        <p:txBody>
+          <a:bodyPr wrap="square" lIns="0" tIns="0" rIns="0" bIns="0" rtlCol="0" anchor="t"/>
+          <a:lstStyle/>
+          <a:p>
+            <a:pPr indent="0" marL="0">
+              <a:buNone/>
+            </a:pPr>
+            <a:r>
+              <a:rPr lang="en-US" sz="1700" b="1" dirty="0">
                 <a:solidFill>
                   <a:srgbClr val="E8EDF2"/>
                 </a:solidFill>
@@ -3217,48 +3270,51 @@
                 <a:ea typeface="Malgun Gothic" pitchFamily="34" charset="-122"/>
                 <a:cs typeface="Malgun Gothic" pitchFamily="34" charset="-120"/>
               </a:rPr>
-              <a:t>cudaMemcpy 방향을 반대로 지정 → 값이 안 옴</a:t>
-            </a:r>
-            <a:endParaRPr lang="en-US" sz="1550" dirty="0"/>
-          </a:p>
-          <a:p>
-            <a:pPr marL="342900" indent="-342900">
-              <a:spcAft>
-                <a:spcPts val="1200"/>
-              </a:spcAft>
-              <a:buSzPct val="100000"/>
-              <a:buChar char="✗"/>
-            </a:pPr>
-            <a:r>
-              <a:rPr lang="en-US" sz="1550" dirty="0">
-                <a:solidFill>
-                  <a:srgbClr val="E8EDF2"/>
-                </a:solidFill>
-                <a:latin typeface="Malgun Gothic" pitchFamily="34" charset="0"/>
-                <a:ea typeface="Malgun Gothic" pitchFamily="34" charset="-122"/>
-                <a:cs typeface="Malgun Gothic" pitchFamily="34" charset="-120"/>
-              </a:rPr>
-              <a:t>같은 커널에서 쓰고 바로 읽기 → 반영 전 값 읽음</a:t>
-            </a:r>
-            <a:endParaRPr lang="en-US" sz="1550" dirty="0"/>
-          </a:p>
-          <a:p>
-            <a:pPr marL="342900" indent="-342900">
-              <a:buSzPct val="100000"/>
-              <a:buChar char="✗"/>
-            </a:pPr>
-            <a:r>
-              <a:rPr lang="en-US" sz="1550" dirty="0">
-                <a:solidFill>
-                  <a:srgbClr val="E8EDF2"/>
-                </a:solidFill>
-                <a:latin typeface="Malgun Gothic" pitchFamily="34" charset="0"/>
-                <a:ea typeface="Malgun Gothic" pitchFamily="34" charset="-122"/>
-                <a:cs typeface="Malgun Gothic" pitchFamily="34" charset="-120"/>
-              </a:rPr>
-              <a:t>cudaMalloc에 (void**) 이중 포인터를 안 넘김</a:t>
-            </a:r>
-            <a:endParaRPr lang="en-US" sz="1550" dirty="0"/>
+              <a:t>디바이스 버퍼 할당 보기</a:t>
+            </a:r>
+            <a:endParaRPr lang="en-US" sz="1700" dirty="0"/>
+          </a:p>
+        </p:txBody>
+      </p:sp>
+      <p:sp>
+        <p:nvSpPr>
+          <p:cNvPr id="19" name="Text 17"/>
+          <p:cNvSpPr/>
+          <p:nvPr/>
+        </p:nvSpPr>
+        <p:spPr>
+          <a:xfrm>
+            <a:off x="6565392" y="4937760"/>
+            <a:ext cx="4791456" cy="731520"/>
+          </a:xfrm>
+          <a:prstGeom prst="rect">
+            <a:avLst/>
+          </a:prstGeom>
+          <a:noFill/>
+          <a:ln/>
+        </p:spPr>
+        <p:txBody>
+          <a:bodyPr wrap="square" lIns="0" tIns="0" rIns="0" bIns="0" rtlCol="0" anchor="t"/>
+          <a:lstStyle/>
+          <a:p>
+            <a:pPr indent="0" marL="0">
+              <a:lnSpc>
+                <a:spcPct val="110000"/>
+              </a:lnSpc>
+              <a:buNone/>
+            </a:pPr>
+            <a:r>
+              <a:rPr lang="en-US" sz="1400" dirty="0">
+                <a:solidFill>
+                  <a:srgbClr val="9AA6B2"/>
+                </a:solidFill>
+                <a:latin typeface="Malgun Gothic" pitchFamily="34" charset="0"/>
+                <a:ea typeface="Malgun Gothic" pitchFamily="34" charset="-122"/>
+                <a:cs typeface="Malgun Gothic" pitchFamily="34" charset="-120"/>
+              </a:rPr>
+              <a:t>allocate_small_mem의 cudaMalloc/Memset 관찰</a:t>
+            </a:r>
+            <a:endParaRPr lang="en-US" sz="1400" dirty="0"/>
           </a:p>
         </p:txBody>
       </p:sp>
@@ -3302,6 +3358,448 @@
         </p:nvSpPr>
         <p:spPr>
           <a:xfrm>
+            <a:off x="548640" y="411480"/>
+            <a:ext cx="640080" cy="640080"/>
+          </a:xfrm>
+          <a:prstGeom prst="roundRect">
+            <a:avLst>
+              <a:gd name="adj" fmla="val 12857"/>
+            </a:avLst>
+          </a:prstGeom>
+          <a:solidFill>
+            <a:srgbClr val="8CC63F"/>
+          </a:solidFill>
+          <a:ln/>
+        </p:spPr>
+        <p:txBody>
+          <a:bodyPr wrap="square" rtlCol="0" anchor="ctr"/>
+          <a:lstStyle/>
+          <a:p>
+            <a:pPr algn="ctr" indent="0" marL="0">
+              <a:buNone/>
+            </a:pPr>
+            <a:r>
+              <a:rPr lang="en-US" sz="2200" b="1" dirty="0">
+                <a:solidFill>
+                  <a:srgbClr val="13161C"/>
+                </a:solidFill>
+                <a:latin typeface="Courier New" pitchFamily="34" charset="0"/>
+                <a:ea typeface="Courier New" pitchFamily="34" charset="-122"/>
+                <a:cs typeface="Courier New" pitchFamily="34" charset="-120"/>
+              </a:rPr>
+              <a:t>10</a:t>
+            </a:r>
+            <a:endParaRPr lang="en-US" sz="2200" dirty="0"/>
+          </a:p>
+        </p:txBody>
+      </p:sp>
+      <p:sp>
+        <p:nvSpPr>
+          <p:cNvPr id="3" name="Text 1"/>
+          <p:cNvSpPr/>
+          <p:nvPr/>
+        </p:nvSpPr>
+        <p:spPr>
+          <a:xfrm>
+            <a:off x="1325880" y="384048"/>
+            <a:ext cx="10287000" cy="694944"/>
+          </a:xfrm>
+          <a:prstGeom prst="rect">
+            <a:avLst/>
+          </a:prstGeom>
+          <a:noFill/>
+          <a:ln/>
+        </p:spPr>
+        <p:txBody>
+          <a:bodyPr wrap="square" lIns="0" tIns="0" rIns="0" bIns="0" rtlCol="0" anchor="ctr"/>
+          <a:lstStyle/>
+          <a:p>
+            <a:pPr algn="l" indent="0" marL="0">
+              <a:buNone/>
+            </a:pPr>
+            <a:r>
+              <a:rPr lang="en-US" sz="3000" b="1" dirty="0">
+                <a:solidFill>
+                  <a:srgbClr val="E8EDF2"/>
+                </a:solidFill>
+                <a:latin typeface="Malgun Gothic" pitchFamily="34" charset="0"/>
+                <a:ea typeface="Malgun Gothic" pitchFamily="34" charset="-122"/>
+                <a:cs typeface="Malgun Gothic" pitchFamily="34" charset="-120"/>
+              </a:rPr>
+              <a:t>핵심 정리 &amp; 자주 하는 실수</a:t>
+            </a:r>
+            <a:endParaRPr lang="en-US" sz="3000" dirty="0"/>
+          </a:p>
+        </p:txBody>
+      </p:sp>
+      <p:sp>
+        <p:nvSpPr>
+          <p:cNvPr id="4" name="Shape 2"/>
+          <p:cNvSpPr/>
+          <p:nvPr/>
+        </p:nvSpPr>
+        <p:spPr>
+          <a:xfrm>
+            <a:off x="548640" y="1600200"/>
+            <a:ext cx="5349240" cy="4114800"/>
+          </a:xfrm>
+          <a:prstGeom prst="roundRect">
+            <a:avLst>
+              <a:gd name="adj" fmla="val 1778"/>
+            </a:avLst>
+          </a:prstGeom>
+          <a:solidFill>
+            <a:srgbClr val="1E232C"/>
+          </a:solidFill>
+          <a:ln/>
+        </p:spPr>
+      </p:sp>
+      <p:sp>
+        <p:nvSpPr>
+          <p:cNvPr id="5" name="Text 3"/>
+          <p:cNvSpPr/>
+          <p:nvPr/>
+        </p:nvSpPr>
+        <p:spPr>
+          <a:xfrm>
+            <a:off x="822960" y="1828800"/>
+            <a:ext cx="4800600" cy="457200"/>
+          </a:xfrm>
+          <a:prstGeom prst="rect">
+            <a:avLst/>
+          </a:prstGeom>
+          <a:noFill/>
+          <a:ln/>
+        </p:spPr>
+        <p:txBody>
+          <a:bodyPr wrap="square" lIns="0" tIns="0" rIns="0" bIns="0" rtlCol="0" anchor="ctr"/>
+          <a:lstStyle/>
+          <a:p>
+            <a:pPr indent="0" marL="0">
+              <a:buNone/>
+            </a:pPr>
+            <a:r>
+              <a:rPr lang="en-US" sz="2000" b="1" dirty="0">
+                <a:solidFill>
+                  <a:srgbClr val="8CC63F"/>
+                </a:solidFill>
+                <a:latin typeface="Malgun Gothic" pitchFamily="34" charset="0"/>
+                <a:ea typeface="Malgun Gothic" pitchFamily="34" charset="-122"/>
+                <a:cs typeface="Malgun Gothic" pitchFamily="34" charset="-120"/>
+              </a:rPr>
+              <a:t>기억할 것</a:t>
+            </a:r>
+            <a:endParaRPr lang="en-US" sz="2000" dirty="0"/>
+          </a:p>
+        </p:txBody>
+      </p:sp>
+      <p:sp>
+        <p:nvSpPr>
+          <p:cNvPr id="6" name="Text 4"/>
+          <p:cNvSpPr/>
+          <p:nvPr/>
+        </p:nvSpPr>
+        <p:spPr>
+          <a:xfrm>
+            <a:off x="822960" y="2423160"/>
+            <a:ext cx="4800600" cy="3108960"/>
+          </a:xfrm>
+          <a:prstGeom prst="rect">
+            <a:avLst/>
+          </a:prstGeom>
+          <a:noFill/>
+          <a:ln/>
+        </p:spPr>
+        <p:txBody>
+          <a:bodyPr wrap="square" lIns="0" tIns="0" rIns="0" bIns="0" rtlCol="0" anchor="t"/>
+          <a:lstStyle/>
+          <a:p>
+            <a:pPr marL="342900" indent="-342900">
+              <a:spcAft>
+                <a:spcPts val="1200"/>
+              </a:spcAft>
+              <a:buSzPct val="100000"/>
+              <a:buChar char="✓"/>
+            </a:pPr>
+            <a:r>
+              <a:rPr lang="en-US" sz="1550" dirty="0">
+                <a:solidFill>
+                  <a:srgbClr val="E8EDF2"/>
+                </a:solidFill>
+                <a:latin typeface="Malgun Gothic" pitchFamily="34" charset="0"/>
+                <a:ea typeface="Malgun Gothic" pitchFamily="34" charset="-122"/>
+                <a:cs typeface="Malgun Gothic" pitchFamily="34" charset="-120"/>
+              </a:rPr>
+              <a:t>Malloc(할당)·Memset(초기화)·Memcpy(복사)</a:t>
+            </a:r>
+            <a:endParaRPr lang="en-US" sz="1550" dirty="0"/>
+          </a:p>
+          <a:p>
+            <a:pPr marL="342900" indent="-342900">
+              <a:spcAft>
+                <a:spcPts val="1200"/>
+              </a:spcAft>
+              <a:buSzPct val="100000"/>
+              <a:buChar char="✓"/>
+            </a:pPr>
+            <a:r>
+              <a:rPr lang="en-US" sz="1550" dirty="0">
+                <a:solidFill>
+                  <a:srgbClr val="E8EDF2"/>
+                </a:solidFill>
+                <a:latin typeface="Malgun Gothic" pitchFamily="34" charset="0"/>
+                <a:ea typeface="Malgun Gothic" pitchFamily="34" charset="-122"/>
+                <a:cs typeface="Malgun Gothic" pitchFamily="34" charset="-120"/>
+              </a:rPr>
+              <a:t>Memcpy 방향: DeviceToHost = GPU→CPU</a:t>
+            </a:r>
+            <a:endParaRPr lang="en-US" sz="1550" dirty="0"/>
+          </a:p>
+          <a:p>
+            <a:pPr marL="342900" indent="-342900">
+              <a:spcAft>
+                <a:spcPts val="1200"/>
+              </a:spcAft>
+              <a:buSzPct val="100000"/>
+              <a:buChar char="✓"/>
+            </a:pPr>
+            <a:r>
+              <a:rPr lang="en-US" sz="1550" dirty="0">
+                <a:solidFill>
+                  <a:srgbClr val="E8EDF2"/>
+                </a:solidFill>
+                <a:latin typeface="Malgun Gothic" pitchFamily="34" charset="0"/>
+                <a:ea typeface="Malgun Gothic" pitchFamily="34" charset="-122"/>
+                <a:cs typeface="Malgun Gothic" pitchFamily="34" charset="-120"/>
+              </a:rPr>
+              <a:t>쓰기 커널 종료 = 메모리 반영 보장</a:t>
+            </a:r>
+            <a:endParaRPr lang="en-US" sz="1550" dirty="0"/>
+          </a:p>
+          <a:p>
+            <a:pPr marL="342900" indent="-342900">
+              <a:buSzPct val="100000"/>
+              <a:buChar char="✓"/>
+            </a:pPr>
+            <a:r>
+              <a:rPr lang="en-US" sz="1550" dirty="0">
+                <a:solidFill>
+                  <a:srgbClr val="E8EDF2"/>
+                </a:solidFill>
+                <a:latin typeface="Malgun Gothic" pitchFamily="34" charset="0"/>
+                <a:ea typeface="Malgun Gothic" pitchFamily="34" charset="-122"/>
+                <a:cs typeface="Malgun Gothic" pitchFamily="34" charset="-120"/>
+              </a:rPr>
+              <a:t>이동 반전: p1 → p2(보수) 양방향 검사</a:t>
+            </a:r>
+            <a:endParaRPr lang="en-US" sz="1550" dirty="0"/>
+          </a:p>
+        </p:txBody>
+      </p:sp>
+      <p:sp>
+        <p:nvSpPr>
+          <p:cNvPr id="7" name="Shape 5"/>
+          <p:cNvSpPr/>
+          <p:nvPr/>
+        </p:nvSpPr>
+        <p:spPr>
+          <a:xfrm>
+            <a:off x="6263640" y="1600200"/>
+            <a:ext cx="5349240" cy="4114800"/>
+          </a:xfrm>
+          <a:prstGeom prst="roundRect">
+            <a:avLst>
+              <a:gd name="adj" fmla="val 1778"/>
+            </a:avLst>
+          </a:prstGeom>
+          <a:solidFill>
+            <a:srgbClr val="1E232C"/>
+          </a:solidFill>
+          <a:ln/>
+        </p:spPr>
+      </p:sp>
+      <p:sp>
+        <p:nvSpPr>
+          <p:cNvPr id="8" name="Text 6"/>
+          <p:cNvSpPr/>
+          <p:nvPr/>
+        </p:nvSpPr>
+        <p:spPr>
+          <a:xfrm>
+            <a:off x="6537960" y="1828800"/>
+            <a:ext cx="4800600" cy="457200"/>
+          </a:xfrm>
+          <a:prstGeom prst="rect">
+            <a:avLst/>
+          </a:prstGeom>
+          <a:noFill/>
+          <a:ln/>
+        </p:spPr>
+        <p:txBody>
+          <a:bodyPr wrap="square" lIns="0" tIns="0" rIns="0" bIns="0" rtlCol="0" anchor="ctr"/>
+          <a:lstStyle/>
+          <a:p>
+            <a:pPr indent="0" marL="0">
+              <a:buNone/>
+            </a:pPr>
+            <a:r>
+              <a:rPr lang="en-US" sz="2000" b="1" dirty="0">
+                <a:solidFill>
+                  <a:srgbClr val="E0A458"/>
+                </a:solidFill>
+                <a:latin typeface="Malgun Gothic" pitchFamily="34" charset="0"/>
+                <a:ea typeface="Malgun Gothic" pitchFamily="34" charset="-122"/>
+                <a:cs typeface="Malgun Gothic" pitchFamily="34" charset="-120"/>
+              </a:rPr>
+              <a:t>입문자 함정</a:t>
+            </a:r>
+            <a:endParaRPr lang="en-US" sz="2000" dirty="0"/>
+          </a:p>
+        </p:txBody>
+      </p:sp>
+      <p:sp>
+        <p:nvSpPr>
+          <p:cNvPr id="9" name="Text 7"/>
+          <p:cNvSpPr/>
+          <p:nvPr/>
+        </p:nvSpPr>
+        <p:spPr>
+          <a:xfrm>
+            <a:off x="6537960" y="2423160"/>
+            <a:ext cx="4800600" cy="3108960"/>
+          </a:xfrm>
+          <a:prstGeom prst="rect">
+            <a:avLst/>
+          </a:prstGeom>
+          <a:noFill/>
+          <a:ln/>
+        </p:spPr>
+        <p:txBody>
+          <a:bodyPr wrap="square" lIns="0" tIns="0" rIns="0" bIns="0" rtlCol="0" anchor="t"/>
+          <a:lstStyle/>
+          <a:p>
+            <a:pPr marL="342900" indent="-342900">
+              <a:spcAft>
+                <a:spcPts val="1200"/>
+              </a:spcAft>
+              <a:buSzPct val="100000"/>
+              <a:buChar char="✗"/>
+            </a:pPr>
+            <a:r>
+              <a:rPr lang="en-US" sz="1550" dirty="0">
+                <a:solidFill>
+                  <a:srgbClr val="E8EDF2"/>
+                </a:solidFill>
+                <a:latin typeface="Malgun Gothic" pitchFamily="34" charset="0"/>
+                <a:ea typeface="Malgun Gothic" pitchFamily="34" charset="-122"/>
+                <a:cs typeface="Malgun Gothic" pitchFamily="34" charset="-120"/>
+              </a:rPr>
+              <a:t>디바이스 포인터를 CPU에서 *ptr로 역참조 → 오류</a:t>
+            </a:r>
+            <a:endParaRPr lang="en-US" sz="1550" dirty="0"/>
+          </a:p>
+          <a:p>
+            <a:pPr marL="342900" indent="-342900">
+              <a:spcAft>
+                <a:spcPts val="1200"/>
+              </a:spcAft>
+              <a:buSzPct val="100000"/>
+              <a:buChar char="✗"/>
+            </a:pPr>
+            <a:r>
+              <a:rPr lang="en-US" sz="1550" dirty="0">
+                <a:solidFill>
+                  <a:srgbClr val="E8EDF2"/>
+                </a:solidFill>
+                <a:latin typeface="Malgun Gothic" pitchFamily="34" charset="0"/>
+                <a:ea typeface="Malgun Gothic" pitchFamily="34" charset="-122"/>
+                <a:cs typeface="Malgun Gothic" pitchFamily="34" charset="-120"/>
+              </a:rPr>
+              <a:t>cudaMemcpy 방향을 반대로 지정 → 값이 안 옴</a:t>
+            </a:r>
+            <a:endParaRPr lang="en-US" sz="1550" dirty="0"/>
+          </a:p>
+          <a:p>
+            <a:pPr marL="342900" indent="-342900">
+              <a:spcAft>
+                <a:spcPts val="1200"/>
+              </a:spcAft>
+              <a:buSzPct val="100000"/>
+              <a:buChar char="✗"/>
+            </a:pPr>
+            <a:r>
+              <a:rPr lang="en-US" sz="1550" dirty="0">
+                <a:solidFill>
+                  <a:srgbClr val="E8EDF2"/>
+                </a:solidFill>
+                <a:latin typeface="Malgun Gothic" pitchFamily="34" charset="0"/>
+                <a:ea typeface="Malgun Gothic" pitchFamily="34" charset="-122"/>
+                <a:cs typeface="Malgun Gothic" pitchFamily="34" charset="-120"/>
+              </a:rPr>
+              <a:t>같은 커널에서 쓰고 바로 읽기 → 반영 전 값 읽음</a:t>
+            </a:r>
+            <a:endParaRPr lang="en-US" sz="1550" dirty="0"/>
+          </a:p>
+          <a:p>
+            <a:pPr marL="342900" indent="-342900">
+              <a:buSzPct val="100000"/>
+              <a:buChar char="✗"/>
+            </a:pPr>
+            <a:r>
+              <a:rPr lang="en-US" sz="1550" dirty="0">
+                <a:solidFill>
+                  <a:srgbClr val="E8EDF2"/>
+                </a:solidFill>
+                <a:latin typeface="Malgun Gothic" pitchFamily="34" charset="0"/>
+                <a:ea typeface="Malgun Gothic" pitchFamily="34" charset="-122"/>
+                <a:cs typeface="Malgun Gothic" pitchFamily="34" charset="-120"/>
+              </a:rPr>
+              <a:t>cudaMalloc에 (void**) 이중 포인터를 안 넘김</a:t>
+            </a:r>
+            <a:endParaRPr lang="en-US" sz="1550" dirty="0"/>
+          </a:p>
+        </p:txBody>
+      </p:sp>
+    </p:spTree>
+  </p:cSld>
+  <p:clrMapOvr>
+    <a:masterClrMapping/>
+  </p:clrMapOvr>
+</p:sld>
+</file>
+
+<file path=ppt/slides/slide13.xml><?xml version="1.0" encoding="utf-8"?>
+<p:sld xmlns:a="http://schemas.openxmlformats.org/drawingml/2006/main" xmlns:r="http://schemas.openxmlformats.org/officeDocument/2006/relationships" xmlns:p="http://schemas.openxmlformats.org/presentationml/2006/main">
+  <p:cSld name="Slide 13">
+    <p:bg>
+      <p:bgPr>
+        <a:solidFill>
+          <a:srgbClr val="13161C"/>
+        </a:solidFill>
+      </p:bgPr>
+    </p:bg>
+    <p:spTree>
+      <p:nvGrpSpPr>
+        <p:cNvPr id="1" name=""/>
+        <p:cNvGrpSpPr/>
+        <p:nvPr/>
+      </p:nvGrpSpPr>
+      <p:grpSpPr>
+        <a:xfrm>
+          <a:off x="0" y="0"/>
+          <a:ext cx="0" cy="0"/>
+          <a:chOff x="0" y="0"/>
+          <a:chExt cx="0" cy="0"/>
+        </a:xfrm>
+      </p:grpSpPr>
+      <p:sp>
+        <p:nvSpPr>
+          <p:cNvPr id="2" name="Text 0"/>
+          <p:cNvSpPr/>
+          <p:nvPr/>
+        </p:nvSpPr>
+        <p:spPr>
+          <a:xfrm>
             <a:off x="548640" y="1463040"/>
             <a:ext cx="9144000" cy="457200"/>
           </a:xfrm>
@@ -4910,7 +5408,7 @@
                 <a:ea typeface="Courier New" pitchFamily="34" charset="-122"/>
                 <a:cs typeface="Courier New" pitchFamily="34" charset="-120"/>
               </a:rPr>
-              <a:t>3</a:t>
+              <a:t>2</a:t>
             </a:r>
             <a:endParaRPr lang="en-US" sz="2200" dirty="0"/>
           </a:p>
@@ -4949,7 +5447,7 @@
                 <a:ea typeface="Malgun Gothic" pitchFamily="34" charset="-122"/>
                 <a:cs typeface="Malgun Gothic" pitchFamily="34" charset="-120"/>
               </a:rPr>
-              <a:t>메모리 3종 API</a:t>
+              <a:t>메모리 계층 구조 · 범위(scope)로 보기</a:t>
             </a:r>
             <a:endParaRPr lang="en-US" sz="3000" dirty="0"/>
           </a:p>
@@ -4957,36 +5455,395 @@
       </p:sp>
       <p:sp>
         <p:nvSpPr>
-          <p:cNvPr id="4" name="Shape 2"/>
-          <p:cNvSpPr/>
-          <p:nvPr/>
-        </p:nvSpPr>
-        <p:spPr>
-          <a:xfrm>
-            <a:off x="548640" y="1600200"/>
-            <a:ext cx="3444240" cy="4114800"/>
+          <p:cNvPr id="4" name="Text 2"/>
+          <p:cNvSpPr/>
+          <p:nvPr/>
+        </p:nvSpPr>
+        <p:spPr>
+          <a:xfrm>
+            <a:off x="548640" y="1371600"/>
+            <a:ext cx="11064240" cy="411480"/>
+          </a:xfrm>
+          <a:prstGeom prst="rect">
+            <a:avLst/>
+          </a:prstGeom>
+          <a:noFill/>
+          <a:ln/>
+        </p:spPr>
+        <p:txBody>
+          <a:bodyPr wrap="square" lIns="0" tIns="0" rIns="0" bIns="0" rtlCol="0" anchor="ctr"/>
+          <a:lstStyle/>
+          <a:p>
+            <a:pPr indent="0" marL="0">
+              <a:buNone/>
+            </a:pPr>
+            <a:r>
+              <a:rPr lang="en-US" sz="1500" dirty="0">
+                <a:solidFill>
+                  <a:srgbClr val="9AA6B2"/>
+                </a:solidFill>
+                <a:latin typeface="Malgun Gothic" pitchFamily="34" charset="0"/>
+                <a:ea typeface="Malgun Gothic" pitchFamily="34" charset="-122"/>
+                <a:cs typeface="Malgun Gothic" pitchFamily="34" charset="-120"/>
+              </a:rPr>
+              <a:t>메모리는 '누가 접근할 수 있는가(범위)'로 나뉩니다. 범위가 넓을수록 크지만 느립니다.</a:t>
+            </a:r>
+            <a:endParaRPr lang="en-US" sz="1500" dirty="0"/>
+          </a:p>
+        </p:txBody>
+      </p:sp>
+      <p:sp>
+        <p:nvSpPr>
+          <p:cNvPr id="5" name="Shape 3"/>
+          <p:cNvSpPr/>
+          <p:nvPr/>
+        </p:nvSpPr>
+        <p:spPr>
+          <a:xfrm>
+            <a:off x="548640" y="1874520"/>
+            <a:ext cx="7315200" cy="3794760"/>
           </a:xfrm>
           <a:prstGeom prst="roundRect">
             <a:avLst>
-              <a:gd name="adj" fmla="val 2124"/>
+              <a:gd name="adj" fmla="val 1687"/>
+            </a:avLst>
+          </a:prstGeom>
+          <a:solidFill>
+            <a:srgbClr val="14201A"/>
+          </a:solidFill>
+          <a:ln w="19050">
+            <a:solidFill>
+              <a:srgbClr val="8CC63F"/>
+            </a:solidFill>
+            <a:prstDash val="solid"/>
+          </a:ln>
+        </p:spPr>
+      </p:sp>
+      <p:sp>
+        <p:nvSpPr>
+          <p:cNvPr id="6" name="Text 4"/>
+          <p:cNvSpPr/>
+          <p:nvPr/>
+        </p:nvSpPr>
+        <p:spPr>
+          <a:xfrm>
+            <a:off x="777240" y="2002536"/>
+            <a:ext cx="6858000" cy="365760"/>
+          </a:xfrm>
+          <a:prstGeom prst="rect">
+            <a:avLst/>
+          </a:prstGeom>
+          <a:noFill/>
+          <a:ln/>
+        </p:spPr>
+        <p:txBody>
+          <a:bodyPr wrap="square" lIns="0" tIns="0" rIns="0" bIns="0" rtlCol="0" anchor="ctr"/>
+          <a:lstStyle/>
+          <a:p>
+            <a:pPr indent="0" marL="0">
+              <a:buNone/>
+            </a:pPr>
+            <a:r>
+              <a:rPr lang="en-US" sz="1400" b="1" dirty="0">
+                <a:solidFill>
+                  <a:srgbClr val="8CC63F"/>
+                </a:solidFill>
+                <a:latin typeface="Malgun Gothic" pitchFamily="34" charset="0"/>
+                <a:ea typeface="Malgun Gothic" pitchFamily="34" charset="-122"/>
+                <a:cs typeface="Malgun Gothic" pitchFamily="34" charset="-120"/>
+              </a:rPr>
+              <a:t>전역 메모리(Global)  ·  모든 스레드 접근  ·  크고 느림 (예: 4 GB)</a:t>
+            </a:r>
+            <a:endParaRPr lang="en-US" sz="1400" dirty="0"/>
+          </a:p>
+        </p:txBody>
+      </p:sp>
+      <p:sp>
+        <p:nvSpPr>
+          <p:cNvPr id="7" name="Text 5"/>
+          <p:cNvSpPr/>
+          <p:nvPr/>
+        </p:nvSpPr>
+        <p:spPr>
+          <a:xfrm>
+            <a:off x="777240" y="2350008"/>
+            <a:ext cx="6858000" cy="292608"/>
+          </a:xfrm>
+          <a:prstGeom prst="rect">
+            <a:avLst/>
+          </a:prstGeom>
+          <a:noFill/>
+          <a:ln/>
+        </p:spPr>
+        <p:txBody>
+          <a:bodyPr wrap="square" lIns="0" tIns="0" rIns="0" bIns="0" rtlCol="0" anchor="ctr"/>
+          <a:lstStyle/>
+          <a:p>
+            <a:pPr indent="0" marL="0">
+              <a:buNone/>
+            </a:pPr>
+            <a:r>
+              <a:rPr lang="en-US" sz="1150" i="1" dirty="0">
+                <a:solidFill>
+                  <a:srgbClr val="8CC63F"/>
+                </a:solidFill>
+                <a:latin typeface="Malgun Gothic" pitchFamily="34" charset="0"/>
+                <a:ea typeface="Malgun Gothic" pitchFamily="34" charset="-122"/>
+                <a:cs typeface="Malgun Gothic" pitchFamily="34" charset="-120"/>
+              </a:rPr>
+              <a:t>← cuda_memtest가 검사하는 대상</a:t>
+            </a:r>
+            <a:endParaRPr lang="en-US" sz="1150" dirty="0"/>
+          </a:p>
+        </p:txBody>
+      </p:sp>
+      <p:sp>
+        <p:nvSpPr>
+          <p:cNvPr id="8" name="Shape 6"/>
+          <p:cNvSpPr/>
+          <p:nvPr/>
+        </p:nvSpPr>
+        <p:spPr>
+          <a:xfrm>
+            <a:off x="914400" y="2743200"/>
+            <a:ext cx="6583680" cy="2560320"/>
+          </a:xfrm>
+          <a:prstGeom prst="roundRect">
+            <a:avLst>
+              <a:gd name="adj" fmla="val 2143"/>
+            </a:avLst>
+          </a:prstGeom>
+          <a:solidFill>
+            <a:srgbClr val="12212A"/>
+          </a:solidFill>
+          <a:ln w="19050">
+            <a:solidFill>
+              <a:srgbClr val="4FB0C6"/>
+            </a:solidFill>
+            <a:prstDash val="solid"/>
+          </a:ln>
+        </p:spPr>
+      </p:sp>
+      <p:sp>
+        <p:nvSpPr>
+          <p:cNvPr id="9" name="Text 7"/>
+          <p:cNvSpPr/>
+          <p:nvPr/>
+        </p:nvSpPr>
+        <p:spPr>
+          <a:xfrm>
+            <a:off x="1143000" y="2871216"/>
+            <a:ext cx="6126480" cy="320040"/>
+          </a:xfrm>
+          <a:prstGeom prst="rect">
+            <a:avLst/>
+          </a:prstGeom>
+          <a:noFill/>
+          <a:ln/>
+        </p:spPr>
+        <p:txBody>
+          <a:bodyPr wrap="square" lIns="0" tIns="0" rIns="0" bIns="0" rtlCol="0" anchor="ctr"/>
+          <a:lstStyle/>
+          <a:p>
+            <a:pPr indent="0" marL="0">
+              <a:buNone/>
+            </a:pPr>
+            <a:r>
+              <a:rPr lang="en-US" sz="1350" b="1" dirty="0">
+                <a:solidFill>
+                  <a:srgbClr val="4FB0C6"/>
+                </a:solidFill>
+                <a:latin typeface="Malgun Gothic" pitchFamily="34" charset="0"/>
+                <a:ea typeface="Malgun Gothic" pitchFamily="34" charset="-122"/>
+                <a:cs typeface="Malgun Gothic" pitchFamily="34" charset="-120"/>
+              </a:rPr>
+              <a:t>공유 메모리(Shared)  ·  블록 내 스레드끼리 공유  ·  빠름</a:t>
+            </a:r>
+            <a:endParaRPr lang="en-US" sz="1350" dirty="0"/>
+          </a:p>
+        </p:txBody>
+      </p:sp>
+      <p:sp>
+        <p:nvSpPr>
+          <p:cNvPr id="10" name="Text 8"/>
+          <p:cNvSpPr/>
+          <p:nvPr/>
+        </p:nvSpPr>
+        <p:spPr>
+          <a:xfrm>
+            <a:off x="1143000" y="3200400"/>
+            <a:ext cx="6126480" cy="274320"/>
+          </a:xfrm>
+          <a:prstGeom prst="rect">
+            <a:avLst/>
+          </a:prstGeom>
+          <a:noFill/>
+          <a:ln/>
+        </p:spPr>
+        <p:txBody>
+          <a:bodyPr wrap="square" lIns="0" tIns="0" rIns="0" bIns="0" rtlCol="0" anchor="ctr"/>
+          <a:lstStyle/>
+          <a:p>
+            <a:pPr indent="0" marL="0">
+              <a:buNone/>
+            </a:pPr>
+            <a:r>
+              <a:rPr lang="en-US" sz="1100" i="1" dirty="0">
+                <a:solidFill>
+                  <a:srgbClr val="9AA6B2"/>
+                </a:solidFill>
+                <a:latin typeface="Malgun Gothic" pitchFamily="34" charset="0"/>
+                <a:ea typeface="Malgun Gothic" pitchFamily="34" charset="-122"/>
+                <a:cs typeface="Malgun Gothic" pitchFamily="34" charset="-120"/>
+              </a:rPr>
+              <a:t>이 저장소는 거의 쓰지 않음 (개념만)</a:t>
+            </a:r>
+            <a:endParaRPr lang="en-US" sz="1100" dirty="0"/>
+          </a:p>
+        </p:txBody>
+      </p:sp>
+      <p:sp>
+        <p:nvSpPr>
+          <p:cNvPr id="11" name="Shape 9"/>
+          <p:cNvSpPr/>
+          <p:nvPr/>
+        </p:nvSpPr>
+        <p:spPr>
+          <a:xfrm>
+            <a:off x="1280160" y="3566160"/>
+            <a:ext cx="5852160" cy="1417320"/>
+          </a:xfrm>
+          <a:prstGeom prst="roundRect">
+            <a:avLst>
+              <a:gd name="adj" fmla="val 3226"/>
+            </a:avLst>
+          </a:prstGeom>
+          <a:solidFill>
+            <a:srgbClr val="0E1116"/>
+          </a:solidFill>
+          <a:ln w="19050">
+            <a:solidFill>
+              <a:srgbClr val="E0A458"/>
+            </a:solidFill>
+            <a:prstDash val="solid"/>
+          </a:ln>
+        </p:spPr>
+      </p:sp>
+      <p:sp>
+        <p:nvSpPr>
+          <p:cNvPr id="12" name="Text 10"/>
+          <p:cNvSpPr/>
+          <p:nvPr/>
+        </p:nvSpPr>
+        <p:spPr>
+          <a:xfrm>
+            <a:off x="1508760" y="3730752"/>
+            <a:ext cx="5394960" cy="365760"/>
+          </a:xfrm>
+          <a:prstGeom prst="rect">
+            <a:avLst/>
+          </a:prstGeom>
+          <a:noFill/>
+          <a:ln/>
+        </p:spPr>
+        <p:txBody>
+          <a:bodyPr wrap="square" lIns="0" tIns="0" rIns="0" bIns="0" rtlCol="0" anchor="ctr"/>
+          <a:lstStyle/>
+          <a:p>
+            <a:pPr indent="0" marL="0">
+              <a:buNone/>
+            </a:pPr>
+            <a:r>
+              <a:rPr lang="en-US" sz="1350" b="1" dirty="0">
+                <a:solidFill>
+                  <a:srgbClr val="E0A458"/>
+                </a:solidFill>
+                <a:latin typeface="Malgun Gothic" pitchFamily="34" charset="0"/>
+                <a:ea typeface="Malgun Gothic" pitchFamily="34" charset="-122"/>
+                <a:cs typeface="Malgun Gothic" pitchFamily="34" charset="-120"/>
+              </a:rPr>
+              <a:t>레지스터(Register)  ·  스레드 전용  ·  가장 빠름·가장 작음</a:t>
+            </a:r>
+            <a:endParaRPr lang="en-US" sz="1350" dirty="0"/>
+          </a:p>
+        </p:txBody>
+      </p:sp>
+      <p:sp>
+        <p:nvSpPr>
+          <p:cNvPr id="13" name="Text 11"/>
+          <p:cNvSpPr/>
+          <p:nvPr/>
+        </p:nvSpPr>
+        <p:spPr>
+          <a:xfrm>
+            <a:off x="1508760" y="4114800"/>
+            <a:ext cx="5394960" cy="365760"/>
+          </a:xfrm>
+          <a:prstGeom prst="rect">
+            <a:avLst/>
+          </a:prstGeom>
+          <a:noFill/>
+          <a:ln/>
+        </p:spPr>
+        <p:txBody>
+          <a:bodyPr wrap="square" lIns="0" tIns="0" rIns="0" bIns="0" rtlCol="0" anchor="ctr"/>
+          <a:lstStyle/>
+          <a:p>
+            <a:pPr indent="0" marL="0">
+              <a:buNone/>
+            </a:pPr>
+            <a:r>
+              <a:rPr lang="en-US" sz="1200" dirty="0">
+                <a:solidFill>
+                  <a:srgbClr val="E8EDF2"/>
+                </a:solidFill>
+                <a:latin typeface="Courier New" pitchFamily="34" charset="0"/>
+                <a:ea typeface="Courier New" pitchFamily="34" charset="-122"/>
+                <a:cs typeface="Courier New" pitchFamily="34" charset="-120"/>
+              </a:rPr>
+              <a:t>커널 안의 지역 변수 (i, ptr 등)</a:t>
+            </a:r>
+            <a:endParaRPr lang="en-US" sz="1200" dirty="0"/>
+          </a:p>
+        </p:txBody>
+      </p:sp>
+      <p:sp>
+        <p:nvSpPr>
+          <p:cNvPr id="14" name="Shape 12"/>
+          <p:cNvSpPr/>
+          <p:nvPr/>
+        </p:nvSpPr>
+        <p:spPr>
+          <a:xfrm>
+            <a:off x="8366760" y="2560320"/>
+            <a:ext cx="3246120" cy="2377440"/>
+          </a:xfrm>
+          <a:prstGeom prst="roundRect">
+            <a:avLst>
+              <a:gd name="adj" fmla="val 2692"/>
             </a:avLst>
           </a:prstGeom>
           <a:solidFill>
             <a:srgbClr val="1E232C"/>
           </a:solidFill>
-          <a:ln/>
-        </p:spPr>
-      </p:sp>
-      <p:sp>
-        <p:nvSpPr>
-          <p:cNvPr id="5" name="Text 3"/>
-          <p:cNvSpPr/>
-          <p:nvPr/>
-        </p:nvSpPr>
-        <p:spPr>
-          <a:xfrm>
-            <a:off x="804672" y="1810512"/>
-            <a:ext cx="2932176" cy="457200"/>
+          <a:ln w="19050">
+            <a:solidFill>
+              <a:srgbClr val="9AA6B2"/>
+            </a:solidFill>
+            <a:prstDash val="solid"/>
+          </a:ln>
+        </p:spPr>
+      </p:sp>
+      <p:sp>
+        <p:nvSpPr>
+          <p:cNvPr id="15" name="Text 13"/>
+          <p:cNvSpPr/>
+          <p:nvPr/>
+        </p:nvSpPr>
+        <p:spPr>
+          <a:xfrm>
+            <a:off x="8549640" y="2788920"/>
+            <a:ext cx="2880360" cy="365760"/>
           </a:xfrm>
           <a:prstGeom prst="rect">
             <a:avLst/>
@@ -4998,34 +5855,34 @@
           <a:bodyPr wrap="square" lIns="0" tIns="0" rIns="0" bIns="0" rtlCol="0" anchor="ctr"/>
           <a:lstStyle/>
           <a:p>
-            <a:pPr indent="0" marL="0">
-              <a:buNone/>
-            </a:pPr>
-            <a:r>
-              <a:rPr lang="en-US" sz="1900" b="1" dirty="0">
-                <a:solidFill>
-                  <a:srgbClr val="8CC63F"/>
-                </a:solidFill>
-                <a:latin typeface="Courier New" pitchFamily="34" charset="0"/>
-                <a:ea typeface="Courier New" pitchFamily="34" charset="-122"/>
-                <a:cs typeface="Courier New" pitchFamily="34" charset="-120"/>
-              </a:rPr>
-              <a:t>cudaMalloc</a:t>
-            </a:r>
-            <a:endParaRPr lang="en-US" sz="1900" dirty="0"/>
-          </a:p>
-        </p:txBody>
-      </p:sp>
-      <p:sp>
-        <p:nvSpPr>
-          <p:cNvPr id="6" name="Text 4"/>
-          <p:cNvSpPr/>
-          <p:nvPr/>
-        </p:nvSpPr>
-        <p:spPr>
-          <a:xfrm>
-            <a:off x="804672" y="2286000"/>
-            <a:ext cx="2932176" cy="411480"/>
+            <a:pPr algn="ctr" indent="0" marL="0">
+              <a:buNone/>
+            </a:pPr>
+            <a:r>
+              <a:rPr lang="en-US" sz="1500" b="1" dirty="0">
+                <a:solidFill>
+                  <a:srgbClr val="E8EDF2"/>
+                </a:solidFill>
+                <a:latin typeface="Malgun Gothic" pitchFamily="34" charset="0"/>
+                <a:ea typeface="Malgun Gothic" pitchFamily="34" charset="-122"/>
+                <a:cs typeface="Malgun Gothic" pitchFamily="34" charset="-120"/>
+              </a:rPr>
+              <a:t>호스트 메모리</a:t>
+            </a:r>
+            <a:endParaRPr lang="en-US" sz="1500" dirty="0"/>
+          </a:p>
+        </p:txBody>
+      </p:sp>
+      <p:sp>
+        <p:nvSpPr>
+          <p:cNvPr id="16" name="Text 14"/>
+          <p:cNvSpPr/>
+          <p:nvPr/>
+        </p:nvSpPr>
+        <p:spPr>
+          <a:xfrm>
+            <a:off x="8549640" y="3182112"/>
+            <a:ext cx="2880360" cy="320040"/>
           </a:xfrm>
           <a:prstGeom prst="rect">
             <a:avLst/>
@@ -5037,141 +5894,34 @@
           <a:bodyPr wrap="square" lIns="0" tIns="0" rIns="0" bIns="0" rtlCol="0" anchor="ctr"/>
           <a:lstStyle/>
           <a:p>
-            <a:pPr indent="0" marL="0">
-              <a:buNone/>
-            </a:pPr>
-            <a:r>
-              <a:rPr lang="en-US" sz="1500" b="1" dirty="0">
-                <a:solidFill>
-                  <a:srgbClr val="E8EDF2"/>
-                </a:solidFill>
-                <a:latin typeface="Malgun Gothic" pitchFamily="34" charset="0"/>
-                <a:ea typeface="Malgun Gothic" pitchFamily="34" charset="-122"/>
-                <a:cs typeface="Malgun Gothic" pitchFamily="34" charset="-120"/>
-              </a:rPr>
-              <a:t>GPU에 메모리 할당</a:t>
-            </a:r>
-            <a:endParaRPr lang="en-US" sz="1500" dirty="0"/>
-          </a:p>
-        </p:txBody>
-      </p:sp>
-      <p:sp>
-        <p:nvSpPr>
-          <p:cNvPr id="7" name="Text 5"/>
-          <p:cNvSpPr/>
-          <p:nvPr/>
-        </p:nvSpPr>
-        <p:spPr>
-          <a:xfrm>
-            <a:off x="804672" y="2788920"/>
-            <a:ext cx="2932176" cy="2743200"/>
-          </a:xfrm>
-          <a:prstGeom prst="rect">
-            <a:avLst/>
-          </a:prstGeom>
-          <a:noFill/>
-          <a:ln/>
-        </p:spPr>
-        <p:txBody>
-          <a:bodyPr wrap="square" lIns="0" tIns="0" rIns="0" bIns="0" rtlCol="0" anchor="t"/>
-          <a:lstStyle/>
-          <a:p>
-            <a:pPr marL="342900" indent="-342900">
-              <a:spcAft>
-                <a:spcPts val="900"/>
-              </a:spcAft>
-              <a:buSzPct val="100000"/>
-              <a:buChar char="•"/>
-            </a:pPr>
-            <a:r>
-              <a:rPr lang="en-US" sz="1400" dirty="0">
-                <a:solidFill>
-                  <a:srgbClr val="E8EDF2"/>
-                </a:solidFill>
-                <a:latin typeface="Malgun Gothic" pitchFamily="34" charset="0"/>
-                <a:ea typeface="Malgun Gothic" pitchFamily="34" charset="-122"/>
-                <a:cs typeface="Malgun Gothic" pitchFamily="34" charset="-120"/>
-              </a:rPr>
-              <a:t>(void**)&amp;ptr 로 포인터를 받음</a:t>
-            </a:r>
-            <a:endParaRPr lang="en-US" sz="1400" dirty="0"/>
-          </a:p>
-          <a:p>
-            <a:pPr marL="342900" indent="-342900">
-              <a:spcAft>
-                <a:spcPts val="900"/>
-              </a:spcAft>
-              <a:buSzPct val="100000"/>
-              <a:buChar char="•"/>
-            </a:pPr>
-            <a:r>
-              <a:rPr lang="en-US" sz="1400" dirty="0">
-                <a:solidFill>
-                  <a:srgbClr val="E8EDF2"/>
-                </a:solidFill>
-                <a:latin typeface="Malgun Gothic" pitchFamily="34" charset="0"/>
-                <a:ea typeface="Malgun Gothic" pitchFamily="34" charset="-122"/>
-                <a:cs typeface="Malgun Gothic" pitchFamily="34" charset="-120"/>
-              </a:rPr>
-              <a:t>CPU가 아니라 GPU 메모리</a:t>
-            </a:r>
-            <a:endParaRPr lang="en-US" sz="1400" dirty="0"/>
-          </a:p>
-          <a:p>
-            <a:pPr marL="342900" indent="-342900">
-              <a:spcAft>
-                <a:spcPts val="900"/>
-              </a:spcAft>
-              <a:buSzPct val="100000"/>
-              <a:buChar char="•"/>
-            </a:pPr>
-            <a:r>
-              <a:rPr lang="en-US" sz="1400" dirty="0">
-                <a:solidFill>
-                  <a:srgbClr val="E8EDF2"/>
-                </a:solidFill>
-                <a:latin typeface="Malgun Gothic" pitchFamily="34" charset="0"/>
-                <a:ea typeface="Malgun Gothic" pitchFamily="34" charset="-122"/>
-                <a:cs typeface="Malgun Gothic" pitchFamily="34" charset="-120"/>
-              </a:rPr>
-              <a:t>tests.cpp:1573 (오류 버퍼)</a:t>
-            </a:r>
-            <a:endParaRPr lang="en-US" sz="1400" dirty="0"/>
-          </a:p>
-        </p:txBody>
-      </p:sp>
-      <p:sp>
-        <p:nvSpPr>
-          <p:cNvPr id="8" name="Shape 6"/>
-          <p:cNvSpPr/>
-          <p:nvPr/>
-        </p:nvSpPr>
-        <p:spPr>
-          <a:xfrm>
-            <a:off x="4358640" y="1600200"/>
-            <a:ext cx="3444240" cy="4114800"/>
-          </a:xfrm>
-          <a:prstGeom prst="roundRect">
-            <a:avLst>
-              <a:gd name="adj" fmla="val 2124"/>
-            </a:avLst>
-          </a:prstGeom>
-          <a:solidFill>
-            <a:srgbClr val="1E232C"/>
-          </a:solidFill>
-          <a:ln/>
-        </p:spPr>
-      </p:sp>
-      <p:sp>
-        <p:nvSpPr>
-          <p:cNvPr id="9" name="Text 7"/>
-          <p:cNvSpPr/>
-          <p:nvPr/>
-        </p:nvSpPr>
-        <p:spPr>
-          <a:xfrm>
-            <a:off x="4614672" y="1810512"/>
-            <a:ext cx="2932176" cy="457200"/>
+            <a:pPr algn="ctr" indent="0" marL="0">
+              <a:buNone/>
+            </a:pPr>
+            <a:r>
+              <a:rPr lang="en-US" sz="1200" dirty="0">
+                <a:solidFill>
+                  <a:srgbClr val="9AA6B2"/>
+                </a:solidFill>
+                <a:latin typeface="Malgun Gothic" pitchFamily="34" charset="0"/>
+                <a:ea typeface="Malgun Gothic" pitchFamily="34" charset="-122"/>
+                <a:cs typeface="Malgun Gothic" pitchFamily="34" charset="-120"/>
+              </a:rPr>
+              <a:t>(CPU RAM)</a:t>
+            </a:r>
+            <a:endParaRPr lang="en-US" sz="1200" dirty="0"/>
+          </a:p>
+        </p:txBody>
+      </p:sp>
+      <p:sp>
+        <p:nvSpPr>
+          <p:cNvPr id="17" name="Text 15"/>
+          <p:cNvSpPr/>
+          <p:nvPr/>
+        </p:nvSpPr>
+        <p:spPr>
+          <a:xfrm>
+            <a:off x="8549640" y="3611880"/>
+            <a:ext cx="2880360" cy="320040"/>
           </a:xfrm>
           <a:prstGeom prst="rect">
             <a:avLst/>
@@ -5183,34 +5933,121 @@
           <a:bodyPr wrap="square" lIns="0" tIns="0" rIns="0" bIns="0" rtlCol="0" anchor="ctr"/>
           <a:lstStyle/>
           <a:p>
-            <a:pPr indent="0" marL="0">
-              <a:buNone/>
-            </a:pPr>
-            <a:r>
-              <a:rPr lang="en-US" sz="1900" b="1" dirty="0">
+            <a:pPr algn="ctr" indent="0" marL="0">
+              <a:buNone/>
+            </a:pPr>
+            <a:r>
+              <a:rPr lang="en-US" sz="1200" dirty="0">
+                <a:solidFill>
+                  <a:srgbClr val="9AA6B2"/>
+                </a:solidFill>
+                <a:latin typeface="Malgun Gothic" pitchFamily="34" charset="0"/>
+                <a:ea typeface="Malgun Gothic" pitchFamily="34" charset="-122"/>
+                <a:cs typeface="Malgun Gothic" pitchFamily="34" charset="-120"/>
+              </a:rPr>
+              <a:t>GPU와 별개</a:t>
+            </a:r>
+            <a:endParaRPr lang="en-US" sz="1200" dirty="0"/>
+          </a:p>
+        </p:txBody>
+      </p:sp>
+      <p:sp>
+        <p:nvSpPr>
+          <p:cNvPr id="18" name="Text 16"/>
+          <p:cNvSpPr/>
+          <p:nvPr/>
+        </p:nvSpPr>
+        <p:spPr>
+          <a:xfrm>
+            <a:off x="8549640" y="4023360"/>
+            <a:ext cx="2880360" cy="640080"/>
+          </a:xfrm>
+          <a:prstGeom prst="rect">
+            <a:avLst/>
+          </a:prstGeom>
+          <a:noFill/>
+          <a:ln/>
+        </p:spPr>
+        <p:txBody>
+          <a:bodyPr wrap="square" lIns="0" tIns="0" rIns="0" bIns="0" rtlCol="0" anchor="ctr"/>
+          <a:lstStyle/>
+          <a:p>
+            <a:pPr algn="ctr" indent="0" marL="0">
+              <a:lnSpc>
+                <a:spcPct val="105000"/>
+              </a:lnSpc>
+              <a:buNone/>
+            </a:pPr>
+            <a:r>
+              <a:rPr lang="en-US" sz="1150" i="1" dirty="0">
                 <a:solidFill>
                   <a:srgbClr val="4FB0C6"/>
                 </a:solidFill>
-                <a:latin typeface="Courier New" pitchFamily="34" charset="0"/>
-                <a:ea typeface="Courier New" pitchFamily="34" charset="-122"/>
-                <a:cs typeface="Courier New" pitchFamily="34" charset="-120"/>
-              </a:rPr>
-              <a:t>cudaMemset</a:t>
-            </a:r>
-            <a:endParaRPr lang="en-US" sz="1900" dirty="0"/>
-          </a:p>
-        </p:txBody>
-      </p:sp>
-      <p:sp>
-        <p:nvSpPr>
-          <p:cNvPr id="10" name="Text 8"/>
-          <p:cNvSpPr/>
-          <p:nvPr/>
-        </p:nvSpPr>
-        <p:spPr>
-          <a:xfrm>
-            <a:off x="4614672" y="2286000"/>
-            <a:ext cx="2932176" cy="411480"/>
+                <a:latin typeface="Malgun Gothic" pitchFamily="34" charset="0"/>
+                <a:ea typeface="Malgun Gothic" pitchFamily="34" charset="-122"/>
+                <a:cs typeface="Malgun Gothic" pitchFamily="34" charset="-120"/>
+              </a:rPr>
+              <a:t>cudaMemcpy로</a:t>
+            </a:r>
+            <a:endParaRPr lang="en-US" sz="1150" dirty="0"/>
+          </a:p>
+          <a:p>
+            <a:pPr algn="ctr" indent="0" marL="0">
+              <a:lnSpc>
+                <a:spcPct val="105000"/>
+              </a:lnSpc>
+              <a:buNone/>
+            </a:pPr>
+            <a:r>
+              <a:rPr lang="en-US" sz="1150" i="1" dirty="0">
+                <a:solidFill>
+                  <a:srgbClr val="4FB0C6"/>
+                </a:solidFill>
+                <a:latin typeface="Malgun Gothic" pitchFamily="34" charset="0"/>
+                <a:ea typeface="Malgun Gothic" pitchFamily="34" charset="-122"/>
+                <a:cs typeface="Malgun Gothic" pitchFamily="34" charset="-120"/>
+              </a:rPr>
+              <a:t>오류 정보를 여기로</a:t>
+            </a:r>
+            <a:endParaRPr lang="en-US" sz="1150" dirty="0"/>
+          </a:p>
+        </p:txBody>
+      </p:sp>
+      <p:sp>
+        <p:nvSpPr>
+          <p:cNvPr id="19" name="Shape 17"/>
+          <p:cNvSpPr/>
+          <p:nvPr/>
+        </p:nvSpPr>
+        <p:spPr>
+          <a:xfrm>
+            <a:off x="7891272" y="3520440"/>
+            <a:ext cx="448056" cy="0"/>
+          </a:xfrm>
+          <a:prstGeom prst="line">
+            <a:avLst/>
+          </a:prstGeom>
+          <a:noFill/>
+          <a:ln w="31750">
+            <a:solidFill>
+              <a:srgbClr val="4FB0C6"/>
+            </a:solidFill>
+            <a:prstDash val="solid"/>
+            <a:headEnd type="triangle"/>
+            <a:tailEnd type="triangle"/>
+          </a:ln>
+        </p:spPr>
+      </p:sp>
+      <p:sp>
+        <p:nvSpPr>
+          <p:cNvPr id="20" name="Text 18"/>
+          <p:cNvSpPr/>
+          <p:nvPr/>
+        </p:nvSpPr>
+        <p:spPr>
+          <a:xfrm>
+            <a:off x="548640" y="5852160"/>
+            <a:ext cx="11064240" cy="365760"/>
           </a:xfrm>
           <a:prstGeom prst="rect">
             <a:avLst/>
@@ -5222,320 +6059,11 @@
           <a:bodyPr wrap="square" lIns="0" tIns="0" rIns="0" bIns="0" rtlCol="0" anchor="ctr"/>
           <a:lstStyle/>
           <a:p>
-            <a:pPr indent="0" marL="0">
-              <a:buNone/>
-            </a:pPr>
-            <a:r>
-              <a:rPr lang="en-US" sz="1500" b="1" dirty="0">
-                <a:solidFill>
-                  <a:srgbClr val="E8EDF2"/>
-                </a:solidFill>
-                <a:latin typeface="Malgun Gothic" pitchFamily="34" charset="0"/>
-                <a:ea typeface="Malgun Gothic" pitchFamily="34" charset="-122"/>
-                <a:cs typeface="Malgun Gothic" pitchFamily="34" charset="-120"/>
-              </a:rPr>
-              <a:t>GPU 메모리 초기화</a:t>
-            </a:r>
-            <a:endParaRPr lang="en-US" sz="1500" dirty="0"/>
-          </a:p>
-        </p:txBody>
-      </p:sp>
-      <p:sp>
-        <p:nvSpPr>
-          <p:cNvPr id="11" name="Text 9"/>
-          <p:cNvSpPr/>
-          <p:nvPr/>
-        </p:nvSpPr>
-        <p:spPr>
-          <a:xfrm>
-            <a:off x="4614672" y="2788920"/>
-            <a:ext cx="2932176" cy="2743200"/>
-          </a:xfrm>
-          <a:prstGeom prst="rect">
-            <a:avLst/>
-          </a:prstGeom>
-          <a:noFill/>
-          <a:ln/>
-        </p:spPr>
-        <p:txBody>
-          <a:bodyPr wrap="square" lIns="0" tIns="0" rIns="0" bIns="0" rtlCol="0" anchor="t"/>
-          <a:lstStyle/>
-          <a:p>
-            <a:pPr marL="342900" indent="-342900">
-              <a:spcAft>
-                <a:spcPts val="900"/>
-              </a:spcAft>
-              <a:buSzPct val="100000"/>
-              <a:buChar char="•"/>
-            </a:pPr>
-            <a:r>
-              <a:rPr lang="en-US" sz="1400" dirty="0">
-                <a:solidFill>
-                  <a:srgbClr val="E8EDF2"/>
-                </a:solidFill>
-                <a:latin typeface="Malgun Gothic" pitchFamily="34" charset="0"/>
-                <a:ea typeface="Malgun Gothic" pitchFamily="34" charset="-122"/>
-                <a:cs typeface="Malgun Gothic" pitchFamily="34" charset="-120"/>
-              </a:rPr>
-              <a:t>보통 0으로 채움</a:t>
-            </a:r>
-            <a:endParaRPr lang="en-US" sz="1400" dirty="0"/>
-          </a:p>
-          <a:p>
-            <a:pPr marL="342900" indent="-342900">
-              <a:spcAft>
-                <a:spcPts val="900"/>
-              </a:spcAft>
-              <a:buSzPct val="100000"/>
-              <a:buChar char="•"/>
-            </a:pPr>
-            <a:r>
-              <a:rPr lang="en-US" sz="1400" dirty="0">
-                <a:solidFill>
-                  <a:srgbClr val="E8EDF2"/>
-                </a:solidFill>
-                <a:latin typeface="Malgun Gothic" pitchFamily="34" charset="0"/>
-                <a:ea typeface="Malgun Gothic" pitchFamily="34" charset="-122"/>
-                <a:cs typeface="Malgun Gothic" pitchFamily="34" charset="-120"/>
-              </a:rPr>
-              <a:t>할당 직후 깨끗이</a:t>
-            </a:r>
-            <a:endParaRPr lang="en-US" sz="1400" dirty="0"/>
-          </a:p>
-          <a:p>
-            <a:pPr marL="342900" indent="-342900">
-              <a:spcAft>
-                <a:spcPts val="900"/>
-              </a:spcAft>
-              <a:buSzPct val="100000"/>
-              <a:buChar char="•"/>
-            </a:pPr>
-            <a:r>
-              <a:rPr lang="en-US" sz="1400" dirty="0">
-                <a:solidFill>
-                  <a:srgbClr val="E8EDF2"/>
-                </a:solidFill>
-                <a:latin typeface="Malgun Gothic" pitchFamily="34" charset="0"/>
-                <a:ea typeface="Malgun Gothic" pitchFamily="34" charset="-122"/>
-                <a:cs typeface="Malgun Gothic" pitchFamily="34" charset="-120"/>
-              </a:rPr>
-              <a:t>error_checking에서 재초기화</a:t>
-            </a:r>
-            <a:endParaRPr lang="en-US" sz="1400" dirty="0"/>
-          </a:p>
-        </p:txBody>
-      </p:sp>
-      <p:sp>
-        <p:nvSpPr>
-          <p:cNvPr id="12" name="Shape 10"/>
-          <p:cNvSpPr/>
-          <p:nvPr/>
-        </p:nvSpPr>
-        <p:spPr>
-          <a:xfrm>
-            <a:off x="8168640" y="1600200"/>
-            <a:ext cx="3444240" cy="4114800"/>
-          </a:xfrm>
-          <a:prstGeom prst="roundRect">
-            <a:avLst>
-              <a:gd name="adj" fmla="val 2124"/>
-            </a:avLst>
-          </a:prstGeom>
-          <a:solidFill>
-            <a:srgbClr val="1E232C"/>
-          </a:solidFill>
-          <a:ln/>
-        </p:spPr>
-      </p:sp>
-      <p:sp>
-        <p:nvSpPr>
-          <p:cNvPr id="13" name="Text 11"/>
-          <p:cNvSpPr/>
-          <p:nvPr/>
-        </p:nvSpPr>
-        <p:spPr>
-          <a:xfrm>
-            <a:off x="8424672" y="1810512"/>
-            <a:ext cx="2932176" cy="457200"/>
-          </a:xfrm>
-          <a:prstGeom prst="rect">
-            <a:avLst/>
-          </a:prstGeom>
-          <a:noFill/>
-          <a:ln/>
-        </p:spPr>
-        <p:txBody>
-          <a:bodyPr wrap="square" lIns="0" tIns="0" rIns="0" bIns="0" rtlCol="0" anchor="ctr"/>
-          <a:lstStyle/>
-          <a:p>
-            <a:pPr indent="0" marL="0">
-              <a:buNone/>
-            </a:pPr>
-            <a:r>
-              <a:rPr lang="en-US" sz="1900" b="1" dirty="0">
-                <a:solidFill>
-                  <a:srgbClr val="E0A458"/>
-                </a:solidFill>
-                <a:latin typeface="Courier New" pitchFamily="34" charset="0"/>
-                <a:ea typeface="Courier New" pitchFamily="34" charset="-122"/>
-                <a:cs typeface="Courier New" pitchFamily="34" charset="-120"/>
-              </a:rPr>
-              <a:t>cudaMemcpy</a:t>
-            </a:r>
-            <a:endParaRPr lang="en-US" sz="1900" dirty="0"/>
-          </a:p>
-        </p:txBody>
-      </p:sp>
-      <p:sp>
-        <p:nvSpPr>
-          <p:cNvPr id="14" name="Text 12"/>
-          <p:cNvSpPr/>
-          <p:nvPr/>
-        </p:nvSpPr>
-        <p:spPr>
-          <a:xfrm>
-            <a:off x="8424672" y="2286000"/>
-            <a:ext cx="2932176" cy="411480"/>
-          </a:xfrm>
-          <a:prstGeom prst="rect">
-            <a:avLst/>
-          </a:prstGeom>
-          <a:noFill/>
-          <a:ln/>
-        </p:spPr>
-        <p:txBody>
-          <a:bodyPr wrap="square" lIns="0" tIns="0" rIns="0" bIns="0" rtlCol="0" anchor="ctr"/>
-          <a:lstStyle/>
-          <a:p>
-            <a:pPr indent="0" marL="0">
-              <a:buNone/>
-            </a:pPr>
-            <a:r>
-              <a:rPr lang="en-US" sz="1500" b="1" dirty="0">
-                <a:solidFill>
-                  <a:srgbClr val="E8EDF2"/>
-                </a:solidFill>
-                <a:latin typeface="Malgun Gothic" pitchFamily="34" charset="0"/>
-                <a:ea typeface="Malgun Gothic" pitchFamily="34" charset="-122"/>
-                <a:cs typeface="Malgun Gothic" pitchFamily="34" charset="-120"/>
-              </a:rPr>
-              <a:t>GPU ↔ CPU 복사</a:t>
-            </a:r>
-            <a:endParaRPr lang="en-US" sz="1500" dirty="0"/>
-          </a:p>
-        </p:txBody>
-      </p:sp>
-      <p:sp>
-        <p:nvSpPr>
-          <p:cNvPr id="15" name="Text 13"/>
-          <p:cNvSpPr/>
-          <p:nvPr/>
-        </p:nvSpPr>
-        <p:spPr>
-          <a:xfrm>
-            <a:off x="8424672" y="2788920"/>
-            <a:ext cx="2932176" cy="2743200"/>
-          </a:xfrm>
-          <a:prstGeom prst="rect">
-            <a:avLst/>
-          </a:prstGeom>
-          <a:noFill/>
-          <a:ln/>
-        </p:spPr>
-        <p:txBody>
-          <a:bodyPr wrap="square" lIns="0" tIns="0" rIns="0" bIns="0" rtlCol="0" anchor="t"/>
-          <a:lstStyle/>
-          <a:p>
-            <a:pPr marL="342900" indent="-342900">
-              <a:spcAft>
-                <a:spcPts val="900"/>
-              </a:spcAft>
-              <a:buSzPct val="100000"/>
-              <a:buChar char="•"/>
-            </a:pPr>
-            <a:r>
-              <a:rPr lang="en-US" sz="1400" dirty="0">
-                <a:solidFill>
-                  <a:srgbClr val="E8EDF2"/>
-                </a:solidFill>
-                <a:latin typeface="Malgun Gothic" pitchFamily="34" charset="0"/>
-                <a:ea typeface="Malgun Gothic" pitchFamily="34" charset="-122"/>
-                <a:cs typeface="Malgun Gothic" pitchFamily="34" charset="-120"/>
-              </a:rPr>
-              <a:t>방향 지정 필수</a:t>
-            </a:r>
-            <a:endParaRPr lang="en-US" sz="1400" dirty="0"/>
-          </a:p>
-          <a:p>
-            <a:pPr marL="342900" indent="-342900">
-              <a:spcAft>
-                <a:spcPts val="900"/>
-              </a:spcAft>
-              <a:buSzPct val="100000"/>
-              <a:buChar char="•"/>
-            </a:pPr>
-            <a:r>
-              <a:rPr lang="en-US" sz="1400" dirty="0">
-                <a:solidFill>
-                  <a:srgbClr val="E8EDF2"/>
-                </a:solidFill>
-                <a:latin typeface="Malgun Gothic" pitchFamily="34" charset="0"/>
-                <a:ea typeface="Malgun Gothic" pitchFamily="34" charset="-122"/>
-                <a:cs typeface="Malgun Gothic" pitchFamily="34" charset="-120"/>
-              </a:rPr>
-              <a:t>DeviceToHost = GPU→CPU</a:t>
-            </a:r>
-            <a:endParaRPr lang="en-US" sz="1400" dirty="0"/>
-          </a:p>
-          <a:p>
-            <a:pPr marL="342900" indent="-342900">
-              <a:spcAft>
-                <a:spcPts val="900"/>
-              </a:spcAft>
-              <a:buSzPct val="100000"/>
-              <a:buChar char="•"/>
-            </a:pPr>
-            <a:r>
-              <a:rPr lang="en-US" sz="1400" dirty="0">
-                <a:solidFill>
-                  <a:srgbClr val="E8EDF2"/>
-                </a:solidFill>
-                <a:latin typeface="Malgun Gothic" pitchFamily="34" charset="0"/>
-                <a:ea typeface="Malgun Gothic" pitchFamily="34" charset="-122"/>
-                <a:cs typeface="Malgun Gothic" pitchFamily="34" charset="-120"/>
-              </a:rPr>
-              <a:t>오류 정보를 CPU로 가져옴</a:t>
-            </a:r>
-            <a:endParaRPr lang="en-US" sz="1400" dirty="0"/>
-          </a:p>
-        </p:txBody>
-      </p:sp>
-      <p:sp>
-        <p:nvSpPr>
-          <p:cNvPr id="16" name="Text 14"/>
-          <p:cNvSpPr/>
-          <p:nvPr/>
-        </p:nvSpPr>
-        <p:spPr>
-          <a:xfrm>
-            <a:off x="548640" y="5943600"/>
-            <a:ext cx="11064240" cy="457200"/>
-          </a:xfrm>
-          <a:prstGeom prst="rect">
-            <a:avLst/>
-          </a:prstGeom>
-          <a:noFill/>
-          <a:ln/>
-        </p:spPr>
-        <p:txBody>
-          <a:bodyPr wrap="square" lIns="0" tIns="0" rIns="0" bIns="0" rtlCol="0" anchor="ctr"/>
-          <a:lstStyle/>
-          <a:p>
             <a:pPr algn="ctr" indent="0" marL="0">
               <a:buNone/>
             </a:pPr>
             <a:r>
-              <a:rPr lang="en-US" sz="1400" i="1" dirty="0">
+              <a:rPr lang="en-US" sz="1300" i="1" dirty="0">
                 <a:solidFill>
                   <a:srgbClr val="9AA6B2"/>
                 </a:solidFill>
@@ -5543,9 +6071,9 @@
                 <a:ea typeface="Malgun Gothic" pitchFamily="34" charset="-122"/>
                 <a:cs typeface="Malgun Gothic" pitchFamily="34" charset="-120"/>
               </a:rPr>
-              <a:t>세 API 모두 allocate_small_mem(할당·초기화)과 error_checking(복사)에서 실제로 볼 수 있습니다.</a:t>
-            </a:r>
-            <a:endParaRPr lang="en-US" sz="1400" dirty="0"/>
+              <a:t>범위: 레지스터(스레드) ⊂ 공유(블록) ⊂ 전역(전체 GPU). 호스트 메모리는 GPU 밖 — cudaMemcpy로만 오갑니다.</a:t>
+            </a:r>
+            <a:endParaRPr lang="en-US" sz="1300" dirty="0"/>
           </a:p>
         </p:txBody>
       </p:sp>
@@ -5618,7 +6146,7 @@
                 <a:ea typeface="Courier New" pitchFamily="34" charset="-122"/>
                 <a:cs typeface="Courier New" pitchFamily="34" charset="-120"/>
               </a:rPr>
-              <a:t>4</a:t>
+              <a:t>3</a:t>
             </a:r>
             <a:endParaRPr lang="en-US" sz="2200" dirty="0"/>
           </a:p>
@@ -5657,7 +6185,7 @@
                 <a:ea typeface="Malgun Gothic" pitchFamily="34" charset="-122"/>
                 <a:cs typeface="Malgun Gothic" pitchFamily="34" charset="-120"/>
               </a:rPr>
-              <a:t>핵심 · 왜 커널을 끝내고 다시 시작할까</a:t>
+              <a:t>메모리 3종 API</a:t>
             </a:r>
             <a:endParaRPr lang="en-US" sz="3000" dirty="0"/>
           </a:p>
@@ -5665,57 +6193,18 @@
       </p:sp>
       <p:sp>
         <p:nvSpPr>
-          <p:cNvPr id="4" name="Text 2"/>
-          <p:cNvSpPr/>
-          <p:nvPr/>
-        </p:nvSpPr>
-        <p:spPr>
-          <a:xfrm>
-            <a:off x="548640" y="1463040"/>
-            <a:ext cx="11064240" cy="457200"/>
-          </a:xfrm>
-          <a:prstGeom prst="rect">
-            <a:avLst/>
-          </a:prstGeom>
-          <a:noFill/>
-          <a:ln/>
-        </p:spPr>
-        <p:txBody>
-          <a:bodyPr wrap="square" lIns="0" tIns="0" rIns="0" bIns="0" rtlCol="0" anchor="ctr"/>
-          <a:lstStyle/>
-          <a:p>
-            <a:pPr indent="0" marL="0">
-              <a:buNone/>
-            </a:pPr>
-            <a:r>
-              <a:rPr lang="en-US" sz="1700" dirty="0">
-                <a:solidFill>
-                  <a:srgbClr val="E8EDF2"/>
-                </a:solidFill>
-                <a:latin typeface="Malgun Gothic" pitchFamily="34" charset="0"/>
-                <a:ea typeface="Malgun Gothic" pitchFamily="34" charset="-122"/>
-                <a:cs typeface="Malgun Gothic" pitchFamily="34" charset="-120"/>
-              </a:rPr>
-              <a:t>같은 커널에서 쓰고 바로 읽으면, 아직 메모리에 반영 안 된 값을 읽을 수 있습니다.</a:t>
-            </a:r>
-            <a:endParaRPr lang="en-US" sz="1700" dirty="0"/>
-          </a:p>
-        </p:txBody>
-      </p:sp>
-      <p:sp>
-        <p:nvSpPr>
-          <p:cNvPr id="5" name="Shape 3"/>
-          <p:cNvSpPr/>
-          <p:nvPr/>
-        </p:nvSpPr>
-        <p:spPr>
-          <a:xfrm>
-            <a:off x="548640" y="2148840"/>
-            <a:ext cx="3346704" cy="2148840"/>
+          <p:cNvPr id="4" name="Shape 2"/>
+          <p:cNvSpPr/>
+          <p:nvPr/>
+        </p:nvSpPr>
+        <p:spPr>
+          <a:xfrm>
+            <a:off x="548640" y="1600200"/>
+            <a:ext cx="3444240" cy="4114800"/>
           </a:xfrm>
           <a:prstGeom prst="roundRect">
             <a:avLst>
-              <a:gd name="adj" fmla="val 3404"/>
+              <a:gd name="adj" fmla="val 2124"/>
             </a:avLst>
           </a:prstGeom>
           <a:solidFill>
@@ -5726,14 +6215,14 @@
       </p:sp>
       <p:sp>
         <p:nvSpPr>
-          <p:cNvPr id="6" name="Text 4"/>
-          <p:cNvSpPr/>
-          <p:nvPr/>
-        </p:nvSpPr>
-        <p:spPr>
-          <a:xfrm>
-            <a:off x="777240" y="2350008"/>
-            <a:ext cx="2889504" cy="502920"/>
+          <p:cNvPr id="5" name="Text 3"/>
+          <p:cNvSpPr/>
+          <p:nvPr/>
+        </p:nvSpPr>
+        <p:spPr>
+          <a:xfrm>
+            <a:off x="804672" y="1810512"/>
+            <a:ext cx="2932176" cy="457200"/>
           </a:xfrm>
           <a:prstGeom prst="rect">
             <a:avLst/>
@@ -5749,69 +6238,69 @@
               <a:buNone/>
             </a:pPr>
             <a:r>
-              <a:rPr lang="en-US" sz="1800" b="1" dirty="0">
+              <a:rPr lang="en-US" sz="1900" b="1" dirty="0">
                 <a:solidFill>
                   <a:srgbClr val="8CC63F"/>
-                </a:solidFill>
-                <a:latin typeface="Malgun Gothic" pitchFamily="34" charset="0"/>
-                <a:ea typeface="Malgun Gothic" pitchFamily="34" charset="-122"/>
-                <a:cs typeface="Malgun Gothic" pitchFamily="34" charset="-120"/>
-              </a:rPr>
-              <a:t>① 쓰기 커널</a:t>
-            </a:r>
-            <a:endParaRPr lang="en-US" sz="1800" dirty="0"/>
-          </a:p>
-        </p:txBody>
-      </p:sp>
-      <p:sp>
-        <p:nvSpPr>
-          <p:cNvPr id="7" name="Text 5"/>
-          <p:cNvSpPr/>
-          <p:nvPr/>
-        </p:nvSpPr>
-        <p:spPr>
-          <a:xfrm>
-            <a:off x="777240" y="2926080"/>
-            <a:ext cx="2889504" cy="457200"/>
-          </a:xfrm>
-          <a:prstGeom prst="rect">
-            <a:avLst/>
-          </a:prstGeom>
-          <a:noFill/>
-          <a:ln/>
-        </p:spPr>
-        <p:txBody>
-          <a:bodyPr wrap="square" lIns="0" tIns="0" rIns="0" bIns="0" rtlCol="0" anchor="ctr"/>
-          <a:lstStyle/>
-          <a:p>
-            <a:pPr indent="0" marL="0">
-              <a:buNone/>
-            </a:pPr>
-            <a:r>
-              <a:rPr lang="en-US" sz="1250" dirty="0">
-                <a:solidFill>
-                  <a:srgbClr val="E8EDF2"/>
                 </a:solidFill>
                 <a:latin typeface="Courier New" pitchFamily="34" charset="0"/>
                 <a:ea typeface="Courier New" pitchFamily="34" charset="-122"/>
                 <a:cs typeface="Courier New" pitchFamily="34" charset="-120"/>
               </a:rPr>
-              <a:t>kernel_move_inv_write</a:t>
-            </a:r>
-            <a:endParaRPr lang="en-US" sz="1250" dirty="0"/>
-          </a:p>
-        </p:txBody>
-      </p:sp>
-      <p:sp>
-        <p:nvSpPr>
-          <p:cNvPr id="8" name="Text 6"/>
-          <p:cNvSpPr/>
-          <p:nvPr/>
-        </p:nvSpPr>
-        <p:spPr>
-          <a:xfrm>
-            <a:off x="777240" y="3429000"/>
-            <a:ext cx="2889504" cy="731520"/>
+              <a:t>cudaMalloc</a:t>
+            </a:r>
+            <a:endParaRPr lang="en-US" sz="1900" dirty="0"/>
+          </a:p>
+        </p:txBody>
+      </p:sp>
+      <p:sp>
+        <p:nvSpPr>
+          <p:cNvPr id="6" name="Text 4"/>
+          <p:cNvSpPr/>
+          <p:nvPr/>
+        </p:nvSpPr>
+        <p:spPr>
+          <a:xfrm>
+            <a:off x="804672" y="2286000"/>
+            <a:ext cx="2932176" cy="411480"/>
+          </a:xfrm>
+          <a:prstGeom prst="rect">
+            <a:avLst/>
+          </a:prstGeom>
+          <a:noFill/>
+          <a:ln/>
+        </p:spPr>
+        <p:txBody>
+          <a:bodyPr wrap="square" lIns="0" tIns="0" rIns="0" bIns="0" rtlCol="0" anchor="ctr"/>
+          <a:lstStyle/>
+          <a:p>
+            <a:pPr indent="0" marL="0">
+              <a:buNone/>
+            </a:pPr>
+            <a:r>
+              <a:rPr lang="en-US" sz="1500" b="1" dirty="0">
+                <a:solidFill>
+                  <a:srgbClr val="E8EDF2"/>
+                </a:solidFill>
+                <a:latin typeface="Malgun Gothic" pitchFamily="34" charset="0"/>
+                <a:ea typeface="Malgun Gothic" pitchFamily="34" charset="-122"/>
+                <a:cs typeface="Malgun Gothic" pitchFamily="34" charset="-120"/>
+              </a:rPr>
+              <a:t>GPU에 메모리 할당</a:t>
+            </a:r>
+            <a:endParaRPr lang="en-US" sz="1500" dirty="0"/>
+          </a:p>
+        </p:txBody>
+      </p:sp>
+      <p:sp>
+        <p:nvSpPr>
+          <p:cNvPr id="7" name="Text 5"/>
+          <p:cNvSpPr/>
+          <p:nvPr/>
+        </p:nvSpPr>
+        <p:spPr>
+          <a:xfrm>
+            <a:off x="804672" y="2788920"/>
+            <a:ext cx="2932176" cy="2743200"/>
           </a:xfrm>
           <a:prstGeom prst="rect">
             <a:avLst/>
@@ -5823,77 +6312,269 @@
           <a:bodyPr wrap="square" lIns="0" tIns="0" rIns="0" bIns="0" rtlCol="0" anchor="t"/>
           <a:lstStyle/>
           <a:p>
+            <a:pPr marL="342900" indent="-342900">
+              <a:spcAft>
+                <a:spcPts val="900"/>
+              </a:spcAft>
+              <a:buSzPct val="100000"/>
+              <a:buChar char="•"/>
+            </a:pPr>
+            <a:r>
+              <a:rPr lang="en-US" sz="1400" dirty="0">
+                <a:solidFill>
+                  <a:srgbClr val="E8EDF2"/>
+                </a:solidFill>
+                <a:latin typeface="Malgun Gothic" pitchFamily="34" charset="0"/>
+                <a:ea typeface="Malgun Gothic" pitchFamily="34" charset="-122"/>
+                <a:cs typeface="Malgun Gothic" pitchFamily="34" charset="-120"/>
+              </a:rPr>
+              <a:t>(void**)&amp;ptr 로 포인터를 받음</a:t>
+            </a:r>
+            <a:endParaRPr lang="en-US" sz="1400" dirty="0"/>
+          </a:p>
+          <a:p>
+            <a:pPr marL="342900" indent="-342900">
+              <a:spcAft>
+                <a:spcPts val="900"/>
+              </a:spcAft>
+              <a:buSzPct val="100000"/>
+              <a:buChar char="•"/>
+            </a:pPr>
+            <a:r>
+              <a:rPr lang="en-US" sz="1400" dirty="0">
+                <a:solidFill>
+                  <a:srgbClr val="E8EDF2"/>
+                </a:solidFill>
+                <a:latin typeface="Malgun Gothic" pitchFamily="34" charset="0"/>
+                <a:ea typeface="Malgun Gothic" pitchFamily="34" charset="-122"/>
+                <a:cs typeface="Malgun Gothic" pitchFamily="34" charset="-120"/>
+              </a:rPr>
+              <a:t>CPU가 아니라 GPU 메모리</a:t>
+            </a:r>
+            <a:endParaRPr lang="en-US" sz="1400" dirty="0"/>
+          </a:p>
+          <a:p>
+            <a:pPr marL="342900" indent="-342900">
+              <a:spcAft>
+                <a:spcPts val="900"/>
+              </a:spcAft>
+              <a:buSzPct val="100000"/>
+              <a:buChar char="•"/>
+            </a:pPr>
+            <a:r>
+              <a:rPr lang="en-US" sz="1400" dirty="0">
+                <a:solidFill>
+                  <a:srgbClr val="E8EDF2"/>
+                </a:solidFill>
+                <a:latin typeface="Malgun Gothic" pitchFamily="34" charset="0"/>
+                <a:ea typeface="Malgun Gothic" pitchFamily="34" charset="-122"/>
+                <a:cs typeface="Malgun Gothic" pitchFamily="34" charset="-120"/>
+              </a:rPr>
+              <a:t>tests.cpp:1573 (오류 버퍼)</a:t>
+            </a:r>
+            <a:endParaRPr lang="en-US" sz="1400" dirty="0"/>
+          </a:p>
+        </p:txBody>
+      </p:sp>
+      <p:sp>
+        <p:nvSpPr>
+          <p:cNvPr id="8" name="Shape 6"/>
+          <p:cNvSpPr/>
+          <p:nvPr/>
+        </p:nvSpPr>
+        <p:spPr>
+          <a:xfrm>
+            <a:off x="4358640" y="1600200"/>
+            <a:ext cx="3444240" cy="4114800"/>
+          </a:xfrm>
+          <a:prstGeom prst="roundRect">
+            <a:avLst>
+              <a:gd name="adj" fmla="val 2124"/>
+            </a:avLst>
+          </a:prstGeom>
+          <a:solidFill>
+            <a:srgbClr val="1E232C"/>
+          </a:solidFill>
+          <a:ln/>
+        </p:spPr>
+      </p:sp>
+      <p:sp>
+        <p:nvSpPr>
+          <p:cNvPr id="9" name="Text 7"/>
+          <p:cNvSpPr/>
+          <p:nvPr/>
+        </p:nvSpPr>
+        <p:spPr>
+          <a:xfrm>
+            <a:off x="4614672" y="1810512"/>
+            <a:ext cx="2932176" cy="457200"/>
+          </a:xfrm>
+          <a:prstGeom prst="rect">
+            <a:avLst/>
+          </a:prstGeom>
+          <a:noFill/>
+          <a:ln/>
+        </p:spPr>
+        <p:txBody>
+          <a:bodyPr wrap="square" lIns="0" tIns="0" rIns="0" bIns="0" rtlCol="0" anchor="ctr"/>
+          <a:lstStyle/>
+          <a:p>
             <a:pPr indent="0" marL="0">
               <a:buNone/>
             </a:pPr>
             <a:r>
-              <a:rPr lang="en-US" sz="1400" dirty="0">
-                <a:solidFill>
-                  <a:srgbClr val="9AA6B2"/>
-                </a:solidFill>
-                <a:latin typeface="Malgun Gothic" pitchFamily="34" charset="0"/>
-                <a:ea typeface="Malgun Gothic" pitchFamily="34" charset="-122"/>
-                <a:cs typeface="Malgun Gothic" pitchFamily="34" charset="-120"/>
-              </a:rPr>
-              <a:t>전체 메모리에 p1을 쓴다</a:t>
-            </a:r>
-            <a:endParaRPr lang="en-US" sz="1400" dirty="0"/>
-          </a:p>
-        </p:txBody>
-      </p:sp>
-      <p:sp>
-        <p:nvSpPr>
-          <p:cNvPr id="9" name="Text 7"/>
-          <p:cNvSpPr/>
-          <p:nvPr/>
-        </p:nvSpPr>
-        <p:spPr>
-          <a:xfrm>
-            <a:off x="3913632" y="2880360"/>
-            <a:ext cx="466344" cy="640080"/>
-          </a:xfrm>
-          <a:prstGeom prst="rect">
-            <a:avLst/>
-          </a:prstGeom>
-          <a:noFill/>
-          <a:ln/>
-        </p:spPr>
-        <p:txBody>
-          <a:bodyPr wrap="square" lIns="0" tIns="0" rIns="0" bIns="0" rtlCol="0" anchor="ctr"/>
-          <a:lstStyle/>
-          <a:p>
-            <a:pPr algn="ctr" indent="0" marL="0">
-              <a:buNone/>
-            </a:pPr>
-            <a:r>
-              <a:rPr lang="en-US" sz="2600" b="1" dirty="0">
-                <a:solidFill>
-                  <a:srgbClr val="9AA6B2"/>
+              <a:rPr lang="en-US" sz="1900" b="1" dirty="0">
+                <a:solidFill>
+                  <a:srgbClr val="4FB0C6"/>
                 </a:solidFill>
                 <a:latin typeface="Courier New" pitchFamily="34" charset="0"/>
                 <a:ea typeface="Courier New" pitchFamily="34" charset="-122"/>
                 <a:cs typeface="Courier New" pitchFamily="34" charset="-120"/>
               </a:rPr>
-              <a:t>→</a:t>
-            </a:r>
-            <a:endParaRPr lang="en-US" sz="2600" dirty="0"/>
-          </a:p>
-        </p:txBody>
-      </p:sp>
-      <p:sp>
-        <p:nvSpPr>
-          <p:cNvPr id="10" name="Shape 8"/>
-          <p:cNvSpPr/>
-          <p:nvPr/>
-        </p:nvSpPr>
-        <p:spPr>
-          <a:xfrm>
-            <a:off x="4398264" y="2148840"/>
-            <a:ext cx="3346704" cy="2148840"/>
+              <a:t>cudaMemset</a:t>
+            </a:r>
+            <a:endParaRPr lang="en-US" sz="1900" dirty="0"/>
+          </a:p>
+        </p:txBody>
+      </p:sp>
+      <p:sp>
+        <p:nvSpPr>
+          <p:cNvPr id="10" name="Text 8"/>
+          <p:cNvSpPr/>
+          <p:nvPr/>
+        </p:nvSpPr>
+        <p:spPr>
+          <a:xfrm>
+            <a:off x="4614672" y="2286000"/>
+            <a:ext cx="2932176" cy="411480"/>
+          </a:xfrm>
+          <a:prstGeom prst="rect">
+            <a:avLst/>
+          </a:prstGeom>
+          <a:noFill/>
+          <a:ln/>
+        </p:spPr>
+        <p:txBody>
+          <a:bodyPr wrap="square" lIns="0" tIns="0" rIns="0" bIns="0" rtlCol="0" anchor="ctr"/>
+          <a:lstStyle/>
+          <a:p>
+            <a:pPr indent="0" marL="0">
+              <a:buNone/>
+            </a:pPr>
+            <a:r>
+              <a:rPr lang="en-US" sz="1500" b="1" dirty="0">
+                <a:solidFill>
+                  <a:srgbClr val="E8EDF2"/>
+                </a:solidFill>
+                <a:latin typeface="Malgun Gothic" pitchFamily="34" charset="0"/>
+                <a:ea typeface="Malgun Gothic" pitchFamily="34" charset="-122"/>
+                <a:cs typeface="Malgun Gothic" pitchFamily="34" charset="-120"/>
+              </a:rPr>
+              <a:t>GPU 메모리 초기화</a:t>
+            </a:r>
+            <a:endParaRPr lang="en-US" sz="1500" dirty="0"/>
+          </a:p>
+        </p:txBody>
+      </p:sp>
+      <p:sp>
+        <p:nvSpPr>
+          <p:cNvPr id="11" name="Text 9"/>
+          <p:cNvSpPr/>
+          <p:nvPr/>
+        </p:nvSpPr>
+        <p:spPr>
+          <a:xfrm>
+            <a:off x="4614672" y="2788920"/>
+            <a:ext cx="2932176" cy="2743200"/>
+          </a:xfrm>
+          <a:prstGeom prst="rect">
+            <a:avLst/>
+          </a:prstGeom>
+          <a:noFill/>
+          <a:ln/>
+        </p:spPr>
+        <p:txBody>
+          <a:bodyPr wrap="square" lIns="0" tIns="0" rIns="0" bIns="0" rtlCol="0" anchor="t"/>
+          <a:lstStyle/>
+          <a:p>
+            <a:pPr marL="342900" indent="-342900">
+              <a:spcAft>
+                <a:spcPts val="900"/>
+              </a:spcAft>
+              <a:buSzPct val="100000"/>
+              <a:buChar char="•"/>
+            </a:pPr>
+            <a:r>
+              <a:rPr lang="en-US" sz="1400" dirty="0">
+                <a:solidFill>
+                  <a:srgbClr val="E8EDF2"/>
+                </a:solidFill>
+                <a:latin typeface="Malgun Gothic" pitchFamily="34" charset="0"/>
+                <a:ea typeface="Malgun Gothic" pitchFamily="34" charset="-122"/>
+                <a:cs typeface="Malgun Gothic" pitchFamily="34" charset="-120"/>
+              </a:rPr>
+              <a:t>보통 0으로 채움</a:t>
+            </a:r>
+            <a:endParaRPr lang="en-US" sz="1400" dirty="0"/>
+          </a:p>
+          <a:p>
+            <a:pPr marL="342900" indent="-342900">
+              <a:spcAft>
+                <a:spcPts val="900"/>
+              </a:spcAft>
+              <a:buSzPct val="100000"/>
+              <a:buChar char="•"/>
+            </a:pPr>
+            <a:r>
+              <a:rPr lang="en-US" sz="1400" dirty="0">
+                <a:solidFill>
+                  <a:srgbClr val="E8EDF2"/>
+                </a:solidFill>
+                <a:latin typeface="Malgun Gothic" pitchFamily="34" charset="0"/>
+                <a:ea typeface="Malgun Gothic" pitchFamily="34" charset="-122"/>
+                <a:cs typeface="Malgun Gothic" pitchFamily="34" charset="-120"/>
+              </a:rPr>
+              <a:t>할당 직후 깨끗이</a:t>
+            </a:r>
+            <a:endParaRPr lang="en-US" sz="1400" dirty="0"/>
+          </a:p>
+          <a:p>
+            <a:pPr marL="342900" indent="-342900">
+              <a:spcAft>
+                <a:spcPts val="900"/>
+              </a:spcAft>
+              <a:buSzPct val="100000"/>
+              <a:buChar char="•"/>
+            </a:pPr>
+            <a:r>
+              <a:rPr lang="en-US" sz="1400" dirty="0">
+                <a:solidFill>
+                  <a:srgbClr val="E8EDF2"/>
+                </a:solidFill>
+                <a:latin typeface="Malgun Gothic" pitchFamily="34" charset="0"/>
+                <a:ea typeface="Malgun Gothic" pitchFamily="34" charset="-122"/>
+                <a:cs typeface="Malgun Gothic" pitchFamily="34" charset="-120"/>
+              </a:rPr>
+              <a:t>error_checking에서 재초기화</a:t>
+            </a:r>
+            <a:endParaRPr lang="en-US" sz="1400" dirty="0"/>
+          </a:p>
+        </p:txBody>
+      </p:sp>
+      <p:sp>
+        <p:nvSpPr>
+          <p:cNvPr id="12" name="Shape 10"/>
+          <p:cNvSpPr/>
+          <p:nvPr/>
+        </p:nvSpPr>
+        <p:spPr>
+          <a:xfrm>
+            <a:off x="8168640" y="1600200"/>
+            <a:ext cx="3444240" cy="4114800"/>
           </a:xfrm>
           <a:prstGeom prst="roundRect">
             <a:avLst>
-              <a:gd name="adj" fmla="val 3404"/>
+              <a:gd name="adj" fmla="val 2124"/>
             </a:avLst>
           </a:prstGeom>
           <a:solidFill>
@@ -5904,14 +6585,14 @@
       </p:sp>
       <p:sp>
         <p:nvSpPr>
-          <p:cNvPr id="11" name="Text 9"/>
-          <p:cNvSpPr/>
-          <p:nvPr/>
-        </p:nvSpPr>
-        <p:spPr>
-          <a:xfrm>
-            <a:off x="4626864" y="2350008"/>
-            <a:ext cx="2889504" cy="502920"/>
+          <p:cNvPr id="13" name="Text 11"/>
+          <p:cNvSpPr/>
+          <p:nvPr/>
+        </p:nvSpPr>
+        <p:spPr>
+          <a:xfrm>
+            <a:off x="8424672" y="1810512"/>
+            <a:ext cx="2932176" cy="457200"/>
           </a:xfrm>
           <a:prstGeom prst="rect">
             <a:avLst/>
@@ -5927,69 +6608,69 @@
               <a:buNone/>
             </a:pPr>
             <a:r>
-              <a:rPr lang="en-US" sz="1800" b="1" dirty="0">
+              <a:rPr lang="en-US" sz="1900" b="1" dirty="0">
                 <a:solidFill>
                   <a:srgbClr val="E0A458"/>
-                </a:solidFill>
-                <a:latin typeface="Malgun Gothic" pitchFamily="34" charset="0"/>
-                <a:ea typeface="Malgun Gothic" pitchFamily="34" charset="-122"/>
-                <a:cs typeface="Malgun Gothic" pitchFamily="34" charset="-120"/>
-              </a:rPr>
-              <a:t>② 커널 종료 = flush</a:t>
-            </a:r>
-            <a:endParaRPr lang="en-US" sz="1800" dirty="0"/>
-          </a:p>
-        </p:txBody>
-      </p:sp>
-      <p:sp>
-        <p:nvSpPr>
-          <p:cNvPr id="12" name="Text 10"/>
-          <p:cNvSpPr/>
-          <p:nvPr/>
-        </p:nvSpPr>
-        <p:spPr>
-          <a:xfrm>
-            <a:off x="4626864" y="2926080"/>
-            <a:ext cx="2889504" cy="457200"/>
-          </a:xfrm>
-          <a:prstGeom prst="rect">
-            <a:avLst/>
-          </a:prstGeom>
-          <a:noFill/>
-          <a:ln/>
-        </p:spPr>
-        <p:txBody>
-          <a:bodyPr wrap="square" lIns="0" tIns="0" rIns="0" bIns="0" rtlCol="0" anchor="ctr"/>
-          <a:lstStyle/>
-          <a:p>
-            <a:pPr indent="0" marL="0">
-              <a:buNone/>
-            </a:pPr>
-            <a:r>
-              <a:rPr lang="en-US" sz="1250" dirty="0">
-                <a:solidFill>
-                  <a:srgbClr val="E8EDF2"/>
                 </a:solidFill>
                 <a:latin typeface="Courier New" pitchFamily="34" charset="0"/>
                 <a:ea typeface="Courier New" pitchFamily="34" charset="-122"/>
                 <a:cs typeface="Courier New" pitchFamily="34" charset="-120"/>
               </a:rPr>
-              <a:t>(커널이 끝나야)</a:t>
-            </a:r>
-            <a:endParaRPr lang="en-US" sz="1250" dirty="0"/>
-          </a:p>
-        </p:txBody>
-      </p:sp>
-      <p:sp>
-        <p:nvSpPr>
-          <p:cNvPr id="13" name="Text 11"/>
-          <p:cNvSpPr/>
-          <p:nvPr/>
-        </p:nvSpPr>
-        <p:spPr>
-          <a:xfrm>
-            <a:off x="4626864" y="3429000"/>
-            <a:ext cx="2889504" cy="731520"/>
+              <a:t>cudaMemcpy</a:t>
+            </a:r>
+            <a:endParaRPr lang="en-US" sz="1900" dirty="0"/>
+          </a:p>
+        </p:txBody>
+      </p:sp>
+      <p:sp>
+        <p:nvSpPr>
+          <p:cNvPr id="14" name="Text 12"/>
+          <p:cNvSpPr/>
+          <p:nvPr/>
+        </p:nvSpPr>
+        <p:spPr>
+          <a:xfrm>
+            <a:off x="8424672" y="2286000"/>
+            <a:ext cx="2932176" cy="411480"/>
+          </a:xfrm>
+          <a:prstGeom prst="rect">
+            <a:avLst/>
+          </a:prstGeom>
+          <a:noFill/>
+          <a:ln/>
+        </p:spPr>
+        <p:txBody>
+          <a:bodyPr wrap="square" lIns="0" tIns="0" rIns="0" bIns="0" rtlCol="0" anchor="ctr"/>
+          <a:lstStyle/>
+          <a:p>
+            <a:pPr indent="0" marL="0">
+              <a:buNone/>
+            </a:pPr>
+            <a:r>
+              <a:rPr lang="en-US" sz="1500" b="1" dirty="0">
+                <a:solidFill>
+                  <a:srgbClr val="E8EDF2"/>
+                </a:solidFill>
+                <a:latin typeface="Malgun Gothic" pitchFamily="34" charset="0"/>
+                <a:ea typeface="Malgun Gothic" pitchFamily="34" charset="-122"/>
+                <a:cs typeface="Malgun Gothic" pitchFamily="34" charset="-120"/>
+              </a:rPr>
+              <a:t>GPU ↔ CPU 복사</a:t>
+            </a:r>
+            <a:endParaRPr lang="en-US" sz="1500" dirty="0"/>
+          </a:p>
+        </p:txBody>
+      </p:sp>
+      <p:sp>
+        <p:nvSpPr>
+          <p:cNvPr id="15" name="Text 13"/>
+          <p:cNvSpPr/>
+          <p:nvPr/>
+        </p:nvSpPr>
+        <p:spPr>
+          <a:xfrm>
+            <a:off x="8424672" y="2788920"/>
+            <a:ext cx="2932176" cy="2743200"/>
           </a:xfrm>
           <a:prstGeom prst="rect">
             <a:avLst/>
@@ -6001,266 +6682,106 @@
           <a:bodyPr wrap="square" lIns="0" tIns="0" rIns="0" bIns="0" rtlCol="0" anchor="t"/>
           <a:lstStyle/>
           <a:p>
-            <a:pPr indent="0" marL="0">
-              <a:buNone/>
+            <a:pPr marL="342900" indent="-342900">
+              <a:spcAft>
+                <a:spcPts val="900"/>
+              </a:spcAft>
+              <a:buSzPct val="100000"/>
+              <a:buChar char="•"/>
             </a:pPr>
             <a:r>
               <a:rPr lang="en-US" sz="1400" dirty="0">
                 <a:solidFill>
+                  <a:srgbClr val="E8EDF2"/>
+                </a:solidFill>
+                <a:latin typeface="Malgun Gothic" pitchFamily="34" charset="0"/>
+                <a:ea typeface="Malgun Gothic" pitchFamily="34" charset="-122"/>
+                <a:cs typeface="Malgun Gothic" pitchFamily="34" charset="-120"/>
+              </a:rPr>
+              <a:t>방향 지정 필수</a:t>
+            </a:r>
+            <a:endParaRPr lang="en-US" sz="1400" dirty="0"/>
+          </a:p>
+          <a:p>
+            <a:pPr marL="342900" indent="-342900">
+              <a:spcAft>
+                <a:spcPts val="900"/>
+              </a:spcAft>
+              <a:buSzPct val="100000"/>
+              <a:buChar char="•"/>
+            </a:pPr>
+            <a:r>
+              <a:rPr lang="en-US" sz="1400" dirty="0">
+                <a:solidFill>
+                  <a:srgbClr val="E8EDF2"/>
+                </a:solidFill>
+                <a:latin typeface="Malgun Gothic" pitchFamily="34" charset="0"/>
+                <a:ea typeface="Malgun Gothic" pitchFamily="34" charset="-122"/>
+                <a:cs typeface="Malgun Gothic" pitchFamily="34" charset="-120"/>
+              </a:rPr>
+              <a:t>DeviceToHost = GPU→CPU</a:t>
+            </a:r>
+            <a:endParaRPr lang="en-US" sz="1400" dirty="0"/>
+          </a:p>
+          <a:p>
+            <a:pPr marL="342900" indent="-342900">
+              <a:spcAft>
+                <a:spcPts val="900"/>
+              </a:spcAft>
+              <a:buSzPct val="100000"/>
+              <a:buChar char="•"/>
+            </a:pPr>
+            <a:r>
+              <a:rPr lang="en-US" sz="1400" dirty="0">
+                <a:solidFill>
+                  <a:srgbClr val="E8EDF2"/>
+                </a:solidFill>
+                <a:latin typeface="Malgun Gothic" pitchFamily="34" charset="0"/>
+                <a:ea typeface="Malgun Gothic" pitchFamily="34" charset="-122"/>
+                <a:cs typeface="Malgun Gothic" pitchFamily="34" charset="-120"/>
+              </a:rPr>
+              <a:t>오류 정보를 CPU로 가져옴</a:t>
+            </a:r>
+            <a:endParaRPr lang="en-US" sz="1400" dirty="0"/>
+          </a:p>
+        </p:txBody>
+      </p:sp>
+      <p:sp>
+        <p:nvSpPr>
+          <p:cNvPr id="16" name="Text 14"/>
+          <p:cNvSpPr/>
+          <p:nvPr/>
+        </p:nvSpPr>
+        <p:spPr>
+          <a:xfrm>
+            <a:off x="548640" y="5943600"/>
+            <a:ext cx="11064240" cy="457200"/>
+          </a:xfrm>
+          <a:prstGeom prst="rect">
+            <a:avLst/>
+          </a:prstGeom>
+          <a:noFill/>
+          <a:ln/>
+        </p:spPr>
+        <p:txBody>
+          <a:bodyPr wrap="square" lIns="0" tIns="0" rIns="0" bIns="0" rtlCol="0" anchor="ctr"/>
+          <a:lstStyle/>
+          <a:p>
+            <a:pPr algn="ctr" indent="0" marL="0">
+              <a:buNone/>
+            </a:pPr>
+            <a:r>
+              <a:rPr lang="en-US" sz="1400" i="1" dirty="0">
+                <a:solidFill>
                   <a:srgbClr val="9AA6B2"/>
                 </a:solidFill>
                 <a:latin typeface="Malgun Gothic" pitchFamily="34" charset="0"/>
                 <a:ea typeface="Malgun Gothic" pitchFamily="34" charset="-122"/>
                 <a:cs typeface="Malgun Gothic" pitchFamily="34" charset="-120"/>
               </a:rPr>
-              <a:t>쓴 값이 메모리에 확실히 반영</a:t>
+              <a:t>세 API 모두 allocate_small_mem(할당·초기화)과 error_checking(복사)에서 실제로 볼 수 있습니다.</a:t>
             </a:r>
             <a:endParaRPr lang="en-US" sz="1400" dirty="0"/>
-          </a:p>
-        </p:txBody>
-      </p:sp>
-      <p:sp>
-        <p:nvSpPr>
-          <p:cNvPr id="14" name="Text 12"/>
-          <p:cNvSpPr/>
-          <p:nvPr/>
-        </p:nvSpPr>
-        <p:spPr>
-          <a:xfrm>
-            <a:off x="7763256" y="2880360"/>
-            <a:ext cx="466344" cy="640080"/>
-          </a:xfrm>
-          <a:prstGeom prst="rect">
-            <a:avLst/>
-          </a:prstGeom>
-          <a:noFill/>
-          <a:ln/>
-        </p:spPr>
-        <p:txBody>
-          <a:bodyPr wrap="square" lIns="0" tIns="0" rIns="0" bIns="0" rtlCol="0" anchor="ctr"/>
-          <a:lstStyle/>
-          <a:p>
-            <a:pPr algn="ctr" indent="0" marL="0">
-              <a:buNone/>
-            </a:pPr>
-            <a:r>
-              <a:rPr lang="en-US" sz="2600" b="1" dirty="0">
-                <a:solidFill>
-                  <a:srgbClr val="9AA6B2"/>
-                </a:solidFill>
-                <a:latin typeface="Courier New" pitchFamily="34" charset="0"/>
-                <a:ea typeface="Courier New" pitchFamily="34" charset="-122"/>
-                <a:cs typeface="Courier New" pitchFamily="34" charset="-120"/>
-              </a:rPr>
-              <a:t>→</a:t>
-            </a:r>
-            <a:endParaRPr lang="en-US" sz="2600" dirty="0"/>
-          </a:p>
-        </p:txBody>
-      </p:sp>
-      <p:sp>
-        <p:nvSpPr>
-          <p:cNvPr id="15" name="Shape 13"/>
-          <p:cNvSpPr/>
-          <p:nvPr/>
-        </p:nvSpPr>
-        <p:spPr>
-          <a:xfrm>
-            <a:off x="8247888" y="2148840"/>
-            <a:ext cx="3346704" cy="2148840"/>
-          </a:xfrm>
-          <a:prstGeom prst="roundRect">
-            <a:avLst>
-              <a:gd name="adj" fmla="val 3404"/>
-            </a:avLst>
-          </a:prstGeom>
-          <a:solidFill>
-            <a:srgbClr val="1E232C"/>
-          </a:solidFill>
-          <a:ln/>
-        </p:spPr>
-      </p:sp>
-      <p:sp>
-        <p:nvSpPr>
-          <p:cNvPr id="16" name="Text 14"/>
-          <p:cNvSpPr/>
-          <p:nvPr/>
-        </p:nvSpPr>
-        <p:spPr>
-          <a:xfrm>
-            <a:off x="8476488" y="2350008"/>
-            <a:ext cx="2889504" cy="502920"/>
-          </a:xfrm>
-          <a:prstGeom prst="rect">
-            <a:avLst/>
-          </a:prstGeom>
-          <a:noFill/>
-          <a:ln/>
-        </p:spPr>
-        <p:txBody>
-          <a:bodyPr wrap="square" lIns="0" tIns="0" rIns="0" bIns="0" rtlCol="0" anchor="ctr"/>
-          <a:lstStyle/>
-          <a:p>
-            <a:pPr indent="0" marL="0">
-              <a:buNone/>
-            </a:pPr>
-            <a:r>
-              <a:rPr lang="en-US" sz="1800" b="1" dirty="0">
-                <a:solidFill>
-                  <a:srgbClr val="4FB0C6"/>
-                </a:solidFill>
-                <a:latin typeface="Malgun Gothic" pitchFamily="34" charset="0"/>
-                <a:ea typeface="Malgun Gothic" pitchFamily="34" charset="-122"/>
-                <a:cs typeface="Malgun Gothic" pitchFamily="34" charset="-120"/>
-              </a:rPr>
-              <a:t>③ 읽기 커널</a:t>
-            </a:r>
-            <a:endParaRPr lang="en-US" sz="1800" dirty="0"/>
-          </a:p>
-        </p:txBody>
-      </p:sp>
-      <p:sp>
-        <p:nvSpPr>
-          <p:cNvPr id="17" name="Text 15"/>
-          <p:cNvSpPr/>
-          <p:nvPr/>
-        </p:nvSpPr>
-        <p:spPr>
-          <a:xfrm>
-            <a:off x="8476488" y="2926080"/>
-            <a:ext cx="2889504" cy="457200"/>
-          </a:xfrm>
-          <a:prstGeom prst="rect">
-            <a:avLst/>
-          </a:prstGeom>
-          <a:noFill/>
-          <a:ln/>
-        </p:spPr>
-        <p:txBody>
-          <a:bodyPr wrap="square" lIns="0" tIns="0" rIns="0" bIns="0" rtlCol="0" anchor="ctr"/>
-          <a:lstStyle/>
-          <a:p>
-            <a:pPr indent="0" marL="0">
-              <a:buNone/>
-            </a:pPr>
-            <a:r>
-              <a:rPr lang="en-US" sz="1250" dirty="0">
-                <a:solidFill>
-                  <a:srgbClr val="E8EDF2"/>
-                </a:solidFill>
-                <a:latin typeface="Courier New" pitchFamily="34" charset="0"/>
-                <a:ea typeface="Courier New" pitchFamily="34" charset="-122"/>
-                <a:cs typeface="Courier New" pitchFamily="34" charset="-120"/>
-              </a:rPr>
-              <a:t>kernel_move_inv_readwrite</a:t>
-            </a:r>
-            <a:endParaRPr lang="en-US" sz="1250" dirty="0"/>
-          </a:p>
-        </p:txBody>
-      </p:sp>
-      <p:sp>
-        <p:nvSpPr>
-          <p:cNvPr id="18" name="Text 16"/>
-          <p:cNvSpPr/>
-          <p:nvPr/>
-        </p:nvSpPr>
-        <p:spPr>
-          <a:xfrm>
-            <a:off x="8476488" y="3429000"/>
-            <a:ext cx="2889504" cy="731520"/>
-          </a:xfrm>
-          <a:prstGeom prst="rect">
-            <a:avLst/>
-          </a:prstGeom>
-          <a:noFill/>
-          <a:ln/>
-        </p:spPr>
-        <p:txBody>
-          <a:bodyPr wrap="square" lIns="0" tIns="0" rIns="0" bIns="0" rtlCol="0" anchor="t"/>
-          <a:lstStyle/>
-          <a:p>
-            <a:pPr indent="0" marL="0">
-              <a:buNone/>
-            </a:pPr>
-            <a:r>
-              <a:rPr lang="en-US" sz="1400" dirty="0">
-                <a:solidFill>
-                  <a:srgbClr val="9AA6B2"/>
-                </a:solidFill>
-                <a:latin typeface="Malgun Gothic" pitchFamily="34" charset="0"/>
-                <a:ea typeface="Malgun Gothic" pitchFamily="34" charset="-122"/>
-                <a:cs typeface="Malgun Gothic" pitchFamily="34" charset="-120"/>
-              </a:rPr>
-              <a:t>p1인지 검사하고 p2를 쓴다</a:t>
-            </a:r>
-            <a:endParaRPr lang="en-US" sz="1400" dirty="0"/>
-          </a:p>
-        </p:txBody>
-      </p:sp>
-      <p:sp>
-        <p:nvSpPr>
-          <p:cNvPr id="19" name="Text 17"/>
-          <p:cNvSpPr/>
-          <p:nvPr/>
-        </p:nvSpPr>
-        <p:spPr>
-          <a:xfrm>
-            <a:off x="548640" y="4709160"/>
-            <a:ext cx="11064240" cy="1097280"/>
-          </a:xfrm>
-          <a:prstGeom prst="rect">
-            <a:avLst/>
-          </a:prstGeom>
-          <a:noFill/>
-          <a:ln/>
-        </p:spPr>
-        <p:txBody>
-          <a:bodyPr wrap="square" lIns="0" tIns="0" rIns="0" bIns="0" rtlCol="0" anchor="t"/>
-          <a:lstStyle/>
-          <a:p>
-            <a:pPr indent="0" marL="0">
-              <a:buNone/>
-            </a:pPr>
-            <a:r>
-              <a:rPr lang="en-US" sz="1700" dirty="0">
-                <a:solidFill>
-                  <a:srgbClr val="E8EDF2"/>
-                </a:solidFill>
-                <a:latin typeface="Malgun Gothic" pitchFamily="34" charset="0"/>
-                <a:ea typeface="Malgun Gothic" pitchFamily="34" charset="-122"/>
-                <a:cs typeface="Malgun Gothic" pitchFamily="34" charset="-120"/>
-              </a:rPr>
-              <a:t>이 분리 덕분에 하드웨어 메모리 오류를 신뢰성 있게 잡습니다. </a:t>
-            </a:r>
-            <a:pPr indent="0" marL="0">
-              <a:buNone/>
-            </a:pPr>
-            <a:r>
-              <a:rPr lang="en-US" sz="1700" b="1" dirty="0">
-                <a:solidFill>
-                  <a:srgbClr val="8CC63F"/>
-                </a:solidFill>
-                <a:latin typeface="Malgun Gothic" pitchFamily="34" charset="0"/>
-                <a:ea typeface="Malgun Gothic" pitchFamily="34" charset="-122"/>
-                <a:cs typeface="Malgun Gothic" pitchFamily="34" charset="-120"/>
-              </a:rPr>
-              <a:t>쓰기와 읽기가 서로 다른 커널 실행이어야</a:t>
-            </a:r>
-            <a:pPr indent="0" marL="0">
-              <a:buNone/>
-            </a:pPr>
-            <a:r>
-              <a:rPr lang="en-US" sz="1700" dirty="0">
-                <a:solidFill>
-                  <a:srgbClr val="E8EDF2"/>
-                </a:solidFill>
-                <a:latin typeface="Malgun Gothic" pitchFamily="34" charset="0"/>
-                <a:ea typeface="Malgun Gothic" pitchFamily="34" charset="-122"/>
-                <a:cs typeface="Malgun Gothic" pitchFamily="34" charset="-120"/>
-              </a:rPr>
-              <a:t> 메모리를 실제로 왕복한 값을 검사하게 됩니다.</a:t>
-            </a:r>
-            <a:endParaRPr lang="en-US" sz="1700" dirty="0"/>
           </a:p>
         </p:txBody>
       </p:sp>
@@ -6333,7 +6854,7 @@
                 <a:ea typeface="Courier New" pitchFamily="34" charset="-122"/>
                 <a:cs typeface="Courier New" pitchFamily="34" charset="-120"/>
               </a:rPr>
-              <a:t>5</a:t>
+              <a:t>4</a:t>
             </a:r>
             <a:endParaRPr lang="en-US" sz="2200" dirty="0"/>
           </a:p>
@@ -6372,7 +6893,7 @@
                 <a:ea typeface="Malgun Gothic" pitchFamily="34" charset="-122"/>
                 <a:cs typeface="Malgun Gothic" pitchFamily="34" charset="-120"/>
               </a:rPr>
-              <a:t>move_inv_test · 세 개의 for 루프</a:t>
+              <a:t>핵심 · 왜 커널을 끝내고 다시 시작할까</a:t>
             </a:r>
             <a:endParaRPr lang="en-US" sz="3000" dirty="0"/>
           </a:p>
@@ -6380,100 +6901,308 @@
       </p:sp>
       <p:sp>
         <p:nvSpPr>
-          <p:cNvPr id="4" name="Shape 2"/>
-          <p:cNvSpPr/>
-          <p:nvPr/>
-        </p:nvSpPr>
-        <p:spPr>
-          <a:xfrm>
-            <a:off x="548640" y="1554480"/>
-            <a:ext cx="11064240" cy="3977640"/>
+          <p:cNvPr id="4" name="Text 2"/>
+          <p:cNvSpPr/>
+          <p:nvPr/>
+        </p:nvSpPr>
+        <p:spPr>
+          <a:xfrm>
+            <a:off x="548640" y="1463040"/>
+            <a:ext cx="11064240" cy="457200"/>
+          </a:xfrm>
+          <a:prstGeom prst="rect">
+            <a:avLst/>
+          </a:prstGeom>
+          <a:noFill/>
+          <a:ln/>
+        </p:spPr>
+        <p:txBody>
+          <a:bodyPr wrap="square" lIns="0" tIns="0" rIns="0" bIns="0" rtlCol="0" anchor="ctr"/>
+          <a:lstStyle/>
+          <a:p>
+            <a:pPr indent="0" marL="0">
+              <a:buNone/>
+            </a:pPr>
+            <a:r>
+              <a:rPr lang="en-US" sz="1700" dirty="0">
+                <a:solidFill>
+                  <a:srgbClr val="E8EDF2"/>
+                </a:solidFill>
+                <a:latin typeface="Malgun Gothic" pitchFamily="34" charset="0"/>
+                <a:ea typeface="Malgun Gothic" pitchFamily="34" charset="-122"/>
+                <a:cs typeface="Malgun Gothic" pitchFamily="34" charset="-120"/>
+              </a:rPr>
+              <a:t>같은 커널에서 쓰고 바로 읽으면, 아직 메모리에 반영 안 된 값을 읽을 수 있습니다.</a:t>
+            </a:r>
+            <a:endParaRPr lang="en-US" sz="1700" dirty="0"/>
+          </a:p>
+        </p:txBody>
+      </p:sp>
+      <p:sp>
+        <p:nvSpPr>
+          <p:cNvPr id="5" name="Shape 3"/>
+          <p:cNvSpPr/>
+          <p:nvPr/>
+        </p:nvSpPr>
+        <p:spPr>
+          <a:xfrm>
+            <a:off x="548640" y="2148840"/>
+            <a:ext cx="3346704" cy="2148840"/>
           </a:xfrm>
           <a:prstGeom prst="roundRect">
             <a:avLst>
-              <a:gd name="adj" fmla="val 1379"/>
+              <a:gd name="adj" fmla="val 3404"/>
             </a:avLst>
           </a:prstGeom>
           <a:solidFill>
-            <a:srgbClr val="0E1116"/>
+            <a:srgbClr val="1E232C"/>
           </a:solidFill>
-          <a:ln w="12700">
-            <a:solidFill>
-              <a:srgbClr val="2C3440"/>
-            </a:solidFill>
-            <a:prstDash val="solid"/>
-          </a:ln>
-        </p:spPr>
-      </p:sp>
-      <p:sp>
-        <p:nvSpPr>
-          <p:cNvPr id="5" name="Text 3"/>
-          <p:cNvSpPr/>
-          <p:nvPr/>
-        </p:nvSpPr>
-        <p:spPr>
-          <a:xfrm>
-            <a:off x="749808" y="1700784"/>
-            <a:ext cx="10661904" cy="3685032"/>
-          </a:xfrm>
-          <a:prstGeom prst="rect">
-            <a:avLst/>
-          </a:prstGeom>
-          <a:noFill/>
-          <a:ln/>
-        </p:spPr>
-        <p:txBody>
-          <a:bodyPr wrap="square" lIns="0" tIns="0" rIns="0" bIns="0" rtlCol="0" anchor="t"/>
-          <a:lstStyle/>
-          <a:p>
-            <a:pPr algn="l" indent="0" marL="0">
-              <a:lnSpc>
-                <a:spcPct val="108000"/>
-              </a:lnSpc>
-              <a:buNone/>
-            </a:pPr>
-            <a:r>
-              <a:rPr lang="en-US" sz="1300" dirty="0">
-                <a:solidFill>
-                  <a:srgbClr val="9AA6B2"/>
+          <a:ln/>
+        </p:spPr>
+      </p:sp>
+      <p:sp>
+        <p:nvSpPr>
+          <p:cNvPr id="6" name="Text 4"/>
+          <p:cNvSpPr/>
+          <p:nvPr/>
+        </p:nvSpPr>
+        <p:spPr>
+          <a:xfrm>
+            <a:off x="777240" y="2350008"/>
+            <a:ext cx="2889504" cy="502920"/>
+          </a:xfrm>
+          <a:prstGeom prst="rect">
+            <a:avLst/>
+          </a:prstGeom>
+          <a:noFill/>
+          <a:ln/>
+        </p:spPr>
+        <p:txBody>
+          <a:bodyPr wrap="square" lIns="0" tIns="0" rIns="0" bIns="0" rtlCol="0" anchor="ctr"/>
+          <a:lstStyle/>
+          <a:p>
+            <a:pPr indent="0" marL="0">
+              <a:buNone/>
+            </a:pPr>
+            <a:r>
+              <a:rPr lang="en-US" sz="1800" b="1" dirty="0">
+                <a:solidFill>
+                  <a:srgbClr val="8CC63F"/>
+                </a:solidFill>
+                <a:latin typeface="Malgun Gothic" pitchFamily="34" charset="0"/>
+                <a:ea typeface="Malgun Gothic" pitchFamily="34" charset="-122"/>
+                <a:cs typeface="Malgun Gothic" pitchFamily="34" charset="-120"/>
+              </a:rPr>
+              <a:t>① 쓰기 커널</a:t>
+            </a:r>
+            <a:endParaRPr lang="en-US" sz="1800" dirty="0"/>
+          </a:p>
+        </p:txBody>
+      </p:sp>
+      <p:sp>
+        <p:nvSpPr>
+          <p:cNvPr id="7" name="Text 5"/>
+          <p:cNvSpPr/>
+          <p:nvPr/>
+        </p:nvSpPr>
+        <p:spPr>
+          <a:xfrm>
+            <a:off x="777240" y="2926080"/>
+            <a:ext cx="2889504" cy="457200"/>
+          </a:xfrm>
+          <a:prstGeom prst="rect">
+            <a:avLst/>
+          </a:prstGeom>
+          <a:noFill/>
+          <a:ln/>
+        </p:spPr>
+        <p:txBody>
+          <a:bodyPr wrap="square" lIns="0" tIns="0" rIns="0" bIns="0" rtlCol="0" anchor="ctr"/>
+          <a:lstStyle/>
+          <a:p>
+            <a:pPr indent="0" marL="0">
+              <a:buNone/>
+            </a:pPr>
+            <a:r>
+              <a:rPr lang="en-US" sz="1250" dirty="0">
+                <a:solidFill>
+                  <a:srgbClr val="E8EDF2"/>
                 </a:solidFill>
                 <a:latin typeface="Courier New" pitchFamily="34" charset="0"/>
                 <a:ea typeface="Courier New" pitchFamily="34" charset="-122"/>
                 <a:cs typeface="Courier New" pitchFamily="34" charset="-120"/>
               </a:rPr>
-              <a:t>// tests.cpp:305   호스트(CPU) 함수</a:t>
-            </a:r>
-            <a:endParaRPr lang="en-US" sz="1300" dirty="0"/>
-          </a:p>
-          <a:p>
-            <a:pPr algn="l" indent="0" marL="0">
-              <a:lnSpc>
-                <a:spcPct val="108000"/>
-              </a:lnSpc>
-              <a:buNone/>
-            </a:pPr>
-            <a:r>
-              <a:rPr lang="en-US" sz="1300" dirty="0">
-                <a:solidFill>
-                  <a:srgbClr val="8CC63F"/>
+              <a:t>kernel_move_inv_write</a:t>
+            </a:r>
+            <a:endParaRPr lang="en-US" sz="1250" dirty="0"/>
+          </a:p>
+        </p:txBody>
+      </p:sp>
+      <p:sp>
+        <p:nvSpPr>
+          <p:cNvPr id="8" name="Text 6"/>
+          <p:cNvSpPr/>
+          <p:nvPr/>
+        </p:nvSpPr>
+        <p:spPr>
+          <a:xfrm>
+            <a:off x="777240" y="3429000"/>
+            <a:ext cx="2889504" cy="731520"/>
+          </a:xfrm>
+          <a:prstGeom prst="rect">
+            <a:avLst/>
+          </a:prstGeom>
+          <a:noFill/>
+          <a:ln/>
+        </p:spPr>
+        <p:txBody>
+          <a:bodyPr wrap="square" lIns="0" tIns="0" rIns="0" bIns="0" rtlCol="0" anchor="t"/>
+          <a:lstStyle/>
+          <a:p>
+            <a:pPr indent="0" marL="0">
+              <a:buNone/>
+            </a:pPr>
+            <a:r>
+              <a:rPr lang="en-US" sz="1400" dirty="0">
+                <a:solidFill>
+                  <a:srgbClr val="9AA6B2"/>
+                </a:solidFill>
+                <a:latin typeface="Malgun Gothic" pitchFamily="34" charset="0"/>
+                <a:ea typeface="Malgun Gothic" pitchFamily="34" charset="-122"/>
+                <a:cs typeface="Malgun Gothic" pitchFamily="34" charset="-120"/>
+              </a:rPr>
+              <a:t>전체 메모리에 p1을 쓴다</a:t>
+            </a:r>
+            <a:endParaRPr lang="en-US" sz="1400" dirty="0"/>
+          </a:p>
+        </p:txBody>
+      </p:sp>
+      <p:sp>
+        <p:nvSpPr>
+          <p:cNvPr id="9" name="Text 7"/>
+          <p:cNvSpPr/>
+          <p:nvPr/>
+        </p:nvSpPr>
+        <p:spPr>
+          <a:xfrm>
+            <a:off x="3913632" y="2880360"/>
+            <a:ext cx="466344" cy="640080"/>
+          </a:xfrm>
+          <a:prstGeom prst="rect">
+            <a:avLst/>
+          </a:prstGeom>
+          <a:noFill/>
+          <a:ln/>
+        </p:spPr>
+        <p:txBody>
+          <a:bodyPr wrap="square" lIns="0" tIns="0" rIns="0" bIns="0" rtlCol="0" anchor="ctr"/>
+          <a:lstStyle/>
+          <a:p>
+            <a:pPr algn="ctr" indent="0" marL="0">
+              <a:buNone/>
+            </a:pPr>
+            <a:r>
+              <a:rPr lang="en-US" sz="2600" b="1" dirty="0">
+                <a:solidFill>
+                  <a:srgbClr val="9AA6B2"/>
                 </a:solidFill>
                 <a:latin typeface="Courier New" pitchFamily="34" charset="0"/>
                 <a:ea typeface="Courier New" pitchFamily="34" charset="-122"/>
                 <a:cs typeface="Courier New" pitchFamily="34" charset="-120"/>
               </a:rPr>
-              <a:t>① 쓰기 루프  ─ 전체 메모리에 p1을 쓴다</a:t>
-            </a:r>
-            <a:endParaRPr lang="en-US" sz="1300" dirty="0"/>
-          </a:p>
-          <a:p>
-            <a:pPr algn="l" indent="0" marL="0">
-              <a:lnSpc>
-                <a:spcPct val="108000"/>
-              </a:lnSpc>
-              <a:buNone/>
-            </a:pPr>
-            <a:r>
-              <a:rPr lang="en-US" sz="1300" dirty="0">
+              <a:t>→</a:t>
+            </a:r>
+            <a:endParaRPr lang="en-US" sz="2600" dirty="0"/>
+          </a:p>
+        </p:txBody>
+      </p:sp>
+      <p:sp>
+        <p:nvSpPr>
+          <p:cNvPr id="10" name="Shape 8"/>
+          <p:cNvSpPr/>
+          <p:nvPr/>
+        </p:nvSpPr>
+        <p:spPr>
+          <a:xfrm>
+            <a:off x="4398264" y="2148840"/>
+            <a:ext cx="3346704" cy="2148840"/>
+          </a:xfrm>
+          <a:prstGeom prst="roundRect">
+            <a:avLst>
+              <a:gd name="adj" fmla="val 3404"/>
+            </a:avLst>
+          </a:prstGeom>
+          <a:solidFill>
+            <a:srgbClr val="1E232C"/>
+          </a:solidFill>
+          <a:ln/>
+        </p:spPr>
+      </p:sp>
+      <p:sp>
+        <p:nvSpPr>
+          <p:cNvPr id="11" name="Text 9"/>
+          <p:cNvSpPr/>
+          <p:nvPr/>
+        </p:nvSpPr>
+        <p:spPr>
+          <a:xfrm>
+            <a:off x="4626864" y="2350008"/>
+            <a:ext cx="2889504" cy="502920"/>
+          </a:xfrm>
+          <a:prstGeom prst="rect">
+            <a:avLst/>
+          </a:prstGeom>
+          <a:noFill/>
+          <a:ln/>
+        </p:spPr>
+        <p:txBody>
+          <a:bodyPr wrap="square" lIns="0" tIns="0" rIns="0" bIns="0" rtlCol="0" anchor="ctr"/>
+          <a:lstStyle/>
+          <a:p>
+            <a:pPr indent="0" marL="0">
+              <a:buNone/>
+            </a:pPr>
+            <a:r>
+              <a:rPr lang="en-US" sz="1800" b="1" dirty="0">
+                <a:solidFill>
+                  <a:srgbClr val="E0A458"/>
+                </a:solidFill>
+                <a:latin typeface="Malgun Gothic" pitchFamily="34" charset="0"/>
+                <a:ea typeface="Malgun Gothic" pitchFamily="34" charset="-122"/>
+                <a:cs typeface="Malgun Gothic" pitchFamily="34" charset="-120"/>
+              </a:rPr>
+              <a:t>② 커널 종료 = flush</a:t>
+            </a:r>
+            <a:endParaRPr lang="en-US" sz="1800" dirty="0"/>
+          </a:p>
+        </p:txBody>
+      </p:sp>
+      <p:sp>
+        <p:nvSpPr>
+          <p:cNvPr id="12" name="Text 10"/>
+          <p:cNvSpPr/>
+          <p:nvPr/>
+        </p:nvSpPr>
+        <p:spPr>
+          <a:xfrm>
+            <a:off x="4626864" y="2926080"/>
+            <a:ext cx="2889504" cy="457200"/>
+          </a:xfrm>
+          <a:prstGeom prst="rect">
+            <a:avLst/>
+          </a:prstGeom>
+          <a:noFill/>
+          <a:ln/>
+        </p:spPr>
+        <p:txBody>
+          <a:bodyPr wrap="square" lIns="0" tIns="0" rIns="0" bIns="0" rtlCol="0" anchor="ctr"/>
+          <a:lstStyle/>
+          <a:p>
+            <a:pPr indent="0" marL="0">
+              <a:buNone/>
+            </a:pPr>
+            <a:r>
+              <a:rPr lang="en-US" sz="1250" dirty="0">
                 <a:solidFill>
                   <a:srgbClr val="E8EDF2"/>
                 </a:solidFill>
@@ -6481,48 +7210,177 @@
                 <a:ea typeface="Courier New" pitchFamily="34" charset="-122"/>
                 <a:cs typeface="Courier New" pitchFamily="34" charset="-120"/>
               </a:rPr>
-              <a:t>   for (...) kernel_move_inv_write&lt;&lt;&lt;grid,1&gt;&gt;&gt;(... p1);</a:t>
-            </a:r>
-            <a:endParaRPr lang="en-US" sz="1300" dirty="0"/>
-          </a:p>
-          <a:p>
-            <a:pPr algn="l" indent="0" marL="0">
-              <a:lnSpc>
-                <a:spcPct val="108000"/>
-              </a:lnSpc>
-              <a:buNone/>
-            </a:pPr>
-            <a:endParaRPr lang="en-US" sz="1300" dirty="0"/>
-          </a:p>
-          <a:p>
-            <a:pPr algn="l" indent="0" marL="0">
-              <a:lnSpc>
-                <a:spcPct val="108000"/>
-              </a:lnSpc>
-              <a:buNone/>
-            </a:pPr>
-            <a:r>
-              <a:rPr lang="en-US" sz="1300" dirty="0">
-                <a:solidFill>
-                  <a:srgbClr val="4FB0C6"/>
+              <a:t>(커널이 끝나야)</a:t>
+            </a:r>
+            <a:endParaRPr lang="en-US" sz="1250" dirty="0"/>
+          </a:p>
+        </p:txBody>
+      </p:sp>
+      <p:sp>
+        <p:nvSpPr>
+          <p:cNvPr id="13" name="Text 11"/>
+          <p:cNvSpPr/>
+          <p:nvPr/>
+        </p:nvSpPr>
+        <p:spPr>
+          <a:xfrm>
+            <a:off x="4626864" y="3429000"/>
+            <a:ext cx="2889504" cy="731520"/>
+          </a:xfrm>
+          <a:prstGeom prst="rect">
+            <a:avLst/>
+          </a:prstGeom>
+          <a:noFill/>
+          <a:ln/>
+        </p:spPr>
+        <p:txBody>
+          <a:bodyPr wrap="square" lIns="0" tIns="0" rIns="0" bIns="0" rtlCol="0" anchor="t"/>
+          <a:lstStyle/>
+          <a:p>
+            <a:pPr indent="0" marL="0">
+              <a:buNone/>
+            </a:pPr>
+            <a:r>
+              <a:rPr lang="en-US" sz="1400" dirty="0">
+                <a:solidFill>
+                  <a:srgbClr val="9AA6B2"/>
+                </a:solidFill>
+                <a:latin typeface="Malgun Gothic" pitchFamily="34" charset="0"/>
+                <a:ea typeface="Malgun Gothic" pitchFamily="34" charset="-122"/>
+                <a:cs typeface="Malgun Gothic" pitchFamily="34" charset="-120"/>
+              </a:rPr>
+              <a:t>쓴 값이 메모리에 확실히 반영</a:t>
+            </a:r>
+            <a:endParaRPr lang="en-US" sz="1400" dirty="0"/>
+          </a:p>
+        </p:txBody>
+      </p:sp>
+      <p:sp>
+        <p:nvSpPr>
+          <p:cNvPr id="14" name="Text 12"/>
+          <p:cNvSpPr/>
+          <p:nvPr/>
+        </p:nvSpPr>
+        <p:spPr>
+          <a:xfrm>
+            <a:off x="7763256" y="2880360"/>
+            <a:ext cx="466344" cy="640080"/>
+          </a:xfrm>
+          <a:prstGeom prst="rect">
+            <a:avLst/>
+          </a:prstGeom>
+          <a:noFill/>
+          <a:ln/>
+        </p:spPr>
+        <p:txBody>
+          <a:bodyPr wrap="square" lIns="0" tIns="0" rIns="0" bIns="0" rtlCol="0" anchor="ctr"/>
+          <a:lstStyle/>
+          <a:p>
+            <a:pPr algn="ctr" indent="0" marL="0">
+              <a:buNone/>
+            </a:pPr>
+            <a:r>
+              <a:rPr lang="en-US" sz="2600" b="1" dirty="0">
+                <a:solidFill>
+                  <a:srgbClr val="9AA6B2"/>
                 </a:solidFill>
                 <a:latin typeface="Courier New" pitchFamily="34" charset="0"/>
                 <a:ea typeface="Courier New" pitchFamily="34" charset="-122"/>
                 <a:cs typeface="Courier New" pitchFamily="34" charset="-120"/>
               </a:rPr>
-              <a:t>② 읽고-쓰기 루프 ─ p1 검사 후 보수 p2를 쓴다</a:t>
-            </a:r>
-            <a:endParaRPr lang="en-US" sz="1300" dirty="0"/>
-          </a:p>
-          <a:p>
-            <a:pPr algn="l" indent="0" marL="0">
-              <a:lnSpc>
-                <a:spcPct val="108000"/>
-              </a:lnSpc>
-              <a:buNone/>
-            </a:pPr>
-            <a:r>
-              <a:rPr lang="en-US" sz="1300" dirty="0">
+              <a:t>→</a:t>
+            </a:r>
+            <a:endParaRPr lang="en-US" sz="2600" dirty="0"/>
+          </a:p>
+        </p:txBody>
+      </p:sp>
+      <p:sp>
+        <p:nvSpPr>
+          <p:cNvPr id="15" name="Shape 13"/>
+          <p:cNvSpPr/>
+          <p:nvPr/>
+        </p:nvSpPr>
+        <p:spPr>
+          <a:xfrm>
+            <a:off x="8247888" y="2148840"/>
+            <a:ext cx="3346704" cy="2148840"/>
+          </a:xfrm>
+          <a:prstGeom prst="roundRect">
+            <a:avLst>
+              <a:gd name="adj" fmla="val 3404"/>
+            </a:avLst>
+          </a:prstGeom>
+          <a:solidFill>
+            <a:srgbClr val="1E232C"/>
+          </a:solidFill>
+          <a:ln/>
+        </p:spPr>
+      </p:sp>
+      <p:sp>
+        <p:nvSpPr>
+          <p:cNvPr id="16" name="Text 14"/>
+          <p:cNvSpPr/>
+          <p:nvPr/>
+        </p:nvSpPr>
+        <p:spPr>
+          <a:xfrm>
+            <a:off x="8476488" y="2350008"/>
+            <a:ext cx="2889504" cy="502920"/>
+          </a:xfrm>
+          <a:prstGeom prst="rect">
+            <a:avLst/>
+          </a:prstGeom>
+          <a:noFill/>
+          <a:ln/>
+        </p:spPr>
+        <p:txBody>
+          <a:bodyPr wrap="square" lIns="0" tIns="0" rIns="0" bIns="0" rtlCol="0" anchor="ctr"/>
+          <a:lstStyle/>
+          <a:p>
+            <a:pPr indent="0" marL="0">
+              <a:buNone/>
+            </a:pPr>
+            <a:r>
+              <a:rPr lang="en-US" sz="1800" b="1" dirty="0">
+                <a:solidFill>
+                  <a:srgbClr val="4FB0C6"/>
+                </a:solidFill>
+                <a:latin typeface="Malgun Gothic" pitchFamily="34" charset="0"/>
+                <a:ea typeface="Malgun Gothic" pitchFamily="34" charset="-122"/>
+                <a:cs typeface="Malgun Gothic" pitchFamily="34" charset="-120"/>
+              </a:rPr>
+              <a:t>③ 읽기 커널</a:t>
+            </a:r>
+            <a:endParaRPr lang="en-US" sz="1800" dirty="0"/>
+          </a:p>
+        </p:txBody>
+      </p:sp>
+      <p:sp>
+        <p:nvSpPr>
+          <p:cNvPr id="17" name="Text 15"/>
+          <p:cNvSpPr/>
+          <p:nvPr/>
+        </p:nvSpPr>
+        <p:spPr>
+          <a:xfrm>
+            <a:off x="8476488" y="2926080"/>
+            <a:ext cx="2889504" cy="457200"/>
+          </a:xfrm>
+          <a:prstGeom prst="rect">
+            <a:avLst/>
+          </a:prstGeom>
+          <a:noFill/>
+          <a:ln/>
+        </p:spPr>
+        <p:txBody>
+          <a:bodyPr wrap="square" lIns="0" tIns="0" rIns="0" bIns="0" rtlCol="0" anchor="ctr"/>
+          <a:lstStyle/>
+          <a:p>
+            <a:pPr indent="0" marL="0">
+              <a:buNone/>
+            </a:pPr>
+            <a:r>
+              <a:rPr lang="en-US" sz="1250" dirty="0">
                 <a:solidFill>
                   <a:srgbClr val="E8EDF2"/>
                 </a:solidFill>
@@ -6530,217 +7388,115 @@
                 <a:ea typeface="Courier New" pitchFamily="34" charset="-122"/>
                 <a:cs typeface="Courier New" pitchFamily="34" charset="-120"/>
               </a:rPr>
-              <a:t>   for (...) {</a:t>
-            </a:r>
-            <a:endParaRPr lang="en-US" sz="1300" dirty="0"/>
-          </a:p>
-          <a:p>
-            <a:pPr algn="l" indent="0" marL="0">
-              <a:lnSpc>
-                <a:spcPct val="108000"/>
-              </a:lnSpc>
-              <a:buNone/>
-            </a:pPr>
-            <a:r>
-              <a:rPr lang="en-US" sz="1300" dirty="0">
+              <a:t>kernel_move_inv_readwrite</a:t>
+            </a:r>
+            <a:endParaRPr lang="en-US" sz="1250" dirty="0"/>
+          </a:p>
+        </p:txBody>
+      </p:sp>
+      <p:sp>
+        <p:nvSpPr>
+          <p:cNvPr id="18" name="Text 16"/>
+          <p:cNvSpPr/>
+          <p:nvPr/>
+        </p:nvSpPr>
+        <p:spPr>
+          <a:xfrm>
+            <a:off x="8476488" y="3429000"/>
+            <a:ext cx="2889504" cy="731520"/>
+          </a:xfrm>
+          <a:prstGeom prst="rect">
+            <a:avLst/>
+          </a:prstGeom>
+          <a:noFill/>
+          <a:ln/>
+        </p:spPr>
+        <p:txBody>
+          <a:bodyPr wrap="square" lIns="0" tIns="0" rIns="0" bIns="0" rtlCol="0" anchor="t"/>
+          <a:lstStyle/>
+          <a:p>
+            <a:pPr indent="0" marL="0">
+              <a:buNone/>
+            </a:pPr>
+            <a:r>
+              <a:rPr lang="en-US" sz="1400" dirty="0">
+                <a:solidFill>
+                  <a:srgbClr val="9AA6B2"/>
+                </a:solidFill>
+                <a:latin typeface="Malgun Gothic" pitchFamily="34" charset="0"/>
+                <a:ea typeface="Malgun Gothic" pitchFamily="34" charset="-122"/>
+                <a:cs typeface="Malgun Gothic" pitchFamily="34" charset="-120"/>
+              </a:rPr>
+              <a:t>p1인지 검사하고 p2를 쓴다</a:t>
+            </a:r>
+            <a:endParaRPr lang="en-US" sz="1400" dirty="0"/>
+          </a:p>
+        </p:txBody>
+      </p:sp>
+      <p:sp>
+        <p:nvSpPr>
+          <p:cNvPr id="19" name="Text 17"/>
+          <p:cNvSpPr/>
+          <p:nvPr/>
+        </p:nvSpPr>
+        <p:spPr>
+          <a:xfrm>
+            <a:off x="548640" y="4709160"/>
+            <a:ext cx="11064240" cy="1097280"/>
+          </a:xfrm>
+          <a:prstGeom prst="rect">
+            <a:avLst/>
+          </a:prstGeom>
+          <a:noFill/>
+          <a:ln/>
+        </p:spPr>
+        <p:txBody>
+          <a:bodyPr wrap="square" lIns="0" tIns="0" rIns="0" bIns="0" rtlCol="0" anchor="t"/>
+          <a:lstStyle/>
+          <a:p>
+            <a:pPr indent="0" marL="0">
+              <a:buNone/>
+            </a:pPr>
+            <a:r>
+              <a:rPr lang="en-US" sz="1700" dirty="0">
                 <a:solidFill>
                   <a:srgbClr val="E8EDF2"/>
                 </a:solidFill>
-                <a:latin typeface="Courier New" pitchFamily="34" charset="0"/>
-                <a:ea typeface="Courier New" pitchFamily="34" charset="-122"/>
-                <a:cs typeface="Courier New" pitchFamily="34" charset="-120"/>
-              </a:rPr>
-              <a:t>       kernel_move_inv_readwrite&lt;&lt;&lt;grid,1&gt;&gt;&gt;(... p1, p2 ...);</a:t>
-            </a:r>
-            <a:endParaRPr lang="en-US" sz="1300" dirty="0"/>
-          </a:p>
-          <a:p>
-            <a:pPr algn="l" indent="0" marL="0">
-              <a:lnSpc>
-                <a:spcPct val="108000"/>
-              </a:lnSpc>
-              <a:buNone/>
-            </a:pPr>
-            <a:r>
-              <a:rPr lang="en-US" sz="1300" dirty="0">
-                <a:solidFill>
-                  <a:srgbClr val="E0A458"/>
-                </a:solidFill>
-                <a:latin typeface="Courier New" pitchFamily="34" charset="0"/>
-                <a:ea typeface="Courier New" pitchFamily="34" charset="-122"/>
-                <a:cs typeface="Courier New" pitchFamily="34" charset="-120"/>
-              </a:rPr>
-              <a:t>       err += error_checking("move_inv_readwrite", i);  // 오류를 CPU로</a:t>
-            </a:r>
-            <a:endParaRPr lang="en-US" sz="1300" dirty="0"/>
-          </a:p>
-          <a:p>
-            <a:pPr algn="l" indent="0" marL="0">
-              <a:lnSpc>
-                <a:spcPct val="108000"/>
-              </a:lnSpc>
-              <a:buNone/>
-            </a:pPr>
-            <a:r>
-              <a:rPr lang="en-US" sz="1300" dirty="0">
+                <a:latin typeface="Malgun Gothic" pitchFamily="34" charset="0"/>
+                <a:ea typeface="Malgun Gothic" pitchFamily="34" charset="-122"/>
+                <a:cs typeface="Malgun Gothic" pitchFamily="34" charset="-120"/>
+              </a:rPr>
+              <a:t>이 분리 덕분에 하드웨어 메모리 오류를 신뢰성 있게 잡습니다. </a:t>
+            </a:r>
+            <a:pPr indent="0" marL="0">
+              <a:buNone/>
+            </a:pPr>
+            <a:r>
+              <a:rPr lang="en-US" sz="1700" b="1" dirty="0">
+                <a:solidFill>
+                  <a:srgbClr val="8CC63F"/>
+                </a:solidFill>
+                <a:latin typeface="Malgun Gothic" pitchFamily="34" charset="0"/>
+                <a:ea typeface="Malgun Gothic" pitchFamily="34" charset="-122"/>
+                <a:cs typeface="Malgun Gothic" pitchFamily="34" charset="-120"/>
+              </a:rPr>
+              <a:t>쓰기와 읽기가 서로 다른 커널 실행이어야</a:t>
+            </a:r>
+            <a:pPr indent="0" marL="0">
+              <a:buNone/>
+            </a:pPr>
+            <a:r>
+              <a:rPr lang="en-US" sz="1700" dirty="0">
                 <a:solidFill>
                   <a:srgbClr val="E8EDF2"/>
                 </a:solidFill>
-                <a:latin typeface="Courier New" pitchFamily="34" charset="0"/>
-                <a:ea typeface="Courier New" pitchFamily="34" charset="-122"/>
-                <a:cs typeface="Courier New" pitchFamily="34" charset="-120"/>
-              </a:rPr>
-              <a:t>   }</a:t>
-            </a:r>
-            <a:endParaRPr lang="en-US" sz="1300" dirty="0"/>
-          </a:p>
-          <a:p>
-            <a:pPr algn="l" indent="0" marL="0">
-              <a:lnSpc>
-                <a:spcPct val="108000"/>
-              </a:lnSpc>
-              <a:buNone/>
-            </a:pPr>
-            <a:endParaRPr lang="en-US" sz="1300" dirty="0"/>
-          </a:p>
-          <a:p>
-            <a:pPr algn="l" indent="0" marL="0">
-              <a:lnSpc>
-                <a:spcPct val="108000"/>
-              </a:lnSpc>
-              <a:buNone/>
-            </a:pPr>
-            <a:r>
-              <a:rPr lang="en-US" sz="1300" dirty="0">
-                <a:solidFill>
-                  <a:srgbClr val="4FB0C6"/>
-                </a:solidFill>
-                <a:latin typeface="Courier New" pitchFamily="34" charset="0"/>
-                <a:ea typeface="Courier New" pitchFamily="34" charset="-122"/>
-                <a:cs typeface="Courier New" pitchFamily="34" charset="-120"/>
-              </a:rPr>
-              <a:t>③ 읽기 루프 ─ p2 인지 다시 검사한다</a:t>
-            </a:r>
-            <a:endParaRPr lang="en-US" sz="1300" dirty="0"/>
-          </a:p>
-          <a:p>
-            <a:pPr algn="l" indent="0" marL="0">
-              <a:lnSpc>
-                <a:spcPct val="108000"/>
-              </a:lnSpc>
-              <a:buNone/>
-            </a:pPr>
-            <a:r>
-              <a:rPr lang="en-US" sz="1300" dirty="0">
-                <a:solidFill>
-                  <a:srgbClr val="E8EDF2"/>
-                </a:solidFill>
-                <a:latin typeface="Courier New" pitchFamily="34" charset="0"/>
-                <a:ea typeface="Courier New" pitchFamily="34" charset="-122"/>
-                <a:cs typeface="Courier New" pitchFamily="34" charset="-120"/>
-              </a:rPr>
-              <a:t>   for (...) {</a:t>
-            </a:r>
-            <a:endParaRPr lang="en-US" sz="1300" dirty="0"/>
-          </a:p>
-          <a:p>
-            <a:pPr algn="l" indent="0" marL="0">
-              <a:lnSpc>
-                <a:spcPct val="108000"/>
-              </a:lnSpc>
-              <a:buNone/>
-            </a:pPr>
-            <a:r>
-              <a:rPr lang="en-US" sz="1300" dirty="0">
-                <a:solidFill>
-                  <a:srgbClr val="E8EDF2"/>
-                </a:solidFill>
-                <a:latin typeface="Courier New" pitchFamily="34" charset="0"/>
-                <a:ea typeface="Courier New" pitchFamily="34" charset="-122"/>
-                <a:cs typeface="Courier New" pitchFamily="34" charset="-120"/>
-              </a:rPr>
-              <a:t>       kernel_move_inv_read&lt;&lt;&lt;grid,1&gt;&gt;&gt;(... p2 ...);</a:t>
-            </a:r>
-            <a:endParaRPr lang="en-US" sz="1300" dirty="0"/>
-          </a:p>
-          <a:p>
-            <a:pPr algn="l" indent="0" marL="0">
-              <a:lnSpc>
-                <a:spcPct val="108000"/>
-              </a:lnSpc>
-              <a:buNone/>
-            </a:pPr>
-            <a:r>
-              <a:rPr lang="en-US" sz="1300" dirty="0">
-                <a:solidFill>
-                  <a:srgbClr val="E0A458"/>
-                </a:solidFill>
-                <a:latin typeface="Courier New" pitchFamily="34" charset="0"/>
-                <a:ea typeface="Courier New" pitchFamily="34" charset="-122"/>
-                <a:cs typeface="Courier New" pitchFamily="34" charset="-120"/>
-              </a:rPr>
-              <a:t>       err += error_checking("move_inv_read", i);</a:t>
-            </a:r>
-            <a:endParaRPr lang="en-US" sz="1300" dirty="0"/>
-          </a:p>
-          <a:p>
-            <a:pPr algn="l" indent="0" marL="0">
-              <a:lnSpc>
-                <a:spcPct val="108000"/>
-              </a:lnSpc>
-              <a:buNone/>
-            </a:pPr>
-            <a:r>
-              <a:rPr lang="en-US" sz="1300" dirty="0">
-                <a:solidFill>
-                  <a:srgbClr val="E8EDF2"/>
-                </a:solidFill>
-                <a:latin typeface="Courier New" pitchFamily="34" charset="0"/>
-                <a:ea typeface="Courier New" pitchFamily="34" charset="-122"/>
-                <a:cs typeface="Courier New" pitchFamily="34" charset="-120"/>
-              </a:rPr>
-              <a:t>   }</a:t>
-            </a:r>
-            <a:endParaRPr lang="en-US" sz="1300" dirty="0"/>
-          </a:p>
-        </p:txBody>
-      </p:sp>
-      <p:sp>
-        <p:nvSpPr>
-          <p:cNvPr id="6" name="Text 4"/>
-          <p:cNvSpPr/>
-          <p:nvPr/>
-        </p:nvSpPr>
-        <p:spPr>
-          <a:xfrm>
-            <a:off x="548640" y="5669280"/>
-            <a:ext cx="11064240" cy="457200"/>
-          </a:xfrm>
-          <a:prstGeom prst="rect">
-            <a:avLst/>
-          </a:prstGeom>
-          <a:noFill/>
-          <a:ln/>
-        </p:spPr>
-        <p:txBody>
-          <a:bodyPr wrap="square" lIns="0" tIns="0" rIns="0" bIns="0" rtlCol="0" anchor="ctr"/>
-          <a:lstStyle/>
-          <a:p>
-            <a:pPr indent="0" marL="0">
-              <a:buNone/>
-            </a:pPr>
-            <a:r>
-              <a:rPr lang="en-US" sz="1400" dirty="0">
-                <a:solidFill>
-                  <a:srgbClr val="9AA6B2"/>
-                </a:solidFill>
-                <a:latin typeface="Malgun Gothic" pitchFamily="34" charset="0"/>
-                <a:ea typeface="Malgun Gothic" pitchFamily="34" charset="-122"/>
-                <a:cs typeface="Malgun Gothic" pitchFamily="34" charset="-120"/>
-              </a:rPr>
-              <a:t>각 커널 실행 뒤 error_checking으로 오류를 확인합니다. 커널→검사→커널→검사 리듬을 기억하세요.</a:t>
-            </a:r>
-            <a:endParaRPr lang="en-US" sz="1400" dirty="0"/>
+                <a:latin typeface="Malgun Gothic" pitchFamily="34" charset="0"/>
+                <a:ea typeface="Malgun Gothic" pitchFamily="34" charset="-122"/>
+                <a:cs typeface="Malgun Gothic" pitchFamily="34" charset="-120"/>
+              </a:rPr>
+              <a:t> 메모리를 실제로 왕복한 값을 검사하게 됩니다.</a:t>
+            </a:r>
+            <a:endParaRPr lang="en-US" sz="1700" dirty="0"/>
           </a:p>
         </p:txBody>
       </p:sp>
@@ -6813,7 +7569,7 @@
                 <a:ea typeface="Courier New" pitchFamily="34" charset="-122"/>
                 <a:cs typeface="Courier New" pitchFamily="34" charset="-120"/>
               </a:rPr>
-              <a:t>6</a:t>
+              <a:t>5</a:t>
             </a:r>
             <a:endParaRPr lang="en-US" sz="2200" dirty="0"/>
           </a:p>
@@ -6852,7 +7608,7 @@
                 <a:ea typeface="Malgun Gothic" pitchFamily="34" charset="-122"/>
                 <a:cs typeface="Malgun Gothic" pitchFamily="34" charset="-120"/>
               </a:rPr>
-              <a:t>이동 반전(moving inversion) 알고리즘</a:t>
+              <a:t>move_inv_test · 세 개의 for 루프</a:t>
             </a:r>
             <a:endParaRPr lang="en-US" sz="3000" dirty="0"/>
           </a:p>
@@ -6860,162 +7616,18 @@
       </p:sp>
       <p:sp>
         <p:nvSpPr>
-          <p:cNvPr id="4" name="Text 2"/>
-          <p:cNvSpPr/>
-          <p:nvPr/>
-        </p:nvSpPr>
-        <p:spPr>
-          <a:xfrm>
-            <a:off x="548640" y="1463040"/>
-            <a:ext cx="11064240" cy="685800"/>
-          </a:xfrm>
-          <a:prstGeom prst="rect">
-            <a:avLst/>
-          </a:prstGeom>
-          <a:noFill/>
-          <a:ln/>
-        </p:spPr>
-        <p:txBody>
-          <a:bodyPr wrap="square" lIns="0" tIns="0" rIns="0" bIns="0" rtlCol="0" anchor="t"/>
-          <a:lstStyle/>
-          <a:p>
-            <a:pPr indent="0" marL="0">
-              <a:buNone/>
-            </a:pPr>
-            <a:r>
-              <a:rPr lang="en-US" sz="1600" dirty="0">
-                <a:solidFill>
-                  <a:srgbClr val="9AA6B2"/>
-                </a:solidFill>
-                <a:latin typeface="Malgun Gothic" pitchFamily="34" charset="0"/>
-                <a:ea typeface="Malgun Gothic" pitchFamily="34" charset="-122"/>
-                <a:cs typeface="Malgun Gothic" pitchFamily="34" charset="-120"/>
-              </a:rPr>
-              <a:t>패턴 p1을 썼다가, 확인 후 그 보수 p2 = ~p1로 뒤집어 다시 확인합니다. 비트를 양방향으로 검사해 고착 오류를 잡습니다.</a:t>
-            </a:r>
-            <a:endParaRPr lang="en-US" sz="1600" dirty="0"/>
-          </a:p>
-        </p:txBody>
-      </p:sp>
-      <p:sp>
-        <p:nvSpPr>
-          <p:cNvPr id="5" name="Text 3"/>
-          <p:cNvSpPr/>
-          <p:nvPr/>
-        </p:nvSpPr>
-        <p:spPr>
-          <a:xfrm>
-            <a:off x="548640" y="2468880"/>
-            <a:ext cx="2194560" cy="548640"/>
-          </a:xfrm>
-          <a:prstGeom prst="rect">
-            <a:avLst/>
-          </a:prstGeom>
-          <a:noFill/>
-          <a:ln/>
-        </p:spPr>
-        <p:txBody>
-          <a:bodyPr wrap="square" lIns="0" tIns="0" rIns="0" bIns="0" rtlCol="0" anchor="ctr"/>
-          <a:lstStyle/>
-          <a:p>
-            <a:pPr indent="0" marL="0">
-              <a:buNone/>
-            </a:pPr>
-            <a:r>
-              <a:rPr lang="en-US" sz="1600" b="1" dirty="0">
-                <a:solidFill>
-                  <a:srgbClr val="8CC63F"/>
-                </a:solidFill>
-                <a:latin typeface="Malgun Gothic" pitchFamily="34" charset="0"/>
-                <a:ea typeface="Malgun Gothic" pitchFamily="34" charset="-122"/>
-                <a:cs typeface="Malgun Gothic" pitchFamily="34" charset="-120"/>
-              </a:rPr>
-              <a:t>p1 =</a:t>
-            </a:r>
-            <a:endParaRPr lang="en-US" sz="1600" dirty="0"/>
-          </a:p>
-        </p:txBody>
-      </p:sp>
-      <p:sp>
-        <p:nvSpPr>
-          <p:cNvPr id="6" name="Shape 4"/>
-          <p:cNvSpPr/>
-          <p:nvPr/>
-        </p:nvSpPr>
-        <p:spPr>
-          <a:xfrm>
-            <a:off x="2926080" y="2423160"/>
-            <a:ext cx="640080" cy="640080"/>
+          <p:cNvPr id="4" name="Shape 2"/>
+          <p:cNvSpPr/>
+          <p:nvPr/>
+        </p:nvSpPr>
+        <p:spPr>
+          <a:xfrm>
+            <a:off x="548640" y="1554480"/>
+            <a:ext cx="11064240" cy="3977640"/>
           </a:xfrm>
           <a:prstGeom prst="roundRect">
             <a:avLst>
-              <a:gd name="adj" fmla="val 7143"/>
-            </a:avLst>
-          </a:prstGeom>
-          <a:solidFill>
-            <a:srgbClr val="8CC63F"/>
-          </a:solidFill>
-          <a:ln w="12700">
-            <a:solidFill>
-              <a:srgbClr val="8CC63F"/>
-            </a:solidFill>
-            <a:prstDash val="solid"/>
-          </a:ln>
-        </p:spPr>
-      </p:sp>
-      <p:sp>
-        <p:nvSpPr>
-          <p:cNvPr id="7" name="Text 5"/>
-          <p:cNvSpPr/>
-          <p:nvPr/>
-        </p:nvSpPr>
-        <p:spPr>
-          <a:xfrm>
-            <a:off x="2926080" y="2423160"/>
-            <a:ext cx="640080" cy="640080"/>
-          </a:xfrm>
-          <a:prstGeom prst="rect">
-            <a:avLst/>
-          </a:prstGeom>
-          <a:noFill/>
-          <a:ln/>
-        </p:spPr>
-        <p:txBody>
-          <a:bodyPr wrap="square" lIns="0" tIns="0" rIns="0" bIns="0" rtlCol="0" anchor="ctr"/>
-          <a:lstStyle/>
-          <a:p>
-            <a:pPr algn="ctr" indent="0" marL="0">
-              <a:buNone/>
-            </a:pPr>
-            <a:r>
-              <a:rPr lang="en-US" sz="1800" b="1" dirty="0">
-                <a:solidFill>
-                  <a:srgbClr val="13161C"/>
-                </a:solidFill>
-                <a:latin typeface="Courier New" pitchFamily="34" charset="0"/>
-                <a:ea typeface="Courier New" pitchFamily="34" charset="-122"/>
-                <a:cs typeface="Courier New" pitchFamily="34" charset="-120"/>
-              </a:rPr>
-              <a:t>1</a:t>
-            </a:r>
-            <a:endParaRPr lang="en-US" sz="1800" dirty="0"/>
-          </a:p>
-        </p:txBody>
-      </p:sp>
-      <p:sp>
-        <p:nvSpPr>
-          <p:cNvPr id="8" name="Shape 6"/>
-          <p:cNvSpPr/>
-          <p:nvPr/>
-        </p:nvSpPr>
-        <p:spPr>
-          <a:xfrm>
-            <a:off x="3675888" y="2423160"/>
-            <a:ext cx="640080" cy="640080"/>
-          </a:xfrm>
-          <a:prstGeom prst="roundRect">
-            <a:avLst>
-              <a:gd name="adj" fmla="val 7143"/>
+              <a:gd name="adj" fmla="val 1379"/>
             </a:avLst>
           </a:prstGeom>
           <a:solidFill>
@@ -7023,7 +7635,7 @@
           </a:solidFill>
           <a:ln w="12700">
             <a:solidFill>
-              <a:srgbClr val="8CC63F"/>
+              <a:srgbClr val="2C3440"/>
             </a:solidFill>
             <a:prstDash val="solid"/>
           </a:ln>
@@ -7031,30 +7643,33 @@
       </p:sp>
       <p:sp>
         <p:nvSpPr>
-          <p:cNvPr id="9" name="Text 7"/>
-          <p:cNvSpPr/>
-          <p:nvPr/>
-        </p:nvSpPr>
-        <p:spPr>
-          <a:xfrm>
-            <a:off x="3675888" y="2423160"/>
-            <a:ext cx="640080" cy="640080"/>
-          </a:xfrm>
-          <a:prstGeom prst="rect">
-            <a:avLst/>
-          </a:prstGeom>
-          <a:noFill/>
-          <a:ln/>
-        </p:spPr>
-        <p:txBody>
-          <a:bodyPr wrap="square" lIns="0" tIns="0" rIns="0" bIns="0" rtlCol="0" anchor="ctr"/>
-          <a:lstStyle/>
-          <a:p>
-            <a:pPr algn="ctr" indent="0" marL="0">
-              <a:buNone/>
-            </a:pPr>
-            <a:r>
-              <a:rPr lang="en-US" sz="1800" b="1" dirty="0">
+          <p:cNvPr id="5" name="Text 3"/>
+          <p:cNvSpPr/>
+          <p:nvPr/>
+        </p:nvSpPr>
+        <p:spPr>
+          <a:xfrm>
+            <a:off x="749808" y="1700784"/>
+            <a:ext cx="10661904" cy="3685032"/>
+          </a:xfrm>
+          <a:prstGeom prst="rect">
+            <a:avLst/>
+          </a:prstGeom>
+          <a:noFill/>
+          <a:ln/>
+        </p:spPr>
+        <p:txBody>
+          <a:bodyPr wrap="square" lIns="0" tIns="0" rIns="0" bIns="0" rtlCol="0" anchor="t"/>
+          <a:lstStyle/>
+          <a:p>
+            <a:pPr algn="l" indent="0" marL="0">
+              <a:lnSpc>
+                <a:spcPct val="108000"/>
+              </a:lnSpc>
+              <a:buNone/>
+            </a:pPr>
+            <a:r>
+              <a:rPr lang="en-US" sz="1300" dirty="0">
                 <a:solidFill>
                   <a:srgbClr val="9AA6B2"/>
                 </a:solidFill>
@@ -7062,880 +7677,280 @@
                 <a:ea typeface="Courier New" pitchFamily="34" charset="-122"/>
                 <a:cs typeface="Courier New" pitchFamily="34" charset="-120"/>
               </a:rPr>
-              <a:t>0</a:t>
-            </a:r>
-            <a:endParaRPr lang="en-US" sz="1800" dirty="0"/>
-          </a:p>
-        </p:txBody>
-      </p:sp>
-      <p:sp>
-        <p:nvSpPr>
-          <p:cNvPr id="10" name="Shape 8"/>
-          <p:cNvSpPr/>
-          <p:nvPr/>
-        </p:nvSpPr>
-        <p:spPr>
-          <a:xfrm>
-            <a:off x="4425696" y="2423160"/>
-            <a:ext cx="640080" cy="640080"/>
-          </a:xfrm>
-          <a:prstGeom prst="roundRect">
-            <a:avLst>
-              <a:gd name="adj" fmla="val 7143"/>
-            </a:avLst>
-          </a:prstGeom>
-          <a:solidFill>
-            <a:srgbClr val="8CC63F"/>
-          </a:solidFill>
-          <a:ln w="12700">
-            <a:solidFill>
-              <a:srgbClr val="8CC63F"/>
-            </a:solidFill>
-            <a:prstDash val="solid"/>
-          </a:ln>
-        </p:spPr>
-      </p:sp>
-      <p:sp>
-        <p:nvSpPr>
-          <p:cNvPr id="11" name="Text 9"/>
-          <p:cNvSpPr/>
-          <p:nvPr/>
-        </p:nvSpPr>
-        <p:spPr>
-          <a:xfrm>
-            <a:off x="4425696" y="2423160"/>
-            <a:ext cx="640080" cy="640080"/>
-          </a:xfrm>
-          <a:prstGeom prst="rect">
-            <a:avLst/>
-          </a:prstGeom>
-          <a:noFill/>
-          <a:ln/>
-        </p:spPr>
-        <p:txBody>
-          <a:bodyPr wrap="square" lIns="0" tIns="0" rIns="0" bIns="0" rtlCol="0" anchor="ctr"/>
-          <a:lstStyle/>
-          <a:p>
-            <a:pPr algn="ctr" indent="0" marL="0">
-              <a:buNone/>
-            </a:pPr>
-            <a:r>
-              <a:rPr lang="en-US" sz="1800" b="1" dirty="0">
-                <a:solidFill>
-                  <a:srgbClr val="13161C"/>
+              <a:t>// tests.cpp:305   호스트(CPU) 함수</a:t>
+            </a:r>
+            <a:endParaRPr lang="en-US" sz="1300" dirty="0"/>
+          </a:p>
+          <a:p>
+            <a:pPr algn="l" indent="0" marL="0">
+              <a:lnSpc>
+                <a:spcPct val="108000"/>
+              </a:lnSpc>
+              <a:buNone/>
+            </a:pPr>
+            <a:r>
+              <a:rPr lang="en-US" sz="1300" dirty="0">
+                <a:solidFill>
+                  <a:srgbClr val="8CC63F"/>
                 </a:solidFill>
                 <a:latin typeface="Courier New" pitchFamily="34" charset="0"/>
                 <a:ea typeface="Courier New" pitchFamily="34" charset="-122"/>
                 <a:cs typeface="Courier New" pitchFamily="34" charset="-120"/>
               </a:rPr>
-              <a:t>1</a:t>
-            </a:r>
-            <a:endParaRPr lang="en-US" sz="1800" dirty="0"/>
-          </a:p>
-        </p:txBody>
-      </p:sp>
-      <p:sp>
-        <p:nvSpPr>
-          <p:cNvPr id="12" name="Shape 10"/>
-          <p:cNvSpPr/>
-          <p:nvPr/>
-        </p:nvSpPr>
-        <p:spPr>
-          <a:xfrm>
-            <a:off x="5175504" y="2423160"/>
-            <a:ext cx="640080" cy="640080"/>
-          </a:xfrm>
-          <a:prstGeom prst="roundRect">
-            <a:avLst>
-              <a:gd name="adj" fmla="val 7143"/>
-            </a:avLst>
-          </a:prstGeom>
-          <a:solidFill>
-            <a:srgbClr val="8CC63F"/>
-          </a:solidFill>
-          <a:ln w="12700">
-            <a:solidFill>
-              <a:srgbClr val="8CC63F"/>
-            </a:solidFill>
-            <a:prstDash val="solid"/>
-          </a:ln>
-        </p:spPr>
-      </p:sp>
-      <p:sp>
-        <p:nvSpPr>
-          <p:cNvPr id="13" name="Text 11"/>
-          <p:cNvSpPr/>
-          <p:nvPr/>
-        </p:nvSpPr>
-        <p:spPr>
-          <a:xfrm>
-            <a:off x="5175504" y="2423160"/>
-            <a:ext cx="640080" cy="640080"/>
-          </a:xfrm>
-          <a:prstGeom prst="rect">
-            <a:avLst/>
-          </a:prstGeom>
-          <a:noFill/>
-          <a:ln/>
-        </p:spPr>
-        <p:txBody>
-          <a:bodyPr wrap="square" lIns="0" tIns="0" rIns="0" bIns="0" rtlCol="0" anchor="ctr"/>
-          <a:lstStyle/>
-          <a:p>
-            <a:pPr algn="ctr" indent="0" marL="0">
-              <a:buNone/>
-            </a:pPr>
-            <a:r>
-              <a:rPr lang="en-US" sz="1800" b="1" dirty="0">
-                <a:solidFill>
-                  <a:srgbClr val="13161C"/>
+              <a:t>① 쓰기 루프  ─ 전체 메모리에 p1을 쓴다</a:t>
+            </a:r>
+            <a:endParaRPr lang="en-US" sz="1300" dirty="0"/>
+          </a:p>
+          <a:p>
+            <a:pPr algn="l" indent="0" marL="0">
+              <a:lnSpc>
+                <a:spcPct val="108000"/>
+              </a:lnSpc>
+              <a:buNone/>
+            </a:pPr>
+            <a:r>
+              <a:rPr lang="en-US" sz="1300" dirty="0">
+                <a:solidFill>
+                  <a:srgbClr val="E8EDF2"/>
                 </a:solidFill>
                 <a:latin typeface="Courier New" pitchFamily="34" charset="0"/>
                 <a:ea typeface="Courier New" pitchFamily="34" charset="-122"/>
                 <a:cs typeface="Courier New" pitchFamily="34" charset="-120"/>
               </a:rPr>
-              <a:t>1</a:t>
-            </a:r>
-            <a:endParaRPr lang="en-US" sz="1800" dirty="0"/>
-          </a:p>
-        </p:txBody>
-      </p:sp>
-      <p:sp>
-        <p:nvSpPr>
-          <p:cNvPr id="14" name="Shape 12"/>
-          <p:cNvSpPr/>
-          <p:nvPr/>
-        </p:nvSpPr>
-        <p:spPr>
-          <a:xfrm>
-            <a:off x="5925312" y="2423160"/>
-            <a:ext cx="640080" cy="640080"/>
-          </a:xfrm>
-          <a:prstGeom prst="roundRect">
-            <a:avLst>
-              <a:gd name="adj" fmla="val 7143"/>
-            </a:avLst>
-          </a:prstGeom>
-          <a:solidFill>
-            <a:srgbClr val="0E1116"/>
-          </a:solidFill>
-          <a:ln w="12700">
-            <a:solidFill>
-              <a:srgbClr val="8CC63F"/>
-            </a:solidFill>
-            <a:prstDash val="solid"/>
-          </a:ln>
-        </p:spPr>
-      </p:sp>
-      <p:sp>
-        <p:nvSpPr>
-          <p:cNvPr id="15" name="Text 13"/>
-          <p:cNvSpPr/>
-          <p:nvPr/>
-        </p:nvSpPr>
-        <p:spPr>
-          <a:xfrm>
-            <a:off x="5925312" y="2423160"/>
-            <a:ext cx="640080" cy="640080"/>
-          </a:xfrm>
-          <a:prstGeom prst="rect">
-            <a:avLst/>
-          </a:prstGeom>
-          <a:noFill/>
-          <a:ln/>
-        </p:spPr>
-        <p:txBody>
-          <a:bodyPr wrap="square" lIns="0" tIns="0" rIns="0" bIns="0" rtlCol="0" anchor="ctr"/>
-          <a:lstStyle/>
-          <a:p>
-            <a:pPr algn="ctr" indent="0" marL="0">
-              <a:buNone/>
-            </a:pPr>
-            <a:r>
-              <a:rPr lang="en-US" sz="1800" b="1" dirty="0">
-                <a:solidFill>
-                  <a:srgbClr val="9AA6B2"/>
+              <a:t>   for (...) kernel_move_inv_write&lt;&lt;&lt;grid,1&gt;&gt;&gt;(... p1);</a:t>
+            </a:r>
+            <a:endParaRPr lang="en-US" sz="1300" dirty="0"/>
+          </a:p>
+          <a:p>
+            <a:pPr algn="l" indent="0" marL="0">
+              <a:lnSpc>
+                <a:spcPct val="108000"/>
+              </a:lnSpc>
+              <a:buNone/>
+            </a:pPr>
+            <a:endParaRPr lang="en-US" sz="1300" dirty="0"/>
+          </a:p>
+          <a:p>
+            <a:pPr algn="l" indent="0" marL="0">
+              <a:lnSpc>
+                <a:spcPct val="108000"/>
+              </a:lnSpc>
+              <a:buNone/>
+            </a:pPr>
+            <a:r>
+              <a:rPr lang="en-US" sz="1300" dirty="0">
+                <a:solidFill>
+                  <a:srgbClr val="4FB0C6"/>
                 </a:solidFill>
                 <a:latin typeface="Courier New" pitchFamily="34" charset="0"/>
                 <a:ea typeface="Courier New" pitchFamily="34" charset="-122"/>
                 <a:cs typeface="Courier New" pitchFamily="34" charset="-120"/>
               </a:rPr>
-              <a:t>0</a:t>
-            </a:r>
-            <a:endParaRPr lang="en-US" sz="1800" dirty="0"/>
-          </a:p>
-        </p:txBody>
-      </p:sp>
-      <p:sp>
-        <p:nvSpPr>
-          <p:cNvPr id="16" name="Shape 14"/>
-          <p:cNvSpPr/>
-          <p:nvPr/>
-        </p:nvSpPr>
-        <p:spPr>
-          <a:xfrm>
-            <a:off x="6675120" y="2423160"/>
-            <a:ext cx="640080" cy="640080"/>
-          </a:xfrm>
-          <a:prstGeom prst="roundRect">
-            <a:avLst>
-              <a:gd name="adj" fmla="val 7143"/>
-            </a:avLst>
-          </a:prstGeom>
-          <a:solidFill>
-            <a:srgbClr val="8CC63F"/>
-          </a:solidFill>
-          <a:ln w="12700">
-            <a:solidFill>
-              <a:srgbClr val="8CC63F"/>
-            </a:solidFill>
-            <a:prstDash val="solid"/>
-          </a:ln>
-        </p:spPr>
-      </p:sp>
-      <p:sp>
-        <p:nvSpPr>
-          <p:cNvPr id="17" name="Text 15"/>
-          <p:cNvSpPr/>
-          <p:nvPr/>
-        </p:nvSpPr>
-        <p:spPr>
-          <a:xfrm>
-            <a:off x="6675120" y="2423160"/>
-            <a:ext cx="640080" cy="640080"/>
-          </a:xfrm>
-          <a:prstGeom prst="rect">
-            <a:avLst/>
-          </a:prstGeom>
-          <a:noFill/>
-          <a:ln/>
-        </p:spPr>
-        <p:txBody>
-          <a:bodyPr wrap="square" lIns="0" tIns="0" rIns="0" bIns="0" rtlCol="0" anchor="ctr"/>
-          <a:lstStyle/>
-          <a:p>
-            <a:pPr algn="ctr" indent="0" marL="0">
-              <a:buNone/>
-            </a:pPr>
-            <a:r>
-              <a:rPr lang="en-US" sz="1800" b="1" dirty="0">
-                <a:solidFill>
-                  <a:srgbClr val="13161C"/>
+              <a:t>② 읽고-쓰기 루프 ─ p1 검사 후 보수 p2를 쓴다</a:t>
+            </a:r>
+            <a:endParaRPr lang="en-US" sz="1300" dirty="0"/>
+          </a:p>
+          <a:p>
+            <a:pPr algn="l" indent="0" marL="0">
+              <a:lnSpc>
+                <a:spcPct val="108000"/>
+              </a:lnSpc>
+              <a:buNone/>
+            </a:pPr>
+            <a:r>
+              <a:rPr lang="en-US" sz="1300" dirty="0">
+                <a:solidFill>
+                  <a:srgbClr val="E8EDF2"/>
                 </a:solidFill>
                 <a:latin typeface="Courier New" pitchFamily="34" charset="0"/>
                 <a:ea typeface="Courier New" pitchFamily="34" charset="-122"/>
                 <a:cs typeface="Courier New" pitchFamily="34" charset="-120"/>
               </a:rPr>
-              <a:t>1</a:t>
-            </a:r>
-            <a:endParaRPr lang="en-US" sz="1800" dirty="0"/>
-          </a:p>
-        </p:txBody>
-      </p:sp>
-      <p:sp>
-        <p:nvSpPr>
-          <p:cNvPr id="18" name="Shape 16"/>
-          <p:cNvSpPr/>
-          <p:nvPr/>
-        </p:nvSpPr>
-        <p:spPr>
-          <a:xfrm>
-            <a:off x="7424928" y="2423160"/>
-            <a:ext cx="640080" cy="640080"/>
-          </a:xfrm>
-          <a:prstGeom prst="roundRect">
-            <a:avLst>
-              <a:gd name="adj" fmla="val 7143"/>
-            </a:avLst>
-          </a:prstGeom>
-          <a:solidFill>
-            <a:srgbClr val="0E1116"/>
-          </a:solidFill>
-          <a:ln w="12700">
-            <a:solidFill>
-              <a:srgbClr val="8CC63F"/>
-            </a:solidFill>
-            <a:prstDash val="solid"/>
-          </a:ln>
-        </p:spPr>
-      </p:sp>
-      <p:sp>
-        <p:nvSpPr>
-          <p:cNvPr id="19" name="Text 17"/>
-          <p:cNvSpPr/>
-          <p:nvPr/>
-        </p:nvSpPr>
-        <p:spPr>
-          <a:xfrm>
-            <a:off x="7424928" y="2423160"/>
-            <a:ext cx="640080" cy="640080"/>
-          </a:xfrm>
-          <a:prstGeom prst="rect">
-            <a:avLst/>
-          </a:prstGeom>
-          <a:noFill/>
-          <a:ln/>
-        </p:spPr>
-        <p:txBody>
-          <a:bodyPr wrap="square" lIns="0" tIns="0" rIns="0" bIns="0" rtlCol="0" anchor="ctr"/>
-          <a:lstStyle/>
-          <a:p>
-            <a:pPr algn="ctr" indent="0" marL="0">
-              <a:buNone/>
-            </a:pPr>
-            <a:r>
-              <a:rPr lang="en-US" sz="1800" b="1" dirty="0">
-                <a:solidFill>
-                  <a:srgbClr val="9AA6B2"/>
+              <a:t>   for (...) {</a:t>
+            </a:r>
+            <a:endParaRPr lang="en-US" sz="1300" dirty="0"/>
+          </a:p>
+          <a:p>
+            <a:pPr algn="l" indent="0" marL="0">
+              <a:lnSpc>
+                <a:spcPct val="108000"/>
+              </a:lnSpc>
+              <a:buNone/>
+            </a:pPr>
+            <a:r>
+              <a:rPr lang="en-US" sz="1300" dirty="0">
+                <a:solidFill>
+                  <a:srgbClr val="E8EDF2"/>
                 </a:solidFill>
                 <a:latin typeface="Courier New" pitchFamily="34" charset="0"/>
                 <a:ea typeface="Courier New" pitchFamily="34" charset="-122"/>
                 <a:cs typeface="Courier New" pitchFamily="34" charset="-120"/>
               </a:rPr>
-              <a:t>0</a:t>
-            </a:r>
-            <a:endParaRPr lang="en-US" sz="1800" dirty="0"/>
-          </a:p>
-        </p:txBody>
-      </p:sp>
-      <p:sp>
-        <p:nvSpPr>
-          <p:cNvPr id="20" name="Shape 18"/>
-          <p:cNvSpPr/>
-          <p:nvPr/>
-        </p:nvSpPr>
-        <p:spPr>
-          <a:xfrm>
-            <a:off x="8174736" y="2423160"/>
-            <a:ext cx="640080" cy="640080"/>
-          </a:xfrm>
-          <a:prstGeom prst="roundRect">
-            <a:avLst>
-              <a:gd name="adj" fmla="val 7143"/>
-            </a:avLst>
-          </a:prstGeom>
-          <a:solidFill>
-            <a:srgbClr val="0E1116"/>
-          </a:solidFill>
-          <a:ln w="12700">
-            <a:solidFill>
-              <a:srgbClr val="8CC63F"/>
-            </a:solidFill>
-            <a:prstDash val="solid"/>
-          </a:ln>
-        </p:spPr>
-      </p:sp>
-      <p:sp>
-        <p:nvSpPr>
-          <p:cNvPr id="21" name="Text 19"/>
-          <p:cNvSpPr/>
-          <p:nvPr/>
-        </p:nvSpPr>
-        <p:spPr>
-          <a:xfrm>
-            <a:off x="8174736" y="2423160"/>
-            <a:ext cx="640080" cy="640080"/>
-          </a:xfrm>
-          <a:prstGeom prst="rect">
-            <a:avLst/>
-          </a:prstGeom>
-          <a:noFill/>
-          <a:ln/>
-        </p:spPr>
-        <p:txBody>
-          <a:bodyPr wrap="square" lIns="0" tIns="0" rIns="0" bIns="0" rtlCol="0" anchor="ctr"/>
-          <a:lstStyle/>
-          <a:p>
-            <a:pPr algn="ctr" indent="0" marL="0">
-              <a:buNone/>
-            </a:pPr>
-            <a:r>
-              <a:rPr lang="en-US" sz="1800" b="1" dirty="0">
-                <a:solidFill>
-                  <a:srgbClr val="9AA6B2"/>
+              <a:t>       kernel_move_inv_readwrite&lt;&lt;&lt;grid,1&gt;&gt;&gt;(... p1, p2 ...);</a:t>
+            </a:r>
+            <a:endParaRPr lang="en-US" sz="1300" dirty="0"/>
+          </a:p>
+          <a:p>
+            <a:pPr algn="l" indent="0" marL="0">
+              <a:lnSpc>
+                <a:spcPct val="108000"/>
+              </a:lnSpc>
+              <a:buNone/>
+            </a:pPr>
+            <a:r>
+              <a:rPr lang="en-US" sz="1300" dirty="0">
+                <a:solidFill>
+                  <a:srgbClr val="E0A458"/>
                 </a:solidFill>
                 <a:latin typeface="Courier New" pitchFamily="34" charset="0"/>
                 <a:ea typeface="Courier New" pitchFamily="34" charset="-122"/>
                 <a:cs typeface="Courier New" pitchFamily="34" charset="-120"/>
               </a:rPr>
-              <a:t>0</a:t>
-            </a:r>
-            <a:endParaRPr lang="en-US" sz="1800" dirty="0"/>
-          </a:p>
-        </p:txBody>
-      </p:sp>
-      <p:sp>
-        <p:nvSpPr>
-          <p:cNvPr id="22" name="Text 20"/>
-          <p:cNvSpPr/>
-          <p:nvPr/>
-        </p:nvSpPr>
-        <p:spPr>
-          <a:xfrm>
-            <a:off x="548640" y="3474720"/>
-            <a:ext cx="2194560" cy="548640"/>
-          </a:xfrm>
-          <a:prstGeom prst="rect">
-            <a:avLst/>
-          </a:prstGeom>
-          <a:noFill/>
-          <a:ln/>
-        </p:spPr>
-        <p:txBody>
-          <a:bodyPr wrap="square" lIns="0" tIns="0" rIns="0" bIns="0" rtlCol="0" anchor="ctr"/>
-          <a:lstStyle/>
-          <a:p>
-            <a:pPr indent="0" marL="0">
-              <a:buNone/>
-            </a:pPr>
-            <a:r>
-              <a:rPr lang="en-US" sz="1600" b="1" dirty="0">
-                <a:solidFill>
-                  <a:srgbClr val="4FB0C6"/>
-                </a:solidFill>
-                <a:latin typeface="Malgun Gothic" pitchFamily="34" charset="0"/>
-                <a:ea typeface="Malgun Gothic" pitchFamily="34" charset="-122"/>
-                <a:cs typeface="Malgun Gothic" pitchFamily="34" charset="-120"/>
-              </a:rPr>
-              <a:t>p2 = ~p1 =</a:t>
-            </a:r>
-            <a:endParaRPr lang="en-US" sz="1600" dirty="0"/>
-          </a:p>
-        </p:txBody>
-      </p:sp>
-      <p:sp>
-        <p:nvSpPr>
-          <p:cNvPr id="23" name="Shape 21"/>
-          <p:cNvSpPr/>
-          <p:nvPr/>
-        </p:nvSpPr>
-        <p:spPr>
-          <a:xfrm>
-            <a:off x="2926080" y="3429000"/>
-            <a:ext cx="640080" cy="640080"/>
-          </a:xfrm>
-          <a:prstGeom prst="roundRect">
-            <a:avLst>
-              <a:gd name="adj" fmla="val 7143"/>
-            </a:avLst>
-          </a:prstGeom>
-          <a:solidFill>
-            <a:srgbClr val="0E1116"/>
-          </a:solidFill>
-          <a:ln w="12700">
-            <a:solidFill>
-              <a:srgbClr val="4FB0C6"/>
-            </a:solidFill>
-            <a:prstDash val="solid"/>
-          </a:ln>
-        </p:spPr>
-      </p:sp>
-      <p:sp>
-        <p:nvSpPr>
-          <p:cNvPr id="24" name="Text 22"/>
-          <p:cNvSpPr/>
-          <p:nvPr/>
-        </p:nvSpPr>
-        <p:spPr>
-          <a:xfrm>
-            <a:off x="2926080" y="3429000"/>
-            <a:ext cx="640080" cy="640080"/>
-          </a:xfrm>
-          <a:prstGeom prst="rect">
-            <a:avLst/>
-          </a:prstGeom>
-          <a:noFill/>
-          <a:ln/>
-        </p:spPr>
-        <p:txBody>
-          <a:bodyPr wrap="square" lIns="0" tIns="0" rIns="0" bIns="0" rtlCol="0" anchor="ctr"/>
-          <a:lstStyle/>
-          <a:p>
-            <a:pPr algn="ctr" indent="0" marL="0">
-              <a:buNone/>
-            </a:pPr>
-            <a:r>
-              <a:rPr lang="en-US" sz="1800" b="1" dirty="0">
-                <a:solidFill>
-                  <a:srgbClr val="9AA6B2"/>
+              <a:t>       err += error_checking("move_inv_readwrite", i);  // 오류를 CPU로</a:t>
+            </a:r>
+            <a:endParaRPr lang="en-US" sz="1300" dirty="0"/>
+          </a:p>
+          <a:p>
+            <a:pPr algn="l" indent="0" marL="0">
+              <a:lnSpc>
+                <a:spcPct val="108000"/>
+              </a:lnSpc>
+              <a:buNone/>
+            </a:pPr>
+            <a:r>
+              <a:rPr lang="en-US" sz="1300" dirty="0">
+                <a:solidFill>
+                  <a:srgbClr val="E8EDF2"/>
                 </a:solidFill>
                 <a:latin typeface="Courier New" pitchFamily="34" charset="0"/>
                 <a:ea typeface="Courier New" pitchFamily="34" charset="-122"/>
                 <a:cs typeface="Courier New" pitchFamily="34" charset="-120"/>
               </a:rPr>
-              <a:t>0</a:t>
-            </a:r>
-            <a:endParaRPr lang="en-US" sz="1800" dirty="0"/>
-          </a:p>
-        </p:txBody>
-      </p:sp>
-      <p:sp>
-        <p:nvSpPr>
-          <p:cNvPr id="25" name="Shape 23"/>
-          <p:cNvSpPr/>
-          <p:nvPr/>
-        </p:nvSpPr>
-        <p:spPr>
-          <a:xfrm>
-            <a:off x="3675888" y="3429000"/>
-            <a:ext cx="640080" cy="640080"/>
-          </a:xfrm>
-          <a:prstGeom prst="roundRect">
-            <a:avLst>
-              <a:gd name="adj" fmla="val 7143"/>
-            </a:avLst>
-          </a:prstGeom>
-          <a:solidFill>
-            <a:srgbClr val="4FB0C6"/>
-          </a:solidFill>
-          <a:ln w="12700">
-            <a:solidFill>
-              <a:srgbClr val="4FB0C6"/>
-            </a:solidFill>
-            <a:prstDash val="solid"/>
-          </a:ln>
-        </p:spPr>
-      </p:sp>
-      <p:sp>
-        <p:nvSpPr>
-          <p:cNvPr id="26" name="Text 24"/>
-          <p:cNvSpPr/>
-          <p:nvPr/>
-        </p:nvSpPr>
-        <p:spPr>
-          <a:xfrm>
-            <a:off x="3675888" y="3429000"/>
-            <a:ext cx="640080" cy="640080"/>
-          </a:xfrm>
-          <a:prstGeom prst="rect">
-            <a:avLst/>
-          </a:prstGeom>
-          <a:noFill/>
-          <a:ln/>
-        </p:spPr>
-        <p:txBody>
-          <a:bodyPr wrap="square" lIns="0" tIns="0" rIns="0" bIns="0" rtlCol="0" anchor="ctr"/>
-          <a:lstStyle/>
-          <a:p>
-            <a:pPr algn="ctr" indent="0" marL="0">
-              <a:buNone/>
-            </a:pPr>
-            <a:r>
-              <a:rPr lang="en-US" sz="1800" b="1" dirty="0">
-                <a:solidFill>
-                  <a:srgbClr val="13161C"/>
+              <a:t>   }</a:t>
+            </a:r>
+            <a:endParaRPr lang="en-US" sz="1300" dirty="0"/>
+          </a:p>
+          <a:p>
+            <a:pPr algn="l" indent="0" marL="0">
+              <a:lnSpc>
+                <a:spcPct val="108000"/>
+              </a:lnSpc>
+              <a:buNone/>
+            </a:pPr>
+            <a:endParaRPr lang="en-US" sz="1300" dirty="0"/>
+          </a:p>
+          <a:p>
+            <a:pPr algn="l" indent="0" marL="0">
+              <a:lnSpc>
+                <a:spcPct val="108000"/>
+              </a:lnSpc>
+              <a:buNone/>
+            </a:pPr>
+            <a:r>
+              <a:rPr lang="en-US" sz="1300" dirty="0">
+                <a:solidFill>
+                  <a:srgbClr val="4FB0C6"/>
                 </a:solidFill>
                 <a:latin typeface="Courier New" pitchFamily="34" charset="0"/>
                 <a:ea typeface="Courier New" pitchFamily="34" charset="-122"/>
                 <a:cs typeface="Courier New" pitchFamily="34" charset="-120"/>
               </a:rPr>
-              <a:t>1</a:t>
-            </a:r>
-            <a:endParaRPr lang="en-US" sz="1800" dirty="0"/>
-          </a:p>
-        </p:txBody>
-      </p:sp>
-      <p:sp>
-        <p:nvSpPr>
-          <p:cNvPr id="27" name="Shape 25"/>
-          <p:cNvSpPr/>
-          <p:nvPr/>
-        </p:nvSpPr>
-        <p:spPr>
-          <a:xfrm>
-            <a:off x="4425696" y="3429000"/>
-            <a:ext cx="640080" cy="640080"/>
-          </a:xfrm>
-          <a:prstGeom prst="roundRect">
-            <a:avLst>
-              <a:gd name="adj" fmla="val 7143"/>
-            </a:avLst>
-          </a:prstGeom>
-          <a:solidFill>
-            <a:srgbClr val="0E1116"/>
-          </a:solidFill>
-          <a:ln w="12700">
-            <a:solidFill>
-              <a:srgbClr val="4FB0C6"/>
-            </a:solidFill>
-            <a:prstDash val="solid"/>
-          </a:ln>
-        </p:spPr>
-      </p:sp>
-      <p:sp>
-        <p:nvSpPr>
-          <p:cNvPr id="28" name="Text 26"/>
-          <p:cNvSpPr/>
-          <p:nvPr/>
-        </p:nvSpPr>
-        <p:spPr>
-          <a:xfrm>
-            <a:off x="4425696" y="3429000"/>
-            <a:ext cx="640080" cy="640080"/>
-          </a:xfrm>
-          <a:prstGeom prst="rect">
-            <a:avLst/>
-          </a:prstGeom>
-          <a:noFill/>
-          <a:ln/>
-        </p:spPr>
-        <p:txBody>
-          <a:bodyPr wrap="square" lIns="0" tIns="0" rIns="0" bIns="0" rtlCol="0" anchor="ctr"/>
-          <a:lstStyle/>
-          <a:p>
-            <a:pPr algn="ctr" indent="0" marL="0">
-              <a:buNone/>
-            </a:pPr>
-            <a:r>
-              <a:rPr lang="en-US" sz="1800" b="1" dirty="0">
-                <a:solidFill>
-                  <a:srgbClr val="9AA6B2"/>
+              <a:t>③ 읽기 루프 ─ p2 인지 다시 검사한다</a:t>
+            </a:r>
+            <a:endParaRPr lang="en-US" sz="1300" dirty="0"/>
+          </a:p>
+          <a:p>
+            <a:pPr algn="l" indent="0" marL="0">
+              <a:lnSpc>
+                <a:spcPct val="108000"/>
+              </a:lnSpc>
+              <a:buNone/>
+            </a:pPr>
+            <a:r>
+              <a:rPr lang="en-US" sz="1300" dirty="0">
+                <a:solidFill>
+                  <a:srgbClr val="E8EDF2"/>
                 </a:solidFill>
                 <a:latin typeface="Courier New" pitchFamily="34" charset="0"/>
                 <a:ea typeface="Courier New" pitchFamily="34" charset="-122"/>
                 <a:cs typeface="Courier New" pitchFamily="34" charset="-120"/>
               </a:rPr>
-              <a:t>0</a:t>
-            </a:r>
-            <a:endParaRPr lang="en-US" sz="1800" dirty="0"/>
-          </a:p>
-        </p:txBody>
-      </p:sp>
-      <p:sp>
-        <p:nvSpPr>
-          <p:cNvPr id="29" name="Shape 27"/>
-          <p:cNvSpPr/>
-          <p:nvPr/>
-        </p:nvSpPr>
-        <p:spPr>
-          <a:xfrm>
-            <a:off x="5175504" y="3429000"/>
-            <a:ext cx="640080" cy="640080"/>
-          </a:xfrm>
-          <a:prstGeom prst="roundRect">
-            <a:avLst>
-              <a:gd name="adj" fmla="val 7143"/>
-            </a:avLst>
-          </a:prstGeom>
-          <a:solidFill>
-            <a:srgbClr val="0E1116"/>
-          </a:solidFill>
-          <a:ln w="12700">
-            <a:solidFill>
-              <a:srgbClr val="4FB0C6"/>
-            </a:solidFill>
-            <a:prstDash val="solid"/>
-          </a:ln>
-        </p:spPr>
-      </p:sp>
-      <p:sp>
-        <p:nvSpPr>
-          <p:cNvPr id="30" name="Text 28"/>
-          <p:cNvSpPr/>
-          <p:nvPr/>
-        </p:nvSpPr>
-        <p:spPr>
-          <a:xfrm>
-            <a:off x="5175504" y="3429000"/>
-            <a:ext cx="640080" cy="640080"/>
-          </a:xfrm>
-          <a:prstGeom prst="rect">
-            <a:avLst/>
-          </a:prstGeom>
-          <a:noFill/>
-          <a:ln/>
-        </p:spPr>
-        <p:txBody>
-          <a:bodyPr wrap="square" lIns="0" tIns="0" rIns="0" bIns="0" rtlCol="0" anchor="ctr"/>
-          <a:lstStyle/>
-          <a:p>
-            <a:pPr algn="ctr" indent="0" marL="0">
-              <a:buNone/>
-            </a:pPr>
-            <a:r>
-              <a:rPr lang="en-US" sz="1800" b="1" dirty="0">
-                <a:solidFill>
-                  <a:srgbClr val="9AA6B2"/>
+              <a:t>   for (...) {</a:t>
+            </a:r>
+            <a:endParaRPr lang="en-US" sz="1300" dirty="0"/>
+          </a:p>
+          <a:p>
+            <a:pPr algn="l" indent="0" marL="0">
+              <a:lnSpc>
+                <a:spcPct val="108000"/>
+              </a:lnSpc>
+              <a:buNone/>
+            </a:pPr>
+            <a:r>
+              <a:rPr lang="en-US" sz="1300" dirty="0">
+                <a:solidFill>
+                  <a:srgbClr val="E8EDF2"/>
                 </a:solidFill>
                 <a:latin typeface="Courier New" pitchFamily="34" charset="0"/>
                 <a:ea typeface="Courier New" pitchFamily="34" charset="-122"/>
                 <a:cs typeface="Courier New" pitchFamily="34" charset="-120"/>
               </a:rPr>
-              <a:t>0</a:t>
-            </a:r>
-            <a:endParaRPr lang="en-US" sz="1800" dirty="0"/>
-          </a:p>
-        </p:txBody>
-      </p:sp>
-      <p:sp>
-        <p:nvSpPr>
-          <p:cNvPr id="31" name="Shape 29"/>
-          <p:cNvSpPr/>
-          <p:nvPr/>
-        </p:nvSpPr>
-        <p:spPr>
-          <a:xfrm>
-            <a:off x="5925312" y="3429000"/>
-            <a:ext cx="640080" cy="640080"/>
-          </a:xfrm>
-          <a:prstGeom prst="roundRect">
-            <a:avLst>
-              <a:gd name="adj" fmla="val 7143"/>
-            </a:avLst>
-          </a:prstGeom>
-          <a:solidFill>
-            <a:srgbClr val="4FB0C6"/>
-          </a:solidFill>
-          <a:ln w="12700">
-            <a:solidFill>
-              <a:srgbClr val="4FB0C6"/>
-            </a:solidFill>
-            <a:prstDash val="solid"/>
-          </a:ln>
-        </p:spPr>
-      </p:sp>
-      <p:sp>
-        <p:nvSpPr>
-          <p:cNvPr id="32" name="Text 30"/>
-          <p:cNvSpPr/>
-          <p:nvPr/>
-        </p:nvSpPr>
-        <p:spPr>
-          <a:xfrm>
-            <a:off x="5925312" y="3429000"/>
-            <a:ext cx="640080" cy="640080"/>
-          </a:xfrm>
-          <a:prstGeom prst="rect">
-            <a:avLst/>
-          </a:prstGeom>
-          <a:noFill/>
-          <a:ln/>
-        </p:spPr>
-        <p:txBody>
-          <a:bodyPr wrap="square" lIns="0" tIns="0" rIns="0" bIns="0" rtlCol="0" anchor="ctr"/>
-          <a:lstStyle/>
-          <a:p>
-            <a:pPr algn="ctr" indent="0" marL="0">
-              <a:buNone/>
-            </a:pPr>
-            <a:r>
-              <a:rPr lang="en-US" sz="1800" b="1" dirty="0">
-                <a:solidFill>
-                  <a:srgbClr val="13161C"/>
+              <a:t>       kernel_move_inv_read&lt;&lt;&lt;grid,1&gt;&gt;&gt;(... p2 ...);</a:t>
+            </a:r>
+            <a:endParaRPr lang="en-US" sz="1300" dirty="0"/>
+          </a:p>
+          <a:p>
+            <a:pPr algn="l" indent="0" marL="0">
+              <a:lnSpc>
+                <a:spcPct val="108000"/>
+              </a:lnSpc>
+              <a:buNone/>
+            </a:pPr>
+            <a:r>
+              <a:rPr lang="en-US" sz="1300" dirty="0">
+                <a:solidFill>
+                  <a:srgbClr val="E0A458"/>
                 </a:solidFill>
                 <a:latin typeface="Courier New" pitchFamily="34" charset="0"/>
                 <a:ea typeface="Courier New" pitchFamily="34" charset="-122"/>
                 <a:cs typeface="Courier New" pitchFamily="34" charset="-120"/>
               </a:rPr>
-              <a:t>1</a:t>
-            </a:r>
-            <a:endParaRPr lang="en-US" sz="1800" dirty="0"/>
-          </a:p>
-        </p:txBody>
-      </p:sp>
-      <p:sp>
-        <p:nvSpPr>
-          <p:cNvPr id="33" name="Shape 31"/>
-          <p:cNvSpPr/>
-          <p:nvPr/>
-        </p:nvSpPr>
-        <p:spPr>
-          <a:xfrm>
-            <a:off x="6675120" y="3429000"/>
-            <a:ext cx="640080" cy="640080"/>
-          </a:xfrm>
-          <a:prstGeom prst="roundRect">
-            <a:avLst>
-              <a:gd name="adj" fmla="val 7143"/>
-            </a:avLst>
-          </a:prstGeom>
-          <a:solidFill>
-            <a:srgbClr val="0E1116"/>
-          </a:solidFill>
-          <a:ln w="12700">
-            <a:solidFill>
-              <a:srgbClr val="4FB0C6"/>
-            </a:solidFill>
-            <a:prstDash val="solid"/>
-          </a:ln>
-        </p:spPr>
-      </p:sp>
-      <p:sp>
-        <p:nvSpPr>
-          <p:cNvPr id="34" name="Text 32"/>
-          <p:cNvSpPr/>
-          <p:nvPr/>
-        </p:nvSpPr>
-        <p:spPr>
-          <a:xfrm>
-            <a:off x="6675120" y="3429000"/>
-            <a:ext cx="640080" cy="640080"/>
-          </a:xfrm>
-          <a:prstGeom prst="rect">
-            <a:avLst/>
-          </a:prstGeom>
-          <a:noFill/>
-          <a:ln/>
-        </p:spPr>
-        <p:txBody>
-          <a:bodyPr wrap="square" lIns="0" tIns="0" rIns="0" bIns="0" rtlCol="0" anchor="ctr"/>
-          <a:lstStyle/>
-          <a:p>
-            <a:pPr algn="ctr" indent="0" marL="0">
-              <a:buNone/>
-            </a:pPr>
-            <a:r>
-              <a:rPr lang="en-US" sz="1800" b="1" dirty="0">
-                <a:solidFill>
-                  <a:srgbClr val="9AA6B2"/>
+              <a:t>       err += error_checking("move_inv_read", i);</a:t>
+            </a:r>
+            <a:endParaRPr lang="en-US" sz="1300" dirty="0"/>
+          </a:p>
+          <a:p>
+            <a:pPr algn="l" indent="0" marL="0">
+              <a:lnSpc>
+                <a:spcPct val="108000"/>
+              </a:lnSpc>
+              <a:buNone/>
+            </a:pPr>
+            <a:r>
+              <a:rPr lang="en-US" sz="1300" dirty="0">
+                <a:solidFill>
+                  <a:srgbClr val="E8EDF2"/>
                 </a:solidFill>
                 <a:latin typeface="Courier New" pitchFamily="34" charset="0"/>
                 <a:ea typeface="Courier New" pitchFamily="34" charset="-122"/>
                 <a:cs typeface="Courier New" pitchFamily="34" charset="-120"/>
               </a:rPr>
-              <a:t>0</a:t>
-            </a:r>
-            <a:endParaRPr lang="en-US" sz="1800" dirty="0"/>
-          </a:p>
-        </p:txBody>
-      </p:sp>
-      <p:sp>
-        <p:nvSpPr>
-          <p:cNvPr id="35" name="Shape 33"/>
-          <p:cNvSpPr/>
-          <p:nvPr/>
-        </p:nvSpPr>
-        <p:spPr>
-          <a:xfrm>
-            <a:off x="7424928" y="3429000"/>
-            <a:ext cx="640080" cy="640080"/>
-          </a:xfrm>
-          <a:prstGeom prst="roundRect">
-            <a:avLst>
-              <a:gd name="adj" fmla="val 7143"/>
-            </a:avLst>
-          </a:prstGeom>
-          <a:solidFill>
-            <a:srgbClr val="4FB0C6"/>
-          </a:solidFill>
-          <a:ln w="12700">
-            <a:solidFill>
-              <a:srgbClr val="4FB0C6"/>
-            </a:solidFill>
-            <a:prstDash val="solid"/>
-          </a:ln>
-        </p:spPr>
-      </p:sp>
-      <p:sp>
-        <p:nvSpPr>
-          <p:cNvPr id="36" name="Text 34"/>
-          <p:cNvSpPr/>
-          <p:nvPr/>
-        </p:nvSpPr>
-        <p:spPr>
-          <a:xfrm>
-            <a:off x="7424928" y="3429000"/>
-            <a:ext cx="640080" cy="640080"/>
+              <a:t>   }</a:t>
+            </a:r>
+            <a:endParaRPr lang="en-US" sz="1300" dirty="0"/>
+          </a:p>
+        </p:txBody>
+      </p:sp>
+      <p:sp>
+        <p:nvSpPr>
+          <p:cNvPr id="6" name="Text 4"/>
+          <p:cNvSpPr/>
+          <p:nvPr/>
+        </p:nvSpPr>
+        <p:spPr>
+          <a:xfrm>
+            <a:off x="548640" y="5669280"/>
+            <a:ext cx="11064240" cy="457200"/>
           </a:xfrm>
           <a:prstGeom prst="rect">
             <a:avLst/>
@@ -7947,116 +7962,11 @@
           <a:bodyPr wrap="square" lIns="0" tIns="0" rIns="0" bIns="0" rtlCol="0" anchor="ctr"/>
           <a:lstStyle/>
           <a:p>
-            <a:pPr algn="ctr" indent="0" marL="0">
-              <a:buNone/>
-            </a:pPr>
-            <a:r>
-              <a:rPr lang="en-US" sz="1800" b="1" dirty="0">
-                <a:solidFill>
-                  <a:srgbClr val="13161C"/>
-                </a:solidFill>
-                <a:latin typeface="Courier New" pitchFamily="34" charset="0"/>
-                <a:ea typeface="Courier New" pitchFamily="34" charset="-122"/>
-                <a:cs typeface="Courier New" pitchFamily="34" charset="-120"/>
-              </a:rPr>
-              <a:t>1</a:t>
-            </a:r>
-            <a:endParaRPr lang="en-US" sz="1800" dirty="0"/>
-          </a:p>
-        </p:txBody>
-      </p:sp>
-      <p:sp>
-        <p:nvSpPr>
-          <p:cNvPr id="37" name="Shape 35"/>
-          <p:cNvSpPr/>
-          <p:nvPr/>
-        </p:nvSpPr>
-        <p:spPr>
-          <a:xfrm>
-            <a:off x="8174736" y="3429000"/>
-            <a:ext cx="640080" cy="640080"/>
-          </a:xfrm>
-          <a:prstGeom prst="roundRect">
-            <a:avLst>
-              <a:gd name="adj" fmla="val 7143"/>
-            </a:avLst>
-          </a:prstGeom>
-          <a:solidFill>
-            <a:srgbClr val="4FB0C6"/>
-          </a:solidFill>
-          <a:ln w="12700">
-            <a:solidFill>
-              <a:srgbClr val="4FB0C6"/>
-            </a:solidFill>
-            <a:prstDash val="solid"/>
-          </a:ln>
-        </p:spPr>
-      </p:sp>
-      <p:sp>
-        <p:nvSpPr>
-          <p:cNvPr id="38" name="Text 36"/>
-          <p:cNvSpPr/>
-          <p:nvPr/>
-        </p:nvSpPr>
-        <p:spPr>
-          <a:xfrm>
-            <a:off x="8174736" y="3429000"/>
-            <a:ext cx="640080" cy="640080"/>
-          </a:xfrm>
-          <a:prstGeom prst="rect">
-            <a:avLst/>
-          </a:prstGeom>
-          <a:noFill/>
-          <a:ln/>
-        </p:spPr>
-        <p:txBody>
-          <a:bodyPr wrap="square" lIns="0" tIns="0" rIns="0" bIns="0" rtlCol="0" anchor="ctr"/>
-          <a:lstStyle/>
-          <a:p>
-            <a:pPr algn="ctr" indent="0" marL="0">
-              <a:buNone/>
-            </a:pPr>
-            <a:r>
-              <a:rPr lang="en-US" sz="1800" b="1" dirty="0">
-                <a:solidFill>
-                  <a:srgbClr val="13161C"/>
-                </a:solidFill>
-                <a:latin typeface="Courier New" pitchFamily="34" charset="0"/>
-                <a:ea typeface="Courier New" pitchFamily="34" charset="-122"/>
-                <a:cs typeface="Courier New" pitchFamily="34" charset="-120"/>
-              </a:rPr>
-              <a:t>1</a:t>
-            </a:r>
-            <a:endParaRPr lang="en-US" sz="1800" dirty="0"/>
-          </a:p>
-        </p:txBody>
-      </p:sp>
-      <p:sp>
-        <p:nvSpPr>
-          <p:cNvPr id="39" name="Text 37"/>
-          <p:cNvSpPr/>
-          <p:nvPr/>
-        </p:nvSpPr>
-        <p:spPr>
-          <a:xfrm>
-            <a:off x="2926080" y="3127248"/>
-            <a:ext cx="4572000" cy="274320"/>
-          </a:xfrm>
-          <a:prstGeom prst="rect">
-            <a:avLst/>
-          </a:prstGeom>
-          <a:noFill/>
-          <a:ln/>
-        </p:spPr>
-        <p:txBody>
-          <a:bodyPr wrap="square" lIns="0" tIns="0" rIns="0" bIns="0" rtlCol="0" anchor="ctr"/>
-          <a:lstStyle/>
-          <a:p>
             <a:pPr indent="0" marL="0">
               <a:buNone/>
             </a:pPr>
             <a:r>
-              <a:rPr lang="en-US" sz="1200" dirty="0">
+              <a:rPr lang="en-US" sz="1400" dirty="0">
                 <a:solidFill>
                   <a:srgbClr val="9AA6B2"/>
                 </a:solidFill>
@@ -8064,129 +7974,9 @@
                 <a:ea typeface="Malgun Gothic" pitchFamily="34" charset="-122"/>
                 <a:cs typeface="Malgun Gothic" pitchFamily="34" charset="-120"/>
               </a:rPr>
-              <a:t>↓ 모든 비트 반전</a:t>
-            </a:r>
-            <a:endParaRPr lang="en-US" sz="1200" dirty="0"/>
-          </a:p>
-        </p:txBody>
-      </p:sp>
-      <p:sp>
-        <p:nvSpPr>
-          <p:cNvPr id="40" name="Text 38"/>
-          <p:cNvSpPr/>
-          <p:nvPr/>
-        </p:nvSpPr>
-        <p:spPr>
-          <a:xfrm>
-            <a:off x="548640" y="4480560"/>
-            <a:ext cx="11064240" cy="914400"/>
-          </a:xfrm>
-          <a:prstGeom prst="rect">
-            <a:avLst/>
-          </a:prstGeom>
-          <a:noFill/>
-          <a:ln/>
-        </p:spPr>
-        <p:txBody>
-          <a:bodyPr wrap="square" lIns="0" tIns="0" rIns="0" bIns="0" rtlCol="0" anchor="t"/>
-          <a:lstStyle/>
-          <a:p>
-            <a:pPr indent="0" marL="0">
-              <a:buNone/>
-            </a:pPr>
-            <a:r>
-              <a:rPr lang="en-US" sz="1600" b="1" dirty="0">
-                <a:solidFill>
-                  <a:srgbClr val="8CC63F"/>
-                </a:solidFill>
-                <a:latin typeface="Malgun Gothic" pitchFamily="34" charset="0"/>
-                <a:ea typeface="Malgun Gothic" pitchFamily="34" charset="-122"/>
-                <a:cs typeface="Malgun Gothic" pitchFamily="34" charset="-120"/>
-              </a:rPr>
-              <a:t>1로 고착된 비트</a:t>
-            </a:r>
-            <a:pPr indent="0" marL="0">
-              <a:buNone/>
-            </a:pPr>
-            <a:r>
-              <a:rPr lang="en-US" sz="1600" dirty="0">
-                <a:solidFill>
-                  <a:srgbClr val="E8EDF2"/>
-                </a:solidFill>
-                <a:latin typeface="Malgun Gothic" pitchFamily="34" charset="0"/>
-                <a:ea typeface="Malgun Gothic" pitchFamily="34" charset="-122"/>
-                <a:cs typeface="Malgun Gothic" pitchFamily="34" charset="-120"/>
-              </a:rPr>
-              <a:t>는 p2(0을 기대) 검사에서 걸리고, </a:t>
-            </a:r>
-            <a:pPr indent="0" marL="0">
-              <a:buNone/>
-            </a:pPr>
-            <a:r>
-              <a:rPr lang="en-US" sz="1600" b="1" dirty="0">
-                <a:solidFill>
-                  <a:srgbClr val="4FB0C6"/>
-                </a:solidFill>
-                <a:latin typeface="Malgun Gothic" pitchFamily="34" charset="0"/>
-                <a:ea typeface="Malgun Gothic" pitchFamily="34" charset="-122"/>
-                <a:cs typeface="Malgun Gothic" pitchFamily="34" charset="-120"/>
-              </a:rPr>
-              <a:t>0으로 고착된 비트</a:t>
-            </a:r>
-            <a:pPr indent="0" marL="0">
-              <a:buNone/>
-            </a:pPr>
-            <a:r>
-              <a:rPr lang="en-US" sz="1600" dirty="0">
-                <a:solidFill>
-                  <a:srgbClr val="E8EDF2"/>
-                </a:solidFill>
-                <a:latin typeface="Malgun Gothic" pitchFamily="34" charset="0"/>
-                <a:ea typeface="Malgun Gothic" pitchFamily="34" charset="-122"/>
-                <a:cs typeface="Malgun Gothic" pitchFamily="34" charset="-120"/>
-              </a:rPr>
-              <a:t>는 p1(1을 기대) 검사에서 걸립니다. 그래서 양방향 검사가 필요합니다.</a:t>
-            </a:r>
-            <a:endParaRPr lang="en-US" sz="1600" dirty="0"/>
-          </a:p>
-        </p:txBody>
-      </p:sp>
-      <p:sp>
-        <p:nvSpPr>
-          <p:cNvPr id="41" name="Text 39"/>
-          <p:cNvSpPr/>
-          <p:nvPr/>
-        </p:nvSpPr>
-        <p:spPr>
-          <a:xfrm>
-            <a:off x="548640" y="5577840"/>
-            <a:ext cx="11064240" cy="457200"/>
-          </a:xfrm>
-          <a:prstGeom prst="rect">
-            <a:avLst/>
-          </a:prstGeom>
-          <a:noFill/>
-          <a:ln/>
-        </p:spPr>
-        <p:txBody>
-          <a:bodyPr wrap="square" lIns="0" tIns="0" rIns="0" bIns="0" rtlCol="0" anchor="ctr"/>
-          <a:lstStyle/>
-          <a:p>
-            <a:pPr indent="0" marL="0">
-              <a:buNone/>
-            </a:pPr>
-            <a:r>
-              <a:rPr lang="en-US" sz="1300" i="1" dirty="0">
-                <a:solidFill>
-                  <a:srgbClr val="9AA6B2"/>
-                </a:solidFill>
-                <a:latin typeface="Malgun Gothic" pitchFamily="34" charset="0"/>
-                <a:ea typeface="Malgun Gothic" pitchFamily="34" charset="-122"/>
-                <a:cs typeface="Malgun Gothic" pitchFamily="34" charset="-120"/>
-              </a:rPr>
-              <a:t>Test 2는 p1=0x00000000, p2=0xFFFFFFFF (모두 0 / 모두 1)로 이 검사를 수행합니다. (tests.cpp:705)</a:t>
-            </a:r>
-            <a:endParaRPr lang="en-US" sz="1300" dirty="0"/>
+              <a:t>각 커널 실행 뒤 error_checking으로 오류를 확인합니다. 커널→검사→커널→검사 리듬을 기억하세요.</a:t>
+            </a:r>
+            <a:endParaRPr lang="en-US" sz="1400" dirty="0"/>
           </a:p>
         </p:txBody>
       </p:sp>
@@ -8259,7 +8049,7 @@
                 <a:ea typeface="Courier New" pitchFamily="34" charset="-122"/>
                 <a:cs typeface="Courier New" pitchFamily="34" charset="-120"/>
               </a:rPr>
-              <a:t>7</a:t>
+              <a:t>6</a:t>
             </a:r>
             <a:endParaRPr lang="en-US" sz="2200" dirty="0"/>
           </a:p>
@@ -8298,7 +8088,7 @@
                 <a:ea typeface="Malgun Gothic" pitchFamily="34" charset="-122"/>
                 <a:cs typeface="Malgun Gothic" pitchFamily="34" charset="-120"/>
               </a:rPr>
-              <a:t>오류가 CPU로 돌아오는 길</a:t>
+              <a:t>이동 반전(moving inversion) 알고리즘</a:t>
             </a:r>
             <a:endParaRPr lang="en-US" sz="3000" dirty="0"/>
           </a:p>
@@ -8306,18 +8096,162 @@
       </p:sp>
       <p:sp>
         <p:nvSpPr>
-          <p:cNvPr id="4" name="Shape 2"/>
-          <p:cNvSpPr/>
-          <p:nvPr/>
-        </p:nvSpPr>
-        <p:spPr>
-          <a:xfrm>
-            <a:off x="548640" y="1554480"/>
-            <a:ext cx="11064240" cy="2286000"/>
+          <p:cNvPr id="4" name="Text 2"/>
+          <p:cNvSpPr/>
+          <p:nvPr/>
+        </p:nvSpPr>
+        <p:spPr>
+          <a:xfrm>
+            <a:off x="548640" y="1463040"/>
+            <a:ext cx="11064240" cy="685800"/>
+          </a:xfrm>
+          <a:prstGeom prst="rect">
+            <a:avLst/>
+          </a:prstGeom>
+          <a:noFill/>
+          <a:ln/>
+        </p:spPr>
+        <p:txBody>
+          <a:bodyPr wrap="square" lIns="0" tIns="0" rIns="0" bIns="0" rtlCol="0" anchor="t"/>
+          <a:lstStyle/>
+          <a:p>
+            <a:pPr indent="0" marL="0">
+              <a:buNone/>
+            </a:pPr>
+            <a:r>
+              <a:rPr lang="en-US" sz="1600" dirty="0">
+                <a:solidFill>
+                  <a:srgbClr val="9AA6B2"/>
+                </a:solidFill>
+                <a:latin typeface="Malgun Gothic" pitchFamily="34" charset="0"/>
+                <a:ea typeface="Malgun Gothic" pitchFamily="34" charset="-122"/>
+                <a:cs typeface="Malgun Gothic" pitchFamily="34" charset="-120"/>
+              </a:rPr>
+              <a:t>패턴 p1을 썼다가, 확인 후 그 보수 p2 = ~p1로 뒤집어 다시 확인합니다. 비트를 양방향으로 검사해 고착 오류를 잡습니다.</a:t>
+            </a:r>
+            <a:endParaRPr lang="en-US" sz="1600" dirty="0"/>
+          </a:p>
+        </p:txBody>
+      </p:sp>
+      <p:sp>
+        <p:nvSpPr>
+          <p:cNvPr id="5" name="Text 3"/>
+          <p:cNvSpPr/>
+          <p:nvPr/>
+        </p:nvSpPr>
+        <p:spPr>
+          <a:xfrm>
+            <a:off x="548640" y="2468880"/>
+            <a:ext cx="2194560" cy="548640"/>
+          </a:xfrm>
+          <a:prstGeom prst="rect">
+            <a:avLst/>
+          </a:prstGeom>
+          <a:noFill/>
+          <a:ln/>
+        </p:spPr>
+        <p:txBody>
+          <a:bodyPr wrap="square" lIns="0" tIns="0" rIns="0" bIns="0" rtlCol="0" anchor="ctr"/>
+          <a:lstStyle/>
+          <a:p>
+            <a:pPr indent="0" marL="0">
+              <a:buNone/>
+            </a:pPr>
+            <a:r>
+              <a:rPr lang="en-US" sz="1600" b="1" dirty="0">
+                <a:solidFill>
+                  <a:srgbClr val="8CC63F"/>
+                </a:solidFill>
+                <a:latin typeface="Malgun Gothic" pitchFamily="34" charset="0"/>
+                <a:ea typeface="Malgun Gothic" pitchFamily="34" charset="-122"/>
+                <a:cs typeface="Malgun Gothic" pitchFamily="34" charset="-120"/>
+              </a:rPr>
+              <a:t>p1 =</a:t>
+            </a:r>
+            <a:endParaRPr lang="en-US" sz="1600" dirty="0"/>
+          </a:p>
+        </p:txBody>
+      </p:sp>
+      <p:sp>
+        <p:nvSpPr>
+          <p:cNvPr id="6" name="Shape 4"/>
+          <p:cNvSpPr/>
+          <p:nvPr/>
+        </p:nvSpPr>
+        <p:spPr>
+          <a:xfrm>
+            <a:off x="2926080" y="2423160"/>
+            <a:ext cx="640080" cy="640080"/>
           </a:xfrm>
           <a:prstGeom prst="roundRect">
             <a:avLst>
-              <a:gd name="adj" fmla="val 2400"/>
+              <a:gd name="adj" fmla="val 7143"/>
+            </a:avLst>
+          </a:prstGeom>
+          <a:solidFill>
+            <a:srgbClr val="8CC63F"/>
+          </a:solidFill>
+          <a:ln w="12700">
+            <a:solidFill>
+              <a:srgbClr val="8CC63F"/>
+            </a:solidFill>
+            <a:prstDash val="solid"/>
+          </a:ln>
+        </p:spPr>
+      </p:sp>
+      <p:sp>
+        <p:nvSpPr>
+          <p:cNvPr id="7" name="Text 5"/>
+          <p:cNvSpPr/>
+          <p:nvPr/>
+        </p:nvSpPr>
+        <p:spPr>
+          <a:xfrm>
+            <a:off x="2926080" y="2423160"/>
+            <a:ext cx="640080" cy="640080"/>
+          </a:xfrm>
+          <a:prstGeom prst="rect">
+            <a:avLst/>
+          </a:prstGeom>
+          <a:noFill/>
+          <a:ln/>
+        </p:spPr>
+        <p:txBody>
+          <a:bodyPr wrap="square" lIns="0" tIns="0" rIns="0" bIns="0" rtlCol="0" anchor="ctr"/>
+          <a:lstStyle/>
+          <a:p>
+            <a:pPr algn="ctr" indent="0" marL="0">
+              <a:buNone/>
+            </a:pPr>
+            <a:r>
+              <a:rPr lang="en-US" sz="1800" b="1" dirty="0">
+                <a:solidFill>
+                  <a:srgbClr val="13161C"/>
+                </a:solidFill>
+                <a:latin typeface="Courier New" pitchFamily="34" charset="0"/>
+                <a:ea typeface="Courier New" pitchFamily="34" charset="-122"/>
+                <a:cs typeface="Courier New" pitchFamily="34" charset="-120"/>
+              </a:rPr>
+              <a:t>1</a:t>
+            </a:r>
+            <a:endParaRPr lang="en-US" sz="1800" dirty="0"/>
+          </a:p>
+        </p:txBody>
+      </p:sp>
+      <p:sp>
+        <p:nvSpPr>
+          <p:cNvPr id="8" name="Shape 6"/>
+          <p:cNvSpPr/>
+          <p:nvPr/>
+        </p:nvSpPr>
+        <p:spPr>
+          <a:xfrm>
+            <a:off x="3675888" y="2423160"/>
+            <a:ext cx="640080" cy="640080"/>
+          </a:xfrm>
+          <a:prstGeom prst="roundRect">
+            <a:avLst>
+              <a:gd name="adj" fmla="val 7143"/>
             </a:avLst>
           </a:prstGeom>
           <a:solidFill>
@@ -8325,7 +8259,7 @@
           </a:solidFill>
           <a:ln w="12700">
             <a:solidFill>
-              <a:srgbClr val="2C3440"/>
+              <a:srgbClr val="8CC63F"/>
             </a:solidFill>
             <a:prstDash val="solid"/>
           </a:ln>
@@ -8333,33 +8267,30 @@
       </p:sp>
       <p:sp>
         <p:nvSpPr>
-          <p:cNvPr id="5" name="Text 3"/>
-          <p:cNvSpPr/>
-          <p:nvPr/>
-        </p:nvSpPr>
-        <p:spPr>
-          <a:xfrm>
-            <a:off x="749808" y="1700784"/>
-            <a:ext cx="10661904" cy="1993392"/>
-          </a:xfrm>
-          <a:prstGeom prst="rect">
-            <a:avLst/>
-          </a:prstGeom>
-          <a:noFill/>
-          <a:ln/>
-        </p:spPr>
-        <p:txBody>
-          <a:bodyPr wrap="square" lIns="0" tIns="0" rIns="0" bIns="0" rtlCol="0" anchor="t"/>
-          <a:lstStyle/>
-          <a:p>
-            <a:pPr algn="l" indent="0" marL="0">
-              <a:lnSpc>
-                <a:spcPct val="108000"/>
-              </a:lnSpc>
-              <a:buNone/>
-            </a:pPr>
-            <a:r>
-              <a:rPr lang="en-US" sz="1350" dirty="0">
+          <p:cNvPr id="9" name="Text 7"/>
+          <p:cNvSpPr/>
+          <p:nvPr/>
+        </p:nvSpPr>
+        <p:spPr>
+          <a:xfrm>
+            <a:off x="3675888" y="2423160"/>
+            <a:ext cx="640080" cy="640080"/>
+          </a:xfrm>
+          <a:prstGeom prst="rect">
+            <a:avLst/>
+          </a:prstGeom>
+          <a:noFill/>
+          <a:ln/>
+        </p:spPr>
+        <p:txBody>
+          <a:bodyPr wrap="square" lIns="0" tIns="0" rIns="0" bIns="0" rtlCol="0" anchor="ctr"/>
+          <a:lstStyle/>
+          <a:p>
+            <a:pPr algn="ctr" indent="0" marL="0">
+              <a:buNone/>
+            </a:pPr>
+            <a:r>
+              <a:rPr lang="en-US" sz="1800" b="1" dirty="0">
                 <a:solidFill>
                   <a:srgbClr val="9AA6B2"/>
                 </a:solidFill>
@@ -8367,205 +8298,313 @@
                 <a:ea typeface="Courier New" pitchFamily="34" charset="-122"/>
                 <a:cs typeface="Courier New" pitchFamily="34" charset="-120"/>
               </a:rPr>
-              <a:t>// error_checking()  tests.cpp:108</a:t>
-            </a:r>
-            <a:endParaRPr lang="en-US" sz="1350" dirty="0"/>
-          </a:p>
-          <a:p>
-            <a:pPr algn="l" indent="0" marL="0">
-              <a:lnSpc>
-                <a:spcPct val="108000"/>
-              </a:lnSpc>
-              <a:buNone/>
-            </a:pPr>
-            <a:r>
-              <a:rPr lang="en-US" sz="1350" dirty="0">
-                <a:solidFill>
-                  <a:srgbClr val="E8EDF2"/>
+              <a:t>0</a:t>
+            </a:r>
+            <a:endParaRPr lang="en-US" sz="1800" dirty="0"/>
+          </a:p>
+        </p:txBody>
+      </p:sp>
+      <p:sp>
+        <p:nvSpPr>
+          <p:cNvPr id="10" name="Shape 8"/>
+          <p:cNvSpPr/>
+          <p:nvPr/>
+        </p:nvSpPr>
+        <p:spPr>
+          <a:xfrm>
+            <a:off x="4425696" y="2423160"/>
+            <a:ext cx="640080" cy="640080"/>
+          </a:xfrm>
+          <a:prstGeom prst="roundRect">
+            <a:avLst>
+              <a:gd name="adj" fmla="val 7143"/>
+            </a:avLst>
+          </a:prstGeom>
+          <a:solidFill>
+            <a:srgbClr val="8CC63F"/>
+          </a:solidFill>
+          <a:ln w="12700">
+            <a:solidFill>
+              <a:srgbClr val="8CC63F"/>
+            </a:solidFill>
+            <a:prstDash val="solid"/>
+          </a:ln>
+        </p:spPr>
+      </p:sp>
+      <p:sp>
+        <p:nvSpPr>
+          <p:cNvPr id="11" name="Text 9"/>
+          <p:cNvSpPr/>
+          <p:nvPr/>
+        </p:nvSpPr>
+        <p:spPr>
+          <a:xfrm>
+            <a:off x="4425696" y="2423160"/>
+            <a:ext cx="640080" cy="640080"/>
+          </a:xfrm>
+          <a:prstGeom prst="rect">
+            <a:avLst/>
+          </a:prstGeom>
+          <a:noFill/>
+          <a:ln/>
+        </p:spPr>
+        <p:txBody>
+          <a:bodyPr wrap="square" lIns="0" tIns="0" rIns="0" bIns="0" rtlCol="0" anchor="ctr"/>
+          <a:lstStyle/>
+          <a:p>
+            <a:pPr algn="ctr" indent="0" marL="0">
+              <a:buNone/>
+            </a:pPr>
+            <a:r>
+              <a:rPr lang="en-US" sz="1800" b="1" dirty="0">
+                <a:solidFill>
+                  <a:srgbClr val="13161C"/>
                 </a:solidFill>
                 <a:latin typeface="Courier New" pitchFamily="34" charset="0"/>
                 <a:ea typeface="Courier New" pitchFamily="34" charset="-122"/>
                 <a:cs typeface="Courier New" pitchFamily="34" charset="-120"/>
               </a:rPr>
-              <a:t>unsigned int err = 0;</a:t>
-            </a:r>
-            <a:endParaRPr lang="en-US" sz="1350" dirty="0"/>
-          </a:p>
-          <a:p>
-            <a:pPr algn="l" indent="0" marL="0">
-              <a:lnSpc>
-                <a:spcPct val="108000"/>
-              </a:lnSpc>
-              <a:buNone/>
-            </a:pPr>
-            <a:r>
-              <a:rPr lang="en-US" sz="1350" dirty="0">
-                <a:solidFill>
-                  <a:srgbClr val="E8EDF2"/>
+              <a:t>1</a:t>
+            </a:r>
+            <a:endParaRPr lang="en-US" sz="1800" dirty="0"/>
+          </a:p>
+        </p:txBody>
+      </p:sp>
+      <p:sp>
+        <p:nvSpPr>
+          <p:cNvPr id="12" name="Shape 10"/>
+          <p:cNvSpPr/>
+          <p:nvPr/>
+        </p:nvSpPr>
+        <p:spPr>
+          <a:xfrm>
+            <a:off x="5175504" y="2423160"/>
+            <a:ext cx="640080" cy="640080"/>
+          </a:xfrm>
+          <a:prstGeom prst="roundRect">
+            <a:avLst>
+              <a:gd name="adj" fmla="val 7143"/>
+            </a:avLst>
+          </a:prstGeom>
+          <a:solidFill>
+            <a:srgbClr val="8CC63F"/>
+          </a:solidFill>
+          <a:ln w="12700">
+            <a:solidFill>
+              <a:srgbClr val="8CC63F"/>
+            </a:solidFill>
+            <a:prstDash val="solid"/>
+          </a:ln>
+        </p:spPr>
+      </p:sp>
+      <p:sp>
+        <p:nvSpPr>
+          <p:cNvPr id="13" name="Text 11"/>
+          <p:cNvSpPr/>
+          <p:nvPr/>
+        </p:nvSpPr>
+        <p:spPr>
+          <a:xfrm>
+            <a:off x="5175504" y="2423160"/>
+            <a:ext cx="640080" cy="640080"/>
+          </a:xfrm>
+          <a:prstGeom prst="rect">
+            <a:avLst/>
+          </a:prstGeom>
+          <a:noFill/>
+          <a:ln/>
+        </p:spPr>
+        <p:txBody>
+          <a:bodyPr wrap="square" lIns="0" tIns="0" rIns="0" bIns="0" rtlCol="0" anchor="ctr"/>
+          <a:lstStyle/>
+          <a:p>
+            <a:pPr algn="ctr" indent="0" marL="0">
+              <a:buNone/>
+            </a:pPr>
+            <a:r>
+              <a:rPr lang="en-US" sz="1800" b="1" dirty="0">
+                <a:solidFill>
+                  <a:srgbClr val="13161C"/>
                 </a:solidFill>
                 <a:latin typeface="Courier New" pitchFamily="34" charset="0"/>
                 <a:ea typeface="Courier New" pitchFamily="34" charset="-122"/>
                 <a:cs typeface="Courier New" pitchFamily="34" charset="-120"/>
               </a:rPr>
-              <a:t>cudaMemcpy(&amp;err, err_count, sizeof(unsigned int),</a:t>
-            </a:r>
-            <a:endParaRPr lang="en-US" sz="1350" dirty="0"/>
-          </a:p>
-          <a:p>
-            <a:pPr algn="l" indent="0" marL="0">
-              <a:lnSpc>
-                <a:spcPct val="108000"/>
-              </a:lnSpc>
-              <a:buNone/>
-            </a:pPr>
-            <a:r>
-              <a:rPr lang="en-US" sz="1350" dirty="0">
-                <a:solidFill>
-                  <a:srgbClr val="8CC63F"/>
+              <a:t>1</a:t>
+            </a:r>
+            <a:endParaRPr lang="en-US" sz="1800" dirty="0"/>
+          </a:p>
+        </p:txBody>
+      </p:sp>
+      <p:sp>
+        <p:nvSpPr>
+          <p:cNvPr id="14" name="Shape 12"/>
+          <p:cNvSpPr/>
+          <p:nvPr/>
+        </p:nvSpPr>
+        <p:spPr>
+          <a:xfrm>
+            <a:off x="5925312" y="2423160"/>
+            <a:ext cx="640080" cy="640080"/>
+          </a:xfrm>
+          <a:prstGeom prst="roundRect">
+            <a:avLst>
+              <a:gd name="adj" fmla="val 7143"/>
+            </a:avLst>
+          </a:prstGeom>
+          <a:solidFill>
+            <a:srgbClr val="0E1116"/>
+          </a:solidFill>
+          <a:ln w="12700">
+            <a:solidFill>
+              <a:srgbClr val="8CC63F"/>
+            </a:solidFill>
+            <a:prstDash val="solid"/>
+          </a:ln>
+        </p:spPr>
+      </p:sp>
+      <p:sp>
+        <p:nvSpPr>
+          <p:cNvPr id="15" name="Text 13"/>
+          <p:cNvSpPr/>
+          <p:nvPr/>
+        </p:nvSpPr>
+        <p:spPr>
+          <a:xfrm>
+            <a:off x="5925312" y="2423160"/>
+            <a:ext cx="640080" cy="640080"/>
+          </a:xfrm>
+          <a:prstGeom prst="rect">
+            <a:avLst/>
+          </a:prstGeom>
+          <a:noFill/>
+          <a:ln/>
+        </p:spPr>
+        <p:txBody>
+          <a:bodyPr wrap="square" lIns="0" tIns="0" rIns="0" bIns="0" rtlCol="0" anchor="ctr"/>
+          <a:lstStyle/>
+          <a:p>
+            <a:pPr algn="ctr" indent="0" marL="0">
+              <a:buNone/>
+            </a:pPr>
+            <a:r>
+              <a:rPr lang="en-US" sz="1800" b="1" dirty="0">
+                <a:solidFill>
+                  <a:srgbClr val="9AA6B2"/>
                 </a:solidFill>
                 <a:latin typeface="Courier New" pitchFamily="34" charset="0"/>
                 <a:ea typeface="Courier New" pitchFamily="34" charset="-122"/>
                 <a:cs typeface="Courier New" pitchFamily="34" charset="-120"/>
               </a:rPr>
-              <a:t>           cudaMemcpyDeviceToHost);   // GPU 카운터 → CPU 변수</a:t>
-            </a:r>
-            <a:endParaRPr lang="en-US" sz="1350" dirty="0"/>
-          </a:p>
-          <a:p>
-            <a:pPr algn="l" indent="0" marL="0">
-              <a:lnSpc>
-                <a:spcPct val="108000"/>
-              </a:lnSpc>
-              <a:buNone/>
-            </a:pPr>
-            <a:r>
-              <a:rPr lang="en-US" sz="1350" dirty="0">
-                <a:solidFill>
-                  <a:srgbClr val="E8EDF2"/>
+              <a:t>0</a:t>
+            </a:r>
+            <a:endParaRPr lang="en-US" sz="1800" dirty="0"/>
+          </a:p>
+        </p:txBody>
+      </p:sp>
+      <p:sp>
+        <p:nvSpPr>
+          <p:cNvPr id="16" name="Shape 14"/>
+          <p:cNvSpPr/>
+          <p:nvPr/>
+        </p:nvSpPr>
+        <p:spPr>
+          <a:xfrm>
+            <a:off x="6675120" y="2423160"/>
+            <a:ext cx="640080" cy="640080"/>
+          </a:xfrm>
+          <a:prstGeom prst="roundRect">
+            <a:avLst>
+              <a:gd name="adj" fmla="val 7143"/>
+            </a:avLst>
+          </a:prstGeom>
+          <a:solidFill>
+            <a:srgbClr val="8CC63F"/>
+          </a:solidFill>
+          <a:ln w="12700">
+            <a:solidFill>
+              <a:srgbClr val="8CC63F"/>
+            </a:solidFill>
+            <a:prstDash val="solid"/>
+          </a:ln>
+        </p:spPr>
+      </p:sp>
+      <p:sp>
+        <p:nvSpPr>
+          <p:cNvPr id="17" name="Text 15"/>
+          <p:cNvSpPr/>
+          <p:nvPr/>
+        </p:nvSpPr>
+        <p:spPr>
+          <a:xfrm>
+            <a:off x="6675120" y="2423160"/>
+            <a:ext cx="640080" cy="640080"/>
+          </a:xfrm>
+          <a:prstGeom prst="rect">
+            <a:avLst/>
+          </a:prstGeom>
+          <a:noFill/>
+          <a:ln/>
+        </p:spPr>
+        <p:txBody>
+          <a:bodyPr wrap="square" lIns="0" tIns="0" rIns="0" bIns="0" rtlCol="0" anchor="ctr"/>
+          <a:lstStyle/>
+          <a:p>
+            <a:pPr algn="ctr" indent="0" marL="0">
+              <a:buNone/>
+            </a:pPr>
+            <a:r>
+              <a:rPr lang="en-US" sz="1800" b="1" dirty="0">
+                <a:solidFill>
+                  <a:srgbClr val="13161C"/>
                 </a:solidFill>
                 <a:latin typeface="Courier New" pitchFamily="34" charset="0"/>
                 <a:ea typeface="Courier New" pitchFamily="34" charset="-122"/>
                 <a:cs typeface="Courier New" pitchFamily="34" charset="-120"/>
               </a:rPr>
-              <a:t>if (err) {  /* 오류 주소·기대값·현재값을 출력·기록 */  }</a:t>
-            </a:r>
-            <a:endParaRPr lang="en-US" sz="1350" dirty="0"/>
-          </a:p>
-        </p:txBody>
-      </p:sp>
-      <p:sp>
-        <p:nvSpPr>
-          <p:cNvPr id="6" name="Text 4"/>
-          <p:cNvSpPr/>
-          <p:nvPr/>
-        </p:nvSpPr>
-        <p:spPr>
-          <a:xfrm>
-            <a:off x="548640" y="4023360"/>
-            <a:ext cx="11064240" cy="822960"/>
-          </a:xfrm>
-          <a:prstGeom prst="rect">
-            <a:avLst/>
-          </a:prstGeom>
-          <a:noFill/>
-          <a:ln/>
-        </p:spPr>
-        <p:txBody>
-          <a:bodyPr wrap="square" lIns="0" tIns="0" rIns="0" bIns="0" rtlCol="0" anchor="t"/>
-          <a:lstStyle/>
-          <a:p>
-            <a:pPr indent="0" marL="0">
-              <a:buNone/>
-            </a:pPr>
-            <a:r>
-              <a:rPr lang="en-US" sz="1700" b="1" dirty="0">
-                <a:solidFill>
-                  <a:srgbClr val="8CC63F"/>
-                </a:solidFill>
-                <a:latin typeface="Malgun Gothic" pitchFamily="34" charset="0"/>
-                <a:ea typeface="Malgun Gothic" pitchFamily="34" charset="-122"/>
-                <a:cs typeface="Malgun Gothic" pitchFamily="34" charset="-120"/>
-              </a:rPr>
-              <a:t>err_count</a:t>
-            </a:r>
-            <a:pPr indent="0" marL="0">
-              <a:buNone/>
-            </a:pPr>
-            <a:r>
-              <a:rPr lang="en-US" sz="1700" dirty="0">
-                <a:solidFill>
-                  <a:srgbClr val="E8EDF2"/>
-                </a:solidFill>
-                <a:latin typeface="Malgun Gothic" pitchFamily="34" charset="0"/>
-                <a:ea typeface="Malgun Gothic" pitchFamily="34" charset="-122"/>
-                <a:cs typeface="Malgun Gothic" pitchFamily="34" charset="-120"/>
-              </a:rPr>
-              <a:t>는 GPU에 있는 디바이스 포인터입니다. CPU는 그 값을 </a:t>
-            </a:r>
-            <a:pPr indent="0" marL="0">
-              <a:buNone/>
-            </a:pPr>
-            <a:r>
-              <a:rPr lang="en-US" sz="1700" b="1" dirty="0">
-                <a:solidFill>
-                  <a:srgbClr val="E0A458"/>
-                </a:solidFill>
-                <a:latin typeface="Malgun Gothic" pitchFamily="34" charset="0"/>
-                <a:ea typeface="Malgun Gothic" pitchFamily="34" charset="-122"/>
-                <a:cs typeface="Malgun Gothic" pitchFamily="34" charset="-120"/>
-              </a:rPr>
-              <a:t>직접 읽을 수 없어</a:t>
-            </a:r>
-            <a:pPr indent="0" marL="0">
-              <a:buNone/>
-            </a:pPr>
-            <a:r>
-              <a:rPr lang="en-US" sz="1700" dirty="0">
-                <a:solidFill>
-                  <a:srgbClr val="E8EDF2"/>
-                </a:solidFill>
-                <a:latin typeface="Malgun Gothic" pitchFamily="34" charset="0"/>
-                <a:ea typeface="Malgun Gothic" pitchFamily="34" charset="-122"/>
-                <a:cs typeface="Malgun Gothic" pitchFamily="34" charset="-120"/>
-              </a:rPr>
-              <a:t> 반드시 cudaMemcpy로 가져와야 합니다.</a:t>
-            </a:r>
-            <a:endParaRPr lang="en-US" sz="1700" dirty="0"/>
-          </a:p>
-        </p:txBody>
-      </p:sp>
-      <p:sp>
-        <p:nvSpPr>
-          <p:cNvPr id="7" name="Shape 5"/>
-          <p:cNvSpPr/>
-          <p:nvPr/>
-        </p:nvSpPr>
-        <p:spPr>
-          <a:xfrm>
-            <a:off x="548640" y="4892040"/>
-            <a:ext cx="5349240" cy="1005840"/>
+              <a:t>1</a:t>
+            </a:r>
+            <a:endParaRPr lang="en-US" sz="1800" dirty="0"/>
+          </a:p>
+        </p:txBody>
+      </p:sp>
+      <p:sp>
+        <p:nvSpPr>
+          <p:cNvPr id="18" name="Shape 16"/>
+          <p:cNvSpPr/>
+          <p:nvPr/>
+        </p:nvSpPr>
+        <p:spPr>
+          <a:xfrm>
+            <a:off x="7424928" y="2423160"/>
+            <a:ext cx="640080" cy="640080"/>
           </a:xfrm>
           <a:prstGeom prst="roundRect">
             <a:avLst>
-              <a:gd name="adj" fmla="val 7273"/>
+              <a:gd name="adj" fmla="val 7143"/>
             </a:avLst>
           </a:prstGeom>
           <a:solidFill>
-            <a:srgbClr val="1E232C"/>
+            <a:srgbClr val="0E1116"/>
           </a:solidFill>
-          <a:ln/>
-        </p:spPr>
-      </p:sp>
-      <p:sp>
-        <p:nvSpPr>
-          <p:cNvPr id="8" name="Text 6"/>
-          <p:cNvSpPr/>
-          <p:nvPr/>
-        </p:nvSpPr>
-        <p:spPr>
-          <a:xfrm>
-            <a:off x="777240" y="5029200"/>
-            <a:ext cx="4892040" cy="365760"/>
+          <a:ln w="12700">
+            <a:solidFill>
+              <a:srgbClr val="8CC63F"/>
+            </a:solidFill>
+            <a:prstDash val="solid"/>
+          </a:ln>
+        </p:spPr>
+      </p:sp>
+      <p:sp>
+        <p:nvSpPr>
+          <p:cNvPr id="19" name="Text 17"/>
+          <p:cNvSpPr/>
+          <p:nvPr/>
+        </p:nvSpPr>
+        <p:spPr>
+          <a:xfrm>
+            <a:off x="7424928" y="2423160"/>
+            <a:ext cx="640080" cy="640080"/>
           </a:xfrm>
           <a:prstGeom prst="rect">
             <a:avLst/>
@@ -8577,95 +8616,61 @@
           <a:bodyPr wrap="square" lIns="0" tIns="0" rIns="0" bIns="0" rtlCol="0" anchor="ctr"/>
           <a:lstStyle/>
           <a:p>
-            <a:pPr indent="0" marL="0">
-              <a:buNone/>
-            </a:pPr>
-            <a:r>
-              <a:rPr lang="en-US" sz="1500" b="1" dirty="0">
-                <a:solidFill>
-                  <a:srgbClr val="8CC63F"/>
-                </a:solidFill>
-                <a:latin typeface="Malgun Gothic" pitchFamily="34" charset="0"/>
-                <a:ea typeface="Malgun Gothic" pitchFamily="34" charset="-122"/>
-                <a:cs typeface="Malgun Gothic" pitchFamily="34" charset="-120"/>
-              </a:rPr>
-              <a:t>기록되는 정보</a:t>
-            </a:r>
-            <a:endParaRPr lang="en-US" sz="1500" dirty="0"/>
-          </a:p>
-        </p:txBody>
-      </p:sp>
-      <p:sp>
-        <p:nvSpPr>
-          <p:cNvPr id="9" name="Text 7"/>
-          <p:cNvSpPr/>
-          <p:nvPr/>
-        </p:nvSpPr>
-        <p:spPr>
-          <a:xfrm>
-            <a:off x="777240" y="5394960"/>
-            <a:ext cx="4892040" cy="411480"/>
-          </a:xfrm>
-          <a:prstGeom prst="rect">
-            <a:avLst/>
-          </a:prstGeom>
-          <a:noFill/>
-          <a:ln/>
-        </p:spPr>
-        <p:txBody>
-          <a:bodyPr wrap="square" lIns="0" tIns="0" rIns="0" bIns="0" rtlCol="0" anchor="ctr"/>
-          <a:lstStyle/>
-          <a:p>
-            <a:pPr indent="0" marL="0">
-              <a:buNone/>
-            </a:pPr>
-            <a:r>
-              <a:rPr lang="en-US" sz="1400" dirty="0">
-                <a:solidFill>
-                  <a:srgbClr val="E8EDF2"/>
-                </a:solidFill>
-                <a:latin typeface="Malgun Gothic" pitchFamily="34" charset="0"/>
-                <a:ea typeface="Malgun Gothic" pitchFamily="34" charset="-122"/>
-                <a:cs typeface="Malgun Gothic" pitchFamily="34" charset="-120"/>
-              </a:rPr>
-              <a:t>오류 주소 · 기대값 · 실제값 · 재읽기값</a:t>
-            </a:r>
-            <a:endParaRPr lang="en-US" sz="1400" dirty="0"/>
-          </a:p>
-        </p:txBody>
-      </p:sp>
-      <p:sp>
-        <p:nvSpPr>
-          <p:cNvPr id="10" name="Shape 8"/>
-          <p:cNvSpPr/>
-          <p:nvPr/>
-        </p:nvSpPr>
-        <p:spPr>
-          <a:xfrm>
-            <a:off x="6263640" y="4892040"/>
-            <a:ext cx="5349240" cy="1005840"/>
+            <a:pPr algn="ctr" indent="0" marL="0">
+              <a:buNone/>
+            </a:pPr>
+            <a:r>
+              <a:rPr lang="en-US" sz="1800" b="1" dirty="0">
+                <a:solidFill>
+                  <a:srgbClr val="9AA6B2"/>
+                </a:solidFill>
+                <a:latin typeface="Courier New" pitchFamily="34" charset="0"/>
+                <a:ea typeface="Courier New" pitchFamily="34" charset="-122"/>
+                <a:cs typeface="Courier New" pitchFamily="34" charset="-120"/>
+              </a:rPr>
+              <a:t>0</a:t>
+            </a:r>
+            <a:endParaRPr lang="en-US" sz="1800" dirty="0"/>
+          </a:p>
+        </p:txBody>
+      </p:sp>
+      <p:sp>
+        <p:nvSpPr>
+          <p:cNvPr id="20" name="Shape 18"/>
+          <p:cNvSpPr/>
+          <p:nvPr/>
+        </p:nvSpPr>
+        <p:spPr>
+          <a:xfrm>
+            <a:off x="8174736" y="2423160"/>
+            <a:ext cx="640080" cy="640080"/>
           </a:xfrm>
           <a:prstGeom prst="roundRect">
             <a:avLst>
-              <a:gd name="adj" fmla="val 7273"/>
+              <a:gd name="adj" fmla="val 7143"/>
             </a:avLst>
           </a:prstGeom>
           <a:solidFill>
-            <a:srgbClr val="1E232C"/>
+            <a:srgbClr val="0E1116"/>
           </a:solidFill>
-          <a:ln/>
-        </p:spPr>
-      </p:sp>
-      <p:sp>
-        <p:nvSpPr>
-          <p:cNvPr id="11" name="Text 9"/>
-          <p:cNvSpPr/>
-          <p:nvPr/>
-        </p:nvSpPr>
-        <p:spPr>
-          <a:xfrm>
-            <a:off x="6492240" y="5029200"/>
-            <a:ext cx="4892040" cy="365760"/>
+          <a:ln w="12700">
+            <a:solidFill>
+              <a:srgbClr val="8CC63F"/>
+            </a:solidFill>
+            <a:prstDash val="solid"/>
+          </a:ln>
+        </p:spPr>
+      </p:sp>
+      <p:sp>
+        <p:nvSpPr>
+          <p:cNvPr id="21" name="Text 19"/>
+          <p:cNvSpPr/>
+          <p:nvPr/>
+        </p:nvSpPr>
+        <p:spPr>
+          <a:xfrm>
+            <a:off x="8174736" y="2423160"/>
+            <a:ext cx="640080" cy="640080"/>
           </a:xfrm>
           <a:prstGeom prst="rect">
             <a:avLst/>
@@ -8677,11 +8682,50 @@
           <a:bodyPr wrap="square" lIns="0" tIns="0" rIns="0" bIns="0" rtlCol="0" anchor="ctr"/>
           <a:lstStyle/>
           <a:p>
+            <a:pPr algn="ctr" indent="0" marL="0">
+              <a:buNone/>
+            </a:pPr>
+            <a:r>
+              <a:rPr lang="en-US" sz="1800" b="1" dirty="0">
+                <a:solidFill>
+                  <a:srgbClr val="9AA6B2"/>
+                </a:solidFill>
+                <a:latin typeface="Courier New" pitchFamily="34" charset="0"/>
+                <a:ea typeface="Courier New" pitchFamily="34" charset="-122"/>
+                <a:cs typeface="Courier New" pitchFamily="34" charset="-120"/>
+              </a:rPr>
+              <a:t>0</a:t>
+            </a:r>
+            <a:endParaRPr lang="en-US" sz="1800" dirty="0"/>
+          </a:p>
+        </p:txBody>
+      </p:sp>
+      <p:sp>
+        <p:nvSpPr>
+          <p:cNvPr id="22" name="Text 20"/>
+          <p:cNvSpPr/>
+          <p:nvPr/>
+        </p:nvSpPr>
+        <p:spPr>
+          <a:xfrm>
+            <a:off x="548640" y="3474720"/>
+            <a:ext cx="2194560" cy="548640"/>
+          </a:xfrm>
+          <a:prstGeom prst="rect">
+            <a:avLst/>
+          </a:prstGeom>
+          <a:noFill/>
+          <a:ln/>
+        </p:spPr>
+        <p:txBody>
+          <a:bodyPr wrap="square" lIns="0" tIns="0" rIns="0" bIns="0" rtlCol="0" anchor="ctr"/>
+          <a:lstStyle/>
+          <a:p>
             <a:pPr indent="0" marL="0">
               <a:buNone/>
             </a:pPr>
             <a:r>
-              <a:rPr lang="en-US" sz="1500" b="1" dirty="0">
+              <a:rPr lang="en-US" sz="1600" b="1" dirty="0">
                 <a:solidFill>
                   <a:srgbClr val="4FB0C6"/>
                 </a:solidFill>
@@ -8689,22 +8733,49 @@
                 <a:ea typeface="Malgun Gothic" pitchFamily="34" charset="-122"/>
                 <a:cs typeface="Malgun Gothic" pitchFamily="34" charset="-120"/>
               </a:rPr>
-              <a:t>최근 10개만</a:t>
-            </a:r>
-            <a:endParaRPr lang="en-US" sz="1500" dirty="0"/>
-          </a:p>
-        </p:txBody>
-      </p:sp>
-      <p:sp>
-        <p:nvSpPr>
-          <p:cNvPr id="12" name="Text 10"/>
-          <p:cNvSpPr/>
-          <p:nvPr/>
-        </p:nvSpPr>
-        <p:spPr>
-          <a:xfrm>
-            <a:off x="6492240" y="5394960"/>
-            <a:ext cx="4892040" cy="411480"/>
+              <a:t>p2 = ~p1 =</a:t>
+            </a:r>
+            <a:endParaRPr lang="en-US" sz="1600" dirty="0"/>
+          </a:p>
+        </p:txBody>
+      </p:sp>
+      <p:sp>
+        <p:nvSpPr>
+          <p:cNvPr id="23" name="Shape 21"/>
+          <p:cNvSpPr/>
+          <p:nvPr/>
+        </p:nvSpPr>
+        <p:spPr>
+          <a:xfrm>
+            <a:off x="2926080" y="3429000"/>
+            <a:ext cx="640080" cy="640080"/>
+          </a:xfrm>
+          <a:prstGeom prst="roundRect">
+            <a:avLst>
+              <a:gd name="adj" fmla="val 7143"/>
+            </a:avLst>
+          </a:prstGeom>
+          <a:solidFill>
+            <a:srgbClr val="0E1116"/>
+          </a:solidFill>
+          <a:ln w="12700">
+            <a:solidFill>
+              <a:srgbClr val="4FB0C6"/>
+            </a:solidFill>
+            <a:prstDash val="solid"/>
+          </a:ln>
+        </p:spPr>
+      </p:sp>
+      <p:sp>
+        <p:nvSpPr>
+          <p:cNvPr id="24" name="Text 22"/>
+          <p:cNvSpPr/>
+          <p:nvPr/>
+        </p:nvSpPr>
+        <p:spPr>
+          <a:xfrm>
+            <a:off x="2926080" y="3429000"/>
+            <a:ext cx="640080" cy="640080"/>
           </a:xfrm>
           <a:prstGeom prst="rect">
             <a:avLst/>
@@ -8716,11 +8787,565 @@
           <a:bodyPr wrap="square" lIns="0" tIns="0" rIns="0" bIns="0" rtlCol="0" anchor="ctr"/>
           <a:lstStyle/>
           <a:p>
+            <a:pPr algn="ctr" indent="0" marL="0">
+              <a:buNone/>
+            </a:pPr>
+            <a:r>
+              <a:rPr lang="en-US" sz="1800" b="1" dirty="0">
+                <a:solidFill>
+                  <a:srgbClr val="9AA6B2"/>
+                </a:solidFill>
+                <a:latin typeface="Courier New" pitchFamily="34" charset="0"/>
+                <a:ea typeface="Courier New" pitchFamily="34" charset="-122"/>
+                <a:cs typeface="Courier New" pitchFamily="34" charset="-120"/>
+              </a:rPr>
+              <a:t>0</a:t>
+            </a:r>
+            <a:endParaRPr lang="en-US" sz="1800" dirty="0"/>
+          </a:p>
+        </p:txBody>
+      </p:sp>
+      <p:sp>
+        <p:nvSpPr>
+          <p:cNvPr id="25" name="Shape 23"/>
+          <p:cNvSpPr/>
+          <p:nvPr/>
+        </p:nvSpPr>
+        <p:spPr>
+          <a:xfrm>
+            <a:off x="3675888" y="3429000"/>
+            <a:ext cx="640080" cy="640080"/>
+          </a:xfrm>
+          <a:prstGeom prst="roundRect">
+            <a:avLst>
+              <a:gd name="adj" fmla="val 7143"/>
+            </a:avLst>
+          </a:prstGeom>
+          <a:solidFill>
+            <a:srgbClr val="4FB0C6"/>
+          </a:solidFill>
+          <a:ln w="12700">
+            <a:solidFill>
+              <a:srgbClr val="4FB0C6"/>
+            </a:solidFill>
+            <a:prstDash val="solid"/>
+          </a:ln>
+        </p:spPr>
+      </p:sp>
+      <p:sp>
+        <p:nvSpPr>
+          <p:cNvPr id="26" name="Text 24"/>
+          <p:cNvSpPr/>
+          <p:nvPr/>
+        </p:nvSpPr>
+        <p:spPr>
+          <a:xfrm>
+            <a:off x="3675888" y="3429000"/>
+            <a:ext cx="640080" cy="640080"/>
+          </a:xfrm>
+          <a:prstGeom prst="rect">
+            <a:avLst/>
+          </a:prstGeom>
+          <a:noFill/>
+          <a:ln/>
+        </p:spPr>
+        <p:txBody>
+          <a:bodyPr wrap="square" lIns="0" tIns="0" rIns="0" bIns="0" rtlCol="0" anchor="ctr"/>
+          <a:lstStyle/>
+          <a:p>
+            <a:pPr algn="ctr" indent="0" marL="0">
+              <a:buNone/>
+            </a:pPr>
+            <a:r>
+              <a:rPr lang="en-US" sz="1800" b="1" dirty="0">
+                <a:solidFill>
+                  <a:srgbClr val="13161C"/>
+                </a:solidFill>
+                <a:latin typeface="Courier New" pitchFamily="34" charset="0"/>
+                <a:ea typeface="Courier New" pitchFamily="34" charset="-122"/>
+                <a:cs typeface="Courier New" pitchFamily="34" charset="-120"/>
+              </a:rPr>
+              <a:t>1</a:t>
+            </a:r>
+            <a:endParaRPr lang="en-US" sz="1800" dirty="0"/>
+          </a:p>
+        </p:txBody>
+      </p:sp>
+      <p:sp>
+        <p:nvSpPr>
+          <p:cNvPr id="27" name="Shape 25"/>
+          <p:cNvSpPr/>
+          <p:nvPr/>
+        </p:nvSpPr>
+        <p:spPr>
+          <a:xfrm>
+            <a:off x="4425696" y="3429000"/>
+            <a:ext cx="640080" cy="640080"/>
+          </a:xfrm>
+          <a:prstGeom prst="roundRect">
+            <a:avLst>
+              <a:gd name="adj" fmla="val 7143"/>
+            </a:avLst>
+          </a:prstGeom>
+          <a:solidFill>
+            <a:srgbClr val="0E1116"/>
+          </a:solidFill>
+          <a:ln w="12700">
+            <a:solidFill>
+              <a:srgbClr val="4FB0C6"/>
+            </a:solidFill>
+            <a:prstDash val="solid"/>
+          </a:ln>
+        </p:spPr>
+      </p:sp>
+      <p:sp>
+        <p:nvSpPr>
+          <p:cNvPr id="28" name="Text 26"/>
+          <p:cNvSpPr/>
+          <p:nvPr/>
+        </p:nvSpPr>
+        <p:spPr>
+          <a:xfrm>
+            <a:off x="4425696" y="3429000"/>
+            <a:ext cx="640080" cy="640080"/>
+          </a:xfrm>
+          <a:prstGeom prst="rect">
+            <a:avLst/>
+          </a:prstGeom>
+          <a:noFill/>
+          <a:ln/>
+        </p:spPr>
+        <p:txBody>
+          <a:bodyPr wrap="square" lIns="0" tIns="0" rIns="0" bIns="0" rtlCol="0" anchor="ctr"/>
+          <a:lstStyle/>
+          <a:p>
+            <a:pPr algn="ctr" indent="0" marL="0">
+              <a:buNone/>
+            </a:pPr>
+            <a:r>
+              <a:rPr lang="en-US" sz="1800" b="1" dirty="0">
+                <a:solidFill>
+                  <a:srgbClr val="9AA6B2"/>
+                </a:solidFill>
+                <a:latin typeface="Courier New" pitchFamily="34" charset="0"/>
+                <a:ea typeface="Courier New" pitchFamily="34" charset="-122"/>
+                <a:cs typeface="Courier New" pitchFamily="34" charset="-120"/>
+              </a:rPr>
+              <a:t>0</a:t>
+            </a:r>
+            <a:endParaRPr lang="en-US" sz="1800" dirty="0"/>
+          </a:p>
+        </p:txBody>
+      </p:sp>
+      <p:sp>
+        <p:nvSpPr>
+          <p:cNvPr id="29" name="Shape 27"/>
+          <p:cNvSpPr/>
+          <p:nvPr/>
+        </p:nvSpPr>
+        <p:spPr>
+          <a:xfrm>
+            <a:off x="5175504" y="3429000"/>
+            <a:ext cx="640080" cy="640080"/>
+          </a:xfrm>
+          <a:prstGeom prst="roundRect">
+            <a:avLst>
+              <a:gd name="adj" fmla="val 7143"/>
+            </a:avLst>
+          </a:prstGeom>
+          <a:solidFill>
+            <a:srgbClr val="0E1116"/>
+          </a:solidFill>
+          <a:ln w="12700">
+            <a:solidFill>
+              <a:srgbClr val="4FB0C6"/>
+            </a:solidFill>
+            <a:prstDash val="solid"/>
+          </a:ln>
+        </p:spPr>
+      </p:sp>
+      <p:sp>
+        <p:nvSpPr>
+          <p:cNvPr id="30" name="Text 28"/>
+          <p:cNvSpPr/>
+          <p:nvPr/>
+        </p:nvSpPr>
+        <p:spPr>
+          <a:xfrm>
+            <a:off x="5175504" y="3429000"/>
+            <a:ext cx="640080" cy="640080"/>
+          </a:xfrm>
+          <a:prstGeom prst="rect">
+            <a:avLst/>
+          </a:prstGeom>
+          <a:noFill/>
+          <a:ln/>
+        </p:spPr>
+        <p:txBody>
+          <a:bodyPr wrap="square" lIns="0" tIns="0" rIns="0" bIns="0" rtlCol="0" anchor="ctr"/>
+          <a:lstStyle/>
+          <a:p>
+            <a:pPr algn="ctr" indent="0" marL="0">
+              <a:buNone/>
+            </a:pPr>
+            <a:r>
+              <a:rPr lang="en-US" sz="1800" b="1" dirty="0">
+                <a:solidFill>
+                  <a:srgbClr val="9AA6B2"/>
+                </a:solidFill>
+                <a:latin typeface="Courier New" pitchFamily="34" charset="0"/>
+                <a:ea typeface="Courier New" pitchFamily="34" charset="-122"/>
+                <a:cs typeface="Courier New" pitchFamily="34" charset="-120"/>
+              </a:rPr>
+              <a:t>0</a:t>
+            </a:r>
+            <a:endParaRPr lang="en-US" sz="1800" dirty="0"/>
+          </a:p>
+        </p:txBody>
+      </p:sp>
+      <p:sp>
+        <p:nvSpPr>
+          <p:cNvPr id="31" name="Shape 29"/>
+          <p:cNvSpPr/>
+          <p:nvPr/>
+        </p:nvSpPr>
+        <p:spPr>
+          <a:xfrm>
+            <a:off x="5925312" y="3429000"/>
+            <a:ext cx="640080" cy="640080"/>
+          </a:xfrm>
+          <a:prstGeom prst="roundRect">
+            <a:avLst>
+              <a:gd name="adj" fmla="val 7143"/>
+            </a:avLst>
+          </a:prstGeom>
+          <a:solidFill>
+            <a:srgbClr val="4FB0C6"/>
+          </a:solidFill>
+          <a:ln w="12700">
+            <a:solidFill>
+              <a:srgbClr val="4FB0C6"/>
+            </a:solidFill>
+            <a:prstDash val="solid"/>
+          </a:ln>
+        </p:spPr>
+      </p:sp>
+      <p:sp>
+        <p:nvSpPr>
+          <p:cNvPr id="32" name="Text 30"/>
+          <p:cNvSpPr/>
+          <p:nvPr/>
+        </p:nvSpPr>
+        <p:spPr>
+          <a:xfrm>
+            <a:off x="5925312" y="3429000"/>
+            <a:ext cx="640080" cy="640080"/>
+          </a:xfrm>
+          <a:prstGeom prst="rect">
+            <a:avLst/>
+          </a:prstGeom>
+          <a:noFill/>
+          <a:ln/>
+        </p:spPr>
+        <p:txBody>
+          <a:bodyPr wrap="square" lIns="0" tIns="0" rIns="0" bIns="0" rtlCol="0" anchor="ctr"/>
+          <a:lstStyle/>
+          <a:p>
+            <a:pPr algn="ctr" indent="0" marL="0">
+              <a:buNone/>
+            </a:pPr>
+            <a:r>
+              <a:rPr lang="en-US" sz="1800" b="1" dirty="0">
+                <a:solidFill>
+                  <a:srgbClr val="13161C"/>
+                </a:solidFill>
+                <a:latin typeface="Courier New" pitchFamily="34" charset="0"/>
+                <a:ea typeface="Courier New" pitchFamily="34" charset="-122"/>
+                <a:cs typeface="Courier New" pitchFamily="34" charset="-120"/>
+              </a:rPr>
+              <a:t>1</a:t>
+            </a:r>
+            <a:endParaRPr lang="en-US" sz="1800" dirty="0"/>
+          </a:p>
+        </p:txBody>
+      </p:sp>
+      <p:sp>
+        <p:nvSpPr>
+          <p:cNvPr id="33" name="Shape 31"/>
+          <p:cNvSpPr/>
+          <p:nvPr/>
+        </p:nvSpPr>
+        <p:spPr>
+          <a:xfrm>
+            <a:off x="6675120" y="3429000"/>
+            <a:ext cx="640080" cy="640080"/>
+          </a:xfrm>
+          <a:prstGeom prst="roundRect">
+            <a:avLst>
+              <a:gd name="adj" fmla="val 7143"/>
+            </a:avLst>
+          </a:prstGeom>
+          <a:solidFill>
+            <a:srgbClr val="0E1116"/>
+          </a:solidFill>
+          <a:ln w="12700">
+            <a:solidFill>
+              <a:srgbClr val="4FB0C6"/>
+            </a:solidFill>
+            <a:prstDash val="solid"/>
+          </a:ln>
+        </p:spPr>
+      </p:sp>
+      <p:sp>
+        <p:nvSpPr>
+          <p:cNvPr id="34" name="Text 32"/>
+          <p:cNvSpPr/>
+          <p:nvPr/>
+        </p:nvSpPr>
+        <p:spPr>
+          <a:xfrm>
+            <a:off x="6675120" y="3429000"/>
+            <a:ext cx="640080" cy="640080"/>
+          </a:xfrm>
+          <a:prstGeom prst="rect">
+            <a:avLst/>
+          </a:prstGeom>
+          <a:noFill/>
+          <a:ln/>
+        </p:spPr>
+        <p:txBody>
+          <a:bodyPr wrap="square" lIns="0" tIns="0" rIns="0" bIns="0" rtlCol="0" anchor="ctr"/>
+          <a:lstStyle/>
+          <a:p>
+            <a:pPr algn="ctr" indent="0" marL="0">
+              <a:buNone/>
+            </a:pPr>
+            <a:r>
+              <a:rPr lang="en-US" sz="1800" b="1" dirty="0">
+                <a:solidFill>
+                  <a:srgbClr val="9AA6B2"/>
+                </a:solidFill>
+                <a:latin typeface="Courier New" pitchFamily="34" charset="0"/>
+                <a:ea typeface="Courier New" pitchFamily="34" charset="-122"/>
+                <a:cs typeface="Courier New" pitchFamily="34" charset="-120"/>
+              </a:rPr>
+              <a:t>0</a:t>
+            </a:r>
+            <a:endParaRPr lang="en-US" sz="1800" dirty="0"/>
+          </a:p>
+        </p:txBody>
+      </p:sp>
+      <p:sp>
+        <p:nvSpPr>
+          <p:cNvPr id="35" name="Shape 33"/>
+          <p:cNvSpPr/>
+          <p:nvPr/>
+        </p:nvSpPr>
+        <p:spPr>
+          <a:xfrm>
+            <a:off x="7424928" y="3429000"/>
+            <a:ext cx="640080" cy="640080"/>
+          </a:xfrm>
+          <a:prstGeom prst="roundRect">
+            <a:avLst>
+              <a:gd name="adj" fmla="val 7143"/>
+            </a:avLst>
+          </a:prstGeom>
+          <a:solidFill>
+            <a:srgbClr val="4FB0C6"/>
+          </a:solidFill>
+          <a:ln w="12700">
+            <a:solidFill>
+              <a:srgbClr val="4FB0C6"/>
+            </a:solidFill>
+            <a:prstDash val="solid"/>
+          </a:ln>
+        </p:spPr>
+      </p:sp>
+      <p:sp>
+        <p:nvSpPr>
+          <p:cNvPr id="36" name="Text 34"/>
+          <p:cNvSpPr/>
+          <p:nvPr/>
+        </p:nvSpPr>
+        <p:spPr>
+          <a:xfrm>
+            <a:off x="7424928" y="3429000"/>
+            <a:ext cx="640080" cy="640080"/>
+          </a:xfrm>
+          <a:prstGeom prst="rect">
+            <a:avLst/>
+          </a:prstGeom>
+          <a:noFill/>
+          <a:ln/>
+        </p:spPr>
+        <p:txBody>
+          <a:bodyPr wrap="square" lIns="0" tIns="0" rIns="0" bIns="0" rtlCol="0" anchor="ctr"/>
+          <a:lstStyle/>
+          <a:p>
+            <a:pPr algn="ctr" indent="0" marL="0">
+              <a:buNone/>
+            </a:pPr>
+            <a:r>
+              <a:rPr lang="en-US" sz="1800" b="1" dirty="0">
+                <a:solidFill>
+                  <a:srgbClr val="13161C"/>
+                </a:solidFill>
+                <a:latin typeface="Courier New" pitchFamily="34" charset="0"/>
+                <a:ea typeface="Courier New" pitchFamily="34" charset="-122"/>
+                <a:cs typeface="Courier New" pitchFamily="34" charset="-120"/>
+              </a:rPr>
+              <a:t>1</a:t>
+            </a:r>
+            <a:endParaRPr lang="en-US" sz="1800" dirty="0"/>
+          </a:p>
+        </p:txBody>
+      </p:sp>
+      <p:sp>
+        <p:nvSpPr>
+          <p:cNvPr id="37" name="Shape 35"/>
+          <p:cNvSpPr/>
+          <p:nvPr/>
+        </p:nvSpPr>
+        <p:spPr>
+          <a:xfrm>
+            <a:off x="8174736" y="3429000"/>
+            <a:ext cx="640080" cy="640080"/>
+          </a:xfrm>
+          <a:prstGeom prst="roundRect">
+            <a:avLst>
+              <a:gd name="adj" fmla="val 7143"/>
+            </a:avLst>
+          </a:prstGeom>
+          <a:solidFill>
+            <a:srgbClr val="4FB0C6"/>
+          </a:solidFill>
+          <a:ln w="12700">
+            <a:solidFill>
+              <a:srgbClr val="4FB0C6"/>
+            </a:solidFill>
+            <a:prstDash val="solid"/>
+          </a:ln>
+        </p:spPr>
+      </p:sp>
+      <p:sp>
+        <p:nvSpPr>
+          <p:cNvPr id="38" name="Text 36"/>
+          <p:cNvSpPr/>
+          <p:nvPr/>
+        </p:nvSpPr>
+        <p:spPr>
+          <a:xfrm>
+            <a:off x="8174736" y="3429000"/>
+            <a:ext cx="640080" cy="640080"/>
+          </a:xfrm>
+          <a:prstGeom prst="rect">
+            <a:avLst/>
+          </a:prstGeom>
+          <a:noFill/>
+          <a:ln/>
+        </p:spPr>
+        <p:txBody>
+          <a:bodyPr wrap="square" lIns="0" tIns="0" rIns="0" bIns="0" rtlCol="0" anchor="ctr"/>
+          <a:lstStyle/>
+          <a:p>
+            <a:pPr algn="ctr" indent="0" marL="0">
+              <a:buNone/>
+            </a:pPr>
+            <a:r>
+              <a:rPr lang="en-US" sz="1800" b="1" dirty="0">
+                <a:solidFill>
+                  <a:srgbClr val="13161C"/>
+                </a:solidFill>
+                <a:latin typeface="Courier New" pitchFamily="34" charset="0"/>
+                <a:ea typeface="Courier New" pitchFamily="34" charset="-122"/>
+                <a:cs typeface="Courier New" pitchFamily="34" charset="-120"/>
+              </a:rPr>
+              <a:t>1</a:t>
+            </a:r>
+            <a:endParaRPr lang="en-US" sz="1800" dirty="0"/>
+          </a:p>
+        </p:txBody>
+      </p:sp>
+      <p:sp>
+        <p:nvSpPr>
+          <p:cNvPr id="39" name="Text 37"/>
+          <p:cNvSpPr/>
+          <p:nvPr/>
+        </p:nvSpPr>
+        <p:spPr>
+          <a:xfrm>
+            <a:off x="2926080" y="3127248"/>
+            <a:ext cx="4572000" cy="274320"/>
+          </a:xfrm>
+          <a:prstGeom prst="rect">
+            <a:avLst/>
+          </a:prstGeom>
+          <a:noFill/>
+          <a:ln/>
+        </p:spPr>
+        <p:txBody>
+          <a:bodyPr wrap="square" lIns="0" tIns="0" rIns="0" bIns="0" rtlCol="0" anchor="ctr"/>
+          <a:lstStyle/>
+          <a:p>
             <a:pPr indent="0" marL="0">
               <a:buNone/>
             </a:pPr>
             <a:r>
-              <a:rPr lang="en-US" sz="1400" dirty="0">
+              <a:rPr lang="en-US" sz="1200" dirty="0">
+                <a:solidFill>
+                  <a:srgbClr val="9AA6B2"/>
+                </a:solidFill>
+                <a:latin typeface="Malgun Gothic" pitchFamily="34" charset="0"/>
+                <a:ea typeface="Malgun Gothic" pitchFamily="34" charset="-122"/>
+                <a:cs typeface="Malgun Gothic" pitchFamily="34" charset="-120"/>
+              </a:rPr>
+              <a:t>↓ 모든 비트 반전</a:t>
+            </a:r>
+            <a:endParaRPr lang="en-US" sz="1200" dirty="0"/>
+          </a:p>
+        </p:txBody>
+      </p:sp>
+      <p:sp>
+        <p:nvSpPr>
+          <p:cNvPr id="40" name="Text 38"/>
+          <p:cNvSpPr/>
+          <p:nvPr/>
+        </p:nvSpPr>
+        <p:spPr>
+          <a:xfrm>
+            <a:off x="548640" y="4480560"/>
+            <a:ext cx="11064240" cy="914400"/>
+          </a:xfrm>
+          <a:prstGeom prst="rect">
+            <a:avLst/>
+          </a:prstGeom>
+          <a:noFill/>
+          <a:ln/>
+        </p:spPr>
+        <p:txBody>
+          <a:bodyPr wrap="square" lIns="0" tIns="0" rIns="0" bIns="0" rtlCol="0" anchor="t"/>
+          <a:lstStyle/>
+          <a:p>
+            <a:pPr indent="0" marL="0">
+              <a:buNone/>
+            </a:pPr>
+            <a:r>
+              <a:rPr lang="en-US" sz="1600" b="1" dirty="0">
+                <a:solidFill>
+                  <a:srgbClr val="8CC63F"/>
+                </a:solidFill>
+                <a:latin typeface="Malgun Gothic" pitchFamily="34" charset="0"/>
+                <a:ea typeface="Malgun Gothic" pitchFamily="34" charset="-122"/>
+                <a:cs typeface="Malgun Gothic" pitchFamily="34" charset="-120"/>
+              </a:rPr>
+              <a:t>1로 고착된 비트</a:t>
+            </a:r>
+            <a:pPr indent="0" marL="0">
+              <a:buNone/>
+            </a:pPr>
+            <a:r>
+              <a:rPr lang="en-US" sz="1600" dirty="0">
                 <a:solidFill>
                   <a:srgbClr val="E8EDF2"/>
                 </a:solidFill>
@@ -8728,9 +9353,76 @@
                 <a:ea typeface="Malgun Gothic" pitchFamily="34" charset="-122"/>
                 <a:cs typeface="Malgun Gothic" pitchFamily="34" charset="-120"/>
               </a:rPr>
-              <a:t>MAX_ERR_RECORD_COUNT=10, 순환 기록</a:t>
-            </a:r>
-            <a:endParaRPr lang="en-US" sz="1400" dirty="0"/>
+              <a:t>는 p2(0을 기대) 검사에서 걸리고, </a:t>
+            </a:r>
+            <a:pPr indent="0" marL="0">
+              <a:buNone/>
+            </a:pPr>
+            <a:r>
+              <a:rPr lang="en-US" sz="1600" b="1" dirty="0">
+                <a:solidFill>
+                  <a:srgbClr val="4FB0C6"/>
+                </a:solidFill>
+                <a:latin typeface="Malgun Gothic" pitchFamily="34" charset="0"/>
+                <a:ea typeface="Malgun Gothic" pitchFamily="34" charset="-122"/>
+                <a:cs typeface="Malgun Gothic" pitchFamily="34" charset="-120"/>
+              </a:rPr>
+              <a:t>0으로 고착된 비트</a:t>
+            </a:r>
+            <a:pPr indent="0" marL="0">
+              <a:buNone/>
+            </a:pPr>
+            <a:r>
+              <a:rPr lang="en-US" sz="1600" dirty="0">
+                <a:solidFill>
+                  <a:srgbClr val="E8EDF2"/>
+                </a:solidFill>
+                <a:latin typeface="Malgun Gothic" pitchFamily="34" charset="0"/>
+                <a:ea typeface="Malgun Gothic" pitchFamily="34" charset="-122"/>
+                <a:cs typeface="Malgun Gothic" pitchFamily="34" charset="-120"/>
+              </a:rPr>
+              <a:t>는 p1(1을 기대) 검사에서 걸립니다. 그래서 양방향 검사가 필요합니다.</a:t>
+            </a:r>
+            <a:endParaRPr lang="en-US" sz="1600" dirty="0"/>
+          </a:p>
+        </p:txBody>
+      </p:sp>
+      <p:sp>
+        <p:nvSpPr>
+          <p:cNvPr id="41" name="Text 39"/>
+          <p:cNvSpPr/>
+          <p:nvPr/>
+        </p:nvSpPr>
+        <p:spPr>
+          <a:xfrm>
+            <a:off x="548640" y="5577840"/>
+            <a:ext cx="11064240" cy="457200"/>
+          </a:xfrm>
+          <a:prstGeom prst="rect">
+            <a:avLst/>
+          </a:prstGeom>
+          <a:noFill/>
+          <a:ln/>
+        </p:spPr>
+        <p:txBody>
+          <a:bodyPr wrap="square" lIns="0" tIns="0" rIns="0" bIns="0" rtlCol="0" anchor="ctr"/>
+          <a:lstStyle/>
+          <a:p>
+            <a:pPr indent="0" marL="0">
+              <a:buNone/>
+            </a:pPr>
+            <a:r>
+              <a:rPr lang="en-US" sz="1300" i="1" dirty="0">
+                <a:solidFill>
+                  <a:srgbClr val="9AA6B2"/>
+                </a:solidFill>
+                <a:latin typeface="Malgun Gothic" pitchFamily="34" charset="0"/>
+                <a:ea typeface="Malgun Gothic" pitchFamily="34" charset="-122"/>
+                <a:cs typeface="Malgun Gothic" pitchFamily="34" charset="-120"/>
+              </a:rPr>
+              <a:t>Test 2는 p1=0x00000000, p2=0xFFFFFFFF (모두 0 / 모두 1)로 이 검사를 수행합니다. (tests.cpp:705)</a:t>
+            </a:r>
+            <a:endParaRPr lang="en-US" sz="1300" dirty="0"/>
           </a:p>
         </p:txBody>
       </p:sp>
@@ -8803,7 +9495,7 @@
                 <a:ea typeface="Courier New" pitchFamily="34" charset="-122"/>
                 <a:cs typeface="Courier New" pitchFamily="34" charset="-120"/>
               </a:rPr>
-              <a:t>8</a:t>
+              <a:t>7</a:t>
             </a:r>
             <a:endParaRPr lang="en-US" sz="2200" dirty="0"/>
           </a:p>
@@ -8842,7 +9534,7 @@
                 <a:ea typeface="Malgun Gothic" pitchFamily="34" charset="-122"/>
                 <a:cs typeface="Malgun Gothic" pitchFamily="34" charset="-120"/>
               </a:rPr>
-              <a:t>실전 코드 · 할 수 있는 만큼 할당하기</a:t>
+              <a:t>오류가 CPU로 돌아오는 길</a:t>
             </a:r>
             <a:endParaRPr lang="en-US" sz="3000" dirty="0"/>
           </a:p>
@@ -8857,11 +9549,11 @@
         <p:spPr>
           <a:xfrm>
             <a:off x="548640" y="1554480"/>
-            <a:ext cx="11064240" cy="2651760"/>
+            <a:ext cx="11064240" cy="2286000"/>
           </a:xfrm>
           <a:prstGeom prst="roundRect">
             <a:avLst>
-              <a:gd name="adj" fmla="val 2069"/>
+              <a:gd name="adj" fmla="val 2400"/>
             </a:avLst>
           </a:prstGeom>
           <a:solidFill>
@@ -8884,7 +9576,7 @@
         <p:spPr>
           <a:xfrm>
             <a:off x="749808" y="1700784"/>
-            <a:ext cx="10661904" cy="2359152"/>
+            <a:ext cx="10661904" cy="1993392"/>
           </a:xfrm>
           <a:prstGeom prst="rect">
             <a:avLst/>
@@ -8911,7 +9603,7 @@
                 <a:ea typeface="Courier New" pitchFamily="34" charset="-122"/>
                 <a:cs typeface="Courier New" pitchFamily="34" charset="-120"/>
               </a:rPr>
-              <a:t>// cuda_memtest.cpp:157   가용 메모리를 조회하고,</a:t>
+              <a:t>// error_checking()  tests.cpp:108</a:t>
             </a:r>
             <a:endParaRPr lang="en-US" sz="1350" dirty="0"/>
           </a:p>
@@ -8925,13 +9617,13 @@
             <a:r>
               <a:rPr lang="en-US" sz="1350" dirty="0">
                 <a:solidFill>
-                  <a:srgbClr val="9AA6B2"/>
+                  <a:srgbClr val="E8EDF2"/>
                 </a:solidFill>
                 <a:latin typeface="Courier New" pitchFamily="34" charset="0"/>
                 <a:ea typeface="Courier New" pitchFamily="34" charset="-122"/>
                 <a:cs typeface="Courier New" pitchFamily="34" charset="-120"/>
               </a:rPr>
-              <a:t>// 할당 실패하면 블록을 하나씩 줄여 재시도한다</a:t>
+              <a:t>unsigned int err = 0;</a:t>
             </a:r>
             <a:endParaRPr lang="en-US" sz="1350" dirty="0"/>
           </a:p>
@@ -8951,7 +9643,7 @@
                 <a:ea typeface="Courier New" pitchFamily="34" charset="-122"/>
                 <a:cs typeface="Courier New" pitchFamily="34" charset="-120"/>
               </a:rPr>
-              <a:t>tot_num_blocks = free / BLOCKSIZE;</a:t>
+              <a:t>cudaMemcpy(&amp;err, err_count, sizeof(unsigned int),</a:t>
             </a:r>
             <a:endParaRPr lang="en-US" sz="1350" dirty="0"/>
           </a:p>
@@ -8965,13 +9657,13 @@
             <a:r>
               <a:rPr lang="en-US" sz="1350" dirty="0">
                 <a:solidFill>
-                  <a:srgbClr val="E8EDF2"/>
+                  <a:srgbClr val="8CC63F"/>
                 </a:solidFill>
                 <a:latin typeface="Courier New" pitchFamily="34" charset="0"/>
                 <a:ea typeface="Courier New" pitchFamily="34" charset="-122"/>
                 <a:cs typeface="Courier New" pitchFamily="34" charset="-120"/>
               </a:rPr>
-              <a:t>do {</a:t>
+              <a:t>           cudaMemcpyDeviceToHost);   // GPU 카운터 → CPU 변수</a:t>
             </a:r>
             <a:endParaRPr lang="en-US" sz="1350" dirty="0"/>
           </a:p>
@@ -8985,84 +9677,186 @@
             <a:r>
               <a:rPr lang="en-US" sz="1350" dirty="0">
                 <a:solidFill>
-                  <a:srgbClr val="8CC63F"/>
+                  <a:srgbClr val="E8EDF2"/>
                 </a:solidFill>
                 <a:latin typeface="Courier New" pitchFamily="34" charset="0"/>
                 <a:ea typeface="Courier New" pitchFamily="34" charset="-122"/>
                 <a:cs typeface="Courier New" pitchFamily="34" charset="-120"/>
               </a:rPr>
-              <a:t>    err = cudaMalloc(&amp;ptr, tot_num_blocks * BLOCKSIZE);</a:t>
+              <a:t>if (err) {  /* 오류 주소·기대값·현재값을 출력·기록 */  }</a:t>
             </a:r>
             <a:endParaRPr lang="en-US" sz="1350" dirty="0"/>
           </a:p>
-          <a:p>
-            <a:pPr algn="l" indent="0" marL="0">
-              <a:lnSpc>
-                <a:spcPct val="108000"/>
-              </a:lnSpc>
-              <a:buNone/>
-            </a:pPr>
-            <a:r>
-              <a:rPr lang="en-US" sz="1350" dirty="0">
+        </p:txBody>
+      </p:sp>
+      <p:sp>
+        <p:nvSpPr>
+          <p:cNvPr id="6" name="Text 4"/>
+          <p:cNvSpPr/>
+          <p:nvPr/>
+        </p:nvSpPr>
+        <p:spPr>
+          <a:xfrm>
+            <a:off x="548640" y="4023360"/>
+            <a:ext cx="11064240" cy="822960"/>
+          </a:xfrm>
+          <a:prstGeom prst="rect">
+            <a:avLst/>
+          </a:prstGeom>
+          <a:noFill/>
+          <a:ln/>
+        </p:spPr>
+        <p:txBody>
+          <a:bodyPr wrap="square" lIns="0" tIns="0" rIns="0" bIns="0" rtlCol="0" anchor="t"/>
+          <a:lstStyle/>
+          <a:p>
+            <a:pPr indent="0" marL="0">
+              <a:buNone/>
+            </a:pPr>
+            <a:r>
+              <a:rPr lang="en-US" sz="1700" b="1" dirty="0">
+                <a:solidFill>
+                  <a:srgbClr val="8CC63F"/>
+                </a:solidFill>
+                <a:latin typeface="Malgun Gothic" pitchFamily="34" charset="0"/>
+                <a:ea typeface="Malgun Gothic" pitchFamily="34" charset="-122"/>
+                <a:cs typeface="Malgun Gothic" pitchFamily="34" charset="-120"/>
+              </a:rPr>
+              <a:t>err_count</a:t>
+            </a:r>
+            <a:pPr indent="0" marL="0">
+              <a:buNone/>
+            </a:pPr>
+            <a:r>
+              <a:rPr lang="en-US" sz="1700" dirty="0">
+                <a:solidFill>
+                  <a:srgbClr val="E8EDF2"/>
+                </a:solidFill>
+                <a:latin typeface="Malgun Gothic" pitchFamily="34" charset="0"/>
+                <a:ea typeface="Malgun Gothic" pitchFamily="34" charset="-122"/>
+                <a:cs typeface="Malgun Gothic" pitchFamily="34" charset="-120"/>
+              </a:rPr>
+              <a:t>는 GPU에 있는 디바이스 포인터입니다. CPU는 그 값을 </a:t>
+            </a:r>
+            <a:pPr indent="0" marL="0">
+              <a:buNone/>
+            </a:pPr>
+            <a:r>
+              <a:rPr lang="en-US" sz="1700" b="1" dirty="0">
                 <a:solidFill>
                   <a:srgbClr val="E0A458"/>
                 </a:solidFill>
-                <a:latin typeface="Courier New" pitchFamily="34" charset="0"/>
-                <a:ea typeface="Courier New" pitchFamily="34" charset="-122"/>
-                <a:cs typeface="Courier New" pitchFamily="34" charset="-120"/>
-              </a:rPr>
-              <a:t>    if (err != cudaSuccess) --tot_num_blocks;   // 줄여서 재시도</a:t>
-            </a:r>
-            <a:endParaRPr lang="en-US" sz="1350" dirty="0"/>
-          </a:p>
-          <a:p>
-            <a:pPr algn="l" indent="0" marL="0">
-              <a:lnSpc>
-                <a:spcPct val="108000"/>
-              </a:lnSpc>
-              <a:buNone/>
-            </a:pPr>
-            <a:r>
-              <a:rPr lang="en-US" sz="1350" dirty="0">
+                <a:latin typeface="Malgun Gothic" pitchFamily="34" charset="0"/>
+                <a:ea typeface="Malgun Gothic" pitchFamily="34" charset="-122"/>
+                <a:cs typeface="Malgun Gothic" pitchFamily="34" charset="-120"/>
+              </a:rPr>
+              <a:t>직접 읽을 수 없어</a:t>
+            </a:r>
+            <a:pPr indent="0" marL="0">
+              <a:buNone/>
+            </a:pPr>
+            <a:r>
+              <a:rPr lang="en-US" sz="1700" dirty="0">
                 <a:solidFill>
                   <a:srgbClr val="E8EDF2"/>
                 </a:solidFill>
-                <a:latin typeface="Courier New" pitchFamily="34" charset="0"/>
-                <a:ea typeface="Courier New" pitchFamily="34" charset="-122"/>
-                <a:cs typeface="Courier New" pitchFamily="34" charset="-120"/>
-              </a:rPr>
-              <a:t>} while (cudaGetLastError() != cudaSuccess);</a:t>
-            </a:r>
-            <a:endParaRPr lang="en-US" sz="1350" dirty="0"/>
-          </a:p>
-        </p:txBody>
-      </p:sp>
-      <p:sp>
-        <p:nvSpPr>
-          <p:cNvPr id="6" name="Text 4"/>
-          <p:cNvSpPr/>
-          <p:nvPr/>
-        </p:nvSpPr>
-        <p:spPr>
-          <a:xfrm>
-            <a:off x="548640" y="4434840"/>
-            <a:ext cx="11064240" cy="914400"/>
-          </a:xfrm>
-          <a:prstGeom prst="rect">
-            <a:avLst/>
-          </a:prstGeom>
-          <a:noFill/>
-          <a:ln/>
-        </p:spPr>
-        <p:txBody>
-          <a:bodyPr wrap="square" lIns="0" tIns="0" rIns="0" bIns="0" rtlCol="0" anchor="t"/>
+                <a:latin typeface="Malgun Gothic" pitchFamily="34" charset="0"/>
+                <a:ea typeface="Malgun Gothic" pitchFamily="34" charset="-122"/>
+                <a:cs typeface="Malgun Gothic" pitchFamily="34" charset="-120"/>
+              </a:rPr>
+              <a:t> 반드시 cudaMemcpy로 가져와야 합니다.</a:t>
+            </a:r>
+            <a:endParaRPr lang="en-US" sz="1700" dirty="0"/>
+          </a:p>
+        </p:txBody>
+      </p:sp>
+      <p:sp>
+        <p:nvSpPr>
+          <p:cNvPr id="7" name="Shape 5"/>
+          <p:cNvSpPr/>
+          <p:nvPr/>
+        </p:nvSpPr>
+        <p:spPr>
+          <a:xfrm>
+            <a:off x="548640" y="4892040"/>
+            <a:ext cx="5349240" cy="1005840"/>
+          </a:xfrm>
+          <a:prstGeom prst="roundRect">
+            <a:avLst>
+              <a:gd name="adj" fmla="val 7273"/>
+            </a:avLst>
+          </a:prstGeom>
+          <a:solidFill>
+            <a:srgbClr val="1E232C"/>
+          </a:solidFill>
+          <a:ln/>
+        </p:spPr>
+      </p:sp>
+      <p:sp>
+        <p:nvSpPr>
+          <p:cNvPr id="8" name="Text 6"/>
+          <p:cNvSpPr/>
+          <p:nvPr/>
+        </p:nvSpPr>
+        <p:spPr>
+          <a:xfrm>
+            <a:off x="777240" y="5029200"/>
+            <a:ext cx="4892040" cy="365760"/>
+          </a:xfrm>
+          <a:prstGeom prst="rect">
+            <a:avLst/>
+          </a:prstGeom>
+          <a:noFill/>
+          <a:ln/>
+        </p:spPr>
+        <p:txBody>
+          <a:bodyPr wrap="square" lIns="0" tIns="0" rIns="0" bIns="0" rtlCol="0" anchor="ctr"/>
           <a:lstStyle/>
           <a:p>
             <a:pPr indent="0" marL="0">
               <a:buNone/>
             </a:pPr>
             <a:r>
-              <a:rPr lang="en-US" sz="1700" dirty="0">
+              <a:rPr lang="en-US" sz="1500" b="1" dirty="0">
+                <a:solidFill>
+                  <a:srgbClr val="8CC63F"/>
+                </a:solidFill>
+                <a:latin typeface="Malgun Gothic" pitchFamily="34" charset="0"/>
+                <a:ea typeface="Malgun Gothic" pitchFamily="34" charset="-122"/>
+                <a:cs typeface="Malgun Gothic" pitchFamily="34" charset="-120"/>
+              </a:rPr>
+              <a:t>기록되는 정보</a:t>
+            </a:r>
+            <a:endParaRPr lang="en-US" sz="1500" dirty="0"/>
+          </a:p>
+        </p:txBody>
+      </p:sp>
+      <p:sp>
+        <p:nvSpPr>
+          <p:cNvPr id="9" name="Text 7"/>
+          <p:cNvSpPr/>
+          <p:nvPr/>
+        </p:nvSpPr>
+        <p:spPr>
+          <a:xfrm>
+            <a:off x="777240" y="5394960"/>
+            <a:ext cx="4892040" cy="411480"/>
+          </a:xfrm>
+          <a:prstGeom prst="rect">
+            <a:avLst/>
+          </a:prstGeom>
+          <a:noFill/>
+          <a:ln/>
+        </p:spPr>
+        <p:txBody>
+          <a:bodyPr wrap="square" lIns="0" tIns="0" rIns="0" bIns="0" rtlCol="0" anchor="ctr"/>
+          <a:lstStyle/>
+          <a:p>
+            <a:pPr indent="0" marL="0">
+              <a:buNone/>
+            </a:pPr>
+            <a:r>
+              <a:rPr lang="en-US" sz="1400" dirty="0">
                 <a:solidFill>
                   <a:srgbClr val="E8EDF2"/>
                 </a:solidFill>
@@ -9070,27 +9864,99 @@
                 <a:ea typeface="Malgun Gothic" pitchFamily="34" charset="-122"/>
                 <a:cs typeface="Malgun Gothic" pitchFamily="34" charset="-120"/>
               </a:rPr>
-              <a:t>드라이버가 보고한 여유 메모리를 다 할당하지 못할 때가 있습니다. 실전 코드는 </a:t>
-            </a:r>
+              <a:t>오류 주소 · 기대값 · 실제값 · 재읽기값</a:t>
+            </a:r>
+            <a:endParaRPr lang="en-US" sz="1400" dirty="0"/>
+          </a:p>
+        </p:txBody>
+      </p:sp>
+      <p:sp>
+        <p:nvSpPr>
+          <p:cNvPr id="10" name="Shape 8"/>
+          <p:cNvSpPr/>
+          <p:nvPr/>
+        </p:nvSpPr>
+        <p:spPr>
+          <a:xfrm>
+            <a:off x="6263640" y="4892040"/>
+            <a:ext cx="5349240" cy="1005840"/>
+          </a:xfrm>
+          <a:prstGeom prst="roundRect">
+            <a:avLst>
+              <a:gd name="adj" fmla="val 7273"/>
+            </a:avLst>
+          </a:prstGeom>
+          <a:solidFill>
+            <a:srgbClr val="1E232C"/>
+          </a:solidFill>
+          <a:ln/>
+        </p:spPr>
+      </p:sp>
+      <p:sp>
+        <p:nvSpPr>
+          <p:cNvPr id="11" name="Text 9"/>
+          <p:cNvSpPr/>
+          <p:nvPr/>
+        </p:nvSpPr>
+        <p:spPr>
+          <a:xfrm>
+            <a:off x="6492240" y="5029200"/>
+            <a:ext cx="4892040" cy="365760"/>
+          </a:xfrm>
+          <a:prstGeom prst="rect">
+            <a:avLst/>
+          </a:prstGeom>
+          <a:noFill/>
+          <a:ln/>
+        </p:spPr>
+        <p:txBody>
+          <a:bodyPr wrap="square" lIns="0" tIns="0" rIns="0" bIns="0" rtlCol="0" anchor="ctr"/>
+          <a:lstStyle/>
+          <a:p>
             <a:pPr indent="0" marL="0">
               <a:buNone/>
             </a:pPr>
             <a:r>
-              <a:rPr lang="en-US" sz="1700" b="1" dirty="0">
-                <a:solidFill>
-                  <a:srgbClr val="8CC63F"/>
-                </a:solidFill>
-                <a:latin typeface="Malgun Gothic" pitchFamily="34" charset="0"/>
-                <a:ea typeface="Malgun Gothic" pitchFamily="34" charset="-122"/>
-                <a:cs typeface="Malgun Gothic" pitchFamily="34" charset="-120"/>
-              </a:rPr>
-              <a:t>실패를 가정하고 우아하게 물러섭니다</a:t>
-            </a:r>
+              <a:rPr lang="en-US" sz="1500" b="1" dirty="0">
+                <a:solidFill>
+                  <a:srgbClr val="4FB0C6"/>
+                </a:solidFill>
+                <a:latin typeface="Malgun Gothic" pitchFamily="34" charset="0"/>
+                <a:ea typeface="Malgun Gothic" pitchFamily="34" charset="-122"/>
+                <a:cs typeface="Malgun Gothic" pitchFamily="34" charset="-120"/>
+              </a:rPr>
+              <a:t>최근 10개만</a:t>
+            </a:r>
+            <a:endParaRPr lang="en-US" sz="1500" dirty="0"/>
+          </a:p>
+        </p:txBody>
+      </p:sp>
+      <p:sp>
+        <p:nvSpPr>
+          <p:cNvPr id="12" name="Text 10"/>
+          <p:cNvSpPr/>
+          <p:nvPr/>
+        </p:nvSpPr>
+        <p:spPr>
+          <a:xfrm>
+            <a:off x="6492240" y="5394960"/>
+            <a:ext cx="4892040" cy="411480"/>
+          </a:xfrm>
+          <a:prstGeom prst="rect">
+            <a:avLst/>
+          </a:prstGeom>
+          <a:noFill/>
+          <a:ln/>
+        </p:spPr>
+        <p:txBody>
+          <a:bodyPr wrap="square" lIns="0" tIns="0" rIns="0" bIns="0" rtlCol="0" anchor="ctr"/>
+          <a:lstStyle/>
+          <a:p>
             <a:pPr indent="0" marL="0">
               <a:buNone/>
             </a:pPr>
             <a:r>
-              <a:rPr lang="en-US" sz="1700" dirty="0">
+              <a:rPr lang="en-US" sz="1400" dirty="0">
                 <a:solidFill>
                   <a:srgbClr val="E8EDF2"/>
                 </a:solidFill>
@@ -9098,46 +9964,7 @@
                 <a:ea typeface="Malgun Gothic" pitchFamily="34" charset="-122"/>
                 <a:cs typeface="Malgun Gothic" pitchFamily="34" charset="-120"/>
               </a:rPr>
-              <a:t>. 장난감 예제와 프로덕션 코드의 차이입니다.</a:t>
-            </a:r>
-            <a:endParaRPr lang="en-US" sz="1700" dirty="0"/>
-          </a:p>
-        </p:txBody>
-      </p:sp>
-      <p:sp>
-        <p:nvSpPr>
-          <p:cNvPr id="7" name="Text 5"/>
-          <p:cNvSpPr/>
-          <p:nvPr/>
-        </p:nvSpPr>
-        <p:spPr>
-          <a:xfrm>
-            <a:off x="548640" y="5486400"/>
-            <a:ext cx="11064240" cy="457200"/>
-          </a:xfrm>
-          <a:prstGeom prst="rect">
-            <a:avLst/>
-          </a:prstGeom>
-          <a:noFill/>
-          <a:ln/>
-        </p:spPr>
-        <p:txBody>
-          <a:bodyPr wrap="square" lIns="0" tIns="0" rIns="0" bIns="0" rtlCol="0" anchor="ctr"/>
-          <a:lstStyle/>
-          <a:p>
-            <a:pPr indent="0" marL="0">
-              <a:buNone/>
-            </a:pPr>
-            <a:r>
-              <a:rPr lang="en-US" sz="1400" i="1" dirty="0">
-                <a:solidFill>
-                  <a:srgbClr val="9AA6B2"/>
-                </a:solidFill>
-                <a:latin typeface="Malgun Gothic" pitchFamily="34" charset="0"/>
-                <a:ea typeface="Malgun Gothic" pitchFamily="34" charset="-122"/>
-                <a:cs typeface="Malgun Gothic" pitchFamily="34" charset="-120"/>
-              </a:rPr>
-              <a:t>cudaMemGetInfo로 여유 메모리를 조회 → BLOCKSIZE(1 MB)로 나눠 블록 수 결정.</a:t>
+              <a:t>MAX_ERR_RECORD_COUNT=10, 순환 기록</a:t>
             </a:r>
             <a:endParaRPr lang="en-US" sz="1400" dirty="0"/>
           </a:p>

--- a/seminar/slides/세션2_메모리모델과_데이터이동.pptx
+++ b/seminar/slides/세션2_메모리모델과_데이터이동.pptx
@@ -18,9 +18,10 @@
     <p:sldId id="266" r:id="rId12"/>
     <p:sldId id="267" r:id="rId13"/>
     <p:sldId id="268" r:id="rId14"/>
+    <p:sldId id="269" r:id="rId15"/>
   </p:sldIdLst>
   <p:notesMasterIdLst>
-    <p:notesMasterId r:id="rId15"/>
+    <p:notesMasterId r:id="rId16"/>
   </p:notesMasterIdLst>
   <p:sldSz cx="12192000" cy="6858000"/>
   <p:notesSz cx="6858000" cy="12192000"/>
@@ -602,7 +603,7 @@
           <a:p>
             <a:r>
               <a:rPr lang="en-US" dirty="0"/>
-              <a:t>에러 처리와 재시도 루프는 세션 4(에러 핸들링)의 예고편이기도 합니다.</a:t>
+              <a:t>디바이스 포인터를 호스트에서 역참조하면 안 된다는 점이 입문자 핵심 함정. cudaMemcpy가 다리 역할.</a:t>
             </a:r>
             <a:endParaRPr lang="en-US" dirty="0"/>
           </a:p>
@@ -690,7 +691,7 @@
           <a:p>
             <a:r>
               <a:rPr lang="en-US" dirty="0"/>
-              <a:t>Ex 3(fault injection)이 하이라이트. 실제 불량 칩이 내는 증상을 소프트웨어로 재현한다는 점을 강조. 반드시 원복.</a:t>
+              <a:t>에러 처리와 재시도 루프는 세션 4(에러 핸들링)의 예고편이기도 합니다.</a:t>
             </a:r>
             <a:endParaRPr lang="en-US" dirty="0"/>
           </a:p>
@@ -778,7 +779,7 @@
           <a:p>
             <a:r>
               <a:rPr lang="en-US" dirty="0"/>
-              <a:t>네 가지 목표(슬라이드 2)로 돌아가 자가 점검을 유도하세요.</a:t>
+              <a:t>Ex 3(fault injection)이 하이라이트. 실제 불량 칩이 내는 증상을 소프트웨어로 재현한다는 점을 강조. 반드시 원복.</a:t>
             </a:r>
             <a:endParaRPr lang="en-US" dirty="0"/>
           </a:p>
@@ -866,7 +867,7 @@
           <a:p>
             <a:r>
               <a:rPr lang="en-US" dirty="0"/>
-              <a:t>느린 커널을 충분히 이해했으니, 다음엔 같은 문제를 빠르게 푸는 커널로 성능을 배운다는 흐름.</a:t>
+              <a:t>네 가지 목표(슬라이드 2)로 돌아가 자가 점검을 유도하세요.</a:t>
             </a:r>
             <a:endParaRPr lang="en-US" dirty="0"/>
           </a:p>
@@ -890,6 +891,94 @@
             <a:fld id="{F7021451-1387-4CA6-816F-3879F97B5CBC}" type="slidenum">
               <a:rPr lang="en-US"/>
               <a:t>13</a:t>
+            </a:fld>
+            <a:endParaRPr lang="en-US"/>
+          </a:p>
+        </p:txBody>
+      </p:sp>
+    </p:spTree>
+    <p:extLst>
+      <p:ext uri="{BB962C8B-B14F-4D97-AF65-F5344CB8AC3E}">
+        <p14:creationId xmlns:p14="http://schemas.microsoft.com/office/powerpoint/2010/main" val="1024086991"/>
+      </p:ext>
+    </p:extLst>
+  </p:cSld>
+  <p:clrMapOvr>
+    <a:masterClrMapping/>
+  </p:clrMapOvr>
+</p:notes>
+</file>
+
+<file path=ppt/notesSlides/notesSlide14.xml><?xml version="1.0" encoding="utf-8"?>
+<p:notes xmlns:a="http://schemas.openxmlformats.org/drawingml/2006/main" xmlns:r="http://schemas.openxmlformats.org/officeDocument/2006/relationships" xmlns:p="http://schemas.openxmlformats.org/presentationml/2006/main">
+  <p:cSld>
+    <p:spTree>
+      <p:nvGrpSpPr>
+        <p:cNvPr id="1" name=""/>
+        <p:cNvGrpSpPr/>
+        <p:nvPr/>
+      </p:nvGrpSpPr>
+      <p:grpSpPr>
+        <a:xfrm>
+          <a:off x="0" y="0"/>
+          <a:ext cx="0" cy="0"/>
+          <a:chOff x="0" y="0"/>
+          <a:chExt cx="0" cy="0"/>
+        </a:xfrm>
+      </p:grpSpPr>
+      <p:sp>
+        <p:nvSpPr>
+          <p:cNvPr id="2" name="Slide Image Placeholder 1"/>
+          <p:cNvSpPr>
+            <a:spLocks noGrp="1" noRot="1" noChangeAspect="1"/>
+          </p:cNvSpPr>
+          <p:nvPr>
+            <p:ph type="sldImg"/>
+          </p:nvPr>
+        </p:nvSpPr>
+        <p:spPr/>
+      </p:sp>
+      <p:sp>
+        <p:nvSpPr>
+          <p:cNvPr id="3" name="Notes Placeholder 2"/>
+          <p:cNvSpPr>
+            <a:spLocks noGrp="1"/>
+          </p:cNvSpPr>
+          <p:nvPr>
+            <p:ph type="body" idx="1"/>
+          </p:nvPr>
+        </p:nvSpPr>
+        <p:spPr/>
+        <p:txBody>
+          <a:bodyPr/>
+          <a:lstStyle/>
+          <a:p>
+            <a:r>
+              <a:rPr lang="en-US" dirty="0"/>
+              <a:t>느린 커널을 충분히 이해했으니, 다음엔 같은 문제를 빠르게 푸는 커널로 성능을 배운다는 흐름.</a:t>
+            </a:r>
+            <a:endParaRPr lang="en-US" dirty="0"/>
+          </a:p>
+        </p:txBody>
+      </p:sp>
+      <p:sp>
+        <p:nvSpPr>
+          <p:cNvPr id="4" name="Slide Number Placeholder 3"/>
+          <p:cNvSpPr>
+            <a:spLocks noGrp="1"/>
+          </p:cNvSpPr>
+          <p:nvPr>
+            <p:ph type="sldNum" sz="quarter" idx="10"/>
+          </p:nvPr>
+        </p:nvSpPr>
+        <p:spPr/>
+        <p:txBody>
+          <a:bodyPr/>
+          <a:lstStyle/>
+          <a:p>
+            <a:fld id="{F7021451-1387-4CA6-816F-3879F97B5CBC}" type="slidenum">
+              <a:rPr lang="en-US"/>
+              <a:t>14</a:t>
             </a:fld>
             <a:endParaRPr lang="en-US"/>
           </a:p>
@@ -1482,7 +1571,7 @@
           <a:p>
             <a:r>
               <a:rPr lang="en-US" dirty="0"/>
-              <a:t>고착(stuck-at) 오류 개념을 비트 그림으로. 왜 한 방향 검사로는 부족한지 강조.</a:t>
+              <a:t>UML 시퀀스풍. 실선=호스트가 GPU에 커널 요청, 점선=GPU→호스트 반환(동기화/데이터). flush가 정확성의 열쇠.</a:t>
             </a:r>
             <a:endParaRPr lang="en-US" dirty="0"/>
           </a:p>
@@ -1570,7 +1659,7 @@
           <a:p>
             <a:r>
               <a:rPr lang="en-US" dirty="0"/>
-              <a:t>디바이스 포인터를 호스트에서 역참조하면 안 된다는 점이 입문자 핵심 함정. cudaMemcpy가 다리 역할.</a:t>
+              <a:t>고착(stuck-at) 오류 개념을 비트 그림으로. 왜 한 방향 검사로는 부족한지 강조.</a:t>
             </a:r>
             <a:endParaRPr lang="en-US" dirty="0"/>
           </a:p>
@@ -2280,7 +2369,7 @@
                 <a:ea typeface="Courier New" pitchFamily="34" charset="-122"/>
                 <a:cs typeface="Courier New" pitchFamily="34" charset="-120"/>
               </a:rPr>
-              <a:t>8</a:t>
+              <a:t>7</a:t>
             </a:r>
             <a:endParaRPr lang="en-US" sz="2200" dirty="0"/>
           </a:p>
@@ -2319,7 +2408,7 @@
                 <a:ea typeface="Malgun Gothic" pitchFamily="34" charset="-122"/>
                 <a:cs typeface="Malgun Gothic" pitchFamily="34" charset="-120"/>
               </a:rPr>
-              <a:t>실전 코드 · 할 수 있는 만큼 할당하기</a:t>
+              <a:t>오류가 CPU로 돌아오는 길</a:t>
             </a:r>
             <a:endParaRPr lang="en-US" sz="3000" dirty="0"/>
           </a:p>
@@ -2334,11 +2423,11 @@
         <p:spPr>
           <a:xfrm>
             <a:off x="548640" y="1554480"/>
-            <a:ext cx="11064240" cy="2651760"/>
+            <a:ext cx="11064240" cy="2286000"/>
           </a:xfrm>
           <a:prstGeom prst="roundRect">
             <a:avLst>
-              <a:gd name="adj" fmla="val 2069"/>
+              <a:gd name="adj" fmla="val 2400"/>
             </a:avLst>
           </a:prstGeom>
           <a:solidFill>
@@ -2361,7 +2450,7 @@
         <p:spPr>
           <a:xfrm>
             <a:off x="749808" y="1700784"/>
-            <a:ext cx="10661904" cy="2359152"/>
+            <a:ext cx="10661904" cy="1993392"/>
           </a:xfrm>
           <a:prstGeom prst="rect">
             <a:avLst/>
@@ -2388,7 +2477,7 @@
                 <a:ea typeface="Courier New" pitchFamily="34" charset="-122"/>
                 <a:cs typeface="Courier New" pitchFamily="34" charset="-120"/>
               </a:rPr>
-              <a:t>// cuda_memtest.cpp:157   가용 메모리를 조회하고,</a:t>
+              <a:t>// error_checking()  tests.cpp:108</a:t>
             </a:r>
             <a:endParaRPr lang="en-US" sz="1350" dirty="0"/>
           </a:p>
@@ -2402,13 +2491,13 @@
             <a:r>
               <a:rPr lang="en-US" sz="1350" dirty="0">
                 <a:solidFill>
-                  <a:srgbClr val="9AA6B2"/>
+                  <a:srgbClr val="E8EDF2"/>
                 </a:solidFill>
                 <a:latin typeface="Courier New" pitchFamily="34" charset="0"/>
                 <a:ea typeface="Courier New" pitchFamily="34" charset="-122"/>
                 <a:cs typeface="Courier New" pitchFamily="34" charset="-120"/>
               </a:rPr>
-              <a:t>// 할당 실패하면 블록을 하나씩 줄여 재시도한다</a:t>
+              <a:t>unsigned int err = 0;</a:t>
             </a:r>
             <a:endParaRPr lang="en-US" sz="1350" dirty="0"/>
           </a:p>
@@ -2428,7 +2517,7 @@
                 <a:ea typeface="Courier New" pitchFamily="34" charset="-122"/>
                 <a:cs typeface="Courier New" pitchFamily="34" charset="-120"/>
               </a:rPr>
-              <a:t>tot_num_blocks = free / BLOCKSIZE;</a:t>
+              <a:t>cudaMemcpy(&amp;err, err_count, sizeof(unsigned int),</a:t>
             </a:r>
             <a:endParaRPr lang="en-US" sz="1350" dirty="0"/>
           </a:p>
@@ -2442,13 +2531,13 @@
             <a:r>
               <a:rPr lang="en-US" sz="1350" dirty="0">
                 <a:solidFill>
-                  <a:srgbClr val="E8EDF2"/>
+                  <a:srgbClr val="8CC63F"/>
                 </a:solidFill>
                 <a:latin typeface="Courier New" pitchFamily="34" charset="0"/>
                 <a:ea typeface="Courier New" pitchFamily="34" charset="-122"/>
                 <a:cs typeface="Courier New" pitchFamily="34" charset="-120"/>
               </a:rPr>
-              <a:t>do {</a:t>
+              <a:t>           cudaMemcpyDeviceToHost);   // GPU 카운터 → CPU 변수</a:t>
             </a:r>
             <a:endParaRPr lang="en-US" sz="1350" dirty="0"/>
           </a:p>
@@ -2462,84 +2551,186 @@
             <a:r>
               <a:rPr lang="en-US" sz="1350" dirty="0">
                 <a:solidFill>
-                  <a:srgbClr val="8CC63F"/>
+                  <a:srgbClr val="E8EDF2"/>
                 </a:solidFill>
                 <a:latin typeface="Courier New" pitchFamily="34" charset="0"/>
                 <a:ea typeface="Courier New" pitchFamily="34" charset="-122"/>
                 <a:cs typeface="Courier New" pitchFamily="34" charset="-120"/>
               </a:rPr>
-              <a:t>    err = cudaMalloc(&amp;ptr, tot_num_blocks * BLOCKSIZE);</a:t>
+              <a:t>if (err) {  /* 오류 주소·기대값·현재값을 출력·기록 */  }</a:t>
             </a:r>
             <a:endParaRPr lang="en-US" sz="1350" dirty="0"/>
           </a:p>
-          <a:p>
-            <a:pPr algn="l" indent="0" marL="0">
-              <a:lnSpc>
-                <a:spcPct val="108000"/>
-              </a:lnSpc>
-              <a:buNone/>
-            </a:pPr>
-            <a:r>
-              <a:rPr lang="en-US" sz="1350" dirty="0">
+        </p:txBody>
+      </p:sp>
+      <p:sp>
+        <p:nvSpPr>
+          <p:cNvPr id="6" name="Text 4"/>
+          <p:cNvSpPr/>
+          <p:nvPr/>
+        </p:nvSpPr>
+        <p:spPr>
+          <a:xfrm>
+            <a:off x="548640" y="4023360"/>
+            <a:ext cx="11064240" cy="822960"/>
+          </a:xfrm>
+          <a:prstGeom prst="rect">
+            <a:avLst/>
+          </a:prstGeom>
+          <a:noFill/>
+          <a:ln/>
+        </p:spPr>
+        <p:txBody>
+          <a:bodyPr wrap="square" lIns="0" tIns="0" rIns="0" bIns="0" rtlCol="0" anchor="t"/>
+          <a:lstStyle/>
+          <a:p>
+            <a:pPr indent="0" marL="0">
+              <a:buNone/>
+            </a:pPr>
+            <a:r>
+              <a:rPr lang="en-US" sz="1700" b="1" dirty="0">
+                <a:solidFill>
+                  <a:srgbClr val="8CC63F"/>
+                </a:solidFill>
+                <a:latin typeface="Malgun Gothic" pitchFamily="34" charset="0"/>
+                <a:ea typeface="Malgun Gothic" pitchFamily="34" charset="-122"/>
+                <a:cs typeface="Malgun Gothic" pitchFamily="34" charset="-120"/>
+              </a:rPr>
+              <a:t>err_count</a:t>
+            </a:r>
+            <a:pPr indent="0" marL="0">
+              <a:buNone/>
+            </a:pPr>
+            <a:r>
+              <a:rPr lang="en-US" sz="1700" dirty="0">
+                <a:solidFill>
+                  <a:srgbClr val="E8EDF2"/>
+                </a:solidFill>
+                <a:latin typeface="Malgun Gothic" pitchFamily="34" charset="0"/>
+                <a:ea typeface="Malgun Gothic" pitchFamily="34" charset="-122"/>
+                <a:cs typeface="Malgun Gothic" pitchFamily="34" charset="-120"/>
+              </a:rPr>
+              <a:t>는 GPU에 있는 디바이스 포인터입니다. CPU는 그 값을 </a:t>
+            </a:r>
+            <a:pPr indent="0" marL="0">
+              <a:buNone/>
+            </a:pPr>
+            <a:r>
+              <a:rPr lang="en-US" sz="1700" b="1" dirty="0">
                 <a:solidFill>
                   <a:srgbClr val="E0A458"/>
                 </a:solidFill>
-                <a:latin typeface="Courier New" pitchFamily="34" charset="0"/>
-                <a:ea typeface="Courier New" pitchFamily="34" charset="-122"/>
-                <a:cs typeface="Courier New" pitchFamily="34" charset="-120"/>
-              </a:rPr>
-              <a:t>    if (err != cudaSuccess) --tot_num_blocks;   // 줄여서 재시도</a:t>
-            </a:r>
-            <a:endParaRPr lang="en-US" sz="1350" dirty="0"/>
-          </a:p>
-          <a:p>
-            <a:pPr algn="l" indent="0" marL="0">
-              <a:lnSpc>
-                <a:spcPct val="108000"/>
-              </a:lnSpc>
-              <a:buNone/>
-            </a:pPr>
-            <a:r>
-              <a:rPr lang="en-US" sz="1350" dirty="0">
+                <a:latin typeface="Malgun Gothic" pitchFamily="34" charset="0"/>
+                <a:ea typeface="Malgun Gothic" pitchFamily="34" charset="-122"/>
+                <a:cs typeface="Malgun Gothic" pitchFamily="34" charset="-120"/>
+              </a:rPr>
+              <a:t>직접 읽을 수 없어</a:t>
+            </a:r>
+            <a:pPr indent="0" marL="0">
+              <a:buNone/>
+            </a:pPr>
+            <a:r>
+              <a:rPr lang="en-US" sz="1700" dirty="0">
                 <a:solidFill>
                   <a:srgbClr val="E8EDF2"/>
                 </a:solidFill>
-                <a:latin typeface="Courier New" pitchFamily="34" charset="0"/>
-                <a:ea typeface="Courier New" pitchFamily="34" charset="-122"/>
-                <a:cs typeface="Courier New" pitchFamily="34" charset="-120"/>
-              </a:rPr>
-              <a:t>} while (cudaGetLastError() != cudaSuccess);</a:t>
-            </a:r>
-            <a:endParaRPr lang="en-US" sz="1350" dirty="0"/>
-          </a:p>
-        </p:txBody>
-      </p:sp>
-      <p:sp>
-        <p:nvSpPr>
-          <p:cNvPr id="6" name="Text 4"/>
-          <p:cNvSpPr/>
-          <p:nvPr/>
-        </p:nvSpPr>
-        <p:spPr>
-          <a:xfrm>
-            <a:off x="548640" y="4434840"/>
-            <a:ext cx="11064240" cy="914400"/>
-          </a:xfrm>
-          <a:prstGeom prst="rect">
-            <a:avLst/>
-          </a:prstGeom>
-          <a:noFill/>
-          <a:ln/>
-        </p:spPr>
-        <p:txBody>
-          <a:bodyPr wrap="square" lIns="0" tIns="0" rIns="0" bIns="0" rtlCol="0" anchor="t"/>
+                <a:latin typeface="Malgun Gothic" pitchFamily="34" charset="0"/>
+                <a:ea typeface="Malgun Gothic" pitchFamily="34" charset="-122"/>
+                <a:cs typeface="Malgun Gothic" pitchFamily="34" charset="-120"/>
+              </a:rPr>
+              <a:t> 반드시 cudaMemcpy로 가져와야 합니다.</a:t>
+            </a:r>
+            <a:endParaRPr lang="en-US" sz="1700" dirty="0"/>
+          </a:p>
+        </p:txBody>
+      </p:sp>
+      <p:sp>
+        <p:nvSpPr>
+          <p:cNvPr id="7" name="Shape 5"/>
+          <p:cNvSpPr/>
+          <p:nvPr/>
+        </p:nvSpPr>
+        <p:spPr>
+          <a:xfrm>
+            <a:off x="548640" y="4892040"/>
+            <a:ext cx="5349240" cy="1005840"/>
+          </a:xfrm>
+          <a:prstGeom prst="roundRect">
+            <a:avLst>
+              <a:gd name="adj" fmla="val 7273"/>
+            </a:avLst>
+          </a:prstGeom>
+          <a:solidFill>
+            <a:srgbClr val="1E232C"/>
+          </a:solidFill>
+          <a:ln/>
+        </p:spPr>
+      </p:sp>
+      <p:sp>
+        <p:nvSpPr>
+          <p:cNvPr id="8" name="Text 6"/>
+          <p:cNvSpPr/>
+          <p:nvPr/>
+        </p:nvSpPr>
+        <p:spPr>
+          <a:xfrm>
+            <a:off x="777240" y="5029200"/>
+            <a:ext cx="4892040" cy="365760"/>
+          </a:xfrm>
+          <a:prstGeom prst="rect">
+            <a:avLst/>
+          </a:prstGeom>
+          <a:noFill/>
+          <a:ln/>
+        </p:spPr>
+        <p:txBody>
+          <a:bodyPr wrap="square" lIns="0" tIns="0" rIns="0" bIns="0" rtlCol="0" anchor="ctr"/>
           <a:lstStyle/>
           <a:p>
             <a:pPr indent="0" marL="0">
               <a:buNone/>
             </a:pPr>
             <a:r>
-              <a:rPr lang="en-US" sz="1700" dirty="0">
+              <a:rPr lang="en-US" sz="1500" b="1" dirty="0">
+                <a:solidFill>
+                  <a:srgbClr val="8CC63F"/>
+                </a:solidFill>
+                <a:latin typeface="Malgun Gothic" pitchFamily="34" charset="0"/>
+                <a:ea typeface="Malgun Gothic" pitchFamily="34" charset="-122"/>
+                <a:cs typeface="Malgun Gothic" pitchFamily="34" charset="-120"/>
+              </a:rPr>
+              <a:t>기록되는 정보</a:t>
+            </a:r>
+            <a:endParaRPr lang="en-US" sz="1500" dirty="0"/>
+          </a:p>
+        </p:txBody>
+      </p:sp>
+      <p:sp>
+        <p:nvSpPr>
+          <p:cNvPr id="9" name="Text 7"/>
+          <p:cNvSpPr/>
+          <p:nvPr/>
+        </p:nvSpPr>
+        <p:spPr>
+          <a:xfrm>
+            <a:off x="777240" y="5394960"/>
+            <a:ext cx="4892040" cy="411480"/>
+          </a:xfrm>
+          <a:prstGeom prst="rect">
+            <a:avLst/>
+          </a:prstGeom>
+          <a:noFill/>
+          <a:ln/>
+        </p:spPr>
+        <p:txBody>
+          <a:bodyPr wrap="square" lIns="0" tIns="0" rIns="0" bIns="0" rtlCol="0" anchor="ctr"/>
+          <a:lstStyle/>
+          <a:p>
+            <a:pPr indent="0" marL="0">
+              <a:buNone/>
+            </a:pPr>
+            <a:r>
+              <a:rPr lang="en-US" sz="1400" dirty="0">
                 <a:solidFill>
                   <a:srgbClr val="E8EDF2"/>
                 </a:solidFill>
@@ -2547,27 +2738,99 @@
                 <a:ea typeface="Malgun Gothic" pitchFamily="34" charset="-122"/>
                 <a:cs typeface="Malgun Gothic" pitchFamily="34" charset="-120"/>
               </a:rPr>
-              <a:t>드라이버가 보고한 여유 메모리를 다 할당하지 못할 때가 있습니다. 실전 코드는 </a:t>
-            </a:r>
+              <a:t>오류 주소 · 기대값 · 실제값 · 재읽기값</a:t>
+            </a:r>
+            <a:endParaRPr lang="en-US" sz="1400" dirty="0"/>
+          </a:p>
+        </p:txBody>
+      </p:sp>
+      <p:sp>
+        <p:nvSpPr>
+          <p:cNvPr id="10" name="Shape 8"/>
+          <p:cNvSpPr/>
+          <p:nvPr/>
+        </p:nvSpPr>
+        <p:spPr>
+          <a:xfrm>
+            <a:off x="6263640" y="4892040"/>
+            <a:ext cx="5349240" cy="1005840"/>
+          </a:xfrm>
+          <a:prstGeom prst="roundRect">
+            <a:avLst>
+              <a:gd name="adj" fmla="val 7273"/>
+            </a:avLst>
+          </a:prstGeom>
+          <a:solidFill>
+            <a:srgbClr val="1E232C"/>
+          </a:solidFill>
+          <a:ln/>
+        </p:spPr>
+      </p:sp>
+      <p:sp>
+        <p:nvSpPr>
+          <p:cNvPr id="11" name="Text 9"/>
+          <p:cNvSpPr/>
+          <p:nvPr/>
+        </p:nvSpPr>
+        <p:spPr>
+          <a:xfrm>
+            <a:off x="6492240" y="5029200"/>
+            <a:ext cx="4892040" cy="365760"/>
+          </a:xfrm>
+          <a:prstGeom prst="rect">
+            <a:avLst/>
+          </a:prstGeom>
+          <a:noFill/>
+          <a:ln/>
+        </p:spPr>
+        <p:txBody>
+          <a:bodyPr wrap="square" lIns="0" tIns="0" rIns="0" bIns="0" rtlCol="0" anchor="ctr"/>
+          <a:lstStyle/>
+          <a:p>
             <a:pPr indent="0" marL="0">
               <a:buNone/>
             </a:pPr>
             <a:r>
-              <a:rPr lang="en-US" sz="1700" b="1" dirty="0">
-                <a:solidFill>
-                  <a:srgbClr val="8CC63F"/>
-                </a:solidFill>
-                <a:latin typeface="Malgun Gothic" pitchFamily="34" charset="0"/>
-                <a:ea typeface="Malgun Gothic" pitchFamily="34" charset="-122"/>
-                <a:cs typeface="Malgun Gothic" pitchFamily="34" charset="-120"/>
-              </a:rPr>
-              <a:t>실패를 가정하고 우아하게 물러섭니다</a:t>
-            </a:r>
+              <a:rPr lang="en-US" sz="1500" b="1" dirty="0">
+                <a:solidFill>
+                  <a:srgbClr val="4FB0C6"/>
+                </a:solidFill>
+                <a:latin typeface="Malgun Gothic" pitchFamily="34" charset="0"/>
+                <a:ea typeface="Malgun Gothic" pitchFamily="34" charset="-122"/>
+                <a:cs typeface="Malgun Gothic" pitchFamily="34" charset="-120"/>
+              </a:rPr>
+              <a:t>최근 10개만</a:t>
+            </a:r>
+            <a:endParaRPr lang="en-US" sz="1500" dirty="0"/>
+          </a:p>
+        </p:txBody>
+      </p:sp>
+      <p:sp>
+        <p:nvSpPr>
+          <p:cNvPr id="12" name="Text 10"/>
+          <p:cNvSpPr/>
+          <p:nvPr/>
+        </p:nvSpPr>
+        <p:spPr>
+          <a:xfrm>
+            <a:off x="6492240" y="5394960"/>
+            <a:ext cx="4892040" cy="411480"/>
+          </a:xfrm>
+          <a:prstGeom prst="rect">
+            <a:avLst/>
+          </a:prstGeom>
+          <a:noFill/>
+          <a:ln/>
+        </p:spPr>
+        <p:txBody>
+          <a:bodyPr wrap="square" lIns="0" tIns="0" rIns="0" bIns="0" rtlCol="0" anchor="ctr"/>
+          <a:lstStyle/>
+          <a:p>
             <a:pPr indent="0" marL="0">
               <a:buNone/>
             </a:pPr>
             <a:r>
-              <a:rPr lang="en-US" sz="1700" dirty="0">
+              <a:rPr lang="en-US" sz="1400" dirty="0">
                 <a:solidFill>
                   <a:srgbClr val="E8EDF2"/>
                 </a:solidFill>
@@ -2575,46 +2838,7 @@
                 <a:ea typeface="Malgun Gothic" pitchFamily="34" charset="-122"/>
                 <a:cs typeface="Malgun Gothic" pitchFamily="34" charset="-120"/>
               </a:rPr>
-              <a:t>. 장난감 예제와 프로덕션 코드의 차이입니다.</a:t>
-            </a:r>
-            <a:endParaRPr lang="en-US" sz="1700" dirty="0"/>
-          </a:p>
-        </p:txBody>
-      </p:sp>
-      <p:sp>
-        <p:nvSpPr>
-          <p:cNvPr id="7" name="Text 5"/>
-          <p:cNvSpPr/>
-          <p:nvPr/>
-        </p:nvSpPr>
-        <p:spPr>
-          <a:xfrm>
-            <a:off x="548640" y="5486400"/>
-            <a:ext cx="11064240" cy="457200"/>
-          </a:xfrm>
-          <a:prstGeom prst="rect">
-            <a:avLst/>
-          </a:prstGeom>
-          <a:noFill/>
-          <a:ln/>
-        </p:spPr>
-        <p:txBody>
-          <a:bodyPr wrap="square" lIns="0" tIns="0" rIns="0" bIns="0" rtlCol="0" anchor="ctr"/>
-          <a:lstStyle/>
-          <a:p>
-            <a:pPr indent="0" marL="0">
-              <a:buNone/>
-            </a:pPr>
-            <a:r>
-              <a:rPr lang="en-US" sz="1400" i="1" dirty="0">
-                <a:solidFill>
-                  <a:srgbClr val="9AA6B2"/>
-                </a:solidFill>
-                <a:latin typeface="Malgun Gothic" pitchFamily="34" charset="0"/>
-                <a:ea typeface="Malgun Gothic" pitchFamily="34" charset="-122"/>
-                <a:cs typeface="Malgun Gothic" pitchFamily="34" charset="-120"/>
-              </a:rPr>
-              <a:t>cudaMemGetInfo로 여유 메모리를 조회 → BLOCKSIZE(1 MB)로 나눠 블록 수 결정.</a:t>
+              <a:t>MAX_ERR_RECORD_COUNT=10, 순환 기록</a:t>
             </a:r>
             <a:endParaRPr lang="en-US" sz="1400" dirty="0"/>
           </a:p>
@@ -2689,7 +2913,7 @@
                 <a:ea typeface="Courier New" pitchFamily="34" charset="-122"/>
                 <a:cs typeface="Courier New" pitchFamily="34" charset="-120"/>
               </a:rPr>
-              <a:t>9</a:t>
+              <a:t>8</a:t>
             </a:r>
             <a:endParaRPr lang="en-US" sz="2200" dirty="0"/>
           </a:p>
@@ -2728,7 +2952,7 @@
                 <a:ea typeface="Malgun Gothic" pitchFamily="34" charset="-122"/>
                 <a:cs typeface="Malgun Gothic" pitchFamily="34" charset="-120"/>
               </a:rPr>
-              <a:t>실습 미리보기 · Lab 2</a:t>
+              <a:t>실전 코드 · 할 수 있는 만큼 할당하기</a:t>
             </a:r>
             <a:endParaRPr lang="en-US" sz="3000" dirty="0"/>
           </a:p>
@@ -2743,17 +2967,22 @@
         <p:spPr>
           <a:xfrm>
             <a:off x="548640" y="1554480"/>
-            <a:ext cx="5303520" cy="1965960"/>
+            <a:ext cx="11064240" cy="2651760"/>
           </a:xfrm>
           <a:prstGeom prst="roundRect">
             <a:avLst>
-              <a:gd name="adj" fmla="val 3721"/>
+              <a:gd name="adj" fmla="val 2069"/>
             </a:avLst>
           </a:prstGeom>
           <a:solidFill>
-            <a:srgbClr val="1E232C"/>
+            <a:srgbClr val="0E1116"/>
           </a:solidFill>
-          <a:ln/>
+          <a:ln w="12700">
+            <a:solidFill>
+              <a:srgbClr val="2C3440"/>
+            </a:solidFill>
+            <a:prstDash val="solid"/>
+          </a:ln>
         </p:spPr>
       </p:sp>
       <p:sp>
@@ -2764,474 +2993,222 @@
         </p:nvSpPr>
         <p:spPr>
           <a:xfrm>
-            <a:off x="804672" y="1755648"/>
-            <a:ext cx="1188720" cy="502920"/>
-          </a:xfrm>
-          <a:prstGeom prst="roundRect">
-            <a:avLst>
-              <a:gd name="adj" fmla="val 14545"/>
-            </a:avLst>
-          </a:prstGeom>
-          <a:solidFill>
-            <a:srgbClr val="8CC63F"/>
-          </a:solidFill>
-          <a:ln/>
-        </p:spPr>
-        <p:txBody>
-          <a:bodyPr wrap="square" rtlCol="0" anchor="ctr"/>
-          <a:lstStyle/>
-          <a:p>
-            <a:pPr algn="ctr" indent="0" marL="0">
-              <a:buNone/>
-            </a:pPr>
-            <a:r>
-              <a:rPr lang="en-US" sz="1700" b="1" dirty="0">
-                <a:solidFill>
-                  <a:srgbClr val="13161C"/>
+            <a:off x="749808" y="1700784"/>
+            <a:ext cx="10661904" cy="2359152"/>
+          </a:xfrm>
+          <a:prstGeom prst="rect">
+            <a:avLst/>
+          </a:prstGeom>
+          <a:noFill/>
+          <a:ln/>
+        </p:spPr>
+        <p:txBody>
+          <a:bodyPr wrap="square" lIns="0" tIns="0" rIns="0" bIns="0" rtlCol="0" anchor="t"/>
+          <a:lstStyle/>
+          <a:p>
+            <a:pPr algn="l" indent="0" marL="0">
+              <a:lnSpc>
+                <a:spcPct val="108000"/>
+              </a:lnSpc>
+              <a:buNone/>
+            </a:pPr>
+            <a:r>
+              <a:rPr lang="en-US" sz="1350" dirty="0">
+                <a:solidFill>
+                  <a:srgbClr val="9AA6B2"/>
                 </a:solidFill>
                 <a:latin typeface="Courier New" pitchFamily="34" charset="0"/>
                 <a:ea typeface="Courier New" pitchFamily="34" charset="-122"/>
                 <a:cs typeface="Courier New" pitchFamily="34" charset="-120"/>
               </a:rPr>
-              <a:t>Ex 1</a:t>
-            </a:r>
-            <a:endParaRPr lang="en-US" sz="1700" dirty="0"/>
-          </a:p>
-        </p:txBody>
-      </p:sp>
-      <p:sp>
-        <p:nvSpPr>
-          <p:cNvPr id="6" name="Text 4"/>
-          <p:cNvSpPr/>
-          <p:nvPr/>
-        </p:nvSpPr>
-        <p:spPr>
-          <a:xfrm>
-            <a:off x="2148840" y="1773936"/>
-            <a:ext cx="3474720" cy="822960"/>
-          </a:xfrm>
-          <a:prstGeom prst="rect">
-            <a:avLst/>
-          </a:prstGeom>
-          <a:noFill/>
-          <a:ln/>
-        </p:spPr>
-        <p:txBody>
-          <a:bodyPr wrap="square" lIns="0" tIns="0" rIns="0" bIns="0" rtlCol="0" anchor="t"/>
-          <a:lstStyle/>
-          <a:p>
-            <a:pPr indent="0" marL="0">
-              <a:buNone/>
-            </a:pPr>
-            <a:r>
-              <a:rPr lang="en-US" sz="1700" b="1" dirty="0">
-                <a:solidFill>
-                  <a:srgbClr val="E8EDF2"/>
-                </a:solidFill>
-                <a:latin typeface="Malgun Gothic" pitchFamily="34" charset="0"/>
-                <a:ea typeface="Malgun Gothic" pitchFamily="34" charset="-122"/>
-                <a:cs typeface="Malgun Gothic" pitchFamily="34" charset="-120"/>
-              </a:rPr>
-              <a:t>세 커널의 협업 보기</a:t>
-            </a:r>
-            <a:endParaRPr lang="en-US" sz="1700" dirty="0"/>
-          </a:p>
-        </p:txBody>
-      </p:sp>
-      <p:sp>
-        <p:nvSpPr>
-          <p:cNvPr id="7" name="Text 5"/>
-          <p:cNvSpPr/>
-          <p:nvPr/>
-        </p:nvSpPr>
-        <p:spPr>
-          <a:xfrm>
-            <a:off x="804672" y="2651760"/>
-            <a:ext cx="4791456" cy="731520"/>
-          </a:xfrm>
-          <a:prstGeom prst="rect">
-            <a:avLst/>
-          </a:prstGeom>
-          <a:noFill/>
-          <a:ln/>
-        </p:spPr>
-        <p:txBody>
-          <a:bodyPr wrap="square" lIns="0" tIns="0" rIns="0" bIns="0" rtlCol="0" anchor="t"/>
-          <a:lstStyle/>
-          <a:p>
-            <a:pPr indent="0" marL="0">
+              <a:t>// cuda_memtest.cpp:157   가용 메모리를 조회하고,</a:t>
+            </a:r>
+            <a:endParaRPr lang="en-US" sz="1350" dirty="0"/>
+          </a:p>
+          <a:p>
+            <a:pPr algn="l" indent="0" marL="0">
               <a:lnSpc>
-                <a:spcPct val="110000"/>
+                <a:spcPct val="108000"/>
               </a:lnSpc>
               <a:buNone/>
             </a:pPr>
             <a:r>
-              <a:rPr lang="en-US" sz="1400" dirty="0">
+              <a:rPr lang="en-US" sz="1350" dirty="0">
                 <a:solidFill>
                   <a:srgbClr val="9AA6B2"/>
-                </a:solidFill>
-                <a:latin typeface="Malgun Gothic" pitchFamily="34" charset="0"/>
-                <a:ea typeface="Malgun Gothic" pitchFamily="34" charset="-122"/>
-                <a:cs typeface="Malgun Gothic" pitchFamily="34" charset="-120"/>
-              </a:rPr>
-              <a:t>--verbose --verbose 로 write→readwrite→read 순서 확인</a:t>
-            </a:r>
-            <a:endParaRPr lang="en-US" sz="1400" dirty="0"/>
-          </a:p>
-        </p:txBody>
-      </p:sp>
-      <p:sp>
-        <p:nvSpPr>
-          <p:cNvPr id="8" name="Shape 6"/>
-          <p:cNvSpPr/>
-          <p:nvPr/>
-        </p:nvSpPr>
-        <p:spPr>
-          <a:xfrm>
-            <a:off x="6309360" y="1554480"/>
-            <a:ext cx="5303520" cy="1965960"/>
-          </a:xfrm>
-          <a:prstGeom prst="roundRect">
-            <a:avLst>
-              <a:gd name="adj" fmla="val 3721"/>
-            </a:avLst>
-          </a:prstGeom>
-          <a:solidFill>
-            <a:srgbClr val="1E232C"/>
-          </a:solidFill>
-          <a:ln/>
-        </p:spPr>
-      </p:sp>
-      <p:sp>
-        <p:nvSpPr>
-          <p:cNvPr id="9" name="Text 7"/>
-          <p:cNvSpPr/>
-          <p:nvPr/>
-        </p:nvSpPr>
-        <p:spPr>
-          <a:xfrm>
-            <a:off x="6565392" y="1755648"/>
-            <a:ext cx="1188720" cy="502920"/>
-          </a:xfrm>
-          <a:prstGeom prst="roundRect">
-            <a:avLst>
-              <a:gd name="adj" fmla="val 14545"/>
-            </a:avLst>
-          </a:prstGeom>
-          <a:solidFill>
-            <a:srgbClr val="4FB0C6"/>
-          </a:solidFill>
-          <a:ln/>
-        </p:spPr>
-        <p:txBody>
-          <a:bodyPr wrap="square" rtlCol="0" anchor="ctr"/>
-          <a:lstStyle/>
-          <a:p>
-            <a:pPr algn="ctr" indent="0" marL="0">
-              <a:buNone/>
-            </a:pPr>
-            <a:r>
-              <a:rPr lang="en-US" sz="1700" b="1" dirty="0">
-                <a:solidFill>
-                  <a:srgbClr val="13161C"/>
                 </a:solidFill>
                 <a:latin typeface="Courier New" pitchFamily="34" charset="0"/>
                 <a:ea typeface="Courier New" pitchFamily="34" charset="-122"/>
                 <a:cs typeface="Courier New" pitchFamily="34" charset="-120"/>
               </a:rPr>
-              <a:t>Ex 2</a:t>
-            </a:r>
-            <a:endParaRPr lang="en-US" sz="1700" dirty="0"/>
-          </a:p>
-        </p:txBody>
-      </p:sp>
-      <p:sp>
-        <p:nvSpPr>
-          <p:cNvPr id="10" name="Text 8"/>
-          <p:cNvSpPr/>
-          <p:nvPr/>
-        </p:nvSpPr>
-        <p:spPr>
-          <a:xfrm>
-            <a:off x="7909560" y="1773936"/>
-            <a:ext cx="3474720" cy="822960"/>
-          </a:xfrm>
-          <a:prstGeom prst="rect">
-            <a:avLst/>
-          </a:prstGeom>
-          <a:noFill/>
-          <a:ln/>
-        </p:spPr>
-        <p:txBody>
-          <a:bodyPr wrap="square" lIns="0" tIns="0" rIns="0" bIns="0" rtlCol="0" anchor="t"/>
-          <a:lstStyle/>
-          <a:p>
-            <a:pPr indent="0" marL="0">
-              <a:buNone/>
-            </a:pPr>
-            <a:r>
-              <a:rPr lang="en-US" sz="1700" b="1" dirty="0">
+              <a:t>// 할당 실패하면 블록을 하나씩 줄여 재시도한다</a:t>
+            </a:r>
+            <a:endParaRPr lang="en-US" sz="1350" dirty="0"/>
+          </a:p>
+          <a:p>
+            <a:pPr algn="l" indent="0" marL="0">
+              <a:lnSpc>
+                <a:spcPct val="108000"/>
+              </a:lnSpc>
+              <a:buNone/>
+            </a:pPr>
+            <a:r>
+              <a:rPr lang="en-US" sz="1350" dirty="0">
                 <a:solidFill>
                   <a:srgbClr val="E8EDF2"/>
-                </a:solidFill>
-                <a:latin typeface="Malgun Gothic" pitchFamily="34" charset="0"/>
-                <a:ea typeface="Malgun Gothic" pitchFamily="34" charset="-122"/>
-                <a:cs typeface="Malgun Gothic" pitchFamily="34" charset="-120"/>
-              </a:rPr>
-              <a:t>오류가 CPU로 돌아오는 길</a:t>
-            </a:r>
-            <a:endParaRPr lang="en-US" sz="1700" dirty="0"/>
-          </a:p>
-        </p:txBody>
-      </p:sp>
-      <p:sp>
-        <p:nvSpPr>
-          <p:cNvPr id="11" name="Text 9"/>
-          <p:cNvSpPr/>
-          <p:nvPr/>
-        </p:nvSpPr>
-        <p:spPr>
-          <a:xfrm>
-            <a:off x="6565392" y="2651760"/>
-            <a:ext cx="4791456" cy="731520"/>
-          </a:xfrm>
-          <a:prstGeom prst="rect">
-            <a:avLst/>
-          </a:prstGeom>
-          <a:noFill/>
-          <a:ln/>
-        </p:spPr>
-        <p:txBody>
-          <a:bodyPr wrap="square" lIns="0" tIns="0" rIns="0" bIns="0" rtlCol="0" anchor="t"/>
-          <a:lstStyle/>
-          <a:p>
-            <a:pPr indent="0" marL="0">
-              <a:lnSpc>
-                <a:spcPct val="110000"/>
-              </a:lnSpc>
-              <a:buNone/>
-            </a:pPr>
-            <a:r>
-              <a:rPr lang="en-US" sz="1400" dirty="0">
-                <a:solidFill>
-                  <a:srgbClr val="9AA6B2"/>
-                </a:solidFill>
-                <a:latin typeface="Malgun Gothic" pitchFamily="34" charset="0"/>
-                <a:ea typeface="Malgun Gothic" pitchFamily="34" charset="-122"/>
-                <a:cs typeface="Malgun Gothic" pitchFamily="34" charset="-120"/>
-              </a:rPr>
-              <a:t>error_checking의 cudaMemcpy 직후 출력 추가</a:t>
-            </a:r>
-            <a:endParaRPr lang="en-US" sz="1400" dirty="0"/>
-          </a:p>
-        </p:txBody>
-      </p:sp>
-      <p:sp>
-        <p:nvSpPr>
-          <p:cNvPr id="12" name="Shape 10"/>
-          <p:cNvSpPr/>
-          <p:nvPr/>
-        </p:nvSpPr>
-        <p:spPr>
-          <a:xfrm>
-            <a:off x="548640" y="3840480"/>
-            <a:ext cx="5303520" cy="1965960"/>
-          </a:xfrm>
-          <a:prstGeom prst="roundRect">
-            <a:avLst>
-              <a:gd name="adj" fmla="val 3721"/>
-            </a:avLst>
-          </a:prstGeom>
-          <a:solidFill>
-            <a:srgbClr val="1E232C"/>
-          </a:solidFill>
-          <a:ln/>
-        </p:spPr>
-      </p:sp>
-      <p:sp>
-        <p:nvSpPr>
-          <p:cNvPr id="13" name="Text 11"/>
-          <p:cNvSpPr/>
-          <p:nvPr/>
-        </p:nvSpPr>
-        <p:spPr>
-          <a:xfrm>
-            <a:off x="804672" y="4041648"/>
-            <a:ext cx="1188720" cy="502920"/>
-          </a:xfrm>
-          <a:prstGeom prst="roundRect">
-            <a:avLst>
-              <a:gd name="adj" fmla="val 14545"/>
-            </a:avLst>
-          </a:prstGeom>
-          <a:solidFill>
-            <a:srgbClr val="E0A458"/>
-          </a:solidFill>
-          <a:ln/>
-        </p:spPr>
-        <p:txBody>
-          <a:bodyPr wrap="square" rtlCol="0" anchor="ctr"/>
-          <a:lstStyle/>
-          <a:p>
-            <a:pPr algn="ctr" indent="0" marL="0">
-              <a:buNone/>
-            </a:pPr>
-            <a:r>
-              <a:rPr lang="en-US" sz="1700" b="1" dirty="0">
-                <a:solidFill>
-                  <a:srgbClr val="13161C"/>
                 </a:solidFill>
                 <a:latin typeface="Courier New" pitchFamily="34" charset="0"/>
                 <a:ea typeface="Courier New" pitchFamily="34" charset="-122"/>
                 <a:cs typeface="Courier New" pitchFamily="34" charset="-120"/>
               </a:rPr>
-              <a:t>Ex 3</a:t>
-            </a:r>
-            <a:endParaRPr lang="en-US" sz="1700" dirty="0"/>
-          </a:p>
-        </p:txBody>
-      </p:sp>
-      <p:sp>
-        <p:nvSpPr>
-          <p:cNvPr id="14" name="Text 12"/>
-          <p:cNvSpPr/>
-          <p:nvPr/>
-        </p:nvSpPr>
-        <p:spPr>
-          <a:xfrm>
-            <a:off x="2148840" y="4059936"/>
-            <a:ext cx="3474720" cy="822960"/>
-          </a:xfrm>
-          <a:prstGeom prst="rect">
-            <a:avLst/>
-          </a:prstGeom>
-          <a:noFill/>
-          <a:ln/>
-        </p:spPr>
-        <p:txBody>
-          <a:bodyPr wrap="square" lIns="0" tIns="0" rIns="0" bIns="0" rtlCol="0" anchor="t"/>
-          <a:lstStyle/>
-          <a:p>
-            <a:pPr indent="0" marL="0">
-              <a:buNone/>
-            </a:pPr>
-            <a:r>
-              <a:rPr lang="en-US" sz="1700" b="1" dirty="0">
+              <a:t>tot_num_blocks = free / BLOCKSIZE;</a:t>
+            </a:r>
+            <a:endParaRPr lang="en-US" sz="1350" dirty="0"/>
+          </a:p>
+          <a:p>
+            <a:pPr algn="l" indent="0" marL="0">
+              <a:lnSpc>
+                <a:spcPct val="108000"/>
+              </a:lnSpc>
+              <a:buNone/>
+            </a:pPr>
+            <a:r>
+              <a:rPr lang="en-US" sz="1350" dirty="0">
                 <a:solidFill>
                   <a:srgbClr val="E8EDF2"/>
-                </a:solidFill>
-                <a:latin typeface="Malgun Gothic" pitchFamily="34" charset="0"/>
-                <a:ea typeface="Malgun Gothic" pitchFamily="34" charset="-122"/>
-                <a:cs typeface="Malgun Gothic" pitchFamily="34" charset="-120"/>
-              </a:rPr>
-              <a:t>메모리를 훼손해 오류 재현</a:t>
-            </a:r>
-            <a:endParaRPr lang="en-US" sz="1700" dirty="0"/>
-          </a:p>
-        </p:txBody>
-      </p:sp>
-      <p:sp>
-        <p:nvSpPr>
-          <p:cNvPr id="15" name="Text 13"/>
-          <p:cNvSpPr/>
-          <p:nvPr/>
-        </p:nvSpPr>
-        <p:spPr>
-          <a:xfrm>
-            <a:off x="804672" y="4937760"/>
-            <a:ext cx="4791456" cy="731520"/>
-          </a:xfrm>
-          <a:prstGeom prst="rect">
-            <a:avLst/>
-          </a:prstGeom>
-          <a:noFill/>
-          <a:ln/>
-        </p:spPr>
-        <p:txBody>
-          <a:bodyPr wrap="square" lIns="0" tIns="0" rIns="0" bIns="0" rtlCol="0" anchor="t"/>
-          <a:lstStyle/>
-          <a:p>
-            <a:pPr indent="0" marL="0">
-              <a:lnSpc>
-                <a:spcPct val="110000"/>
-              </a:lnSpc>
-              <a:buNone/>
-            </a:pPr>
-            <a:r>
-              <a:rPr lang="en-US" sz="1400" dirty="0">
-                <a:solidFill>
-                  <a:srgbClr val="9AA6B2"/>
-                </a:solidFill>
-                <a:latin typeface="Malgun Gothic" pitchFamily="34" charset="0"/>
-                <a:ea typeface="Malgun Gothic" pitchFamily="34" charset="-122"/>
-                <a:cs typeface="Malgun Gothic" pitchFamily="34" charset="-120"/>
-              </a:rPr>
-              <a:t>읽기 커널에서 비트 하나를 뒤집어 검출 확인</a:t>
-            </a:r>
-            <a:endParaRPr lang="en-US" sz="1400" dirty="0"/>
-          </a:p>
-        </p:txBody>
-      </p:sp>
-      <p:sp>
-        <p:nvSpPr>
-          <p:cNvPr id="16" name="Shape 14"/>
-          <p:cNvSpPr/>
-          <p:nvPr/>
-        </p:nvSpPr>
-        <p:spPr>
-          <a:xfrm>
-            <a:off x="6309360" y="3840480"/>
-            <a:ext cx="5303520" cy="1965960"/>
-          </a:xfrm>
-          <a:prstGeom prst="roundRect">
-            <a:avLst>
-              <a:gd name="adj" fmla="val 3721"/>
-            </a:avLst>
-          </a:prstGeom>
-          <a:solidFill>
-            <a:srgbClr val="1E232C"/>
-          </a:solidFill>
-          <a:ln/>
-        </p:spPr>
-      </p:sp>
-      <p:sp>
-        <p:nvSpPr>
-          <p:cNvPr id="17" name="Text 15"/>
-          <p:cNvSpPr/>
-          <p:nvPr/>
-        </p:nvSpPr>
-        <p:spPr>
-          <a:xfrm>
-            <a:off x="6565392" y="4041648"/>
-            <a:ext cx="1188720" cy="502920"/>
-          </a:xfrm>
-          <a:prstGeom prst="roundRect">
-            <a:avLst>
-              <a:gd name="adj" fmla="val 14545"/>
-            </a:avLst>
-          </a:prstGeom>
-          <a:solidFill>
-            <a:srgbClr val="8CC63F"/>
-          </a:solidFill>
-          <a:ln/>
-        </p:spPr>
-        <p:txBody>
-          <a:bodyPr wrap="square" rtlCol="0" anchor="ctr"/>
-          <a:lstStyle/>
-          <a:p>
-            <a:pPr algn="ctr" indent="0" marL="0">
-              <a:buNone/>
-            </a:pPr>
-            <a:r>
-              <a:rPr lang="en-US" sz="1700" b="1" dirty="0">
-                <a:solidFill>
-                  <a:srgbClr val="13161C"/>
                 </a:solidFill>
                 <a:latin typeface="Courier New" pitchFamily="34" charset="0"/>
                 <a:ea typeface="Courier New" pitchFamily="34" charset="-122"/>
                 <a:cs typeface="Courier New" pitchFamily="34" charset="-120"/>
               </a:rPr>
-              <a:t>Ex 4</a:t>
+              <a:t>do {</a:t>
+            </a:r>
+            <a:endParaRPr lang="en-US" sz="1350" dirty="0"/>
+          </a:p>
+          <a:p>
+            <a:pPr algn="l" indent="0" marL="0">
+              <a:lnSpc>
+                <a:spcPct val="108000"/>
+              </a:lnSpc>
+              <a:buNone/>
+            </a:pPr>
+            <a:r>
+              <a:rPr lang="en-US" sz="1350" dirty="0">
+                <a:solidFill>
+                  <a:srgbClr val="8CC63F"/>
+                </a:solidFill>
+                <a:latin typeface="Courier New" pitchFamily="34" charset="0"/>
+                <a:ea typeface="Courier New" pitchFamily="34" charset="-122"/>
+                <a:cs typeface="Courier New" pitchFamily="34" charset="-120"/>
+              </a:rPr>
+              <a:t>    err = cudaMalloc(&amp;ptr, tot_num_blocks * BLOCKSIZE);</a:t>
+            </a:r>
+            <a:endParaRPr lang="en-US" sz="1350" dirty="0"/>
+          </a:p>
+          <a:p>
+            <a:pPr algn="l" indent="0" marL="0">
+              <a:lnSpc>
+                <a:spcPct val="108000"/>
+              </a:lnSpc>
+              <a:buNone/>
+            </a:pPr>
+            <a:r>
+              <a:rPr lang="en-US" sz="1350" dirty="0">
+                <a:solidFill>
+                  <a:srgbClr val="E0A458"/>
+                </a:solidFill>
+                <a:latin typeface="Courier New" pitchFamily="34" charset="0"/>
+                <a:ea typeface="Courier New" pitchFamily="34" charset="-122"/>
+                <a:cs typeface="Courier New" pitchFamily="34" charset="-120"/>
+              </a:rPr>
+              <a:t>    if (err != cudaSuccess) --tot_num_blocks;   // 줄여서 재시도</a:t>
+            </a:r>
+            <a:endParaRPr lang="en-US" sz="1350" dirty="0"/>
+          </a:p>
+          <a:p>
+            <a:pPr algn="l" indent="0" marL="0">
+              <a:lnSpc>
+                <a:spcPct val="108000"/>
+              </a:lnSpc>
+              <a:buNone/>
+            </a:pPr>
+            <a:r>
+              <a:rPr lang="en-US" sz="1350" dirty="0">
+                <a:solidFill>
+                  <a:srgbClr val="E8EDF2"/>
+                </a:solidFill>
+                <a:latin typeface="Courier New" pitchFamily="34" charset="0"/>
+                <a:ea typeface="Courier New" pitchFamily="34" charset="-122"/>
+                <a:cs typeface="Courier New" pitchFamily="34" charset="-120"/>
+              </a:rPr>
+              <a:t>} while (cudaGetLastError() != cudaSuccess);</a:t>
+            </a:r>
+            <a:endParaRPr lang="en-US" sz="1350" dirty="0"/>
+          </a:p>
+        </p:txBody>
+      </p:sp>
+      <p:sp>
+        <p:nvSpPr>
+          <p:cNvPr id="6" name="Text 4"/>
+          <p:cNvSpPr/>
+          <p:nvPr/>
+        </p:nvSpPr>
+        <p:spPr>
+          <a:xfrm>
+            <a:off x="548640" y="4434840"/>
+            <a:ext cx="11064240" cy="914400"/>
+          </a:xfrm>
+          <a:prstGeom prst="rect">
+            <a:avLst/>
+          </a:prstGeom>
+          <a:noFill/>
+          <a:ln/>
+        </p:spPr>
+        <p:txBody>
+          <a:bodyPr wrap="square" lIns="0" tIns="0" rIns="0" bIns="0" rtlCol="0" anchor="t"/>
+          <a:lstStyle/>
+          <a:p>
+            <a:pPr indent="0" marL="0">
+              <a:buNone/>
+            </a:pPr>
+            <a:r>
+              <a:rPr lang="en-US" sz="1700" dirty="0">
+                <a:solidFill>
+                  <a:srgbClr val="E8EDF2"/>
+                </a:solidFill>
+                <a:latin typeface="Malgun Gothic" pitchFamily="34" charset="0"/>
+                <a:ea typeface="Malgun Gothic" pitchFamily="34" charset="-122"/>
+                <a:cs typeface="Malgun Gothic" pitchFamily="34" charset="-120"/>
+              </a:rPr>
+              <a:t>드라이버가 보고한 여유 메모리를 다 할당하지 못할 때가 있습니다. 실전 코드는 </a:t>
+            </a:r>
+            <a:pPr indent="0" marL="0">
+              <a:buNone/>
+            </a:pPr>
+            <a:r>
+              <a:rPr lang="en-US" sz="1700" b="1" dirty="0">
+                <a:solidFill>
+                  <a:srgbClr val="8CC63F"/>
+                </a:solidFill>
+                <a:latin typeface="Malgun Gothic" pitchFamily="34" charset="0"/>
+                <a:ea typeface="Malgun Gothic" pitchFamily="34" charset="-122"/>
+                <a:cs typeface="Malgun Gothic" pitchFamily="34" charset="-120"/>
+              </a:rPr>
+              <a:t>실패를 가정하고 우아하게 물러섭니다</a:t>
+            </a:r>
+            <a:pPr indent="0" marL="0">
+              <a:buNone/>
+            </a:pPr>
+            <a:r>
+              <a:rPr lang="en-US" sz="1700" dirty="0">
+                <a:solidFill>
+                  <a:srgbClr val="E8EDF2"/>
+                </a:solidFill>
+                <a:latin typeface="Malgun Gothic" pitchFamily="34" charset="0"/>
+                <a:ea typeface="Malgun Gothic" pitchFamily="34" charset="-122"/>
+                <a:cs typeface="Malgun Gothic" pitchFamily="34" charset="-120"/>
+              </a:rPr>
+              <a:t>. 장난감 예제와 프로덕션 코드의 차이입니다.</a:t>
             </a:r>
             <a:endParaRPr lang="en-US" sz="1700" dirty="0"/>
           </a:p>
@@ -3239,72 +3216,30 @@
       </p:sp>
       <p:sp>
         <p:nvSpPr>
-          <p:cNvPr id="18" name="Text 16"/>
-          <p:cNvSpPr/>
-          <p:nvPr/>
-        </p:nvSpPr>
-        <p:spPr>
-          <a:xfrm>
-            <a:off x="7909560" y="4059936"/>
-            <a:ext cx="3474720" cy="822960"/>
-          </a:xfrm>
-          <a:prstGeom prst="rect">
-            <a:avLst/>
-          </a:prstGeom>
-          <a:noFill/>
-          <a:ln/>
-        </p:spPr>
-        <p:txBody>
-          <a:bodyPr wrap="square" lIns="0" tIns="0" rIns="0" bIns="0" rtlCol="0" anchor="t"/>
+          <p:cNvPr id="7" name="Text 5"/>
+          <p:cNvSpPr/>
+          <p:nvPr/>
+        </p:nvSpPr>
+        <p:spPr>
+          <a:xfrm>
+            <a:off x="548640" y="5486400"/>
+            <a:ext cx="11064240" cy="457200"/>
+          </a:xfrm>
+          <a:prstGeom prst="rect">
+            <a:avLst/>
+          </a:prstGeom>
+          <a:noFill/>
+          <a:ln/>
+        </p:spPr>
+        <p:txBody>
+          <a:bodyPr wrap="square" lIns="0" tIns="0" rIns="0" bIns="0" rtlCol="0" anchor="ctr"/>
           <a:lstStyle/>
           <a:p>
             <a:pPr indent="0" marL="0">
               <a:buNone/>
             </a:pPr>
             <a:r>
-              <a:rPr lang="en-US" sz="1700" b="1" dirty="0">
-                <a:solidFill>
-                  <a:srgbClr val="E8EDF2"/>
-                </a:solidFill>
-                <a:latin typeface="Malgun Gothic" pitchFamily="34" charset="0"/>
-                <a:ea typeface="Malgun Gothic" pitchFamily="34" charset="-122"/>
-                <a:cs typeface="Malgun Gothic" pitchFamily="34" charset="-120"/>
-              </a:rPr>
-              <a:t>디바이스 버퍼 할당 보기</a:t>
-            </a:r>
-            <a:endParaRPr lang="en-US" sz="1700" dirty="0"/>
-          </a:p>
-        </p:txBody>
-      </p:sp>
-      <p:sp>
-        <p:nvSpPr>
-          <p:cNvPr id="19" name="Text 17"/>
-          <p:cNvSpPr/>
-          <p:nvPr/>
-        </p:nvSpPr>
-        <p:spPr>
-          <a:xfrm>
-            <a:off x="6565392" y="4937760"/>
-            <a:ext cx="4791456" cy="731520"/>
-          </a:xfrm>
-          <a:prstGeom prst="rect">
-            <a:avLst/>
-          </a:prstGeom>
-          <a:noFill/>
-          <a:ln/>
-        </p:spPr>
-        <p:txBody>
-          <a:bodyPr wrap="square" lIns="0" tIns="0" rIns="0" bIns="0" rtlCol="0" anchor="t"/>
-          <a:lstStyle/>
-          <a:p>
-            <a:pPr indent="0" marL="0">
-              <a:lnSpc>
-                <a:spcPct val="110000"/>
-              </a:lnSpc>
-              <a:buNone/>
-            </a:pPr>
-            <a:r>
-              <a:rPr lang="en-US" sz="1400" dirty="0">
+              <a:rPr lang="en-US" sz="1400" i="1" dirty="0">
                 <a:solidFill>
                   <a:srgbClr val="9AA6B2"/>
                 </a:solidFill>
@@ -3312,7 +3247,7 @@
                 <a:ea typeface="Malgun Gothic" pitchFamily="34" charset="-122"/>
                 <a:cs typeface="Malgun Gothic" pitchFamily="34" charset="-120"/>
               </a:rPr>
-              <a:t>allocate_small_mem의 cudaMalloc/Memset 관찰</a:t>
+              <a:t>cudaMemGetInfo로 여유 메모리를 조회 → BLOCKSIZE(1 MB)로 나눠 블록 수 결정.</a:t>
             </a:r>
             <a:endParaRPr lang="en-US" sz="1400" dirty="0"/>
           </a:p>
@@ -3387,7 +3322,7 @@
                 <a:ea typeface="Courier New" pitchFamily="34" charset="-122"/>
                 <a:cs typeface="Courier New" pitchFamily="34" charset="-120"/>
               </a:rPr>
-              <a:t>10</a:t>
+              <a:t>9</a:t>
             </a:r>
             <a:endParaRPr lang="en-US" sz="2200" dirty="0"/>
           </a:p>
@@ -3426,7 +3361,7 @@
                 <a:ea typeface="Malgun Gothic" pitchFamily="34" charset="-122"/>
                 <a:cs typeface="Malgun Gothic" pitchFamily="34" charset="-120"/>
               </a:rPr>
-              <a:t>핵심 정리 &amp; 자주 하는 실수</a:t>
+              <a:t>실습 미리보기 · Lab 2</a:t>
             </a:r>
             <a:endParaRPr lang="en-US" sz="3000" dirty="0"/>
           </a:p>
@@ -3440,12 +3375,12 @@
         </p:nvSpPr>
         <p:spPr>
           <a:xfrm>
-            <a:off x="548640" y="1600200"/>
-            <a:ext cx="5349240" cy="4114800"/>
+            <a:off x="548640" y="1554480"/>
+            <a:ext cx="5303520" cy="1965960"/>
           </a:xfrm>
           <a:prstGeom prst="roundRect">
             <a:avLst>
-              <a:gd name="adj" fmla="val 1778"/>
+              <a:gd name="adj" fmla="val 3721"/>
             </a:avLst>
           </a:prstGeom>
           <a:solidFill>
@@ -3462,154 +3397,136 @@
         </p:nvSpPr>
         <p:spPr>
           <a:xfrm>
-            <a:off x="822960" y="1828800"/>
-            <a:ext cx="4800600" cy="457200"/>
-          </a:xfrm>
-          <a:prstGeom prst="rect">
-            <a:avLst/>
-          </a:prstGeom>
-          <a:noFill/>
-          <a:ln/>
-        </p:spPr>
-        <p:txBody>
-          <a:bodyPr wrap="square" lIns="0" tIns="0" rIns="0" bIns="0" rtlCol="0" anchor="ctr"/>
-          <a:lstStyle/>
-          <a:p>
-            <a:pPr indent="0" marL="0">
-              <a:buNone/>
-            </a:pPr>
-            <a:r>
-              <a:rPr lang="en-US" sz="2000" b="1" dirty="0">
-                <a:solidFill>
-                  <a:srgbClr val="8CC63F"/>
-                </a:solidFill>
-                <a:latin typeface="Malgun Gothic" pitchFamily="34" charset="0"/>
-                <a:ea typeface="Malgun Gothic" pitchFamily="34" charset="-122"/>
-                <a:cs typeface="Malgun Gothic" pitchFamily="34" charset="-120"/>
-              </a:rPr>
-              <a:t>기억할 것</a:t>
-            </a:r>
-            <a:endParaRPr lang="en-US" sz="2000" dirty="0"/>
-          </a:p>
-        </p:txBody>
-      </p:sp>
-      <p:sp>
-        <p:nvSpPr>
-          <p:cNvPr id="6" name="Text 4"/>
-          <p:cNvSpPr/>
-          <p:nvPr/>
-        </p:nvSpPr>
-        <p:spPr>
-          <a:xfrm>
-            <a:off x="822960" y="2423160"/>
-            <a:ext cx="4800600" cy="3108960"/>
-          </a:xfrm>
-          <a:prstGeom prst="rect">
-            <a:avLst/>
-          </a:prstGeom>
-          <a:noFill/>
-          <a:ln/>
-        </p:spPr>
-        <p:txBody>
-          <a:bodyPr wrap="square" lIns="0" tIns="0" rIns="0" bIns="0" rtlCol="0" anchor="t"/>
-          <a:lstStyle/>
-          <a:p>
-            <a:pPr marL="342900" indent="-342900">
-              <a:spcAft>
-                <a:spcPts val="1200"/>
-              </a:spcAft>
-              <a:buSzPct val="100000"/>
-              <a:buChar char="✓"/>
-            </a:pPr>
-            <a:r>
-              <a:rPr lang="en-US" sz="1550" dirty="0">
-                <a:solidFill>
-                  <a:srgbClr val="E8EDF2"/>
-                </a:solidFill>
-                <a:latin typeface="Malgun Gothic" pitchFamily="34" charset="0"/>
-                <a:ea typeface="Malgun Gothic" pitchFamily="34" charset="-122"/>
-                <a:cs typeface="Malgun Gothic" pitchFamily="34" charset="-120"/>
-              </a:rPr>
-              <a:t>Malloc(할당)·Memset(초기화)·Memcpy(복사)</a:t>
-            </a:r>
-            <a:endParaRPr lang="en-US" sz="1550" dirty="0"/>
-          </a:p>
-          <a:p>
-            <a:pPr marL="342900" indent="-342900">
-              <a:spcAft>
-                <a:spcPts val="1200"/>
-              </a:spcAft>
-              <a:buSzPct val="100000"/>
-              <a:buChar char="✓"/>
-            </a:pPr>
-            <a:r>
-              <a:rPr lang="en-US" sz="1550" dirty="0">
-                <a:solidFill>
-                  <a:srgbClr val="E8EDF2"/>
-                </a:solidFill>
-                <a:latin typeface="Malgun Gothic" pitchFamily="34" charset="0"/>
-                <a:ea typeface="Malgun Gothic" pitchFamily="34" charset="-122"/>
-                <a:cs typeface="Malgun Gothic" pitchFamily="34" charset="-120"/>
-              </a:rPr>
-              <a:t>Memcpy 방향: DeviceToHost = GPU→CPU</a:t>
-            </a:r>
-            <a:endParaRPr lang="en-US" sz="1550" dirty="0"/>
-          </a:p>
-          <a:p>
-            <a:pPr marL="342900" indent="-342900">
-              <a:spcAft>
-                <a:spcPts val="1200"/>
-              </a:spcAft>
-              <a:buSzPct val="100000"/>
-              <a:buChar char="✓"/>
-            </a:pPr>
-            <a:r>
-              <a:rPr lang="en-US" sz="1550" dirty="0">
-                <a:solidFill>
-                  <a:srgbClr val="E8EDF2"/>
-                </a:solidFill>
-                <a:latin typeface="Malgun Gothic" pitchFamily="34" charset="0"/>
-                <a:ea typeface="Malgun Gothic" pitchFamily="34" charset="-122"/>
-                <a:cs typeface="Malgun Gothic" pitchFamily="34" charset="-120"/>
-              </a:rPr>
-              <a:t>쓰기 커널 종료 = 메모리 반영 보장</a:t>
-            </a:r>
-            <a:endParaRPr lang="en-US" sz="1550" dirty="0"/>
-          </a:p>
-          <a:p>
-            <a:pPr marL="342900" indent="-342900">
-              <a:buSzPct val="100000"/>
-              <a:buChar char="✓"/>
-            </a:pPr>
-            <a:r>
-              <a:rPr lang="en-US" sz="1550" dirty="0">
-                <a:solidFill>
-                  <a:srgbClr val="E8EDF2"/>
-                </a:solidFill>
-                <a:latin typeface="Malgun Gothic" pitchFamily="34" charset="0"/>
-                <a:ea typeface="Malgun Gothic" pitchFamily="34" charset="-122"/>
-                <a:cs typeface="Malgun Gothic" pitchFamily="34" charset="-120"/>
-              </a:rPr>
-              <a:t>이동 반전: p1 → p2(보수) 양방향 검사</a:t>
-            </a:r>
-            <a:endParaRPr lang="en-US" sz="1550" dirty="0"/>
-          </a:p>
-        </p:txBody>
-      </p:sp>
-      <p:sp>
-        <p:nvSpPr>
-          <p:cNvPr id="7" name="Shape 5"/>
-          <p:cNvSpPr/>
-          <p:nvPr/>
-        </p:nvSpPr>
-        <p:spPr>
-          <a:xfrm>
-            <a:off x="6263640" y="1600200"/>
-            <a:ext cx="5349240" cy="4114800"/>
+            <a:off x="804672" y="1755648"/>
+            <a:ext cx="1188720" cy="502920"/>
           </a:xfrm>
           <a:prstGeom prst="roundRect">
             <a:avLst>
-              <a:gd name="adj" fmla="val 1778"/>
+              <a:gd name="adj" fmla="val 14545"/>
+            </a:avLst>
+          </a:prstGeom>
+          <a:solidFill>
+            <a:srgbClr val="8CC63F"/>
+          </a:solidFill>
+          <a:ln/>
+        </p:spPr>
+        <p:txBody>
+          <a:bodyPr wrap="square" rtlCol="0" anchor="ctr"/>
+          <a:lstStyle/>
+          <a:p>
+            <a:pPr algn="ctr" indent="0" marL="0">
+              <a:buNone/>
+            </a:pPr>
+            <a:r>
+              <a:rPr lang="en-US" sz="1700" b="1" dirty="0">
+                <a:solidFill>
+                  <a:srgbClr val="13161C"/>
+                </a:solidFill>
+                <a:latin typeface="Courier New" pitchFamily="34" charset="0"/>
+                <a:ea typeface="Courier New" pitchFamily="34" charset="-122"/>
+                <a:cs typeface="Courier New" pitchFamily="34" charset="-120"/>
+              </a:rPr>
+              <a:t>Ex 1</a:t>
+            </a:r>
+            <a:endParaRPr lang="en-US" sz="1700" dirty="0"/>
+          </a:p>
+        </p:txBody>
+      </p:sp>
+      <p:sp>
+        <p:nvSpPr>
+          <p:cNvPr id="6" name="Text 4"/>
+          <p:cNvSpPr/>
+          <p:nvPr/>
+        </p:nvSpPr>
+        <p:spPr>
+          <a:xfrm>
+            <a:off x="2148840" y="1773936"/>
+            <a:ext cx="3474720" cy="822960"/>
+          </a:xfrm>
+          <a:prstGeom prst="rect">
+            <a:avLst/>
+          </a:prstGeom>
+          <a:noFill/>
+          <a:ln/>
+        </p:spPr>
+        <p:txBody>
+          <a:bodyPr wrap="square" lIns="0" tIns="0" rIns="0" bIns="0" rtlCol="0" anchor="t"/>
+          <a:lstStyle/>
+          <a:p>
+            <a:pPr indent="0" marL="0">
+              <a:buNone/>
+            </a:pPr>
+            <a:r>
+              <a:rPr lang="en-US" sz="1700" b="1" dirty="0">
+                <a:solidFill>
+                  <a:srgbClr val="E8EDF2"/>
+                </a:solidFill>
+                <a:latin typeface="Malgun Gothic" pitchFamily="34" charset="0"/>
+                <a:ea typeface="Malgun Gothic" pitchFamily="34" charset="-122"/>
+                <a:cs typeface="Malgun Gothic" pitchFamily="34" charset="-120"/>
+              </a:rPr>
+              <a:t>세 커널의 협업 보기</a:t>
+            </a:r>
+            <a:endParaRPr lang="en-US" sz="1700" dirty="0"/>
+          </a:p>
+        </p:txBody>
+      </p:sp>
+      <p:sp>
+        <p:nvSpPr>
+          <p:cNvPr id="7" name="Text 5"/>
+          <p:cNvSpPr/>
+          <p:nvPr/>
+        </p:nvSpPr>
+        <p:spPr>
+          <a:xfrm>
+            <a:off x="804672" y="2651760"/>
+            <a:ext cx="4791456" cy="731520"/>
+          </a:xfrm>
+          <a:prstGeom prst="rect">
+            <a:avLst/>
+          </a:prstGeom>
+          <a:noFill/>
+          <a:ln/>
+        </p:spPr>
+        <p:txBody>
+          <a:bodyPr wrap="square" lIns="0" tIns="0" rIns="0" bIns="0" rtlCol="0" anchor="t"/>
+          <a:lstStyle/>
+          <a:p>
+            <a:pPr indent="0" marL="0">
+              <a:lnSpc>
+                <a:spcPct val="110000"/>
+              </a:lnSpc>
+              <a:buNone/>
+            </a:pPr>
+            <a:r>
+              <a:rPr lang="en-US" sz="1400" dirty="0">
+                <a:solidFill>
+                  <a:srgbClr val="9AA6B2"/>
+                </a:solidFill>
+                <a:latin typeface="Malgun Gothic" pitchFamily="34" charset="0"/>
+                <a:ea typeface="Malgun Gothic" pitchFamily="34" charset="-122"/>
+                <a:cs typeface="Malgun Gothic" pitchFamily="34" charset="-120"/>
+              </a:rPr>
+              <a:t>--verbose --verbose 로 write→readwrite→read 순서 확인</a:t>
+            </a:r>
+            <a:endParaRPr lang="en-US" sz="1400" dirty="0"/>
+          </a:p>
+        </p:txBody>
+      </p:sp>
+      <p:sp>
+        <p:nvSpPr>
+          <p:cNvPr id="8" name="Shape 6"/>
+          <p:cNvSpPr/>
+          <p:nvPr/>
+        </p:nvSpPr>
+        <p:spPr>
+          <a:xfrm>
+            <a:off x="6309360" y="1554480"/>
+            <a:ext cx="5303520" cy="1965960"/>
+          </a:xfrm>
+          <a:prstGeom prst="roundRect">
+            <a:avLst>
+              <a:gd name="adj" fmla="val 3721"/>
             </a:avLst>
           </a:prstGeom>
           <a:solidFill>
@@ -3620,53 +3537,96 @@
       </p:sp>
       <p:sp>
         <p:nvSpPr>
-          <p:cNvPr id="8" name="Text 6"/>
-          <p:cNvSpPr/>
-          <p:nvPr/>
-        </p:nvSpPr>
-        <p:spPr>
-          <a:xfrm>
-            <a:off x="6537960" y="1828800"/>
-            <a:ext cx="4800600" cy="457200"/>
-          </a:xfrm>
-          <a:prstGeom prst="rect">
-            <a:avLst/>
-          </a:prstGeom>
-          <a:noFill/>
-          <a:ln/>
-        </p:spPr>
-        <p:txBody>
-          <a:bodyPr wrap="square" lIns="0" tIns="0" rIns="0" bIns="0" rtlCol="0" anchor="ctr"/>
+          <p:cNvPr id="9" name="Text 7"/>
+          <p:cNvSpPr/>
+          <p:nvPr/>
+        </p:nvSpPr>
+        <p:spPr>
+          <a:xfrm>
+            <a:off x="6565392" y="1755648"/>
+            <a:ext cx="1188720" cy="502920"/>
+          </a:xfrm>
+          <a:prstGeom prst="roundRect">
+            <a:avLst>
+              <a:gd name="adj" fmla="val 14545"/>
+            </a:avLst>
+          </a:prstGeom>
+          <a:solidFill>
+            <a:srgbClr val="4FB0C6"/>
+          </a:solidFill>
+          <a:ln/>
+        </p:spPr>
+        <p:txBody>
+          <a:bodyPr wrap="square" rtlCol="0" anchor="ctr"/>
+          <a:lstStyle/>
+          <a:p>
+            <a:pPr algn="ctr" indent="0" marL="0">
+              <a:buNone/>
+            </a:pPr>
+            <a:r>
+              <a:rPr lang="en-US" sz="1700" b="1" dirty="0">
+                <a:solidFill>
+                  <a:srgbClr val="13161C"/>
+                </a:solidFill>
+                <a:latin typeface="Courier New" pitchFamily="34" charset="0"/>
+                <a:ea typeface="Courier New" pitchFamily="34" charset="-122"/>
+                <a:cs typeface="Courier New" pitchFamily="34" charset="-120"/>
+              </a:rPr>
+              <a:t>Ex 2</a:t>
+            </a:r>
+            <a:endParaRPr lang="en-US" sz="1700" dirty="0"/>
+          </a:p>
+        </p:txBody>
+      </p:sp>
+      <p:sp>
+        <p:nvSpPr>
+          <p:cNvPr id="10" name="Text 8"/>
+          <p:cNvSpPr/>
+          <p:nvPr/>
+        </p:nvSpPr>
+        <p:spPr>
+          <a:xfrm>
+            <a:off x="7909560" y="1773936"/>
+            <a:ext cx="3474720" cy="822960"/>
+          </a:xfrm>
+          <a:prstGeom prst="rect">
+            <a:avLst/>
+          </a:prstGeom>
+          <a:noFill/>
+          <a:ln/>
+        </p:spPr>
+        <p:txBody>
+          <a:bodyPr wrap="square" lIns="0" tIns="0" rIns="0" bIns="0" rtlCol="0" anchor="t"/>
           <a:lstStyle/>
           <a:p>
             <a:pPr indent="0" marL="0">
               <a:buNone/>
             </a:pPr>
             <a:r>
-              <a:rPr lang="en-US" sz="2000" b="1" dirty="0">
-                <a:solidFill>
-                  <a:srgbClr val="E0A458"/>
-                </a:solidFill>
-                <a:latin typeface="Malgun Gothic" pitchFamily="34" charset="0"/>
-                <a:ea typeface="Malgun Gothic" pitchFamily="34" charset="-122"/>
-                <a:cs typeface="Malgun Gothic" pitchFamily="34" charset="-120"/>
-              </a:rPr>
-              <a:t>입문자 함정</a:t>
-            </a:r>
-            <a:endParaRPr lang="en-US" sz="2000" dirty="0"/>
-          </a:p>
-        </p:txBody>
-      </p:sp>
-      <p:sp>
-        <p:nvSpPr>
-          <p:cNvPr id="9" name="Text 7"/>
-          <p:cNvSpPr/>
-          <p:nvPr/>
-        </p:nvSpPr>
-        <p:spPr>
-          <a:xfrm>
-            <a:off x="6537960" y="2423160"/>
-            <a:ext cx="4800600" cy="3108960"/>
+              <a:rPr lang="en-US" sz="1700" b="1" dirty="0">
+                <a:solidFill>
+                  <a:srgbClr val="E8EDF2"/>
+                </a:solidFill>
+                <a:latin typeface="Malgun Gothic" pitchFamily="34" charset="0"/>
+                <a:ea typeface="Malgun Gothic" pitchFamily="34" charset="-122"/>
+                <a:cs typeface="Malgun Gothic" pitchFamily="34" charset="-120"/>
+              </a:rPr>
+              <a:t>오류가 CPU로 돌아오는 길</a:t>
+            </a:r>
+            <a:endParaRPr lang="en-US" sz="1700" dirty="0"/>
+          </a:p>
+        </p:txBody>
+      </p:sp>
+      <p:sp>
+        <p:nvSpPr>
+          <p:cNvPr id="11" name="Text 9"/>
+          <p:cNvSpPr/>
+          <p:nvPr/>
+        </p:nvSpPr>
+        <p:spPr>
+          <a:xfrm>
+            <a:off x="6565392" y="2651760"/>
+            <a:ext cx="4791456" cy="731520"/>
           </a:xfrm>
           <a:prstGeom prst="rect">
             <a:avLst/>
@@ -3678,15 +3638,118 @@
           <a:bodyPr wrap="square" lIns="0" tIns="0" rIns="0" bIns="0" rtlCol="0" anchor="t"/>
           <a:lstStyle/>
           <a:p>
-            <a:pPr marL="342900" indent="-342900">
-              <a:spcAft>
-                <a:spcPts val="1200"/>
-              </a:spcAft>
-              <a:buSzPct val="100000"/>
-              <a:buChar char="✗"/>
-            </a:pPr>
-            <a:r>
-              <a:rPr lang="en-US" sz="1550" dirty="0">
+            <a:pPr indent="0" marL="0">
+              <a:lnSpc>
+                <a:spcPct val="110000"/>
+              </a:lnSpc>
+              <a:buNone/>
+            </a:pPr>
+            <a:r>
+              <a:rPr lang="en-US" sz="1400" dirty="0">
+                <a:solidFill>
+                  <a:srgbClr val="9AA6B2"/>
+                </a:solidFill>
+                <a:latin typeface="Malgun Gothic" pitchFamily="34" charset="0"/>
+                <a:ea typeface="Malgun Gothic" pitchFamily="34" charset="-122"/>
+                <a:cs typeface="Malgun Gothic" pitchFamily="34" charset="-120"/>
+              </a:rPr>
+              <a:t>error_checking의 cudaMemcpy 직후 출력 추가</a:t>
+            </a:r>
+            <a:endParaRPr lang="en-US" sz="1400" dirty="0"/>
+          </a:p>
+        </p:txBody>
+      </p:sp>
+      <p:sp>
+        <p:nvSpPr>
+          <p:cNvPr id="12" name="Shape 10"/>
+          <p:cNvSpPr/>
+          <p:nvPr/>
+        </p:nvSpPr>
+        <p:spPr>
+          <a:xfrm>
+            <a:off x="548640" y="3840480"/>
+            <a:ext cx="5303520" cy="1965960"/>
+          </a:xfrm>
+          <a:prstGeom prst="roundRect">
+            <a:avLst>
+              <a:gd name="adj" fmla="val 3721"/>
+            </a:avLst>
+          </a:prstGeom>
+          <a:solidFill>
+            <a:srgbClr val="1E232C"/>
+          </a:solidFill>
+          <a:ln/>
+        </p:spPr>
+      </p:sp>
+      <p:sp>
+        <p:nvSpPr>
+          <p:cNvPr id="13" name="Text 11"/>
+          <p:cNvSpPr/>
+          <p:nvPr/>
+        </p:nvSpPr>
+        <p:spPr>
+          <a:xfrm>
+            <a:off x="804672" y="4041648"/>
+            <a:ext cx="1188720" cy="502920"/>
+          </a:xfrm>
+          <a:prstGeom prst="roundRect">
+            <a:avLst>
+              <a:gd name="adj" fmla="val 14545"/>
+            </a:avLst>
+          </a:prstGeom>
+          <a:solidFill>
+            <a:srgbClr val="E0A458"/>
+          </a:solidFill>
+          <a:ln/>
+        </p:spPr>
+        <p:txBody>
+          <a:bodyPr wrap="square" rtlCol="0" anchor="ctr"/>
+          <a:lstStyle/>
+          <a:p>
+            <a:pPr algn="ctr" indent="0" marL="0">
+              <a:buNone/>
+            </a:pPr>
+            <a:r>
+              <a:rPr lang="en-US" sz="1700" b="1" dirty="0">
+                <a:solidFill>
+                  <a:srgbClr val="13161C"/>
+                </a:solidFill>
+                <a:latin typeface="Courier New" pitchFamily="34" charset="0"/>
+                <a:ea typeface="Courier New" pitchFamily="34" charset="-122"/>
+                <a:cs typeface="Courier New" pitchFamily="34" charset="-120"/>
+              </a:rPr>
+              <a:t>Ex 3</a:t>
+            </a:r>
+            <a:endParaRPr lang="en-US" sz="1700" dirty="0"/>
+          </a:p>
+        </p:txBody>
+      </p:sp>
+      <p:sp>
+        <p:nvSpPr>
+          <p:cNvPr id="14" name="Text 12"/>
+          <p:cNvSpPr/>
+          <p:nvPr/>
+        </p:nvSpPr>
+        <p:spPr>
+          <a:xfrm>
+            <a:off x="2148840" y="4059936"/>
+            <a:ext cx="3474720" cy="822960"/>
+          </a:xfrm>
+          <a:prstGeom prst="rect">
+            <a:avLst/>
+          </a:prstGeom>
+          <a:noFill/>
+          <a:ln/>
+        </p:spPr>
+        <p:txBody>
+          <a:bodyPr wrap="square" lIns="0" tIns="0" rIns="0" bIns="0" rtlCol="0" anchor="t"/>
+          <a:lstStyle/>
+          <a:p>
+            <a:pPr indent="0" marL="0">
+              <a:buNone/>
+            </a:pPr>
+            <a:r>
+              <a:rPr lang="en-US" sz="1700" b="1" dirty="0">
                 <a:solidFill>
                   <a:srgbClr val="E8EDF2"/>
                 </a:solidFill>
@@ -3694,20 +3757,145 @@
                 <a:ea typeface="Malgun Gothic" pitchFamily="34" charset="-122"/>
                 <a:cs typeface="Malgun Gothic" pitchFamily="34" charset="-120"/>
               </a:rPr>
-              <a:t>디바이스 포인터를 CPU에서 *ptr로 역참조 → 오류</a:t>
-            </a:r>
-            <a:endParaRPr lang="en-US" sz="1550" dirty="0"/>
-          </a:p>
-          <a:p>
-            <a:pPr marL="342900" indent="-342900">
-              <a:spcAft>
-                <a:spcPts val="1200"/>
-              </a:spcAft>
-              <a:buSzPct val="100000"/>
-              <a:buChar char="✗"/>
-            </a:pPr>
-            <a:r>
-              <a:rPr lang="en-US" sz="1550" dirty="0">
+              <a:t>메모리를 훼손해 오류 재현</a:t>
+            </a:r>
+            <a:endParaRPr lang="en-US" sz="1700" dirty="0"/>
+          </a:p>
+        </p:txBody>
+      </p:sp>
+      <p:sp>
+        <p:nvSpPr>
+          <p:cNvPr id="15" name="Text 13"/>
+          <p:cNvSpPr/>
+          <p:nvPr/>
+        </p:nvSpPr>
+        <p:spPr>
+          <a:xfrm>
+            <a:off x="804672" y="4937760"/>
+            <a:ext cx="4791456" cy="731520"/>
+          </a:xfrm>
+          <a:prstGeom prst="rect">
+            <a:avLst/>
+          </a:prstGeom>
+          <a:noFill/>
+          <a:ln/>
+        </p:spPr>
+        <p:txBody>
+          <a:bodyPr wrap="square" lIns="0" tIns="0" rIns="0" bIns="0" rtlCol="0" anchor="t"/>
+          <a:lstStyle/>
+          <a:p>
+            <a:pPr indent="0" marL="0">
+              <a:lnSpc>
+                <a:spcPct val="110000"/>
+              </a:lnSpc>
+              <a:buNone/>
+            </a:pPr>
+            <a:r>
+              <a:rPr lang="en-US" sz="1400" dirty="0">
+                <a:solidFill>
+                  <a:srgbClr val="9AA6B2"/>
+                </a:solidFill>
+                <a:latin typeface="Malgun Gothic" pitchFamily="34" charset="0"/>
+                <a:ea typeface="Malgun Gothic" pitchFamily="34" charset="-122"/>
+                <a:cs typeface="Malgun Gothic" pitchFamily="34" charset="-120"/>
+              </a:rPr>
+              <a:t>읽기 커널에서 비트 하나를 뒤집어 검출 확인</a:t>
+            </a:r>
+            <a:endParaRPr lang="en-US" sz="1400" dirty="0"/>
+          </a:p>
+        </p:txBody>
+      </p:sp>
+      <p:sp>
+        <p:nvSpPr>
+          <p:cNvPr id="16" name="Shape 14"/>
+          <p:cNvSpPr/>
+          <p:nvPr/>
+        </p:nvSpPr>
+        <p:spPr>
+          <a:xfrm>
+            <a:off x="6309360" y="3840480"/>
+            <a:ext cx="5303520" cy="1965960"/>
+          </a:xfrm>
+          <a:prstGeom prst="roundRect">
+            <a:avLst>
+              <a:gd name="adj" fmla="val 3721"/>
+            </a:avLst>
+          </a:prstGeom>
+          <a:solidFill>
+            <a:srgbClr val="1E232C"/>
+          </a:solidFill>
+          <a:ln/>
+        </p:spPr>
+      </p:sp>
+      <p:sp>
+        <p:nvSpPr>
+          <p:cNvPr id="17" name="Text 15"/>
+          <p:cNvSpPr/>
+          <p:nvPr/>
+        </p:nvSpPr>
+        <p:spPr>
+          <a:xfrm>
+            <a:off x="6565392" y="4041648"/>
+            <a:ext cx="1188720" cy="502920"/>
+          </a:xfrm>
+          <a:prstGeom prst="roundRect">
+            <a:avLst>
+              <a:gd name="adj" fmla="val 14545"/>
+            </a:avLst>
+          </a:prstGeom>
+          <a:solidFill>
+            <a:srgbClr val="8CC63F"/>
+          </a:solidFill>
+          <a:ln/>
+        </p:spPr>
+        <p:txBody>
+          <a:bodyPr wrap="square" rtlCol="0" anchor="ctr"/>
+          <a:lstStyle/>
+          <a:p>
+            <a:pPr algn="ctr" indent="0" marL="0">
+              <a:buNone/>
+            </a:pPr>
+            <a:r>
+              <a:rPr lang="en-US" sz="1700" b="1" dirty="0">
+                <a:solidFill>
+                  <a:srgbClr val="13161C"/>
+                </a:solidFill>
+                <a:latin typeface="Courier New" pitchFamily="34" charset="0"/>
+                <a:ea typeface="Courier New" pitchFamily="34" charset="-122"/>
+                <a:cs typeface="Courier New" pitchFamily="34" charset="-120"/>
+              </a:rPr>
+              <a:t>Ex 4</a:t>
+            </a:r>
+            <a:endParaRPr lang="en-US" sz="1700" dirty="0"/>
+          </a:p>
+        </p:txBody>
+      </p:sp>
+      <p:sp>
+        <p:nvSpPr>
+          <p:cNvPr id="18" name="Text 16"/>
+          <p:cNvSpPr/>
+          <p:nvPr/>
+        </p:nvSpPr>
+        <p:spPr>
+          <a:xfrm>
+            <a:off x="7909560" y="4059936"/>
+            <a:ext cx="3474720" cy="822960"/>
+          </a:xfrm>
+          <a:prstGeom prst="rect">
+            <a:avLst/>
+          </a:prstGeom>
+          <a:noFill/>
+          <a:ln/>
+        </p:spPr>
+        <p:txBody>
+          <a:bodyPr wrap="square" lIns="0" tIns="0" rIns="0" bIns="0" rtlCol="0" anchor="t"/>
+          <a:lstStyle/>
+          <a:p>
+            <a:pPr indent="0" marL="0">
+              <a:buNone/>
+            </a:pPr>
+            <a:r>
+              <a:rPr lang="en-US" sz="1700" b="1" dirty="0">
                 <a:solidFill>
                   <a:srgbClr val="E8EDF2"/>
                 </a:solidFill>
@@ -3715,48 +3903,51 @@
                 <a:ea typeface="Malgun Gothic" pitchFamily="34" charset="-122"/>
                 <a:cs typeface="Malgun Gothic" pitchFamily="34" charset="-120"/>
               </a:rPr>
-              <a:t>cudaMemcpy 방향을 반대로 지정 → 값이 안 옴</a:t>
-            </a:r>
-            <a:endParaRPr lang="en-US" sz="1550" dirty="0"/>
-          </a:p>
-          <a:p>
-            <a:pPr marL="342900" indent="-342900">
-              <a:spcAft>
-                <a:spcPts val="1200"/>
-              </a:spcAft>
-              <a:buSzPct val="100000"/>
-              <a:buChar char="✗"/>
-            </a:pPr>
-            <a:r>
-              <a:rPr lang="en-US" sz="1550" dirty="0">
-                <a:solidFill>
-                  <a:srgbClr val="E8EDF2"/>
-                </a:solidFill>
-                <a:latin typeface="Malgun Gothic" pitchFamily="34" charset="0"/>
-                <a:ea typeface="Malgun Gothic" pitchFamily="34" charset="-122"/>
-                <a:cs typeface="Malgun Gothic" pitchFamily="34" charset="-120"/>
-              </a:rPr>
-              <a:t>같은 커널에서 쓰고 바로 읽기 → 반영 전 값 읽음</a:t>
-            </a:r>
-            <a:endParaRPr lang="en-US" sz="1550" dirty="0"/>
-          </a:p>
-          <a:p>
-            <a:pPr marL="342900" indent="-342900">
-              <a:buSzPct val="100000"/>
-              <a:buChar char="✗"/>
-            </a:pPr>
-            <a:r>
-              <a:rPr lang="en-US" sz="1550" dirty="0">
-                <a:solidFill>
-                  <a:srgbClr val="E8EDF2"/>
-                </a:solidFill>
-                <a:latin typeface="Malgun Gothic" pitchFamily="34" charset="0"/>
-                <a:ea typeface="Malgun Gothic" pitchFamily="34" charset="-122"/>
-                <a:cs typeface="Malgun Gothic" pitchFamily="34" charset="-120"/>
-              </a:rPr>
-              <a:t>cudaMalloc에 (void**) 이중 포인터를 안 넘김</a:t>
-            </a:r>
-            <a:endParaRPr lang="en-US" sz="1550" dirty="0"/>
+              <a:t>디바이스 버퍼 할당 보기</a:t>
+            </a:r>
+            <a:endParaRPr lang="en-US" sz="1700" dirty="0"/>
+          </a:p>
+        </p:txBody>
+      </p:sp>
+      <p:sp>
+        <p:nvSpPr>
+          <p:cNvPr id="19" name="Text 17"/>
+          <p:cNvSpPr/>
+          <p:nvPr/>
+        </p:nvSpPr>
+        <p:spPr>
+          <a:xfrm>
+            <a:off x="6565392" y="4937760"/>
+            <a:ext cx="4791456" cy="731520"/>
+          </a:xfrm>
+          <a:prstGeom prst="rect">
+            <a:avLst/>
+          </a:prstGeom>
+          <a:noFill/>
+          <a:ln/>
+        </p:spPr>
+        <p:txBody>
+          <a:bodyPr wrap="square" lIns="0" tIns="0" rIns="0" bIns="0" rtlCol="0" anchor="t"/>
+          <a:lstStyle/>
+          <a:p>
+            <a:pPr indent="0" marL="0">
+              <a:lnSpc>
+                <a:spcPct val="110000"/>
+              </a:lnSpc>
+              <a:buNone/>
+            </a:pPr>
+            <a:r>
+              <a:rPr lang="en-US" sz="1400" dirty="0">
+                <a:solidFill>
+                  <a:srgbClr val="9AA6B2"/>
+                </a:solidFill>
+                <a:latin typeface="Malgun Gothic" pitchFamily="34" charset="0"/>
+                <a:ea typeface="Malgun Gothic" pitchFamily="34" charset="-122"/>
+                <a:cs typeface="Malgun Gothic" pitchFamily="34" charset="-120"/>
+              </a:rPr>
+              <a:t>allocate_small_mem의 cudaMalloc/Memset 관찰</a:t>
+            </a:r>
+            <a:endParaRPr lang="en-US" sz="1400" dirty="0"/>
           </a:p>
         </p:txBody>
       </p:sp>
@@ -3800,6 +3991,448 @@
         </p:nvSpPr>
         <p:spPr>
           <a:xfrm>
+            <a:off x="548640" y="411480"/>
+            <a:ext cx="640080" cy="640080"/>
+          </a:xfrm>
+          <a:prstGeom prst="roundRect">
+            <a:avLst>
+              <a:gd name="adj" fmla="val 12857"/>
+            </a:avLst>
+          </a:prstGeom>
+          <a:solidFill>
+            <a:srgbClr val="8CC63F"/>
+          </a:solidFill>
+          <a:ln/>
+        </p:spPr>
+        <p:txBody>
+          <a:bodyPr wrap="square" rtlCol="0" anchor="ctr"/>
+          <a:lstStyle/>
+          <a:p>
+            <a:pPr algn="ctr" indent="0" marL="0">
+              <a:buNone/>
+            </a:pPr>
+            <a:r>
+              <a:rPr lang="en-US" sz="2200" b="1" dirty="0">
+                <a:solidFill>
+                  <a:srgbClr val="13161C"/>
+                </a:solidFill>
+                <a:latin typeface="Courier New" pitchFamily="34" charset="0"/>
+                <a:ea typeface="Courier New" pitchFamily="34" charset="-122"/>
+                <a:cs typeface="Courier New" pitchFamily="34" charset="-120"/>
+              </a:rPr>
+              <a:t>10</a:t>
+            </a:r>
+            <a:endParaRPr lang="en-US" sz="2200" dirty="0"/>
+          </a:p>
+        </p:txBody>
+      </p:sp>
+      <p:sp>
+        <p:nvSpPr>
+          <p:cNvPr id="3" name="Text 1"/>
+          <p:cNvSpPr/>
+          <p:nvPr/>
+        </p:nvSpPr>
+        <p:spPr>
+          <a:xfrm>
+            <a:off x="1325880" y="384048"/>
+            <a:ext cx="10287000" cy="694944"/>
+          </a:xfrm>
+          <a:prstGeom prst="rect">
+            <a:avLst/>
+          </a:prstGeom>
+          <a:noFill/>
+          <a:ln/>
+        </p:spPr>
+        <p:txBody>
+          <a:bodyPr wrap="square" lIns="0" tIns="0" rIns="0" bIns="0" rtlCol="0" anchor="ctr"/>
+          <a:lstStyle/>
+          <a:p>
+            <a:pPr algn="l" indent="0" marL="0">
+              <a:buNone/>
+            </a:pPr>
+            <a:r>
+              <a:rPr lang="en-US" sz="3000" b="1" dirty="0">
+                <a:solidFill>
+                  <a:srgbClr val="E8EDF2"/>
+                </a:solidFill>
+                <a:latin typeface="Malgun Gothic" pitchFamily="34" charset="0"/>
+                <a:ea typeface="Malgun Gothic" pitchFamily="34" charset="-122"/>
+                <a:cs typeface="Malgun Gothic" pitchFamily="34" charset="-120"/>
+              </a:rPr>
+              <a:t>핵심 정리 &amp; 자주 하는 실수</a:t>
+            </a:r>
+            <a:endParaRPr lang="en-US" sz="3000" dirty="0"/>
+          </a:p>
+        </p:txBody>
+      </p:sp>
+      <p:sp>
+        <p:nvSpPr>
+          <p:cNvPr id="4" name="Shape 2"/>
+          <p:cNvSpPr/>
+          <p:nvPr/>
+        </p:nvSpPr>
+        <p:spPr>
+          <a:xfrm>
+            <a:off x="548640" y="1600200"/>
+            <a:ext cx="5349240" cy="4114800"/>
+          </a:xfrm>
+          <a:prstGeom prst="roundRect">
+            <a:avLst>
+              <a:gd name="adj" fmla="val 1778"/>
+            </a:avLst>
+          </a:prstGeom>
+          <a:solidFill>
+            <a:srgbClr val="1E232C"/>
+          </a:solidFill>
+          <a:ln/>
+        </p:spPr>
+      </p:sp>
+      <p:sp>
+        <p:nvSpPr>
+          <p:cNvPr id="5" name="Text 3"/>
+          <p:cNvSpPr/>
+          <p:nvPr/>
+        </p:nvSpPr>
+        <p:spPr>
+          <a:xfrm>
+            <a:off x="822960" y="1828800"/>
+            <a:ext cx="4800600" cy="457200"/>
+          </a:xfrm>
+          <a:prstGeom prst="rect">
+            <a:avLst/>
+          </a:prstGeom>
+          <a:noFill/>
+          <a:ln/>
+        </p:spPr>
+        <p:txBody>
+          <a:bodyPr wrap="square" lIns="0" tIns="0" rIns="0" bIns="0" rtlCol="0" anchor="ctr"/>
+          <a:lstStyle/>
+          <a:p>
+            <a:pPr indent="0" marL="0">
+              <a:buNone/>
+            </a:pPr>
+            <a:r>
+              <a:rPr lang="en-US" sz="2000" b="1" dirty="0">
+                <a:solidFill>
+                  <a:srgbClr val="8CC63F"/>
+                </a:solidFill>
+                <a:latin typeface="Malgun Gothic" pitchFamily="34" charset="0"/>
+                <a:ea typeface="Malgun Gothic" pitchFamily="34" charset="-122"/>
+                <a:cs typeface="Malgun Gothic" pitchFamily="34" charset="-120"/>
+              </a:rPr>
+              <a:t>기억할 것</a:t>
+            </a:r>
+            <a:endParaRPr lang="en-US" sz="2000" dirty="0"/>
+          </a:p>
+        </p:txBody>
+      </p:sp>
+      <p:sp>
+        <p:nvSpPr>
+          <p:cNvPr id="6" name="Text 4"/>
+          <p:cNvSpPr/>
+          <p:nvPr/>
+        </p:nvSpPr>
+        <p:spPr>
+          <a:xfrm>
+            <a:off x="822960" y="2423160"/>
+            <a:ext cx="4800600" cy="3108960"/>
+          </a:xfrm>
+          <a:prstGeom prst="rect">
+            <a:avLst/>
+          </a:prstGeom>
+          <a:noFill/>
+          <a:ln/>
+        </p:spPr>
+        <p:txBody>
+          <a:bodyPr wrap="square" lIns="0" tIns="0" rIns="0" bIns="0" rtlCol="0" anchor="t"/>
+          <a:lstStyle/>
+          <a:p>
+            <a:pPr marL="342900" indent="-342900">
+              <a:spcAft>
+                <a:spcPts val="1200"/>
+              </a:spcAft>
+              <a:buSzPct val="100000"/>
+              <a:buChar char="✓"/>
+            </a:pPr>
+            <a:r>
+              <a:rPr lang="en-US" sz="1550" dirty="0">
+                <a:solidFill>
+                  <a:srgbClr val="E8EDF2"/>
+                </a:solidFill>
+                <a:latin typeface="Malgun Gothic" pitchFamily="34" charset="0"/>
+                <a:ea typeface="Malgun Gothic" pitchFamily="34" charset="-122"/>
+                <a:cs typeface="Malgun Gothic" pitchFamily="34" charset="-120"/>
+              </a:rPr>
+              <a:t>Malloc(할당)·Memset(초기화)·Memcpy(복사)</a:t>
+            </a:r>
+            <a:endParaRPr lang="en-US" sz="1550" dirty="0"/>
+          </a:p>
+          <a:p>
+            <a:pPr marL="342900" indent="-342900">
+              <a:spcAft>
+                <a:spcPts val="1200"/>
+              </a:spcAft>
+              <a:buSzPct val="100000"/>
+              <a:buChar char="✓"/>
+            </a:pPr>
+            <a:r>
+              <a:rPr lang="en-US" sz="1550" dirty="0">
+                <a:solidFill>
+                  <a:srgbClr val="E8EDF2"/>
+                </a:solidFill>
+                <a:latin typeface="Malgun Gothic" pitchFamily="34" charset="0"/>
+                <a:ea typeface="Malgun Gothic" pitchFamily="34" charset="-122"/>
+                <a:cs typeface="Malgun Gothic" pitchFamily="34" charset="-120"/>
+              </a:rPr>
+              <a:t>Memcpy 방향: DeviceToHost = GPU→CPU</a:t>
+            </a:r>
+            <a:endParaRPr lang="en-US" sz="1550" dirty="0"/>
+          </a:p>
+          <a:p>
+            <a:pPr marL="342900" indent="-342900">
+              <a:spcAft>
+                <a:spcPts val="1200"/>
+              </a:spcAft>
+              <a:buSzPct val="100000"/>
+              <a:buChar char="✓"/>
+            </a:pPr>
+            <a:r>
+              <a:rPr lang="en-US" sz="1550" dirty="0">
+                <a:solidFill>
+                  <a:srgbClr val="E8EDF2"/>
+                </a:solidFill>
+                <a:latin typeface="Malgun Gothic" pitchFamily="34" charset="0"/>
+                <a:ea typeface="Malgun Gothic" pitchFamily="34" charset="-122"/>
+                <a:cs typeface="Malgun Gothic" pitchFamily="34" charset="-120"/>
+              </a:rPr>
+              <a:t>쓰기 커널 종료 = 메모리 반영 보장</a:t>
+            </a:r>
+            <a:endParaRPr lang="en-US" sz="1550" dirty="0"/>
+          </a:p>
+          <a:p>
+            <a:pPr marL="342900" indent="-342900">
+              <a:buSzPct val="100000"/>
+              <a:buChar char="✓"/>
+            </a:pPr>
+            <a:r>
+              <a:rPr lang="en-US" sz="1550" dirty="0">
+                <a:solidFill>
+                  <a:srgbClr val="E8EDF2"/>
+                </a:solidFill>
+                <a:latin typeface="Malgun Gothic" pitchFamily="34" charset="0"/>
+                <a:ea typeface="Malgun Gothic" pitchFamily="34" charset="-122"/>
+                <a:cs typeface="Malgun Gothic" pitchFamily="34" charset="-120"/>
+              </a:rPr>
+              <a:t>이동 반전: p1 → p2(보수) 양방향 검사</a:t>
+            </a:r>
+            <a:endParaRPr lang="en-US" sz="1550" dirty="0"/>
+          </a:p>
+        </p:txBody>
+      </p:sp>
+      <p:sp>
+        <p:nvSpPr>
+          <p:cNvPr id="7" name="Shape 5"/>
+          <p:cNvSpPr/>
+          <p:nvPr/>
+        </p:nvSpPr>
+        <p:spPr>
+          <a:xfrm>
+            <a:off x="6263640" y="1600200"/>
+            <a:ext cx="5349240" cy="4114800"/>
+          </a:xfrm>
+          <a:prstGeom prst="roundRect">
+            <a:avLst>
+              <a:gd name="adj" fmla="val 1778"/>
+            </a:avLst>
+          </a:prstGeom>
+          <a:solidFill>
+            <a:srgbClr val="1E232C"/>
+          </a:solidFill>
+          <a:ln/>
+        </p:spPr>
+      </p:sp>
+      <p:sp>
+        <p:nvSpPr>
+          <p:cNvPr id="8" name="Text 6"/>
+          <p:cNvSpPr/>
+          <p:nvPr/>
+        </p:nvSpPr>
+        <p:spPr>
+          <a:xfrm>
+            <a:off x="6537960" y="1828800"/>
+            <a:ext cx="4800600" cy="457200"/>
+          </a:xfrm>
+          <a:prstGeom prst="rect">
+            <a:avLst/>
+          </a:prstGeom>
+          <a:noFill/>
+          <a:ln/>
+        </p:spPr>
+        <p:txBody>
+          <a:bodyPr wrap="square" lIns="0" tIns="0" rIns="0" bIns="0" rtlCol="0" anchor="ctr"/>
+          <a:lstStyle/>
+          <a:p>
+            <a:pPr indent="0" marL="0">
+              <a:buNone/>
+            </a:pPr>
+            <a:r>
+              <a:rPr lang="en-US" sz="2000" b="1" dirty="0">
+                <a:solidFill>
+                  <a:srgbClr val="E0A458"/>
+                </a:solidFill>
+                <a:latin typeface="Malgun Gothic" pitchFamily="34" charset="0"/>
+                <a:ea typeface="Malgun Gothic" pitchFamily="34" charset="-122"/>
+                <a:cs typeface="Malgun Gothic" pitchFamily="34" charset="-120"/>
+              </a:rPr>
+              <a:t>입문자 함정</a:t>
+            </a:r>
+            <a:endParaRPr lang="en-US" sz="2000" dirty="0"/>
+          </a:p>
+        </p:txBody>
+      </p:sp>
+      <p:sp>
+        <p:nvSpPr>
+          <p:cNvPr id="9" name="Text 7"/>
+          <p:cNvSpPr/>
+          <p:nvPr/>
+        </p:nvSpPr>
+        <p:spPr>
+          <a:xfrm>
+            <a:off x="6537960" y="2423160"/>
+            <a:ext cx="4800600" cy="3108960"/>
+          </a:xfrm>
+          <a:prstGeom prst="rect">
+            <a:avLst/>
+          </a:prstGeom>
+          <a:noFill/>
+          <a:ln/>
+        </p:spPr>
+        <p:txBody>
+          <a:bodyPr wrap="square" lIns="0" tIns="0" rIns="0" bIns="0" rtlCol="0" anchor="t"/>
+          <a:lstStyle/>
+          <a:p>
+            <a:pPr marL="342900" indent="-342900">
+              <a:spcAft>
+                <a:spcPts val="1200"/>
+              </a:spcAft>
+              <a:buSzPct val="100000"/>
+              <a:buChar char="✗"/>
+            </a:pPr>
+            <a:r>
+              <a:rPr lang="en-US" sz="1550" dirty="0">
+                <a:solidFill>
+                  <a:srgbClr val="E8EDF2"/>
+                </a:solidFill>
+                <a:latin typeface="Malgun Gothic" pitchFamily="34" charset="0"/>
+                <a:ea typeface="Malgun Gothic" pitchFamily="34" charset="-122"/>
+                <a:cs typeface="Malgun Gothic" pitchFamily="34" charset="-120"/>
+              </a:rPr>
+              <a:t>디바이스 포인터를 CPU에서 *ptr로 역참조 → 오류</a:t>
+            </a:r>
+            <a:endParaRPr lang="en-US" sz="1550" dirty="0"/>
+          </a:p>
+          <a:p>
+            <a:pPr marL="342900" indent="-342900">
+              <a:spcAft>
+                <a:spcPts val="1200"/>
+              </a:spcAft>
+              <a:buSzPct val="100000"/>
+              <a:buChar char="✗"/>
+            </a:pPr>
+            <a:r>
+              <a:rPr lang="en-US" sz="1550" dirty="0">
+                <a:solidFill>
+                  <a:srgbClr val="E8EDF2"/>
+                </a:solidFill>
+                <a:latin typeface="Malgun Gothic" pitchFamily="34" charset="0"/>
+                <a:ea typeface="Malgun Gothic" pitchFamily="34" charset="-122"/>
+                <a:cs typeface="Malgun Gothic" pitchFamily="34" charset="-120"/>
+              </a:rPr>
+              <a:t>cudaMemcpy 방향을 반대로 지정 → 값이 안 옴</a:t>
+            </a:r>
+            <a:endParaRPr lang="en-US" sz="1550" dirty="0"/>
+          </a:p>
+          <a:p>
+            <a:pPr marL="342900" indent="-342900">
+              <a:spcAft>
+                <a:spcPts val="1200"/>
+              </a:spcAft>
+              <a:buSzPct val="100000"/>
+              <a:buChar char="✗"/>
+            </a:pPr>
+            <a:r>
+              <a:rPr lang="en-US" sz="1550" dirty="0">
+                <a:solidFill>
+                  <a:srgbClr val="E8EDF2"/>
+                </a:solidFill>
+                <a:latin typeface="Malgun Gothic" pitchFamily="34" charset="0"/>
+                <a:ea typeface="Malgun Gothic" pitchFamily="34" charset="-122"/>
+                <a:cs typeface="Malgun Gothic" pitchFamily="34" charset="-120"/>
+              </a:rPr>
+              <a:t>같은 커널에서 쓰고 바로 읽기 → 반영 전 값 읽음</a:t>
+            </a:r>
+            <a:endParaRPr lang="en-US" sz="1550" dirty="0"/>
+          </a:p>
+          <a:p>
+            <a:pPr marL="342900" indent="-342900">
+              <a:buSzPct val="100000"/>
+              <a:buChar char="✗"/>
+            </a:pPr>
+            <a:r>
+              <a:rPr lang="en-US" sz="1550" dirty="0">
+                <a:solidFill>
+                  <a:srgbClr val="E8EDF2"/>
+                </a:solidFill>
+                <a:latin typeface="Malgun Gothic" pitchFamily="34" charset="0"/>
+                <a:ea typeface="Malgun Gothic" pitchFamily="34" charset="-122"/>
+                <a:cs typeface="Malgun Gothic" pitchFamily="34" charset="-120"/>
+              </a:rPr>
+              <a:t>cudaMalloc에 (void**) 이중 포인터를 안 넘김</a:t>
+            </a:r>
+            <a:endParaRPr lang="en-US" sz="1550" dirty="0"/>
+          </a:p>
+        </p:txBody>
+      </p:sp>
+    </p:spTree>
+  </p:cSld>
+  <p:clrMapOvr>
+    <a:masterClrMapping/>
+  </p:clrMapOvr>
+</p:sld>
+</file>
+
+<file path=ppt/slides/slide14.xml><?xml version="1.0" encoding="utf-8"?>
+<p:sld xmlns:a="http://schemas.openxmlformats.org/drawingml/2006/main" xmlns:r="http://schemas.openxmlformats.org/officeDocument/2006/relationships" xmlns:p="http://schemas.openxmlformats.org/presentationml/2006/main">
+  <p:cSld name="Slide 14">
+    <p:bg>
+      <p:bgPr>
+        <a:solidFill>
+          <a:srgbClr val="13161C"/>
+        </a:solidFill>
+      </p:bgPr>
+    </p:bg>
+    <p:spTree>
+      <p:nvGrpSpPr>
+        <p:cNvPr id="1" name=""/>
+        <p:cNvGrpSpPr/>
+        <p:nvPr/>
+      </p:nvGrpSpPr>
+      <p:grpSpPr>
+        <a:xfrm>
+          <a:off x="0" y="0"/>
+          <a:ext cx="0" cy="0"/>
+          <a:chOff x="0" y="0"/>
+          <a:chExt cx="0" cy="0"/>
+        </a:xfrm>
+      </p:grpSpPr>
+      <p:sp>
+        <p:nvSpPr>
+          <p:cNvPr id="2" name="Text 0"/>
+          <p:cNvSpPr/>
+          <p:nvPr/>
+        </p:nvSpPr>
+        <p:spPr>
+          <a:xfrm>
             <a:off x="548640" y="1463040"/>
             <a:ext cx="9144000" cy="457200"/>
           </a:xfrm>
@@ -8049,7 +8682,7 @@
                 <a:ea typeface="Courier New" pitchFamily="34" charset="-122"/>
                 <a:cs typeface="Courier New" pitchFamily="34" charset="-120"/>
               </a:rPr>
-              <a:t>6</a:t>
+              <a:t>5</a:t>
             </a:r>
             <a:endParaRPr lang="en-US" sz="2200" dirty="0"/>
           </a:p>
@@ -8088,7 +8721,7 @@
                 <a:ea typeface="Malgun Gothic" pitchFamily="34" charset="-122"/>
                 <a:cs typeface="Malgun Gothic" pitchFamily="34" charset="-120"/>
               </a:rPr>
-              <a:t>이동 반전(moving inversion) 알고리즘</a:t>
+              <a:t>호스트↔디바이스 시퀀스(sequence)</a:t>
             </a:r>
             <a:endParaRPr lang="en-US" sz="3000" dirty="0"/>
           </a:p>
@@ -8102,24 +8735,24 @@
         </p:nvSpPr>
         <p:spPr>
           <a:xfrm>
-            <a:off x="548640" y="1463040"/>
-            <a:ext cx="11064240" cy="685800"/>
-          </a:xfrm>
-          <a:prstGeom prst="rect">
-            <a:avLst/>
-          </a:prstGeom>
-          <a:noFill/>
-          <a:ln/>
-        </p:spPr>
-        <p:txBody>
-          <a:bodyPr wrap="square" lIns="0" tIns="0" rIns="0" bIns="0" rtlCol="0" anchor="t"/>
+            <a:off x="548640" y="1325880"/>
+            <a:ext cx="11064240" cy="365760"/>
+          </a:xfrm>
+          <a:prstGeom prst="rect">
+            <a:avLst/>
+          </a:prstGeom>
+          <a:noFill/>
+          <a:ln/>
+        </p:spPr>
+        <p:txBody>
+          <a:bodyPr wrap="square" lIns="0" tIns="0" rIns="0" bIns="0" rtlCol="0" anchor="ctr"/>
           <a:lstStyle/>
           <a:p>
             <a:pPr indent="0" marL="0">
               <a:buNone/>
             </a:pPr>
             <a:r>
-              <a:rPr lang="en-US" sz="1600" dirty="0">
+              <a:rPr lang="en-US" sz="1500" dirty="0">
                 <a:solidFill>
                   <a:srgbClr val="9AA6B2"/>
                 </a:solidFill>
@@ -8127,71 +8760,98 @@
                 <a:ea typeface="Malgun Gothic" pitchFamily="34" charset="-122"/>
                 <a:cs typeface="Malgun Gothic" pitchFamily="34" charset="-120"/>
               </a:rPr>
-              <a:t>패턴 p1을 썼다가, 확인 후 그 보수 p2 = ~p1로 뒤집어 다시 확인합니다. 비트를 양방향으로 검사해 고착 오류를 잡습니다.</a:t>
-            </a:r>
-            <a:endParaRPr lang="en-US" sz="1600" dirty="0"/>
-          </a:p>
-        </p:txBody>
-      </p:sp>
-      <p:sp>
-        <p:nvSpPr>
-          <p:cNvPr id="5" name="Text 3"/>
-          <p:cNvSpPr/>
-          <p:nvPr/>
-        </p:nvSpPr>
-        <p:spPr>
-          <a:xfrm>
-            <a:off x="548640" y="2468880"/>
-            <a:ext cx="2194560" cy="548640"/>
-          </a:xfrm>
-          <a:prstGeom prst="rect">
-            <a:avLst/>
-          </a:prstGeom>
-          <a:noFill/>
-          <a:ln/>
-        </p:spPr>
-        <p:txBody>
-          <a:bodyPr wrap="square" lIns="0" tIns="0" rIns="0" bIns="0" rtlCol="0" anchor="ctr"/>
-          <a:lstStyle/>
-          <a:p>
-            <a:pPr indent="0" marL="0">
-              <a:buNone/>
-            </a:pPr>
-            <a:r>
-              <a:rPr lang="en-US" sz="1600" b="1" dirty="0">
-                <a:solidFill>
-                  <a:srgbClr val="8CC63F"/>
-                </a:solidFill>
-                <a:latin typeface="Malgun Gothic" pitchFamily="34" charset="0"/>
-                <a:ea typeface="Malgun Gothic" pitchFamily="34" charset="-122"/>
-                <a:cs typeface="Malgun Gothic" pitchFamily="34" charset="-120"/>
-              </a:rPr>
-              <a:t>p1 =</a:t>
-            </a:r>
-            <a:endParaRPr lang="en-US" sz="1600" dirty="0"/>
-          </a:p>
-        </p:txBody>
-      </p:sp>
-      <p:sp>
-        <p:nvSpPr>
-          <p:cNvPr id="6" name="Shape 4"/>
-          <p:cNvSpPr/>
-          <p:nvPr/>
-        </p:nvSpPr>
-        <p:spPr>
-          <a:xfrm>
-            <a:off x="2926080" y="2423160"/>
-            <a:ext cx="640080" cy="640080"/>
+              <a:t>move_inv_test가 CPU와 GPU 사이에서 시간순으로 주고받는 상호작용입니다.</a:t>
+            </a:r>
+            <a:endParaRPr lang="en-US" sz="1500" dirty="0"/>
+          </a:p>
+        </p:txBody>
+      </p:sp>
+      <p:sp>
+        <p:nvSpPr>
+          <p:cNvPr id="5" name="Shape 3"/>
+          <p:cNvSpPr/>
+          <p:nvPr/>
+        </p:nvSpPr>
+        <p:spPr>
+          <a:xfrm>
+            <a:off x="1463040" y="1783080"/>
+            <a:ext cx="2560320" cy="548640"/>
           </a:xfrm>
           <a:prstGeom prst="roundRect">
             <a:avLst>
-              <a:gd name="adj" fmla="val 7143"/>
+              <a:gd name="adj" fmla="val 10000"/>
             </a:avLst>
           </a:prstGeom>
           <a:solidFill>
-            <a:srgbClr val="8CC63F"/>
+            <a:srgbClr val="1E232C"/>
           </a:solidFill>
-          <a:ln w="12700">
+          <a:ln w="19050">
+            <a:solidFill>
+              <a:srgbClr val="4FB0C6"/>
+            </a:solidFill>
+            <a:prstDash val="solid"/>
+          </a:ln>
+        </p:spPr>
+      </p:sp>
+      <p:sp>
+        <p:nvSpPr>
+          <p:cNvPr id="6" name="Text 4"/>
+          <p:cNvSpPr/>
+          <p:nvPr/>
+        </p:nvSpPr>
+        <p:spPr>
+          <a:xfrm>
+            <a:off x="1463040" y="1783080"/>
+            <a:ext cx="2560320" cy="548640"/>
+          </a:xfrm>
+          <a:prstGeom prst="rect">
+            <a:avLst/>
+          </a:prstGeom>
+          <a:noFill/>
+          <a:ln/>
+        </p:spPr>
+        <p:txBody>
+          <a:bodyPr wrap="square" lIns="0" tIns="0" rIns="0" bIns="0" rtlCol="0" anchor="ctr"/>
+          <a:lstStyle/>
+          <a:p>
+            <a:pPr algn="ctr" indent="0" marL="0">
+              <a:buNone/>
+            </a:pPr>
+            <a:r>
+              <a:rPr lang="en-US" sz="1500" b="1" dirty="0">
+                <a:solidFill>
+                  <a:srgbClr val="4FB0C6"/>
+                </a:solidFill>
+                <a:latin typeface="Malgun Gothic" pitchFamily="34" charset="0"/>
+                <a:ea typeface="Malgun Gothic" pitchFamily="34" charset="-122"/>
+                <a:cs typeface="Malgun Gothic" pitchFamily="34" charset="-120"/>
+              </a:rPr>
+              <a:t>호스트(CPU)</a:t>
+            </a:r>
+            <a:endParaRPr lang="en-US" sz="1500" dirty="0"/>
+          </a:p>
+        </p:txBody>
+      </p:sp>
+      <p:sp>
+        <p:nvSpPr>
+          <p:cNvPr id="7" name="Shape 5"/>
+          <p:cNvSpPr/>
+          <p:nvPr/>
+        </p:nvSpPr>
+        <p:spPr>
+          <a:xfrm>
+            <a:off x="8138160" y="1783080"/>
+            <a:ext cx="2560320" cy="548640"/>
+          </a:xfrm>
+          <a:prstGeom prst="roundRect">
+            <a:avLst>
+              <a:gd name="adj" fmla="val 10000"/>
+            </a:avLst>
+          </a:prstGeom>
+          <a:solidFill>
+            <a:srgbClr val="1E232C"/>
+          </a:solidFill>
+          <a:ln w="19050">
             <a:solidFill>
               <a:srgbClr val="8CC63F"/>
             </a:solidFill>
@@ -8201,14 +8861,14 @@
       </p:sp>
       <p:sp>
         <p:nvSpPr>
-          <p:cNvPr id="7" name="Text 5"/>
-          <p:cNvSpPr/>
-          <p:nvPr/>
-        </p:nvSpPr>
-        <p:spPr>
-          <a:xfrm>
-            <a:off x="2926080" y="2423160"/>
-            <a:ext cx="640080" cy="640080"/>
+          <p:cNvPr id="8" name="Text 6"/>
+          <p:cNvSpPr/>
+          <p:nvPr/>
+        </p:nvSpPr>
+        <p:spPr>
+          <a:xfrm>
+            <a:off x="8138160" y="1783080"/>
+            <a:ext cx="2560320" cy="548640"/>
           </a:xfrm>
           <a:prstGeom prst="rect">
             <a:avLst/>
@@ -8224,57 +8884,100 @@
               <a:buNone/>
             </a:pPr>
             <a:r>
-              <a:rPr lang="en-US" sz="1800" b="1" dirty="0">
-                <a:solidFill>
-                  <a:srgbClr val="13161C"/>
-                </a:solidFill>
-                <a:latin typeface="Courier New" pitchFamily="34" charset="0"/>
-                <a:ea typeface="Courier New" pitchFamily="34" charset="-122"/>
-                <a:cs typeface="Courier New" pitchFamily="34" charset="-120"/>
-              </a:rPr>
-              <a:t>1</a:t>
-            </a:r>
-            <a:endParaRPr lang="en-US" sz="1800" dirty="0"/>
-          </a:p>
-        </p:txBody>
-      </p:sp>
-      <p:sp>
-        <p:nvSpPr>
-          <p:cNvPr id="8" name="Shape 6"/>
-          <p:cNvSpPr/>
-          <p:nvPr/>
-        </p:nvSpPr>
-        <p:spPr>
-          <a:xfrm>
-            <a:off x="3675888" y="2423160"/>
-            <a:ext cx="640080" cy="640080"/>
-          </a:xfrm>
-          <a:prstGeom prst="roundRect">
-            <a:avLst>
-              <a:gd name="adj" fmla="val 7143"/>
-            </a:avLst>
-          </a:prstGeom>
-          <a:solidFill>
-            <a:srgbClr val="0E1116"/>
-          </a:solidFill>
-          <a:ln w="12700">
+              <a:rPr lang="en-US" sz="1500" b="1" dirty="0">
+                <a:solidFill>
+                  <a:srgbClr val="8CC63F"/>
+                </a:solidFill>
+                <a:latin typeface="Malgun Gothic" pitchFamily="34" charset="0"/>
+                <a:ea typeface="Malgun Gothic" pitchFamily="34" charset="-122"/>
+                <a:cs typeface="Malgun Gothic" pitchFamily="34" charset="-120"/>
+              </a:rPr>
+              <a:t>디바이스(GPU)</a:t>
+            </a:r>
+            <a:endParaRPr lang="en-US" sz="1500" dirty="0"/>
+          </a:p>
+        </p:txBody>
+      </p:sp>
+      <p:sp>
+        <p:nvSpPr>
+          <p:cNvPr id="9" name="Shape 7"/>
+          <p:cNvSpPr/>
+          <p:nvPr/>
+        </p:nvSpPr>
+        <p:spPr>
+          <a:xfrm>
+            <a:off x="2743200" y="2331720"/>
+            <a:ext cx="0" cy="3474720"/>
+          </a:xfrm>
+          <a:prstGeom prst="line">
+            <a:avLst/>
+          </a:prstGeom>
+          <a:noFill/>
+          <a:ln w="19050">
+            <a:solidFill>
+              <a:srgbClr val="2C3440"/>
+            </a:solidFill>
+            <a:prstDash val="dash"/>
+          </a:ln>
+        </p:spPr>
+      </p:sp>
+      <p:sp>
+        <p:nvSpPr>
+          <p:cNvPr id="10" name="Shape 8"/>
+          <p:cNvSpPr/>
+          <p:nvPr/>
+        </p:nvSpPr>
+        <p:spPr>
+          <a:xfrm>
+            <a:off x="9418320" y="2331720"/>
+            <a:ext cx="0" cy="3474720"/>
+          </a:xfrm>
+          <a:prstGeom prst="line">
+            <a:avLst/>
+          </a:prstGeom>
+          <a:noFill/>
+          <a:ln w="19050">
+            <a:solidFill>
+              <a:srgbClr val="2C3440"/>
+            </a:solidFill>
+            <a:prstDash val="dash"/>
+          </a:ln>
+        </p:spPr>
+      </p:sp>
+      <p:sp>
+        <p:nvSpPr>
+          <p:cNvPr id="11" name="Shape 9"/>
+          <p:cNvSpPr/>
+          <p:nvPr/>
+        </p:nvSpPr>
+        <p:spPr>
+          <a:xfrm>
+            <a:off x="2743200" y="2697480"/>
+            <a:ext cx="6675120" cy="0"/>
+          </a:xfrm>
+          <a:prstGeom prst="line">
+            <a:avLst/>
+          </a:prstGeom>
+          <a:noFill/>
+          <a:ln w="27940">
             <a:solidFill>
               <a:srgbClr val="8CC63F"/>
             </a:solidFill>
             <a:prstDash val="solid"/>
+            <a:tailEnd type="triangle"/>
           </a:ln>
         </p:spPr>
       </p:sp>
       <p:sp>
         <p:nvSpPr>
-          <p:cNvPr id="9" name="Text 7"/>
-          <p:cNvSpPr/>
-          <p:nvPr/>
-        </p:nvSpPr>
-        <p:spPr>
-          <a:xfrm>
-            <a:off x="3675888" y="2423160"/>
-            <a:ext cx="640080" cy="640080"/>
+          <p:cNvPr id="12" name="Text 10"/>
+          <p:cNvSpPr/>
+          <p:nvPr/>
+        </p:nvSpPr>
+        <p:spPr>
+          <a:xfrm>
+            <a:off x="2834640" y="2386584"/>
+            <a:ext cx="6492240" cy="274320"/>
           </a:xfrm>
           <a:prstGeom prst="rect">
             <a:avLst/>
@@ -8290,57 +8993,117 @@
               <a:buNone/>
             </a:pPr>
             <a:r>
-              <a:rPr lang="en-US" sz="1800" b="1" dirty="0">
-                <a:solidFill>
-                  <a:srgbClr val="9AA6B2"/>
-                </a:solidFill>
-                <a:latin typeface="Courier New" pitchFamily="34" charset="0"/>
-                <a:ea typeface="Courier New" pitchFamily="34" charset="-122"/>
-                <a:cs typeface="Courier New" pitchFamily="34" charset="-120"/>
-              </a:rPr>
-              <a:t>0</a:t>
-            </a:r>
-            <a:endParaRPr lang="en-US" sz="1800" dirty="0"/>
-          </a:p>
-        </p:txBody>
-      </p:sp>
-      <p:sp>
-        <p:nvSpPr>
-          <p:cNvPr id="10" name="Shape 8"/>
-          <p:cNvSpPr/>
-          <p:nvPr/>
-        </p:nvSpPr>
-        <p:spPr>
-          <a:xfrm>
-            <a:off x="4425696" y="2423160"/>
-            <a:ext cx="640080" cy="640080"/>
-          </a:xfrm>
-          <a:prstGeom prst="roundRect">
-            <a:avLst>
-              <a:gd name="adj" fmla="val 7143"/>
-            </a:avLst>
-          </a:prstGeom>
-          <a:solidFill>
-            <a:srgbClr val="8CC63F"/>
-          </a:solidFill>
-          <a:ln w="12700">
+              <a:rPr lang="en-US" sz="1250" b="1" dirty="0">
+                <a:solidFill>
+                  <a:srgbClr val="8CC63F"/>
+                </a:solidFill>
+                <a:latin typeface="Malgun Gothic" pitchFamily="34" charset="0"/>
+                <a:ea typeface="Malgun Gothic" pitchFamily="34" charset="-122"/>
+                <a:cs typeface="Malgun Gothic" pitchFamily="34" charset="-120"/>
+              </a:rPr>
+              <a:t>① write&lt;&lt;&lt;&gt;&gt;&gt; — 전체 메모리에 p1 기록</a:t>
+            </a:r>
+            <a:endParaRPr lang="en-US" sz="1250" dirty="0"/>
+          </a:p>
+        </p:txBody>
+      </p:sp>
+      <p:sp>
+        <p:nvSpPr>
+          <p:cNvPr id="13" name="Shape 11"/>
+          <p:cNvSpPr/>
+          <p:nvPr/>
+        </p:nvSpPr>
+        <p:spPr>
+          <a:xfrm>
+            <a:off x="2743200" y="3429000"/>
+            <a:ext cx="6675120" cy="0"/>
+          </a:xfrm>
+          <a:prstGeom prst="line">
+            <a:avLst/>
+          </a:prstGeom>
+          <a:noFill/>
+          <a:ln w="27940">
+            <a:solidFill>
+              <a:srgbClr val="4FB0C6"/>
+            </a:solidFill>
+            <a:prstDash val="dash"/>
+            <a:headEnd type="triangle"/>
+          </a:ln>
+        </p:spPr>
+      </p:sp>
+      <p:sp>
+        <p:nvSpPr>
+          <p:cNvPr id="14" name="Text 12"/>
+          <p:cNvSpPr/>
+          <p:nvPr/>
+        </p:nvSpPr>
+        <p:spPr>
+          <a:xfrm>
+            <a:off x="2834640" y="3118104"/>
+            <a:ext cx="6492240" cy="274320"/>
+          </a:xfrm>
+          <a:prstGeom prst="rect">
+            <a:avLst/>
+          </a:prstGeom>
+          <a:noFill/>
+          <a:ln/>
+        </p:spPr>
+        <p:txBody>
+          <a:bodyPr wrap="square" lIns="0" tIns="0" rIns="0" bIns="0" rtlCol="0" anchor="ctr"/>
+          <a:lstStyle/>
+          <a:p>
+            <a:pPr algn="ctr" indent="0" marL="0">
+              <a:buNone/>
+            </a:pPr>
+            <a:r>
+              <a:rPr lang="en-US" sz="1250" b="1" dirty="0">
+                <a:solidFill>
+                  <a:srgbClr val="4FB0C6"/>
+                </a:solidFill>
+                <a:latin typeface="Malgun Gothic" pitchFamily="34" charset="0"/>
+                <a:ea typeface="Malgun Gothic" pitchFamily="34" charset="-122"/>
+                <a:cs typeface="Malgun Gothic" pitchFamily="34" charset="-120"/>
+              </a:rPr>
+              <a:t>커널 종료 = 메모리 반영(flush) — DeviceSynchronize</a:t>
+            </a:r>
+            <a:endParaRPr lang="en-US" sz="1250" dirty="0"/>
+          </a:p>
+        </p:txBody>
+      </p:sp>
+      <p:sp>
+        <p:nvSpPr>
+          <p:cNvPr id="15" name="Shape 13"/>
+          <p:cNvSpPr/>
+          <p:nvPr/>
+        </p:nvSpPr>
+        <p:spPr>
+          <a:xfrm>
+            <a:off x="2743200" y="4160520"/>
+            <a:ext cx="6675120" cy="0"/>
+          </a:xfrm>
+          <a:prstGeom prst="line">
+            <a:avLst/>
+          </a:prstGeom>
+          <a:noFill/>
+          <a:ln w="27940">
             <a:solidFill>
               <a:srgbClr val="8CC63F"/>
             </a:solidFill>
             <a:prstDash val="solid"/>
+            <a:tailEnd type="triangle"/>
           </a:ln>
         </p:spPr>
       </p:sp>
       <p:sp>
         <p:nvSpPr>
-          <p:cNvPr id="11" name="Text 9"/>
-          <p:cNvSpPr/>
-          <p:nvPr/>
-        </p:nvSpPr>
-        <p:spPr>
-          <a:xfrm>
-            <a:off x="4425696" y="2423160"/>
-            <a:ext cx="640080" cy="640080"/>
+          <p:cNvPr id="16" name="Text 14"/>
+          <p:cNvSpPr/>
+          <p:nvPr/>
+        </p:nvSpPr>
+        <p:spPr>
+          <a:xfrm>
+            <a:off x="2834640" y="3849624"/>
+            <a:ext cx="6492240" cy="274320"/>
           </a:xfrm>
           <a:prstGeom prst="rect">
             <a:avLst/>
@@ -8356,57 +9119,117 @@
               <a:buNone/>
             </a:pPr>
             <a:r>
-              <a:rPr lang="en-US" sz="1800" b="1" dirty="0">
-                <a:solidFill>
-                  <a:srgbClr val="13161C"/>
-                </a:solidFill>
-                <a:latin typeface="Courier New" pitchFamily="34" charset="0"/>
-                <a:ea typeface="Courier New" pitchFamily="34" charset="-122"/>
-                <a:cs typeface="Courier New" pitchFamily="34" charset="-120"/>
-              </a:rPr>
-              <a:t>1</a:t>
-            </a:r>
-            <a:endParaRPr lang="en-US" sz="1800" dirty="0"/>
-          </a:p>
-        </p:txBody>
-      </p:sp>
-      <p:sp>
-        <p:nvSpPr>
-          <p:cNvPr id="12" name="Shape 10"/>
-          <p:cNvSpPr/>
-          <p:nvPr/>
-        </p:nvSpPr>
-        <p:spPr>
-          <a:xfrm>
-            <a:off x="5175504" y="2423160"/>
-            <a:ext cx="640080" cy="640080"/>
-          </a:xfrm>
-          <a:prstGeom prst="roundRect">
-            <a:avLst>
-              <a:gd name="adj" fmla="val 7143"/>
-            </a:avLst>
-          </a:prstGeom>
-          <a:solidFill>
-            <a:srgbClr val="8CC63F"/>
-          </a:solidFill>
-          <a:ln w="12700">
+              <a:rPr lang="en-US" sz="1250" b="1" dirty="0">
+                <a:solidFill>
+                  <a:srgbClr val="8CC63F"/>
+                </a:solidFill>
+                <a:latin typeface="Malgun Gothic" pitchFamily="34" charset="0"/>
+                <a:ea typeface="Malgun Gothic" pitchFamily="34" charset="-122"/>
+                <a:cs typeface="Malgun Gothic" pitchFamily="34" charset="-120"/>
+              </a:rPr>
+              <a:t>② readwrite&lt;&lt;&lt;&gt;&gt;&gt; — p1 검사 후 p2 기록</a:t>
+            </a:r>
+            <a:endParaRPr lang="en-US" sz="1250" dirty="0"/>
+          </a:p>
+        </p:txBody>
+      </p:sp>
+      <p:sp>
+        <p:nvSpPr>
+          <p:cNvPr id="17" name="Shape 15"/>
+          <p:cNvSpPr/>
+          <p:nvPr/>
+        </p:nvSpPr>
+        <p:spPr>
+          <a:xfrm>
+            <a:off x="2743200" y="4892040"/>
+            <a:ext cx="6675120" cy="0"/>
+          </a:xfrm>
+          <a:prstGeom prst="line">
+            <a:avLst/>
+          </a:prstGeom>
+          <a:noFill/>
+          <a:ln w="27940">
+            <a:solidFill>
+              <a:srgbClr val="4FB0C6"/>
+            </a:solidFill>
+            <a:prstDash val="dash"/>
+            <a:headEnd type="triangle"/>
+          </a:ln>
+        </p:spPr>
+      </p:sp>
+      <p:sp>
+        <p:nvSpPr>
+          <p:cNvPr id="18" name="Text 16"/>
+          <p:cNvSpPr/>
+          <p:nvPr/>
+        </p:nvSpPr>
+        <p:spPr>
+          <a:xfrm>
+            <a:off x="2834640" y="4581144"/>
+            <a:ext cx="6492240" cy="274320"/>
+          </a:xfrm>
+          <a:prstGeom prst="rect">
+            <a:avLst/>
+          </a:prstGeom>
+          <a:noFill/>
+          <a:ln/>
+        </p:spPr>
+        <p:txBody>
+          <a:bodyPr wrap="square" lIns="0" tIns="0" rIns="0" bIns="0" rtlCol="0" anchor="ctr"/>
+          <a:lstStyle/>
+          <a:p>
+            <a:pPr algn="ctr" indent="0" marL="0">
+              <a:buNone/>
+            </a:pPr>
+            <a:r>
+              <a:rPr lang="en-US" sz="1250" b="1" dirty="0">
+                <a:solidFill>
+                  <a:srgbClr val="4FB0C6"/>
+                </a:solidFill>
+                <a:latin typeface="Malgun Gothic" pitchFamily="34" charset="0"/>
+                <a:ea typeface="Malgun Gothic" pitchFamily="34" charset="-122"/>
+                <a:cs typeface="Malgun Gothic" pitchFamily="34" charset="-120"/>
+              </a:rPr>
+              <a:t>error_checking: cudaMemcpy(D→H) — 오류 정보 회수</a:t>
+            </a:r>
+            <a:endParaRPr lang="en-US" sz="1250" dirty="0"/>
+          </a:p>
+        </p:txBody>
+      </p:sp>
+      <p:sp>
+        <p:nvSpPr>
+          <p:cNvPr id="19" name="Shape 17"/>
+          <p:cNvSpPr/>
+          <p:nvPr/>
+        </p:nvSpPr>
+        <p:spPr>
+          <a:xfrm>
+            <a:off x="2743200" y="5623560"/>
+            <a:ext cx="6675120" cy="0"/>
+          </a:xfrm>
+          <a:prstGeom prst="line">
+            <a:avLst/>
+          </a:prstGeom>
+          <a:noFill/>
+          <a:ln w="27940">
             <a:solidFill>
               <a:srgbClr val="8CC63F"/>
             </a:solidFill>
             <a:prstDash val="solid"/>
+            <a:tailEnd type="triangle"/>
           </a:ln>
         </p:spPr>
       </p:sp>
       <p:sp>
         <p:nvSpPr>
-          <p:cNvPr id="13" name="Text 11"/>
-          <p:cNvSpPr/>
-          <p:nvPr/>
-        </p:nvSpPr>
-        <p:spPr>
-          <a:xfrm>
-            <a:off x="5175504" y="2423160"/>
-            <a:ext cx="640080" cy="640080"/>
+          <p:cNvPr id="20" name="Text 18"/>
+          <p:cNvSpPr/>
+          <p:nvPr/>
+        </p:nvSpPr>
+        <p:spPr>
+          <a:xfrm>
+            <a:off x="2834640" y="5312664"/>
+            <a:ext cx="6492240" cy="274320"/>
           </a:xfrm>
           <a:prstGeom prst="rect">
             <a:avLst/>
@@ -8422,57 +9245,30 @@
               <a:buNone/>
             </a:pPr>
             <a:r>
-              <a:rPr lang="en-US" sz="1800" b="1" dirty="0">
-                <a:solidFill>
-                  <a:srgbClr val="13161C"/>
-                </a:solidFill>
-                <a:latin typeface="Courier New" pitchFamily="34" charset="0"/>
-                <a:ea typeface="Courier New" pitchFamily="34" charset="-122"/>
-                <a:cs typeface="Courier New" pitchFamily="34" charset="-120"/>
-              </a:rPr>
-              <a:t>1</a:t>
-            </a:r>
-            <a:endParaRPr lang="en-US" sz="1800" dirty="0"/>
-          </a:p>
-        </p:txBody>
-      </p:sp>
-      <p:sp>
-        <p:nvSpPr>
-          <p:cNvPr id="14" name="Shape 12"/>
-          <p:cNvSpPr/>
-          <p:nvPr/>
-        </p:nvSpPr>
-        <p:spPr>
-          <a:xfrm>
-            <a:off x="5925312" y="2423160"/>
-            <a:ext cx="640080" cy="640080"/>
-          </a:xfrm>
-          <a:prstGeom prst="roundRect">
-            <a:avLst>
-              <a:gd name="adj" fmla="val 7143"/>
-            </a:avLst>
-          </a:prstGeom>
-          <a:solidFill>
-            <a:srgbClr val="0E1116"/>
-          </a:solidFill>
-          <a:ln w="12700">
-            <a:solidFill>
-              <a:srgbClr val="8CC63F"/>
-            </a:solidFill>
-            <a:prstDash val="solid"/>
-          </a:ln>
-        </p:spPr>
-      </p:sp>
-      <p:sp>
-        <p:nvSpPr>
-          <p:cNvPr id="15" name="Text 13"/>
-          <p:cNvSpPr/>
-          <p:nvPr/>
-        </p:nvSpPr>
-        <p:spPr>
-          <a:xfrm>
-            <a:off x="5925312" y="2423160"/>
-            <a:ext cx="640080" cy="640080"/>
+              <a:rPr lang="en-US" sz="1250" b="1" dirty="0">
+                <a:solidFill>
+                  <a:srgbClr val="8CC63F"/>
+                </a:solidFill>
+                <a:latin typeface="Malgun Gothic" pitchFamily="34" charset="0"/>
+                <a:ea typeface="Malgun Gothic" pitchFamily="34" charset="-122"/>
+                <a:cs typeface="Malgun Gothic" pitchFamily="34" charset="-120"/>
+              </a:rPr>
+              <a:t>③ read&lt;&lt;&lt;&gt;&gt;&gt; — p2 다시 검사</a:t>
+            </a:r>
+            <a:endParaRPr lang="en-US" sz="1250" dirty="0"/>
+          </a:p>
+        </p:txBody>
+      </p:sp>
+      <p:sp>
+        <p:nvSpPr>
+          <p:cNvPr id="21" name="Text 19"/>
+          <p:cNvSpPr/>
+          <p:nvPr/>
+        </p:nvSpPr>
+        <p:spPr>
+          <a:xfrm>
+            <a:off x="548640" y="6035040"/>
+            <a:ext cx="11064240" cy="365760"/>
           </a:xfrm>
           <a:prstGeom prst="rect">
             <a:avLst/>
@@ -8488,941 +9284,17 @@
               <a:buNone/>
             </a:pPr>
             <a:r>
-              <a:rPr lang="en-US" sz="1800" b="1" dirty="0">
+              <a:rPr lang="en-US" sz="1250" i="1" dirty="0">
                 <a:solidFill>
                   <a:srgbClr val="9AA6B2"/>
                 </a:solidFill>
-                <a:latin typeface="Courier New" pitchFamily="34" charset="0"/>
-                <a:ea typeface="Courier New" pitchFamily="34" charset="-122"/>
-                <a:cs typeface="Courier New" pitchFamily="34" charset="-120"/>
-              </a:rPr>
-              <a:t>0</a:t>
-            </a:r>
-            <a:endParaRPr lang="en-US" sz="1800" dirty="0"/>
-          </a:p>
-        </p:txBody>
-      </p:sp>
-      <p:sp>
-        <p:nvSpPr>
-          <p:cNvPr id="16" name="Shape 14"/>
-          <p:cNvSpPr/>
-          <p:nvPr/>
-        </p:nvSpPr>
-        <p:spPr>
-          <a:xfrm>
-            <a:off x="6675120" y="2423160"/>
-            <a:ext cx="640080" cy="640080"/>
-          </a:xfrm>
-          <a:prstGeom prst="roundRect">
-            <a:avLst>
-              <a:gd name="adj" fmla="val 7143"/>
-            </a:avLst>
-          </a:prstGeom>
-          <a:solidFill>
-            <a:srgbClr val="8CC63F"/>
-          </a:solidFill>
-          <a:ln w="12700">
-            <a:solidFill>
-              <a:srgbClr val="8CC63F"/>
-            </a:solidFill>
-            <a:prstDash val="solid"/>
-          </a:ln>
-        </p:spPr>
-      </p:sp>
-      <p:sp>
-        <p:nvSpPr>
-          <p:cNvPr id="17" name="Text 15"/>
-          <p:cNvSpPr/>
-          <p:nvPr/>
-        </p:nvSpPr>
-        <p:spPr>
-          <a:xfrm>
-            <a:off x="6675120" y="2423160"/>
-            <a:ext cx="640080" cy="640080"/>
-          </a:xfrm>
-          <a:prstGeom prst="rect">
-            <a:avLst/>
-          </a:prstGeom>
-          <a:noFill/>
-          <a:ln/>
-        </p:spPr>
-        <p:txBody>
-          <a:bodyPr wrap="square" lIns="0" tIns="0" rIns="0" bIns="0" rtlCol="0" anchor="ctr"/>
-          <a:lstStyle/>
-          <a:p>
-            <a:pPr algn="ctr" indent="0" marL="0">
-              <a:buNone/>
-            </a:pPr>
-            <a:r>
-              <a:rPr lang="en-US" sz="1800" b="1" dirty="0">
-                <a:solidFill>
-                  <a:srgbClr val="13161C"/>
-                </a:solidFill>
-                <a:latin typeface="Courier New" pitchFamily="34" charset="0"/>
-                <a:ea typeface="Courier New" pitchFamily="34" charset="-122"/>
-                <a:cs typeface="Courier New" pitchFamily="34" charset="-120"/>
-              </a:rPr>
-              <a:t>1</a:t>
-            </a:r>
-            <a:endParaRPr lang="en-US" sz="1800" dirty="0"/>
-          </a:p>
-        </p:txBody>
-      </p:sp>
-      <p:sp>
-        <p:nvSpPr>
-          <p:cNvPr id="18" name="Shape 16"/>
-          <p:cNvSpPr/>
-          <p:nvPr/>
-        </p:nvSpPr>
-        <p:spPr>
-          <a:xfrm>
-            <a:off x="7424928" y="2423160"/>
-            <a:ext cx="640080" cy="640080"/>
-          </a:xfrm>
-          <a:prstGeom prst="roundRect">
-            <a:avLst>
-              <a:gd name="adj" fmla="val 7143"/>
-            </a:avLst>
-          </a:prstGeom>
-          <a:solidFill>
-            <a:srgbClr val="0E1116"/>
-          </a:solidFill>
-          <a:ln w="12700">
-            <a:solidFill>
-              <a:srgbClr val="8CC63F"/>
-            </a:solidFill>
-            <a:prstDash val="solid"/>
-          </a:ln>
-        </p:spPr>
-      </p:sp>
-      <p:sp>
-        <p:nvSpPr>
-          <p:cNvPr id="19" name="Text 17"/>
-          <p:cNvSpPr/>
-          <p:nvPr/>
-        </p:nvSpPr>
-        <p:spPr>
-          <a:xfrm>
-            <a:off x="7424928" y="2423160"/>
-            <a:ext cx="640080" cy="640080"/>
-          </a:xfrm>
-          <a:prstGeom prst="rect">
-            <a:avLst/>
-          </a:prstGeom>
-          <a:noFill/>
-          <a:ln/>
-        </p:spPr>
-        <p:txBody>
-          <a:bodyPr wrap="square" lIns="0" tIns="0" rIns="0" bIns="0" rtlCol="0" anchor="ctr"/>
-          <a:lstStyle/>
-          <a:p>
-            <a:pPr algn="ctr" indent="0" marL="0">
-              <a:buNone/>
-            </a:pPr>
-            <a:r>
-              <a:rPr lang="en-US" sz="1800" b="1" dirty="0">
-                <a:solidFill>
-                  <a:srgbClr val="9AA6B2"/>
-                </a:solidFill>
-                <a:latin typeface="Courier New" pitchFamily="34" charset="0"/>
-                <a:ea typeface="Courier New" pitchFamily="34" charset="-122"/>
-                <a:cs typeface="Courier New" pitchFamily="34" charset="-120"/>
-              </a:rPr>
-              <a:t>0</a:t>
-            </a:r>
-            <a:endParaRPr lang="en-US" sz="1800" dirty="0"/>
-          </a:p>
-        </p:txBody>
-      </p:sp>
-      <p:sp>
-        <p:nvSpPr>
-          <p:cNvPr id="20" name="Shape 18"/>
-          <p:cNvSpPr/>
-          <p:nvPr/>
-        </p:nvSpPr>
-        <p:spPr>
-          <a:xfrm>
-            <a:off x="8174736" y="2423160"/>
-            <a:ext cx="640080" cy="640080"/>
-          </a:xfrm>
-          <a:prstGeom prst="roundRect">
-            <a:avLst>
-              <a:gd name="adj" fmla="val 7143"/>
-            </a:avLst>
-          </a:prstGeom>
-          <a:solidFill>
-            <a:srgbClr val="0E1116"/>
-          </a:solidFill>
-          <a:ln w="12700">
-            <a:solidFill>
-              <a:srgbClr val="8CC63F"/>
-            </a:solidFill>
-            <a:prstDash val="solid"/>
-          </a:ln>
-        </p:spPr>
-      </p:sp>
-      <p:sp>
-        <p:nvSpPr>
-          <p:cNvPr id="21" name="Text 19"/>
-          <p:cNvSpPr/>
-          <p:nvPr/>
-        </p:nvSpPr>
-        <p:spPr>
-          <a:xfrm>
-            <a:off x="8174736" y="2423160"/>
-            <a:ext cx="640080" cy="640080"/>
-          </a:xfrm>
-          <a:prstGeom prst="rect">
-            <a:avLst/>
-          </a:prstGeom>
-          <a:noFill/>
-          <a:ln/>
-        </p:spPr>
-        <p:txBody>
-          <a:bodyPr wrap="square" lIns="0" tIns="0" rIns="0" bIns="0" rtlCol="0" anchor="ctr"/>
-          <a:lstStyle/>
-          <a:p>
-            <a:pPr algn="ctr" indent="0" marL="0">
-              <a:buNone/>
-            </a:pPr>
-            <a:r>
-              <a:rPr lang="en-US" sz="1800" b="1" dirty="0">
-                <a:solidFill>
-                  <a:srgbClr val="9AA6B2"/>
-                </a:solidFill>
-                <a:latin typeface="Courier New" pitchFamily="34" charset="0"/>
-                <a:ea typeface="Courier New" pitchFamily="34" charset="-122"/>
-                <a:cs typeface="Courier New" pitchFamily="34" charset="-120"/>
-              </a:rPr>
-              <a:t>0</a:t>
-            </a:r>
-            <a:endParaRPr lang="en-US" sz="1800" dirty="0"/>
-          </a:p>
-        </p:txBody>
-      </p:sp>
-      <p:sp>
-        <p:nvSpPr>
-          <p:cNvPr id="22" name="Text 20"/>
-          <p:cNvSpPr/>
-          <p:nvPr/>
-        </p:nvSpPr>
-        <p:spPr>
-          <a:xfrm>
-            <a:off x="548640" y="3474720"/>
-            <a:ext cx="2194560" cy="548640"/>
-          </a:xfrm>
-          <a:prstGeom prst="rect">
-            <a:avLst/>
-          </a:prstGeom>
-          <a:noFill/>
-          <a:ln/>
-        </p:spPr>
-        <p:txBody>
-          <a:bodyPr wrap="square" lIns="0" tIns="0" rIns="0" bIns="0" rtlCol="0" anchor="ctr"/>
-          <a:lstStyle/>
-          <a:p>
-            <a:pPr indent="0" marL="0">
-              <a:buNone/>
-            </a:pPr>
-            <a:r>
-              <a:rPr lang="en-US" sz="1600" b="1" dirty="0">
-                <a:solidFill>
-                  <a:srgbClr val="4FB0C6"/>
-                </a:solidFill>
-                <a:latin typeface="Malgun Gothic" pitchFamily="34" charset="0"/>
-                <a:ea typeface="Malgun Gothic" pitchFamily="34" charset="-122"/>
-                <a:cs typeface="Malgun Gothic" pitchFamily="34" charset="-120"/>
-              </a:rPr>
-              <a:t>p2 = ~p1 =</a:t>
-            </a:r>
-            <a:endParaRPr lang="en-US" sz="1600" dirty="0"/>
-          </a:p>
-        </p:txBody>
-      </p:sp>
-      <p:sp>
-        <p:nvSpPr>
-          <p:cNvPr id="23" name="Shape 21"/>
-          <p:cNvSpPr/>
-          <p:nvPr/>
-        </p:nvSpPr>
-        <p:spPr>
-          <a:xfrm>
-            <a:off x="2926080" y="3429000"/>
-            <a:ext cx="640080" cy="640080"/>
-          </a:xfrm>
-          <a:prstGeom prst="roundRect">
-            <a:avLst>
-              <a:gd name="adj" fmla="val 7143"/>
-            </a:avLst>
-          </a:prstGeom>
-          <a:solidFill>
-            <a:srgbClr val="0E1116"/>
-          </a:solidFill>
-          <a:ln w="12700">
-            <a:solidFill>
-              <a:srgbClr val="4FB0C6"/>
-            </a:solidFill>
-            <a:prstDash val="solid"/>
-          </a:ln>
-        </p:spPr>
-      </p:sp>
-      <p:sp>
-        <p:nvSpPr>
-          <p:cNvPr id="24" name="Text 22"/>
-          <p:cNvSpPr/>
-          <p:nvPr/>
-        </p:nvSpPr>
-        <p:spPr>
-          <a:xfrm>
-            <a:off x="2926080" y="3429000"/>
-            <a:ext cx="640080" cy="640080"/>
-          </a:xfrm>
-          <a:prstGeom prst="rect">
-            <a:avLst/>
-          </a:prstGeom>
-          <a:noFill/>
-          <a:ln/>
-        </p:spPr>
-        <p:txBody>
-          <a:bodyPr wrap="square" lIns="0" tIns="0" rIns="0" bIns="0" rtlCol="0" anchor="ctr"/>
-          <a:lstStyle/>
-          <a:p>
-            <a:pPr algn="ctr" indent="0" marL="0">
-              <a:buNone/>
-            </a:pPr>
-            <a:r>
-              <a:rPr lang="en-US" sz="1800" b="1" dirty="0">
-                <a:solidFill>
-                  <a:srgbClr val="9AA6B2"/>
-                </a:solidFill>
-                <a:latin typeface="Courier New" pitchFamily="34" charset="0"/>
-                <a:ea typeface="Courier New" pitchFamily="34" charset="-122"/>
-                <a:cs typeface="Courier New" pitchFamily="34" charset="-120"/>
-              </a:rPr>
-              <a:t>0</a:t>
-            </a:r>
-            <a:endParaRPr lang="en-US" sz="1800" dirty="0"/>
-          </a:p>
-        </p:txBody>
-      </p:sp>
-      <p:sp>
-        <p:nvSpPr>
-          <p:cNvPr id="25" name="Shape 23"/>
-          <p:cNvSpPr/>
-          <p:nvPr/>
-        </p:nvSpPr>
-        <p:spPr>
-          <a:xfrm>
-            <a:off x="3675888" y="3429000"/>
-            <a:ext cx="640080" cy="640080"/>
-          </a:xfrm>
-          <a:prstGeom prst="roundRect">
-            <a:avLst>
-              <a:gd name="adj" fmla="val 7143"/>
-            </a:avLst>
-          </a:prstGeom>
-          <a:solidFill>
-            <a:srgbClr val="4FB0C6"/>
-          </a:solidFill>
-          <a:ln w="12700">
-            <a:solidFill>
-              <a:srgbClr val="4FB0C6"/>
-            </a:solidFill>
-            <a:prstDash val="solid"/>
-          </a:ln>
-        </p:spPr>
-      </p:sp>
-      <p:sp>
-        <p:nvSpPr>
-          <p:cNvPr id="26" name="Text 24"/>
-          <p:cNvSpPr/>
-          <p:nvPr/>
-        </p:nvSpPr>
-        <p:spPr>
-          <a:xfrm>
-            <a:off x="3675888" y="3429000"/>
-            <a:ext cx="640080" cy="640080"/>
-          </a:xfrm>
-          <a:prstGeom prst="rect">
-            <a:avLst/>
-          </a:prstGeom>
-          <a:noFill/>
-          <a:ln/>
-        </p:spPr>
-        <p:txBody>
-          <a:bodyPr wrap="square" lIns="0" tIns="0" rIns="0" bIns="0" rtlCol="0" anchor="ctr"/>
-          <a:lstStyle/>
-          <a:p>
-            <a:pPr algn="ctr" indent="0" marL="0">
-              <a:buNone/>
-            </a:pPr>
-            <a:r>
-              <a:rPr lang="en-US" sz="1800" b="1" dirty="0">
-                <a:solidFill>
-                  <a:srgbClr val="13161C"/>
-                </a:solidFill>
-                <a:latin typeface="Courier New" pitchFamily="34" charset="0"/>
-                <a:ea typeface="Courier New" pitchFamily="34" charset="-122"/>
-                <a:cs typeface="Courier New" pitchFamily="34" charset="-120"/>
-              </a:rPr>
-              <a:t>1</a:t>
-            </a:r>
-            <a:endParaRPr lang="en-US" sz="1800" dirty="0"/>
-          </a:p>
-        </p:txBody>
-      </p:sp>
-      <p:sp>
-        <p:nvSpPr>
-          <p:cNvPr id="27" name="Shape 25"/>
-          <p:cNvSpPr/>
-          <p:nvPr/>
-        </p:nvSpPr>
-        <p:spPr>
-          <a:xfrm>
-            <a:off x="4425696" y="3429000"/>
-            <a:ext cx="640080" cy="640080"/>
-          </a:xfrm>
-          <a:prstGeom prst="roundRect">
-            <a:avLst>
-              <a:gd name="adj" fmla="val 7143"/>
-            </a:avLst>
-          </a:prstGeom>
-          <a:solidFill>
-            <a:srgbClr val="0E1116"/>
-          </a:solidFill>
-          <a:ln w="12700">
-            <a:solidFill>
-              <a:srgbClr val="4FB0C6"/>
-            </a:solidFill>
-            <a:prstDash val="solid"/>
-          </a:ln>
-        </p:spPr>
-      </p:sp>
-      <p:sp>
-        <p:nvSpPr>
-          <p:cNvPr id="28" name="Text 26"/>
-          <p:cNvSpPr/>
-          <p:nvPr/>
-        </p:nvSpPr>
-        <p:spPr>
-          <a:xfrm>
-            <a:off x="4425696" y="3429000"/>
-            <a:ext cx="640080" cy="640080"/>
-          </a:xfrm>
-          <a:prstGeom prst="rect">
-            <a:avLst/>
-          </a:prstGeom>
-          <a:noFill/>
-          <a:ln/>
-        </p:spPr>
-        <p:txBody>
-          <a:bodyPr wrap="square" lIns="0" tIns="0" rIns="0" bIns="0" rtlCol="0" anchor="ctr"/>
-          <a:lstStyle/>
-          <a:p>
-            <a:pPr algn="ctr" indent="0" marL="0">
-              <a:buNone/>
-            </a:pPr>
-            <a:r>
-              <a:rPr lang="en-US" sz="1800" b="1" dirty="0">
-                <a:solidFill>
-                  <a:srgbClr val="9AA6B2"/>
-                </a:solidFill>
-                <a:latin typeface="Courier New" pitchFamily="34" charset="0"/>
-                <a:ea typeface="Courier New" pitchFamily="34" charset="-122"/>
-                <a:cs typeface="Courier New" pitchFamily="34" charset="-120"/>
-              </a:rPr>
-              <a:t>0</a:t>
-            </a:r>
-            <a:endParaRPr lang="en-US" sz="1800" dirty="0"/>
-          </a:p>
-        </p:txBody>
-      </p:sp>
-      <p:sp>
-        <p:nvSpPr>
-          <p:cNvPr id="29" name="Shape 27"/>
-          <p:cNvSpPr/>
-          <p:nvPr/>
-        </p:nvSpPr>
-        <p:spPr>
-          <a:xfrm>
-            <a:off x="5175504" y="3429000"/>
-            <a:ext cx="640080" cy="640080"/>
-          </a:xfrm>
-          <a:prstGeom prst="roundRect">
-            <a:avLst>
-              <a:gd name="adj" fmla="val 7143"/>
-            </a:avLst>
-          </a:prstGeom>
-          <a:solidFill>
-            <a:srgbClr val="0E1116"/>
-          </a:solidFill>
-          <a:ln w="12700">
-            <a:solidFill>
-              <a:srgbClr val="4FB0C6"/>
-            </a:solidFill>
-            <a:prstDash val="solid"/>
-          </a:ln>
-        </p:spPr>
-      </p:sp>
-      <p:sp>
-        <p:nvSpPr>
-          <p:cNvPr id="30" name="Text 28"/>
-          <p:cNvSpPr/>
-          <p:nvPr/>
-        </p:nvSpPr>
-        <p:spPr>
-          <a:xfrm>
-            <a:off x="5175504" y="3429000"/>
-            <a:ext cx="640080" cy="640080"/>
-          </a:xfrm>
-          <a:prstGeom prst="rect">
-            <a:avLst/>
-          </a:prstGeom>
-          <a:noFill/>
-          <a:ln/>
-        </p:spPr>
-        <p:txBody>
-          <a:bodyPr wrap="square" lIns="0" tIns="0" rIns="0" bIns="0" rtlCol="0" anchor="ctr"/>
-          <a:lstStyle/>
-          <a:p>
-            <a:pPr algn="ctr" indent="0" marL="0">
-              <a:buNone/>
-            </a:pPr>
-            <a:r>
-              <a:rPr lang="en-US" sz="1800" b="1" dirty="0">
-                <a:solidFill>
-                  <a:srgbClr val="9AA6B2"/>
-                </a:solidFill>
-                <a:latin typeface="Courier New" pitchFamily="34" charset="0"/>
-                <a:ea typeface="Courier New" pitchFamily="34" charset="-122"/>
-                <a:cs typeface="Courier New" pitchFamily="34" charset="-120"/>
-              </a:rPr>
-              <a:t>0</a:t>
-            </a:r>
-            <a:endParaRPr lang="en-US" sz="1800" dirty="0"/>
-          </a:p>
-        </p:txBody>
-      </p:sp>
-      <p:sp>
-        <p:nvSpPr>
-          <p:cNvPr id="31" name="Shape 29"/>
-          <p:cNvSpPr/>
-          <p:nvPr/>
-        </p:nvSpPr>
-        <p:spPr>
-          <a:xfrm>
-            <a:off x="5925312" y="3429000"/>
-            <a:ext cx="640080" cy="640080"/>
-          </a:xfrm>
-          <a:prstGeom prst="roundRect">
-            <a:avLst>
-              <a:gd name="adj" fmla="val 7143"/>
-            </a:avLst>
-          </a:prstGeom>
-          <a:solidFill>
-            <a:srgbClr val="4FB0C6"/>
-          </a:solidFill>
-          <a:ln w="12700">
-            <a:solidFill>
-              <a:srgbClr val="4FB0C6"/>
-            </a:solidFill>
-            <a:prstDash val="solid"/>
-          </a:ln>
-        </p:spPr>
-      </p:sp>
-      <p:sp>
-        <p:nvSpPr>
-          <p:cNvPr id="32" name="Text 30"/>
-          <p:cNvSpPr/>
-          <p:nvPr/>
-        </p:nvSpPr>
-        <p:spPr>
-          <a:xfrm>
-            <a:off x="5925312" y="3429000"/>
-            <a:ext cx="640080" cy="640080"/>
-          </a:xfrm>
-          <a:prstGeom prst="rect">
-            <a:avLst/>
-          </a:prstGeom>
-          <a:noFill/>
-          <a:ln/>
-        </p:spPr>
-        <p:txBody>
-          <a:bodyPr wrap="square" lIns="0" tIns="0" rIns="0" bIns="0" rtlCol="0" anchor="ctr"/>
-          <a:lstStyle/>
-          <a:p>
-            <a:pPr algn="ctr" indent="0" marL="0">
-              <a:buNone/>
-            </a:pPr>
-            <a:r>
-              <a:rPr lang="en-US" sz="1800" b="1" dirty="0">
-                <a:solidFill>
-                  <a:srgbClr val="13161C"/>
-                </a:solidFill>
-                <a:latin typeface="Courier New" pitchFamily="34" charset="0"/>
-                <a:ea typeface="Courier New" pitchFamily="34" charset="-122"/>
-                <a:cs typeface="Courier New" pitchFamily="34" charset="-120"/>
-              </a:rPr>
-              <a:t>1</a:t>
-            </a:r>
-            <a:endParaRPr lang="en-US" sz="1800" dirty="0"/>
-          </a:p>
-        </p:txBody>
-      </p:sp>
-      <p:sp>
-        <p:nvSpPr>
-          <p:cNvPr id="33" name="Shape 31"/>
-          <p:cNvSpPr/>
-          <p:nvPr/>
-        </p:nvSpPr>
-        <p:spPr>
-          <a:xfrm>
-            <a:off x="6675120" y="3429000"/>
-            <a:ext cx="640080" cy="640080"/>
-          </a:xfrm>
-          <a:prstGeom prst="roundRect">
-            <a:avLst>
-              <a:gd name="adj" fmla="val 7143"/>
-            </a:avLst>
-          </a:prstGeom>
-          <a:solidFill>
-            <a:srgbClr val="0E1116"/>
-          </a:solidFill>
-          <a:ln w="12700">
-            <a:solidFill>
-              <a:srgbClr val="4FB0C6"/>
-            </a:solidFill>
-            <a:prstDash val="solid"/>
-          </a:ln>
-        </p:spPr>
-      </p:sp>
-      <p:sp>
-        <p:nvSpPr>
-          <p:cNvPr id="34" name="Text 32"/>
-          <p:cNvSpPr/>
-          <p:nvPr/>
-        </p:nvSpPr>
-        <p:spPr>
-          <a:xfrm>
-            <a:off x="6675120" y="3429000"/>
-            <a:ext cx="640080" cy="640080"/>
-          </a:xfrm>
-          <a:prstGeom prst="rect">
-            <a:avLst/>
-          </a:prstGeom>
-          <a:noFill/>
-          <a:ln/>
-        </p:spPr>
-        <p:txBody>
-          <a:bodyPr wrap="square" lIns="0" tIns="0" rIns="0" bIns="0" rtlCol="0" anchor="ctr"/>
-          <a:lstStyle/>
-          <a:p>
-            <a:pPr algn="ctr" indent="0" marL="0">
-              <a:buNone/>
-            </a:pPr>
-            <a:r>
-              <a:rPr lang="en-US" sz="1800" b="1" dirty="0">
-                <a:solidFill>
-                  <a:srgbClr val="9AA6B2"/>
-                </a:solidFill>
-                <a:latin typeface="Courier New" pitchFamily="34" charset="0"/>
-                <a:ea typeface="Courier New" pitchFamily="34" charset="-122"/>
-                <a:cs typeface="Courier New" pitchFamily="34" charset="-120"/>
-              </a:rPr>
-              <a:t>0</a:t>
-            </a:r>
-            <a:endParaRPr lang="en-US" sz="1800" dirty="0"/>
-          </a:p>
-        </p:txBody>
-      </p:sp>
-      <p:sp>
-        <p:nvSpPr>
-          <p:cNvPr id="35" name="Shape 33"/>
-          <p:cNvSpPr/>
-          <p:nvPr/>
-        </p:nvSpPr>
-        <p:spPr>
-          <a:xfrm>
-            <a:off x="7424928" y="3429000"/>
-            <a:ext cx="640080" cy="640080"/>
-          </a:xfrm>
-          <a:prstGeom prst="roundRect">
-            <a:avLst>
-              <a:gd name="adj" fmla="val 7143"/>
-            </a:avLst>
-          </a:prstGeom>
-          <a:solidFill>
-            <a:srgbClr val="4FB0C6"/>
-          </a:solidFill>
-          <a:ln w="12700">
-            <a:solidFill>
-              <a:srgbClr val="4FB0C6"/>
-            </a:solidFill>
-            <a:prstDash val="solid"/>
-          </a:ln>
-        </p:spPr>
-      </p:sp>
-      <p:sp>
-        <p:nvSpPr>
-          <p:cNvPr id="36" name="Text 34"/>
-          <p:cNvSpPr/>
-          <p:nvPr/>
-        </p:nvSpPr>
-        <p:spPr>
-          <a:xfrm>
-            <a:off x="7424928" y="3429000"/>
-            <a:ext cx="640080" cy="640080"/>
-          </a:xfrm>
-          <a:prstGeom prst="rect">
-            <a:avLst/>
-          </a:prstGeom>
-          <a:noFill/>
-          <a:ln/>
-        </p:spPr>
-        <p:txBody>
-          <a:bodyPr wrap="square" lIns="0" tIns="0" rIns="0" bIns="0" rtlCol="0" anchor="ctr"/>
-          <a:lstStyle/>
-          <a:p>
-            <a:pPr algn="ctr" indent="0" marL="0">
-              <a:buNone/>
-            </a:pPr>
-            <a:r>
-              <a:rPr lang="en-US" sz="1800" b="1" dirty="0">
-                <a:solidFill>
-                  <a:srgbClr val="13161C"/>
-                </a:solidFill>
-                <a:latin typeface="Courier New" pitchFamily="34" charset="0"/>
-                <a:ea typeface="Courier New" pitchFamily="34" charset="-122"/>
-                <a:cs typeface="Courier New" pitchFamily="34" charset="-120"/>
-              </a:rPr>
-              <a:t>1</a:t>
-            </a:r>
-            <a:endParaRPr lang="en-US" sz="1800" dirty="0"/>
-          </a:p>
-        </p:txBody>
-      </p:sp>
-      <p:sp>
-        <p:nvSpPr>
-          <p:cNvPr id="37" name="Shape 35"/>
-          <p:cNvSpPr/>
-          <p:nvPr/>
-        </p:nvSpPr>
-        <p:spPr>
-          <a:xfrm>
-            <a:off x="8174736" y="3429000"/>
-            <a:ext cx="640080" cy="640080"/>
-          </a:xfrm>
-          <a:prstGeom prst="roundRect">
-            <a:avLst>
-              <a:gd name="adj" fmla="val 7143"/>
-            </a:avLst>
-          </a:prstGeom>
-          <a:solidFill>
-            <a:srgbClr val="4FB0C6"/>
-          </a:solidFill>
-          <a:ln w="12700">
-            <a:solidFill>
-              <a:srgbClr val="4FB0C6"/>
-            </a:solidFill>
-            <a:prstDash val="solid"/>
-          </a:ln>
-        </p:spPr>
-      </p:sp>
-      <p:sp>
-        <p:nvSpPr>
-          <p:cNvPr id="38" name="Text 36"/>
-          <p:cNvSpPr/>
-          <p:nvPr/>
-        </p:nvSpPr>
-        <p:spPr>
-          <a:xfrm>
-            <a:off x="8174736" y="3429000"/>
-            <a:ext cx="640080" cy="640080"/>
-          </a:xfrm>
-          <a:prstGeom prst="rect">
-            <a:avLst/>
-          </a:prstGeom>
-          <a:noFill/>
-          <a:ln/>
-        </p:spPr>
-        <p:txBody>
-          <a:bodyPr wrap="square" lIns="0" tIns="0" rIns="0" bIns="0" rtlCol="0" anchor="ctr"/>
-          <a:lstStyle/>
-          <a:p>
-            <a:pPr algn="ctr" indent="0" marL="0">
-              <a:buNone/>
-            </a:pPr>
-            <a:r>
-              <a:rPr lang="en-US" sz="1800" b="1" dirty="0">
-                <a:solidFill>
-                  <a:srgbClr val="13161C"/>
-                </a:solidFill>
-                <a:latin typeface="Courier New" pitchFamily="34" charset="0"/>
-                <a:ea typeface="Courier New" pitchFamily="34" charset="-122"/>
-                <a:cs typeface="Courier New" pitchFamily="34" charset="-120"/>
-              </a:rPr>
-              <a:t>1</a:t>
-            </a:r>
-            <a:endParaRPr lang="en-US" sz="1800" dirty="0"/>
-          </a:p>
-        </p:txBody>
-      </p:sp>
-      <p:sp>
-        <p:nvSpPr>
-          <p:cNvPr id="39" name="Text 37"/>
-          <p:cNvSpPr/>
-          <p:nvPr/>
-        </p:nvSpPr>
-        <p:spPr>
-          <a:xfrm>
-            <a:off x="2926080" y="3127248"/>
-            <a:ext cx="4572000" cy="274320"/>
-          </a:xfrm>
-          <a:prstGeom prst="rect">
-            <a:avLst/>
-          </a:prstGeom>
-          <a:noFill/>
-          <a:ln/>
-        </p:spPr>
-        <p:txBody>
-          <a:bodyPr wrap="square" lIns="0" tIns="0" rIns="0" bIns="0" rtlCol="0" anchor="ctr"/>
-          <a:lstStyle/>
-          <a:p>
-            <a:pPr indent="0" marL="0">
-              <a:buNone/>
-            </a:pPr>
-            <a:r>
-              <a:rPr lang="en-US" sz="1200" dirty="0">
-                <a:solidFill>
-                  <a:srgbClr val="9AA6B2"/>
-                </a:solidFill>
-                <a:latin typeface="Malgun Gothic" pitchFamily="34" charset="0"/>
-                <a:ea typeface="Malgun Gothic" pitchFamily="34" charset="-122"/>
-                <a:cs typeface="Malgun Gothic" pitchFamily="34" charset="-120"/>
-              </a:rPr>
-              <a:t>↓ 모든 비트 반전</a:t>
-            </a:r>
-            <a:endParaRPr lang="en-US" sz="1200" dirty="0"/>
-          </a:p>
-        </p:txBody>
-      </p:sp>
-      <p:sp>
-        <p:nvSpPr>
-          <p:cNvPr id="40" name="Text 38"/>
-          <p:cNvSpPr/>
-          <p:nvPr/>
-        </p:nvSpPr>
-        <p:spPr>
-          <a:xfrm>
-            <a:off x="548640" y="4480560"/>
-            <a:ext cx="11064240" cy="914400"/>
-          </a:xfrm>
-          <a:prstGeom prst="rect">
-            <a:avLst/>
-          </a:prstGeom>
-          <a:noFill/>
-          <a:ln/>
-        </p:spPr>
-        <p:txBody>
-          <a:bodyPr wrap="square" lIns="0" tIns="0" rIns="0" bIns="0" rtlCol="0" anchor="t"/>
-          <a:lstStyle/>
-          <a:p>
-            <a:pPr indent="0" marL="0">
-              <a:buNone/>
-            </a:pPr>
-            <a:r>
-              <a:rPr lang="en-US" sz="1600" b="1" dirty="0">
-                <a:solidFill>
-                  <a:srgbClr val="8CC63F"/>
-                </a:solidFill>
-                <a:latin typeface="Malgun Gothic" pitchFamily="34" charset="0"/>
-                <a:ea typeface="Malgun Gothic" pitchFamily="34" charset="-122"/>
-                <a:cs typeface="Malgun Gothic" pitchFamily="34" charset="-120"/>
-              </a:rPr>
-              <a:t>1로 고착된 비트</a:t>
-            </a:r>
-            <a:pPr indent="0" marL="0">
-              <a:buNone/>
-            </a:pPr>
-            <a:r>
-              <a:rPr lang="en-US" sz="1600" dirty="0">
-                <a:solidFill>
-                  <a:srgbClr val="E8EDF2"/>
-                </a:solidFill>
-                <a:latin typeface="Malgun Gothic" pitchFamily="34" charset="0"/>
-                <a:ea typeface="Malgun Gothic" pitchFamily="34" charset="-122"/>
-                <a:cs typeface="Malgun Gothic" pitchFamily="34" charset="-120"/>
-              </a:rPr>
-              <a:t>는 p2(0을 기대) 검사에서 걸리고, </a:t>
-            </a:r>
-            <a:pPr indent="0" marL="0">
-              <a:buNone/>
-            </a:pPr>
-            <a:r>
-              <a:rPr lang="en-US" sz="1600" b="1" dirty="0">
-                <a:solidFill>
-                  <a:srgbClr val="4FB0C6"/>
-                </a:solidFill>
-                <a:latin typeface="Malgun Gothic" pitchFamily="34" charset="0"/>
-                <a:ea typeface="Malgun Gothic" pitchFamily="34" charset="-122"/>
-                <a:cs typeface="Malgun Gothic" pitchFamily="34" charset="-120"/>
-              </a:rPr>
-              <a:t>0으로 고착된 비트</a:t>
-            </a:r>
-            <a:pPr indent="0" marL="0">
-              <a:buNone/>
-            </a:pPr>
-            <a:r>
-              <a:rPr lang="en-US" sz="1600" dirty="0">
-                <a:solidFill>
-                  <a:srgbClr val="E8EDF2"/>
-                </a:solidFill>
-                <a:latin typeface="Malgun Gothic" pitchFamily="34" charset="0"/>
-                <a:ea typeface="Malgun Gothic" pitchFamily="34" charset="-122"/>
-                <a:cs typeface="Malgun Gothic" pitchFamily="34" charset="-120"/>
-              </a:rPr>
-              <a:t>는 p1(1을 기대) 검사에서 걸립니다. 그래서 양방향 검사가 필요합니다.</a:t>
-            </a:r>
-            <a:endParaRPr lang="en-US" sz="1600" dirty="0"/>
-          </a:p>
-        </p:txBody>
-      </p:sp>
-      <p:sp>
-        <p:nvSpPr>
-          <p:cNvPr id="41" name="Text 39"/>
-          <p:cNvSpPr/>
-          <p:nvPr/>
-        </p:nvSpPr>
-        <p:spPr>
-          <a:xfrm>
-            <a:off x="548640" y="5577840"/>
-            <a:ext cx="11064240" cy="457200"/>
-          </a:xfrm>
-          <a:prstGeom prst="rect">
-            <a:avLst/>
-          </a:prstGeom>
-          <a:noFill/>
-          <a:ln/>
-        </p:spPr>
-        <p:txBody>
-          <a:bodyPr wrap="square" lIns="0" tIns="0" rIns="0" bIns="0" rtlCol="0" anchor="ctr"/>
-          <a:lstStyle/>
-          <a:p>
-            <a:pPr indent="0" marL="0">
-              <a:buNone/>
-            </a:pPr>
-            <a:r>
-              <a:rPr lang="en-US" sz="1300" i="1" dirty="0">
-                <a:solidFill>
-                  <a:srgbClr val="9AA6B2"/>
-                </a:solidFill>
-                <a:latin typeface="Malgun Gothic" pitchFamily="34" charset="0"/>
-                <a:ea typeface="Malgun Gothic" pitchFamily="34" charset="-122"/>
-                <a:cs typeface="Malgun Gothic" pitchFamily="34" charset="-120"/>
-              </a:rPr>
-              <a:t>Test 2는 p1=0x00000000, p2=0xFFFFFFFF (모두 0 / 모두 1)로 이 검사를 수행합니다. (tests.cpp:705)</a:t>
-            </a:r>
-            <a:endParaRPr lang="en-US" sz="1300" dirty="0"/>
+                <a:latin typeface="Malgun Gothic" pitchFamily="34" charset="0"/>
+                <a:ea typeface="Malgun Gothic" pitchFamily="34" charset="-122"/>
+                <a:cs typeface="Malgun Gothic" pitchFamily="34" charset="-120"/>
+              </a:rPr>
+              <a:t>핵심: ①과 ② 사이의 '커널 종료(flush)'가 있어야 ②가 메모리에 반영된 값을 읽습니다.</a:t>
+            </a:r>
+            <a:endParaRPr lang="en-US" sz="1250" dirty="0"/>
           </a:p>
         </p:txBody>
       </p:sp>
@@ -9495,7 +9367,7 @@
                 <a:ea typeface="Courier New" pitchFamily="34" charset="-122"/>
                 <a:cs typeface="Courier New" pitchFamily="34" charset="-120"/>
               </a:rPr>
-              <a:t>7</a:t>
+              <a:t>6</a:t>
             </a:r>
             <a:endParaRPr lang="en-US" sz="2200" dirty="0"/>
           </a:p>
@@ -9534,7 +9406,7 @@
                 <a:ea typeface="Malgun Gothic" pitchFamily="34" charset="-122"/>
                 <a:cs typeface="Malgun Gothic" pitchFamily="34" charset="-120"/>
               </a:rPr>
-              <a:t>오류가 CPU로 돌아오는 길</a:t>
+              <a:t>이동 반전(moving inversion) 알고리즘</a:t>
             </a:r>
             <a:endParaRPr lang="en-US" sz="3000" dirty="0"/>
           </a:p>
@@ -9542,18 +9414,162 @@
       </p:sp>
       <p:sp>
         <p:nvSpPr>
-          <p:cNvPr id="4" name="Shape 2"/>
-          <p:cNvSpPr/>
-          <p:nvPr/>
-        </p:nvSpPr>
-        <p:spPr>
-          <a:xfrm>
-            <a:off x="548640" y="1554480"/>
-            <a:ext cx="11064240" cy="2286000"/>
+          <p:cNvPr id="4" name="Text 2"/>
+          <p:cNvSpPr/>
+          <p:nvPr/>
+        </p:nvSpPr>
+        <p:spPr>
+          <a:xfrm>
+            <a:off x="548640" y="1463040"/>
+            <a:ext cx="11064240" cy="685800"/>
+          </a:xfrm>
+          <a:prstGeom prst="rect">
+            <a:avLst/>
+          </a:prstGeom>
+          <a:noFill/>
+          <a:ln/>
+        </p:spPr>
+        <p:txBody>
+          <a:bodyPr wrap="square" lIns="0" tIns="0" rIns="0" bIns="0" rtlCol="0" anchor="t"/>
+          <a:lstStyle/>
+          <a:p>
+            <a:pPr indent="0" marL="0">
+              <a:buNone/>
+            </a:pPr>
+            <a:r>
+              <a:rPr lang="en-US" sz="1600" dirty="0">
+                <a:solidFill>
+                  <a:srgbClr val="9AA6B2"/>
+                </a:solidFill>
+                <a:latin typeface="Malgun Gothic" pitchFamily="34" charset="0"/>
+                <a:ea typeface="Malgun Gothic" pitchFamily="34" charset="-122"/>
+                <a:cs typeface="Malgun Gothic" pitchFamily="34" charset="-120"/>
+              </a:rPr>
+              <a:t>패턴 p1을 썼다가, 확인 후 그 보수 p2 = ~p1로 뒤집어 다시 확인합니다. 비트를 양방향으로 검사해 고착 오류를 잡습니다.</a:t>
+            </a:r>
+            <a:endParaRPr lang="en-US" sz="1600" dirty="0"/>
+          </a:p>
+        </p:txBody>
+      </p:sp>
+      <p:sp>
+        <p:nvSpPr>
+          <p:cNvPr id="5" name="Text 3"/>
+          <p:cNvSpPr/>
+          <p:nvPr/>
+        </p:nvSpPr>
+        <p:spPr>
+          <a:xfrm>
+            <a:off x="548640" y="2468880"/>
+            <a:ext cx="2194560" cy="548640"/>
+          </a:xfrm>
+          <a:prstGeom prst="rect">
+            <a:avLst/>
+          </a:prstGeom>
+          <a:noFill/>
+          <a:ln/>
+        </p:spPr>
+        <p:txBody>
+          <a:bodyPr wrap="square" lIns="0" tIns="0" rIns="0" bIns="0" rtlCol="0" anchor="ctr"/>
+          <a:lstStyle/>
+          <a:p>
+            <a:pPr indent="0" marL="0">
+              <a:buNone/>
+            </a:pPr>
+            <a:r>
+              <a:rPr lang="en-US" sz="1600" b="1" dirty="0">
+                <a:solidFill>
+                  <a:srgbClr val="8CC63F"/>
+                </a:solidFill>
+                <a:latin typeface="Malgun Gothic" pitchFamily="34" charset="0"/>
+                <a:ea typeface="Malgun Gothic" pitchFamily="34" charset="-122"/>
+                <a:cs typeface="Malgun Gothic" pitchFamily="34" charset="-120"/>
+              </a:rPr>
+              <a:t>p1 =</a:t>
+            </a:r>
+            <a:endParaRPr lang="en-US" sz="1600" dirty="0"/>
+          </a:p>
+        </p:txBody>
+      </p:sp>
+      <p:sp>
+        <p:nvSpPr>
+          <p:cNvPr id="6" name="Shape 4"/>
+          <p:cNvSpPr/>
+          <p:nvPr/>
+        </p:nvSpPr>
+        <p:spPr>
+          <a:xfrm>
+            <a:off x="2926080" y="2423160"/>
+            <a:ext cx="640080" cy="640080"/>
           </a:xfrm>
           <a:prstGeom prst="roundRect">
             <a:avLst>
-              <a:gd name="adj" fmla="val 2400"/>
+              <a:gd name="adj" fmla="val 7143"/>
+            </a:avLst>
+          </a:prstGeom>
+          <a:solidFill>
+            <a:srgbClr val="8CC63F"/>
+          </a:solidFill>
+          <a:ln w="12700">
+            <a:solidFill>
+              <a:srgbClr val="8CC63F"/>
+            </a:solidFill>
+            <a:prstDash val="solid"/>
+          </a:ln>
+        </p:spPr>
+      </p:sp>
+      <p:sp>
+        <p:nvSpPr>
+          <p:cNvPr id="7" name="Text 5"/>
+          <p:cNvSpPr/>
+          <p:nvPr/>
+        </p:nvSpPr>
+        <p:spPr>
+          <a:xfrm>
+            <a:off x="2926080" y="2423160"/>
+            <a:ext cx="640080" cy="640080"/>
+          </a:xfrm>
+          <a:prstGeom prst="rect">
+            <a:avLst/>
+          </a:prstGeom>
+          <a:noFill/>
+          <a:ln/>
+        </p:spPr>
+        <p:txBody>
+          <a:bodyPr wrap="square" lIns="0" tIns="0" rIns="0" bIns="0" rtlCol="0" anchor="ctr"/>
+          <a:lstStyle/>
+          <a:p>
+            <a:pPr algn="ctr" indent="0" marL="0">
+              <a:buNone/>
+            </a:pPr>
+            <a:r>
+              <a:rPr lang="en-US" sz="1800" b="1" dirty="0">
+                <a:solidFill>
+                  <a:srgbClr val="13161C"/>
+                </a:solidFill>
+                <a:latin typeface="Courier New" pitchFamily="34" charset="0"/>
+                <a:ea typeface="Courier New" pitchFamily="34" charset="-122"/>
+                <a:cs typeface="Courier New" pitchFamily="34" charset="-120"/>
+              </a:rPr>
+              <a:t>1</a:t>
+            </a:r>
+            <a:endParaRPr lang="en-US" sz="1800" dirty="0"/>
+          </a:p>
+        </p:txBody>
+      </p:sp>
+      <p:sp>
+        <p:nvSpPr>
+          <p:cNvPr id="8" name="Shape 6"/>
+          <p:cNvSpPr/>
+          <p:nvPr/>
+        </p:nvSpPr>
+        <p:spPr>
+          <a:xfrm>
+            <a:off x="3675888" y="2423160"/>
+            <a:ext cx="640080" cy="640080"/>
+          </a:xfrm>
+          <a:prstGeom prst="roundRect">
+            <a:avLst>
+              <a:gd name="adj" fmla="val 7143"/>
             </a:avLst>
           </a:prstGeom>
           <a:solidFill>
@@ -9561,7 +9577,7 @@
           </a:solidFill>
           <a:ln w="12700">
             <a:solidFill>
-              <a:srgbClr val="2C3440"/>
+              <a:srgbClr val="8CC63F"/>
             </a:solidFill>
             <a:prstDash val="solid"/>
           </a:ln>
@@ -9569,33 +9585,30 @@
       </p:sp>
       <p:sp>
         <p:nvSpPr>
-          <p:cNvPr id="5" name="Text 3"/>
-          <p:cNvSpPr/>
-          <p:nvPr/>
-        </p:nvSpPr>
-        <p:spPr>
-          <a:xfrm>
-            <a:off x="749808" y="1700784"/>
-            <a:ext cx="10661904" cy="1993392"/>
-          </a:xfrm>
-          <a:prstGeom prst="rect">
-            <a:avLst/>
-          </a:prstGeom>
-          <a:noFill/>
-          <a:ln/>
-        </p:spPr>
-        <p:txBody>
-          <a:bodyPr wrap="square" lIns="0" tIns="0" rIns="0" bIns="0" rtlCol="0" anchor="t"/>
-          <a:lstStyle/>
-          <a:p>
-            <a:pPr algn="l" indent="0" marL="0">
-              <a:lnSpc>
-                <a:spcPct val="108000"/>
-              </a:lnSpc>
-              <a:buNone/>
-            </a:pPr>
-            <a:r>
-              <a:rPr lang="en-US" sz="1350" dirty="0">
+          <p:cNvPr id="9" name="Text 7"/>
+          <p:cNvSpPr/>
+          <p:nvPr/>
+        </p:nvSpPr>
+        <p:spPr>
+          <a:xfrm>
+            <a:off x="3675888" y="2423160"/>
+            <a:ext cx="640080" cy="640080"/>
+          </a:xfrm>
+          <a:prstGeom prst="rect">
+            <a:avLst/>
+          </a:prstGeom>
+          <a:noFill/>
+          <a:ln/>
+        </p:spPr>
+        <p:txBody>
+          <a:bodyPr wrap="square" lIns="0" tIns="0" rIns="0" bIns="0" rtlCol="0" anchor="ctr"/>
+          <a:lstStyle/>
+          <a:p>
+            <a:pPr algn="ctr" indent="0" marL="0">
+              <a:buNone/>
+            </a:pPr>
+            <a:r>
+              <a:rPr lang="en-US" sz="1800" b="1" dirty="0">
                 <a:solidFill>
                   <a:srgbClr val="9AA6B2"/>
                 </a:solidFill>
@@ -9603,205 +9616,313 @@
                 <a:ea typeface="Courier New" pitchFamily="34" charset="-122"/>
                 <a:cs typeface="Courier New" pitchFamily="34" charset="-120"/>
               </a:rPr>
-              <a:t>// error_checking()  tests.cpp:108</a:t>
-            </a:r>
-            <a:endParaRPr lang="en-US" sz="1350" dirty="0"/>
-          </a:p>
-          <a:p>
-            <a:pPr algn="l" indent="0" marL="0">
-              <a:lnSpc>
-                <a:spcPct val="108000"/>
-              </a:lnSpc>
-              <a:buNone/>
-            </a:pPr>
-            <a:r>
-              <a:rPr lang="en-US" sz="1350" dirty="0">
-                <a:solidFill>
-                  <a:srgbClr val="E8EDF2"/>
+              <a:t>0</a:t>
+            </a:r>
+            <a:endParaRPr lang="en-US" sz="1800" dirty="0"/>
+          </a:p>
+        </p:txBody>
+      </p:sp>
+      <p:sp>
+        <p:nvSpPr>
+          <p:cNvPr id="10" name="Shape 8"/>
+          <p:cNvSpPr/>
+          <p:nvPr/>
+        </p:nvSpPr>
+        <p:spPr>
+          <a:xfrm>
+            <a:off x="4425696" y="2423160"/>
+            <a:ext cx="640080" cy="640080"/>
+          </a:xfrm>
+          <a:prstGeom prst="roundRect">
+            <a:avLst>
+              <a:gd name="adj" fmla="val 7143"/>
+            </a:avLst>
+          </a:prstGeom>
+          <a:solidFill>
+            <a:srgbClr val="8CC63F"/>
+          </a:solidFill>
+          <a:ln w="12700">
+            <a:solidFill>
+              <a:srgbClr val="8CC63F"/>
+            </a:solidFill>
+            <a:prstDash val="solid"/>
+          </a:ln>
+        </p:spPr>
+      </p:sp>
+      <p:sp>
+        <p:nvSpPr>
+          <p:cNvPr id="11" name="Text 9"/>
+          <p:cNvSpPr/>
+          <p:nvPr/>
+        </p:nvSpPr>
+        <p:spPr>
+          <a:xfrm>
+            <a:off x="4425696" y="2423160"/>
+            <a:ext cx="640080" cy="640080"/>
+          </a:xfrm>
+          <a:prstGeom prst="rect">
+            <a:avLst/>
+          </a:prstGeom>
+          <a:noFill/>
+          <a:ln/>
+        </p:spPr>
+        <p:txBody>
+          <a:bodyPr wrap="square" lIns="0" tIns="0" rIns="0" bIns="0" rtlCol="0" anchor="ctr"/>
+          <a:lstStyle/>
+          <a:p>
+            <a:pPr algn="ctr" indent="0" marL="0">
+              <a:buNone/>
+            </a:pPr>
+            <a:r>
+              <a:rPr lang="en-US" sz="1800" b="1" dirty="0">
+                <a:solidFill>
+                  <a:srgbClr val="13161C"/>
                 </a:solidFill>
                 <a:latin typeface="Courier New" pitchFamily="34" charset="0"/>
                 <a:ea typeface="Courier New" pitchFamily="34" charset="-122"/>
                 <a:cs typeface="Courier New" pitchFamily="34" charset="-120"/>
               </a:rPr>
-              <a:t>unsigned int err = 0;</a:t>
-            </a:r>
-            <a:endParaRPr lang="en-US" sz="1350" dirty="0"/>
-          </a:p>
-          <a:p>
-            <a:pPr algn="l" indent="0" marL="0">
-              <a:lnSpc>
-                <a:spcPct val="108000"/>
-              </a:lnSpc>
-              <a:buNone/>
-            </a:pPr>
-            <a:r>
-              <a:rPr lang="en-US" sz="1350" dirty="0">
-                <a:solidFill>
-                  <a:srgbClr val="E8EDF2"/>
+              <a:t>1</a:t>
+            </a:r>
+            <a:endParaRPr lang="en-US" sz="1800" dirty="0"/>
+          </a:p>
+        </p:txBody>
+      </p:sp>
+      <p:sp>
+        <p:nvSpPr>
+          <p:cNvPr id="12" name="Shape 10"/>
+          <p:cNvSpPr/>
+          <p:nvPr/>
+        </p:nvSpPr>
+        <p:spPr>
+          <a:xfrm>
+            <a:off x="5175504" y="2423160"/>
+            <a:ext cx="640080" cy="640080"/>
+          </a:xfrm>
+          <a:prstGeom prst="roundRect">
+            <a:avLst>
+              <a:gd name="adj" fmla="val 7143"/>
+            </a:avLst>
+          </a:prstGeom>
+          <a:solidFill>
+            <a:srgbClr val="8CC63F"/>
+          </a:solidFill>
+          <a:ln w="12700">
+            <a:solidFill>
+              <a:srgbClr val="8CC63F"/>
+            </a:solidFill>
+            <a:prstDash val="solid"/>
+          </a:ln>
+        </p:spPr>
+      </p:sp>
+      <p:sp>
+        <p:nvSpPr>
+          <p:cNvPr id="13" name="Text 11"/>
+          <p:cNvSpPr/>
+          <p:nvPr/>
+        </p:nvSpPr>
+        <p:spPr>
+          <a:xfrm>
+            <a:off x="5175504" y="2423160"/>
+            <a:ext cx="640080" cy="640080"/>
+          </a:xfrm>
+          <a:prstGeom prst="rect">
+            <a:avLst/>
+          </a:prstGeom>
+          <a:noFill/>
+          <a:ln/>
+        </p:spPr>
+        <p:txBody>
+          <a:bodyPr wrap="square" lIns="0" tIns="0" rIns="0" bIns="0" rtlCol="0" anchor="ctr"/>
+          <a:lstStyle/>
+          <a:p>
+            <a:pPr algn="ctr" indent="0" marL="0">
+              <a:buNone/>
+            </a:pPr>
+            <a:r>
+              <a:rPr lang="en-US" sz="1800" b="1" dirty="0">
+                <a:solidFill>
+                  <a:srgbClr val="13161C"/>
                 </a:solidFill>
                 <a:latin typeface="Courier New" pitchFamily="34" charset="0"/>
                 <a:ea typeface="Courier New" pitchFamily="34" charset="-122"/>
                 <a:cs typeface="Courier New" pitchFamily="34" charset="-120"/>
               </a:rPr>
-              <a:t>cudaMemcpy(&amp;err, err_count, sizeof(unsigned int),</a:t>
-            </a:r>
-            <a:endParaRPr lang="en-US" sz="1350" dirty="0"/>
-          </a:p>
-          <a:p>
-            <a:pPr algn="l" indent="0" marL="0">
-              <a:lnSpc>
-                <a:spcPct val="108000"/>
-              </a:lnSpc>
-              <a:buNone/>
-            </a:pPr>
-            <a:r>
-              <a:rPr lang="en-US" sz="1350" dirty="0">
-                <a:solidFill>
-                  <a:srgbClr val="8CC63F"/>
+              <a:t>1</a:t>
+            </a:r>
+            <a:endParaRPr lang="en-US" sz="1800" dirty="0"/>
+          </a:p>
+        </p:txBody>
+      </p:sp>
+      <p:sp>
+        <p:nvSpPr>
+          <p:cNvPr id="14" name="Shape 12"/>
+          <p:cNvSpPr/>
+          <p:nvPr/>
+        </p:nvSpPr>
+        <p:spPr>
+          <a:xfrm>
+            <a:off x="5925312" y="2423160"/>
+            <a:ext cx="640080" cy="640080"/>
+          </a:xfrm>
+          <a:prstGeom prst="roundRect">
+            <a:avLst>
+              <a:gd name="adj" fmla="val 7143"/>
+            </a:avLst>
+          </a:prstGeom>
+          <a:solidFill>
+            <a:srgbClr val="0E1116"/>
+          </a:solidFill>
+          <a:ln w="12700">
+            <a:solidFill>
+              <a:srgbClr val="8CC63F"/>
+            </a:solidFill>
+            <a:prstDash val="solid"/>
+          </a:ln>
+        </p:spPr>
+      </p:sp>
+      <p:sp>
+        <p:nvSpPr>
+          <p:cNvPr id="15" name="Text 13"/>
+          <p:cNvSpPr/>
+          <p:nvPr/>
+        </p:nvSpPr>
+        <p:spPr>
+          <a:xfrm>
+            <a:off x="5925312" y="2423160"/>
+            <a:ext cx="640080" cy="640080"/>
+          </a:xfrm>
+          <a:prstGeom prst="rect">
+            <a:avLst/>
+          </a:prstGeom>
+          <a:noFill/>
+          <a:ln/>
+        </p:spPr>
+        <p:txBody>
+          <a:bodyPr wrap="square" lIns="0" tIns="0" rIns="0" bIns="0" rtlCol="0" anchor="ctr"/>
+          <a:lstStyle/>
+          <a:p>
+            <a:pPr algn="ctr" indent="0" marL="0">
+              <a:buNone/>
+            </a:pPr>
+            <a:r>
+              <a:rPr lang="en-US" sz="1800" b="1" dirty="0">
+                <a:solidFill>
+                  <a:srgbClr val="9AA6B2"/>
                 </a:solidFill>
                 <a:latin typeface="Courier New" pitchFamily="34" charset="0"/>
                 <a:ea typeface="Courier New" pitchFamily="34" charset="-122"/>
                 <a:cs typeface="Courier New" pitchFamily="34" charset="-120"/>
               </a:rPr>
-              <a:t>           cudaMemcpyDeviceToHost);   // GPU 카운터 → CPU 변수</a:t>
-            </a:r>
-            <a:endParaRPr lang="en-US" sz="1350" dirty="0"/>
-          </a:p>
-          <a:p>
-            <a:pPr algn="l" indent="0" marL="0">
-              <a:lnSpc>
-                <a:spcPct val="108000"/>
-              </a:lnSpc>
-              <a:buNone/>
-            </a:pPr>
-            <a:r>
-              <a:rPr lang="en-US" sz="1350" dirty="0">
-                <a:solidFill>
-                  <a:srgbClr val="E8EDF2"/>
+              <a:t>0</a:t>
+            </a:r>
+            <a:endParaRPr lang="en-US" sz="1800" dirty="0"/>
+          </a:p>
+        </p:txBody>
+      </p:sp>
+      <p:sp>
+        <p:nvSpPr>
+          <p:cNvPr id="16" name="Shape 14"/>
+          <p:cNvSpPr/>
+          <p:nvPr/>
+        </p:nvSpPr>
+        <p:spPr>
+          <a:xfrm>
+            <a:off x="6675120" y="2423160"/>
+            <a:ext cx="640080" cy="640080"/>
+          </a:xfrm>
+          <a:prstGeom prst="roundRect">
+            <a:avLst>
+              <a:gd name="adj" fmla="val 7143"/>
+            </a:avLst>
+          </a:prstGeom>
+          <a:solidFill>
+            <a:srgbClr val="8CC63F"/>
+          </a:solidFill>
+          <a:ln w="12700">
+            <a:solidFill>
+              <a:srgbClr val="8CC63F"/>
+            </a:solidFill>
+            <a:prstDash val="solid"/>
+          </a:ln>
+        </p:spPr>
+      </p:sp>
+      <p:sp>
+        <p:nvSpPr>
+          <p:cNvPr id="17" name="Text 15"/>
+          <p:cNvSpPr/>
+          <p:nvPr/>
+        </p:nvSpPr>
+        <p:spPr>
+          <a:xfrm>
+            <a:off x="6675120" y="2423160"/>
+            <a:ext cx="640080" cy="640080"/>
+          </a:xfrm>
+          <a:prstGeom prst="rect">
+            <a:avLst/>
+          </a:prstGeom>
+          <a:noFill/>
+          <a:ln/>
+        </p:spPr>
+        <p:txBody>
+          <a:bodyPr wrap="square" lIns="0" tIns="0" rIns="0" bIns="0" rtlCol="0" anchor="ctr"/>
+          <a:lstStyle/>
+          <a:p>
+            <a:pPr algn="ctr" indent="0" marL="0">
+              <a:buNone/>
+            </a:pPr>
+            <a:r>
+              <a:rPr lang="en-US" sz="1800" b="1" dirty="0">
+                <a:solidFill>
+                  <a:srgbClr val="13161C"/>
                 </a:solidFill>
                 <a:latin typeface="Courier New" pitchFamily="34" charset="0"/>
                 <a:ea typeface="Courier New" pitchFamily="34" charset="-122"/>
                 <a:cs typeface="Courier New" pitchFamily="34" charset="-120"/>
               </a:rPr>
-              <a:t>if (err) {  /* 오류 주소·기대값·현재값을 출력·기록 */  }</a:t>
-            </a:r>
-            <a:endParaRPr lang="en-US" sz="1350" dirty="0"/>
-          </a:p>
-        </p:txBody>
-      </p:sp>
-      <p:sp>
-        <p:nvSpPr>
-          <p:cNvPr id="6" name="Text 4"/>
-          <p:cNvSpPr/>
-          <p:nvPr/>
-        </p:nvSpPr>
-        <p:spPr>
-          <a:xfrm>
-            <a:off x="548640" y="4023360"/>
-            <a:ext cx="11064240" cy="822960"/>
-          </a:xfrm>
-          <a:prstGeom prst="rect">
-            <a:avLst/>
-          </a:prstGeom>
-          <a:noFill/>
-          <a:ln/>
-        </p:spPr>
-        <p:txBody>
-          <a:bodyPr wrap="square" lIns="0" tIns="0" rIns="0" bIns="0" rtlCol="0" anchor="t"/>
-          <a:lstStyle/>
-          <a:p>
-            <a:pPr indent="0" marL="0">
-              <a:buNone/>
-            </a:pPr>
-            <a:r>
-              <a:rPr lang="en-US" sz="1700" b="1" dirty="0">
-                <a:solidFill>
-                  <a:srgbClr val="8CC63F"/>
-                </a:solidFill>
-                <a:latin typeface="Malgun Gothic" pitchFamily="34" charset="0"/>
-                <a:ea typeface="Malgun Gothic" pitchFamily="34" charset="-122"/>
-                <a:cs typeface="Malgun Gothic" pitchFamily="34" charset="-120"/>
-              </a:rPr>
-              <a:t>err_count</a:t>
-            </a:r>
-            <a:pPr indent="0" marL="0">
-              <a:buNone/>
-            </a:pPr>
-            <a:r>
-              <a:rPr lang="en-US" sz="1700" dirty="0">
-                <a:solidFill>
-                  <a:srgbClr val="E8EDF2"/>
-                </a:solidFill>
-                <a:latin typeface="Malgun Gothic" pitchFamily="34" charset="0"/>
-                <a:ea typeface="Malgun Gothic" pitchFamily="34" charset="-122"/>
-                <a:cs typeface="Malgun Gothic" pitchFamily="34" charset="-120"/>
-              </a:rPr>
-              <a:t>는 GPU에 있는 디바이스 포인터입니다. CPU는 그 값을 </a:t>
-            </a:r>
-            <a:pPr indent="0" marL="0">
-              <a:buNone/>
-            </a:pPr>
-            <a:r>
-              <a:rPr lang="en-US" sz="1700" b="1" dirty="0">
-                <a:solidFill>
-                  <a:srgbClr val="E0A458"/>
-                </a:solidFill>
-                <a:latin typeface="Malgun Gothic" pitchFamily="34" charset="0"/>
-                <a:ea typeface="Malgun Gothic" pitchFamily="34" charset="-122"/>
-                <a:cs typeface="Malgun Gothic" pitchFamily="34" charset="-120"/>
-              </a:rPr>
-              <a:t>직접 읽을 수 없어</a:t>
-            </a:r>
-            <a:pPr indent="0" marL="0">
-              <a:buNone/>
-            </a:pPr>
-            <a:r>
-              <a:rPr lang="en-US" sz="1700" dirty="0">
-                <a:solidFill>
-                  <a:srgbClr val="E8EDF2"/>
-                </a:solidFill>
-                <a:latin typeface="Malgun Gothic" pitchFamily="34" charset="0"/>
-                <a:ea typeface="Malgun Gothic" pitchFamily="34" charset="-122"/>
-                <a:cs typeface="Malgun Gothic" pitchFamily="34" charset="-120"/>
-              </a:rPr>
-              <a:t> 반드시 cudaMemcpy로 가져와야 합니다.</a:t>
-            </a:r>
-            <a:endParaRPr lang="en-US" sz="1700" dirty="0"/>
-          </a:p>
-        </p:txBody>
-      </p:sp>
-      <p:sp>
-        <p:nvSpPr>
-          <p:cNvPr id="7" name="Shape 5"/>
-          <p:cNvSpPr/>
-          <p:nvPr/>
-        </p:nvSpPr>
-        <p:spPr>
-          <a:xfrm>
-            <a:off x="548640" y="4892040"/>
-            <a:ext cx="5349240" cy="1005840"/>
+              <a:t>1</a:t>
+            </a:r>
+            <a:endParaRPr lang="en-US" sz="1800" dirty="0"/>
+          </a:p>
+        </p:txBody>
+      </p:sp>
+      <p:sp>
+        <p:nvSpPr>
+          <p:cNvPr id="18" name="Shape 16"/>
+          <p:cNvSpPr/>
+          <p:nvPr/>
+        </p:nvSpPr>
+        <p:spPr>
+          <a:xfrm>
+            <a:off x="7424928" y="2423160"/>
+            <a:ext cx="640080" cy="640080"/>
           </a:xfrm>
           <a:prstGeom prst="roundRect">
             <a:avLst>
-              <a:gd name="adj" fmla="val 7273"/>
+              <a:gd name="adj" fmla="val 7143"/>
             </a:avLst>
           </a:prstGeom>
           <a:solidFill>
-            <a:srgbClr val="1E232C"/>
+            <a:srgbClr val="0E1116"/>
           </a:solidFill>
-          <a:ln/>
-        </p:spPr>
-      </p:sp>
-      <p:sp>
-        <p:nvSpPr>
-          <p:cNvPr id="8" name="Text 6"/>
-          <p:cNvSpPr/>
-          <p:nvPr/>
-        </p:nvSpPr>
-        <p:spPr>
-          <a:xfrm>
-            <a:off x="777240" y="5029200"/>
-            <a:ext cx="4892040" cy="365760"/>
+          <a:ln w="12700">
+            <a:solidFill>
+              <a:srgbClr val="8CC63F"/>
+            </a:solidFill>
+            <a:prstDash val="solid"/>
+          </a:ln>
+        </p:spPr>
+      </p:sp>
+      <p:sp>
+        <p:nvSpPr>
+          <p:cNvPr id="19" name="Text 17"/>
+          <p:cNvSpPr/>
+          <p:nvPr/>
+        </p:nvSpPr>
+        <p:spPr>
+          <a:xfrm>
+            <a:off x="7424928" y="2423160"/>
+            <a:ext cx="640080" cy="640080"/>
           </a:xfrm>
           <a:prstGeom prst="rect">
             <a:avLst/>
@@ -9813,95 +9934,61 @@
           <a:bodyPr wrap="square" lIns="0" tIns="0" rIns="0" bIns="0" rtlCol="0" anchor="ctr"/>
           <a:lstStyle/>
           <a:p>
-            <a:pPr indent="0" marL="0">
-              <a:buNone/>
-            </a:pPr>
-            <a:r>
-              <a:rPr lang="en-US" sz="1500" b="1" dirty="0">
-                <a:solidFill>
-                  <a:srgbClr val="8CC63F"/>
-                </a:solidFill>
-                <a:latin typeface="Malgun Gothic" pitchFamily="34" charset="0"/>
-                <a:ea typeface="Malgun Gothic" pitchFamily="34" charset="-122"/>
-                <a:cs typeface="Malgun Gothic" pitchFamily="34" charset="-120"/>
-              </a:rPr>
-              <a:t>기록되는 정보</a:t>
-            </a:r>
-            <a:endParaRPr lang="en-US" sz="1500" dirty="0"/>
-          </a:p>
-        </p:txBody>
-      </p:sp>
-      <p:sp>
-        <p:nvSpPr>
-          <p:cNvPr id="9" name="Text 7"/>
-          <p:cNvSpPr/>
-          <p:nvPr/>
-        </p:nvSpPr>
-        <p:spPr>
-          <a:xfrm>
-            <a:off x="777240" y="5394960"/>
-            <a:ext cx="4892040" cy="411480"/>
-          </a:xfrm>
-          <a:prstGeom prst="rect">
-            <a:avLst/>
-          </a:prstGeom>
-          <a:noFill/>
-          <a:ln/>
-        </p:spPr>
-        <p:txBody>
-          <a:bodyPr wrap="square" lIns="0" tIns="0" rIns="0" bIns="0" rtlCol="0" anchor="ctr"/>
-          <a:lstStyle/>
-          <a:p>
-            <a:pPr indent="0" marL="0">
-              <a:buNone/>
-            </a:pPr>
-            <a:r>
-              <a:rPr lang="en-US" sz="1400" dirty="0">
-                <a:solidFill>
-                  <a:srgbClr val="E8EDF2"/>
-                </a:solidFill>
-                <a:latin typeface="Malgun Gothic" pitchFamily="34" charset="0"/>
-                <a:ea typeface="Malgun Gothic" pitchFamily="34" charset="-122"/>
-                <a:cs typeface="Malgun Gothic" pitchFamily="34" charset="-120"/>
-              </a:rPr>
-              <a:t>오류 주소 · 기대값 · 실제값 · 재읽기값</a:t>
-            </a:r>
-            <a:endParaRPr lang="en-US" sz="1400" dirty="0"/>
-          </a:p>
-        </p:txBody>
-      </p:sp>
-      <p:sp>
-        <p:nvSpPr>
-          <p:cNvPr id="10" name="Shape 8"/>
-          <p:cNvSpPr/>
-          <p:nvPr/>
-        </p:nvSpPr>
-        <p:spPr>
-          <a:xfrm>
-            <a:off x="6263640" y="4892040"/>
-            <a:ext cx="5349240" cy="1005840"/>
+            <a:pPr algn="ctr" indent="0" marL="0">
+              <a:buNone/>
+            </a:pPr>
+            <a:r>
+              <a:rPr lang="en-US" sz="1800" b="1" dirty="0">
+                <a:solidFill>
+                  <a:srgbClr val="9AA6B2"/>
+                </a:solidFill>
+                <a:latin typeface="Courier New" pitchFamily="34" charset="0"/>
+                <a:ea typeface="Courier New" pitchFamily="34" charset="-122"/>
+                <a:cs typeface="Courier New" pitchFamily="34" charset="-120"/>
+              </a:rPr>
+              <a:t>0</a:t>
+            </a:r>
+            <a:endParaRPr lang="en-US" sz="1800" dirty="0"/>
+          </a:p>
+        </p:txBody>
+      </p:sp>
+      <p:sp>
+        <p:nvSpPr>
+          <p:cNvPr id="20" name="Shape 18"/>
+          <p:cNvSpPr/>
+          <p:nvPr/>
+        </p:nvSpPr>
+        <p:spPr>
+          <a:xfrm>
+            <a:off x="8174736" y="2423160"/>
+            <a:ext cx="640080" cy="640080"/>
           </a:xfrm>
           <a:prstGeom prst="roundRect">
             <a:avLst>
-              <a:gd name="adj" fmla="val 7273"/>
+              <a:gd name="adj" fmla="val 7143"/>
             </a:avLst>
           </a:prstGeom>
           <a:solidFill>
-            <a:srgbClr val="1E232C"/>
+            <a:srgbClr val="0E1116"/>
           </a:solidFill>
-          <a:ln/>
-        </p:spPr>
-      </p:sp>
-      <p:sp>
-        <p:nvSpPr>
-          <p:cNvPr id="11" name="Text 9"/>
-          <p:cNvSpPr/>
-          <p:nvPr/>
-        </p:nvSpPr>
-        <p:spPr>
-          <a:xfrm>
-            <a:off x="6492240" y="5029200"/>
-            <a:ext cx="4892040" cy="365760"/>
+          <a:ln w="12700">
+            <a:solidFill>
+              <a:srgbClr val="8CC63F"/>
+            </a:solidFill>
+            <a:prstDash val="solid"/>
+          </a:ln>
+        </p:spPr>
+      </p:sp>
+      <p:sp>
+        <p:nvSpPr>
+          <p:cNvPr id="21" name="Text 19"/>
+          <p:cNvSpPr/>
+          <p:nvPr/>
+        </p:nvSpPr>
+        <p:spPr>
+          <a:xfrm>
+            <a:off x="8174736" y="2423160"/>
+            <a:ext cx="640080" cy="640080"/>
           </a:xfrm>
           <a:prstGeom prst="rect">
             <a:avLst/>
@@ -9913,11 +10000,50 @@
           <a:bodyPr wrap="square" lIns="0" tIns="0" rIns="0" bIns="0" rtlCol="0" anchor="ctr"/>
           <a:lstStyle/>
           <a:p>
+            <a:pPr algn="ctr" indent="0" marL="0">
+              <a:buNone/>
+            </a:pPr>
+            <a:r>
+              <a:rPr lang="en-US" sz="1800" b="1" dirty="0">
+                <a:solidFill>
+                  <a:srgbClr val="9AA6B2"/>
+                </a:solidFill>
+                <a:latin typeface="Courier New" pitchFamily="34" charset="0"/>
+                <a:ea typeface="Courier New" pitchFamily="34" charset="-122"/>
+                <a:cs typeface="Courier New" pitchFamily="34" charset="-120"/>
+              </a:rPr>
+              <a:t>0</a:t>
+            </a:r>
+            <a:endParaRPr lang="en-US" sz="1800" dirty="0"/>
+          </a:p>
+        </p:txBody>
+      </p:sp>
+      <p:sp>
+        <p:nvSpPr>
+          <p:cNvPr id="22" name="Text 20"/>
+          <p:cNvSpPr/>
+          <p:nvPr/>
+        </p:nvSpPr>
+        <p:spPr>
+          <a:xfrm>
+            <a:off x="548640" y="3474720"/>
+            <a:ext cx="2194560" cy="548640"/>
+          </a:xfrm>
+          <a:prstGeom prst="rect">
+            <a:avLst/>
+          </a:prstGeom>
+          <a:noFill/>
+          <a:ln/>
+        </p:spPr>
+        <p:txBody>
+          <a:bodyPr wrap="square" lIns="0" tIns="0" rIns="0" bIns="0" rtlCol="0" anchor="ctr"/>
+          <a:lstStyle/>
+          <a:p>
             <a:pPr indent="0" marL="0">
               <a:buNone/>
             </a:pPr>
             <a:r>
-              <a:rPr lang="en-US" sz="1500" b="1" dirty="0">
+              <a:rPr lang="en-US" sz="1600" b="1" dirty="0">
                 <a:solidFill>
                   <a:srgbClr val="4FB0C6"/>
                 </a:solidFill>
@@ -9925,22 +10051,49 @@
                 <a:ea typeface="Malgun Gothic" pitchFamily="34" charset="-122"/>
                 <a:cs typeface="Malgun Gothic" pitchFamily="34" charset="-120"/>
               </a:rPr>
-              <a:t>최근 10개만</a:t>
-            </a:r>
-            <a:endParaRPr lang="en-US" sz="1500" dirty="0"/>
-          </a:p>
-        </p:txBody>
-      </p:sp>
-      <p:sp>
-        <p:nvSpPr>
-          <p:cNvPr id="12" name="Text 10"/>
-          <p:cNvSpPr/>
-          <p:nvPr/>
-        </p:nvSpPr>
-        <p:spPr>
-          <a:xfrm>
-            <a:off x="6492240" y="5394960"/>
-            <a:ext cx="4892040" cy="411480"/>
+              <a:t>p2 = ~p1 =</a:t>
+            </a:r>
+            <a:endParaRPr lang="en-US" sz="1600" dirty="0"/>
+          </a:p>
+        </p:txBody>
+      </p:sp>
+      <p:sp>
+        <p:nvSpPr>
+          <p:cNvPr id="23" name="Shape 21"/>
+          <p:cNvSpPr/>
+          <p:nvPr/>
+        </p:nvSpPr>
+        <p:spPr>
+          <a:xfrm>
+            <a:off x="2926080" y="3429000"/>
+            <a:ext cx="640080" cy="640080"/>
+          </a:xfrm>
+          <a:prstGeom prst="roundRect">
+            <a:avLst>
+              <a:gd name="adj" fmla="val 7143"/>
+            </a:avLst>
+          </a:prstGeom>
+          <a:solidFill>
+            <a:srgbClr val="0E1116"/>
+          </a:solidFill>
+          <a:ln w="12700">
+            <a:solidFill>
+              <a:srgbClr val="4FB0C6"/>
+            </a:solidFill>
+            <a:prstDash val="solid"/>
+          </a:ln>
+        </p:spPr>
+      </p:sp>
+      <p:sp>
+        <p:nvSpPr>
+          <p:cNvPr id="24" name="Text 22"/>
+          <p:cNvSpPr/>
+          <p:nvPr/>
+        </p:nvSpPr>
+        <p:spPr>
+          <a:xfrm>
+            <a:off x="2926080" y="3429000"/>
+            <a:ext cx="640080" cy="640080"/>
           </a:xfrm>
           <a:prstGeom prst="rect">
             <a:avLst/>
@@ -9952,11 +10105,565 @@
           <a:bodyPr wrap="square" lIns="0" tIns="0" rIns="0" bIns="0" rtlCol="0" anchor="ctr"/>
           <a:lstStyle/>
           <a:p>
+            <a:pPr algn="ctr" indent="0" marL="0">
+              <a:buNone/>
+            </a:pPr>
+            <a:r>
+              <a:rPr lang="en-US" sz="1800" b="1" dirty="0">
+                <a:solidFill>
+                  <a:srgbClr val="9AA6B2"/>
+                </a:solidFill>
+                <a:latin typeface="Courier New" pitchFamily="34" charset="0"/>
+                <a:ea typeface="Courier New" pitchFamily="34" charset="-122"/>
+                <a:cs typeface="Courier New" pitchFamily="34" charset="-120"/>
+              </a:rPr>
+              <a:t>0</a:t>
+            </a:r>
+            <a:endParaRPr lang="en-US" sz="1800" dirty="0"/>
+          </a:p>
+        </p:txBody>
+      </p:sp>
+      <p:sp>
+        <p:nvSpPr>
+          <p:cNvPr id="25" name="Shape 23"/>
+          <p:cNvSpPr/>
+          <p:nvPr/>
+        </p:nvSpPr>
+        <p:spPr>
+          <a:xfrm>
+            <a:off x="3675888" y="3429000"/>
+            <a:ext cx="640080" cy="640080"/>
+          </a:xfrm>
+          <a:prstGeom prst="roundRect">
+            <a:avLst>
+              <a:gd name="adj" fmla="val 7143"/>
+            </a:avLst>
+          </a:prstGeom>
+          <a:solidFill>
+            <a:srgbClr val="4FB0C6"/>
+          </a:solidFill>
+          <a:ln w="12700">
+            <a:solidFill>
+              <a:srgbClr val="4FB0C6"/>
+            </a:solidFill>
+            <a:prstDash val="solid"/>
+          </a:ln>
+        </p:spPr>
+      </p:sp>
+      <p:sp>
+        <p:nvSpPr>
+          <p:cNvPr id="26" name="Text 24"/>
+          <p:cNvSpPr/>
+          <p:nvPr/>
+        </p:nvSpPr>
+        <p:spPr>
+          <a:xfrm>
+            <a:off x="3675888" y="3429000"/>
+            <a:ext cx="640080" cy="640080"/>
+          </a:xfrm>
+          <a:prstGeom prst="rect">
+            <a:avLst/>
+          </a:prstGeom>
+          <a:noFill/>
+          <a:ln/>
+        </p:spPr>
+        <p:txBody>
+          <a:bodyPr wrap="square" lIns="0" tIns="0" rIns="0" bIns="0" rtlCol="0" anchor="ctr"/>
+          <a:lstStyle/>
+          <a:p>
+            <a:pPr algn="ctr" indent="0" marL="0">
+              <a:buNone/>
+            </a:pPr>
+            <a:r>
+              <a:rPr lang="en-US" sz="1800" b="1" dirty="0">
+                <a:solidFill>
+                  <a:srgbClr val="13161C"/>
+                </a:solidFill>
+                <a:latin typeface="Courier New" pitchFamily="34" charset="0"/>
+                <a:ea typeface="Courier New" pitchFamily="34" charset="-122"/>
+                <a:cs typeface="Courier New" pitchFamily="34" charset="-120"/>
+              </a:rPr>
+              <a:t>1</a:t>
+            </a:r>
+            <a:endParaRPr lang="en-US" sz="1800" dirty="0"/>
+          </a:p>
+        </p:txBody>
+      </p:sp>
+      <p:sp>
+        <p:nvSpPr>
+          <p:cNvPr id="27" name="Shape 25"/>
+          <p:cNvSpPr/>
+          <p:nvPr/>
+        </p:nvSpPr>
+        <p:spPr>
+          <a:xfrm>
+            <a:off x="4425696" y="3429000"/>
+            <a:ext cx="640080" cy="640080"/>
+          </a:xfrm>
+          <a:prstGeom prst="roundRect">
+            <a:avLst>
+              <a:gd name="adj" fmla="val 7143"/>
+            </a:avLst>
+          </a:prstGeom>
+          <a:solidFill>
+            <a:srgbClr val="0E1116"/>
+          </a:solidFill>
+          <a:ln w="12700">
+            <a:solidFill>
+              <a:srgbClr val="4FB0C6"/>
+            </a:solidFill>
+            <a:prstDash val="solid"/>
+          </a:ln>
+        </p:spPr>
+      </p:sp>
+      <p:sp>
+        <p:nvSpPr>
+          <p:cNvPr id="28" name="Text 26"/>
+          <p:cNvSpPr/>
+          <p:nvPr/>
+        </p:nvSpPr>
+        <p:spPr>
+          <a:xfrm>
+            <a:off x="4425696" y="3429000"/>
+            <a:ext cx="640080" cy="640080"/>
+          </a:xfrm>
+          <a:prstGeom prst="rect">
+            <a:avLst/>
+          </a:prstGeom>
+          <a:noFill/>
+          <a:ln/>
+        </p:spPr>
+        <p:txBody>
+          <a:bodyPr wrap="square" lIns="0" tIns="0" rIns="0" bIns="0" rtlCol="0" anchor="ctr"/>
+          <a:lstStyle/>
+          <a:p>
+            <a:pPr algn="ctr" indent="0" marL="0">
+              <a:buNone/>
+            </a:pPr>
+            <a:r>
+              <a:rPr lang="en-US" sz="1800" b="1" dirty="0">
+                <a:solidFill>
+                  <a:srgbClr val="9AA6B2"/>
+                </a:solidFill>
+                <a:latin typeface="Courier New" pitchFamily="34" charset="0"/>
+                <a:ea typeface="Courier New" pitchFamily="34" charset="-122"/>
+                <a:cs typeface="Courier New" pitchFamily="34" charset="-120"/>
+              </a:rPr>
+              <a:t>0</a:t>
+            </a:r>
+            <a:endParaRPr lang="en-US" sz="1800" dirty="0"/>
+          </a:p>
+        </p:txBody>
+      </p:sp>
+      <p:sp>
+        <p:nvSpPr>
+          <p:cNvPr id="29" name="Shape 27"/>
+          <p:cNvSpPr/>
+          <p:nvPr/>
+        </p:nvSpPr>
+        <p:spPr>
+          <a:xfrm>
+            <a:off x="5175504" y="3429000"/>
+            <a:ext cx="640080" cy="640080"/>
+          </a:xfrm>
+          <a:prstGeom prst="roundRect">
+            <a:avLst>
+              <a:gd name="adj" fmla="val 7143"/>
+            </a:avLst>
+          </a:prstGeom>
+          <a:solidFill>
+            <a:srgbClr val="0E1116"/>
+          </a:solidFill>
+          <a:ln w="12700">
+            <a:solidFill>
+              <a:srgbClr val="4FB0C6"/>
+            </a:solidFill>
+            <a:prstDash val="solid"/>
+          </a:ln>
+        </p:spPr>
+      </p:sp>
+      <p:sp>
+        <p:nvSpPr>
+          <p:cNvPr id="30" name="Text 28"/>
+          <p:cNvSpPr/>
+          <p:nvPr/>
+        </p:nvSpPr>
+        <p:spPr>
+          <a:xfrm>
+            <a:off x="5175504" y="3429000"/>
+            <a:ext cx="640080" cy="640080"/>
+          </a:xfrm>
+          <a:prstGeom prst="rect">
+            <a:avLst/>
+          </a:prstGeom>
+          <a:noFill/>
+          <a:ln/>
+        </p:spPr>
+        <p:txBody>
+          <a:bodyPr wrap="square" lIns="0" tIns="0" rIns="0" bIns="0" rtlCol="0" anchor="ctr"/>
+          <a:lstStyle/>
+          <a:p>
+            <a:pPr algn="ctr" indent="0" marL="0">
+              <a:buNone/>
+            </a:pPr>
+            <a:r>
+              <a:rPr lang="en-US" sz="1800" b="1" dirty="0">
+                <a:solidFill>
+                  <a:srgbClr val="9AA6B2"/>
+                </a:solidFill>
+                <a:latin typeface="Courier New" pitchFamily="34" charset="0"/>
+                <a:ea typeface="Courier New" pitchFamily="34" charset="-122"/>
+                <a:cs typeface="Courier New" pitchFamily="34" charset="-120"/>
+              </a:rPr>
+              <a:t>0</a:t>
+            </a:r>
+            <a:endParaRPr lang="en-US" sz="1800" dirty="0"/>
+          </a:p>
+        </p:txBody>
+      </p:sp>
+      <p:sp>
+        <p:nvSpPr>
+          <p:cNvPr id="31" name="Shape 29"/>
+          <p:cNvSpPr/>
+          <p:nvPr/>
+        </p:nvSpPr>
+        <p:spPr>
+          <a:xfrm>
+            <a:off x="5925312" y="3429000"/>
+            <a:ext cx="640080" cy="640080"/>
+          </a:xfrm>
+          <a:prstGeom prst="roundRect">
+            <a:avLst>
+              <a:gd name="adj" fmla="val 7143"/>
+            </a:avLst>
+          </a:prstGeom>
+          <a:solidFill>
+            <a:srgbClr val="4FB0C6"/>
+          </a:solidFill>
+          <a:ln w="12700">
+            <a:solidFill>
+              <a:srgbClr val="4FB0C6"/>
+            </a:solidFill>
+            <a:prstDash val="solid"/>
+          </a:ln>
+        </p:spPr>
+      </p:sp>
+      <p:sp>
+        <p:nvSpPr>
+          <p:cNvPr id="32" name="Text 30"/>
+          <p:cNvSpPr/>
+          <p:nvPr/>
+        </p:nvSpPr>
+        <p:spPr>
+          <a:xfrm>
+            <a:off x="5925312" y="3429000"/>
+            <a:ext cx="640080" cy="640080"/>
+          </a:xfrm>
+          <a:prstGeom prst="rect">
+            <a:avLst/>
+          </a:prstGeom>
+          <a:noFill/>
+          <a:ln/>
+        </p:spPr>
+        <p:txBody>
+          <a:bodyPr wrap="square" lIns="0" tIns="0" rIns="0" bIns="0" rtlCol="0" anchor="ctr"/>
+          <a:lstStyle/>
+          <a:p>
+            <a:pPr algn="ctr" indent="0" marL="0">
+              <a:buNone/>
+            </a:pPr>
+            <a:r>
+              <a:rPr lang="en-US" sz="1800" b="1" dirty="0">
+                <a:solidFill>
+                  <a:srgbClr val="13161C"/>
+                </a:solidFill>
+                <a:latin typeface="Courier New" pitchFamily="34" charset="0"/>
+                <a:ea typeface="Courier New" pitchFamily="34" charset="-122"/>
+                <a:cs typeface="Courier New" pitchFamily="34" charset="-120"/>
+              </a:rPr>
+              <a:t>1</a:t>
+            </a:r>
+            <a:endParaRPr lang="en-US" sz="1800" dirty="0"/>
+          </a:p>
+        </p:txBody>
+      </p:sp>
+      <p:sp>
+        <p:nvSpPr>
+          <p:cNvPr id="33" name="Shape 31"/>
+          <p:cNvSpPr/>
+          <p:nvPr/>
+        </p:nvSpPr>
+        <p:spPr>
+          <a:xfrm>
+            <a:off x="6675120" y="3429000"/>
+            <a:ext cx="640080" cy="640080"/>
+          </a:xfrm>
+          <a:prstGeom prst="roundRect">
+            <a:avLst>
+              <a:gd name="adj" fmla="val 7143"/>
+            </a:avLst>
+          </a:prstGeom>
+          <a:solidFill>
+            <a:srgbClr val="0E1116"/>
+          </a:solidFill>
+          <a:ln w="12700">
+            <a:solidFill>
+              <a:srgbClr val="4FB0C6"/>
+            </a:solidFill>
+            <a:prstDash val="solid"/>
+          </a:ln>
+        </p:spPr>
+      </p:sp>
+      <p:sp>
+        <p:nvSpPr>
+          <p:cNvPr id="34" name="Text 32"/>
+          <p:cNvSpPr/>
+          <p:nvPr/>
+        </p:nvSpPr>
+        <p:spPr>
+          <a:xfrm>
+            <a:off x="6675120" y="3429000"/>
+            <a:ext cx="640080" cy="640080"/>
+          </a:xfrm>
+          <a:prstGeom prst="rect">
+            <a:avLst/>
+          </a:prstGeom>
+          <a:noFill/>
+          <a:ln/>
+        </p:spPr>
+        <p:txBody>
+          <a:bodyPr wrap="square" lIns="0" tIns="0" rIns="0" bIns="0" rtlCol="0" anchor="ctr"/>
+          <a:lstStyle/>
+          <a:p>
+            <a:pPr algn="ctr" indent="0" marL="0">
+              <a:buNone/>
+            </a:pPr>
+            <a:r>
+              <a:rPr lang="en-US" sz="1800" b="1" dirty="0">
+                <a:solidFill>
+                  <a:srgbClr val="9AA6B2"/>
+                </a:solidFill>
+                <a:latin typeface="Courier New" pitchFamily="34" charset="0"/>
+                <a:ea typeface="Courier New" pitchFamily="34" charset="-122"/>
+                <a:cs typeface="Courier New" pitchFamily="34" charset="-120"/>
+              </a:rPr>
+              <a:t>0</a:t>
+            </a:r>
+            <a:endParaRPr lang="en-US" sz="1800" dirty="0"/>
+          </a:p>
+        </p:txBody>
+      </p:sp>
+      <p:sp>
+        <p:nvSpPr>
+          <p:cNvPr id="35" name="Shape 33"/>
+          <p:cNvSpPr/>
+          <p:nvPr/>
+        </p:nvSpPr>
+        <p:spPr>
+          <a:xfrm>
+            <a:off x="7424928" y="3429000"/>
+            <a:ext cx="640080" cy="640080"/>
+          </a:xfrm>
+          <a:prstGeom prst="roundRect">
+            <a:avLst>
+              <a:gd name="adj" fmla="val 7143"/>
+            </a:avLst>
+          </a:prstGeom>
+          <a:solidFill>
+            <a:srgbClr val="4FB0C6"/>
+          </a:solidFill>
+          <a:ln w="12700">
+            <a:solidFill>
+              <a:srgbClr val="4FB0C6"/>
+            </a:solidFill>
+            <a:prstDash val="solid"/>
+          </a:ln>
+        </p:spPr>
+      </p:sp>
+      <p:sp>
+        <p:nvSpPr>
+          <p:cNvPr id="36" name="Text 34"/>
+          <p:cNvSpPr/>
+          <p:nvPr/>
+        </p:nvSpPr>
+        <p:spPr>
+          <a:xfrm>
+            <a:off x="7424928" y="3429000"/>
+            <a:ext cx="640080" cy="640080"/>
+          </a:xfrm>
+          <a:prstGeom prst="rect">
+            <a:avLst/>
+          </a:prstGeom>
+          <a:noFill/>
+          <a:ln/>
+        </p:spPr>
+        <p:txBody>
+          <a:bodyPr wrap="square" lIns="0" tIns="0" rIns="0" bIns="0" rtlCol="0" anchor="ctr"/>
+          <a:lstStyle/>
+          <a:p>
+            <a:pPr algn="ctr" indent="0" marL="0">
+              <a:buNone/>
+            </a:pPr>
+            <a:r>
+              <a:rPr lang="en-US" sz="1800" b="1" dirty="0">
+                <a:solidFill>
+                  <a:srgbClr val="13161C"/>
+                </a:solidFill>
+                <a:latin typeface="Courier New" pitchFamily="34" charset="0"/>
+                <a:ea typeface="Courier New" pitchFamily="34" charset="-122"/>
+                <a:cs typeface="Courier New" pitchFamily="34" charset="-120"/>
+              </a:rPr>
+              <a:t>1</a:t>
+            </a:r>
+            <a:endParaRPr lang="en-US" sz="1800" dirty="0"/>
+          </a:p>
+        </p:txBody>
+      </p:sp>
+      <p:sp>
+        <p:nvSpPr>
+          <p:cNvPr id="37" name="Shape 35"/>
+          <p:cNvSpPr/>
+          <p:nvPr/>
+        </p:nvSpPr>
+        <p:spPr>
+          <a:xfrm>
+            <a:off x="8174736" y="3429000"/>
+            <a:ext cx="640080" cy="640080"/>
+          </a:xfrm>
+          <a:prstGeom prst="roundRect">
+            <a:avLst>
+              <a:gd name="adj" fmla="val 7143"/>
+            </a:avLst>
+          </a:prstGeom>
+          <a:solidFill>
+            <a:srgbClr val="4FB0C6"/>
+          </a:solidFill>
+          <a:ln w="12700">
+            <a:solidFill>
+              <a:srgbClr val="4FB0C6"/>
+            </a:solidFill>
+            <a:prstDash val="solid"/>
+          </a:ln>
+        </p:spPr>
+      </p:sp>
+      <p:sp>
+        <p:nvSpPr>
+          <p:cNvPr id="38" name="Text 36"/>
+          <p:cNvSpPr/>
+          <p:nvPr/>
+        </p:nvSpPr>
+        <p:spPr>
+          <a:xfrm>
+            <a:off x="8174736" y="3429000"/>
+            <a:ext cx="640080" cy="640080"/>
+          </a:xfrm>
+          <a:prstGeom prst="rect">
+            <a:avLst/>
+          </a:prstGeom>
+          <a:noFill/>
+          <a:ln/>
+        </p:spPr>
+        <p:txBody>
+          <a:bodyPr wrap="square" lIns="0" tIns="0" rIns="0" bIns="0" rtlCol="0" anchor="ctr"/>
+          <a:lstStyle/>
+          <a:p>
+            <a:pPr algn="ctr" indent="0" marL="0">
+              <a:buNone/>
+            </a:pPr>
+            <a:r>
+              <a:rPr lang="en-US" sz="1800" b="1" dirty="0">
+                <a:solidFill>
+                  <a:srgbClr val="13161C"/>
+                </a:solidFill>
+                <a:latin typeface="Courier New" pitchFamily="34" charset="0"/>
+                <a:ea typeface="Courier New" pitchFamily="34" charset="-122"/>
+                <a:cs typeface="Courier New" pitchFamily="34" charset="-120"/>
+              </a:rPr>
+              <a:t>1</a:t>
+            </a:r>
+            <a:endParaRPr lang="en-US" sz="1800" dirty="0"/>
+          </a:p>
+        </p:txBody>
+      </p:sp>
+      <p:sp>
+        <p:nvSpPr>
+          <p:cNvPr id="39" name="Text 37"/>
+          <p:cNvSpPr/>
+          <p:nvPr/>
+        </p:nvSpPr>
+        <p:spPr>
+          <a:xfrm>
+            <a:off x="2926080" y="3127248"/>
+            <a:ext cx="4572000" cy="274320"/>
+          </a:xfrm>
+          <a:prstGeom prst="rect">
+            <a:avLst/>
+          </a:prstGeom>
+          <a:noFill/>
+          <a:ln/>
+        </p:spPr>
+        <p:txBody>
+          <a:bodyPr wrap="square" lIns="0" tIns="0" rIns="0" bIns="0" rtlCol="0" anchor="ctr"/>
+          <a:lstStyle/>
+          <a:p>
             <a:pPr indent="0" marL="0">
               <a:buNone/>
             </a:pPr>
             <a:r>
-              <a:rPr lang="en-US" sz="1400" dirty="0">
+              <a:rPr lang="en-US" sz="1200" dirty="0">
+                <a:solidFill>
+                  <a:srgbClr val="9AA6B2"/>
+                </a:solidFill>
+                <a:latin typeface="Malgun Gothic" pitchFamily="34" charset="0"/>
+                <a:ea typeface="Malgun Gothic" pitchFamily="34" charset="-122"/>
+                <a:cs typeface="Malgun Gothic" pitchFamily="34" charset="-120"/>
+              </a:rPr>
+              <a:t>↓ 모든 비트 반전</a:t>
+            </a:r>
+            <a:endParaRPr lang="en-US" sz="1200" dirty="0"/>
+          </a:p>
+        </p:txBody>
+      </p:sp>
+      <p:sp>
+        <p:nvSpPr>
+          <p:cNvPr id="40" name="Text 38"/>
+          <p:cNvSpPr/>
+          <p:nvPr/>
+        </p:nvSpPr>
+        <p:spPr>
+          <a:xfrm>
+            <a:off x="548640" y="4480560"/>
+            <a:ext cx="11064240" cy="914400"/>
+          </a:xfrm>
+          <a:prstGeom prst="rect">
+            <a:avLst/>
+          </a:prstGeom>
+          <a:noFill/>
+          <a:ln/>
+        </p:spPr>
+        <p:txBody>
+          <a:bodyPr wrap="square" lIns="0" tIns="0" rIns="0" bIns="0" rtlCol="0" anchor="t"/>
+          <a:lstStyle/>
+          <a:p>
+            <a:pPr indent="0" marL="0">
+              <a:buNone/>
+            </a:pPr>
+            <a:r>
+              <a:rPr lang="en-US" sz="1600" b="1" dirty="0">
+                <a:solidFill>
+                  <a:srgbClr val="8CC63F"/>
+                </a:solidFill>
+                <a:latin typeface="Malgun Gothic" pitchFamily="34" charset="0"/>
+                <a:ea typeface="Malgun Gothic" pitchFamily="34" charset="-122"/>
+                <a:cs typeface="Malgun Gothic" pitchFamily="34" charset="-120"/>
+              </a:rPr>
+              <a:t>1로 고착된 비트</a:t>
+            </a:r>
+            <a:pPr indent="0" marL="0">
+              <a:buNone/>
+            </a:pPr>
+            <a:r>
+              <a:rPr lang="en-US" sz="1600" dirty="0">
                 <a:solidFill>
                   <a:srgbClr val="E8EDF2"/>
                 </a:solidFill>
@@ -9964,9 +10671,76 @@
                 <a:ea typeface="Malgun Gothic" pitchFamily="34" charset="-122"/>
                 <a:cs typeface="Malgun Gothic" pitchFamily="34" charset="-120"/>
               </a:rPr>
-              <a:t>MAX_ERR_RECORD_COUNT=10, 순환 기록</a:t>
-            </a:r>
-            <a:endParaRPr lang="en-US" sz="1400" dirty="0"/>
+              <a:t>는 p2(0을 기대) 검사에서 걸리고, </a:t>
+            </a:r>
+            <a:pPr indent="0" marL="0">
+              <a:buNone/>
+            </a:pPr>
+            <a:r>
+              <a:rPr lang="en-US" sz="1600" b="1" dirty="0">
+                <a:solidFill>
+                  <a:srgbClr val="4FB0C6"/>
+                </a:solidFill>
+                <a:latin typeface="Malgun Gothic" pitchFamily="34" charset="0"/>
+                <a:ea typeface="Malgun Gothic" pitchFamily="34" charset="-122"/>
+                <a:cs typeface="Malgun Gothic" pitchFamily="34" charset="-120"/>
+              </a:rPr>
+              <a:t>0으로 고착된 비트</a:t>
+            </a:r>
+            <a:pPr indent="0" marL="0">
+              <a:buNone/>
+            </a:pPr>
+            <a:r>
+              <a:rPr lang="en-US" sz="1600" dirty="0">
+                <a:solidFill>
+                  <a:srgbClr val="E8EDF2"/>
+                </a:solidFill>
+                <a:latin typeface="Malgun Gothic" pitchFamily="34" charset="0"/>
+                <a:ea typeface="Malgun Gothic" pitchFamily="34" charset="-122"/>
+                <a:cs typeface="Malgun Gothic" pitchFamily="34" charset="-120"/>
+              </a:rPr>
+              <a:t>는 p1(1을 기대) 검사에서 걸립니다. 그래서 양방향 검사가 필요합니다.</a:t>
+            </a:r>
+            <a:endParaRPr lang="en-US" sz="1600" dirty="0"/>
+          </a:p>
+        </p:txBody>
+      </p:sp>
+      <p:sp>
+        <p:nvSpPr>
+          <p:cNvPr id="41" name="Text 39"/>
+          <p:cNvSpPr/>
+          <p:nvPr/>
+        </p:nvSpPr>
+        <p:spPr>
+          <a:xfrm>
+            <a:off x="548640" y="5577840"/>
+            <a:ext cx="11064240" cy="457200"/>
+          </a:xfrm>
+          <a:prstGeom prst="rect">
+            <a:avLst/>
+          </a:prstGeom>
+          <a:noFill/>
+          <a:ln/>
+        </p:spPr>
+        <p:txBody>
+          <a:bodyPr wrap="square" lIns="0" tIns="0" rIns="0" bIns="0" rtlCol="0" anchor="ctr"/>
+          <a:lstStyle/>
+          <a:p>
+            <a:pPr indent="0" marL="0">
+              <a:buNone/>
+            </a:pPr>
+            <a:r>
+              <a:rPr lang="en-US" sz="1300" i="1" dirty="0">
+                <a:solidFill>
+                  <a:srgbClr val="9AA6B2"/>
+                </a:solidFill>
+                <a:latin typeface="Malgun Gothic" pitchFamily="34" charset="0"/>
+                <a:ea typeface="Malgun Gothic" pitchFamily="34" charset="-122"/>
+                <a:cs typeface="Malgun Gothic" pitchFamily="34" charset="-120"/>
+              </a:rPr>
+              <a:t>Test 2는 p1=0x00000000, p2=0xFFFFFFFF (모두 0 / 모두 1)로 이 검사를 수행합니다. (tests.cpp:705)</a:t>
+            </a:r>
+            <a:endParaRPr lang="en-US" sz="1300" dirty="0"/>
           </a:p>
         </p:txBody>
       </p:sp>

--- a/seminar/slides/세션2_메모리모델과_데이터이동.pptx
+++ b/seminar/slides/세션2_메모리모델과_데이터이동.pptx
@@ -20,9 +20,10 @@
     <p:sldId id="268" r:id="rId14"/>
     <p:sldId id="269" r:id="rId15"/>
     <p:sldId id="270" r:id="rId16"/>
+    <p:sldId id="271" r:id="rId17"/>
   </p:sldIdLst>
   <p:notesMasterIdLst>
-    <p:notesMasterId r:id="rId17"/>
+    <p:notesMasterId r:id="rId18"/>
   </p:notesMasterIdLst>
   <p:sldSz cx="12192000" cy="6858000"/>
   <p:notesSz cx="6858000" cy="12192000"/>
@@ -692,7 +693,7 @@
           <a:p>
             <a:r>
               <a:rPr lang="en-US" dirty="0"/>
-              <a:t>디바이스 포인터를 호스트에서 역참조하면 안 된다는 점이 입문자 핵심 함정. cudaMemcpy가 다리 역할.</a:t>
+              <a:t>패턴→결함 매핑. 워킹=주소/배선, 0·1=고착, 8비트=미세고착, 난수=데이터민감, 비트페이드=보존, 난수반복=소프트. 원논문 Table I 근거.</a:t>
             </a:r>
             <a:endParaRPr lang="en-US" dirty="0"/>
           </a:p>
@@ -780,7 +781,7 @@
           <a:p>
             <a:r>
               <a:rPr lang="en-US" dirty="0"/>
-              <a:t>에러 처리와 재시도 루프는 세션 4(에러 핸들링)의 예고편이기도 합니다.</a:t>
+              <a:t>디바이스 포인터를 호스트에서 역참조하면 안 된다는 점이 입문자 핵심 함정. cudaMemcpy가 다리 역할.</a:t>
             </a:r>
             <a:endParaRPr lang="en-US" dirty="0"/>
           </a:p>
@@ -868,7 +869,7 @@
           <a:p>
             <a:r>
               <a:rPr lang="en-US" dirty="0"/>
-              <a:t>Ex 3(fault injection)이 하이라이트. 실제 불량 칩이 내는 증상을 소프트웨어로 재현한다는 점을 강조. 반드시 원복.</a:t>
+              <a:t>에러 처리와 재시도 루프는 세션 4(에러 핸들링)의 예고편이기도 합니다.</a:t>
             </a:r>
             <a:endParaRPr lang="en-US" dirty="0"/>
           </a:p>
@@ -956,7 +957,7 @@
           <a:p>
             <a:r>
               <a:rPr lang="en-US" dirty="0"/>
-              <a:t>네 가지 목표(슬라이드 2)로 돌아가 자가 점검을 유도하세요.</a:t>
+              <a:t>Ex 3(fault injection)이 하이라이트. 실제 불량 칩이 내는 증상을 소프트웨어로 재현한다는 점을 강조. 반드시 원복.</a:t>
             </a:r>
             <a:endParaRPr lang="en-US" dirty="0"/>
           </a:p>
@@ -1044,7 +1045,7 @@
           <a:p>
             <a:r>
               <a:rPr lang="en-US" dirty="0"/>
-              <a:t>느린 커널을 충분히 이해했으니, 다음엔 같은 문제를 빠르게 푸는 커널로 성능을 배운다는 흐름.</a:t>
+              <a:t>네 가지 목표(슬라이드 2)로 돌아가 자가 점검을 유도하세요.</a:t>
             </a:r>
             <a:endParaRPr lang="en-US" dirty="0"/>
           </a:p>
@@ -1068,6 +1069,94 @@
             <a:fld id="{F7021451-1387-4CA6-816F-3879F97B5CBC}" type="slidenum">
               <a:rPr lang="en-US"/>
               <a:t>15</a:t>
+            </a:fld>
+            <a:endParaRPr lang="en-US"/>
+          </a:p>
+        </p:txBody>
+      </p:sp>
+    </p:spTree>
+    <p:extLst>
+      <p:ext uri="{BB962C8B-B14F-4D97-AF65-F5344CB8AC3E}">
+        <p14:creationId xmlns:p14="http://schemas.microsoft.com/office/powerpoint/2010/main" val="1024086991"/>
+      </p:ext>
+    </p:extLst>
+  </p:cSld>
+  <p:clrMapOvr>
+    <a:masterClrMapping/>
+  </p:clrMapOvr>
+</p:notes>
+</file>
+
+<file path=ppt/notesSlides/notesSlide16.xml><?xml version="1.0" encoding="utf-8"?>
+<p:notes xmlns:a="http://schemas.openxmlformats.org/drawingml/2006/main" xmlns:r="http://schemas.openxmlformats.org/officeDocument/2006/relationships" xmlns:p="http://schemas.openxmlformats.org/presentationml/2006/main">
+  <p:cSld>
+    <p:spTree>
+      <p:nvGrpSpPr>
+        <p:cNvPr id="1" name=""/>
+        <p:cNvGrpSpPr/>
+        <p:nvPr/>
+      </p:nvGrpSpPr>
+      <p:grpSpPr>
+        <a:xfrm>
+          <a:off x="0" y="0"/>
+          <a:ext cx="0" cy="0"/>
+          <a:chOff x="0" y="0"/>
+          <a:chExt cx="0" cy="0"/>
+        </a:xfrm>
+      </p:grpSpPr>
+      <p:sp>
+        <p:nvSpPr>
+          <p:cNvPr id="2" name="Slide Image Placeholder 1"/>
+          <p:cNvSpPr>
+            <a:spLocks noGrp="1" noRot="1" noChangeAspect="1"/>
+          </p:cNvSpPr>
+          <p:nvPr>
+            <p:ph type="sldImg"/>
+          </p:nvPr>
+        </p:nvSpPr>
+        <p:spPr/>
+      </p:sp>
+      <p:sp>
+        <p:nvSpPr>
+          <p:cNvPr id="3" name="Notes Placeholder 2"/>
+          <p:cNvSpPr>
+            <a:spLocks noGrp="1"/>
+          </p:cNvSpPr>
+          <p:nvPr>
+            <p:ph type="body" idx="1"/>
+          </p:nvPr>
+        </p:nvSpPr>
+        <p:spPr/>
+        <p:txBody>
+          <a:bodyPr/>
+          <a:lstStyle/>
+          <a:p>
+            <a:r>
+              <a:rPr lang="en-US" dirty="0"/>
+              <a:t>느린 커널을 충분히 이해했으니, 다음엔 같은 문제를 빠르게 푸는 커널로 성능을 배운다는 흐름.</a:t>
+            </a:r>
+            <a:endParaRPr lang="en-US" dirty="0"/>
+          </a:p>
+        </p:txBody>
+      </p:sp>
+      <p:sp>
+        <p:nvSpPr>
+          <p:cNvPr id="4" name="Slide Number Placeholder 3"/>
+          <p:cNvSpPr>
+            <a:spLocks noGrp="1"/>
+          </p:cNvSpPr>
+          <p:nvPr>
+            <p:ph type="sldNum" sz="quarter" idx="10"/>
+          </p:nvPr>
+        </p:nvSpPr>
+        <p:spPr/>
+        <p:txBody>
+          <a:bodyPr/>
+          <a:lstStyle/>
+          <a:p>
+            <a:fld id="{F7021451-1387-4CA6-816F-3879F97B5CBC}" type="slidenum">
+              <a:rPr lang="en-US"/>
+              <a:t>16</a:t>
             </a:fld>
             <a:endParaRPr lang="en-US"/>
           </a:p>
@@ -3904,7 +3993,7 @@
                 <a:ea typeface="Courier New" pitchFamily="34" charset="-122"/>
                 <a:cs typeface="Courier New" pitchFamily="34" charset="-120"/>
               </a:rPr>
-              <a:t>7</a:t>
+              <a:t>6</a:t>
             </a:r>
             <a:endParaRPr lang="en-US" sz="2200" dirty="0"/>
           </a:p>
@@ -3943,7 +4032,7 @@
                 <a:ea typeface="Malgun Gothic" pitchFamily="34" charset="-122"/>
                 <a:cs typeface="Malgun Gothic" pitchFamily="34" charset="-120"/>
               </a:rPr>
-              <a:t>오류가 CPU로 돌아오는 길</a:t>
+              <a:t>메모리 테스트 패턴과 결함 유형(fault types)</a:t>
             </a:r>
             <a:endParaRPr lang="en-US" sz="3000" dirty="0"/>
           </a:p>
@@ -3951,18 +4040,96 @@
       </p:sp>
       <p:sp>
         <p:nvSpPr>
-          <p:cNvPr id="4" name="Shape 2"/>
-          <p:cNvSpPr/>
-          <p:nvPr/>
-        </p:nvSpPr>
-        <p:spPr>
-          <a:xfrm>
-            <a:off x="548640" y="1554480"/>
-            <a:ext cx="11064240" cy="2286000"/>
+          <p:cNvPr id="4" name="Text 2"/>
+          <p:cNvSpPr/>
+          <p:nvPr/>
+        </p:nvSpPr>
+        <p:spPr>
+          <a:xfrm>
+            <a:off x="548640" y="1325880"/>
+            <a:ext cx="11064240" cy="365760"/>
+          </a:xfrm>
+          <a:prstGeom prst="rect">
+            <a:avLst/>
+          </a:prstGeom>
+          <a:noFill/>
+          <a:ln/>
+        </p:spPr>
+        <p:txBody>
+          <a:bodyPr wrap="square" lIns="0" tIns="0" rIns="0" bIns="0" rtlCol="0" anchor="ctr"/>
+          <a:lstStyle/>
+          <a:p>
+            <a:pPr indent="0" marL="0">
+              <a:buNone/>
+            </a:pPr>
+            <a:r>
+              <a:rPr lang="en-US" sz="1450" dirty="0">
+                <a:solidFill>
+                  <a:srgbClr val="9AA6B2"/>
+                </a:solidFill>
+                <a:latin typeface="Malgun Gothic" pitchFamily="34" charset="0"/>
+                <a:ea typeface="Malgun Gothic" pitchFamily="34" charset="-122"/>
+                <a:cs typeface="Malgun Gothic" pitchFamily="34" charset="-120"/>
+              </a:rPr>
+              <a:t>패턴마다 노리는 결함이 다릅니다. 여러 패턴을 조합해 다양한 고장을 잡아냅니다.</a:t>
+            </a:r>
+            <a:endParaRPr lang="en-US" sz="1450" dirty="0"/>
+          </a:p>
+        </p:txBody>
+      </p:sp>
+      <p:sp>
+        <p:nvSpPr>
+          <p:cNvPr id="5" name="Text 3"/>
+          <p:cNvSpPr/>
+          <p:nvPr/>
+        </p:nvSpPr>
+        <p:spPr>
+          <a:xfrm>
+            <a:off x="548640" y="2103120"/>
+            <a:ext cx="2148840" cy="457200"/>
+          </a:xfrm>
+          <a:prstGeom prst="rect">
+            <a:avLst/>
+          </a:prstGeom>
+          <a:noFill/>
+          <a:ln/>
+        </p:spPr>
+        <p:txBody>
+          <a:bodyPr wrap="square" lIns="0" tIns="0" rIns="0" bIns="0" rtlCol="0" anchor="ctr"/>
+          <a:lstStyle/>
+          <a:p>
+            <a:pPr indent="0" marL="0">
+              <a:buNone/>
+            </a:pPr>
+            <a:r>
+              <a:rPr lang="en-US" sz="1250" b="1" dirty="0">
+                <a:solidFill>
+                  <a:srgbClr val="E8EDF2"/>
+                </a:solidFill>
+                <a:latin typeface="Malgun Gothic" pitchFamily="34" charset="0"/>
+                <a:ea typeface="Malgun Gothic" pitchFamily="34" charset="-122"/>
+                <a:cs typeface="Malgun Gothic" pitchFamily="34" charset="-120"/>
+              </a:rPr>
+              <a:t>워킹 1비트</a:t>
+            </a:r>
+            <a:endParaRPr lang="en-US" sz="1250" dirty="0"/>
+          </a:p>
+        </p:txBody>
+      </p:sp>
+      <p:sp>
+        <p:nvSpPr>
+          <p:cNvPr id="6" name="Shape 4"/>
+          <p:cNvSpPr/>
+          <p:nvPr/>
+        </p:nvSpPr>
+        <p:spPr>
+          <a:xfrm>
+            <a:off x="2788920" y="2103120"/>
+            <a:ext cx="502920" cy="457200"/>
           </a:xfrm>
           <a:prstGeom prst="roundRect">
             <a:avLst>
-              <a:gd name="adj" fmla="val 2400"/>
+              <a:gd name="adj" fmla="val 8000"/>
             </a:avLst>
           </a:prstGeom>
           <a:solidFill>
@@ -3978,33 +4145,30 @@
       </p:sp>
       <p:sp>
         <p:nvSpPr>
-          <p:cNvPr id="5" name="Text 3"/>
-          <p:cNvSpPr/>
-          <p:nvPr/>
-        </p:nvSpPr>
-        <p:spPr>
-          <a:xfrm>
-            <a:off x="749808" y="1700784"/>
-            <a:ext cx="10661904" cy="1993392"/>
-          </a:xfrm>
-          <a:prstGeom prst="rect">
-            <a:avLst/>
-          </a:prstGeom>
-          <a:noFill/>
-          <a:ln/>
-        </p:spPr>
-        <p:txBody>
-          <a:bodyPr wrap="square" lIns="0" tIns="0" rIns="0" bIns="0" rtlCol="0" anchor="t"/>
-          <a:lstStyle/>
-          <a:p>
-            <a:pPr algn="l" indent="0" marL="0">
-              <a:lnSpc>
-                <a:spcPct val="108000"/>
-              </a:lnSpc>
-              <a:buNone/>
-            </a:pPr>
-            <a:r>
-              <a:rPr lang="en-US" sz="1350" dirty="0">
+          <p:cNvPr id="7" name="Text 5"/>
+          <p:cNvSpPr/>
+          <p:nvPr/>
+        </p:nvSpPr>
+        <p:spPr>
+          <a:xfrm>
+            <a:off x="2788920" y="2103120"/>
+            <a:ext cx="502920" cy="457200"/>
+          </a:xfrm>
+          <a:prstGeom prst="rect">
+            <a:avLst/>
+          </a:prstGeom>
+          <a:noFill/>
+          <a:ln/>
+        </p:spPr>
+        <p:txBody>
+          <a:bodyPr wrap="square" lIns="0" tIns="0" rIns="0" bIns="0" rtlCol="0" anchor="ctr"/>
+          <a:lstStyle/>
+          <a:p>
+            <a:pPr algn="ctr" indent="0" marL="0">
+              <a:buNone/>
+            </a:pPr>
+            <a:r>
+              <a:rPr lang="en-US" sz="1300" b="1" dirty="0">
                 <a:solidFill>
                   <a:srgbClr val="9AA6B2"/>
                 </a:solidFill>
@@ -4012,187 +4176,2345 @@
                 <a:ea typeface="Courier New" pitchFamily="34" charset="-122"/>
                 <a:cs typeface="Courier New" pitchFamily="34" charset="-120"/>
               </a:rPr>
-              <a:t>// error_checking()  tests.cpp:108</a:t>
-            </a:r>
-            <a:endParaRPr lang="en-US" sz="1350" dirty="0"/>
-          </a:p>
-          <a:p>
-            <a:pPr algn="l" indent="0" marL="0">
-              <a:lnSpc>
-                <a:spcPct val="108000"/>
-              </a:lnSpc>
-              <a:buNone/>
-            </a:pPr>
-            <a:r>
-              <a:rPr lang="en-US" sz="1350" dirty="0">
-                <a:solidFill>
-                  <a:srgbClr val="E8EDF2"/>
+              <a:t>0</a:t>
+            </a:r>
+            <a:endParaRPr lang="en-US" sz="1300" dirty="0"/>
+          </a:p>
+        </p:txBody>
+      </p:sp>
+      <p:sp>
+        <p:nvSpPr>
+          <p:cNvPr id="8" name="Shape 6"/>
+          <p:cNvSpPr/>
+          <p:nvPr/>
+        </p:nvSpPr>
+        <p:spPr>
+          <a:xfrm>
+            <a:off x="3364992" y="2103120"/>
+            <a:ext cx="502920" cy="457200"/>
+          </a:xfrm>
+          <a:prstGeom prst="roundRect">
+            <a:avLst>
+              <a:gd name="adj" fmla="val 8000"/>
+            </a:avLst>
+          </a:prstGeom>
+          <a:solidFill>
+            <a:srgbClr val="0E1116"/>
+          </a:solidFill>
+          <a:ln w="12700">
+            <a:solidFill>
+              <a:srgbClr val="2C3440"/>
+            </a:solidFill>
+            <a:prstDash val="solid"/>
+          </a:ln>
+        </p:spPr>
+      </p:sp>
+      <p:sp>
+        <p:nvSpPr>
+          <p:cNvPr id="9" name="Text 7"/>
+          <p:cNvSpPr/>
+          <p:nvPr/>
+        </p:nvSpPr>
+        <p:spPr>
+          <a:xfrm>
+            <a:off x="3364992" y="2103120"/>
+            <a:ext cx="502920" cy="457200"/>
+          </a:xfrm>
+          <a:prstGeom prst="rect">
+            <a:avLst/>
+          </a:prstGeom>
+          <a:noFill/>
+          <a:ln/>
+        </p:spPr>
+        <p:txBody>
+          <a:bodyPr wrap="square" lIns="0" tIns="0" rIns="0" bIns="0" rtlCol="0" anchor="ctr"/>
+          <a:lstStyle/>
+          <a:p>
+            <a:pPr algn="ctr" indent="0" marL="0">
+              <a:buNone/>
+            </a:pPr>
+            <a:r>
+              <a:rPr lang="en-US" sz="1300" b="1" dirty="0">
+                <a:solidFill>
+                  <a:srgbClr val="9AA6B2"/>
                 </a:solidFill>
                 <a:latin typeface="Courier New" pitchFamily="34" charset="0"/>
                 <a:ea typeface="Courier New" pitchFamily="34" charset="-122"/>
                 <a:cs typeface="Courier New" pitchFamily="34" charset="-120"/>
               </a:rPr>
-              <a:t>unsigned int err = 0;</a:t>
-            </a:r>
-            <a:endParaRPr lang="en-US" sz="1350" dirty="0"/>
-          </a:p>
-          <a:p>
-            <a:pPr algn="l" indent="0" marL="0">
-              <a:lnSpc>
-                <a:spcPct val="108000"/>
-              </a:lnSpc>
-              <a:buNone/>
-            </a:pPr>
-            <a:r>
-              <a:rPr lang="en-US" sz="1350" dirty="0">
-                <a:solidFill>
-                  <a:srgbClr val="E8EDF2"/>
+              <a:t>0</a:t>
+            </a:r>
+            <a:endParaRPr lang="en-US" sz="1300" dirty="0"/>
+          </a:p>
+        </p:txBody>
+      </p:sp>
+      <p:sp>
+        <p:nvSpPr>
+          <p:cNvPr id="10" name="Shape 8"/>
+          <p:cNvSpPr/>
+          <p:nvPr/>
+        </p:nvSpPr>
+        <p:spPr>
+          <a:xfrm>
+            <a:off x="3941064" y="2103120"/>
+            <a:ext cx="502920" cy="457200"/>
+          </a:xfrm>
+          <a:prstGeom prst="roundRect">
+            <a:avLst>
+              <a:gd name="adj" fmla="val 8000"/>
+            </a:avLst>
+          </a:prstGeom>
+          <a:solidFill>
+            <a:srgbClr val="0E1116"/>
+          </a:solidFill>
+          <a:ln w="12700">
+            <a:solidFill>
+              <a:srgbClr val="2C3440"/>
+            </a:solidFill>
+            <a:prstDash val="solid"/>
+          </a:ln>
+        </p:spPr>
+      </p:sp>
+      <p:sp>
+        <p:nvSpPr>
+          <p:cNvPr id="11" name="Text 9"/>
+          <p:cNvSpPr/>
+          <p:nvPr/>
+        </p:nvSpPr>
+        <p:spPr>
+          <a:xfrm>
+            <a:off x="3941064" y="2103120"/>
+            <a:ext cx="502920" cy="457200"/>
+          </a:xfrm>
+          <a:prstGeom prst="rect">
+            <a:avLst/>
+          </a:prstGeom>
+          <a:noFill/>
+          <a:ln/>
+        </p:spPr>
+        <p:txBody>
+          <a:bodyPr wrap="square" lIns="0" tIns="0" rIns="0" bIns="0" rtlCol="0" anchor="ctr"/>
+          <a:lstStyle/>
+          <a:p>
+            <a:pPr algn="ctr" indent="0" marL="0">
+              <a:buNone/>
+            </a:pPr>
+            <a:r>
+              <a:rPr lang="en-US" sz="1300" b="1" dirty="0">
+                <a:solidFill>
+                  <a:srgbClr val="9AA6B2"/>
                 </a:solidFill>
                 <a:latin typeface="Courier New" pitchFamily="34" charset="0"/>
                 <a:ea typeface="Courier New" pitchFamily="34" charset="-122"/>
                 <a:cs typeface="Courier New" pitchFamily="34" charset="-120"/>
               </a:rPr>
-              <a:t>cudaMemcpy(&amp;err, err_count, sizeof(unsigned int),</a:t>
-            </a:r>
-            <a:endParaRPr lang="en-US" sz="1350" dirty="0"/>
-          </a:p>
-          <a:p>
-            <a:pPr algn="l" indent="0" marL="0">
-              <a:lnSpc>
-                <a:spcPct val="108000"/>
-              </a:lnSpc>
-              <a:buNone/>
-            </a:pPr>
-            <a:r>
-              <a:rPr lang="en-US" sz="1350" dirty="0">
-                <a:solidFill>
-                  <a:srgbClr val="8CC63F"/>
+              <a:t>0</a:t>
+            </a:r>
+            <a:endParaRPr lang="en-US" sz="1300" dirty="0"/>
+          </a:p>
+        </p:txBody>
+      </p:sp>
+      <p:sp>
+        <p:nvSpPr>
+          <p:cNvPr id="12" name="Shape 10"/>
+          <p:cNvSpPr/>
+          <p:nvPr/>
+        </p:nvSpPr>
+        <p:spPr>
+          <a:xfrm>
+            <a:off x="4517136" y="2103120"/>
+            <a:ext cx="502920" cy="457200"/>
+          </a:xfrm>
+          <a:prstGeom prst="roundRect">
+            <a:avLst>
+              <a:gd name="adj" fmla="val 8000"/>
+            </a:avLst>
+          </a:prstGeom>
+          <a:solidFill>
+            <a:srgbClr val="0E1116"/>
+          </a:solidFill>
+          <a:ln w="12700">
+            <a:solidFill>
+              <a:srgbClr val="2C3440"/>
+            </a:solidFill>
+            <a:prstDash val="solid"/>
+          </a:ln>
+        </p:spPr>
+      </p:sp>
+      <p:sp>
+        <p:nvSpPr>
+          <p:cNvPr id="13" name="Text 11"/>
+          <p:cNvSpPr/>
+          <p:nvPr/>
+        </p:nvSpPr>
+        <p:spPr>
+          <a:xfrm>
+            <a:off x="4517136" y="2103120"/>
+            <a:ext cx="502920" cy="457200"/>
+          </a:xfrm>
+          <a:prstGeom prst="rect">
+            <a:avLst/>
+          </a:prstGeom>
+          <a:noFill/>
+          <a:ln/>
+        </p:spPr>
+        <p:txBody>
+          <a:bodyPr wrap="square" lIns="0" tIns="0" rIns="0" bIns="0" rtlCol="0" anchor="ctr"/>
+          <a:lstStyle/>
+          <a:p>
+            <a:pPr algn="ctr" indent="0" marL="0">
+              <a:buNone/>
+            </a:pPr>
+            <a:r>
+              <a:rPr lang="en-US" sz="1300" b="1" dirty="0">
+                <a:solidFill>
+                  <a:srgbClr val="9AA6B2"/>
                 </a:solidFill>
                 <a:latin typeface="Courier New" pitchFamily="34" charset="0"/>
                 <a:ea typeface="Courier New" pitchFamily="34" charset="-122"/>
                 <a:cs typeface="Courier New" pitchFamily="34" charset="-120"/>
               </a:rPr>
-              <a:t>           cudaMemcpyDeviceToHost);   // GPU 카운터 → CPU 변수</a:t>
-            </a:r>
-            <a:endParaRPr lang="en-US" sz="1350" dirty="0"/>
-          </a:p>
-          <a:p>
-            <a:pPr algn="l" indent="0" marL="0">
-              <a:lnSpc>
-                <a:spcPct val="108000"/>
-              </a:lnSpc>
-              <a:buNone/>
-            </a:pPr>
-            <a:r>
-              <a:rPr lang="en-US" sz="1350" dirty="0">
-                <a:solidFill>
-                  <a:srgbClr val="E8EDF2"/>
+              <a:t>0</a:t>
+            </a:r>
+            <a:endParaRPr lang="en-US" sz="1300" dirty="0"/>
+          </a:p>
+        </p:txBody>
+      </p:sp>
+      <p:sp>
+        <p:nvSpPr>
+          <p:cNvPr id="14" name="Shape 12"/>
+          <p:cNvSpPr/>
+          <p:nvPr/>
+        </p:nvSpPr>
+        <p:spPr>
+          <a:xfrm>
+            <a:off x="5093208" y="2103120"/>
+            <a:ext cx="502920" cy="457200"/>
+          </a:xfrm>
+          <a:prstGeom prst="roundRect">
+            <a:avLst>
+              <a:gd name="adj" fmla="val 8000"/>
+            </a:avLst>
+          </a:prstGeom>
+          <a:solidFill>
+            <a:srgbClr val="0E1116"/>
+          </a:solidFill>
+          <a:ln w="12700">
+            <a:solidFill>
+              <a:srgbClr val="2C3440"/>
+            </a:solidFill>
+            <a:prstDash val="solid"/>
+          </a:ln>
+        </p:spPr>
+      </p:sp>
+      <p:sp>
+        <p:nvSpPr>
+          <p:cNvPr id="15" name="Text 13"/>
+          <p:cNvSpPr/>
+          <p:nvPr/>
+        </p:nvSpPr>
+        <p:spPr>
+          <a:xfrm>
+            <a:off x="5093208" y="2103120"/>
+            <a:ext cx="502920" cy="457200"/>
+          </a:xfrm>
+          <a:prstGeom prst="rect">
+            <a:avLst/>
+          </a:prstGeom>
+          <a:noFill/>
+          <a:ln/>
+        </p:spPr>
+        <p:txBody>
+          <a:bodyPr wrap="square" lIns="0" tIns="0" rIns="0" bIns="0" rtlCol="0" anchor="ctr"/>
+          <a:lstStyle/>
+          <a:p>
+            <a:pPr algn="ctr" indent="0" marL="0">
+              <a:buNone/>
+            </a:pPr>
+            <a:r>
+              <a:rPr lang="en-US" sz="1300" b="1" dirty="0">
+                <a:solidFill>
+                  <a:srgbClr val="9AA6B2"/>
                 </a:solidFill>
                 <a:latin typeface="Courier New" pitchFamily="34" charset="0"/>
                 <a:ea typeface="Courier New" pitchFamily="34" charset="-122"/>
                 <a:cs typeface="Courier New" pitchFamily="34" charset="-120"/>
               </a:rPr>
-              <a:t>if (err) {  /* 오류 주소·기대값·현재값을 출력·기록 */  }</a:t>
-            </a:r>
-            <a:endParaRPr lang="en-US" sz="1350" dirty="0"/>
-          </a:p>
-        </p:txBody>
-      </p:sp>
-      <p:sp>
-        <p:nvSpPr>
-          <p:cNvPr id="6" name="Text 4"/>
-          <p:cNvSpPr/>
-          <p:nvPr/>
-        </p:nvSpPr>
-        <p:spPr>
-          <a:xfrm>
-            <a:off x="548640" y="4023360"/>
-            <a:ext cx="11064240" cy="822960"/>
-          </a:xfrm>
-          <a:prstGeom prst="rect">
-            <a:avLst/>
-          </a:prstGeom>
-          <a:noFill/>
-          <a:ln/>
-        </p:spPr>
-        <p:txBody>
-          <a:bodyPr wrap="square" lIns="0" tIns="0" rIns="0" bIns="0" rtlCol="0" anchor="t"/>
-          <a:lstStyle/>
-          <a:p>
-            <a:pPr indent="0" marL="0">
-              <a:buNone/>
-            </a:pPr>
-            <a:r>
-              <a:rPr lang="en-US" sz="1700" b="1" dirty="0">
-                <a:solidFill>
-                  <a:srgbClr val="8CC63F"/>
-                </a:solidFill>
-                <a:latin typeface="Malgun Gothic" pitchFamily="34" charset="0"/>
-                <a:ea typeface="Malgun Gothic" pitchFamily="34" charset="-122"/>
-                <a:cs typeface="Malgun Gothic" pitchFamily="34" charset="-120"/>
-              </a:rPr>
-              <a:t>err_count</a:t>
-            </a:r>
-            <a:pPr indent="0" marL="0">
-              <a:buNone/>
-            </a:pPr>
-            <a:r>
-              <a:rPr lang="en-US" sz="1700" dirty="0">
-                <a:solidFill>
-                  <a:srgbClr val="E8EDF2"/>
-                </a:solidFill>
-                <a:latin typeface="Malgun Gothic" pitchFamily="34" charset="0"/>
-                <a:ea typeface="Malgun Gothic" pitchFamily="34" charset="-122"/>
-                <a:cs typeface="Malgun Gothic" pitchFamily="34" charset="-120"/>
-              </a:rPr>
-              <a:t>는 GPU에 있는 디바이스 포인터입니다. CPU는 그 값을 </a:t>
-            </a:r>
-            <a:pPr indent="0" marL="0">
-              <a:buNone/>
-            </a:pPr>
-            <a:r>
-              <a:rPr lang="en-US" sz="1700" b="1" dirty="0">
-                <a:solidFill>
-                  <a:srgbClr val="E0A458"/>
-                </a:solidFill>
-                <a:latin typeface="Malgun Gothic" pitchFamily="34" charset="0"/>
-                <a:ea typeface="Malgun Gothic" pitchFamily="34" charset="-122"/>
-                <a:cs typeface="Malgun Gothic" pitchFamily="34" charset="-120"/>
-              </a:rPr>
-              <a:t>직접 읽을 수 없어</a:t>
-            </a:r>
-            <a:pPr indent="0" marL="0">
-              <a:buNone/>
-            </a:pPr>
-            <a:r>
-              <a:rPr lang="en-US" sz="1700" dirty="0">
-                <a:solidFill>
-                  <a:srgbClr val="E8EDF2"/>
-                </a:solidFill>
-                <a:latin typeface="Malgun Gothic" pitchFamily="34" charset="0"/>
-                <a:ea typeface="Malgun Gothic" pitchFamily="34" charset="-122"/>
-                <a:cs typeface="Malgun Gothic" pitchFamily="34" charset="-120"/>
-              </a:rPr>
-              <a:t> 반드시 cudaMemcpy로 가져와야 합니다.</a:t>
-            </a:r>
-            <a:endParaRPr lang="en-US" sz="1700" dirty="0"/>
-          </a:p>
-        </p:txBody>
-      </p:sp>
-      <p:sp>
-        <p:nvSpPr>
-          <p:cNvPr id="7" name="Shape 5"/>
-          <p:cNvSpPr/>
-          <p:nvPr/>
-        </p:nvSpPr>
-        <p:spPr>
-          <a:xfrm>
-            <a:off x="548640" y="4892040"/>
-            <a:ext cx="5349240" cy="1005840"/>
+              <a:t>0</a:t>
+            </a:r>
+            <a:endParaRPr lang="en-US" sz="1300" dirty="0"/>
+          </a:p>
+        </p:txBody>
+      </p:sp>
+      <p:sp>
+        <p:nvSpPr>
+          <p:cNvPr id="16" name="Shape 14"/>
+          <p:cNvSpPr/>
+          <p:nvPr/>
+        </p:nvSpPr>
+        <p:spPr>
+          <a:xfrm>
+            <a:off x="5669280" y="2103120"/>
+            <a:ext cx="502920" cy="457200"/>
           </a:xfrm>
           <a:prstGeom prst="roundRect">
             <a:avLst>
-              <a:gd name="adj" fmla="val 7273"/>
+              <a:gd name="adj" fmla="val 8000"/>
+            </a:avLst>
+          </a:prstGeom>
+          <a:solidFill>
+            <a:srgbClr val="0E1116"/>
+          </a:solidFill>
+          <a:ln w="12700">
+            <a:solidFill>
+              <a:srgbClr val="2C3440"/>
+            </a:solidFill>
+            <a:prstDash val="solid"/>
+          </a:ln>
+        </p:spPr>
+      </p:sp>
+      <p:sp>
+        <p:nvSpPr>
+          <p:cNvPr id="17" name="Text 15"/>
+          <p:cNvSpPr/>
+          <p:nvPr/>
+        </p:nvSpPr>
+        <p:spPr>
+          <a:xfrm>
+            <a:off x="5669280" y="2103120"/>
+            <a:ext cx="502920" cy="457200"/>
+          </a:xfrm>
+          <a:prstGeom prst="rect">
+            <a:avLst/>
+          </a:prstGeom>
+          <a:noFill/>
+          <a:ln/>
+        </p:spPr>
+        <p:txBody>
+          <a:bodyPr wrap="square" lIns="0" tIns="0" rIns="0" bIns="0" rtlCol="0" anchor="ctr"/>
+          <a:lstStyle/>
+          <a:p>
+            <a:pPr algn="ctr" indent="0" marL="0">
+              <a:buNone/>
+            </a:pPr>
+            <a:r>
+              <a:rPr lang="en-US" sz="1300" b="1" dirty="0">
+                <a:solidFill>
+                  <a:srgbClr val="9AA6B2"/>
+                </a:solidFill>
+                <a:latin typeface="Courier New" pitchFamily="34" charset="0"/>
+                <a:ea typeface="Courier New" pitchFamily="34" charset="-122"/>
+                <a:cs typeface="Courier New" pitchFamily="34" charset="-120"/>
+              </a:rPr>
+              <a:t>0</a:t>
+            </a:r>
+            <a:endParaRPr lang="en-US" sz="1300" dirty="0"/>
+          </a:p>
+        </p:txBody>
+      </p:sp>
+      <p:sp>
+        <p:nvSpPr>
+          <p:cNvPr id="18" name="Shape 16"/>
+          <p:cNvSpPr/>
+          <p:nvPr/>
+        </p:nvSpPr>
+        <p:spPr>
+          <a:xfrm>
+            <a:off x="6245352" y="2103120"/>
+            <a:ext cx="502920" cy="457200"/>
+          </a:xfrm>
+          <a:prstGeom prst="roundRect">
+            <a:avLst>
+              <a:gd name="adj" fmla="val 8000"/>
+            </a:avLst>
+          </a:prstGeom>
+          <a:solidFill>
+            <a:srgbClr val="0E1116"/>
+          </a:solidFill>
+          <a:ln w="12700">
+            <a:solidFill>
+              <a:srgbClr val="2C3440"/>
+            </a:solidFill>
+            <a:prstDash val="solid"/>
+          </a:ln>
+        </p:spPr>
+      </p:sp>
+      <p:sp>
+        <p:nvSpPr>
+          <p:cNvPr id="19" name="Text 17"/>
+          <p:cNvSpPr/>
+          <p:nvPr/>
+        </p:nvSpPr>
+        <p:spPr>
+          <a:xfrm>
+            <a:off x="6245352" y="2103120"/>
+            <a:ext cx="502920" cy="457200"/>
+          </a:xfrm>
+          <a:prstGeom prst="rect">
+            <a:avLst/>
+          </a:prstGeom>
+          <a:noFill/>
+          <a:ln/>
+        </p:spPr>
+        <p:txBody>
+          <a:bodyPr wrap="square" lIns="0" tIns="0" rIns="0" bIns="0" rtlCol="0" anchor="ctr"/>
+          <a:lstStyle/>
+          <a:p>
+            <a:pPr algn="ctr" indent="0" marL="0">
+              <a:buNone/>
+            </a:pPr>
+            <a:r>
+              <a:rPr lang="en-US" sz="1300" b="1" dirty="0">
+                <a:solidFill>
+                  <a:srgbClr val="9AA6B2"/>
+                </a:solidFill>
+                <a:latin typeface="Courier New" pitchFamily="34" charset="0"/>
+                <a:ea typeface="Courier New" pitchFamily="34" charset="-122"/>
+                <a:cs typeface="Courier New" pitchFamily="34" charset="-120"/>
+              </a:rPr>
+              <a:t>0</a:t>
+            </a:r>
+            <a:endParaRPr lang="en-US" sz="1300" dirty="0"/>
+          </a:p>
+        </p:txBody>
+      </p:sp>
+      <p:sp>
+        <p:nvSpPr>
+          <p:cNvPr id="20" name="Shape 18"/>
+          <p:cNvSpPr/>
+          <p:nvPr/>
+        </p:nvSpPr>
+        <p:spPr>
+          <a:xfrm>
+            <a:off x="6821424" y="2103120"/>
+            <a:ext cx="502920" cy="457200"/>
+          </a:xfrm>
+          <a:prstGeom prst="roundRect">
+            <a:avLst>
+              <a:gd name="adj" fmla="val 8000"/>
+            </a:avLst>
+          </a:prstGeom>
+          <a:solidFill>
+            <a:srgbClr val="8CC63F"/>
+          </a:solidFill>
+          <a:ln w="12700">
+            <a:solidFill>
+              <a:srgbClr val="8CC63F"/>
+            </a:solidFill>
+            <a:prstDash val="solid"/>
+          </a:ln>
+        </p:spPr>
+      </p:sp>
+      <p:sp>
+        <p:nvSpPr>
+          <p:cNvPr id="21" name="Text 19"/>
+          <p:cNvSpPr/>
+          <p:nvPr/>
+        </p:nvSpPr>
+        <p:spPr>
+          <a:xfrm>
+            <a:off x="6821424" y="2103120"/>
+            <a:ext cx="502920" cy="457200"/>
+          </a:xfrm>
+          <a:prstGeom prst="rect">
+            <a:avLst/>
+          </a:prstGeom>
+          <a:noFill/>
+          <a:ln/>
+        </p:spPr>
+        <p:txBody>
+          <a:bodyPr wrap="square" lIns="0" tIns="0" rIns="0" bIns="0" rtlCol="0" anchor="ctr"/>
+          <a:lstStyle/>
+          <a:p>
+            <a:pPr algn="ctr" indent="0" marL="0">
+              <a:buNone/>
+            </a:pPr>
+            <a:r>
+              <a:rPr lang="en-US" sz="1300" b="1" dirty="0">
+                <a:solidFill>
+                  <a:srgbClr val="13161C"/>
+                </a:solidFill>
+                <a:latin typeface="Courier New" pitchFamily="34" charset="0"/>
+                <a:ea typeface="Courier New" pitchFamily="34" charset="-122"/>
+                <a:cs typeface="Courier New" pitchFamily="34" charset="-120"/>
+              </a:rPr>
+              <a:t>1</a:t>
+            </a:r>
+            <a:endParaRPr lang="en-US" sz="1300" dirty="0"/>
+          </a:p>
+        </p:txBody>
+      </p:sp>
+      <p:sp>
+        <p:nvSpPr>
+          <p:cNvPr id="22" name="Text 20"/>
+          <p:cNvSpPr/>
+          <p:nvPr/>
+        </p:nvSpPr>
+        <p:spPr>
+          <a:xfrm>
+            <a:off x="7534656" y="2103120"/>
+            <a:ext cx="4078224" cy="457200"/>
+          </a:xfrm>
+          <a:prstGeom prst="rect">
+            <a:avLst/>
+          </a:prstGeom>
+          <a:noFill/>
+          <a:ln/>
+        </p:spPr>
+        <p:txBody>
+          <a:bodyPr wrap="square" lIns="0" tIns="0" rIns="0" bIns="0" rtlCol="0" anchor="ctr"/>
+          <a:lstStyle/>
+          <a:p>
+            <a:pPr indent="0" marL="0">
+              <a:buNone/>
+            </a:pPr>
+            <a:r>
+              <a:rPr lang="en-US" sz="1150" dirty="0">
+                <a:solidFill>
+                  <a:srgbClr val="4FB0C6"/>
+                </a:solidFill>
+                <a:latin typeface="Malgun Gothic" pitchFamily="34" charset="0"/>
+                <a:ea typeface="Malgun Gothic" pitchFamily="34" charset="-122"/>
+                <a:cs typeface="Malgun Gothic" pitchFamily="34" charset="-120"/>
+              </a:rPr>
+              <a:t>한 비트씩 이동 → 주소·배선 검사 (Test 0·6)</a:t>
+            </a:r>
+            <a:endParaRPr lang="en-US" sz="1150" dirty="0"/>
+          </a:p>
+        </p:txBody>
+      </p:sp>
+      <p:sp>
+        <p:nvSpPr>
+          <p:cNvPr id="23" name="Text 21"/>
+          <p:cNvSpPr/>
+          <p:nvPr/>
+        </p:nvSpPr>
+        <p:spPr>
+          <a:xfrm>
+            <a:off x="548640" y="2651760"/>
+            <a:ext cx="2148840" cy="457200"/>
+          </a:xfrm>
+          <a:prstGeom prst="rect">
+            <a:avLst/>
+          </a:prstGeom>
+          <a:noFill/>
+          <a:ln/>
+        </p:spPr>
+        <p:txBody>
+          <a:bodyPr wrap="square" lIns="0" tIns="0" rIns="0" bIns="0" rtlCol="0" anchor="ctr"/>
+          <a:lstStyle/>
+          <a:p>
+            <a:pPr indent="0" marL="0">
+              <a:buNone/>
+            </a:pPr>
+            <a:r>
+              <a:rPr lang="en-US" sz="1250" b="1" dirty="0">
+                <a:solidFill>
+                  <a:srgbClr val="E8EDF2"/>
+                </a:solidFill>
+                <a:latin typeface="Malgun Gothic" pitchFamily="34" charset="0"/>
+                <a:ea typeface="Malgun Gothic" pitchFamily="34" charset="-122"/>
+                <a:cs typeface="Malgun Gothic" pitchFamily="34" charset="-120"/>
+              </a:rPr>
+              <a:t>전부 0 / 전부 1</a:t>
+            </a:r>
+            <a:endParaRPr lang="en-US" sz="1250" dirty="0"/>
+          </a:p>
+        </p:txBody>
+      </p:sp>
+      <p:sp>
+        <p:nvSpPr>
+          <p:cNvPr id="24" name="Shape 22"/>
+          <p:cNvSpPr/>
+          <p:nvPr/>
+        </p:nvSpPr>
+        <p:spPr>
+          <a:xfrm>
+            <a:off x="2788920" y="2651760"/>
+            <a:ext cx="502920" cy="457200"/>
+          </a:xfrm>
+          <a:prstGeom prst="roundRect">
+            <a:avLst>
+              <a:gd name="adj" fmla="val 8000"/>
+            </a:avLst>
+          </a:prstGeom>
+          <a:solidFill>
+            <a:srgbClr val="8CC63F"/>
+          </a:solidFill>
+          <a:ln w="12700">
+            <a:solidFill>
+              <a:srgbClr val="8CC63F"/>
+            </a:solidFill>
+            <a:prstDash val="solid"/>
+          </a:ln>
+        </p:spPr>
+      </p:sp>
+      <p:sp>
+        <p:nvSpPr>
+          <p:cNvPr id="25" name="Text 23"/>
+          <p:cNvSpPr/>
+          <p:nvPr/>
+        </p:nvSpPr>
+        <p:spPr>
+          <a:xfrm>
+            <a:off x="2788920" y="2651760"/>
+            <a:ext cx="502920" cy="457200"/>
+          </a:xfrm>
+          <a:prstGeom prst="rect">
+            <a:avLst/>
+          </a:prstGeom>
+          <a:noFill/>
+          <a:ln/>
+        </p:spPr>
+        <p:txBody>
+          <a:bodyPr wrap="square" lIns="0" tIns="0" rIns="0" bIns="0" rtlCol="0" anchor="ctr"/>
+          <a:lstStyle/>
+          <a:p>
+            <a:pPr algn="ctr" indent="0" marL="0">
+              <a:buNone/>
+            </a:pPr>
+            <a:r>
+              <a:rPr lang="en-US" sz="1300" b="1" dirty="0">
+                <a:solidFill>
+                  <a:srgbClr val="13161C"/>
+                </a:solidFill>
+                <a:latin typeface="Courier New" pitchFamily="34" charset="0"/>
+                <a:ea typeface="Courier New" pitchFamily="34" charset="-122"/>
+                <a:cs typeface="Courier New" pitchFamily="34" charset="-120"/>
+              </a:rPr>
+              <a:t>1</a:t>
+            </a:r>
+            <a:endParaRPr lang="en-US" sz="1300" dirty="0"/>
+          </a:p>
+        </p:txBody>
+      </p:sp>
+      <p:sp>
+        <p:nvSpPr>
+          <p:cNvPr id="26" name="Shape 24"/>
+          <p:cNvSpPr/>
+          <p:nvPr/>
+        </p:nvSpPr>
+        <p:spPr>
+          <a:xfrm>
+            <a:off x="3364992" y="2651760"/>
+            <a:ext cx="502920" cy="457200"/>
+          </a:xfrm>
+          <a:prstGeom prst="roundRect">
+            <a:avLst>
+              <a:gd name="adj" fmla="val 8000"/>
+            </a:avLst>
+          </a:prstGeom>
+          <a:solidFill>
+            <a:srgbClr val="8CC63F"/>
+          </a:solidFill>
+          <a:ln w="12700">
+            <a:solidFill>
+              <a:srgbClr val="8CC63F"/>
+            </a:solidFill>
+            <a:prstDash val="solid"/>
+          </a:ln>
+        </p:spPr>
+      </p:sp>
+      <p:sp>
+        <p:nvSpPr>
+          <p:cNvPr id="27" name="Text 25"/>
+          <p:cNvSpPr/>
+          <p:nvPr/>
+        </p:nvSpPr>
+        <p:spPr>
+          <a:xfrm>
+            <a:off x="3364992" y="2651760"/>
+            <a:ext cx="502920" cy="457200"/>
+          </a:xfrm>
+          <a:prstGeom prst="rect">
+            <a:avLst/>
+          </a:prstGeom>
+          <a:noFill/>
+          <a:ln/>
+        </p:spPr>
+        <p:txBody>
+          <a:bodyPr wrap="square" lIns="0" tIns="0" rIns="0" bIns="0" rtlCol="0" anchor="ctr"/>
+          <a:lstStyle/>
+          <a:p>
+            <a:pPr algn="ctr" indent="0" marL="0">
+              <a:buNone/>
+            </a:pPr>
+            <a:r>
+              <a:rPr lang="en-US" sz="1300" b="1" dirty="0">
+                <a:solidFill>
+                  <a:srgbClr val="13161C"/>
+                </a:solidFill>
+                <a:latin typeface="Courier New" pitchFamily="34" charset="0"/>
+                <a:ea typeface="Courier New" pitchFamily="34" charset="-122"/>
+                <a:cs typeface="Courier New" pitchFamily="34" charset="-120"/>
+              </a:rPr>
+              <a:t>1</a:t>
+            </a:r>
+            <a:endParaRPr lang="en-US" sz="1300" dirty="0"/>
+          </a:p>
+        </p:txBody>
+      </p:sp>
+      <p:sp>
+        <p:nvSpPr>
+          <p:cNvPr id="28" name="Shape 26"/>
+          <p:cNvSpPr/>
+          <p:nvPr/>
+        </p:nvSpPr>
+        <p:spPr>
+          <a:xfrm>
+            <a:off x="3941064" y="2651760"/>
+            <a:ext cx="502920" cy="457200"/>
+          </a:xfrm>
+          <a:prstGeom prst="roundRect">
+            <a:avLst>
+              <a:gd name="adj" fmla="val 8000"/>
+            </a:avLst>
+          </a:prstGeom>
+          <a:solidFill>
+            <a:srgbClr val="8CC63F"/>
+          </a:solidFill>
+          <a:ln w="12700">
+            <a:solidFill>
+              <a:srgbClr val="8CC63F"/>
+            </a:solidFill>
+            <a:prstDash val="solid"/>
+          </a:ln>
+        </p:spPr>
+      </p:sp>
+      <p:sp>
+        <p:nvSpPr>
+          <p:cNvPr id="29" name="Text 27"/>
+          <p:cNvSpPr/>
+          <p:nvPr/>
+        </p:nvSpPr>
+        <p:spPr>
+          <a:xfrm>
+            <a:off x="3941064" y="2651760"/>
+            <a:ext cx="502920" cy="457200"/>
+          </a:xfrm>
+          <a:prstGeom prst="rect">
+            <a:avLst/>
+          </a:prstGeom>
+          <a:noFill/>
+          <a:ln/>
+        </p:spPr>
+        <p:txBody>
+          <a:bodyPr wrap="square" lIns="0" tIns="0" rIns="0" bIns="0" rtlCol="0" anchor="ctr"/>
+          <a:lstStyle/>
+          <a:p>
+            <a:pPr algn="ctr" indent="0" marL="0">
+              <a:buNone/>
+            </a:pPr>
+            <a:r>
+              <a:rPr lang="en-US" sz="1300" b="1" dirty="0">
+                <a:solidFill>
+                  <a:srgbClr val="13161C"/>
+                </a:solidFill>
+                <a:latin typeface="Courier New" pitchFamily="34" charset="0"/>
+                <a:ea typeface="Courier New" pitchFamily="34" charset="-122"/>
+                <a:cs typeface="Courier New" pitchFamily="34" charset="-120"/>
+              </a:rPr>
+              <a:t>1</a:t>
+            </a:r>
+            <a:endParaRPr lang="en-US" sz="1300" dirty="0"/>
+          </a:p>
+        </p:txBody>
+      </p:sp>
+      <p:sp>
+        <p:nvSpPr>
+          <p:cNvPr id="30" name="Shape 28"/>
+          <p:cNvSpPr/>
+          <p:nvPr/>
+        </p:nvSpPr>
+        <p:spPr>
+          <a:xfrm>
+            <a:off x="4517136" y="2651760"/>
+            <a:ext cx="502920" cy="457200"/>
+          </a:xfrm>
+          <a:prstGeom prst="roundRect">
+            <a:avLst>
+              <a:gd name="adj" fmla="val 8000"/>
+            </a:avLst>
+          </a:prstGeom>
+          <a:solidFill>
+            <a:srgbClr val="8CC63F"/>
+          </a:solidFill>
+          <a:ln w="12700">
+            <a:solidFill>
+              <a:srgbClr val="8CC63F"/>
+            </a:solidFill>
+            <a:prstDash val="solid"/>
+          </a:ln>
+        </p:spPr>
+      </p:sp>
+      <p:sp>
+        <p:nvSpPr>
+          <p:cNvPr id="31" name="Text 29"/>
+          <p:cNvSpPr/>
+          <p:nvPr/>
+        </p:nvSpPr>
+        <p:spPr>
+          <a:xfrm>
+            <a:off x="4517136" y="2651760"/>
+            <a:ext cx="502920" cy="457200"/>
+          </a:xfrm>
+          <a:prstGeom prst="rect">
+            <a:avLst/>
+          </a:prstGeom>
+          <a:noFill/>
+          <a:ln/>
+        </p:spPr>
+        <p:txBody>
+          <a:bodyPr wrap="square" lIns="0" tIns="0" rIns="0" bIns="0" rtlCol="0" anchor="ctr"/>
+          <a:lstStyle/>
+          <a:p>
+            <a:pPr algn="ctr" indent="0" marL="0">
+              <a:buNone/>
+            </a:pPr>
+            <a:r>
+              <a:rPr lang="en-US" sz="1300" b="1" dirty="0">
+                <a:solidFill>
+                  <a:srgbClr val="13161C"/>
+                </a:solidFill>
+                <a:latin typeface="Courier New" pitchFamily="34" charset="0"/>
+                <a:ea typeface="Courier New" pitchFamily="34" charset="-122"/>
+                <a:cs typeface="Courier New" pitchFamily="34" charset="-120"/>
+              </a:rPr>
+              <a:t>1</a:t>
+            </a:r>
+            <a:endParaRPr lang="en-US" sz="1300" dirty="0"/>
+          </a:p>
+        </p:txBody>
+      </p:sp>
+      <p:sp>
+        <p:nvSpPr>
+          <p:cNvPr id="32" name="Shape 30"/>
+          <p:cNvSpPr/>
+          <p:nvPr/>
+        </p:nvSpPr>
+        <p:spPr>
+          <a:xfrm>
+            <a:off x="5093208" y="2651760"/>
+            <a:ext cx="502920" cy="457200"/>
+          </a:xfrm>
+          <a:prstGeom prst="roundRect">
+            <a:avLst>
+              <a:gd name="adj" fmla="val 8000"/>
+            </a:avLst>
+          </a:prstGeom>
+          <a:solidFill>
+            <a:srgbClr val="8CC63F"/>
+          </a:solidFill>
+          <a:ln w="12700">
+            <a:solidFill>
+              <a:srgbClr val="8CC63F"/>
+            </a:solidFill>
+            <a:prstDash val="solid"/>
+          </a:ln>
+        </p:spPr>
+      </p:sp>
+      <p:sp>
+        <p:nvSpPr>
+          <p:cNvPr id="33" name="Text 31"/>
+          <p:cNvSpPr/>
+          <p:nvPr/>
+        </p:nvSpPr>
+        <p:spPr>
+          <a:xfrm>
+            <a:off x="5093208" y="2651760"/>
+            <a:ext cx="502920" cy="457200"/>
+          </a:xfrm>
+          <a:prstGeom prst="rect">
+            <a:avLst/>
+          </a:prstGeom>
+          <a:noFill/>
+          <a:ln/>
+        </p:spPr>
+        <p:txBody>
+          <a:bodyPr wrap="square" lIns="0" tIns="0" rIns="0" bIns="0" rtlCol="0" anchor="ctr"/>
+          <a:lstStyle/>
+          <a:p>
+            <a:pPr algn="ctr" indent="0" marL="0">
+              <a:buNone/>
+            </a:pPr>
+            <a:r>
+              <a:rPr lang="en-US" sz="1300" b="1" dirty="0">
+                <a:solidFill>
+                  <a:srgbClr val="13161C"/>
+                </a:solidFill>
+                <a:latin typeface="Courier New" pitchFamily="34" charset="0"/>
+                <a:ea typeface="Courier New" pitchFamily="34" charset="-122"/>
+                <a:cs typeface="Courier New" pitchFamily="34" charset="-120"/>
+              </a:rPr>
+              <a:t>1</a:t>
+            </a:r>
+            <a:endParaRPr lang="en-US" sz="1300" dirty="0"/>
+          </a:p>
+        </p:txBody>
+      </p:sp>
+      <p:sp>
+        <p:nvSpPr>
+          <p:cNvPr id="34" name="Shape 32"/>
+          <p:cNvSpPr/>
+          <p:nvPr/>
+        </p:nvSpPr>
+        <p:spPr>
+          <a:xfrm>
+            <a:off x="5669280" y="2651760"/>
+            <a:ext cx="502920" cy="457200"/>
+          </a:xfrm>
+          <a:prstGeom prst="roundRect">
+            <a:avLst>
+              <a:gd name="adj" fmla="val 8000"/>
+            </a:avLst>
+          </a:prstGeom>
+          <a:solidFill>
+            <a:srgbClr val="8CC63F"/>
+          </a:solidFill>
+          <a:ln w="12700">
+            <a:solidFill>
+              <a:srgbClr val="8CC63F"/>
+            </a:solidFill>
+            <a:prstDash val="solid"/>
+          </a:ln>
+        </p:spPr>
+      </p:sp>
+      <p:sp>
+        <p:nvSpPr>
+          <p:cNvPr id="35" name="Text 33"/>
+          <p:cNvSpPr/>
+          <p:nvPr/>
+        </p:nvSpPr>
+        <p:spPr>
+          <a:xfrm>
+            <a:off x="5669280" y="2651760"/>
+            <a:ext cx="502920" cy="457200"/>
+          </a:xfrm>
+          <a:prstGeom prst="rect">
+            <a:avLst/>
+          </a:prstGeom>
+          <a:noFill/>
+          <a:ln/>
+        </p:spPr>
+        <p:txBody>
+          <a:bodyPr wrap="square" lIns="0" tIns="0" rIns="0" bIns="0" rtlCol="0" anchor="ctr"/>
+          <a:lstStyle/>
+          <a:p>
+            <a:pPr algn="ctr" indent="0" marL="0">
+              <a:buNone/>
+            </a:pPr>
+            <a:r>
+              <a:rPr lang="en-US" sz="1300" b="1" dirty="0">
+                <a:solidFill>
+                  <a:srgbClr val="13161C"/>
+                </a:solidFill>
+                <a:latin typeface="Courier New" pitchFamily="34" charset="0"/>
+                <a:ea typeface="Courier New" pitchFamily="34" charset="-122"/>
+                <a:cs typeface="Courier New" pitchFamily="34" charset="-120"/>
+              </a:rPr>
+              <a:t>1</a:t>
+            </a:r>
+            <a:endParaRPr lang="en-US" sz="1300" dirty="0"/>
+          </a:p>
+        </p:txBody>
+      </p:sp>
+      <p:sp>
+        <p:nvSpPr>
+          <p:cNvPr id="36" name="Shape 34"/>
+          <p:cNvSpPr/>
+          <p:nvPr/>
+        </p:nvSpPr>
+        <p:spPr>
+          <a:xfrm>
+            <a:off x="6245352" y="2651760"/>
+            <a:ext cx="502920" cy="457200"/>
+          </a:xfrm>
+          <a:prstGeom prst="roundRect">
+            <a:avLst>
+              <a:gd name="adj" fmla="val 8000"/>
+            </a:avLst>
+          </a:prstGeom>
+          <a:solidFill>
+            <a:srgbClr val="8CC63F"/>
+          </a:solidFill>
+          <a:ln w="12700">
+            <a:solidFill>
+              <a:srgbClr val="8CC63F"/>
+            </a:solidFill>
+            <a:prstDash val="solid"/>
+          </a:ln>
+        </p:spPr>
+      </p:sp>
+      <p:sp>
+        <p:nvSpPr>
+          <p:cNvPr id="37" name="Text 35"/>
+          <p:cNvSpPr/>
+          <p:nvPr/>
+        </p:nvSpPr>
+        <p:spPr>
+          <a:xfrm>
+            <a:off x="6245352" y="2651760"/>
+            <a:ext cx="502920" cy="457200"/>
+          </a:xfrm>
+          <a:prstGeom prst="rect">
+            <a:avLst/>
+          </a:prstGeom>
+          <a:noFill/>
+          <a:ln/>
+        </p:spPr>
+        <p:txBody>
+          <a:bodyPr wrap="square" lIns="0" tIns="0" rIns="0" bIns="0" rtlCol="0" anchor="ctr"/>
+          <a:lstStyle/>
+          <a:p>
+            <a:pPr algn="ctr" indent="0" marL="0">
+              <a:buNone/>
+            </a:pPr>
+            <a:r>
+              <a:rPr lang="en-US" sz="1300" b="1" dirty="0">
+                <a:solidFill>
+                  <a:srgbClr val="13161C"/>
+                </a:solidFill>
+                <a:latin typeface="Courier New" pitchFamily="34" charset="0"/>
+                <a:ea typeface="Courier New" pitchFamily="34" charset="-122"/>
+                <a:cs typeface="Courier New" pitchFamily="34" charset="-120"/>
+              </a:rPr>
+              <a:t>1</a:t>
+            </a:r>
+            <a:endParaRPr lang="en-US" sz="1300" dirty="0"/>
+          </a:p>
+        </p:txBody>
+      </p:sp>
+      <p:sp>
+        <p:nvSpPr>
+          <p:cNvPr id="38" name="Shape 36"/>
+          <p:cNvSpPr/>
+          <p:nvPr/>
+        </p:nvSpPr>
+        <p:spPr>
+          <a:xfrm>
+            <a:off x="6821424" y="2651760"/>
+            <a:ext cx="502920" cy="457200"/>
+          </a:xfrm>
+          <a:prstGeom prst="roundRect">
+            <a:avLst>
+              <a:gd name="adj" fmla="val 8000"/>
+            </a:avLst>
+          </a:prstGeom>
+          <a:solidFill>
+            <a:srgbClr val="8CC63F"/>
+          </a:solidFill>
+          <a:ln w="12700">
+            <a:solidFill>
+              <a:srgbClr val="8CC63F"/>
+            </a:solidFill>
+            <a:prstDash val="solid"/>
+          </a:ln>
+        </p:spPr>
+      </p:sp>
+      <p:sp>
+        <p:nvSpPr>
+          <p:cNvPr id="39" name="Text 37"/>
+          <p:cNvSpPr/>
+          <p:nvPr/>
+        </p:nvSpPr>
+        <p:spPr>
+          <a:xfrm>
+            <a:off x="6821424" y="2651760"/>
+            <a:ext cx="502920" cy="457200"/>
+          </a:xfrm>
+          <a:prstGeom prst="rect">
+            <a:avLst/>
+          </a:prstGeom>
+          <a:noFill/>
+          <a:ln/>
+        </p:spPr>
+        <p:txBody>
+          <a:bodyPr wrap="square" lIns="0" tIns="0" rIns="0" bIns="0" rtlCol="0" anchor="ctr"/>
+          <a:lstStyle/>
+          <a:p>
+            <a:pPr algn="ctr" indent="0" marL="0">
+              <a:buNone/>
+            </a:pPr>
+            <a:r>
+              <a:rPr lang="en-US" sz="1300" b="1" dirty="0">
+                <a:solidFill>
+                  <a:srgbClr val="13161C"/>
+                </a:solidFill>
+                <a:latin typeface="Courier New" pitchFamily="34" charset="0"/>
+                <a:ea typeface="Courier New" pitchFamily="34" charset="-122"/>
+                <a:cs typeface="Courier New" pitchFamily="34" charset="-120"/>
+              </a:rPr>
+              <a:t>1</a:t>
+            </a:r>
+            <a:endParaRPr lang="en-US" sz="1300" dirty="0"/>
+          </a:p>
+        </p:txBody>
+      </p:sp>
+      <p:sp>
+        <p:nvSpPr>
+          <p:cNvPr id="40" name="Text 38"/>
+          <p:cNvSpPr/>
+          <p:nvPr/>
+        </p:nvSpPr>
+        <p:spPr>
+          <a:xfrm>
+            <a:off x="7534656" y="2651760"/>
+            <a:ext cx="4078224" cy="457200"/>
+          </a:xfrm>
+          <a:prstGeom prst="rect">
+            <a:avLst/>
+          </a:prstGeom>
+          <a:noFill/>
+          <a:ln/>
+        </p:spPr>
+        <p:txBody>
+          <a:bodyPr wrap="square" lIns="0" tIns="0" rIns="0" bIns="0" rtlCol="0" anchor="ctr"/>
+          <a:lstStyle/>
+          <a:p>
+            <a:pPr indent="0" marL="0">
+              <a:buNone/>
+            </a:pPr>
+            <a:r>
+              <a:rPr lang="en-US" sz="1150" dirty="0">
+                <a:solidFill>
+                  <a:srgbClr val="8CC63F"/>
+                </a:solidFill>
+                <a:latin typeface="Malgun Gothic" pitchFamily="34" charset="0"/>
+                <a:ea typeface="Malgun Gothic" pitchFamily="34" charset="-122"/>
+                <a:cs typeface="Malgun Gothic" pitchFamily="34" charset="-120"/>
+              </a:rPr>
+              <a:t>0x00000000 ↔ 0xFFFFFFFF → 고착 검사 (Test 2)</a:t>
+            </a:r>
+            <a:endParaRPr lang="en-US" sz="1150" dirty="0"/>
+          </a:p>
+        </p:txBody>
+      </p:sp>
+      <p:sp>
+        <p:nvSpPr>
+          <p:cNvPr id="41" name="Text 39"/>
+          <p:cNvSpPr/>
+          <p:nvPr/>
+        </p:nvSpPr>
+        <p:spPr>
+          <a:xfrm>
+            <a:off x="548640" y="3200400"/>
+            <a:ext cx="2148840" cy="457200"/>
+          </a:xfrm>
+          <a:prstGeom prst="rect">
+            <a:avLst/>
+          </a:prstGeom>
+          <a:noFill/>
+          <a:ln/>
+        </p:spPr>
+        <p:txBody>
+          <a:bodyPr wrap="square" lIns="0" tIns="0" rIns="0" bIns="0" rtlCol="0" anchor="ctr"/>
+          <a:lstStyle/>
+          <a:p>
+            <a:pPr indent="0" marL="0">
+              <a:buNone/>
+            </a:pPr>
+            <a:r>
+              <a:rPr lang="en-US" sz="1250" b="1" dirty="0">
+                <a:solidFill>
+                  <a:srgbClr val="E8EDF2"/>
+                </a:solidFill>
+                <a:latin typeface="Malgun Gothic" pitchFamily="34" charset="0"/>
+                <a:ea typeface="Malgun Gothic" pitchFamily="34" charset="-122"/>
+                <a:cs typeface="Malgun Gothic" pitchFamily="34" charset="-120"/>
+              </a:rPr>
+              <a:t>8비트 반복</a:t>
+            </a:r>
+            <a:endParaRPr lang="en-US" sz="1250" dirty="0"/>
+          </a:p>
+        </p:txBody>
+      </p:sp>
+      <p:sp>
+        <p:nvSpPr>
+          <p:cNvPr id="42" name="Shape 40"/>
+          <p:cNvSpPr/>
+          <p:nvPr/>
+        </p:nvSpPr>
+        <p:spPr>
+          <a:xfrm>
+            <a:off x="2788920" y="3200400"/>
+            <a:ext cx="502920" cy="457200"/>
+          </a:xfrm>
+          <a:prstGeom prst="roundRect">
+            <a:avLst>
+              <a:gd name="adj" fmla="val 8000"/>
+            </a:avLst>
+          </a:prstGeom>
+          <a:solidFill>
+            <a:srgbClr val="8CC63F"/>
+          </a:solidFill>
+          <a:ln w="12700">
+            <a:solidFill>
+              <a:srgbClr val="8CC63F"/>
+            </a:solidFill>
+            <a:prstDash val="solid"/>
+          </a:ln>
+        </p:spPr>
+      </p:sp>
+      <p:sp>
+        <p:nvSpPr>
+          <p:cNvPr id="43" name="Text 41"/>
+          <p:cNvSpPr/>
+          <p:nvPr/>
+        </p:nvSpPr>
+        <p:spPr>
+          <a:xfrm>
+            <a:off x="2788920" y="3200400"/>
+            <a:ext cx="502920" cy="457200"/>
+          </a:xfrm>
+          <a:prstGeom prst="rect">
+            <a:avLst/>
+          </a:prstGeom>
+          <a:noFill/>
+          <a:ln/>
+        </p:spPr>
+        <p:txBody>
+          <a:bodyPr wrap="square" lIns="0" tIns="0" rIns="0" bIns="0" rtlCol="0" anchor="ctr"/>
+          <a:lstStyle/>
+          <a:p>
+            <a:pPr algn="ctr" indent="0" marL="0">
+              <a:buNone/>
+            </a:pPr>
+            <a:r>
+              <a:rPr lang="en-US" sz="1300" b="1" dirty="0">
+                <a:solidFill>
+                  <a:srgbClr val="13161C"/>
+                </a:solidFill>
+                <a:latin typeface="Courier New" pitchFamily="34" charset="0"/>
+                <a:ea typeface="Courier New" pitchFamily="34" charset="-122"/>
+                <a:cs typeface="Courier New" pitchFamily="34" charset="-120"/>
+              </a:rPr>
+              <a:t>1</a:t>
+            </a:r>
+            <a:endParaRPr lang="en-US" sz="1300" dirty="0"/>
+          </a:p>
+        </p:txBody>
+      </p:sp>
+      <p:sp>
+        <p:nvSpPr>
+          <p:cNvPr id="44" name="Shape 42"/>
+          <p:cNvSpPr/>
+          <p:nvPr/>
+        </p:nvSpPr>
+        <p:spPr>
+          <a:xfrm>
+            <a:off x="3364992" y="3200400"/>
+            <a:ext cx="502920" cy="457200"/>
+          </a:xfrm>
+          <a:prstGeom prst="roundRect">
+            <a:avLst>
+              <a:gd name="adj" fmla="val 8000"/>
+            </a:avLst>
+          </a:prstGeom>
+          <a:solidFill>
+            <a:srgbClr val="0E1116"/>
+          </a:solidFill>
+          <a:ln w="12700">
+            <a:solidFill>
+              <a:srgbClr val="2C3440"/>
+            </a:solidFill>
+            <a:prstDash val="solid"/>
+          </a:ln>
+        </p:spPr>
+      </p:sp>
+      <p:sp>
+        <p:nvSpPr>
+          <p:cNvPr id="45" name="Text 43"/>
+          <p:cNvSpPr/>
+          <p:nvPr/>
+        </p:nvSpPr>
+        <p:spPr>
+          <a:xfrm>
+            <a:off x="3364992" y="3200400"/>
+            <a:ext cx="502920" cy="457200"/>
+          </a:xfrm>
+          <a:prstGeom prst="rect">
+            <a:avLst/>
+          </a:prstGeom>
+          <a:noFill/>
+          <a:ln/>
+        </p:spPr>
+        <p:txBody>
+          <a:bodyPr wrap="square" lIns="0" tIns="0" rIns="0" bIns="0" rtlCol="0" anchor="ctr"/>
+          <a:lstStyle/>
+          <a:p>
+            <a:pPr algn="ctr" indent="0" marL="0">
+              <a:buNone/>
+            </a:pPr>
+            <a:r>
+              <a:rPr lang="en-US" sz="1300" b="1" dirty="0">
+                <a:solidFill>
+                  <a:srgbClr val="9AA6B2"/>
+                </a:solidFill>
+                <a:latin typeface="Courier New" pitchFamily="34" charset="0"/>
+                <a:ea typeface="Courier New" pitchFamily="34" charset="-122"/>
+                <a:cs typeface="Courier New" pitchFamily="34" charset="-120"/>
+              </a:rPr>
+              <a:t>0</a:t>
+            </a:r>
+            <a:endParaRPr lang="en-US" sz="1300" dirty="0"/>
+          </a:p>
+        </p:txBody>
+      </p:sp>
+      <p:sp>
+        <p:nvSpPr>
+          <p:cNvPr id="46" name="Shape 44"/>
+          <p:cNvSpPr/>
+          <p:nvPr/>
+        </p:nvSpPr>
+        <p:spPr>
+          <a:xfrm>
+            <a:off x="3941064" y="3200400"/>
+            <a:ext cx="502920" cy="457200"/>
+          </a:xfrm>
+          <a:prstGeom prst="roundRect">
+            <a:avLst>
+              <a:gd name="adj" fmla="val 8000"/>
+            </a:avLst>
+          </a:prstGeom>
+          <a:solidFill>
+            <a:srgbClr val="0E1116"/>
+          </a:solidFill>
+          <a:ln w="12700">
+            <a:solidFill>
+              <a:srgbClr val="2C3440"/>
+            </a:solidFill>
+            <a:prstDash val="solid"/>
+          </a:ln>
+        </p:spPr>
+      </p:sp>
+      <p:sp>
+        <p:nvSpPr>
+          <p:cNvPr id="47" name="Text 45"/>
+          <p:cNvSpPr/>
+          <p:nvPr/>
+        </p:nvSpPr>
+        <p:spPr>
+          <a:xfrm>
+            <a:off x="3941064" y="3200400"/>
+            <a:ext cx="502920" cy="457200"/>
+          </a:xfrm>
+          <a:prstGeom prst="rect">
+            <a:avLst/>
+          </a:prstGeom>
+          <a:noFill/>
+          <a:ln/>
+        </p:spPr>
+        <p:txBody>
+          <a:bodyPr wrap="square" lIns="0" tIns="0" rIns="0" bIns="0" rtlCol="0" anchor="ctr"/>
+          <a:lstStyle/>
+          <a:p>
+            <a:pPr algn="ctr" indent="0" marL="0">
+              <a:buNone/>
+            </a:pPr>
+            <a:r>
+              <a:rPr lang="en-US" sz="1300" b="1" dirty="0">
+                <a:solidFill>
+                  <a:srgbClr val="9AA6B2"/>
+                </a:solidFill>
+                <a:latin typeface="Courier New" pitchFamily="34" charset="0"/>
+                <a:ea typeface="Courier New" pitchFamily="34" charset="-122"/>
+                <a:cs typeface="Courier New" pitchFamily="34" charset="-120"/>
+              </a:rPr>
+              <a:t>0</a:t>
+            </a:r>
+            <a:endParaRPr lang="en-US" sz="1300" dirty="0"/>
+          </a:p>
+        </p:txBody>
+      </p:sp>
+      <p:sp>
+        <p:nvSpPr>
+          <p:cNvPr id="48" name="Shape 46"/>
+          <p:cNvSpPr/>
+          <p:nvPr/>
+        </p:nvSpPr>
+        <p:spPr>
+          <a:xfrm>
+            <a:off x="4517136" y="3200400"/>
+            <a:ext cx="502920" cy="457200"/>
+          </a:xfrm>
+          <a:prstGeom prst="roundRect">
+            <a:avLst>
+              <a:gd name="adj" fmla="val 8000"/>
+            </a:avLst>
+          </a:prstGeom>
+          <a:solidFill>
+            <a:srgbClr val="0E1116"/>
+          </a:solidFill>
+          <a:ln w="12700">
+            <a:solidFill>
+              <a:srgbClr val="2C3440"/>
+            </a:solidFill>
+            <a:prstDash val="solid"/>
+          </a:ln>
+        </p:spPr>
+      </p:sp>
+      <p:sp>
+        <p:nvSpPr>
+          <p:cNvPr id="49" name="Text 47"/>
+          <p:cNvSpPr/>
+          <p:nvPr/>
+        </p:nvSpPr>
+        <p:spPr>
+          <a:xfrm>
+            <a:off x="4517136" y="3200400"/>
+            <a:ext cx="502920" cy="457200"/>
+          </a:xfrm>
+          <a:prstGeom prst="rect">
+            <a:avLst/>
+          </a:prstGeom>
+          <a:noFill/>
+          <a:ln/>
+        </p:spPr>
+        <p:txBody>
+          <a:bodyPr wrap="square" lIns="0" tIns="0" rIns="0" bIns="0" rtlCol="0" anchor="ctr"/>
+          <a:lstStyle/>
+          <a:p>
+            <a:pPr algn="ctr" indent="0" marL="0">
+              <a:buNone/>
+            </a:pPr>
+            <a:r>
+              <a:rPr lang="en-US" sz="1300" b="1" dirty="0">
+                <a:solidFill>
+                  <a:srgbClr val="9AA6B2"/>
+                </a:solidFill>
+                <a:latin typeface="Courier New" pitchFamily="34" charset="0"/>
+                <a:ea typeface="Courier New" pitchFamily="34" charset="-122"/>
+                <a:cs typeface="Courier New" pitchFamily="34" charset="-120"/>
+              </a:rPr>
+              <a:t>0</a:t>
+            </a:r>
+            <a:endParaRPr lang="en-US" sz="1300" dirty="0"/>
+          </a:p>
+        </p:txBody>
+      </p:sp>
+      <p:sp>
+        <p:nvSpPr>
+          <p:cNvPr id="50" name="Shape 48"/>
+          <p:cNvSpPr/>
+          <p:nvPr/>
+        </p:nvSpPr>
+        <p:spPr>
+          <a:xfrm>
+            <a:off x="5093208" y="3200400"/>
+            <a:ext cx="502920" cy="457200"/>
+          </a:xfrm>
+          <a:prstGeom prst="roundRect">
+            <a:avLst>
+              <a:gd name="adj" fmla="val 8000"/>
+            </a:avLst>
+          </a:prstGeom>
+          <a:solidFill>
+            <a:srgbClr val="0E1116"/>
+          </a:solidFill>
+          <a:ln w="12700">
+            <a:solidFill>
+              <a:srgbClr val="2C3440"/>
+            </a:solidFill>
+            <a:prstDash val="solid"/>
+          </a:ln>
+        </p:spPr>
+      </p:sp>
+      <p:sp>
+        <p:nvSpPr>
+          <p:cNvPr id="51" name="Text 49"/>
+          <p:cNvSpPr/>
+          <p:nvPr/>
+        </p:nvSpPr>
+        <p:spPr>
+          <a:xfrm>
+            <a:off x="5093208" y="3200400"/>
+            <a:ext cx="502920" cy="457200"/>
+          </a:xfrm>
+          <a:prstGeom prst="rect">
+            <a:avLst/>
+          </a:prstGeom>
+          <a:noFill/>
+          <a:ln/>
+        </p:spPr>
+        <p:txBody>
+          <a:bodyPr wrap="square" lIns="0" tIns="0" rIns="0" bIns="0" rtlCol="0" anchor="ctr"/>
+          <a:lstStyle/>
+          <a:p>
+            <a:pPr algn="ctr" indent="0" marL="0">
+              <a:buNone/>
+            </a:pPr>
+            <a:r>
+              <a:rPr lang="en-US" sz="1300" b="1" dirty="0">
+                <a:solidFill>
+                  <a:srgbClr val="9AA6B2"/>
+                </a:solidFill>
+                <a:latin typeface="Courier New" pitchFamily="34" charset="0"/>
+                <a:ea typeface="Courier New" pitchFamily="34" charset="-122"/>
+                <a:cs typeface="Courier New" pitchFamily="34" charset="-120"/>
+              </a:rPr>
+              <a:t>0</a:t>
+            </a:r>
+            <a:endParaRPr lang="en-US" sz="1300" dirty="0"/>
+          </a:p>
+        </p:txBody>
+      </p:sp>
+      <p:sp>
+        <p:nvSpPr>
+          <p:cNvPr id="52" name="Shape 50"/>
+          <p:cNvSpPr/>
+          <p:nvPr/>
+        </p:nvSpPr>
+        <p:spPr>
+          <a:xfrm>
+            <a:off x="5669280" y="3200400"/>
+            <a:ext cx="502920" cy="457200"/>
+          </a:xfrm>
+          <a:prstGeom prst="roundRect">
+            <a:avLst>
+              <a:gd name="adj" fmla="val 8000"/>
+            </a:avLst>
+          </a:prstGeom>
+          <a:solidFill>
+            <a:srgbClr val="0E1116"/>
+          </a:solidFill>
+          <a:ln w="12700">
+            <a:solidFill>
+              <a:srgbClr val="2C3440"/>
+            </a:solidFill>
+            <a:prstDash val="solid"/>
+          </a:ln>
+        </p:spPr>
+      </p:sp>
+      <p:sp>
+        <p:nvSpPr>
+          <p:cNvPr id="53" name="Text 51"/>
+          <p:cNvSpPr/>
+          <p:nvPr/>
+        </p:nvSpPr>
+        <p:spPr>
+          <a:xfrm>
+            <a:off x="5669280" y="3200400"/>
+            <a:ext cx="502920" cy="457200"/>
+          </a:xfrm>
+          <a:prstGeom prst="rect">
+            <a:avLst/>
+          </a:prstGeom>
+          <a:noFill/>
+          <a:ln/>
+        </p:spPr>
+        <p:txBody>
+          <a:bodyPr wrap="square" lIns="0" tIns="0" rIns="0" bIns="0" rtlCol="0" anchor="ctr"/>
+          <a:lstStyle/>
+          <a:p>
+            <a:pPr algn="ctr" indent="0" marL="0">
+              <a:buNone/>
+            </a:pPr>
+            <a:r>
+              <a:rPr lang="en-US" sz="1300" b="1" dirty="0">
+                <a:solidFill>
+                  <a:srgbClr val="9AA6B2"/>
+                </a:solidFill>
+                <a:latin typeface="Courier New" pitchFamily="34" charset="0"/>
+                <a:ea typeface="Courier New" pitchFamily="34" charset="-122"/>
+                <a:cs typeface="Courier New" pitchFamily="34" charset="-120"/>
+              </a:rPr>
+              <a:t>0</a:t>
+            </a:r>
+            <a:endParaRPr lang="en-US" sz="1300" dirty="0"/>
+          </a:p>
+        </p:txBody>
+      </p:sp>
+      <p:sp>
+        <p:nvSpPr>
+          <p:cNvPr id="54" name="Shape 52"/>
+          <p:cNvSpPr/>
+          <p:nvPr/>
+        </p:nvSpPr>
+        <p:spPr>
+          <a:xfrm>
+            <a:off x="6245352" y="3200400"/>
+            <a:ext cx="502920" cy="457200"/>
+          </a:xfrm>
+          <a:prstGeom prst="roundRect">
+            <a:avLst>
+              <a:gd name="adj" fmla="val 8000"/>
+            </a:avLst>
+          </a:prstGeom>
+          <a:solidFill>
+            <a:srgbClr val="0E1116"/>
+          </a:solidFill>
+          <a:ln w="12700">
+            <a:solidFill>
+              <a:srgbClr val="2C3440"/>
+            </a:solidFill>
+            <a:prstDash val="solid"/>
+          </a:ln>
+        </p:spPr>
+      </p:sp>
+      <p:sp>
+        <p:nvSpPr>
+          <p:cNvPr id="55" name="Text 53"/>
+          <p:cNvSpPr/>
+          <p:nvPr/>
+        </p:nvSpPr>
+        <p:spPr>
+          <a:xfrm>
+            <a:off x="6245352" y="3200400"/>
+            <a:ext cx="502920" cy="457200"/>
+          </a:xfrm>
+          <a:prstGeom prst="rect">
+            <a:avLst/>
+          </a:prstGeom>
+          <a:noFill/>
+          <a:ln/>
+        </p:spPr>
+        <p:txBody>
+          <a:bodyPr wrap="square" lIns="0" tIns="0" rIns="0" bIns="0" rtlCol="0" anchor="ctr"/>
+          <a:lstStyle/>
+          <a:p>
+            <a:pPr algn="ctr" indent="0" marL="0">
+              <a:buNone/>
+            </a:pPr>
+            <a:r>
+              <a:rPr lang="en-US" sz="1300" b="1" dirty="0">
+                <a:solidFill>
+                  <a:srgbClr val="9AA6B2"/>
+                </a:solidFill>
+                <a:latin typeface="Courier New" pitchFamily="34" charset="0"/>
+                <a:ea typeface="Courier New" pitchFamily="34" charset="-122"/>
+                <a:cs typeface="Courier New" pitchFamily="34" charset="-120"/>
+              </a:rPr>
+              <a:t>0</a:t>
+            </a:r>
+            <a:endParaRPr lang="en-US" sz="1300" dirty="0"/>
+          </a:p>
+        </p:txBody>
+      </p:sp>
+      <p:sp>
+        <p:nvSpPr>
+          <p:cNvPr id="56" name="Shape 54"/>
+          <p:cNvSpPr/>
+          <p:nvPr/>
+        </p:nvSpPr>
+        <p:spPr>
+          <a:xfrm>
+            <a:off x="6821424" y="3200400"/>
+            <a:ext cx="502920" cy="457200"/>
+          </a:xfrm>
+          <a:prstGeom prst="roundRect">
+            <a:avLst>
+              <a:gd name="adj" fmla="val 8000"/>
+            </a:avLst>
+          </a:prstGeom>
+          <a:solidFill>
+            <a:srgbClr val="0E1116"/>
+          </a:solidFill>
+          <a:ln w="12700">
+            <a:solidFill>
+              <a:srgbClr val="2C3440"/>
+            </a:solidFill>
+            <a:prstDash val="solid"/>
+          </a:ln>
+        </p:spPr>
+      </p:sp>
+      <p:sp>
+        <p:nvSpPr>
+          <p:cNvPr id="57" name="Text 55"/>
+          <p:cNvSpPr/>
+          <p:nvPr/>
+        </p:nvSpPr>
+        <p:spPr>
+          <a:xfrm>
+            <a:off x="6821424" y="3200400"/>
+            <a:ext cx="502920" cy="457200"/>
+          </a:xfrm>
+          <a:prstGeom prst="rect">
+            <a:avLst/>
+          </a:prstGeom>
+          <a:noFill/>
+          <a:ln/>
+        </p:spPr>
+        <p:txBody>
+          <a:bodyPr wrap="square" lIns="0" tIns="0" rIns="0" bIns="0" rtlCol="0" anchor="ctr"/>
+          <a:lstStyle/>
+          <a:p>
+            <a:pPr algn="ctr" indent="0" marL="0">
+              <a:buNone/>
+            </a:pPr>
+            <a:r>
+              <a:rPr lang="en-US" sz="1300" b="1" dirty="0">
+                <a:solidFill>
+                  <a:srgbClr val="9AA6B2"/>
+                </a:solidFill>
+                <a:latin typeface="Courier New" pitchFamily="34" charset="0"/>
+                <a:ea typeface="Courier New" pitchFamily="34" charset="-122"/>
+                <a:cs typeface="Courier New" pitchFamily="34" charset="-120"/>
+              </a:rPr>
+              <a:t>0</a:t>
+            </a:r>
+            <a:endParaRPr lang="en-US" sz="1300" dirty="0"/>
+          </a:p>
+        </p:txBody>
+      </p:sp>
+      <p:sp>
+        <p:nvSpPr>
+          <p:cNvPr id="58" name="Text 56"/>
+          <p:cNvSpPr/>
+          <p:nvPr/>
+        </p:nvSpPr>
+        <p:spPr>
+          <a:xfrm>
+            <a:off x="7534656" y="3200400"/>
+            <a:ext cx="4078224" cy="457200"/>
+          </a:xfrm>
+          <a:prstGeom prst="rect">
+            <a:avLst/>
+          </a:prstGeom>
+          <a:noFill/>
+          <a:ln/>
+        </p:spPr>
+        <p:txBody>
+          <a:bodyPr wrap="square" lIns="0" tIns="0" rIns="0" bIns="0" rtlCol="0" anchor="ctr"/>
+          <a:lstStyle/>
+          <a:p>
+            <a:pPr indent="0" marL="0">
+              <a:buNone/>
+            </a:pPr>
+            <a:r>
+              <a:rPr lang="en-US" sz="1150" dirty="0">
+                <a:solidFill>
+                  <a:srgbClr val="8CC63F"/>
+                </a:solidFill>
+                <a:latin typeface="Malgun Gothic" pitchFamily="34" charset="0"/>
+                <a:ea typeface="Malgun Gothic" pitchFamily="34" charset="-122"/>
+                <a:cs typeface="Malgun Gothic" pitchFamily="34" charset="-120"/>
+              </a:rPr>
+              <a:t>0x80808080 (8비트 폭) → 미세 고착 (Test 3)</a:t>
+            </a:r>
+            <a:endParaRPr lang="en-US" sz="1150" dirty="0"/>
+          </a:p>
+        </p:txBody>
+      </p:sp>
+      <p:sp>
+        <p:nvSpPr>
+          <p:cNvPr id="59" name="Text 57"/>
+          <p:cNvSpPr/>
+          <p:nvPr/>
+        </p:nvSpPr>
+        <p:spPr>
+          <a:xfrm>
+            <a:off x="548640" y="3749040"/>
+            <a:ext cx="2148840" cy="457200"/>
+          </a:xfrm>
+          <a:prstGeom prst="rect">
+            <a:avLst/>
+          </a:prstGeom>
+          <a:noFill/>
+          <a:ln/>
+        </p:spPr>
+        <p:txBody>
+          <a:bodyPr wrap="square" lIns="0" tIns="0" rIns="0" bIns="0" rtlCol="0" anchor="ctr"/>
+          <a:lstStyle/>
+          <a:p>
+            <a:pPr indent="0" marL="0">
+              <a:buNone/>
+            </a:pPr>
+            <a:r>
+              <a:rPr lang="en-US" sz="1250" b="1" dirty="0">
+                <a:solidFill>
+                  <a:srgbClr val="E8EDF2"/>
+                </a:solidFill>
+                <a:latin typeface="Malgun Gothic" pitchFamily="34" charset="0"/>
+                <a:ea typeface="Malgun Gothic" pitchFamily="34" charset="-122"/>
+                <a:cs typeface="Malgun Gothic" pitchFamily="34" charset="-120"/>
+              </a:rPr>
+              <a:t>난수 + 보수</a:t>
+            </a:r>
+            <a:endParaRPr lang="en-US" sz="1250" dirty="0"/>
+          </a:p>
+        </p:txBody>
+      </p:sp>
+      <p:sp>
+        <p:nvSpPr>
+          <p:cNvPr id="60" name="Shape 58"/>
+          <p:cNvSpPr/>
+          <p:nvPr/>
+        </p:nvSpPr>
+        <p:spPr>
+          <a:xfrm>
+            <a:off x="2788920" y="3749040"/>
+            <a:ext cx="502920" cy="457200"/>
+          </a:xfrm>
+          <a:prstGeom prst="roundRect">
+            <a:avLst>
+              <a:gd name="adj" fmla="val 8000"/>
+            </a:avLst>
+          </a:prstGeom>
+          <a:solidFill>
+            <a:srgbClr val="8CC63F"/>
+          </a:solidFill>
+          <a:ln w="12700">
+            <a:solidFill>
+              <a:srgbClr val="8CC63F"/>
+            </a:solidFill>
+            <a:prstDash val="solid"/>
+          </a:ln>
+        </p:spPr>
+      </p:sp>
+      <p:sp>
+        <p:nvSpPr>
+          <p:cNvPr id="61" name="Text 59"/>
+          <p:cNvSpPr/>
+          <p:nvPr/>
+        </p:nvSpPr>
+        <p:spPr>
+          <a:xfrm>
+            <a:off x="2788920" y="3749040"/>
+            <a:ext cx="502920" cy="457200"/>
+          </a:xfrm>
+          <a:prstGeom prst="rect">
+            <a:avLst/>
+          </a:prstGeom>
+          <a:noFill/>
+          <a:ln/>
+        </p:spPr>
+        <p:txBody>
+          <a:bodyPr wrap="square" lIns="0" tIns="0" rIns="0" bIns="0" rtlCol="0" anchor="ctr"/>
+          <a:lstStyle/>
+          <a:p>
+            <a:pPr algn="ctr" indent="0" marL="0">
+              <a:buNone/>
+            </a:pPr>
+            <a:r>
+              <a:rPr lang="en-US" sz="1300" b="1" dirty="0">
+                <a:solidFill>
+                  <a:srgbClr val="13161C"/>
+                </a:solidFill>
+                <a:latin typeface="Courier New" pitchFamily="34" charset="0"/>
+                <a:ea typeface="Courier New" pitchFamily="34" charset="-122"/>
+                <a:cs typeface="Courier New" pitchFamily="34" charset="-120"/>
+              </a:rPr>
+              <a:t>1</a:t>
+            </a:r>
+            <a:endParaRPr lang="en-US" sz="1300" dirty="0"/>
+          </a:p>
+        </p:txBody>
+      </p:sp>
+      <p:sp>
+        <p:nvSpPr>
+          <p:cNvPr id="62" name="Shape 60"/>
+          <p:cNvSpPr/>
+          <p:nvPr/>
+        </p:nvSpPr>
+        <p:spPr>
+          <a:xfrm>
+            <a:off x="3364992" y="3749040"/>
+            <a:ext cx="502920" cy="457200"/>
+          </a:xfrm>
+          <a:prstGeom prst="roundRect">
+            <a:avLst>
+              <a:gd name="adj" fmla="val 8000"/>
+            </a:avLst>
+          </a:prstGeom>
+          <a:solidFill>
+            <a:srgbClr val="0E1116"/>
+          </a:solidFill>
+          <a:ln w="12700">
+            <a:solidFill>
+              <a:srgbClr val="2C3440"/>
+            </a:solidFill>
+            <a:prstDash val="solid"/>
+          </a:ln>
+        </p:spPr>
+      </p:sp>
+      <p:sp>
+        <p:nvSpPr>
+          <p:cNvPr id="63" name="Text 61"/>
+          <p:cNvSpPr/>
+          <p:nvPr/>
+        </p:nvSpPr>
+        <p:spPr>
+          <a:xfrm>
+            <a:off x="3364992" y="3749040"/>
+            <a:ext cx="502920" cy="457200"/>
+          </a:xfrm>
+          <a:prstGeom prst="rect">
+            <a:avLst/>
+          </a:prstGeom>
+          <a:noFill/>
+          <a:ln/>
+        </p:spPr>
+        <p:txBody>
+          <a:bodyPr wrap="square" lIns="0" tIns="0" rIns="0" bIns="0" rtlCol="0" anchor="ctr"/>
+          <a:lstStyle/>
+          <a:p>
+            <a:pPr algn="ctr" indent="0" marL="0">
+              <a:buNone/>
+            </a:pPr>
+            <a:r>
+              <a:rPr lang="en-US" sz="1300" b="1" dirty="0">
+                <a:solidFill>
+                  <a:srgbClr val="9AA6B2"/>
+                </a:solidFill>
+                <a:latin typeface="Courier New" pitchFamily="34" charset="0"/>
+                <a:ea typeface="Courier New" pitchFamily="34" charset="-122"/>
+                <a:cs typeface="Courier New" pitchFamily="34" charset="-120"/>
+              </a:rPr>
+              <a:t>0</a:t>
+            </a:r>
+            <a:endParaRPr lang="en-US" sz="1300" dirty="0"/>
+          </a:p>
+        </p:txBody>
+      </p:sp>
+      <p:sp>
+        <p:nvSpPr>
+          <p:cNvPr id="64" name="Shape 62"/>
+          <p:cNvSpPr/>
+          <p:nvPr/>
+        </p:nvSpPr>
+        <p:spPr>
+          <a:xfrm>
+            <a:off x="3941064" y="3749040"/>
+            <a:ext cx="502920" cy="457200"/>
+          </a:xfrm>
+          <a:prstGeom prst="roundRect">
+            <a:avLst>
+              <a:gd name="adj" fmla="val 8000"/>
+            </a:avLst>
+          </a:prstGeom>
+          <a:solidFill>
+            <a:srgbClr val="8CC63F"/>
+          </a:solidFill>
+          <a:ln w="12700">
+            <a:solidFill>
+              <a:srgbClr val="8CC63F"/>
+            </a:solidFill>
+            <a:prstDash val="solid"/>
+          </a:ln>
+        </p:spPr>
+      </p:sp>
+      <p:sp>
+        <p:nvSpPr>
+          <p:cNvPr id="65" name="Text 63"/>
+          <p:cNvSpPr/>
+          <p:nvPr/>
+        </p:nvSpPr>
+        <p:spPr>
+          <a:xfrm>
+            <a:off x="3941064" y="3749040"/>
+            <a:ext cx="502920" cy="457200"/>
+          </a:xfrm>
+          <a:prstGeom prst="rect">
+            <a:avLst/>
+          </a:prstGeom>
+          <a:noFill/>
+          <a:ln/>
+        </p:spPr>
+        <p:txBody>
+          <a:bodyPr wrap="square" lIns="0" tIns="0" rIns="0" bIns="0" rtlCol="0" anchor="ctr"/>
+          <a:lstStyle/>
+          <a:p>
+            <a:pPr algn="ctr" indent="0" marL="0">
+              <a:buNone/>
+            </a:pPr>
+            <a:r>
+              <a:rPr lang="en-US" sz="1300" b="1" dirty="0">
+                <a:solidFill>
+                  <a:srgbClr val="13161C"/>
+                </a:solidFill>
+                <a:latin typeface="Courier New" pitchFamily="34" charset="0"/>
+                <a:ea typeface="Courier New" pitchFamily="34" charset="-122"/>
+                <a:cs typeface="Courier New" pitchFamily="34" charset="-120"/>
+              </a:rPr>
+              <a:t>1</a:t>
+            </a:r>
+            <a:endParaRPr lang="en-US" sz="1300" dirty="0"/>
+          </a:p>
+        </p:txBody>
+      </p:sp>
+      <p:sp>
+        <p:nvSpPr>
+          <p:cNvPr id="66" name="Shape 64"/>
+          <p:cNvSpPr/>
+          <p:nvPr/>
+        </p:nvSpPr>
+        <p:spPr>
+          <a:xfrm>
+            <a:off x="4517136" y="3749040"/>
+            <a:ext cx="502920" cy="457200"/>
+          </a:xfrm>
+          <a:prstGeom prst="roundRect">
+            <a:avLst>
+              <a:gd name="adj" fmla="val 8000"/>
+            </a:avLst>
+          </a:prstGeom>
+          <a:solidFill>
+            <a:srgbClr val="8CC63F"/>
+          </a:solidFill>
+          <a:ln w="12700">
+            <a:solidFill>
+              <a:srgbClr val="8CC63F"/>
+            </a:solidFill>
+            <a:prstDash val="solid"/>
+          </a:ln>
+        </p:spPr>
+      </p:sp>
+      <p:sp>
+        <p:nvSpPr>
+          <p:cNvPr id="67" name="Text 65"/>
+          <p:cNvSpPr/>
+          <p:nvPr/>
+        </p:nvSpPr>
+        <p:spPr>
+          <a:xfrm>
+            <a:off x="4517136" y="3749040"/>
+            <a:ext cx="502920" cy="457200"/>
+          </a:xfrm>
+          <a:prstGeom prst="rect">
+            <a:avLst/>
+          </a:prstGeom>
+          <a:noFill/>
+          <a:ln/>
+        </p:spPr>
+        <p:txBody>
+          <a:bodyPr wrap="square" lIns="0" tIns="0" rIns="0" bIns="0" rtlCol="0" anchor="ctr"/>
+          <a:lstStyle/>
+          <a:p>
+            <a:pPr algn="ctr" indent="0" marL="0">
+              <a:buNone/>
+            </a:pPr>
+            <a:r>
+              <a:rPr lang="en-US" sz="1300" b="1" dirty="0">
+                <a:solidFill>
+                  <a:srgbClr val="13161C"/>
+                </a:solidFill>
+                <a:latin typeface="Courier New" pitchFamily="34" charset="0"/>
+                <a:ea typeface="Courier New" pitchFamily="34" charset="-122"/>
+                <a:cs typeface="Courier New" pitchFamily="34" charset="-120"/>
+              </a:rPr>
+              <a:t>1</a:t>
+            </a:r>
+            <a:endParaRPr lang="en-US" sz="1300" dirty="0"/>
+          </a:p>
+        </p:txBody>
+      </p:sp>
+      <p:sp>
+        <p:nvSpPr>
+          <p:cNvPr id="68" name="Shape 66"/>
+          <p:cNvSpPr/>
+          <p:nvPr/>
+        </p:nvSpPr>
+        <p:spPr>
+          <a:xfrm>
+            <a:off x="5093208" y="3749040"/>
+            <a:ext cx="502920" cy="457200"/>
+          </a:xfrm>
+          <a:prstGeom prst="roundRect">
+            <a:avLst>
+              <a:gd name="adj" fmla="val 8000"/>
+            </a:avLst>
+          </a:prstGeom>
+          <a:solidFill>
+            <a:srgbClr val="0E1116"/>
+          </a:solidFill>
+          <a:ln w="12700">
+            <a:solidFill>
+              <a:srgbClr val="2C3440"/>
+            </a:solidFill>
+            <a:prstDash val="solid"/>
+          </a:ln>
+        </p:spPr>
+      </p:sp>
+      <p:sp>
+        <p:nvSpPr>
+          <p:cNvPr id="69" name="Text 67"/>
+          <p:cNvSpPr/>
+          <p:nvPr/>
+        </p:nvSpPr>
+        <p:spPr>
+          <a:xfrm>
+            <a:off x="5093208" y="3749040"/>
+            <a:ext cx="502920" cy="457200"/>
+          </a:xfrm>
+          <a:prstGeom prst="rect">
+            <a:avLst/>
+          </a:prstGeom>
+          <a:noFill/>
+          <a:ln/>
+        </p:spPr>
+        <p:txBody>
+          <a:bodyPr wrap="square" lIns="0" tIns="0" rIns="0" bIns="0" rtlCol="0" anchor="ctr"/>
+          <a:lstStyle/>
+          <a:p>
+            <a:pPr algn="ctr" indent="0" marL="0">
+              <a:buNone/>
+            </a:pPr>
+            <a:r>
+              <a:rPr lang="en-US" sz="1300" b="1" dirty="0">
+                <a:solidFill>
+                  <a:srgbClr val="9AA6B2"/>
+                </a:solidFill>
+                <a:latin typeface="Courier New" pitchFamily="34" charset="0"/>
+                <a:ea typeface="Courier New" pitchFamily="34" charset="-122"/>
+                <a:cs typeface="Courier New" pitchFamily="34" charset="-120"/>
+              </a:rPr>
+              <a:t>0</a:t>
+            </a:r>
+            <a:endParaRPr lang="en-US" sz="1300" dirty="0"/>
+          </a:p>
+        </p:txBody>
+      </p:sp>
+      <p:sp>
+        <p:nvSpPr>
+          <p:cNvPr id="70" name="Shape 68"/>
+          <p:cNvSpPr/>
+          <p:nvPr/>
+        </p:nvSpPr>
+        <p:spPr>
+          <a:xfrm>
+            <a:off x="5669280" y="3749040"/>
+            <a:ext cx="502920" cy="457200"/>
+          </a:xfrm>
+          <a:prstGeom prst="roundRect">
+            <a:avLst>
+              <a:gd name="adj" fmla="val 8000"/>
+            </a:avLst>
+          </a:prstGeom>
+          <a:solidFill>
+            <a:srgbClr val="8CC63F"/>
+          </a:solidFill>
+          <a:ln w="12700">
+            <a:solidFill>
+              <a:srgbClr val="8CC63F"/>
+            </a:solidFill>
+            <a:prstDash val="solid"/>
+          </a:ln>
+        </p:spPr>
+      </p:sp>
+      <p:sp>
+        <p:nvSpPr>
+          <p:cNvPr id="71" name="Text 69"/>
+          <p:cNvSpPr/>
+          <p:nvPr/>
+        </p:nvSpPr>
+        <p:spPr>
+          <a:xfrm>
+            <a:off x="5669280" y="3749040"/>
+            <a:ext cx="502920" cy="457200"/>
+          </a:xfrm>
+          <a:prstGeom prst="rect">
+            <a:avLst/>
+          </a:prstGeom>
+          <a:noFill/>
+          <a:ln/>
+        </p:spPr>
+        <p:txBody>
+          <a:bodyPr wrap="square" lIns="0" tIns="0" rIns="0" bIns="0" rtlCol="0" anchor="ctr"/>
+          <a:lstStyle/>
+          <a:p>
+            <a:pPr algn="ctr" indent="0" marL="0">
+              <a:buNone/>
+            </a:pPr>
+            <a:r>
+              <a:rPr lang="en-US" sz="1300" b="1" dirty="0">
+                <a:solidFill>
+                  <a:srgbClr val="13161C"/>
+                </a:solidFill>
+                <a:latin typeface="Courier New" pitchFamily="34" charset="0"/>
+                <a:ea typeface="Courier New" pitchFamily="34" charset="-122"/>
+                <a:cs typeface="Courier New" pitchFamily="34" charset="-120"/>
+              </a:rPr>
+              <a:t>1</a:t>
+            </a:r>
+            <a:endParaRPr lang="en-US" sz="1300" dirty="0"/>
+          </a:p>
+        </p:txBody>
+      </p:sp>
+      <p:sp>
+        <p:nvSpPr>
+          <p:cNvPr id="72" name="Shape 70"/>
+          <p:cNvSpPr/>
+          <p:nvPr/>
+        </p:nvSpPr>
+        <p:spPr>
+          <a:xfrm>
+            <a:off x="6245352" y="3749040"/>
+            <a:ext cx="502920" cy="457200"/>
+          </a:xfrm>
+          <a:prstGeom prst="roundRect">
+            <a:avLst>
+              <a:gd name="adj" fmla="val 8000"/>
+            </a:avLst>
+          </a:prstGeom>
+          <a:solidFill>
+            <a:srgbClr val="0E1116"/>
+          </a:solidFill>
+          <a:ln w="12700">
+            <a:solidFill>
+              <a:srgbClr val="2C3440"/>
+            </a:solidFill>
+            <a:prstDash val="solid"/>
+          </a:ln>
+        </p:spPr>
+      </p:sp>
+      <p:sp>
+        <p:nvSpPr>
+          <p:cNvPr id="73" name="Text 71"/>
+          <p:cNvSpPr/>
+          <p:nvPr/>
+        </p:nvSpPr>
+        <p:spPr>
+          <a:xfrm>
+            <a:off x="6245352" y="3749040"/>
+            <a:ext cx="502920" cy="457200"/>
+          </a:xfrm>
+          <a:prstGeom prst="rect">
+            <a:avLst/>
+          </a:prstGeom>
+          <a:noFill/>
+          <a:ln/>
+        </p:spPr>
+        <p:txBody>
+          <a:bodyPr wrap="square" lIns="0" tIns="0" rIns="0" bIns="0" rtlCol="0" anchor="ctr"/>
+          <a:lstStyle/>
+          <a:p>
+            <a:pPr algn="ctr" indent="0" marL="0">
+              <a:buNone/>
+            </a:pPr>
+            <a:r>
+              <a:rPr lang="en-US" sz="1300" b="1" dirty="0">
+                <a:solidFill>
+                  <a:srgbClr val="9AA6B2"/>
+                </a:solidFill>
+                <a:latin typeface="Courier New" pitchFamily="34" charset="0"/>
+                <a:ea typeface="Courier New" pitchFamily="34" charset="-122"/>
+                <a:cs typeface="Courier New" pitchFamily="34" charset="-120"/>
+              </a:rPr>
+              <a:t>0</a:t>
+            </a:r>
+            <a:endParaRPr lang="en-US" sz="1300" dirty="0"/>
+          </a:p>
+        </p:txBody>
+      </p:sp>
+      <p:sp>
+        <p:nvSpPr>
+          <p:cNvPr id="74" name="Shape 72"/>
+          <p:cNvSpPr/>
+          <p:nvPr/>
+        </p:nvSpPr>
+        <p:spPr>
+          <a:xfrm>
+            <a:off x="6821424" y="3749040"/>
+            <a:ext cx="502920" cy="457200"/>
+          </a:xfrm>
+          <a:prstGeom prst="roundRect">
+            <a:avLst>
+              <a:gd name="adj" fmla="val 8000"/>
+            </a:avLst>
+          </a:prstGeom>
+          <a:solidFill>
+            <a:srgbClr val="0E1116"/>
+          </a:solidFill>
+          <a:ln w="12700">
+            <a:solidFill>
+              <a:srgbClr val="2C3440"/>
+            </a:solidFill>
+            <a:prstDash val="solid"/>
+          </a:ln>
+        </p:spPr>
+      </p:sp>
+      <p:sp>
+        <p:nvSpPr>
+          <p:cNvPr id="75" name="Text 73"/>
+          <p:cNvSpPr/>
+          <p:nvPr/>
+        </p:nvSpPr>
+        <p:spPr>
+          <a:xfrm>
+            <a:off x="6821424" y="3749040"/>
+            <a:ext cx="502920" cy="457200"/>
+          </a:xfrm>
+          <a:prstGeom prst="rect">
+            <a:avLst/>
+          </a:prstGeom>
+          <a:noFill/>
+          <a:ln/>
+        </p:spPr>
+        <p:txBody>
+          <a:bodyPr wrap="square" lIns="0" tIns="0" rIns="0" bIns="0" rtlCol="0" anchor="ctr"/>
+          <a:lstStyle/>
+          <a:p>
+            <a:pPr algn="ctr" indent="0" marL="0">
+              <a:buNone/>
+            </a:pPr>
+            <a:r>
+              <a:rPr lang="en-US" sz="1300" b="1" dirty="0">
+                <a:solidFill>
+                  <a:srgbClr val="9AA6B2"/>
+                </a:solidFill>
+                <a:latin typeface="Courier New" pitchFamily="34" charset="0"/>
+                <a:ea typeface="Courier New" pitchFamily="34" charset="-122"/>
+                <a:cs typeface="Courier New" pitchFamily="34" charset="-120"/>
+              </a:rPr>
+              <a:t>0</a:t>
+            </a:r>
+            <a:endParaRPr lang="en-US" sz="1300" dirty="0"/>
+          </a:p>
+        </p:txBody>
+      </p:sp>
+      <p:sp>
+        <p:nvSpPr>
+          <p:cNvPr id="76" name="Text 74"/>
+          <p:cNvSpPr/>
+          <p:nvPr/>
+        </p:nvSpPr>
+        <p:spPr>
+          <a:xfrm>
+            <a:off x="7534656" y="3749040"/>
+            <a:ext cx="4078224" cy="457200"/>
+          </a:xfrm>
+          <a:prstGeom prst="rect">
+            <a:avLst/>
+          </a:prstGeom>
+          <a:noFill/>
+          <a:ln/>
+        </p:spPr>
+        <p:txBody>
+          <a:bodyPr wrap="square" lIns="0" tIns="0" rIns="0" bIns="0" rtlCol="0" anchor="ctr"/>
+          <a:lstStyle/>
+          <a:p>
+            <a:pPr indent="0" marL="0">
+              <a:buNone/>
+            </a:pPr>
+            <a:r>
+              <a:rPr lang="en-US" sz="1150" dirty="0">
+                <a:solidFill>
+                  <a:srgbClr val="E0A458"/>
+                </a:solidFill>
+                <a:latin typeface="Malgun Gothic" pitchFamily="34" charset="0"/>
+                <a:ea typeface="Malgun Gothic" pitchFamily="34" charset="-122"/>
+                <a:cs typeface="Malgun Gothic" pitchFamily="34" charset="-120"/>
+              </a:rPr>
+              <a:t>무작위 값과 그 보수 → 데이터 민감 오류 (Test 4·7·8·10)</a:t>
+            </a:r>
+            <a:endParaRPr lang="en-US" sz="1150" dirty="0"/>
+          </a:p>
+        </p:txBody>
+      </p:sp>
+      <p:sp>
+        <p:nvSpPr>
+          <p:cNvPr id="77" name="Shape 75"/>
+          <p:cNvSpPr/>
+          <p:nvPr/>
+        </p:nvSpPr>
+        <p:spPr>
+          <a:xfrm>
+            <a:off x="548640" y="4434840"/>
+            <a:ext cx="11064240" cy="1417320"/>
+          </a:xfrm>
+          <a:prstGeom prst="roundRect">
+            <a:avLst>
+              <a:gd name="adj" fmla="val 5161"/>
             </a:avLst>
           </a:prstGeom>
           <a:solidFill>
@@ -4203,14 +6525,14 @@
       </p:sp>
       <p:sp>
         <p:nvSpPr>
-          <p:cNvPr id="8" name="Text 6"/>
-          <p:cNvSpPr/>
-          <p:nvPr/>
-        </p:nvSpPr>
-        <p:spPr>
-          <a:xfrm>
-            <a:off x="777240" y="5029200"/>
-            <a:ext cx="4892040" cy="365760"/>
+          <p:cNvPr id="78" name="Text 76"/>
+          <p:cNvSpPr/>
+          <p:nvPr/>
+        </p:nvSpPr>
+        <p:spPr>
+          <a:xfrm>
+            <a:off x="822960" y="4544568"/>
+            <a:ext cx="10515600" cy="320040"/>
           </a:xfrm>
           <a:prstGeom prst="rect">
             <a:avLst/>
@@ -4226,46 +6548,7 @@
               <a:buNone/>
             </a:pPr>
             <a:r>
-              <a:rPr lang="en-US" sz="1500" b="1" dirty="0">
-                <a:solidFill>
-                  <a:srgbClr val="8CC63F"/>
-                </a:solidFill>
-                <a:latin typeface="Malgun Gothic" pitchFamily="34" charset="0"/>
-                <a:ea typeface="Malgun Gothic" pitchFamily="34" charset="-122"/>
-                <a:cs typeface="Malgun Gothic" pitchFamily="34" charset="-120"/>
-              </a:rPr>
-              <a:t>기록되는 정보</a:t>
-            </a:r>
-            <a:endParaRPr lang="en-US" sz="1500" dirty="0"/>
-          </a:p>
-        </p:txBody>
-      </p:sp>
-      <p:sp>
-        <p:nvSpPr>
-          <p:cNvPr id="9" name="Text 7"/>
-          <p:cNvSpPr/>
-          <p:nvPr/>
-        </p:nvSpPr>
-        <p:spPr>
-          <a:xfrm>
-            <a:off x="777240" y="5394960"/>
-            <a:ext cx="4892040" cy="411480"/>
-          </a:xfrm>
-          <a:prstGeom prst="rect">
-            <a:avLst/>
-          </a:prstGeom>
-          <a:noFill/>
-          <a:ln/>
-        </p:spPr>
-        <p:txBody>
-          <a:bodyPr wrap="square" lIns="0" tIns="0" rIns="0" bIns="0" rtlCol="0" anchor="ctr"/>
-          <a:lstStyle/>
-          <a:p>
-            <a:pPr indent="0" marL="0">
-              <a:buNone/>
-            </a:pPr>
-            <a:r>
-              <a:rPr lang="en-US" sz="1400" dirty="0">
+              <a:rPr lang="en-US" sz="1300" b="1" dirty="0">
                 <a:solidFill>
                   <a:srgbClr val="E8EDF2"/>
                 </a:solidFill>
@@ -4273,60 +6556,65 @@
                 <a:ea typeface="Malgun Gothic" pitchFamily="34" charset="-122"/>
                 <a:cs typeface="Malgun Gothic" pitchFamily="34" charset="-120"/>
               </a:rPr>
-              <a:t>오류 주소 · 기대값 · 실제값 · 재읽기값</a:t>
-            </a:r>
-            <a:endParaRPr lang="en-US" sz="1400" dirty="0"/>
-          </a:p>
-        </p:txBody>
-      </p:sp>
-      <p:sp>
-        <p:nvSpPr>
-          <p:cNvPr id="10" name="Shape 8"/>
-          <p:cNvSpPr/>
-          <p:nvPr/>
-        </p:nvSpPr>
-        <p:spPr>
-          <a:xfrm>
-            <a:off x="6263640" y="4892040"/>
-            <a:ext cx="5349240" cy="1005840"/>
+              <a:t>결함 유형별 담당 테스트 (원논문 Table I)</a:t>
+            </a:r>
+            <a:endParaRPr lang="en-US" sz="1300" dirty="0"/>
+          </a:p>
+        </p:txBody>
+      </p:sp>
+      <p:sp>
+        <p:nvSpPr>
+          <p:cNvPr id="79" name="Shape 77"/>
+          <p:cNvSpPr/>
+          <p:nvPr/>
+        </p:nvSpPr>
+        <p:spPr>
+          <a:xfrm>
+            <a:off x="822960" y="4956048"/>
+            <a:ext cx="1956816" cy="777240"/>
           </a:xfrm>
           <a:prstGeom prst="roundRect">
             <a:avLst>
-              <a:gd name="adj" fmla="val 7273"/>
+              <a:gd name="adj" fmla="val 7059"/>
             </a:avLst>
           </a:prstGeom>
           <a:solidFill>
-            <a:srgbClr val="1E232C"/>
+            <a:srgbClr val="0E1116"/>
           </a:solidFill>
-          <a:ln/>
-        </p:spPr>
-      </p:sp>
-      <p:sp>
-        <p:nvSpPr>
-          <p:cNvPr id="11" name="Text 9"/>
-          <p:cNvSpPr/>
-          <p:nvPr/>
-        </p:nvSpPr>
-        <p:spPr>
-          <a:xfrm>
-            <a:off x="6492240" y="5029200"/>
-            <a:ext cx="4892040" cy="365760"/>
-          </a:xfrm>
-          <a:prstGeom prst="rect">
-            <a:avLst/>
-          </a:prstGeom>
-          <a:noFill/>
-          <a:ln/>
-        </p:spPr>
-        <p:txBody>
-          <a:bodyPr wrap="square" lIns="0" tIns="0" rIns="0" bIns="0" rtlCol="0" anchor="ctr"/>
-          <a:lstStyle/>
-          <a:p>
-            <a:pPr indent="0" marL="0">
-              <a:buNone/>
-            </a:pPr>
-            <a:r>
-              <a:rPr lang="en-US" sz="1500" b="1" dirty="0">
+          <a:ln w="15240">
+            <a:solidFill>
+              <a:srgbClr val="4FB0C6"/>
+            </a:solidFill>
+            <a:prstDash val="solid"/>
+          </a:ln>
+        </p:spPr>
+      </p:sp>
+      <p:sp>
+        <p:nvSpPr>
+          <p:cNvPr id="80" name="Text 78"/>
+          <p:cNvSpPr/>
+          <p:nvPr/>
+        </p:nvSpPr>
+        <p:spPr>
+          <a:xfrm>
+            <a:off x="914400" y="5029200"/>
+            <a:ext cx="1773936" cy="292608"/>
+          </a:xfrm>
+          <a:prstGeom prst="rect">
+            <a:avLst/>
+          </a:prstGeom>
+          <a:noFill/>
+          <a:ln/>
+        </p:spPr>
+        <p:txBody>
+          <a:bodyPr wrap="square" lIns="0" tIns="0" rIns="0" bIns="0" rtlCol="0" anchor="ctr"/>
+          <a:lstStyle/>
+          <a:p>
+            <a:pPr algn="ctr" indent="0" marL="0">
+              <a:buNone/>
+            </a:pPr>
+            <a:r>
+              <a:rPr lang="en-US" sz="1250" b="1" dirty="0">
                 <a:solidFill>
                   <a:srgbClr val="4FB0C6"/>
                 </a:solidFill>
@@ -4334,48 +6622,702 @@
                 <a:ea typeface="Malgun Gothic" pitchFamily="34" charset="-122"/>
                 <a:cs typeface="Malgun Gothic" pitchFamily="34" charset="-120"/>
               </a:rPr>
-              <a:t>최근 10개만</a:t>
-            </a:r>
-            <a:endParaRPr lang="en-US" sz="1500" dirty="0"/>
-          </a:p>
-        </p:txBody>
-      </p:sp>
-      <p:sp>
-        <p:nvSpPr>
-          <p:cNvPr id="12" name="Text 10"/>
-          <p:cNvSpPr/>
-          <p:nvPr/>
-        </p:nvSpPr>
-        <p:spPr>
-          <a:xfrm>
-            <a:off x="6492240" y="5394960"/>
-            <a:ext cx="4892040" cy="411480"/>
-          </a:xfrm>
-          <a:prstGeom prst="rect">
-            <a:avLst/>
-          </a:prstGeom>
-          <a:noFill/>
-          <a:ln/>
-        </p:spPr>
-        <p:txBody>
-          <a:bodyPr wrap="square" lIns="0" tIns="0" rIns="0" bIns="0" rtlCol="0" anchor="ctr"/>
-          <a:lstStyle/>
-          <a:p>
-            <a:pPr indent="0" marL="0">
-              <a:buNone/>
-            </a:pPr>
-            <a:r>
-              <a:rPr lang="en-US" sz="1400" dirty="0">
+              <a:t>주소 버스</a:t>
+            </a:r>
+            <a:endParaRPr lang="en-US" sz="1250" dirty="0"/>
+          </a:p>
+        </p:txBody>
+      </p:sp>
+      <p:sp>
+        <p:nvSpPr>
+          <p:cNvPr id="81" name="Text 79"/>
+          <p:cNvSpPr/>
+          <p:nvPr/>
+        </p:nvSpPr>
+        <p:spPr>
+          <a:xfrm>
+            <a:off x="914400" y="5303520"/>
+            <a:ext cx="1773936" cy="219456"/>
+          </a:xfrm>
+          <a:prstGeom prst="rect">
+            <a:avLst/>
+          </a:prstGeom>
+          <a:noFill/>
+          <a:ln/>
+        </p:spPr>
+        <p:txBody>
+          <a:bodyPr wrap="square" lIns="0" tIns="0" rIns="0" bIns="0" rtlCol="0" anchor="ctr"/>
+          <a:lstStyle/>
+          <a:p>
+            <a:pPr algn="ctr" indent="0" marL="0">
+              <a:buNone/>
+            </a:pPr>
+            <a:r>
+              <a:rPr lang="en-US" sz="900" dirty="0">
+                <a:solidFill>
+                  <a:srgbClr val="9AA6B2"/>
+                </a:solidFill>
+                <a:latin typeface="Malgun Gothic" pitchFamily="34" charset="0"/>
+                <a:ea typeface="Malgun Gothic" pitchFamily="34" charset="-122"/>
+                <a:cs typeface="Malgun Gothic" pitchFamily="34" charset="-120"/>
+              </a:rPr>
+              <a:t>address bus</a:t>
+            </a:r>
+            <a:endParaRPr lang="en-US" sz="900" dirty="0"/>
+          </a:p>
+        </p:txBody>
+      </p:sp>
+      <p:sp>
+        <p:nvSpPr>
+          <p:cNvPr id="82" name="Text 80"/>
+          <p:cNvSpPr/>
+          <p:nvPr/>
+        </p:nvSpPr>
+        <p:spPr>
+          <a:xfrm>
+            <a:off x="914400" y="5504688"/>
+            <a:ext cx="1773936" cy="219456"/>
+          </a:xfrm>
+          <a:prstGeom prst="rect">
+            <a:avLst/>
+          </a:prstGeom>
+          <a:noFill/>
+          <a:ln/>
+        </p:spPr>
+        <p:txBody>
+          <a:bodyPr wrap="square" lIns="0" tIns="0" rIns="0" bIns="0" rtlCol="0" anchor="ctr"/>
+          <a:lstStyle/>
+          <a:p>
+            <a:pPr algn="ctr" indent="0" marL="0">
+              <a:buNone/>
+            </a:pPr>
+            <a:r>
+              <a:rPr lang="en-US" sz="1050" b="1" dirty="0">
                 <a:solidFill>
                   <a:srgbClr val="E8EDF2"/>
                 </a:solidFill>
-                <a:latin typeface="Malgun Gothic" pitchFamily="34" charset="0"/>
-                <a:ea typeface="Malgun Gothic" pitchFamily="34" charset="-122"/>
-                <a:cs typeface="Malgun Gothic" pitchFamily="34" charset="-120"/>
-              </a:rPr>
-              <a:t>MAX_ERR_RECORD_COUNT=10, 순환 기록</a:t>
-            </a:r>
-            <a:endParaRPr lang="en-US" sz="1400" dirty="0"/>
+                <a:latin typeface="Courier New" pitchFamily="34" charset="0"/>
+                <a:ea typeface="Courier New" pitchFamily="34" charset="-122"/>
+                <a:cs typeface="Courier New" pitchFamily="34" charset="-120"/>
+              </a:rPr>
+              <a:t>Test 0·1</a:t>
+            </a:r>
+            <a:endParaRPr lang="en-US" sz="1050" dirty="0"/>
+          </a:p>
+        </p:txBody>
+      </p:sp>
+      <p:sp>
+        <p:nvSpPr>
+          <p:cNvPr id="83" name="Shape 81"/>
+          <p:cNvSpPr/>
+          <p:nvPr/>
+        </p:nvSpPr>
+        <p:spPr>
+          <a:xfrm>
+            <a:off x="2962656" y="4956048"/>
+            <a:ext cx="1956816" cy="777240"/>
+          </a:xfrm>
+          <a:prstGeom prst="roundRect">
+            <a:avLst>
+              <a:gd name="adj" fmla="val 7059"/>
+            </a:avLst>
+          </a:prstGeom>
+          <a:solidFill>
+            <a:srgbClr val="0E1116"/>
+          </a:solidFill>
+          <a:ln w="15240">
+            <a:solidFill>
+              <a:srgbClr val="8CC63F"/>
+            </a:solidFill>
+            <a:prstDash val="solid"/>
+          </a:ln>
+        </p:spPr>
+      </p:sp>
+      <p:sp>
+        <p:nvSpPr>
+          <p:cNvPr id="84" name="Text 82"/>
+          <p:cNvSpPr/>
+          <p:nvPr/>
+        </p:nvSpPr>
+        <p:spPr>
+          <a:xfrm>
+            <a:off x="3054096" y="5029200"/>
+            <a:ext cx="1773936" cy="292608"/>
+          </a:xfrm>
+          <a:prstGeom prst="rect">
+            <a:avLst/>
+          </a:prstGeom>
+          <a:noFill/>
+          <a:ln/>
+        </p:spPr>
+        <p:txBody>
+          <a:bodyPr wrap="square" lIns="0" tIns="0" rIns="0" bIns="0" rtlCol="0" anchor="ctr"/>
+          <a:lstStyle/>
+          <a:p>
+            <a:pPr algn="ctr" indent="0" marL="0">
+              <a:buNone/>
+            </a:pPr>
+            <a:r>
+              <a:rPr lang="en-US" sz="1250" b="1" dirty="0">
+                <a:solidFill>
+                  <a:srgbClr val="8CC63F"/>
+                </a:solidFill>
+                <a:latin typeface="Malgun Gothic" pitchFamily="34" charset="0"/>
+                <a:ea typeface="Malgun Gothic" pitchFamily="34" charset="-122"/>
+                <a:cs typeface="Malgun Gothic" pitchFamily="34" charset="-120"/>
+              </a:rPr>
+              <a:t>스턱-앳 고착</a:t>
+            </a:r>
+            <a:endParaRPr lang="en-US" sz="1250" dirty="0"/>
+          </a:p>
+        </p:txBody>
+      </p:sp>
+      <p:sp>
+        <p:nvSpPr>
+          <p:cNvPr id="85" name="Text 83"/>
+          <p:cNvSpPr/>
+          <p:nvPr/>
+        </p:nvSpPr>
+        <p:spPr>
+          <a:xfrm>
+            <a:off x="3054096" y="5303520"/>
+            <a:ext cx="1773936" cy="219456"/>
+          </a:xfrm>
+          <a:prstGeom prst="rect">
+            <a:avLst/>
+          </a:prstGeom>
+          <a:noFill/>
+          <a:ln/>
+        </p:spPr>
+        <p:txBody>
+          <a:bodyPr wrap="square" lIns="0" tIns="0" rIns="0" bIns="0" rtlCol="0" anchor="ctr"/>
+          <a:lstStyle/>
+          <a:p>
+            <a:pPr algn="ctr" indent="0" marL="0">
+              <a:buNone/>
+            </a:pPr>
+            <a:r>
+              <a:rPr lang="en-US" sz="900" dirty="0">
+                <a:solidFill>
+                  <a:srgbClr val="9AA6B2"/>
+                </a:solidFill>
+                <a:latin typeface="Malgun Gothic" pitchFamily="34" charset="0"/>
+                <a:ea typeface="Malgun Gothic" pitchFamily="34" charset="-122"/>
+                <a:cs typeface="Malgun Gothic" pitchFamily="34" charset="-120"/>
+              </a:rPr>
+              <a:t>stuck-at</a:t>
+            </a:r>
+            <a:endParaRPr lang="en-US" sz="900" dirty="0"/>
+          </a:p>
+        </p:txBody>
+      </p:sp>
+      <p:sp>
+        <p:nvSpPr>
+          <p:cNvPr id="86" name="Text 84"/>
+          <p:cNvSpPr/>
+          <p:nvPr/>
+        </p:nvSpPr>
+        <p:spPr>
+          <a:xfrm>
+            <a:off x="3054096" y="5504688"/>
+            <a:ext cx="1773936" cy="219456"/>
+          </a:xfrm>
+          <a:prstGeom prst="rect">
+            <a:avLst/>
+          </a:prstGeom>
+          <a:noFill/>
+          <a:ln/>
+        </p:spPr>
+        <p:txBody>
+          <a:bodyPr wrap="square" lIns="0" tIns="0" rIns="0" bIns="0" rtlCol="0" anchor="ctr"/>
+          <a:lstStyle/>
+          <a:p>
+            <a:pPr algn="ctr" indent="0" marL="0">
+              <a:buNone/>
+            </a:pPr>
+            <a:r>
+              <a:rPr lang="en-US" sz="1050" b="1" dirty="0">
+                <a:solidFill>
+                  <a:srgbClr val="E8EDF2"/>
+                </a:solidFill>
+                <a:latin typeface="Courier New" pitchFamily="34" charset="0"/>
+                <a:ea typeface="Courier New" pitchFamily="34" charset="-122"/>
+                <a:cs typeface="Courier New" pitchFamily="34" charset="-120"/>
+              </a:rPr>
+              <a:t>Test 2·3</a:t>
+            </a:r>
+            <a:endParaRPr lang="en-US" sz="1050" dirty="0"/>
+          </a:p>
+        </p:txBody>
+      </p:sp>
+      <p:sp>
+        <p:nvSpPr>
+          <p:cNvPr id="87" name="Shape 85"/>
+          <p:cNvSpPr/>
+          <p:nvPr/>
+        </p:nvSpPr>
+        <p:spPr>
+          <a:xfrm>
+            <a:off x="5102352" y="4956048"/>
+            <a:ext cx="1956816" cy="777240"/>
+          </a:xfrm>
+          <a:prstGeom prst="roundRect">
+            <a:avLst>
+              <a:gd name="adj" fmla="val 7059"/>
+            </a:avLst>
+          </a:prstGeom>
+          <a:solidFill>
+            <a:srgbClr val="0E1116"/>
+          </a:solidFill>
+          <a:ln w="15240">
+            <a:solidFill>
+              <a:srgbClr val="E0A458"/>
+            </a:solidFill>
+            <a:prstDash val="solid"/>
+          </a:ln>
+        </p:spPr>
+      </p:sp>
+      <p:sp>
+        <p:nvSpPr>
+          <p:cNvPr id="88" name="Text 86"/>
+          <p:cNvSpPr/>
+          <p:nvPr/>
+        </p:nvSpPr>
+        <p:spPr>
+          <a:xfrm>
+            <a:off x="5193792" y="5029200"/>
+            <a:ext cx="1773936" cy="292608"/>
+          </a:xfrm>
+          <a:prstGeom prst="rect">
+            <a:avLst/>
+          </a:prstGeom>
+          <a:noFill/>
+          <a:ln/>
+        </p:spPr>
+        <p:txBody>
+          <a:bodyPr wrap="square" lIns="0" tIns="0" rIns="0" bIns="0" rtlCol="0" anchor="ctr"/>
+          <a:lstStyle/>
+          <a:p>
+            <a:pPr algn="ctr" indent="0" marL="0">
+              <a:buNone/>
+            </a:pPr>
+            <a:r>
+              <a:rPr lang="en-US" sz="1250" b="1" dirty="0">
+                <a:solidFill>
+                  <a:srgbClr val="E0A458"/>
+                </a:solidFill>
+                <a:latin typeface="Malgun Gothic" pitchFamily="34" charset="0"/>
+                <a:ea typeface="Malgun Gothic" pitchFamily="34" charset="-122"/>
+                <a:cs typeface="Malgun Gothic" pitchFamily="34" charset="-120"/>
+              </a:rPr>
+              <a:t>데이터 민감</a:t>
+            </a:r>
+            <a:endParaRPr lang="en-US" sz="1250" dirty="0"/>
+          </a:p>
+        </p:txBody>
+      </p:sp>
+      <p:sp>
+        <p:nvSpPr>
+          <p:cNvPr id="89" name="Text 87"/>
+          <p:cNvSpPr/>
+          <p:nvPr/>
+        </p:nvSpPr>
+        <p:spPr>
+          <a:xfrm>
+            <a:off x="5193792" y="5303520"/>
+            <a:ext cx="1773936" cy="219456"/>
+          </a:xfrm>
+          <a:prstGeom prst="rect">
+            <a:avLst/>
+          </a:prstGeom>
+          <a:noFill/>
+          <a:ln/>
+        </p:spPr>
+        <p:txBody>
+          <a:bodyPr wrap="square" lIns="0" tIns="0" rIns="0" bIns="0" rtlCol="0" anchor="ctr"/>
+          <a:lstStyle/>
+          <a:p>
+            <a:pPr algn="ctr" indent="0" marL="0">
+              <a:buNone/>
+            </a:pPr>
+            <a:r>
+              <a:rPr lang="en-US" sz="900" dirty="0">
+                <a:solidFill>
+                  <a:srgbClr val="9AA6B2"/>
+                </a:solidFill>
+                <a:latin typeface="Malgun Gothic" pitchFamily="34" charset="0"/>
+                <a:ea typeface="Malgun Gothic" pitchFamily="34" charset="-122"/>
+                <a:cs typeface="Malgun Gothic" pitchFamily="34" charset="-120"/>
+              </a:rPr>
+              <a:t>data sensitive</a:t>
+            </a:r>
+            <a:endParaRPr lang="en-US" sz="900" dirty="0"/>
+          </a:p>
+        </p:txBody>
+      </p:sp>
+      <p:sp>
+        <p:nvSpPr>
+          <p:cNvPr id="90" name="Text 88"/>
+          <p:cNvSpPr/>
+          <p:nvPr/>
+        </p:nvSpPr>
+        <p:spPr>
+          <a:xfrm>
+            <a:off x="5193792" y="5504688"/>
+            <a:ext cx="1773936" cy="219456"/>
+          </a:xfrm>
+          <a:prstGeom prst="rect">
+            <a:avLst/>
+          </a:prstGeom>
+          <a:noFill/>
+          <a:ln/>
+        </p:spPr>
+        <p:txBody>
+          <a:bodyPr wrap="square" lIns="0" tIns="0" rIns="0" bIns="0" rtlCol="0" anchor="ctr"/>
+          <a:lstStyle/>
+          <a:p>
+            <a:pPr algn="ctr" indent="0" marL="0">
+              <a:buNone/>
+            </a:pPr>
+            <a:r>
+              <a:rPr lang="en-US" sz="1050" b="1" dirty="0">
+                <a:solidFill>
+                  <a:srgbClr val="E8EDF2"/>
+                </a:solidFill>
+                <a:latin typeface="Courier New" pitchFamily="34" charset="0"/>
+                <a:ea typeface="Courier New" pitchFamily="34" charset="-122"/>
+                <a:cs typeface="Courier New" pitchFamily="34" charset="-120"/>
+              </a:rPr>
+              <a:t>Test 4~8</a:t>
+            </a:r>
+            <a:endParaRPr lang="en-US" sz="1050" dirty="0"/>
+          </a:p>
+        </p:txBody>
+      </p:sp>
+      <p:sp>
+        <p:nvSpPr>
+          <p:cNvPr id="91" name="Shape 89"/>
+          <p:cNvSpPr/>
+          <p:nvPr/>
+        </p:nvSpPr>
+        <p:spPr>
+          <a:xfrm>
+            <a:off x="7242048" y="4956048"/>
+            <a:ext cx="1956816" cy="777240"/>
+          </a:xfrm>
+          <a:prstGeom prst="roundRect">
+            <a:avLst>
+              <a:gd name="adj" fmla="val 7059"/>
+            </a:avLst>
+          </a:prstGeom>
+          <a:solidFill>
+            <a:srgbClr val="0E1116"/>
+          </a:solidFill>
+          <a:ln w="15240">
+            <a:solidFill>
+              <a:srgbClr val="4FB0C6"/>
+            </a:solidFill>
+            <a:prstDash val="solid"/>
+          </a:ln>
+        </p:spPr>
+      </p:sp>
+      <p:sp>
+        <p:nvSpPr>
+          <p:cNvPr id="92" name="Text 90"/>
+          <p:cNvSpPr/>
+          <p:nvPr/>
+        </p:nvSpPr>
+        <p:spPr>
+          <a:xfrm>
+            <a:off x="7333488" y="5029200"/>
+            <a:ext cx="1773936" cy="292608"/>
+          </a:xfrm>
+          <a:prstGeom prst="rect">
+            <a:avLst/>
+          </a:prstGeom>
+          <a:noFill/>
+          <a:ln/>
+        </p:spPr>
+        <p:txBody>
+          <a:bodyPr wrap="square" lIns="0" tIns="0" rIns="0" bIns="0" rtlCol="0" anchor="ctr"/>
+          <a:lstStyle/>
+          <a:p>
+            <a:pPr algn="ctr" indent="0" marL="0">
+              <a:buNone/>
+            </a:pPr>
+            <a:r>
+              <a:rPr lang="en-US" sz="1250" b="1" dirty="0">
+                <a:solidFill>
+                  <a:srgbClr val="4FB0C6"/>
+                </a:solidFill>
+                <a:latin typeface="Malgun Gothic" pitchFamily="34" charset="0"/>
+                <a:ea typeface="Malgun Gothic" pitchFamily="34" charset="-122"/>
+                <a:cs typeface="Malgun Gothic" pitchFamily="34" charset="-120"/>
+              </a:rPr>
+              <a:t>데이터 보존</a:t>
+            </a:r>
+            <a:endParaRPr lang="en-US" sz="1250" dirty="0"/>
+          </a:p>
+        </p:txBody>
+      </p:sp>
+      <p:sp>
+        <p:nvSpPr>
+          <p:cNvPr id="93" name="Text 91"/>
+          <p:cNvSpPr/>
+          <p:nvPr/>
+        </p:nvSpPr>
+        <p:spPr>
+          <a:xfrm>
+            <a:off x="7333488" y="5303520"/>
+            <a:ext cx="1773936" cy="219456"/>
+          </a:xfrm>
+          <a:prstGeom prst="rect">
+            <a:avLst/>
+          </a:prstGeom>
+          <a:noFill/>
+          <a:ln/>
+        </p:spPr>
+        <p:txBody>
+          <a:bodyPr wrap="square" lIns="0" tIns="0" rIns="0" bIns="0" rtlCol="0" anchor="ctr"/>
+          <a:lstStyle/>
+          <a:p>
+            <a:pPr algn="ctr" indent="0" marL="0">
+              <a:buNone/>
+            </a:pPr>
+            <a:r>
+              <a:rPr lang="en-US" sz="900" dirty="0">
+                <a:solidFill>
+                  <a:srgbClr val="9AA6B2"/>
+                </a:solidFill>
+                <a:latin typeface="Malgun Gothic" pitchFamily="34" charset="0"/>
+                <a:ea typeface="Malgun Gothic" pitchFamily="34" charset="-122"/>
+                <a:cs typeface="Malgun Gothic" pitchFamily="34" charset="-120"/>
+              </a:rPr>
+              <a:t>retention</a:t>
+            </a:r>
+            <a:endParaRPr lang="en-US" sz="900" dirty="0"/>
+          </a:p>
+        </p:txBody>
+      </p:sp>
+      <p:sp>
+        <p:nvSpPr>
+          <p:cNvPr id="94" name="Text 92"/>
+          <p:cNvSpPr/>
+          <p:nvPr/>
+        </p:nvSpPr>
+        <p:spPr>
+          <a:xfrm>
+            <a:off x="7333488" y="5504688"/>
+            <a:ext cx="1773936" cy="219456"/>
+          </a:xfrm>
+          <a:prstGeom prst="rect">
+            <a:avLst/>
+          </a:prstGeom>
+          <a:noFill/>
+          <a:ln/>
+        </p:spPr>
+        <p:txBody>
+          <a:bodyPr wrap="square" lIns="0" tIns="0" rIns="0" bIns="0" rtlCol="0" anchor="ctr"/>
+          <a:lstStyle/>
+          <a:p>
+            <a:pPr algn="ctr" indent="0" marL="0">
+              <a:buNone/>
+            </a:pPr>
+            <a:r>
+              <a:rPr lang="en-US" sz="1050" b="1" dirty="0">
+                <a:solidFill>
+                  <a:srgbClr val="E8EDF2"/>
+                </a:solidFill>
+                <a:latin typeface="Courier New" pitchFamily="34" charset="0"/>
+                <a:ea typeface="Courier New" pitchFamily="34" charset="-122"/>
+                <a:cs typeface="Courier New" pitchFamily="34" charset="-120"/>
+              </a:rPr>
+              <a:t>Test 9</a:t>
+            </a:r>
+            <a:endParaRPr lang="en-US" sz="1050" dirty="0"/>
+          </a:p>
+        </p:txBody>
+      </p:sp>
+      <p:sp>
+        <p:nvSpPr>
+          <p:cNvPr id="95" name="Shape 93"/>
+          <p:cNvSpPr/>
+          <p:nvPr/>
+        </p:nvSpPr>
+        <p:spPr>
+          <a:xfrm>
+            <a:off x="9381744" y="4956048"/>
+            <a:ext cx="1956816" cy="777240"/>
+          </a:xfrm>
+          <a:prstGeom prst="roundRect">
+            <a:avLst>
+              <a:gd name="adj" fmla="val 7059"/>
+            </a:avLst>
+          </a:prstGeom>
+          <a:solidFill>
+            <a:srgbClr val="0E1116"/>
+          </a:solidFill>
+          <a:ln w="15240">
+            <a:solidFill>
+              <a:srgbClr val="E0645B"/>
+            </a:solidFill>
+            <a:prstDash val="solid"/>
+          </a:ln>
+        </p:spPr>
+      </p:sp>
+      <p:sp>
+        <p:nvSpPr>
+          <p:cNvPr id="96" name="Text 94"/>
+          <p:cNvSpPr/>
+          <p:nvPr/>
+        </p:nvSpPr>
+        <p:spPr>
+          <a:xfrm>
+            <a:off x="9473184" y="5029200"/>
+            <a:ext cx="1773936" cy="292608"/>
+          </a:xfrm>
+          <a:prstGeom prst="rect">
+            <a:avLst/>
+          </a:prstGeom>
+          <a:noFill/>
+          <a:ln/>
+        </p:spPr>
+        <p:txBody>
+          <a:bodyPr wrap="square" lIns="0" tIns="0" rIns="0" bIns="0" rtlCol="0" anchor="ctr"/>
+          <a:lstStyle/>
+          <a:p>
+            <a:pPr algn="ctr" indent="0" marL="0">
+              <a:buNone/>
+            </a:pPr>
+            <a:r>
+              <a:rPr lang="en-US" sz="1250" b="1" dirty="0">
+                <a:solidFill>
+                  <a:srgbClr val="E0645B"/>
+                </a:solidFill>
+                <a:latin typeface="Malgun Gothic" pitchFamily="34" charset="0"/>
+                <a:ea typeface="Malgun Gothic" pitchFamily="34" charset="-122"/>
+                <a:cs typeface="Malgun Gothic" pitchFamily="34" charset="-120"/>
+              </a:rPr>
+              <a:t>소프트 오류</a:t>
+            </a:r>
+            <a:endParaRPr lang="en-US" sz="1250" dirty="0"/>
+          </a:p>
+        </p:txBody>
+      </p:sp>
+      <p:sp>
+        <p:nvSpPr>
+          <p:cNvPr id="97" name="Text 95"/>
+          <p:cNvSpPr/>
+          <p:nvPr/>
+        </p:nvSpPr>
+        <p:spPr>
+          <a:xfrm>
+            <a:off x="9473184" y="5303520"/>
+            <a:ext cx="1773936" cy="219456"/>
+          </a:xfrm>
+          <a:prstGeom prst="rect">
+            <a:avLst/>
+          </a:prstGeom>
+          <a:noFill/>
+          <a:ln/>
+        </p:spPr>
+        <p:txBody>
+          <a:bodyPr wrap="square" lIns="0" tIns="0" rIns="0" bIns="0" rtlCol="0" anchor="ctr"/>
+          <a:lstStyle/>
+          <a:p>
+            <a:pPr algn="ctr" indent="0" marL="0">
+              <a:buNone/>
+            </a:pPr>
+            <a:r>
+              <a:rPr lang="en-US" sz="900" dirty="0">
+                <a:solidFill>
+                  <a:srgbClr val="9AA6B2"/>
+                </a:solidFill>
+                <a:latin typeface="Malgun Gothic" pitchFamily="34" charset="0"/>
+                <a:ea typeface="Malgun Gothic" pitchFamily="34" charset="-122"/>
+                <a:cs typeface="Malgun Gothic" pitchFamily="34" charset="-120"/>
+              </a:rPr>
+              <a:t>soft error</a:t>
+            </a:r>
+            <a:endParaRPr lang="en-US" sz="900" dirty="0"/>
+          </a:p>
+        </p:txBody>
+      </p:sp>
+      <p:sp>
+        <p:nvSpPr>
+          <p:cNvPr id="98" name="Text 96"/>
+          <p:cNvSpPr/>
+          <p:nvPr/>
+        </p:nvSpPr>
+        <p:spPr>
+          <a:xfrm>
+            <a:off x="9473184" y="5504688"/>
+            <a:ext cx="1773936" cy="219456"/>
+          </a:xfrm>
+          <a:prstGeom prst="rect">
+            <a:avLst/>
+          </a:prstGeom>
+          <a:noFill/>
+          <a:ln/>
+        </p:spPr>
+        <p:txBody>
+          <a:bodyPr wrap="square" lIns="0" tIns="0" rIns="0" bIns="0" rtlCol="0" anchor="ctr"/>
+          <a:lstStyle/>
+          <a:p>
+            <a:pPr algn="ctr" indent="0" marL="0">
+              <a:buNone/>
+            </a:pPr>
+            <a:r>
+              <a:rPr lang="en-US" sz="1050" b="1" dirty="0">
+                <a:solidFill>
+                  <a:srgbClr val="E8EDF2"/>
+                </a:solidFill>
+                <a:latin typeface="Courier New" pitchFamily="34" charset="0"/>
+                <a:ea typeface="Courier New" pitchFamily="34" charset="-122"/>
+                <a:cs typeface="Courier New" pitchFamily="34" charset="-120"/>
+              </a:rPr>
+              <a:t>Test 10</a:t>
+            </a:r>
+            <a:endParaRPr lang="en-US" sz="1050" dirty="0"/>
+          </a:p>
+        </p:txBody>
+      </p:sp>
+      <p:sp>
+        <p:nvSpPr>
+          <p:cNvPr id="99" name="Text 97"/>
+          <p:cNvSpPr/>
+          <p:nvPr/>
+        </p:nvSpPr>
+        <p:spPr>
+          <a:xfrm>
+            <a:off x="548640" y="5989320"/>
+            <a:ext cx="11064240" cy="320040"/>
+          </a:xfrm>
+          <a:prstGeom prst="rect">
+            <a:avLst/>
+          </a:prstGeom>
+          <a:noFill/>
+          <a:ln/>
+        </p:spPr>
+        <p:txBody>
+          <a:bodyPr wrap="square" lIns="0" tIns="0" rIns="0" bIns="0" rtlCol="0" anchor="ctr"/>
+          <a:lstStyle/>
+          <a:p>
+            <a:pPr algn="ctr" indent="0" marL="0">
+              <a:buNone/>
+            </a:pPr>
+            <a:r>
+              <a:rPr lang="en-US" sz="1150" i="1" dirty="0">
+                <a:solidFill>
+                  <a:srgbClr val="9AA6B2"/>
+                </a:solidFill>
+                <a:latin typeface="Malgun Gothic" pitchFamily="34" charset="0"/>
+                <a:ea typeface="Malgun Gothic" pitchFamily="34" charset="-122"/>
+                <a:cs typeface="Malgun Gothic" pitchFamily="34" charset="-120"/>
+              </a:rPr>
+              <a:t>초록 칸 = 비트 1, 어두운 칸 = 비트 0. Test 9(비트 페이드)는 값을 쓰고 오래 두어 '지워지는지' 봅니다.</a:t>
+            </a:r>
+            <a:endParaRPr lang="en-US" sz="1150" dirty="0"/>
           </a:p>
         </p:txBody>
       </p:sp>
@@ -4448,7 +7390,7 @@
                 <a:ea typeface="Courier New" pitchFamily="34" charset="-122"/>
                 <a:cs typeface="Courier New" pitchFamily="34" charset="-120"/>
               </a:rPr>
-              <a:t>8</a:t>
+              <a:t>7</a:t>
             </a:r>
             <a:endParaRPr lang="en-US" sz="2200" dirty="0"/>
           </a:p>
@@ -4487,7 +7429,7 @@
                 <a:ea typeface="Malgun Gothic" pitchFamily="34" charset="-122"/>
                 <a:cs typeface="Malgun Gothic" pitchFamily="34" charset="-120"/>
               </a:rPr>
-              <a:t>실전 코드 · 할 수 있는 만큼 할당하기</a:t>
+              <a:t>오류가 CPU로 돌아오는 길</a:t>
             </a:r>
             <a:endParaRPr lang="en-US" sz="3000" dirty="0"/>
           </a:p>
@@ -4502,11 +7444,11 @@
         <p:spPr>
           <a:xfrm>
             <a:off x="548640" y="1554480"/>
-            <a:ext cx="11064240" cy="2651760"/>
+            <a:ext cx="11064240" cy="2286000"/>
           </a:xfrm>
           <a:prstGeom prst="roundRect">
             <a:avLst>
-              <a:gd name="adj" fmla="val 2069"/>
+              <a:gd name="adj" fmla="val 2400"/>
             </a:avLst>
           </a:prstGeom>
           <a:solidFill>
@@ -4529,7 +7471,7 @@
         <p:spPr>
           <a:xfrm>
             <a:off x="749808" y="1700784"/>
-            <a:ext cx="10661904" cy="2359152"/>
+            <a:ext cx="10661904" cy="1993392"/>
           </a:xfrm>
           <a:prstGeom prst="rect">
             <a:avLst/>
@@ -4556,7 +7498,7 @@
                 <a:ea typeface="Courier New" pitchFamily="34" charset="-122"/>
                 <a:cs typeface="Courier New" pitchFamily="34" charset="-120"/>
               </a:rPr>
-              <a:t>// cuda_memtest.cpp:157   가용 메모리를 조회하고,</a:t>
+              <a:t>// error_checking()  tests.cpp:108</a:t>
             </a:r>
             <a:endParaRPr lang="en-US" sz="1350" dirty="0"/>
           </a:p>
@@ -4570,13 +7512,13 @@
             <a:r>
               <a:rPr lang="en-US" sz="1350" dirty="0">
                 <a:solidFill>
-                  <a:srgbClr val="9AA6B2"/>
+                  <a:srgbClr val="E8EDF2"/>
                 </a:solidFill>
                 <a:latin typeface="Courier New" pitchFamily="34" charset="0"/>
                 <a:ea typeface="Courier New" pitchFamily="34" charset="-122"/>
                 <a:cs typeface="Courier New" pitchFamily="34" charset="-120"/>
               </a:rPr>
-              <a:t>// 할당 실패하면 블록을 하나씩 줄여 재시도한다</a:t>
+              <a:t>unsigned int err = 0;</a:t>
             </a:r>
             <a:endParaRPr lang="en-US" sz="1350" dirty="0"/>
           </a:p>
@@ -4596,7 +7538,7 @@
                 <a:ea typeface="Courier New" pitchFamily="34" charset="-122"/>
                 <a:cs typeface="Courier New" pitchFamily="34" charset="-120"/>
               </a:rPr>
-              <a:t>tot_num_blocks = free / BLOCKSIZE;</a:t>
+              <a:t>cudaMemcpy(&amp;err, err_count, sizeof(unsigned int),</a:t>
             </a:r>
             <a:endParaRPr lang="en-US" sz="1350" dirty="0"/>
           </a:p>
@@ -4610,13 +7552,13 @@
             <a:r>
               <a:rPr lang="en-US" sz="1350" dirty="0">
                 <a:solidFill>
-                  <a:srgbClr val="E8EDF2"/>
+                  <a:srgbClr val="8CC63F"/>
                 </a:solidFill>
                 <a:latin typeface="Courier New" pitchFamily="34" charset="0"/>
                 <a:ea typeface="Courier New" pitchFamily="34" charset="-122"/>
                 <a:cs typeface="Courier New" pitchFamily="34" charset="-120"/>
               </a:rPr>
-              <a:t>do {</a:t>
+              <a:t>           cudaMemcpyDeviceToHost);   // GPU 카운터 → CPU 변수</a:t>
             </a:r>
             <a:endParaRPr lang="en-US" sz="1350" dirty="0"/>
           </a:p>
@@ -4630,84 +7572,186 @@
             <a:r>
               <a:rPr lang="en-US" sz="1350" dirty="0">
                 <a:solidFill>
-                  <a:srgbClr val="8CC63F"/>
+                  <a:srgbClr val="E8EDF2"/>
                 </a:solidFill>
                 <a:latin typeface="Courier New" pitchFamily="34" charset="0"/>
                 <a:ea typeface="Courier New" pitchFamily="34" charset="-122"/>
                 <a:cs typeface="Courier New" pitchFamily="34" charset="-120"/>
               </a:rPr>
-              <a:t>    err = cudaMalloc(&amp;ptr, tot_num_blocks * BLOCKSIZE);</a:t>
+              <a:t>if (err) {  /* 오류 주소·기대값·현재값을 출력·기록 */  }</a:t>
             </a:r>
             <a:endParaRPr lang="en-US" sz="1350" dirty="0"/>
           </a:p>
-          <a:p>
-            <a:pPr algn="l" indent="0" marL="0">
-              <a:lnSpc>
-                <a:spcPct val="108000"/>
-              </a:lnSpc>
-              <a:buNone/>
-            </a:pPr>
-            <a:r>
-              <a:rPr lang="en-US" sz="1350" dirty="0">
+        </p:txBody>
+      </p:sp>
+      <p:sp>
+        <p:nvSpPr>
+          <p:cNvPr id="6" name="Text 4"/>
+          <p:cNvSpPr/>
+          <p:nvPr/>
+        </p:nvSpPr>
+        <p:spPr>
+          <a:xfrm>
+            <a:off x="548640" y="4023360"/>
+            <a:ext cx="11064240" cy="822960"/>
+          </a:xfrm>
+          <a:prstGeom prst="rect">
+            <a:avLst/>
+          </a:prstGeom>
+          <a:noFill/>
+          <a:ln/>
+        </p:spPr>
+        <p:txBody>
+          <a:bodyPr wrap="square" lIns="0" tIns="0" rIns="0" bIns="0" rtlCol="0" anchor="t"/>
+          <a:lstStyle/>
+          <a:p>
+            <a:pPr indent="0" marL="0">
+              <a:buNone/>
+            </a:pPr>
+            <a:r>
+              <a:rPr lang="en-US" sz="1700" b="1" dirty="0">
+                <a:solidFill>
+                  <a:srgbClr val="8CC63F"/>
+                </a:solidFill>
+                <a:latin typeface="Malgun Gothic" pitchFamily="34" charset="0"/>
+                <a:ea typeface="Malgun Gothic" pitchFamily="34" charset="-122"/>
+                <a:cs typeface="Malgun Gothic" pitchFamily="34" charset="-120"/>
+              </a:rPr>
+              <a:t>err_count</a:t>
+            </a:r>
+            <a:pPr indent="0" marL="0">
+              <a:buNone/>
+            </a:pPr>
+            <a:r>
+              <a:rPr lang="en-US" sz="1700" dirty="0">
+                <a:solidFill>
+                  <a:srgbClr val="E8EDF2"/>
+                </a:solidFill>
+                <a:latin typeface="Malgun Gothic" pitchFamily="34" charset="0"/>
+                <a:ea typeface="Malgun Gothic" pitchFamily="34" charset="-122"/>
+                <a:cs typeface="Malgun Gothic" pitchFamily="34" charset="-120"/>
+              </a:rPr>
+              <a:t>는 GPU에 있는 디바이스 포인터입니다. CPU는 그 값을 </a:t>
+            </a:r>
+            <a:pPr indent="0" marL="0">
+              <a:buNone/>
+            </a:pPr>
+            <a:r>
+              <a:rPr lang="en-US" sz="1700" b="1" dirty="0">
                 <a:solidFill>
                   <a:srgbClr val="E0A458"/>
                 </a:solidFill>
-                <a:latin typeface="Courier New" pitchFamily="34" charset="0"/>
-                <a:ea typeface="Courier New" pitchFamily="34" charset="-122"/>
-                <a:cs typeface="Courier New" pitchFamily="34" charset="-120"/>
-              </a:rPr>
-              <a:t>    if (err != cudaSuccess) --tot_num_blocks;   // 줄여서 재시도</a:t>
-            </a:r>
-            <a:endParaRPr lang="en-US" sz="1350" dirty="0"/>
-          </a:p>
-          <a:p>
-            <a:pPr algn="l" indent="0" marL="0">
-              <a:lnSpc>
-                <a:spcPct val="108000"/>
-              </a:lnSpc>
-              <a:buNone/>
-            </a:pPr>
-            <a:r>
-              <a:rPr lang="en-US" sz="1350" dirty="0">
+                <a:latin typeface="Malgun Gothic" pitchFamily="34" charset="0"/>
+                <a:ea typeface="Malgun Gothic" pitchFamily="34" charset="-122"/>
+                <a:cs typeface="Malgun Gothic" pitchFamily="34" charset="-120"/>
+              </a:rPr>
+              <a:t>직접 읽을 수 없어</a:t>
+            </a:r>
+            <a:pPr indent="0" marL="0">
+              <a:buNone/>
+            </a:pPr>
+            <a:r>
+              <a:rPr lang="en-US" sz="1700" dirty="0">
                 <a:solidFill>
                   <a:srgbClr val="E8EDF2"/>
                 </a:solidFill>
-                <a:latin typeface="Courier New" pitchFamily="34" charset="0"/>
-                <a:ea typeface="Courier New" pitchFamily="34" charset="-122"/>
-                <a:cs typeface="Courier New" pitchFamily="34" charset="-120"/>
-              </a:rPr>
-              <a:t>} while (cudaGetLastError() != cudaSuccess);</a:t>
-            </a:r>
-            <a:endParaRPr lang="en-US" sz="1350" dirty="0"/>
-          </a:p>
-        </p:txBody>
-      </p:sp>
-      <p:sp>
-        <p:nvSpPr>
-          <p:cNvPr id="6" name="Text 4"/>
-          <p:cNvSpPr/>
-          <p:nvPr/>
-        </p:nvSpPr>
-        <p:spPr>
-          <a:xfrm>
-            <a:off x="548640" y="4434840"/>
-            <a:ext cx="11064240" cy="914400"/>
-          </a:xfrm>
-          <a:prstGeom prst="rect">
-            <a:avLst/>
-          </a:prstGeom>
-          <a:noFill/>
-          <a:ln/>
-        </p:spPr>
-        <p:txBody>
-          <a:bodyPr wrap="square" lIns="0" tIns="0" rIns="0" bIns="0" rtlCol="0" anchor="t"/>
+                <a:latin typeface="Malgun Gothic" pitchFamily="34" charset="0"/>
+                <a:ea typeface="Malgun Gothic" pitchFamily="34" charset="-122"/>
+                <a:cs typeface="Malgun Gothic" pitchFamily="34" charset="-120"/>
+              </a:rPr>
+              <a:t> 반드시 cudaMemcpy로 가져와야 합니다.</a:t>
+            </a:r>
+            <a:endParaRPr lang="en-US" sz="1700" dirty="0"/>
+          </a:p>
+        </p:txBody>
+      </p:sp>
+      <p:sp>
+        <p:nvSpPr>
+          <p:cNvPr id="7" name="Shape 5"/>
+          <p:cNvSpPr/>
+          <p:nvPr/>
+        </p:nvSpPr>
+        <p:spPr>
+          <a:xfrm>
+            <a:off x="548640" y="4892040"/>
+            <a:ext cx="5349240" cy="1005840"/>
+          </a:xfrm>
+          <a:prstGeom prst="roundRect">
+            <a:avLst>
+              <a:gd name="adj" fmla="val 7273"/>
+            </a:avLst>
+          </a:prstGeom>
+          <a:solidFill>
+            <a:srgbClr val="1E232C"/>
+          </a:solidFill>
+          <a:ln/>
+        </p:spPr>
+      </p:sp>
+      <p:sp>
+        <p:nvSpPr>
+          <p:cNvPr id="8" name="Text 6"/>
+          <p:cNvSpPr/>
+          <p:nvPr/>
+        </p:nvSpPr>
+        <p:spPr>
+          <a:xfrm>
+            <a:off x="777240" y="5029200"/>
+            <a:ext cx="4892040" cy="365760"/>
+          </a:xfrm>
+          <a:prstGeom prst="rect">
+            <a:avLst/>
+          </a:prstGeom>
+          <a:noFill/>
+          <a:ln/>
+        </p:spPr>
+        <p:txBody>
+          <a:bodyPr wrap="square" lIns="0" tIns="0" rIns="0" bIns="0" rtlCol="0" anchor="ctr"/>
           <a:lstStyle/>
           <a:p>
             <a:pPr indent="0" marL="0">
               <a:buNone/>
             </a:pPr>
             <a:r>
-              <a:rPr lang="en-US" sz="1700" dirty="0">
+              <a:rPr lang="en-US" sz="1500" b="1" dirty="0">
+                <a:solidFill>
+                  <a:srgbClr val="8CC63F"/>
+                </a:solidFill>
+                <a:latin typeface="Malgun Gothic" pitchFamily="34" charset="0"/>
+                <a:ea typeface="Malgun Gothic" pitchFamily="34" charset="-122"/>
+                <a:cs typeface="Malgun Gothic" pitchFamily="34" charset="-120"/>
+              </a:rPr>
+              <a:t>기록되는 정보</a:t>
+            </a:r>
+            <a:endParaRPr lang="en-US" sz="1500" dirty="0"/>
+          </a:p>
+        </p:txBody>
+      </p:sp>
+      <p:sp>
+        <p:nvSpPr>
+          <p:cNvPr id="9" name="Text 7"/>
+          <p:cNvSpPr/>
+          <p:nvPr/>
+        </p:nvSpPr>
+        <p:spPr>
+          <a:xfrm>
+            <a:off x="777240" y="5394960"/>
+            <a:ext cx="4892040" cy="411480"/>
+          </a:xfrm>
+          <a:prstGeom prst="rect">
+            <a:avLst/>
+          </a:prstGeom>
+          <a:noFill/>
+          <a:ln/>
+        </p:spPr>
+        <p:txBody>
+          <a:bodyPr wrap="square" lIns="0" tIns="0" rIns="0" bIns="0" rtlCol="0" anchor="ctr"/>
+          <a:lstStyle/>
+          <a:p>
+            <a:pPr indent="0" marL="0">
+              <a:buNone/>
+            </a:pPr>
+            <a:r>
+              <a:rPr lang="en-US" sz="1400" dirty="0">
                 <a:solidFill>
                   <a:srgbClr val="E8EDF2"/>
                 </a:solidFill>
@@ -4715,27 +7759,99 @@
                 <a:ea typeface="Malgun Gothic" pitchFamily="34" charset="-122"/>
                 <a:cs typeface="Malgun Gothic" pitchFamily="34" charset="-120"/>
               </a:rPr>
-              <a:t>드라이버가 보고한 여유 메모리를 다 할당하지 못할 때가 있습니다. 실전 코드는 </a:t>
-            </a:r>
+              <a:t>오류 주소 · 기대값 · 실제값 · 재읽기값</a:t>
+            </a:r>
+            <a:endParaRPr lang="en-US" sz="1400" dirty="0"/>
+          </a:p>
+        </p:txBody>
+      </p:sp>
+      <p:sp>
+        <p:nvSpPr>
+          <p:cNvPr id="10" name="Shape 8"/>
+          <p:cNvSpPr/>
+          <p:nvPr/>
+        </p:nvSpPr>
+        <p:spPr>
+          <a:xfrm>
+            <a:off x="6263640" y="4892040"/>
+            <a:ext cx="5349240" cy="1005840"/>
+          </a:xfrm>
+          <a:prstGeom prst="roundRect">
+            <a:avLst>
+              <a:gd name="adj" fmla="val 7273"/>
+            </a:avLst>
+          </a:prstGeom>
+          <a:solidFill>
+            <a:srgbClr val="1E232C"/>
+          </a:solidFill>
+          <a:ln/>
+        </p:spPr>
+      </p:sp>
+      <p:sp>
+        <p:nvSpPr>
+          <p:cNvPr id="11" name="Text 9"/>
+          <p:cNvSpPr/>
+          <p:nvPr/>
+        </p:nvSpPr>
+        <p:spPr>
+          <a:xfrm>
+            <a:off x="6492240" y="5029200"/>
+            <a:ext cx="4892040" cy="365760"/>
+          </a:xfrm>
+          <a:prstGeom prst="rect">
+            <a:avLst/>
+          </a:prstGeom>
+          <a:noFill/>
+          <a:ln/>
+        </p:spPr>
+        <p:txBody>
+          <a:bodyPr wrap="square" lIns="0" tIns="0" rIns="0" bIns="0" rtlCol="0" anchor="ctr"/>
+          <a:lstStyle/>
+          <a:p>
             <a:pPr indent="0" marL="0">
               <a:buNone/>
             </a:pPr>
             <a:r>
-              <a:rPr lang="en-US" sz="1700" b="1" dirty="0">
-                <a:solidFill>
-                  <a:srgbClr val="8CC63F"/>
-                </a:solidFill>
-                <a:latin typeface="Malgun Gothic" pitchFamily="34" charset="0"/>
-                <a:ea typeface="Malgun Gothic" pitchFamily="34" charset="-122"/>
-                <a:cs typeface="Malgun Gothic" pitchFamily="34" charset="-120"/>
-              </a:rPr>
-              <a:t>실패를 가정하고 우아하게 물러섭니다</a:t>
-            </a:r>
+              <a:rPr lang="en-US" sz="1500" b="1" dirty="0">
+                <a:solidFill>
+                  <a:srgbClr val="4FB0C6"/>
+                </a:solidFill>
+                <a:latin typeface="Malgun Gothic" pitchFamily="34" charset="0"/>
+                <a:ea typeface="Malgun Gothic" pitchFamily="34" charset="-122"/>
+                <a:cs typeface="Malgun Gothic" pitchFamily="34" charset="-120"/>
+              </a:rPr>
+              <a:t>최근 10개만</a:t>
+            </a:r>
+            <a:endParaRPr lang="en-US" sz="1500" dirty="0"/>
+          </a:p>
+        </p:txBody>
+      </p:sp>
+      <p:sp>
+        <p:nvSpPr>
+          <p:cNvPr id="12" name="Text 10"/>
+          <p:cNvSpPr/>
+          <p:nvPr/>
+        </p:nvSpPr>
+        <p:spPr>
+          <a:xfrm>
+            <a:off x="6492240" y="5394960"/>
+            <a:ext cx="4892040" cy="411480"/>
+          </a:xfrm>
+          <a:prstGeom prst="rect">
+            <a:avLst/>
+          </a:prstGeom>
+          <a:noFill/>
+          <a:ln/>
+        </p:spPr>
+        <p:txBody>
+          <a:bodyPr wrap="square" lIns="0" tIns="0" rIns="0" bIns="0" rtlCol="0" anchor="ctr"/>
+          <a:lstStyle/>
+          <a:p>
             <a:pPr indent="0" marL="0">
               <a:buNone/>
             </a:pPr>
             <a:r>
-              <a:rPr lang="en-US" sz="1700" dirty="0">
+              <a:rPr lang="en-US" sz="1400" dirty="0">
                 <a:solidFill>
                   <a:srgbClr val="E8EDF2"/>
                 </a:solidFill>
@@ -4743,46 +7859,7 @@
                 <a:ea typeface="Malgun Gothic" pitchFamily="34" charset="-122"/>
                 <a:cs typeface="Malgun Gothic" pitchFamily="34" charset="-120"/>
               </a:rPr>
-              <a:t>. 장난감 예제와 프로덕션 코드의 차이입니다.</a:t>
-            </a:r>
-            <a:endParaRPr lang="en-US" sz="1700" dirty="0"/>
-          </a:p>
-        </p:txBody>
-      </p:sp>
-      <p:sp>
-        <p:nvSpPr>
-          <p:cNvPr id="7" name="Text 5"/>
-          <p:cNvSpPr/>
-          <p:nvPr/>
-        </p:nvSpPr>
-        <p:spPr>
-          <a:xfrm>
-            <a:off x="548640" y="5486400"/>
-            <a:ext cx="11064240" cy="457200"/>
-          </a:xfrm>
-          <a:prstGeom prst="rect">
-            <a:avLst/>
-          </a:prstGeom>
-          <a:noFill/>
-          <a:ln/>
-        </p:spPr>
-        <p:txBody>
-          <a:bodyPr wrap="square" lIns="0" tIns="0" rIns="0" bIns="0" rtlCol="0" anchor="ctr"/>
-          <a:lstStyle/>
-          <a:p>
-            <a:pPr indent="0" marL="0">
-              <a:buNone/>
-            </a:pPr>
-            <a:r>
-              <a:rPr lang="en-US" sz="1400" i="1" dirty="0">
-                <a:solidFill>
-                  <a:srgbClr val="9AA6B2"/>
-                </a:solidFill>
-                <a:latin typeface="Malgun Gothic" pitchFamily="34" charset="0"/>
-                <a:ea typeface="Malgun Gothic" pitchFamily="34" charset="-122"/>
-                <a:cs typeface="Malgun Gothic" pitchFamily="34" charset="-120"/>
-              </a:rPr>
-              <a:t>cudaMemGetInfo로 여유 메모리를 조회 → BLOCKSIZE(1 MB)로 나눠 블록 수 결정.</a:t>
+              <a:t>MAX_ERR_RECORD_COUNT=10, 순환 기록</a:t>
             </a:r>
             <a:endParaRPr lang="en-US" sz="1400" dirty="0"/>
           </a:p>
@@ -4857,7 +7934,7 @@
                 <a:ea typeface="Courier New" pitchFamily="34" charset="-122"/>
                 <a:cs typeface="Courier New" pitchFamily="34" charset="-120"/>
               </a:rPr>
-              <a:t>9</a:t>
+              <a:t>8</a:t>
             </a:r>
             <a:endParaRPr lang="en-US" sz="2200" dirty="0"/>
           </a:p>
@@ -4896,7 +7973,7 @@
                 <a:ea typeface="Malgun Gothic" pitchFamily="34" charset="-122"/>
                 <a:cs typeface="Malgun Gothic" pitchFamily="34" charset="-120"/>
               </a:rPr>
-              <a:t>실습 미리보기 · Lab 2</a:t>
+              <a:t>실전 코드 · 할 수 있는 만큼 할당하기</a:t>
             </a:r>
             <a:endParaRPr lang="en-US" sz="3000" dirty="0"/>
           </a:p>
@@ -4911,17 +7988,22 @@
         <p:spPr>
           <a:xfrm>
             <a:off x="548640" y="1554480"/>
-            <a:ext cx="5303520" cy="1965960"/>
+            <a:ext cx="11064240" cy="2651760"/>
           </a:xfrm>
           <a:prstGeom prst="roundRect">
             <a:avLst>
-              <a:gd name="adj" fmla="val 3721"/>
+              <a:gd name="adj" fmla="val 2069"/>
             </a:avLst>
           </a:prstGeom>
           <a:solidFill>
-            <a:srgbClr val="1E232C"/>
+            <a:srgbClr val="0E1116"/>
           </a:solidFill>
-          <a:ln/>
+          <a:ln w="12700">
+            <a:solidFill>
+              <a:srgbClr val="2C3440"/>
+            </a:solidFill>
+            <a:prstDash val="solid"/>
+          </a:ln>
         </p:spPr>
       </p:sp>
       <p:sp>
@@ -4932,474 +8014,222 @@
         </p:nvSpPr>
         <p:spPr>
           <a:xfrm>
-            <a:off x="804672" y="1755648"/>
-            <a:ext cx="1188720" cy="502920"/>
-          </a:xfrm>
-          <a:prstGeom prst="roundRect">
-            <a:avLst>
-              <a:gd name="adj" fmla="val 14545"/>
-            </a:avLst>
-          </a:prstGeom>
-          <a:solidFill>
-            <a:srgbClr val="8CC63F"/>
-          </a:solidFill>
-          <a:ln/>
-        </p:spPr>
-        <p:txBody>
-          <a:bodyPr wrap="square" rtlCol="0" anchor="ctr"/>
-          <a:lstStyle/>
-          <a:p>
-            <a:pPr algn="ctr" indent="0" marL="0">
-              <a:buNone/>
-            </a:pPr>
-            <a:r>
-              <a:rPr lang="en-US" sz="1700" b="1" dirty="0">
-                <a:solidFill>
-                  <a:srgbClr val="13161C"/>
+            <a:off x="749808" y="1700784"/>
+            <a:ext cx="10661904" cy="2359152"/>
+          </a:xfrm>
+          <a:prstGeom prst="rect">
+            <a:avLst/>
+          </a:prstGeom>
+          <a:noFill/>
+          <a:ln/>
+        </p:spPr>
+        <p:txBody>
+          <a:bodyPr wrap="square" lIns="0" tIns="0" rIns="0" bIns="0" rtlCol="0" anchor="t"/>
+          <a:lstStyle/>
+          <a:p>
+            <a:pPr algn="l" indent="0" marL="0">
+              <a:lnSpc>
+                <a:spcPct val="108000"/>
+              </a:lnSpc>
+              <a:buNone/>
+            </a:pPr>
+            <a:r>
+              <a:rPr lang="en-US" sz="1350" dirty="0">
+                <a:solidFill>
+                  <a:srgbClr val="9AA6B2"/>
                 </a:solidFill>
                 <a:latin typeface="Courier New" pitchFamily="34" charset="0"/>
                 <a:ea typeface="Courier New" pitchFamily="34" charset="-122"/>
                 <a:cs typeface="Courier New" pitchFamily="34" charset="-120"/>
               </a:rPr>
-              <a:t>Ex 1</a:t>
-            </a:r>
-            <a:endParaRPr lang="en-US" sz="1700" dirty="0"/>
-          </a:p>
-        </p:txBody>
-      </p:sp>
-      <p:sp>
-        <p:nvSpPr>
-          <p:cNvPr id="6" name="Text 4"/>
-          <p:cNvSpPr/>
-          <p:nvPr/>
-        </p:nvSpPr>
-        <p:spPr>
-          <a:xfrm>
-            <a:off x="2148840" y="1773936"/>
-            <a:ext cx="3474720" cy="822960"/>
-          </a:xfrm>
-          <a:prstGeom prst="rect">
-            <a:avLst/>
-          </a:prstGeom>
-          <a:noFill/>
-          <a:ln/>
-        </p:spPr>
-        <p:txBody>
-          <a:bodyPr wrap="square" lIns="0" tIns="0" rIns="0" bIns="0" rtlCol="0" anchor="t"/>
-          <a:lstStyle/>
-          <a:p>
-            <a:pPr indent="0" marL="0">
-              <a:buNone/>
-            </a:pPr>
-            <a:r>
-              <a:rPr lang="en-US" sz="1700" b="1" dirty="0">
-                <a:solidFill>
-                  <a:srgbClr val="E8EDF2"/>
-                </a:solidFill>
-                <a:latin typeface="Malgun Gothic" pitchFamily="34" charset="0"/>
-                <a:ea typeface="Malgun Gothic" pitchFamily="34" charset="-122"/>
-                <a:cs typeface="Malgun Gothic" pitchFamily="34" charset="-120"/>
-              </a:rPr>
-              <a:t>세 커널의 협업 보기</a:t>
-            </a:r>
-            <a:endParaRPr lang="en-US" sz="1700" dirty="0"/>
-          </a:p>
-        </p:txBody>
-      </p:sp>
-      <p:sp>
-        <p:nvSpPr>
-          <p:cNvPr id="7" name="Text 5"/>
-          <p:cNvSpPr/>
-          <p:nvPr/>
-        </p:nvSpPr>
-        <p:spPr>
-          <a:xfrm>
-            <a:off x="804672" y="2651760"/>
-            <a:ext cx="4791456" cy="731520"/>
-          </a:xfrm>
-          <a:prstGeom prst="rect">
-            <a:avLst/>
-          </a:prstGeom>
-          <a:noFill/>
-          <a:ln/>
-        </p:spPr>
-        <p:txBody>
-          <a:bodyPr wrap="square" lIns="0" tIns="0" rIns="0" bIns="0" rtlCol="0" anchor="t"/>
-          <a:lstStyle/>
-          <a:p>
-            <a:pPr indent="0" marL="0">
+              <a:t>// cuda_memtest.cpp:157   가용 메모리를 조회하고,</a:t>
+            </a:r>
+            <a:endParaRPr lang="en-US" sz="1350" dirty="0"/>
+          </a:p>
+          <a:p>
+            <a:pPr algn="l" indent="0" marL="0">
               <a:lnSpc>
-                <a:spcPct val="110000"/>
+                <a:spcPct val="108000"/>
               </a:lnSpc>
               <a:buNone/>
             </a:pPr>
             <a:r>
-              <a:rPr lang="en-US" sz="1400" dirty="0">
+              <a:rPr lang="en-US" sz="1350" dirty="0">
                 <a:solidFill>
                   <a:srgbClr val="9AA6B2"/>
-                </a:solidFill>
-                <a:latin typeface="Malgun Gothic" pitchFamily="34" charset="0"/>
-                <a:ea typeface="Malgun Gothic" pitchFamily="34" charset="-122"/>
-                <a:cs typeface="Malgun Gothic" pitchFamily="34" charset="-120"/>
-              </a:rPr>
-              <a:t>--verbose --verbose 로 write→readwrite→read 순서 확인</a:t>
-            </a:r>
-            <a:endParaRPr lang="en-US" sz="1400" dirty="0"/>
-          </a:p>
-        </p:txBody>
-      </p:sp>
-      <p:sp>
-        <p:nvSpPr>
-          <p:cNvPr id="8" name="Shape 6"/>
-          <p:cNvSpPr/>
-          <p:nvPr/>
-        </p:nvSpPr>
-        <p:spPr>
-          <a:xfrm>
-            <a:off x="6309360" y="1554480"/>
-            <a:ext cx="5303520" cy="1965960"/>
-          </a:xfrm>
-          <a:prstGeom prst="roundRect">
-            <a:avLst>
-              <a:gd name="adj" fmla="val 3721"/>
-            </a:avLst>
-          </a:prstGeom>
-          <a:solidFill>
-            <a:srgbClr val="1E232C"/>
-          </a:solidFill>
-          <a:ln/>
-        </p:spPr>
-      </p:sp>
-      <p:sp>
-        <p:nvSpPr>
-          <p:cNvPr id="9" name="Text 7"/>
-          <p:cNvSpPr/>
-          <p:nvPr/>
-        </p:nvSpPr>
-        <p:spPr>
-          <a:xfrm>
-            <a:off x="6565392" y="1755648"/>
-            <a:ext cx="1188720" cy="502920"/>
-          </a:xfrm>
-          <a:prstGeom prst="roundRect">
-            <a:avLst>
-              <a:gd name="adj" fmla="val 14545"/>
-            </a:avLst>
-          </a:prstGeom>
-          <a:solidFill>
-            <a:srgbClr val="4FB0C6"/>
-          </a:solidFill>
-          <a:ln/>
-        </p:spPr>
-        <p:txBody>
-          <a:bodyPr wrap="square" rtlCol="0" anchor="ctr"/>
-          <a:lstStyle/>
-          <a:p>
-            <a:pPr algn="ctr" indent="0" marL="0">
-              <a:buNone/>
-            </a:pPr>
-            <a:r>
-              <a:rPr lang="en-US" sz="1700" b="1" dirty="0">
-                <a:solidFill>
-                  <a:srgbClr val="13161C"/>
                 </a:solidFill>
                 <a:latin typeface="Courier New" pitchFamily="34" charset="0"/>
                 <a:ea typeface="Courier New" pitchFamily="34" charset="-122"/>
                 <a:cs typeface="Courier New" pitchFamily="34" charset="-120"/>
               </a:rPr>
-              <a:t>Ex 2</a:t>
-            </a:r>
-            <a:endParaRPr lang="en-US" sz="1700" dirty="0"/>
-          </a:p>
-        </p:txBody>
-      </p:sp>
-      <p:sp>
-        <p:nvSpPr>
-          <p:cNvPr id="10" name="Text 8"/>
-          <p:cNvSpPr/>
-          <p:nvPr/>
-        </p:nvSpPr>
-        <p:spPr>
-          <a:xfrm>
-            <a:off x="7909560" y="1773936"/>
-            <a:ext cx="3474720" cy="822960"/>
-          </a:xfrm>
-          <a:prstGeom prst="rect">
-            <a:avLst/>
-          </a:prstGeom>
-          <a:noFill/>
-          <a:ln/>
-        </p:spPr>
-        <p:txBody>
-          <a:bodyPr wrap="square" lIns="0" tIns="0" rIns="0" bIns="0" rtlCol="0" anchor="t"/>
-          <a:lstStyle/>
-          <a:p>
-            <a:pPr indent="0" marL="0">
-              <a:buNone/>
-            </a:pPr>
-            <a:r>
-              <a:rPr lang="en-US" sz="1700" b="1" dirty="0">
+              <a:t>// 할당 실패하면 블록을 하나씩 줄여 재시도한다</a:t>
+            </a:r>
+            <a:endParaRPr lang="en-US" sz="1350" dirty="0"/>
+          </a:p>
+          <a:p>
+            <a:pPr algn="l" indent="0" marL="0">
+              <a:lnSpc>
+                <a:spcPct val="108000"/>
+              </a:lnSpc>
+              <a:buNone/>
+            </a:pPr>
+            <a:r>
+              <a:rPr lang="en-US" sz="1350" dirty="0">
                 <a:solidFill>
                   <a:srgbClr val="E8EDF2"/>
-                </a:solidFill>
-                <a:latin typeface="Malgun Gothic" pitchFamily="34" charset="0"/>
-                <a:ea typeface="Malgun Gothic" pitchFamily="34" charset="-122"/>
-                <a:cs typeface="Malgun Gothic" pitchFamily="34" charset="-120"/>
-              </a:rPr>
-              <a:t>오류가 CPU로 돌아오는 길</a:t>
-            </a:r>
-            <a:endParaRPr lang="en-US" sz="1700" dirty="0"/>
-          </a:p>
-        </p:txBody>
-      </p:sp>
-      <p:sp>
-        <p:nvSpPr>
-          <p:cNvPr id="11" name="Text 9"/>
-          <p:cNvSpPr/>
-          <p:nvPr/>
-        </p:nvSpPr>
-        <p:spPr>
-          <a:xfrm>
-            <a:off x="6565392" y="2651760"/>
-            <a:ext cx="4791456" cy="731520"/>
-          </a:xfrm>
-          <a:prstGeom prst="rect">
-            <a:avLst/>
-          </a:prstGeom>
-          <a:noFill/>
-          <a:ln/>
-        </p:spPr>
-        <p:txBody>
-          <a:bodyPr wrap="square" lIns="0" tIns="0" rIns="0" bIns="0" rtlCol="0" anchor="t"/>
-          <a:lstStyle/>
-          <a:p>
-            <a:pPr indent="0" marL="0">
-              <a:lnSpc>
-                <a:spcPct val="110000"/>
-              </a:lnSpc>
-              <a:buNone/>
-            </a:pPr>
-            <a:r>
-              <a:rPr lang="en-US" sz="1400" dirty="0">
-                <a:solidFill>
-                  <a:srgbClr val="9AA6B2"/>
-                </a:solidFill>
-                <a:latin typeface="Malgun Gothic" pitchFamily="34" charset="0"/>
-                <a:ea typeface="Malgun Gothic" pitchFamily="34" charset="-122"/>
-                <a:cs typeface="Malgun Gothic" pitchFamily="34" charset="-120"/>
-              </a:rPr>
-              <a:t>error_checking의 cudaMemcpy 직후 출력 추가</a:t>
-            </a:r>
-            <a:endParaRPr lang="en-US" sz="1400" dirty="0"/>
-          </a:p>
-        </p:txBody>
-      </p:sp>
-      <p:sp>
-        <p:nvSpPr>
-          <p:cNvPr id="12" name="Shape 10"/>
-          <p:cNvSpPr/>
-          <p:nvPr/>
-        </p:nvSpPr>
-        <p:spPr>
-          <a:xfrm>
-            <a:off x="548640" y="3840480"/>
-            <a:ext cx="5303520" cy="1965960"/>
-          </a:xfrm>
-          <a:prstGeom prst="roundRect">
-            <a:avLst>
-              <a:gd name="adj" fmla="val 3721"/>
-            </a:avLst>
-          </a:prstGeom>
-          <a:solidFill>
-            <a:srgbClr val="1E232C"/>
-          </a:solidFill>
-          <a:ln/>
-        </p:spPr>
-      </p:sp>
-      <p:sp>
-        <p:nvSpPr>
-          <p:cNvPr id="13" name="Text 11"/>
-          <p:cNvSpPr/>
-          <p:nvPr/>
-        </p:nvSpPr>
-        <p:spPr>
-          <a:xfrm>
-            <a:off x="804672" y="4041648"/>
-            <a:ext cx="1188720" cy="502920"/>
-          </a:xfrm>
-          <a:prstGeom prst="roundRect">
-            <a:avLst>
-              <a:gd name="adj" fmla="val 14545"/>
-            </a:avLst>
-          </a:prstGeom>
-          <a:solidFill>
-            <a:srgbClr val="E0A458"/>
-          </a:solidFill>
-          <a:ln/>
-        </p:spPr>
-        <p:txBody>
-          <a:bodyPr wrap="square" rtlCol="0" anchor="ctr"/>
-          <a:lstStyle/>
-          <a:p>
-            <a:pPr algn="ctr" indent="0" marL="0">
-              <a:buNone/>
-            </a:pPr>
-            <a:r>
-              <a:rPr lang="en-US" sz="1700" b="1" dirty="0">
-                <a:solidFill>
-                  <a:srgbClr val="13161C"/>
                 </a:solidFill>
                 <a:latin typeface="Courier New" pitchFamily="34" charset="0"/>
                 <a:ea typeface="Courier New" pitchFamily="34" charset="-122"/>
                 <a:cs typeface="Courier New" pitchFamily="34" charset="-120"/>
               </a:rPr>
-              <a:t>Ex 3</a:t>
-            </a:r>
-            <a:endParaRPr lang="en-US" sz="1700" dirty="0"/>
-          </a:p>
-        </p:txBody>
-      </p:sp>
-      <p:sp>
-        <p:nvSpPr>
-          <p:cNvPr id="14" name="Text 12"/>
-          <p:cNvSpPr/>
-          <p:nvPr/>
-        </p:nvSpPr>
-        <p:spPr>
-          <a:xfrm>
-            <a:off x="2148840" y="4059936"/>
-            <a:ext cx="3474720" cy="822960"/>
-          </a:xfrm>
-          <a:prstGeom prst="rect">
-            <a:avLst/>
-          </a:prstGeom>
-          <a:noFill/>
-          <a:ln/>
-        </p:spPr>
-        <p:txBody>
-          <a:bodyPr wrap="square" lIns="0" tIns="0" rIns="0" bIns="0" rtlCol="0" anchor="t"/>
-          <a:lstStyle/>
-          <a:p>
-            <a:pPr indent="0" marL="0">
-              <a:buNone/>
-            </a:pPr>
-            <a:r>
-              <a:rPr lang="en-US" sz="1700" b="1" dirty="0">
+              <a:t>tot_num_blocks = free / BLOCKSIZE;</a:t>
+            </a:r>
+            <a:endParaRPr lang="en-US" sz="1350" dirty="0"/>
+          </a:p>
+          <a:p>
+            <a:pPr algn="l" indent="0" marL="0">
+              <a:lnSpc>
+                <a:spcPct val="108000"/>
+              </a:lnSpc>
+              <a:buNone/>
+            </a:pPr>
+            <a:r>
+              <a:rPr lang="en-US" sz="1350" dirty="0">
                 <a:solidFill>
                   <a:srgbClr val="E8EDF2"/>
-                </a:solidFill>
-                <a:latin typeface="Malgun Gothic" pitchFamily="34" charset="0"/>
-                <a:ea typeface="Malgun Gothic" pitchFamily="34" charset="-122"/>
-                <a:cs typeface="Malgun Gothic" pitchFamily="34" charset="-120"/>
-              </a:rPr>
-              <a:t>메모리를 훼손해 오류 재현</a:t>
-            </a:r>
-            <a:endParaRPr lang="en-US" sz="1700" dirty="0"/>
-          </a:p>
-        </p:txBody>
-      </p:sp>
-      <p:sp>
-        <p:nvSpPr>
-          <p:cNvPr id="15" name="Text 13"/>
-          <p:cNvSpPr/>
-          <p:nvPr/>
-        </p:nvSpPr>
-        <p:spPr>
-          <a:xfrm>
-            <a:off x="804672" y="4937760"/>
-            <a:ext cx="4791456" cy="731520"/>
-          </a:xfrm>
-          <a:prstGeom prst="rect">
-            <a:avLst/>
-          </a:prstGeom>
-          <a:noFill/>
-          <a:ln/>
-        </p:spPr>
-        <p:txBody>
-          <a:bodyPr wrap="square" lIns="0" tIns="0" rIns="0" bIns="0" rtlCol="0" anchor="t"/>
-          <a:lstStyle/>
-          <a:p>
-            <a:pPr indent="0" marL="0">
-              <a:lnSpc>
-                <a:spcPct val="110000"/>
-              </a:lnSpc>
-              <a:buNone/>
-            </a:pPr>
-            <a:r>
-              <a:rPr lang="en-US" sz="1400" dirty="0">
-                <a:solidFill>
-                  <a:srgbClr val="9AA6B2"/>
-                </a:solidFill>
-                <a:latin typeface="Malgun Gothic" pitchFamily="34" charset="0"/>
-                <a:ea typeface="Malgun Gothic" pitchFamily="34" charset="-122"/>
-                <a:cs typeface="Malgun Gothic" pitchFamily="34" charset="-120"/>
-              </a:rPr>
-              <a:t>읽기 커널에서 비트 하나를 뒤집어 검출 확인</a:t>
-            </a:r>
-            <a:endParaRPr lang="en-US" sz="1400" dirty="0"/>
-          </a:p>
-        </p:txBody>
-      </p:sp>
-      <p:sp>
-        <p:nvSpPr>
-          <p:cNvPr id="16" name="Shape 14"/>
-          <p:cNvSpPr/>
-          <p:nvPr/>
-        </p:nvSpPr>
-        <p:spPr>
-          <a:xfrm>
-            <a:off x="6309360" y="3840480"/>
-            <a:ext cx="5303520" cy="1965960"/>
-          </a:xfrm>
-          <a:prstGeom prst="roundRect">
-            <a:avLst>
-              <a:gd name="adj" fmla="val 3721"/>
-            </a:avLst>
-          </a:prstGeom>
-          <a:solidFill>
-            <a:srgbClr val="1E232C"/>
-          </a:solidFill>
-          <a:ln/>
-        </p:spPr>
-      </p:sp>
-      <p:sp>
-        <p:nvSpPr>
-          <p:cNvPr id="17" name="Text 15"/>
-          <p:cNvSpPr/>
-          <p:nvPr/>
-        </p:nvSpPr>
-        <p:spPr>
-          <a:xfrm>
-            <a:off x="6565392" y="4041648"/>
-            <a:ext cx="1188720" cy="502920"/>
-          </a:xfrm>
-          <a:prstGeom prst="roundRect">
-            <a:avLst>
-              <a:gd name="adj" fmla="val 14545"/>
-            </a:avLst>
-          </a:prstGeom>
-          <a:solidFill>
-            <a:srgbClr val="8CC63F"/>
-          </a:solidFill>
-          <a:ln/>
-        </p:spPr>
-        <p:txBody>
-          <a:bodyPr wrap="square" rtlCol="0" anchor="ctr"/>
-          <a:lstStyle/>
-          <a:p>
-            <a:pPr algn="ctr" indent="0" marL="0">
-              <a:buNone/>
-            </a:pPr>
-            <a:r>
-              <a:rPr lang="en-US" sz="1700" b="1" dirty="0">
-                <a:solidFill>
-                  <a:srgbClr val="13161C"/>
                 </a:solidFill>
                 <a:latin typeface="Courier New" pitchFamily="34" charset="0"/>
                 <a:ea typeface="Courier New" pitchFamily="34" charset="-122"/>
                 <a:cs typeface="Courier New" pitchFamily="34" charset="-120"/>
               </a:rPr>
-              <a:t>Ex 4</a:t>
+              <a:t>do {</a:t>
+            </a:r>
+            <a:endParaRPr lang="en-US" sz="1350" dirty="0"/>
+          </a:p>
+          <a:p>
+            <a:pPr algn="l" indent="0" marL="0">
+              <a:lnSpc>
+                <a:spcPct val="108000"/>
+              </a:lnSpc>
+              <a:buNone/>
+            </a:pPr>
+            <a:r>
+              <a:rPr lang="en-US" sz="1350" dirty="0">
+                <a:solidFill>
+                  <a:srgbClr val="8CC63F"/>
+                </a:solidFill>
+                <a:latin typeface="Courier New" pitchFamily="34" charset="0"/>
+                <a:ea typeface="Courier New" pitchFamily="34" charset="-122"/>
+                <a:cs typeface="Courier New" pitchFamily="34" charset="-120"/>
+              </a:rPr>
+              <a:t>    err = cudaMalloc(&amp;ptr, tot_num_blocks * BLOCKSIZE);</a:t>
+            </a:r>
+            <a:endParaRPr lang="en-US" sz="1350" dirty="0"/>
+          </a:p>
+          <a:p>
+            <a:pPr algn="l" indent="0" marL="0">
+              <a:lnSpc>
+                <a:spcPct val="108000"/>
+              </a:lnSpc>
+              <a:buNone/>
+            </a:pPr>
+            <a:r>
+              <a:rPr lang="en-US" sz="1350" dirty="0">
+                <a:solidFill>
+                  <a:srgbClr val="E0A458"/>
+                </a:solidFill>
+                <a:latin typeface="Courier New" pitchFamily="34" charset="0"/>
+                <a:ea typeface="Courier New" pitchFamily="34" charset="-122"/>
+                <a:cs typeface="Courier New" pitchFamily="34" charset="-120"/>
+              </a:rPr>
+              <a:t>    if (err != cudaSuccess) --tot_num_blocks;   // 줄여서 재시도</a:t>
+            </a:r>
+            <a:endParaRPr lang="en-US" sz="1350" dirty="0"/>
+          </a:p>
+          <a:p>
+            <a:pPr algn="l" indent="0" marL="0">
+              <a:lnSpc>
+                <a:spcPct val="108000"/>
+              </a:lnSpc>
+              <a:buNone/>
+            </a:pPr>
+            <a:r>
+              <a:rPr lang="en-US" sz="1350" dirty="0">
+                <a:solidFill>
+                  <a:srgbClr val="E8EDF2"/>
+                </a:solidFill>
+                <a:latin typeface="Courier New" pitchFamily="34" charset="0"/>
+                <a:ea typeface="Courier New" pitchFamily="34" charset="-122"/>
+                <a:cs typeface="Courier New" pitchFamily="34" charset="-120"/>
+              </a:rPr>
+              <a:t>} while (cudaGetLastError() != cudaSuccess);</a:t>
+            </a:r>
+            <a:endParaRPr lang="en-US" sz="1350" dirty="0"/>
+          </a:p>
+        </p:txBody>
+      </p:sp>
+      <p:sp>
+        <p:nvSpPr>
+          <p:cNvPr id="6" name="Text 4"/>
+          <p:cNvSpPr/>
+          <p:nvPr/>
+        </p:nvSpPr>
+        <p:spPr>
+          <a:xfrm>
+            <a:off x="548640" y="4434840"/>
+            <a:ext cx="11064240" cy="914400"/>
+          </a:xfrm>
+          <a:prstGeom prst="rect">
+            <a:avLst/>
+          </a:prstGeom>
+          <a:noFill/>
+          <a:ln/>
+        </p:spPr>
+        <p:txBody>
+          <a:bodyPr wrap="square" lIns="0" tIns="0" rIns="0" bIns="0" rtlCol="0" anchor="t"/>
+          <a:lstStyle/>
+          <a:p>
+            <a:pPr indent="0" marL="0">
+              <a:buNone/>
+            </a:pPr>
+            <a:r>
+              <a:rPr lang="en-US" sz="1700" dirty="0">
+                <a:solidFill>
+                  <a:srgbClr val="E8EDF2"/>
+                </a:solidFill>
+                <a:latin typeface="Malgun Gothic" pitchFamily="34" charset="0"/>
+                <a:ea typeface="Malgun Gothic" pitchFamily="34" charset="-122"/>
+                <a:cs typeface="Malgun Gothic" pitchFamily="34" charset="-120"/>
+              </a:rPr>
+              <a:t>드라이버가 보고한 여유 메모리를 다 할당하지 못할 때가 있습니다. 실전 코드는 </a:t>
+            </a:r>
+            <a:pPr indent="0" marL="0">
+              <a:buNone/>
+            </a:pPr>
+            <a:r>
+              <a:rPr lang="en-US" sz="1700" b="1" dirty="0">
+                <a:solidFill>
+                  <a:srgbClr val="8CC63F"/>
+                </a:solidFill>
+                <a:latin typeface="Malgun Gothic" pitchFamily="34" charset="0"/>
+                <a:ea typeface="Malgun Gothic" pitchFamily="34" charset="-122"/>
+                <a:cs typeface="Malgun Gothic" pitchFamily="34" charset="-120"/>
+              </a:rPr>
+              <a:t>실패를 가정하고 우아하게 물러섭니다</a:t>
+            </a:r>
+            <a:pPr indent="0" marL="0">
+              <a:buNone/>
+            </a:pPr>
+            <a:r>
+              <a:rPr lang="en-US" sz="1700" dirty="0">
+                <a:solidFill>
+                  <a:srgbClr val="E8EDF2"/>
+                </a:solidFill>
+                <a:latin typeface="Malgun Gothic" pitchFamily="34" charset="0"/>
+                <a:ea typeface="Malgun Gothic" pitchFamily="34" charset="-122"/>
+                <a:cs typeface="Malgun Gothic" pitchFamily="34" charset="-120"/>
+              </a:rPr>
+              <a:t>. 장난감 예제와 프로덕션 코드의 차이입니다.</a:t>
             </a:r>
             <a:endParaRPr lang="en-US" sz="1700" dirty="0"/>
           </a:p>
@@ -5407,72 +8237,30 @@
       </p:sp>
       <p:sp>
         <p:nvSpPr>
-          <p:cNvPr id="18" name="Text 16"/>
-          <p:cNvSpPr/>
-          <p:nvPr/>
-        </p:nvSpPr>
-        <p:spPr>
-          <a:xfrm>
-            <a:off x="7909560" y="4059936"/>
-            <a:ext cx="3474720" cy="822960"/>
-          </a:xfrm>
-          <a:prstGeom prst="rect">
-            <a:avLst/>
-          </a:prstGeom>
-          <a:noFill/>
-          <a:ln/>
-        </p:spPr>
-        <p:txBody>
-          <a:bodyPr wrap="square" lIns="0" tIns="0" rIns="0" bIns="0" rtlCol="0" anchor="t"/>
+          <p:cNvPr id="7" name="Text 5"/>
+          <p:cNvSpPr/>
+          <p:nvPr/>
+        </p:nvSpPr>
+        <p:spPr>
+          <a:xfrm>
+            <a:off x="548640" y="5486400"/>
+            <a:ext cx="11064240" cy="457200"/>
+          </a:xfrm>
+          <a:prstGeom prst="rect">
+            <a:avLst/>
+          </a:prstGeom>
+          <a:noFill/>
+          <a:ln/>
+        </p:spPr>
+        <p:txBody>
+          <a:bodyPr wrap="square" lIns="0" tIns="0" rIns="0" bIns="0" rtlCol="0" anchor="ctr"/>
           <a:lstStyle/>
           <a:p>
             <a:pPr indent="0" marL="0">
               <a:buNone/>
             </a:pPr>
             <a:r>
-              <a:rPr lang="en-US" sz="1700" b="1" dirty="0">
-                <a:solidFill>
-                  <a:srgbClr val="E8EDF2"/>
-                </a:solidFill>
-                <a:latin typeface="Malgun Gothic" pitchFamily="34" charset="0"/>
-                <a:ea typeface="Malgun Gothic" pitchFamily="34" charset="-122"/>
-                <a:cs typeface="Malgun Gothic" pitchFamily="34" charset="-120"/>
-              </a:rPr>
-              <a:t>디바이스 버퍼 할당 보기</a:t>
-            </a:r>
-            <a:endParaRPr lang="en-US" sz="1700" dirty="0"/>
-          </a:p>
-        </p:txBody>
-      </p:sp>
-      <p:sp>
-        <p:nvSpPr>
-          <p:cNvPr id="19" name="Text 17"/>
-          <p:cNvSpPr/>
-          <p:nvPr/>
-        </p:nvSpPr>
-        <p:spPr>
-          <a:xfrm>
-            <a:off x="6565392" y="4937760"/>
-            <a:ext cx="4791456" cy="731520"/>
-          </a:xfrm>
-          <a:prstGeom prst="rect">
-            <a:avLst/>
-          </a:prstGeom>
-          <a:noFill/>
-          <a:ln/>
-        </p:spPr>
-        <p:txBody>
-          <a:bodyPr wrap="square" lIns="0" tIns="0" rIns="0" bIns="0" rtlCol="0" anchor="t"/>
-          <a:lstStyle/>
-          <a:p>
-            <a:pPr indent="0" marL="0">
-              <a:lnSpc>
-                <a:spcPct val="110000"/>
-              </a:lnSpc>
-              <a:buNone/>
-            </a:pPr>
-            <a:r>
-              <a:rPr lang="en-US" sz="1400" dirty="0">
+              <a:rPr lang="en-US" sz="1400" i="1" dirty="0">
                 <a:solidFill>
                   <a:srgbClr val="9AA6B2"/>
                 </a:solidFill>
@@ -5480,7 +8268,7 @@
                 <a:ea typeface="Malgun Gothic" pitchFamily="34" charset="-122"/>
                 <a:cs typeface="Malgun Gothic" pitchFamily="34" charset="-120"/>
               </a:rPr>
-              <a:t>allocate_small_mem의 cudaMalloc/Memset 관찰</a:t>
+              <a:t>cudaMemGetInfo로 여유 메모리를 조회 → BLOCKSIZE(1 MB)로 나눠 블록 수 결정.</a:t>
             </a:r>
             <a:endParaRPr lang="en-US" sz="1400" dirty="0"/>
           </a:p>
@@ -5555,7 +8343,7 @@
                 <a:ea typeface="Courier New" pitchFamily="34" charset="-122"/>
                 <a:cs typeface="Courier New" pitchFamily="34" charset="-120"/>
               </a:rPr>
-              <a:t>10</a:t>
+              <a:t>9</a:t>
             </a:r>
             <a:endParaRPr lang="en-US" sz="2200" dirty="0"/>
           </a:p>
@@ -5594,7 +8382,7 @@
                 <a:ea typeface="Malgun Gothic" pitchFamily="34" charset="-122"/>
                 <a:cs typeface="Malgun Gothic" pitchFamily="34" charset="-120"/>
               </a:rPr>
-              <a:t>핵심 정리 &amp; 자주 하는 실수</a:t>
+              <a:t>실습 미리보기 · Lab 2</a:t>
             </a:r>
             <a:endParaRPr lang="en-US" sz="3000" dirty="0"/>
           </a:p>
@@ -5608,12 +8396,12 @@
         </p:nvSpPr>
         <p:spPr>
           <a:xfrm>
-            <a:off x="548640" y="1600200"/>
-            <a:ext cx="5349240" cy="4114800"/>
+            <a:off x="548640" y="1554480"/>
+            <a:ext cx="5303520" cy="1965960"/>
           </a:xfrm>
           <a:prstGeom prst="roundRect">
             <a:avLst>
-              <a:gd name="adj" fmla="val 1778"/>
+              <a:gd name="adj" fmla="val 3721"/>
             </a:avLst>
           </a:prstGeom>
           <a:solidFill>
@@ -5630,154 +8418,136 @@
         </p:nvSpPr>
         <p:spPr>
           <a:xfrm>
-            <a:off x="822960" y="1828800"/>
-            <a:ext cx="4800600" cy="457200"/>
-          </a:xfrm>
-          <a:prstGeom prst="rect">
-            <a:avLst/>
-          </a:prstGeom>
-          <a:noFill/>
-          <a:ln/>
-        </p:spPr>
-        <p:txBody>
-          <a:bodyPr wrap="square" lIns="0" tIns="0" rIns="0" bIns="0" rtlCol="0" anchor="ctr"/>
-          <a:lstStyle/>
-          <a:p>
-            <a:pPr indent="0" marL="0">
-              <a:buNone/>
-            </a:pPr>
-            <a:r>
-              <a:rPr lang="en-US" sz="2000" b="1" dirty="0">
-                <a:solidFill>
-                  <a:srgbClr val="8CC63F"/>
-                </a:solidFill>
-                <a:latin typeface="Malgun Gothic" pitchFamily="34" charset="0"/>
-                <a:ea typeface="Malgun Gothic" pitchFamily="34" charset="-122"/>
-                <a:cs typeface="Malgun Gothic" pitchFamily="34" charset="-120"/>
-              </a:rPr>
-              <a:t>기억할 것</a:t>
-            </a:r>
-            <a:endParaRPr lang="en-US" sz="2000" dirty="0"/>
-          </a:p>
-        </p:txBody>
-      </p:sp>
-      <p:sp>
-        <p:nvSpPr>
-          <p:cNvPr id="6" name="Text 4"/>
-          <p:cNvSpPr/>
-          <p:nvPr/>
-        </p:nvSpPr>
-        <p:spPr>
-          <a:xfrm>
-            <a:off x="822960" y="2423160"/>
-            <a:ext cx="4800600" cy="3108960"/>
-          </a:xfrm>
-          <a:prstGeom prst="rect">
-            <a:avLst/>
-          </a:prstGeom>
-          <a:noFill/>
-          <a:ln/>
-        </p:spPr>
-        <p:txBody>
-          <a:bodyPr wrap="square" lIns="0" tIns="0" rIns="0" bIns="0" rtlCol="0" anchor="t"/>
-          <a:lstStyle/>
-          <a:p>
-            <a:pPr marL="342900" indent="-342900">
-              <a:spcAft>
-                <a:spcPts val="1200"/>
-              </a:spcAft>
-              <a:buSzPct val="100000"/>
-              <a:buChar char="✓"/>
-            </a:pPr>
-            <a:r>
-              <a:rPr lang="en-US" sz="1550" dirty="0">
-                <a:solidFill>
-                  <a:srgbClr val="E8EDF2"/>
-                </a:solidFill>
-                <a:latin typeface="Malgun Gothic" pitchFamily="34" charset="0"/>
-                <a:ea typeface="Malgun Gothic" pitchFamily="34" charset="-122"/>
-                <a:cs typeface="Malgun Gothic" pitchFamily="34" charset="-120"/>
-              </a:rPr>
-              <a:t>Malloc(할당)·Memset(초기화)·Memcpy(복사)</a:t>
-            </a:r>
-            <a:endParaRPr lang="en-US" sz="1550" dirty="0"/>
-          </a:p>
-          <a:p>
-            <a:pPr marL="342900" indent="-342900">
-              <a:spcAft>
-                <a:spcPts val="1200"/>
-              </a:spcAft>
-              <a:buSzPct val="100000"/>
-              <a:buChar char="✓"/>
-            </a:pPr>
-            <a:r>
-              <a:rPr lang="en-US" sz="1550" dirty="0">
-                <a:solidFill>
-                  <a:srgbClr val="E8EDF2"/>
-                </a:solidFill>
-                <a:latin typeface="Malgun Gothic" pitchFamily="34" charset="0"/>
-                <a:ea typeface="Malgun Gothic" pitchFamily="34" charset="-122"/>
-                <a:cs typeface="Malgun Gothic" pitchFamily="34" charset="-120"/>
-              </a:rPr>
-              <a:t>Memcpy 방향: DeviceToHost = GPU→CPU</a:t>
-            </a:r>
-            <a:endParaRPr lang="en-US" sz="1550" dirty="0"/>
-          </a:p>
-          <a:p>
-            <a:pPr marL="342900" indent="-342900">
-              <a:spcAft>
-                <a:spcPts val="1200"/>
-              </a:spcAft>
-              <a:buSzPct val="100000"/>
-              <a:buChar char="✓"/>
-            </a:pPr>
-            <a:r>
-              <a:rPr lang="en-US" sz="1550" dirty="0">
-                <a:solidFill>
-                  <a:srgbClr val="E8EDF2"/>
-                </a:solidFill>
-                <a:latin typeface="Malgun Gothic" pitchFamily="34" charset="0"/>
-                <a:ea typeface="Malgun Gothic" pitchFamily="34" charset="-122"/>
-                <a:cs typeface="Malgun Gothic" pitchFamily="34" charset="-120"/>
-              </a:rPr>
-              <a:t>쓰기 커널 종료 = 메모리 반영 보장</a:t>
-            </a:r>
-            <a:endParaRPr lang="en-US" sz="1550" dirty="0"/>
-          </a:p>
-          <a:p>
-            <a:pPr marL="342900" indent="-342900">
-              <a:buSzPct val="100000"/>
-              <a:buChar char="✓"/>
-            </a:pPr>
-            <a:r>
-              <a:rPr lang="en-US" sz="1550" dirty="0">
-                <a:solidFill>
-                  <a:srgbClr val="E8EDF2"/>
-                </a:solidFill>
-                <a:latin typeface="Malgun Gothic" pitchFamily="34" charset="0"/>
-                <a:ea typeface="Malgun Gothic" pitchFamily="34" charset="-122"/>
-                <a:cs typeface="Malgun Gothic" pitchFamily="34" charset="-120"/>
-              </a:rPr>
-              <a:t>이동 반전: p1 → p2(보수) 양방향 검사</a:t>
-            </a:r>
-            <a:endParaRPr lang="en-US" sz="1550" dirty="0"/>
-          </a:p>
-        </p:txBody>
-      </p:sp>
-      <p:sp>
-        <p:nvSpPr>
-          <p:cNvPr id="7" name="Shape 5"/>
-          <p:cNvSpPr/>
-          <p:nvPr/>
-        </p:nvSpPr>
-        <p:spPr>
-          <a:xfrm>
-            <a:off x="6263640" y="1600200"/>
-            <a:ext cx="5349240" cy="4114800"/>
+            <a:off x="804672" y="1755648"/>
+            <a:ext cx="1188720" cy="502920"/>
           </a:xfrm>
           <a:prstGeom prst="roundRect">
             <a:avLst>
-              <a:gd name="adj" fmla="val 1778"/>
+              <a:gd name="adj" fmla="val 14545"/>
+            </a:avLst>
+          </a:prstGeom>
+          <a:solidFill>
+            <a:srgbClr val="8CC63F"/>
+          </a:solidFill>
+          <a:ln/>
+        </p:spPr>
+        <p:txBody>
+          <a:bodyPr wrap="square" rtlCol="0" anchor="ctr"/>
+          <a:lstStyle/>
+          <a:p>
+            <a:pPr algn="ctr" indent="0" marL="0">
+              <a:buNone/>
+            </a:pPr>
+            <a:r>
+              <a:rPr lang="en-US" sz="1700" b="1" dirty="0">
+                <a:solidFill>
+                  <a:srgbClr val="13161C"/>
+                </a:solidFill>
+                <a:latin typeface="Courier New" pitchFamily="34" charset="0"/>
+                <a:ea typeface="Courier New" pitchFamily="34" charset="-122"/>
+                <a:cs typeface="Courier New" pitchFamily="34" charset="-120"/>
+              </a:rPr>
+              <a:t>Ex 1</a:t>
+            </a:r>
+            <a:endParaRPr lang="en-US" sz="1700" dirty="0"/>
+          </a:p>
+        </p:txBody>
+      </p:sp>
+      <p:sp>
+        <p:nvSpPr>
+          <p:cNvPr id="6" name="Text 4"/>
+          <p:cNvSpPr/>
+          <p:nvPr/>
+        </p:nvSpPr>
+        <p:spPr>
+          <a:xfrm>
+            <a:off x="2148840" y="1773936"/>
+            <a:ext cx="3474720" cy="822960"/>
+          </a:xfrm>
+          <a:prstGeom prst="rect">
+            <a:avLst/>
+          </a:prstGeom>
+          <a:noFill/>
+          <a:ln/>
+        </p:spPr>
+        <p:txBody>
+          <a:bodyPr wrap="square" lIns="0" tIns="0" rIns="0" bIns="0" rtlCol="0" anchor="t"/>
+          <a:lstStyle/>
+          <a:p>
+            <a:pPr indent="0" marL="0">
+              <a:buNone/>
+            </a:pPr>
+            <a:r>
+              <a:rPr lang="en-US" sz="1700" b="1" dirty="0">
+                <a:solidFill>
+                  <a:srgbClr val="E8EDF2"/>
+                </a:solidFill>
+                <a:latin typeface="Malgun Gothic" pitchFamily="34" charset="0"/>
+                <a:ea typeface="Malgun Gothic" pitchFamily="34" charset="-122"/>
+                <a:cs typeface="Malgun Gothic" pitchFamily="34" charset="-120"/>
+              </a:rPr>
+              <a:t>세 커널의 협업 보기</a:t>
+            </a:r>
+            <a:endParaRPr lang="en-US" sz="1700" dirty="0"/>
+          </a:p>
+        </p:txBody>
+      </p:sp>
+      <p:sp>
+        <p:nvSpPr>
+          <p:cNvPr id="7" name="Text 5"/>
+          <p:cNvSpPr/>
+          <p:nvPr/>
+        </p:nvSpPr>
+        <p:spPr>
+          <a:xfrm>
+            <a:off x="804672" y="2651760"/>
+            <a:ext cx="4791456" cy="731520"/>
+          </a:xfrm>
+          <a:prstGeom prst="rect">
+            <a:avLst/>
+          </a:prstGeom>
+          <a:noFill/>
+          <a:ln/>
+        </p:spPr>
+        <p:txBody>
+          <a:bodyPr wrap="square" lIns="0" tIns="0" rIns="0" bIns="0" rtlCol="0" anchor="t"/>
+          <a:lstStyle/>
+          <a:p>
+            <a:pPr indent="0" marL="0">
+              <a:lnSpc>
+                <a:spcPct val="110000"/>
+              </a:lnSpc>
+              <a:buNone/>
+            </a:pPr>
+            <a:r>
+              <a:rPr lang="en-US" sz="1400" dirty="0">
+                <a:solidFill>
+                  <a:srgbClr val="9AA6B2"/>
+                </a:solidFill>
+                <a:latin typeface="Malgun Gothic" pitchFamily="34" charset="0"/>
+                <a:ea typeface="Malgun Gothic" pitchFamily="34" charset="-122"/>
+                <a:cs typeface="Malgun Gothic" pitchFamily="34" charset="-120"/>
+              </a:rPr>
+              <a:t>--verbose --verbose 로 write→readwrite→read 순서 확인</a:t>
+            </a:r>
+            <a:endParaRPr lang="en-US" sz="1400" dirty="0"/>
+          </a:p>
+        </p:txBody>
+      </p:sp>
+      <p:sp>
+        <p:nvSpPr>
+          <p:cNvPr id="8" name="Shape 6"/>
+          <p:cNvSpPr/>
+          <p:nvPr/>
+        </p:nvSpPr>
+        <p:spPr>
+          <a:xfrm>
+            <a:off x="6309360" y="1554480"/>
+            <a:ext cx="5303520" cy="1965960"/>
+          </a:xfrm>
+          <a:prstGeom prst="roundRect">
+            <a:avLst>
+              <a:gd name="adj" fmla="val 3721"/>
             </a:avLst>
           </a:prstGeom>
           <a:solidFill>
@@ -5788,53 +8558,96 @@
       </p:sp>
       <p:sp>
         <p:nvSpPr>
-          <p:cNvPr id="8" name="Text 6"/>
-          <p:cNvSpPr/>
-          <p:nvPr/>
-        </p:nvSpPr>
-        <p:spPr>
-          <a:xfrm>
-            <a:off x="6537960" y="1828800"/>
-            <a:ext cx="4800600" cy="457200"/>
-          </a:xfrm>
-          <a:prstGeom prst="rect">
-            <a:avLst/>
-          </a:prstGeom>
-          <a:noFill/>
-          <a:ln/>
-        </p:spPr>
-        <p:txBody>
-          <a:bodyPr wrap="square" lIns="0" tIns="0" rIns="0" bIns="0" rtlCol="0" anchor="ctr"/>
+          <p:cNvPr id="9" name="Text 7"/>
+          <p:cNvSpPr/>
+          <p:nvPr/>
+        </p:nvSpPr>
+        <p:spPr>
+          <a:xfrm>
+            <a:off x="6565392" y="1755648"/>
+            <a:ext cx="1188720" cy="502920"/>
+          </a:xfrm>
+          <a:prstGeom prst="roundRect">
+            <a:avLst>
+              <a:gd name="adj" fmla="val 14545"/>
+            </a:avLst>
+          </a:prstGeom>
+          <a:solidFill>
+            <a:srgbClr val="4FB0C6"/>
+          </a:solidFill>
+          <a:ln/>
+        </p:spPr>
+        <p:txBody>
+          <a:bodyPr wrap="square" rtlCol="0" anchor="ctr"/>
+          <a:lstStyle/>
+          <a:p>
+            <a:pPr algn="ctr" indent="0" marL="0">
+              <a:buNone/>
+            </a:pPr>
+            <a:r>
+              <a:rPr lang="en-US" sz="1700" b="1" dirty="0">
+                <a:solidFill>
+                  <a:srgbClr val="13161C"/>
+                </a:solidFill>
+                <a:latin typeface="Courier New" pitchFamily="34" charset="0"/>
+                <a:ea typeface="Courier New" pitchFamily="34" charset="-122"/>
+                <a:cs typeface="Courier New" pitchFamily="34" charset="-120"/>
+              </a:rPr>
+              <a:t>Ex 2</a:t>
+            </a:r>
+            <a:endParaRPr lang="en-US" sz="1700" dirty="0"/>
+          </a:p>
+        </p:txBody>
+      </p:sp>
+      <p:sp>
+        <p:nvSpPr>
+          <p:cNvPr id="10" name="Text 8"/>
+          <p:cNvSpPr/>
+          <p:nvPr/>
+        </p:nvSpPr>
+        <p:spPr>
+          <a:xfrm>
+            <a:off x="7909560" y="1773936"/>
+            <a:ext cx="3474720" cy="822960"/>
+          </a:xfrm>
+          <a:prstGeom prst="rect">
+            <a:avLst/>
+          </a:prstGeom>
+          <a:noFill/>
+          <a:ln/>
+        </p:spPr>
+        <p:txBody>
+          <a:bodyPr wrap="square" lIns="0" tIns="0" rIns="0" bIns="0" rtlCol="0" anchor="t"/>
           <a:lstStyle/>
           <a:p>
             <a:pPr indent="0" marL="0">
               <a:buNone/>
             </a:pPr>
             <a:r>
-              <a:rPr lang="en-US" sz="2000" b="1" dirty="0">
-                <a:solidFill>
-                  <a:srgbClr val="E0A458"/>
-                </a:solidFill>
-                <a:latin typeface="Malgun Gothic" pitchFamily="34" charset="0"/>
-                <a:ea typeface="Malgun Gothic" pitchFamily="34" charset="-122"/>
-                <a:cs typeface="Malgun Gothic" pitchFamily="34" charset="-120"/>
-              </a:rPr>
-              <a:t>입문자 함정</a:t>
-            </a:r>
-            <a:endParaRPr lang="en-US" sz="2000" dirty="0"/>
-          </a:p>
-        </p:txBody>
-      </p:sp>
-      <p:sp>
-        <p:nvSpPr>
-          <p:cNvPr id="9" name="Text 7"/>
-          <p:cNvSpPr/>
-          <p:nvPr/>
-        </p:nvSpPr>
-        <p:spPr>
-          <a:xfrm>
-            <a:off x="6537960" y="2423160"/>
-            <a:ext cx="4800600" cy="3108960"/>
+              <a:rPr lang="en-US" sz="1700" b="1" dirty="0">
+                <a:solidFill>
+                  <a:srgbClr val="E8EDF2"/>
+                </a:solidFill>
+                <a:latin typeface="Malgun Gothic" pitchFamily="34" charset="0"/>
+                <a:ea typeface="Malgun Gothic" pitchFamily="34" charset="-122"/>
+                <a:cs typeface="Malgun Gothic" pitchFamily="34" charset="-120"/>
+              </a:rPr>
+              <a:t>오류가 CPU로 돌아오는 길</a:t>
+            </a:r>
+            <a:endParaRPr lang="en-US" sz="1700" dirty="0"/>
+          </a:p>
+        </p:txBody>
+      </p:sp>
+      <p:sp>
+        <p:nvSpPr>
+          <p:cNvPr id="11" name="Text 9"/>
+          <p:cNvSpPr/>
+          <p:nvPr/>
+        </p:nvSpPr>
+        <p:spPr>
+          <a:xfrm>
+            <a:off x="6565392" y="2651760"/>
+            <a:ext cx="4791456" cy="731520"/>
           </a:xfrm>
           <a:prstGeom prst="rect">
             <a:avLst/>
@@ -5846,15 +8659,118 @@
           <a:bodyPr wrap="square" lIns="0" tIns="0" rIns="0" bIns="0" rtlCol="0" anchor="t"/>
           <a:lstStyle/>
           <a:p>
-            <a:pPr marL="342900" indent="-342900">
-              <a:spcAft>
-                <a:spcPts val="1200"/>
-              </a:spcAft>
-              <a:buSzPct val="100000"/>
-              <a:buChar char="✗"/>
-            </a:pPr>
-            <a:r>
-              <a:rPr lang="en-US" sz="1550" dirty="0">
+            <a:pPr indent="0" marL="0">
+              <a:lnSpc>
+                <a:spcPct val="110000"/>
+              </a:lnSpc>
+              <a:buNone/>
+            </a:pPr>
+            <a:r>
+              <a:rPr lang="en-US" sz="1400" dirty="0">
+                <a:solidFill>
+                  <a:srgbClr val="9AA6B2"/>
+                </a:solidFill>
+                <a:latin typeface="Malgun Gothic" pitchFamily="34" charset="0"/>
+                <a:ea typeface="Malgun Gothic" pitchFamily="34" charset="-122"/>
+                <a:cs typeface="Malgun Gothic" pitchFamily="34" charset="-120"/>
+              </a:rPr>
+              <a:t>error_checking의 cudaMemcpy 직후 출력 추가</a:t>
+            </a:r>
+            <a:endParaRPr lang="en-US" sz="1400" dirty="0"/>
+          </a:p>
+        </p:txBody>
+      </p:sp>
+      <p:sp>
+        <p:nvSpPr>
+          <p:cNvPr id="12" name="Shape 10"/>
+          <p:cNvSpPr/>
+          <p:nvPr/>
+        </p:nvSpPr>
+        <p:spPr>
+          <a:xfrm>
+            <a:off x="548640" y="3840480"/>
+            <a:ext cx="5303520" cy="1965960"/>
+          </a:xfrm>
+          <a:prstGeom prst="roundRect">
+            <a:avLst>
+              <a:gd name="adj" fmla="val 3721"/>
+            </a:avLst>
+          </a:prstGeom>
+          <a:solidFill>
+            <a:srgbClr val="1E232C"/>
+          </a:solidFill>
+          <a:ln/>
+        </p:spPr>
+      </p:sp>
+      <p:sp>
+        <p:nvSpPr>
+          <p:cNvPr id="13" name="Text 11"/>
+          <p:cNvSpPr/>
+          <p:nvPr/>
+        </p:nvSpPr>
+        <p:spPr>
+          <a:xfrm>
+            <a:off x="804672" y="4041648"/>
+            <a:ext cx="1188720" cy="502920"/>
+          </a:xfrm>
+          <a:prstGeom prst="roundRect">
+            <a:avLst>
+              <a:gd name="adj" fmla="val 14545"/>
+            </a:avLst>
+          </a:prstGeom>
+          <a:solidFill>
+            <a:srgbClr val="E0A458"/>
+          </a:solidFill>
+          <a:ln/>
+        </p:spPr>
+        <p:txBody>
+          <a:bodyPr wrap="square" rtlCol="0" anchor="ctr"/>
+          <a:lstStyle/>
+          <a:p>
+            <a:pPr algn="ctr" indent="0" marL="0">
+              <a:buNone/>
+            </a:pPr>
+            <a:r>
+              <a:rPr lang="en-US" sz="1700" b="1" dirty="0">
+                <a:solidFill>
+                  <a:srgbClr val="13161C"/>
+                </a:solidFill>
+                <a:latin typeface="Courier New" pitchFamily="34" charset="0"/>
+                <a:ea typeface="Courier New" pitchFamily="34" charset="-122"/>
+                <a:cs typeface="Courier New" pitchFamily="34" charset="-120"/>
+              </a:rPr>
+              <a:t>Ex 3</a:t>
+            </a:r>
+            <a:endParaRPr lang="en-US" sz="1700" dirty="0"/>
+          </a:p>
+        </p:txBody>
+      </p:sp>
+      <p:sp>
+        <p:nvSpPr>
+          <p:cNvPr id="14" name="Text 12"/>
+          <p:cNvSpPr/>
+          <p:nvPr/>
+        </p:nvSpPr>
+        <p:spPr>
+          <a:xfrm>
+            <a:off x="2148840" y="4059936"/>
+            <a:ext cx="3474720" cy="822960"/>
+          </a:xfrm>
+          <a:prstGeom prst="rect">
+            <a:avLst/>
+          </a:prstGeom>
+          <a:noFill/>
+          <a:ln/>
+        </p:spPr>
+        <p:txBody>
+          <a:bodyPr wrap="square" lIns="0" tIns="0" rIns="0" bIns="0" rtlCol="0" anchor="t"/>
+          <a:lstStyle/>
+          <a:p>
+            <a:pPr indent="0" marL="0">
+              <a:buNone/>
+            </a:pPr>
+            <a:r>
+              <a:rPr lang="en-US" sz="1700" b="1" dirty="0">
                 <a:solidFill>
                   <a:srgbClr val="E8EDF2"/>
                 </a:solidFill>
@@ -5862,20 +8778,145 @@
                 <a:ea typeface="Malgun Gothic" pitchFamily="34" charset="-122"/>
                 <a:cs typeface="Malgun Gothic" pitchFamily="34" charset="-120"/>
               </a:rPr>
-              <a:t>디바이스 포인터를 CPU에서 *ptr로 역참조 → 오류</a:t>
-            </a:r>
-            <a:endParaRPr lang="en-US" sz="1550" dirty="0"/>
-          </a:p>
-          <a:p>
-            <a:pPr marL="342900" indent="-342900">
-              <a:spcAft>
-                <a:spcPts val="1200"/>
-              </a:spcAft>
-              <a:buSzPct val="100000"/>
-              <a:buChar char="✗"/>
-            </a:pPr>
-            <a:r>
-              <a:rPr lang="en-US" sz="1550" dirty="0">
+              <a:t>메모리를 훼손해 오류 재현</a:t>
+            </a:r>
+            <a:endParaRPr lang="en-US" sz="1700" dirty="0"/>
+          </a:p>
+        </p:txBody>
+      </p:sp>
+      <p:sp>
+        <p:nvSpPr>
+          <p:cNvPr id="15" name="Text 13"/>
+          <p:cNvSpPr/>
+          <p:nvPr/>
+        </p:nvSpPr>
+        <p:spPr>
+          <a:xfrm>
+            <a:off x="804672" y="4937760"/>
+            <a:ext cx="4791456" cy="731520"/>
+          </a:xfrm>
+          <a:prstGeom prst="rect">
+            <a:avLst/>
+          </a:prstGeom>
+          <a:noFill/>
+          <a:ln/>
+        </p:spPr>
+        <p:txBody>
+          <a:bodyPr wrap="square" lIns="0" tIns="0" rIns="0" bIns="0" rtlCol="0" anchor="t"/>
+          <a:lstStyle/>
+          <a:p>
+            <a:pPr indent="0" marL="0">
+              <a:lnSpc>
+                <a:spcPct val="110000"/>
+              </a:lnSpc>
+              <a:buNone/>
+            </a:pPr>
+            <a:r>
+              <a:rPr lang="en-US" sz="1400" dirty="0">
+                <a:solidFill>
+                  <a:srgbClr val="9AA6B2"/>
+                </a:solidFill>
+                <a:latin typeface="Malgun Gothic" pitchFamily="34" charset="0"/>
+                <a:ea typeface="Malgun Gothic" pitchFamily="34" charset="-122"/>
+                <a:cs typeface="Malgun Gothic" pitchFamily="34" charset="-120"/>
+              </a:rPr>
+              <a:t>읽기 커널에서 비트 하나를 뒤집어 검출 확인</a:t>
+            </a:r>
+            <a:endParaRPr lang="en-US" sz="1400" dirty="0"/>
+          </a:p>
+        </p:txBody>
+      </p:sp>
+      <p:sp>
+        <p:nvSpPr>
+          <p:cNvPr id="16" name="Shape 14"/>
+          <p:cNvSpPr/>
+          <p:nvPr/>
+        </p:nvSpPr>
+        <p:spPr>
+          <a:xfrm>
+            <a:off x="6309360" y="3840480"/>
+            <a:ext cx="5303520" cy="1965960"/>
+          </a:xfrm>
+          <a:prstGeom prst="roundRect">
+            <a:avLst>
+              <a:gd name="adj" fmla="val 3721"/>
+            </a:avLst>
+          </a:prstGeom>
+          <a:solidFill>
+            <a:srgbClr val="1E232C"/>
+          </a:solidFill>
+          <a:ln/>
+        </p:spPr>
+      </p:sp>
+      <p:sp>
+        <p:nvSpPr>
+          <p:cNvPr id="17" name="Text 15"/>
+          <p:cNvSpPr/>
+          <p:nvPr/>
+        </p:nvSpPr>
+        <p:spPr>
+          <a:xfrm>
+            <a:off x="6565392" y="4041648"/>
+            <a:ext cx="1188720" cy="502920"/>
+          </a:xfrm>
+          <a:prstGeom prst="roundRect">
+            <a:avLst>
+              <a:gd name="adj" fmla="val 14545"/>
+            </a:avLst>
+          </a:prstGeom>
+          <a:solidFill>
+            <a:srgbClr val="8CC63F"/>
+          </a:solidFill>
+          <a:ln/>
+        </p:spPr>
+        <p:txBody>
+          <a:bodyPr wrap="square" rtlCol="0" anchor="ctr"/>
+          <a:lstStyle/>
+          <a:p>
+            <a:pPr algn="ctr" indent="0" marL="0">
+              <a:buNone/>
+            </a:pPr>
+            <a:r>
+              <a:rPr lang="en-US" sz="1700" b="1" dirty="0">
+                <a:solidFill>
+                  <a:srgbClr val="13161C"/>
+                </a:solidFill>
+                <a:latin typeface="Courier New" pitchFamily="34" charset="0"/>
+                <a:ea typeface="Courier New" pitchFamily="34" charset="-122"/>
+                <a:cs typeface="Courier New" pitchFamily="34" charset="-120"/>
+              </a:rPr>
+              <a:t>Ex 4</a:t>
+            </a:r>
+            <a:endParaRPr lang="en-US" sz="1700" dirty="0"/>
+          </a:p>
+        </p:txBody>
+      </p:sp>
+      <p:sp>
+        <p:nvSpPr>
+          <p:cNvPr id="18" name="Text 16"/>
+          <p:cNvSpPr/>
+          <p:nvPr/>
+        </p:nvSpPr>
+        <p:spPr>
+          <a:xfrm>
+            <a:off x="7909560" y="4059936"/>
+            <a:ext cx="3474720" cy="822960"/>
+          </a:xfrm>
+          <a:prstGeom prst="rect">
+            <a:avLst/>
+          </a:prstGeom>
+          <a:noFill/>
+          <a:ln/>
+        </p:spPr>
+        <p:txBody>
+          <a:bodyPr wrap="square" lIns="0" tIns="0" rIns="0" bIns="0" rtlCol="0" anchor="t"/>
+          <a:lstStyle/>
+          <a:p>
+            <a:pPr indent="0" marL="0">
+              <a:buNone/>
+            </a:pPr>
+            <a:r>
+              <a:rPr lang="en-US" sz="1700" b="1" dirty="0">
                 <a:solidFill>
                   <a:srgbClr val="E8EDF2"/>
                 </a:solidFill>
@@ -5883,48 +8924,51 @@
                 <a:ea typeface="Malgun Gothic" pitchFamily="34" charset="-122"/>
                 <a:cs typeface="Malgun Gothic" pitchFamily="34" charset="-120"/>
               </a:rPr>
-              <a:t>cudaMemcpy 방향을 반대로 지정 → 값이 안 옴</a:t>
-            </a:r>
-            <a:endParaRPr lang="en-US" sz="1550" dirty="0"/>
-          </a:p>
-          <a:p>
-            <a:pPr marL="342900" indent="-342900">
-              <a:spcAft>
-                <a:spcPts val="1200"/>
-              </a:spcAft>
-              <a:buSzPct val="100000"/>
-              <a:buChar char="✗"/>
-            </a:pPr>
-            <a:r>
-              <a:rPr lang="en-US" sz="1550" dirty="0">
-                <a:solidFill>
-                  <a:srgbClr val="E8EDF2"/>
-                </a:solidFill>
-                <a:latin typeface="Malgun Gothic" pitchFamily="34" charset="0"/>
-                <a:ea typeface="Malgun Gothic" pitchFamily="34" charset="-122"/>
-                <a:cs typeface="Malgun Gothic" pitchFamily="34" charset="-120"/>
-              </a:rPr>
-              <a:t>같은 커널에서 쓰고 바로 읽기 → 반영 전 값 읽음</a:t>
-            </a:r>
-            <a:endParaRPr lang="en-US" sz="1550" dirty="0"/>
-          </a:p>
-          <a:p>
-            <a:pPr marL="342900" indent="-342900">
-              <a:buSzPct val="100000"/>
-              <a:buChar char="✗"/>
-            </a:pPr>
-            <a:r>
-              <a:rPr lang="en-US" sz="1550" dirty="0">
-                <a:solidFill>
-                  <a:srgbClr val="E8EDF2"/>
-                </a:solidFill>
-                <a:latin typeface="Malgun Gothic" pitchFamily="34" charset="0"/>
-                <a:ea typeface="Malgun Gothic" pitchFamily="34" charset="-122"/>
-                <a:cs typeface="Malgun Gothic" pitchFamily="34" charset="-120"/>
-              </a:rPr>
-              <a:t>cudaMalloc에 (void**) 이중 포인터를 안 넘김</a:t>
-            </a:r>
-            <a:endParaRPr lang="en-US" sz="1550" dirty="0"/>
+              <a:t>디바이스 버퍼 할당 보기</a:t>
+            </a:r>
+            <a:endParaRPr lang="en-US" sz="1700" dirty="0"/>
+          </a:p>
+        </p:txBody>
+      </p:sp>
+      <p:sp>
+        <p:nvSpPr>
+          <p:cNvPr id="19" name="Text 17"/>
+          <p:cNvSpPr/>
+          <p:nvPr/>
+        </p:nvSpPr>
+        <p:spPr>
+          <a:xfrm>
+            <a:off x="6565392" y="4937760"/>
+            <a:ext cx="4791456" cy="731520"/>
+          </a:xfrm>
+          <a:prstGeom prst="rect">
+            <a:avLst/>
+          </a:prstGeom>
+          <a:noFill/>
+          <a:ln/>
+        </p:spPr>
+        <p:txBody>
+          <a:bodyPr wrap="square" lIns="0" tIns="0" rIns="0" bIns="0" rtlCol="0" anchor="t"/>
+          <a:lstStyle/>
+          <a:p>
+            <a:pPr indent="0" marL="0">
+              <a:lnSpc>
+                <a:spcPct val="110000"/>
+              </a:lnSpc>
+              <a:buNone/>
+            </a:pPr>
+            <a:r>
+              <a:rPr lang="en-US" sz="1400" dirty="0">
+                <a:solidFill>
+                  <a:srgbClr val="9AA6B2"/>
+                </a:solidFill>
+                <a:latin typeface="Malgun Gothic" pitchFamily="34" charset="0"/>
+                <a:ea typeface="Malgun Gothic" pitchFamily="34" charset="-122"/>
+                <a:cs typeface="Malgun Gothic" pitchFamily="34" charset="-120"/>
+              </a:rPr>
+              <a:t>allocate_small_mem의 cudaMalloc/Memset 관찰</a:t>
+            </a:r>
+            <a:endParaRPr lang="en-US" sz="1400" dirty="0"/>
           </a:p>
         </p:txBody>
       </p:sp>
@@ -5939,6 +8983,448 @@
 <file path=ppt/slides/slide15.xml><?xml version="1.0" encoding="utf-8"?>
 <p:sld xmlns:a="http://schemas.openxmlformats.org/drawingml/2006/main" xmlns:r="http://schemas.openxmlformats.org/officeDocument/2006/relationships" xmlns:p="http://schemas.openxmlformats.org/presentationml/2006/main">
   <p:cSld name="Slide 15">
+    <p:bg>
+      <p:bgPr>
+        <a:solidFill>
+          <a:srgbClr val="13161C"/>
+        </a:solidFill>
+      </p:bgPr>
+    </p:bg>
+    <p:spTree>
+      <p:nvGrpSpPr>
+        <p:cNvPr id="1" name=""/>
+        <p:cNvGrpSpPr/>
+        <p:nvPr/>
+      </p:nvGrpSpPr>
+      <p:grpSpPr>
+        <a:xfrm>
+          <a:off x="0" y="0"/>
+          <a:ext cx="0" cy="0"/>
+          <a:chOff x="0" y="0"/>
+          <a:chExt cx="0" cy="0"/>
+        </a:xfrm>
+      </p:grpSpPr>
+      <p:sp>
+        <p:nvSpPr>
+          <p:cNvPr id="2" name="Text 0"/>
+          <p:cNvSpPr/>
+          <p:nvPr/>
+        </p:nvSpPr>
+        <p:spPr>
+          <a:xfrm>
+            <a:off x="548640" y="411480"/>
+            <a:ext cx="640080" cy="640080"/>
+          </a:xfrm>
+          <a:prstGeom prst="roundRect">
+            <a:avLst>
+              <a:gd name="adj" fmla="val 12857"/>
+            </a:avLst>
+          </a:prstGeom>
+          <a:solidFill>
+            <a:srgbClr val="8CC63F"/>
+          </a:solidFill>
+          <a:ln/>
+        </p:spPr>
+        <p:txBody>
+          <a:bodyPr wrap="square" rtlCol="0" anchor="ctr"/>
+          <a:lstStyle/>
+          <a:p>
+            <a:pPr algn="ctr" indent="0" marL="0">
+              <a:buNone/>
+            </a:pPr>
+            <a:r>
+              <a:rPr lang="en-US" sz="2200" b="1" dirty="0">
+                <a:solidFill>
+                  <a:srgbClr val="13161C"/>
+                </a:solidFill>
+                <a:latin typeface="Courier New" pitchFamily="34" charset="0"/>
+                <a:ea typeface="Courier New" pitchFamily="34" charset="-122"/>
+                <a:cs typeface="Courier New" pitchFamily="34" charset="-120"/>
+              </a:rPr>
+              <a:t>10</a:t>
+            </a:r>
+            <a:endParaRPr lang="en-US" sz="2200" dirty="0"/>
+          </a:p>
+        </p:txBody>
+      </p:sp>
+      <p:sp>
+        <p:nvSpPr>
+          <p:cNvPr id="3" name="Text 1"/>
+          <p:cNvSpPr/>
+          <p:nvPr/>
+        </p:nvSpPr>
+        <p:spPr>
+          <a:xfrm>
+            <a:off x="1325880" y="384048"/>
+            <a:ext cx="10287000" cy="694944"/>
+          </a:xfrm>
+          <a:prstGeom prst="rect">
+            <a:avLst/>
+          </a:prstGeom>
+          <a:noFill/>
+          <a:ln/>
+        </p:spPr>
+        <p:txBody>
+          <a:bodyPr wrap="square" lIns="0" tIns="0" rIns="0" bIns="0" rtlCol="0" anchor="ctr"/>
+          <a:lstStyle/>
+          <a:p>
+            <a:pPr algn="l" indent="0" marL="0">
+              <a:buNone/>
+            </a:pPr>
+            <a:r>
+              <a:rPr lang="en-US" sz="3000" b="1" dirty="0">
+                <a:solidFill>
+                  <a:srgbClr val="E8EDF2"/>
+                </a:solidFill>
+                <a:latin typeface="Malgun Gothic" pitchFamily="34" charset="0"/>
+                <a:ea typeface="Malgun Gothic" pitchFamily="34" charset="-122"/>
+                <a:cs typeface="Malgun Gothic" pitchFamily="34" charset="-120"/>
+              </a:rPr>
+              <a:t>핵심 정리 &amp; 자주 하는 실수</a:t>
+            </a:r>
+            <a:endParaRPr lang="en-US" sz="3000" dirty="0"/>
+          </a:p>
+        </p:txBody>
+      </p:sp>
+      <p:sp>
+        <p:nvSpPr>
+          <p:cNvPr id="4" name="Shape 2"/>
+          <p:cNvSpPr/>
+          <p:nvPr/>
+        </p:nvSpPr>
+        <p:spPr>
+          <a:xfrm>
+            <a:off x="548640" y="1600200"/>
+            <a:ext cx="5349240" cy="4114800"/>
+          </a:xfrm>
+          <a:prstGeom prst="roundRect">
+            <a:avLst>
+              <a:gd name="adj" fmla="val 1778"/>
+            </a:avLst>
+          </a:prstGeom>
+          <a:solidFill>
+            <a:srgbClr val="1E232C"/>
+          </a:solidFill>
+          <a:ln/>
+        </p:spPr>
+      </p:sp>
+      <p:sp>
+        <p:nvSpPr>
+          <p:cNvPr id="5" name="Text 3"/>
+          <p:cNvSpPr/>
+          <p:nvPr/>
+        </p:nvSpPr>
+        <p:spPr>
+          <a:xfrm>
+            <a:off x="822960" y="1828800"/>
+            <a:ext cx="4800600" cy="457200"/>
+          </a:xfrm>
+          <a:prstGeom prst="rect">
+            <a:avLst/>
+          </a:prstGeom>
+          <a:noFill/>
+          <a:ln/>
+        </p:spPr>
+        <p:txBody>
+          <a:bodyPr wrap="square" lIns="0" tIns="0" rIns="0" bIns="0" rtlCol="0" anchor="ctr"/>
+          <a:lstStyle/>
+          <a:p>
+            <a:pPr indent="0" marL="0">
+              <a:buNone/>
+            </a:pPr>
+            <a:r>
+              <a:rPr lang="en-US" sz="2000" b="1" dirty="0">
+                <a:solidFill>
+                  <a:srgbClr val="8CC63F"/>
+                </a:solidFill>
+                <a:latin typeface="Malgun Gothic" pitchFamily="34" charset="0"/>
+                <a:ea typeface="Malgun Gothic" pitchFamily="34" charset="-122"/>
+                <a:cs typeface="Malgun Gothic" pitchFamily="34" charset="-120"/>
+              </a:rPr>
+              <a:t>기억할 것</a:t>
+            </a:r>
+            <a:endParaRPr lang="en-US" sz="2000" dirty="0"/>
+          </a:p>
+        </p:txBody>
+      </p:sp>
+      <p:sp>
+        <p:nvSpPr>
+          <p:cNvPr id="6" name="Text 4"/>
+          <p:cNvSpPr/>
+          <p:nvPr/>
+        </p:nvSpPr>
+        <p:spPr>
+          <a:xfrm>
+            <a:off x="822960" y="2423160"/>
+            <a:ext cx="4800600" cy="3108960"/>
+          </a:xfrm>
+          <a:prstGeom prst="rect">
+            <a:avLst/>
+          </a:prstGeom>
+          <a:noFill/>
+          <a:ln/>
+        </p:spPr>
+        <p:txBody>
+          <a:bodyPr wrap="square" lIns="0" tIns="0" rIns="0" bIns="0" rtlCol="0" anchor="t"/>
+          <a:lstStyle/>
+          <a:p>
+            <a:pPr marL="342900" indent="-342900">
+              <a:spcAft>
+                <a:spcPts val="1200"/>
+              </a:spcAft>
+              <a:buSzPct val="100000"/>
+              <a:buChar char="✓"/>
+            </a:pPr>
+            <a:r>
+              <a:rPr lang="en-US" sz="1550" dirty="0">
+                <a:solidFill>
+                  <a:srgbClr val="E8EDF2"/>
+                </a:solidFill>
+                <a:latin typeface="Malgun Gothic" pitchFamily="34" charset="0"/>
+                <a:ea typeface="Malgun Gothic" pitchFamily="34" charset="-122"/>
+                <a:cs typeface="Malgun Gothic" pitchFamily="34" charset="-120"/>
+              </a:rPr>
+              <a:t>Malloc(할당)·Memset(초기화)·Memcpy(복사)</a:t>
+            </a:r>
+            <a:endParaRPr lang="en-US" sz="1550" dirty="0"/>
+          </a:p>
+          <a:p>
+            <a:pPr marL="342900" indent="-342900">
+              <a:spcAft>
+                <a:spcPts val="1200"/>
+              </a:spcAft>
+              <a:buSzPct val="100000"/>
+              <a:buChar char="✓"/>
+            </a:pPr>
+            <a:r>
+              <a:rPr lang="en-US" sz="1550" dirty="0">
+                <a:solidFill>
+                  <a:srgbClr val="E8EDF2"/>
+                </a:solidFill>
+                <a:latin typeface="Malgun Gothic" pitchFamily="34" charset="0"/>
+                <a:ea typeface="Malgun Gothic" pitchFamily="34" charset="-122"/>
+                <a:cs typeface="Malgun Gothic" pitchFamily="34" charset="-120"/>
+              </a:rPr>
+              <a:t>Memcpy 방향: DeviceToHost = GPU→CPU</a:t>
+            </a:r>
+            <a:endParaRPr lang="en-US" sz="1550" dirty="0"/>
+          </a:p>
+          <a:p>
+            <a:pPr marL="342900" indent="-342900">
+              <a:spcAft>
+                <a:spcPts val="1200"/>
+              </a:spcAft>
+              <a:buSzPct val="100000"/>
+              <a:buChar char="✓"/>
+            </a:pPr>
+            <a:r>
+              <a:rPr lang="en-US" sz="1550" dirty="0">
+                <a:solidFill>
+                  <a:srgbClr val="E8EDF2"/>
+                </a:solidFill>
+                <a:latin typeface="Malgun Gothic" pitchFamily="34" charset="0"/>
+                <a:ea typeface="Malgun Gothic" pitchFamily="34" charset="-122"/>
+                <a:cs typeface="Malgun Gothic" pitchFamily="34" charset="-120"/>
+              </a:rPr>
+              <a:t>쓰기 커널 종료 = 메모리 반영 보장</a:t>
+            </a:r>
+            <a:endParaRPr lang="en-US" sz="1550" dirty="0"/>
+          </a:p>
+          <a:p>
+            <a:pPr marL="342900" indent="-342900">
+              <a:buSzPct val="100000"/>
+              <a:buChar char="✓"/>
+            </a:pPr>
+            <a:r>
+              <a:rPr lang="en-US" sz="1550" dirty="0">
+                <a:solidFill>
+                  <a:srgbClr val="E8EDF2"/>
+                </a:solidFill>
+                <a:latin typeface="Malgun Gothic" pitchFamily="34" charset="0"/>
+                <a:ea typeface="Malgun Gothic" pitchFamily="34" charset="-122"/>
+                <a:cs typeface="Malgun Gothic" pitchFamily="34" charset="-120"/>
+              </a:rPr>
+              <a:t>이동 반전: p1 → p2(보수) 양방향 검사</a:t>
+            </a:r>
+            <a:endParaRPr lang="en-US" sz="1550" dirty="0"/>
+          </a:p>
+        </p:txBody>
+      </p:sp>
+      <p:sp>
+        <p:nvSpPr>
+          <p:cNvPr id="7" name="Shape 5"/>
+          <p:cNvSpPr/>
+          <p:nvPr/>
+        </p:nvSpPr>
+        <p:spPr>
+          <a:xfrm>
+            <a:off x="6263640" y="1600200"/>
+            <a:ext cx="5349240" cy="4114800"/>
+          </a:xfrm>
+          <a:prstGeom prst="roundRect">
+            <a:avLst>
+              <a:gd name="adj" fmla="val 1778"/>
+            </a:avLst>
+          </a:prstGeom>
+          <a:solidFill>
+            <a:srgbClr val="1E232C"/>
+          </a:solidFill>
+          <a:ln/>
+        </p:spPr>
+      </p:sp>
+      <p:sp>
+        <p:nvSpPr>
+          <p:cNvPr id="8" name="Text 6"/>
+          <p:cNvSpPr/>
+          <p:nvPr/>
+        </p:nvSpPr>
+        <p:spPr>
+          <a:xfrm>
+            <a:off x="6537960" y="1828800"/>
+            <a:ext cx="4800600" cy="457200"/>
+          </a:xfrm>
+          <a:prstGeom prst="rect">
+            <a:avLst/>
+          </a:prstGeom>
+          <a:noFill/>
+          <a:ln/>
+        </p:spPr>
+        <p:txBody>
+          <a:bodyPr wrap="square" lIns="0" tIns="0" rIns="0" bIns="0" rtlCol="0" anchor="ctr"/>
+          <a:lstStyle/>
+          <a:p>
+            <a:pPr indent="0" marL="0">
+              <a:buNone/>
+            </a:pPr>
+            <a:r>
+              <a:rPr lang="en-US" sz="2000" b="1" dirty="0">
+                <a:solidFill>
+                  <a:srgbClr val="E0A458"/>
+                </a:solidFill>
+                <a:latin typeface="Malgun Gothic" pitchFamily="34" charset="0"/>
+                <a:ea typeface="Malgun Gothic" pitchFamily="34" charset="-122"/>
+                <a:cs typeface="Malgun Gothic" pitchFamily="34" charset="-120"/>
+              </a:rPr>
+              <a:t>입문자 함정</a:t>
+            </a:r>
+            <a:endParaRPr lang="en-US" sz="2000" dirty="0"/>
+          </a:p>
+        </p:txBody>
+      </p:sp>
+      <p:sp>
+        <p:nvSpPr>
+          <p:cNvPr id="9" name="Text 7"/>
+          <p:cNvSpPr/>
+          <p:nvPr/>
+        </p:nvSpPr>
+        <p:spPr>
+          <a:xfrm>
+            <a:off x="6537960" y="2423160"/>
+            <a:ext cx="4800600" cy="3108960"/>
+          </a:xfrm>
+          <a:prstGeom prst="rect">
+            <a:avLst/>
+          </a:prstGeom>
+          <a:noFill/>
+          <a:ln/>
+        </p:spPr>
+        <p:txBody>
+          <a:bodyPr wrap="square" lIns="0" tIns="0" rIns="0" bIns="0" rtlCol="0" anchor="t"/>
+          <a:lstStyle/>
+          <a:p>
+            <a:pPr marL="342900" indent="-342900">
+              <a:spcAft>
+                <a:spcPts val="1200"/>
+              </a:spcAft>
+              <a:buSzPct val="100000"/>
+              <a:buChar char="✗"/>
+            </a:pPr>
+            <a:r>
+              <a:rPr lang="en-US" sz="1550" dirty="0">
+                <a:solidFill>
+                  <a:srgbClr val="E8EDF2"/>
+                </a:solidFill>
+                <a:latin typeface="Malgun Gothic" pitchFamily="34" charset="0"/>
+                <a:ea typeface="Malgun Gothic" pitchFamily="34" charset="-122"/>
+                <a:cs typeface="Malgun Gothic" pitchFamily="34" charset="-120"/>
+              </a:rPr>
+              <a:t>디바이스 포인터를 CPU에서 *ptr로 역참조 → 오류</a:t>
+            </a:r>
+            <a:endParaRPr lang="en-US" sz="1550" dirty="0"/>
+          </a:p>
+          <a:p>
+            <a:pPr marL="342900" indent="-342900">
+              <a:spcAft>
+                <a:spcPts val="1200"/>
+              </a:spcAft>
+              <a:buSzPct val="100000"/>
+              <a:buChar char="✗"/>
+            </a:pPr>
+            <a:r>
+              <a:rPr lang="en-US" sz="1550" dirty="0">
+                <a:solidFill>
+                  <a:srgbClr val="E8EDF2"/>
+                </a:solidFill>
+                <a:latin typeface="Malgun Gothic" pitchFamily="34" charset="0"/>
+                <a:ea typeface="Malgun Gothic" pitchFamily="34" charset="-122"/>
+                <a:cs typeface="Malgun Gothic" pitchFamily="34" charset="-120"/>
+              </a:rPr>
+              <a:t>cudaMemcpy 방향을 반대로 지정 → 값이 안 옴</a:t>
+            </a:r>
+            <a:endParaRPr lang="en-US" sz="1550" dirty="0"/>
+          </a:p>
+          <a:p>
+            <a:pPr marL="342900" indent="-342900">
+              <a:spcAft>
+                <a:spcPts val="1200"/>
+              </a:spcAft>
+              <a:buSzPct val="100000"/>
+              <a:buChar char="✗"/>
+            </a:pPr>
+            <a:r>
+              <a:rPr lang="en-US" sz="1550" dirty="0">
+                <a:solidFill>
+                  <a:srgbClr val="E8EDF2"/>
+                </a:solidFill>
+                <a:latin typeface="Malgun Gothic" pitchFamily="34" charset="0"/>
+                <a:ea typeface="Malgun Gothic" pitchFamily="34" charset="-122"/>
+                <a:cs typeface="Malgun Gothic" pitchFamily="34" charset="-120"/>
+              </a:rPr>
+              <a:t>같은 커널에서 쓰고 바로 읽기 → 반영 전 값 읽음</a:t>
+            </a:r>
+            <a:endParaRPr lang="en-US" sz="1550" dirty="0"/>
+          </a:p>
+          <a:p>
+            <a:pPr marL="342900" indent="-342900">
+              <a:buSzPct val="100000"/>
+              <a:buChar char="✗"/>
+            </a:pPr>
+            <a:r>
+              <a:rPr lang="en-US" sz="1550" dirty="0">
+                <a:solidFill>
+                  <a:srgbClr val="E8EDF2"/>
+                </a:solidFill>
+                <a:latin typeface="Malgun Gothic" pitchFamily="34" charset="0"/>
+                <a:ea typeface="Malgun Gothic" pitchFamily="34" charset="-122"/>
+                <a:cs typeface="Malgun Gothic" pitchFamily="34" charset="-120"/>
+              </a:rPr>
+              <a:t>cudaMalloc에 (void**) 이중 포인터를 안 넘김</a:t>
+            </a:r>
+            <a:endParaRPr lang="en-US" sz="1550" dirty="0"/>
+          </a:p>
+        </p:txBody>
+      </p:sp>
+    </p:spTree>
+  </p:cSld>
+  <p:clrMapOvr>
+    <a:masterClrMapping/>
+  </p:clrMapOvr>
+</p:sld>
+</file>
+
+<file path=ppt/slides/slide16.xml><?xml version="1.0" encoding="utf-8"?>
+<p:sld xmlns:a="http://schemas.openxmlformats.org/drawingml/2006/main" xmlns:r="http://schemas.openxmlformats.org/officeDocument/2006/relationships" xmlns:p="http://schemas.openxmlformats.org/presentationml/2006/main">
+  <p:cSld name="Slide 16">
     <p:bg>
       <p:bgPr>
         <a:solidFill>
